--- a/ppt_work/bios_ai_stage_report_package_20260528/05_BIOS_AI_阶段汇报_瑞士工程风.pptx
+++ b/ppt_work/bios_ai_stage_report_package_20260528/05_BIOS_AI_阶段汇报_瑞士工程风.pptx
@@ -2,24 +2,24 @@
 <file path=ppt/presentation.xml><?xml version="1.0" encoding="utf-8"?>
 <p:presentation xmlns:p="http://schemas.openxmlformats.org/presentationml/2006/main">
   <p:sldMasterIdLst>
-    <p:sldMasterId xmlns:r="http://schemas.openxmlformats.org/officeDocument/2006/relationships" id="2147483648" r:id="R8a3bf6f6500445b2"/>
+    <p:sldMasterId xmlns:r="http://schemas.openxmlformats.org/officeDocument/2006/relationships" id="2147483648" r:id="Ra9bd52ae05014e28"/>
   </p:sldMasterIdLst>
   <p:notesMasterIdLst>
-    <p:notesMasterId xmlns:r="http://schemas.openxmlformats.org/officeDocument/2006/relationships" r:id="R90c7dfb9965c427d"/>
+    <p:notesMasterId xmlns:r="http://schemas.openxmlformats.org/officeDocument/2006/relationships" r:id="Re800e32c9e014e01"/>
   </p:notesMasterIdLst>
   <p:sldIdLst>
-    <p:sldId xmlns:r="http://schemas.openxmlformats.org/officeDocument/2006/relationships" id="256" r:id="R8788533c7e64498c"/>
-    <p:sldId xmlns:r="http://schemas.openxmlformats.org/officeDocument/2006/relationships" id="257" r:id="R30ae6a74e58b4f15"/>
-    <p:sldId xmlns:r="http://schemas.openxmlformats.org/officeDocument/2006/relationships" id="258" r:id="R79c31758d2094d6c"/>
-    <p:sldId xmlns:r="http://schemas.openxmlformats.org/officeDocument/2006/relationships" id="259" r:id="R111a861007744b49"/>
-    <p:sldId xmlns:r="http://schemas.openxmlformats.org/officeDocument/2006/relationships" id="260" r:id="R48fc427c1f7246f3"/>
-    <p:sldId xmlns:r="http://schemas.openxmlformats.org/officeDocument/2006/relationships" id="261" r:id="R54d870b05d7343e6"/>
-    <p:sldId xmlns:r="http://schemas.openxmlformats.org/officeDocument/2006/relationships" id="262" r:id="Rbf3e02e394624531"/>
-    <p:sldId xmlns:r="http://schemas.openxmlformats.org/officeDocument/2006/relationships" id="263" r:id="R3584376cd5664c15"/>
-    <p:sldId xmlns:r="http://schemas.openxmlformats.org/officeDocument/2006/relationships" id="264" r:id="R0fbd47de7d944bcf"/>
-    <p:sldId xmlns:r="http://schemas.openxmlformats.org/officeDocument/2006/relationships" id="265" r:id="R497c8039d4e84b53"/>
-    <p:sldId xmlns:r="http://schemas.openxmlformats.org/officeDocument/2006/relationships" id="266" r:id="R67b9dd479bd8441f"/>
-    <p:sldId xmlns:r="http://schemas.openxmlformats.org/officeDocument/2006/relationships" id="267" r:id="Re66955e4f5194cb1"/>
+    <p:sldId xmlns:r="http://schemas.openxmlformats.org/officeDocument/2006/relationships" id="256" r:id="Rf9f57ef34758479a"/>
+    <p:sldId xmlns:r="http://schemas.openxmlformats.org/officeDocument/2006/relationships" id="257" r:id="R2b1e4a32ebf54187"/>
+    <p:sldId xmlns:r="http://schemas.openxmlformats.org/officeDocument/2006/relationships" id="258" r:id="R29d2984245ad4e14"/>
+    <p:sldId xmlns:r="http://schemas.openxmlformats.org/officeDocument/2006/relationships" id="259" r:id="R2bd9fa72cffc4f07"/>
+    <p:sldId xmlns:r="http://schemas.openxmlformats.org/officeDocument/2006/relationships" id="260" r:id="Rb4fe0576500f46bd"/>
+    <p:sldId xmlns:r="http://schemas.openxmlformats.org/officeDocument/2006/relationships" id="261" r:id="R5903e3fbdbc04dfe"/>
+    <p:sldId xmlns:r="http://schemas.openxmlformats.org/officeDocument/2006/relationships" id="262" r:id="R8bdbecaf2d5d42a3"/>
+    <p:sldId xmlns:r="http://schemas.openxmlformats.org/officeDocument/2006/relationships" id="263" r:id="R2a4d58637dd94269"/>
+    <p:sldId xmlns:r="http://schemas.openxmlformats.org/officeDocument/2006/relationships" id="264" r:id="Rfb0a3b8ec1fa4ca9"/>
+    <p:sldId xmlns:r="http://schemas.openxmlformats.org/officeDocument/2006/relationships" id="265" r:id="R314eccfcf752449b"/>
+    <p:sldId xmlns:r="http://schemas.openxmlformats.org/officeDocument/2006/relationships" id="266" r:id="Rf514b0f9b00d4700"/>
+    <p:sldId xmlns:r="http://schemas.openxmlformats.org/officeDocument/2006/relationships" id="267" r:id="R49bc9948f34a4911"/>
   </p:sldIdLst>
   <p:sldSz cx="12192000" cy="6858000"/>
   <p:notesSz cx="6858000" cy="9144000"/>
@@ -1292,7 +1292,7 @@
   </p:cSld>
   <p:clrMap bg1="lt1" tx1="dk1" bg2="lt2" tx2="dk2" accent1="accent1" accent2="accent2" accent3="accent3" accent4="accent4" accent5="accent5" accent6="accent6" hlink="hlink" folHlink="folHlink"/>
   <p:sldLayoutIdLst>
-    <p:sldLayoutId xmlns:r="http://schemas.openxmlformats.org/officeDocument/2006/relationships" id="2147483649" r:id="R172800377f694cb0"/>
+    <p:sldLayoutId xmlns:r="http://schemas.openxmlformats.org/officeDocument/2006/relationships" id="2147483649" r:id="R7837d89dc2e7497a"/>
   </p:sldLayoutIdLst>
   <p:txStyles>
     <p:titleStyle>
@@ -1598,7 +1598,7 @@
           <p:cNvPr id="1" name="">
             <a:extLst xmlns:a="http://schemas.openxmlformats.org/drawingml/2006/main">
               <a:ext uri="{FF2B5EF4-FFF2-40B4-BE49-F238E27FC236}">
-                <a16:creationId xmlns:a16="http://schemas.microsoft.com/office/drawing/2014/main" id="{59676C0C-62FF-4291-ADC3-BA695B77A33B}"/>
+                <a16:creationId xmlns:a16="http://schemas.microsoft.com/office/drawing/2014/main" id="{D20FB9BB-6DF7-4D4C-ADC8-660D2EA2CD5A}"/>
               </a:ext>
             </a:extLst>
           </p:cNvPr>
@@ -1628,7 +1628,7 @@
           <p:cNvPr id="2" name="">
             <a:extLst xmlns:a="http://schemas.openxmlformats.org/drawingml/2006/main">
               <a:ext uri="{FF2B5EF4-FFF2-40B4-BE49-F238E27FC236}">
-                <a16:creationId xmlns:a16="http://schemas.microsoft.com/office/drawing/2014/main" id="{B0AAFB01-6C6A-4DD9-997B-27CB6FD77279}"/>
+                <a16:creationId xmlns:a16="http://schemas.microsoft.com/office/drawing/2014/main" id="{C52D5E36-3D30-4E0B-8E69-CF6CC03B00BF}"/>
               </a:ext>
             </a:extLst>
           </p:cNvPr>
@@ -1658,7 +1658,7 @@
           <p:cNvPr id="3" name="">
             <a:extLst xmlns:a="http://schemas.openxmlformats.org/drawingml/2006/main">
               <a:ext uri="{FF2B5EF4-FFF2-40B4-BE49-F238E27FC236}">
-                <a16:creationId xmlns:a16="http://schemas.microsoft.com/office/drawing/2014/main" id="{A4F1FE13-2555-4C96-9418-7DFD120612F8}"/>
+                <a16:creationId xmlns:a16="http://schemas.microsoft.com/office/drawing/2014/main" id="{004D73B7-A567-4F3A-B687-BACCFBDDE85A}"/>
               </a:ext>
             </a:extLst>
           </p:cNvPr>
@@ -1688,7 +1688,7 @@
           <p:cNvPr id="4" name="">
             <a:extLst xmlns:a="http://schemas.openxmlformats.org/drawingml/2006/main">
               <a:ext uri="{FF2B5EF4-FFF2-40B4-BE49-F238E27FC236}">
-                <a16:creationId xmlns:a16="http://schemas.microsoft.com/office/drawing/2014/main" id="{EE3795E6-D985-4FCC-A9F9-B4390FAAAB71}"/>
+                <a16:creationId xmlns:a16="http://schemas.microsoft.com/office/drawing/2014/main" id="{B577BF34-3FB2-4DB0-B56B-1BAD4E0727B6}"/>
               </a:ext>
             </a:extLst>
           </p:cNvPr>
@@ -1744,7 +1744,7 @@
           <p:cNvPr id="5" name="">
             <a:extLst xmlns:a="http://schemas.openxmlformats.org/drawingml/2006/main">
               <a:ext uri="{FF2B5EF4-FFF2-40B4-BE49-F238E27FC236}">
-                <a16:creationId xmlns:a16="http://schemas.microsoft.com/office/drawing/2014/main" id="{D9E4DD63-7B21-44DF-A604-D5FD02381D1E}"/>
+                <a16:creationId xmlns:a16="http://schemas.microsoft.com/office/drawing/2014/main" id="{1DE840AC-A8BB-47EE-9697-A74489306AD2}"/>
               </a:ext>
             </a:extLst>
           </p:cNvPr>
@@ -1800,7 +1800,7 @@
           <p:cNvPr id="6" name="">
             <a:extLst xmlns:a="http://schemas.openxmlformats.org/drawingml/2006/main">
               <a:ext uri="{FF2B5EF4-FFF2-40B4-BE49-F238E27FC236}">
-                <a16:creationId xmlns:a16="http://schemas.microsoft.com/office/drawing/2014/main" id="{927A8541-2DE0-49FE-93BD-AC35BB3211E1}"/>
+                <a16:creationId xmlns:a16="http://schemas.microsoft.com/office/drawing/2014/main" id="{BBA455A6-FBDA-404D-A741-4991D616EDC5}"/>
               </a:ext>
             </a:extLst>
           </p:cNvPr>
@@ -1856,7 +1856,7 @@
           <p:cNvPr id="7" name="">
             <a:extLst xmlns:a="http://schemas.openxmlformats.org/drawingml/2006/main">
               <a:ext uri="{FF2B5EF4-FFF2-40B4-BE49-F238E27FC236}">
-                <a16:creationId xmlns:a16="http://schemas.microsoft.com/office/drawing/2014/main" id="{DC659308-DE69-4623-A833-A827CF9B5D79}"/>
+                <a16:creationId xmlns:a16="http://schemas.microsoft.com/office/drawing/2014/main" id="{4E7B0A90-A4DD-4B4C-822F-3C948905A58A}"/>
               </a:ext>
             </a:extLst>
           </p:cNvPr>
@@ -1886,7 +1886,7 @@
           <p:cNvPr id="8" name="">
             <a:extLst xmlns:a="http://schemas.openxmlformats.org/drawingml/2006/main">
               <a:ext uri="{FF2B5EF4-FFF2-40B4-BE49-F238E27FC236}">
-                <a16:creationId xmlns:a16="http://schemas.microsoft.com/office/drawing/2014/main" id="{E713B83B-0A1A-46EA-9821-136A82EE1FE6}"/>
+                <a16:creationId xmlns:a16="http://schemas.microsoft.com/office/drawing/2014/main" id="{EA122BCB-9049-4161-98CF-92E9C671581D}"/>
               </a:ext>
             </a:extLst>
           </p:cNvPr>
@@ -1916,7 +1916,7 @@
           <p:cNvPr id="9" name="">
             <a:extLst xmlns:a="http://schemas.openxmlformats.org/drawingml/2006/main">
               <a:ext uri="{FF2B5EF4-FFF2-40B4-BE49-F238E27FC236}">
-                <a16:creationId xmlns:a16="http://schemas.microsoft.com/office/drawing/2014/main" id="{E006C750-DE02-4D82-A2FA-BC6F35F2ED36}"/>
+                <a16:creationId xmlns:a16="http://schemas.microsoft.com/office/drawing/2014/main" id="{85DCC37D-AB7A-4B23-8608-8188F633C5C6}"/>
               </a:ext>
             </a:extLst>
           </p:cNvPr>
@@ -1972,7 +1972,7 @@
           <p:cNvPr id="10" name="">
             <a:extLst xmlns:a="http://schemas.openxmlformats.org/drawingml/2006/main">
               <a:ext uri="{FF2B5EF4-FFF2-40B4-BE49-F238E27FC236}">
-                <a16:creationId xmlns:a16="http://schemas.microsoft.com/office/drawing/2014/main" id="{BD6C5588-9051-44CB-9E7F-EBCB6FD3F8CA}"/>
+                <a16:creationId xmlns:a16="http://schemas.microsoft.com/office/drawing/2014/main" id="{70096F58-18FC-4318-AD56-C7DD21A11E3E}"/>
               </a:ext>
             </a:extLst>
           </p:cNvPr>
@@ -2028,7 +2028,7 @@
           <p:cNvPr id="11" name="">
             <a:extLst xmlns:a="http://schemas.openxmlformats.org/drawingml/2006/main">
               <a:ext uri="{FF2B5EF4-FFF2-40B4-BE49-F238E27FC236}">
-                <a16:creationId xmlns:a16="http://schemas.microsoft.com/office/drawing/2014/main" id="{959EE01F-3EF0-4FDF-BA9D-6B1740B3BA28}"/>
+                <a16:creationId xmlns:a16="http://schemas.microsoft.com/office/drawing/2014/main" id="{B5C000D4-317E-491D-9F50-1FBAD532EB25}"/>
               </a:ext>
             </a:extLst>
           </p:cNvPr>
@@ -2058,7 +2058,7 @@
           <p:cNvPr id="12" name="">
             <a:extLst xmlns:a="http://schemas.openxmlformats.org/drawingml/2006/main">
               <a:ext uri="{FF2B5EF4-FFF2-40B4-BE49-F238E27FC236}">
-                <a16:creationId xmlns:a16="http://schemas.microsoft.com/office/drawing/2014/main" id="{95DCF89C-E97B-40D6-8E47-F452A0A54559}"/>
+                <a16:creationId xmlns:a16="http://schemas.microsoft.com/office/drawing/2014/main" id="{AB3871A7-C33A-46B0-94A7-7C07BC659541}"/>
               </a:ext>
             </a:extLst>
           </p:cNvPr>
@@ -2114,7 +2114,7 @@
           <p:cNvPr id="13" name="">
             <a:extLst xmlns:a="http://schemas.openxmlformats.org/drawingml/2006/main">
               <a:ext uri="{FF2B5EF4-FFF2-40B4-BE49-F238E27FC236}">
-                <a16:creationId xmlns:a16="http://schemas.microsoft.com/office/drawing/2014/main" id="{840DDF3B-0ECD-4DC0-8397-0900E22365D1}"/>
+                <a16:creationId xmlns:a16="http://schemas.microsoft.com/office/drawing/2014/main" id="{F770186A-8E23-4093-A71A-C821D2D66A57}"/>
               </a:ext>
             </a:extLst>
           </p:cNvPr>
@@ -2170,7 +2170,7 @@
           <p:cNvPr id="14" name="">
             <a:extLst xmlns:a="http://schemas.openxmlformats.org/drawingml/2006/main">
               <a:ext uri="{FF2B5EF4-FFF2-40B4-BE49-F238E27FC236}">
-                <a16:creationId xmlns:a16="http://schemas.microsoft.com/office/drawing/2014/main" id="{79E97752-79EB-43BE-8B7C-F32D221D1D47}"/>
+                <a16:creationId xmlns:a16="http://schemas.microsoft.com/office/drawing/2014/main" id="{3EDB1280-1046-43C3-9FF9-FDDCF1A767D3}"/>
               </a:ext>
             </a:extLst>
           </p:cNvPr>
@@ -2224,7 +2224,7 @@
     </p:spTree>
     <p:extLst>
       <p:ext uri="{BB962C8B-B14F-4D97-AF65-F5344CB8AC3E}">
-        <p14:creationId xmlns:p14="http://schemas.microsoft.com/office/powerpoint/2010/main" val="1680196057"/>
+        <p14:creationId xmlns:p14="http://schemas.microsoft.com/office/powerpoint/2010/main" val="1182961626"/>
       </p:ext>
     </p:extLst>
   </p:cSld>
@@ -2255,7 +2255,7 @@
           <p:cNvPr id="1" name="">
             <a:extLst xmlns:a="http://schemas.openxmlformats.org/drawingml/2006/main">
               <a:ext uri="{FF2B5EF4-FFF2-40B4-BE49-F238E27FC236}">
-                <a16:creationId xmlns:a16="http://schemas.microsoft.com/office/drawing/2014/main" id="{FB95EE07-025F-4E14-9638-EFB35E40F497}"/>
+                <a16:creationId xmlns:a16="http://schemas.microsoft.com/office/drawing/2014/main" id="{EECADFBA-296D-4E70-9826-9C07AD3C92FD}"/>
               </a:ext>
             </a:extLst>
           </p:cNvPr>
@@ -2285,7 +2285,7 @@
           <p:cNvPr id="2" name="">
             <a:extLst xmlns:a="http://schemas.openxmlformats.org/drawingml/2006/main">
               <a:ext uri="{FF2B5EF4-FFF2-40B4-BE49-F238E27FC236}">
-                <a16:creationId xmlns:a16="http://schemas.microsoft.com/office/drawing/2014/main" id="{6D246555-3284-45D0-8733-64F44DDA21E7}"/>
+                <a16:creationId xmlns:a16="http://schemas.microsoft.com/office/drawing/2014/main" id="{B3452303-8F86-414B-93CC-79BF771DF3B5}"/>
               </a:ext>
             </a:extLst>
           </p:cNvPr>
@@ -2315,7 +2315,7 @@
           <p:cNvPr id="3" name="">
             <a:extLst xmlns:a="http://schemas.openxmlformats.org/drawingml/2006/main">
               <a:ext uri="{FF2B5EF4-FFF2-40B4-BE49-F238E27FC236}">
-                <a16:creationId xmlns:a16="http://schemas.microsoft.com/office/drawing/2014/main" id="{1A20D869-BD4A-47EB-BC8F-B7D1050B8E83}"/>
+                <a16:creationId xmlns:a16="http://schemas.microsoft.com/office/drawing/2014/main" id="{701A0C3A-04ED-43DA-A679-524976EAA7F1}"/>
               </a:ext>
             </a:extLst>
           </p:cNvPr>
@@ -2371,7 +2371,7 @@
           <p:cNvPr id="4" name="">
             <a:extLst xmlns:a="http://schemas.openxmlformats.org/drawingml/2006/main">
               <a:ext uri="{FF2B5EF4-FFF2-40B4-BE49-F238E27FC236}">
-                <a16:creationId xmlns:a16="http://schemas.microsoft.com/office/drawing/2014/main" id="{DD9D5557-F92C-4EAB-9C25-89615D7109AF}"/>
+                <a16:creationId xmlns:a16="http://schemas.microsoft.com/office/drawing/2014/main" id="{D67CE3B9-426A-4A86-B989-EA2755DBC33F}"/>
               </a:ext>
             </a:extLst>
           </p:cNvPr>
@@ -2394,7 +2394,7 @@
         </p:spPr>
         <p:txBody>
           <a:bodyPr xmlns:a="http://schemas.openxmlformats.org/drawingml/2006/main" lIns="0" tIns="0" rIns="0" bIns="0" anchor="t">
-            <a:normAutofit fontScale="100000"/>
+            <a:normAutofit fontScale="96354"/>
           </a:bodyPr>
           <a:lstStyle xmlns:a="http://schemas.openxmlformats.org/drawingml/2006/main"/>
           <a:p xmlns:a="http://schemas.openxmlformats.org/drawingml/2006/main">
@@ -2417,7 +2417,7 @@
                 <a:ea typeface="PingFang SC"/>
                 <a:cs typeface="PingFang SC"/>
               </a:rPr>
-              <a:t>AI Review 从“结果展示”升级为“过程可回溯的风险处置”</a:t>
+              <a:t>AI Review 新增上下文完整性检查，降低模型只看局部 diff 的漏判风险</a:t>
             </a:r>
           </a:p>
         </p:txBody>
@@ -2427,7 +2427,7 @@
           <p:cNvPr id="5" name="">
             <a:extLst xmlns:a="http://schemas.openxmlformats.org/drawingml/2006/main">
               <a:ext uri="{FF2B5EF4-FFF2-40B4-BE49-F238E27FC236}">
-                <a16:creationId xmlns:a16="http://schemas.microsoft.com/office/drawing/2014/main" id="{8EAEC38E-5DE2-4D40-8852-832CC3410C6B}"/>
+                <a16:creationId xmlns:a16="http://schemas.microsoft.com/office/drawing/2014/main" id="{2A537595-9C2C-4E14-B0AD-48E5493998B4}"/>
               </a:ext>
             </a:extLst>
           </p:cNvPr>
@@ -2457,7 +2457,7 @@
           <p:cNvPr id="6" name="">
             <a:extLst xmlns:a="http://schemas.openxmlformats.org/drawingml/2006/main">
               <a:ext uri="{FF2B5EF4-FFF2-40B4-BE49-F238E27FC236}">
-                <a16:creationId xmlns:a16="http://schemas.microsoft.com/office/drawing/2014/main" id="{5DF3EBB4-9A78-4DCA-A3AD-99C619F6F71F}"/>
+                <a16:creationId xmlns:a16="http://schemas.microsoft.com/office/drawing/2014/main" id="{CB91EB09-84C7-4796-818E-0820A8AAD9A4}"/>
               </a:ext>
             </a:extLst>
           </p:cNvPr>
@@ -2513,18 +2513,18 @@
           <p:cNvPr id="7" name="">
             <a:extLst xmlns:a="http://schemas.openxmlformats.org/drawingml/2006/main">
               <a:ext uri="{FF2B5EF4-FFF2-40B4-BE49-F238E27FC236}">
-                <a16:creationId xmlns:a16="http://schemas.microsoft.com/office/drawing/2014/main" id="{EC831812-FE38-44D3-B53B-9A38BDC900C4}"/>
-              </a:ext>
-            </a:extLst>
-          </p:cNvPr>
-          <p:cNvSpPr>
-            <a:spLocks xmlns:a="http://schemas.openxmlformats.org/drawingml/2006/main" noGrp="1"/>
-          </p:cNvSpPr>
-          <p:nvPr/>
-        </p:nvSpPr>
-        <p:spPr>
-          <a:xfrm xmlns:a="http://schemas.openxmlformats.org/drawingml/2006/main">
-            <a:off x="781050" y="2000250"/>
+                <a16:creationId xmlns:a16="http://schemas.microsoft.com/office/drawing/2014/main" id="{CB142CE7-F656-4CCC-8DF9-024B2C80C5B2}"/>
+              </a:ext>
+            </a:extLst>
+          </p:cNvPr>
+          <p:cNvSpPr>
+            <a:spLocks xmlns:a="http://schemas.openxmlformats.org/drawingml/2006/main" noGrp="1"/>
+          </p:cNvSpPr>
+          <p:nvPr/>
+        </p:nvSpPr>
+        <p:spPr>
+          <a:xfrm xmlns:a="http://schemas.openxmlformats.org/drawingml/2006/main">
+            <a:off x="685800" y="1943100"/>
             <a:ext cx="66675" cy="228600"/>
           </a:xfrm>
           <a:prstGeom xmlns:a="http://schemas.openxmlformats.org/drawingml/2006/main" prst="rect">
@@ -2543,18 +2543,18 @@
           <p:cNvPr id="8" name="">
             <a:extLst xmlns:a="http://schemas.openxmlformats.org/drawingml/2006/main">
               <a:ext uri="{FF2B5EF4-FFF2-40B4-BE49-F238E27FC236}">
-                <a16:creationId xmlns:a16="http://schemas.microsoft.com/office/drawing/2014/main" id="{EBBA531E-6F14-40E6-B507-50C2165BAC18}"/>
-              </a:ext>
-            </a:extLst>
-          </p:cNvPr>
-          <p:cNvSpPr>
-            <a:spLocks xmlns:a="http://schemas.openxmlformats.org/drawingml/2006/main" noGrp="1"/>
-          </p:cNvSpPr>
-          <p:nvPr/>
-        </p:nvSpPr>
-        <p:spPr>
-          <a:xfrm xmlns:a="http://schemas.openxmlformats.org/drawingml/2006/main">
-            <a:off x="914400" y="2009775"/>
+                <a16:creationId xmlns:a16="http://schemas.microsoft.com/office/drawing/2014/main" id="{152357E0-88BC-4844-9050-F0AA4F174A82}"/>
+              </a:ext>
+            </a:extLst>
+          </p:cNvPr>
+          <p:cNvSpPr>
+            <a:spLocks xmlns:a="http://schemas.openxmlformats.org/drawingml/2006/main" noGrp="1"/>
+          </p:cNvSpPr>
+          <p:nvPr/>
+        </p:nvSpPr>
+        <p:spPr>
+          <a:xfrm xmlns:a="http://schemas.openxmlformats.org/drawingml/2006/main">
+            <a:off x="819150" y="1952625"/>
             <a:ext cx="2476500" cy="228600"/>
           </a:xfrm>
           <a:prstGeom xmlns:a="http://schemas.openxmlformats.org/drawingml/2006/main" prst="rect">
@@ -2589,7 +2589,7 @@
                 <a:ea typeface="PingFang SC"/>
                 <a:cs typeface="PingFang SC"/>
               </a:rPr>
-              <a:t>旧链路</a:t>
+              <a:t>旧方式</a:t>
             </a:r>
           </a:p>
         </p:txBody>
@@ -2599,23 +2599,23 @@
           <p:cNvPr id="9" name="">
             <a:extLst xmlns:a="http://schemas.openxmlformats.org/drawingml/2006/main">
               <a:ext uri="{FF2B5EF4-FFF2-40B4-BE49-F238E27FC236}">
-                <a16:creationId xmlns:a16="http://schemas.microsoft.com/office/drawing/2014/main" id="{EBFE2756-1AEF-46FB-9C3A-776A2B2B5621}"/>
-              </a:ext>
-            </a:extLst>
-          </p:cNvPr>
-          <p:cNvSpPr>
-            <a:spLocks xmlns:a="http://schemas.openxmlformats.org/drawingml/2006/main" noGrp="1"/>
-          </p:cNvSpPr>
-          <p:nvPr/>
-        </p:nvSpPr>
-        <p:spPr>
-          <a:xfrm xmlns:a="http://schemas.openxmlformats.org/drawingml/2006/main">
-            <a:off x="819150" y="2476500"/>
-            <a:ext cx="1123950" cy="666750"/>
+                <a16:creationId xmlns:a16="http://schemas.microsoft.com/office/drawing/2014/main" id="{3478184F-20EA-4103-AE77-1D18C915F41B}"/>
+              </a:ext>
+            </a:extLst>
+          </p:cNvPr>
+          <p:cNvSpPr>
+            <a:spLocks xmlns:a="http://schemas.openxmlformats.org/drawingml/2006/main" noGrp="1"/>
+          </p:cNvSpPr>
+          <p:nvPr/>
+        </p:nvSpPr>
+        <p:spPr>
+          <a:xfrm xmlns:a="http://schemas.openxmlformats.org/drawingml/2006/main">
+            <a:off x="685800" y="2324100"/>
+            <a:ext cx="2247900" cy="1200150"/>
           </a:xfrm>
           <a:prstGeom xmlns:a="http://schemas.openxmlformats.org/drawingml/2006/main" prst="roundRect">
             <a:avLst>
-              <a:gd name="adj" fmla="val 2857"/>
+              <a:gd name="adj" fmla="val 1587"/>
             </a:avLst>
           </a:prstGeom>
           <a:solidFill xmlns:a="http://schemas.openxmlformats.org/drawingml/2006/main">
@@ -2633,75 +2633,19 @@
           <p:cNvPr id="10" name="">
             <a:extLst xmlns:a="http://schemas.openxmlformats.org/drawingml/2006/main">
               <a:ext uri="{FF2B5EF4-FFF2-40B4-BE49-F238E27FC236}">
-                <a16:creationId xmlns:a16="http://schemas.microsoft.com/office/drawing/2014/main" id="{473B1635-A935-40B5-8A7D-83D0E3812208}"/>
-              </a:ext>
-            </a:extLst>
-          </p:cNvPr>
-          <p:cNvSpPr>
-            <a:spLocks xmlns:a="http://schemas.openxmlformats.org/drawingml/2006/main" noGrp="1"/>
-          </p:cNvSpPr>
-          <p:nvPr/>
-        </p:nvSpPr>
-        <p:spPr>
-          <a:xfrm xmlns:a="http://schemas.openxmlformats.org/drawingml/2006/main">
-            <a:off x="933450" y="2590800"/>
-            <a:ext cx="895350" cy="438150"/>
-          </a:xfrm>
-          <a:prstGeom xmlns:a="http://schemas.openxmlformats.org/drawingml/2006/main" prst="rect">
-            <a:avLst/>
-          </a:prstGeom>
-          <a:ln xmlns:a="http://schemas.openxmlformats.org/drawingml/2006/main">
-            <a:noFill/>
-          </a:ln>
-        </p:spPr>
-        <p:txBody>
-          <a:bodyPr xmlns:a="http://schemas.openxmlformats.org/drawingml/2006/main" lIns="0" tIns="0" rIns="0" bIns="0" anchor="ctr">
-            <a:normAutofit fontScale="100000"/>
-          </a:bodyPr>
-          <a:lstStyle xmlns:a="http://schemas.openxmlformats.org/drawingml/2006/main"/>
-          <a:p xmlns:a="http://schemas.openxmlformats.org/drawingml/2006/main">
-            <a:pPr algn="ctr">
-              <a:defRPr sz="1200" b="1">
-                <a:solidFill>
-                  <a:srgbClr val="111827"/>
-                </a:solidFill>
-                <a:latin typeface="PingFang SC"/>
-                <a:ea typeface="PingFang SC"/>
-                <a:cs typeface="PingFang SC"/>
-              </a:defRPr>
-            </a:pPr>
-            <a:r>
-              <a:rPr sz="1200" b="1">
-                <a:solidFill>
-                  <a:srgbClr val="111827"/>
-                </a:solidFill>
-                <a:latin typeface="PingFang SC"/>
-                <a:ea typeface="PingFang SC"/>
-                <a:cs typeface="PingFang SC"/>
-              </a:rPr>
-              <a:t>触发审查</a:t>
-            </a:r>
-          </a:p>
-        </p:txBody>
-      </p:sp>
-      <p:sp>
-        <p:nvSpPr>
-          <p:cNvPr id="11" name="">
-            <a:extLst xmlns:a="http://schemas.openxmlformats.org/drawingml/2006/main">
-              <a:ext uri="{FF2B5EF4-FFF2-40B4-BE49-F238E27FC236}">
-                <a16:creationId xmlns:a16="http://schemas.microsoft.com/office/drawing/2014/main" id="{D2937797-2BA3-4F7F-932A-B9E0479E0F08}"/>
-              </a:ext>
-            </a:extLst>
-          </p:cNvPr>
-          <p:cNvSpPr>
-            <a:spLocks xmlns:a="http://schemas.openxmlformats.org/drawingml/2006/main" noGrp="1"/>
-          </p:cNvSpPr>
-          <p:nvPr/>
-        </p:nvSpPr>
-        <p:spPr>
-          <a:xfrm xmlns:a="http://schemas.openxmlformats.org/drawingml/2006/main">
-            <a:off x="2019300" y="2667000"/>
-            <a:ext cx="247650" cy="285750"/>
+                <a16:creationId xmlns:a16="http://schemas.microsoft.com/office/drawing/2014/main" id="{9AF32516-EB90-4D75-86BC-3BB008F89E4B}"/>
+              </a:ext>
+            </a:extLst>
+          </p:cNvPr>
+          <p:cNvSpPr>
+            <a:spLocks xmlns:a="http://schemas.openxmlformats.org/drawingml/2006/main" noGrp="1"/>
+          </p:cNvSpPr>
+          <p:nvPr/>
+        </p:nvSpPr>
+        <p:spPr>
+          <a:xfrm xmlns:a="http://schemas.openxmlformats.org/drawingml/2006/main">
+            <a:off x="952500" y="2552700"/>
+            <a:ext cx="1619250" cy="247650"/>
           </a:xfrm>
           <a:prstGeom xmlns:a="http://schemas.openxmlformats.org/drawingml/2006/main" prst="rect">
             <a:avLst/>
@@ -2716,26 +2660,82 @@
           </a:bodyPr>
           <a:lstStyle xmlns:a="http://schemas.openxmlformats.org/drawingml/2006/main"/>
           <a:p xmlns:a="http://schemas.openxmlformats.org/drawingml/2006/main">
-            <a:pPr algn="ctr">
-              <a:defRPr sz="1800" b="1">
-                <a:solidFill>
-                  <a:srgbClr val="145CFF"/>
-                </a:solidFill>
-                <a:latin typeface="PingFang SC"/>
-                <a:ea typeface="PingFang SC"/>
-                <a:cs typeface="PingFang SC"/>
-              </a:defRPr>
-            </a:pPr>
-            <a:r>
-              <a:rPr sz="1800" b="1">
-                <a:solidFill>
-                  <a:srgbClr val="145CFF"/>
-                </a:solidFill>
-                <a:latin typeface="PingFang SC"/>
-                <a:ea typeface="PingFang SC"/>
-                <a:cs typeface="PingFang SC"/>
-              </a:rPr>
-              <a:t>→</a:t>
+            <a:pPr algn="l">
+              <a:defRPr sz="1500" b="1">
+                <a:solidFill>
+                  <a:srgbClr val="111827"/>
+                </a:solidFill>
+                <a:latin typeface="PingFang SC"/>
+                <a:ea typeface="PingFang SC"/>
+                <a:cs typeface="PingFang SC"/>
+              </a:defRPr>
+            </a:pPr>
+            <a:r>
+              <a:rPr sz="1500" b="1">
+                <a:solidFill>
+                  <a:srgbClr val="111827"/>
+                </a:solidFill>
+                <a:latin typeface="PingFang SC"/>
+                <a:ea typeface="PingFang SC"/>
+                <a:cs typeface="PingFang SC"/>
+              </a:rPr>
+              <a:t>diff + 固定规则</a:t>
+            </a:r>
+          </a:p>
+        </p:txBody>
+      </p:sp>
+      <p:sp>
+        <p:nvSpPr>
+          <p:cNvPr id="11" name="">
+            <a:extLst xmlns:a="http://schemas.openxmlformats.org/drawingml/2006/main">
+              <a:ext uri="{FF2B5EF4-FFF2-40B4-BE49-F238E27FC236}">
+                <a16:creationId xmlns:a16="http://schemas.microsoft.com/office/drawing/2014/main" id="{05BE1AF6-CDEB-420E-B56B-879E91F12D4E}"/>
+              </a:ext>
+            </a:extLst>
+          </p:cNvPr>
+          <p:cNvSpPr>
+            <a:spLocks xmlns:a="http://schemas.openxmlformats.org/drawingml/2006/main" noGrp="1"/>
+          </p:cNvSpPr>
+          <p:nvPr/>
+        </p:nvSpPr>
+        <p:spPr>
+          <a:xfrm xmlns:a="http://schemas.openxmlformats.org/drawingml/2006/main">
+            <a:off x="952500" y="2952750"/>
+            <a:ext cx="1581150" cy="400050"/>
+          </a:xfrm>
+          <a:prstGeom xmlns:a="http://schemas.openxmlformats.org/drawingml/2006/main" prst="rect">
+            <a:avLst/>
+          </a:prstGeom>
+          <a:ln xmlns:a="http://schemas.openxmlformats.org/drawingml/2006/main">
+            <a:noFill/>
+          </a:ln>
+        </p:spPr>
+        <p:txBody>
+          <a:bodyPr xmlns:a="http://schemas.openxmlformats.org/drawingml/2006/main" lIns="0" tIns="0" rIns="0" bIns="0" anchor="t">
+            <a:normAutofit fontScale="91196"/>
+          </a:bodyPr>
+          <a:lstStyle xmlns:a="http://schemas.openxmlformats.org/drawingml/2006/main"/>
+          <a:p xmlns:a="http://schemas.openxmlformats.org/drawingml/2006/main">
+            <a:pPr algn="l">
+              <a:defRPr sz="1050" b="0">
+                <a:solidFill>
+                  <a:srgbClr val="273140"/>
+                </a:solidFill>
+                <a:latin typeface="PingFang SC"/>
+                <a:ea typeface="PingFang SC"/>
+                <a:cs typeface="PingFang SC"/>
+              </a:defRPr>
+            </a:pPr>
+            <a:r>
+              <a:rPr sz="1050" b="0">
+                <a:solidFill>
+                  <a:srgbClr val="273140"/>
+                </a:solidFill>
+                <a:latin typeface="PingFang SC"/>
+                <a:ea typeface="PingFang SC"/>
+                <a:cs typeface="PingFang SC"/>
+              </a:rPr>
+              <a:t>评论较少时，不容易判断是没有风险，还是上下文不够。</a:t>
             </a:r>
           </a:p>
         </p:txBody>
@@ -2745,19 +2745,105 @@
           <p:cNvPr id="12" name="">
             <a:extLst xmlns:a="http://schemas.openxmlformats.org/drawingml/2006/main">
               <a:ext uri="{FF2B5EF4-FFF2-40B4-BE49-F238E27FC236}">
-                <a16:creationId xmlns:a16="http://schemas.microsoft.com/office/drawing/2014/main" id="{D5F02A03-E50A-4E5B-A785-05D276958294}"/>
-              </a:ext>
-            </a:extLst>
-          </p:cNvPr>
-          <p:cNvSpPr>
-            <a:spLocks xmlns:a="http://schemas.openxmlformats.org/drawingml/2006/main" noGrp="1"/>
-          </p:cNvSpPr>
-          <p:nvPr/>
-        </p:nvSpPr>
-        <p:spPr>
-          <a:xfrm xmlns:a="http://schemas.openxmlformats.org/drawingml/2006/main">
-            <a:off x="2362200" y="2476500"/>
-            <a:ext cx="1257300" cy="666750"/>
+                <a16:creationId xmlns:a16="http://schemas.microsoft.com/office/drawing/2014/main" id="{FFDE5C36-7931-4496-A435-CD5172E0011E}"/>
+              </a:ext>
+            </a:extLst>
+          </p:cNvPr>
+          <p:cNvSpPr>
+            <a:spLocks xmlns:a="http://schemas.openxmlformats.org/drawingml/2006/main" noGrp="1"/>
+          </p:cNvSpPr>
+          <p:nvPr/>
+        </p:nvSpPr>
+        <p:spPr>
+          <a:xfrm xmlns:a="http://schemas.openxmlformats.org/drawingml/2006/main">
+            <a:off x="685800" y="3867150"/>
+            <a:ext cx="66675" cy="228600"/>
+          </a:xfrm>
+          <a:prstGeom xmlns:a="http://schemas.openxmlformats.org/drawingml/2006/main" prst="rect">
+            <a:avLst/>
+          </a:prstGeom>
+          <a:solidFill xmlns:a="http://schemas.openxmlformats.org/drawingml/2006/main">
+            <a:srgbClr val="145CFF"/>
+          </a:solidFill>
+          <a:ln xmlns:a="http://schemas.openxmlformats.org/drawingml/2006/main">
+            <a:noFill/>
+          </a:ln>
+        </p:spPr>
+      </p:sp>
+      <p:sp>
+        <p:nvSpPr>
+          <p:cNvPr id="13" name="">
+            <a:extLst xmlns:a="http://schemas.openxmlformats.org/drawingml/2006/main">
+              <a:ext uri="{FF2B5EF4-FFF2-40B4-BE49-F238E27FC236}">
+                <a16:creationId xmlns:a16="http://schemas.microsoft.com/office/drawing/2014/main" id="{C15253FB-BE76-4DC2-AA40-65C89DEF19CA}"/>
+              </a:ext>
+            </a:extLst>
+          </p:cNvPr>
+          <p:cNvSpPr>
+            <a:spLocks xmlns:a="http://schemas.openxmlformats.org/drawingml/2006/main" noGrp="1"/>
+          </p:cNvSpPr>
+          <p:nvPr/>
+        </p:nvSpPr>
+        <p:spPr>
+          <a:xfrm xmlns:a="http://schemas.openxmlformats.org/drawingml/2006/main">
+            <a:off x="819150" y="3876675"/>
+            <a:ext cx="2476500" cy="228600"/>
+          </a:xfrm>
+          <a:prstGeom xmlns:a="http://schemas.openxmlformats.org/drawingml/2006/main" prst="rect">
+            <a:avLst/>
+          </a:prstGeom>
+          <a:ln xmlns:a="http://schemas.openxmlformats.org/drawingml/2006/main">
+            <a:noFill/>
+          </a:ln>
+        </p:spPr>
+        <p:txBody>
+          <a:bodyPr xmlns:a="http://schemas.openxmlformats.org/drawingml/2006/main" lIns="0" tIns="0" rIns="0" bIns="0" anchor="t">
+            <a:normAutofit fontScale="100000"/>
+          </a:bodyPr>
+          <a:lstStyle xmlns:a="http://schemas.openxmlformats.org/drawingml/2006/main"/>
+          <a:p xmlns:a="http://schemas.openxmlformats.org/drawingml/2006/main">
+            <a:pPr algn="l">
+              <a:defRPr sz="1275" b="1">
+                <a:solidFill>
+                  <a:srgbClr val="111827"/>
+                </a:solidFill>
+                <a:latin typeface="PingFang SC"/>
+                <a:ea typeface="PingFang SC"/>
+                <a:cs typeface="PingFang SC"/>
+              </a:defRPr>
+            </a:pPr>
+            <a:r>
+              <a:rPr sz="1275" b="1">
+                <a:solidFill>
+                  <a:srgbClr val="111827"/>
+                </a:solidFill>
+                <a:latin typeface="PingFang SC"/>
+                <a:ea typeface="PingFang SC"/>
+                <a:cs typeface="PingFang SC"/>
+              </a:rPr>
+              <a:t>当前方式</a:t>
+            </a:r>
+          </a:p>
+        </p:txBody>
+      </p:sp>
+      <p:sp>
+        <p:nvSpPr>
+          <p:cNvPr id="14" name="">
+            <a:extLst xmlns:a="http://schemas.openxmlformats.org/drawingml/2006/main">
+              <a:ext uri="{FF2B5EF4-FFF2-40B4-BE49-F238E27FC236}">
+                <a16:creationId xmlns:a16="http://schemas.microsoft.com/office/drawing/2014/main" id="{1D045320-137C-42D1-836B-70273C0489A2}"/>
+              </a:ext>
+            </a:extLst>
+          </p:cNvPr>
+          <p:cNvSpPr>
+            <a:spLocks xmlns:a="http://schemas.openxmlformats.org/drawingml/2006/main" noGrp="1"/>
+          </p:cNvSpPr>
+          <p:nvPr/>
+        </p:nvSpPr>
+        <p:spPr>
+          <a:xfrm xmlns:a="http://schemas.openxmlformats.org/drawingml/2006/main">
+            <a:off x="685800" y="4248150"/>
+            <a:ext cx="704850" cy="666750"/>
           </a:xfrm>
           <a:prstGeom xmlns:a="http://schemas.openxmlformats.org/drawingml/2006/main" prst="roundRect">
             <a:avLst>
@@ -2776,22 +2862,22 @@
       </p:sp>
       <p:sp>
         <p:nvSpPr>
-          <p:cNvPr id="13" name="">
-            <a:extLst xmlns:a="http://schemas.openxmlformats.org/drawingml/2006/main">
-              <a:ext uri="{FF2B5EF4-FFF2-40B4-BE49-F238E27FC236}">
-                <a16:creationId xmlns:a16="http://schemas.microsoft.com/office/drawing/2014/main" id="{607EEB2A-83D7-4D88-9119-1169E74470EA}"/>
-              </a:ext>
-            </a:extLst>
-          </p:cNvPr>
-          <p:cNvSpPr>
-            <a:spLocks xmlns:a="http://schemas.openxmlformats.org/drawingml/2006/main" noGrp="1"/>
-          </p:cNvSpPr>
-          <p:nvPr/>
-        </p:nvSpPr>
-        <p:spPr>
-          <a:xfrm xmlns:a="http://schemas.openxmlformats.org/drawingml/2006/main">
-            <a:off x="2476500" y="2590800"/>
-            <a:ext cx="1028700" cy="438150"/>
+          <p:cNvPr id="15" name="">
+            <a:extLst xmlns:a="http://schemas.openxmlformats.org/drawingml/2006/main">
+              <a:ext uri="{FF2B5EF4-FFF2-40B4-BE49-F238E27FC236}">
+                <a16:creationId xmlns:a16="http://schemas.microsoft.com/office/drawing/2014/main" id="{E3043D72-2CA1-4A33-98D6-B290E3FEB858}"/>
+              </a:ext>
+            </a:extLst>
+          </p:cNvPr>
+          <p:cNvSpPr>
+            <a:spLocks xmlns:a="http://schemas.openxmlformats.org/drawingml/2006/main" noGrp="1"/>
+          </p:cNvSpPr>
+          <p:nvPr/>
+        </p:nvSpPr>
+        <p:spPr>
+          <a:xfrm xmlns:a="http://schemas.openxmlformats.org/drawingml/2006/main">
+            <a:off x="800100" y="4362450"/>
+            <a:ext cx="476250" cy="438150"/>
           </a:xfrm>
           <a:prstGeom xmlns:a="http://schemas.openxmlformats.org/drawingml/2006/main" prst="rect">
             <a:avLst/>
@@ -2825,29 +2911,29 @@
                 <a:ea typeface="PingFang SC"/>
                 <a:cs typeface="PingFang SC"/>
               </a:rPr>
-              <a:t>AI 输出结果</a:t>
-            </a:r>
-          </a:p>
-        </p:txBody>
-      </p:sp>
-      <p:sp>
-        <p:nvSpPr>
-          <p:cNvPr id="14" name="">
-            <a:extLst xmlns:a="http://schemas.openxmlformats.org/drawingml/2006/main">
-              <a:ext uri="{FF2B5EF4-FFF2-40B4-BE49-F238E27FC236}">
-                <a16:creationId xmlns:a16="http://schemas.microsoft.com/office/drawing/2014/main" id="{D7414662-9C5A-4DD0-A63C-7B38A2CCD082}"/>
-              </a:ext>
-            </a:extLst>
-          </p:cNvPr>
-          <p:cNvSpPr>
-            <a:spLocks xmlns:a="http://schemas.openxmlformats.org/drawingml/2006/main" noGrp="1"/>
-          </p:cNvSpPr>
-          <p:nvPr/>
-        </p:nvSpPr>
-        <p:spPr>
-          <a:xfrm xmlns:a="http://schemas.openxmlformats.org/drawingml/2006/main">
-            <a:off x="3695700" y="2667000"/>
-            <a:ext cx="247650" cy="285750"/>
+              <a:t>代码变更</a:t>
+            </a:r>
+          </a:p>
+        </p:txBody>
+      </p:sp>
+      <p:sp>
+        <p:nvSpPr>
+          <p:cNvPr id="16" name="">
+            <a:extLst xmlns:a="http://schemas.openxmlformats.org/drawingml/2006/main">
+              <a:ext uri="{FF2B5EF4-FFF2-40B4-BE49-F238E27FC236}">
+                <a16:creationId xmlns:a16="http://schemas.microsoft.com/office/drawing/2014/main" id="{B85CFF44-246C-4FF8-85E7-BFE4E41DCDB5}"/>
+              </a:ext>
+            </a:extLst>
+          </p:cNvPr>
+          <p:cNvSpPr>
+            <a:spLocks xmlns:a="http://schemas.openxmlformats.org/drawingml/2006/main" noGrp="1"/>
+          </p:cNvSpPr>
+          <p:nvPr/>
+        </p:nvSpPr>
+        <p:spPr>
+          <a:xfrm xmlns:a="http://schemas.openxmlformats.org/drawingml/2006/main">
+            <a:off x="1409700" y="4438650"/>
+            <a:ext cx="152400" cy="228600"/>
           </a:xfrm>
           <a:prstGeom xmlns:a="http://schemas.openxmlformats.org/drawingml/2006/main" prst="rect">
             <a:avLst/>
@@ -2862,8 +2948,8 @@
           </a:bodyPr>
           <a:lstStyle xmlns:a="http://schemas.openxmlformats.org/drawingml/2006/main"/>
           <a:p xmlns:a="http://schemas.openxmlformats.org/drawingml/2006/main">
-            <a:pPr algn="ctr">
-              <a:defRPr sz="1800" b="1">
+            <a:pPr algn="l">
+              <a:defRPr sz="1200" b="1">
                 <a:solidFill>
                   <a:srgbClr val="145CFF"/>
                 </a:solidFill>
@@ -2873,7 +2959,7 @@
               </a:defRPr>
             </a:pPr>
             <a:r>
-              <a:rPr sz="1800" b="1">
+              <a:rPr sz="1200" b="1">
                 <a:solidFill>
                   <a:srgbClr val="145CFF"/>
                 </a:solidFill>
@@ -2888,22 +2974,22 @@
       </p:sp>
       <p:sp>
         <p:nvSpPr>
-          <p:cNvPr id="15" name="">
-            <a:extLst xmlns:a="http://schemas.openxmlformats.org/drawingml/2006/main">
-              <a:ext uri="{FF2B5EF4-FFF2-40B4-BE49-F238E27FC236}">
-                <a16:creationId xmlns:a16="http://schemas.microsoft.com/office/drawing/2014/main" id="{A4E65D81-22AA-449F-BC90-FEC33B814F95}"/>
-              </a:ext>
-            </a:extLst>
-          </p:cNvPr>
-          <p:cNvSpPr>
-            <a:spLocks xmlns:a="http://schemas.openxmlformats.org/drawingml/2006/main" noGrp="1"/>
-          </p:cNvSpPr>
-          <p:nvPr/>
-        </p:nvSpPr>
-        <p:spPr>
-          <a:xfrm xmlns:a="http://schemas.openxmlformats.org/drawingml/2006/main">
-            <a:off x="4038600" y="2476500"/>
-            <a:ext cx="1390650" cy="666750"/>
+          <p:cNvPr id="17" name="">
+            <a:extLst xmlns:a="http://schemas.openxmlformats.org/drawingml/2006/main">
+              <a:ext uri="{FF2B5EF4-FFF2-40B4-BE49-F238E27FC236}">
+                <a16:creationId xmlns:a16="http://schemas.microsoft.com/office/drawing/2014/main" id="{5B1E6E86-3E8F-424C-B679-C4CEA9B918CB}"/>
+              </a:ext>
+            </a:extLst>
+          </p:cNvPr>
+          <p:cNvSpPr>
+            <a:spLocks xmlns:a="http://schemas.openxmlformats.org/drawingml/2006/main" noGrp="1"/>
+          </p:cNvSpPr>
+          <p:nvPr/>
+        </p:nvSpPr>
+        <p:spPr>
+          <a:xfrm xmlns:a="http://schemas.openxmlformats.org/drawingml/2006/main">
+            <a:off x="1581150" y="4248150"/>
+            <a:ext cx="704850" cy="666750"/>
           </a:xfrm>
           <a:prstGeom xmlns:a="http://schemas.openxmlformats.org/drawingml/2006/main" prst="roundRect">
             <a:avLst>
@@ -2922,22 +3008,22 @@
       </p:sp>
       <p:sp>
         <p:nvSpPr>
-          <p:cNvPr id="16" name="">
-            <a:extLst xmlns:a="http://schemas.openxmlformats.org/drawingml/2006/main">
-              <a:ext uri="{FF2B5EF4-FFF2-40B4-BE49-F238E27FC236}">
-                <a16:creationId xmlns:a16="http://schemas.microsoft.com/office/drawing/2014/main" id="{83DF1540-8E94-49F2-A316-D5E30340F711}"/>
-              </a:ext>
-            </a:extLst>
-          </p:cNvPr>
-          <p:cNvSpPr>
-            <a:spLocks xmlns:a="http://schemas.openxmlformats.org/drawingml/2006/main" noGrp="1"/>
-          </p:cNvSpPr>
-          <p:nvPr/>
-        </p:nvSpPr>
-        <p:spPr>
-          <a:xfrm xmlns:a="http://schemas.openxmlformats.org/drawingml/2006/main">
-            <a:off x="4152900" y="2590800"/>
-            <a:ext cx="1162050" cy="438150"/>
+          <p:cNvPr id="18" name="">
+            <a:extLst xmlns:a="http://schemas.openxmlformats.org/drawingml/2006/main">
+              <a:ext uri="{FF2B5EF4-FFF2-40B4-BE49-F238E27FC236}">
+                <a16:creationId xmlns:a16="http://schemas.microsoft.com/office/drawing/2014/main" id="{75AC37EC-C2DD-4DA4-B4FF-2BD443B969A1}"/>
+              </a:ext>
+            </a:extLst>
+          </p:cNvPr>
+          <p:cNvSpPr>
+            <a:spLocks xmlns:a="http://schemas.openxmlformats.org/drawingml/2006/main" noGrp="1"/>
+          </p:cNvSpPr>
+          <p:nvPr/>
+        </p:nvSpPr>
+        <p:spPr>
+          <a:xfrm xmlns:a="http://schemas.openxmlformats.org/drawingml/2006/main">
+            <a:off x="1695450" y="4362450"/>
+            <a:ext cx="476250" cy="438150"/>
           </a:xfrm>
           <a:prstGeom xmlns:a="http://schemas.openxmlformats.org/drawingml/2006/main" prst="rect">
             <a:avLst/>
@@ -2971,29 +3057,983 @@
                 <a:ea typeface="PingFang SC"/>
                 <a:cs typeface="PingFang SC"/>
               </a:rPr>
-              <a:t>网页展示评论</a:t>
-            </a:r>
-          </a:p>
-        </p:txBody>
-      </p:sp>
-      <p:sp>
-        <p:nvSpPr>
-          <p:cNvPr id="17" name="">
-            <a:extLst xmlns:a="http://schemas.openxmlformats.org/drawingml/2006/main">
-              <a:ext uri="{FF2B5EF4-FFF2-40B4-BE49-F238E27FC236}">
-                <a16:creationId xmlns:a16="http://schemas.microsoft.com/office/drawing/2014/main" id="{8D7A20C3-FB5E-4AC9-8C97-C02E9C8F24B9}"/>
-              </a:ext>
-            </a:extLst>
-          </p:cNvPr>
-          <p:cNvSpPr>
-            <a:spLocks xmlns:a="http://schemas.openxmlformats.org/drawingml/2006/main" noGrp="1"/>
-          </p:cNvSpPr>
-          <p:nvPr/>
-        </p:nvSpPr>
-        <p:spPr>
-          <a:xfrm xmlns:a="http://schemas.openxmlformats.org/drawingml/2006/main">
-            <a:off x="7429500" y="2038350"/>
-            <a:ext cx="3219450" cy="2628900"/>
+              <a:t>上下文收集</a:t>
+            </a:r>
+          </a:p>
+        </p:txBody>
+      </p:sp>
+      <p:sp>
+        <p:nvSpPr>
+          <p:cNvPr id="19" name="">
+            <a:extLst xmlns:a="http://schemas.openxmlformats.org/drawingml/2006/main">
+              <a:ext uri="{FF2B5EF4-FFF2-40B4-BE49-F238E27FC236}">
+                <a16:creationId xmlns:a16="http://schemas.microsoft.com/office/drawing/2014/main" id="{D689E087-A4BD-4ACA-8417-0D304AEC749A}"/>
+              </a:ext>
+            </a:extLst>
+          </p:cNvPr>
+          <p:cNvSpPr>
+            <a:spLocks xmlns:a="http://schemas.openxmlformats.org/drawingml/2006/main" noGrp="1"/>
+          </p:cNvSpPr>
+          <p:nvPr/>
+        </p:nvSpPr>
+        <p:spPr>
+          <a:xfrm xmlns:a="http://schemas.openxmlformats.org/drawingml/2006/main">
+            <a:off x="2305050" y="4438650"/>
+            <a:ext cx="152400" cy="228600"/>
+          </a:xfrm>
+          <a:prstGeom xmlns:a="http://schemas.openxmlformats.org/drawingml/2006/main" prst="rect">
+            <a:avLst/>
+          </a:prstGeom>
+          <a:ln xmlns:a="http://schemas.openxmlformats.org/drawingml/2006/main">
+            <a:noFill/>
+          </a:ln>
+        </p:spPr>
+        <p:txBody>
+          <a:bodyPr xmlns:a="http://schemas.openxmlformats.org/drawingml/2006/main" lIns="0" tIns="0" rIns="0" bIns="0" anchor="t">
+            <a:normAutofit fontScale="100000"/>
+          </a:bodyPr>
+          <a:lstStyle xmlns:a="http://schemas.openxmlformats.org/drawingml/2006/main"/>
+          <a:p xmlns:a="http://schemas.openxmlformats.org/drawingml/2006/main">
+            <a:pPr algn="l">
+              <a:defRPr sz="1200" b="1">
+                <a:solidFill>
+                  <a:srgbClr val="145CFF"/>
+                </a:solidFill>
+                <a:latin typeface="PingFang SC"/>
+                <a:ea typeface="PingFang SC"/>
+                <a:cs typeface="PingFang SC"/>
+              </a:defRPr>
+            </a:pPr>
+            <a:r>
+              <a:rPr sz="1200" b="1">
+                <a:solidFill>
+                  <a:srgbClr val="145CFF"/>
+                </a:solidFill>
+                <a:latin typeface="PingFang SC"/>
+                <a:ea typeface="PingFang SC"/>
+                <a:cs typeface="PingFang SC"/>
+              </a:rPr>
+              <a:t>→</a:t>
+            </a:r>
+          </a:p>
+        </p:txBody>
+      </p:sp>
+      <p:sp>
+        <p:nvSpPr>
+          <p:cNvPr id="20" name="">
+            <a:extLst xmlns:a="http://schemas.openxmlformats.org/drawingml/2006/main">
+              <a:ext uri="{FF2B5EF4-FFF2-40B4-BE49-F238E27FC236}">
+                <a16:creationId xmlns:a16="http://schemas.microsoft.com/office/drawing/2014/main" id="{751926DD-3A94-4D79-AAA1-494FEAC5D4AC}"/>
+              </a:ext>
+            </a:extLst>
+          </p:cNvPr>
+          <p:cNvSpPr>
+            <a:spLocks xmlns:a="http://schemas.openxmlformats.org/drawingml/2006/main" noGrp="1"/>
+          </p:cNvSpPr>
+          <p:nvPr/>
+        </p:nvSpPr>
+        <p:spPr>
+          <a:xfrm xmlns:a="http://schemas.openxmlformats.org/drawingml/2006/main">
+            <a:off x="2476500" y="4248150"/>
+            <a:ext cx="704850" cy="666750"/>
+          </a:xfrm>
+          <a:prstGeom xmlns:a="http://schemas.openxmlformats.org/drawingml/2006/main" prst="roundRect">
+            <a:avLst>
+              <a:gd name="adj" fmla="val 2857"/>
+            </a:avLst>
+          </a:prstGeom>
+          <a:solidFill xmlns:a="http://schemas.openxmlformats.org/drawingml/2006/main">
+            <a:srgbClr val="111827"/>
+          </a:solidFill>
+          <a:ln xmlns:a="http://schemas.openxmlformats.org/drawingml/2006/main" w="9525">
+            <a:solidFill>
+              <a:srgbClr val="E6EBF2"/>
+            </a:solidFill>
+          </a:ln>
+        </p:spPr>
+      </p:sp>
+      <p:sp>
+        <p:nvSpPr>
+          <p:cNvPr id="21" name="">
+            <a:extLst xmlns:a="http://schemas.openxmlformats.org/drawingml/2006/main">
+              <a:ext uri="{FF2B5EF4-FFF2-40B4-BE49-F238E27FC236}">
+                <a16:creationId xmlns:a16="http://schemas.microsoft.com/office/drawing/2014/main" id="{B1F0D53D-2603-4CB3-A5CD-F7544F1C896C}"/>
+              </a:ext>
+            </a:extLst>
+          </p:cNvPr>
+          <p:cNvSpPr>
+            <a:spLocks xmlns:a="http://schemas.openxmlformats.org/drawingml/2006/main" noGrp="1"/>
+          </p:cNvSpPr>
+          <p:nvPr/>
+        </p:nvSpPr>
+        <p:spPr>
+          <a:xfrm xmlns:a="http://schemas.openxmlformats.org/drawingml/2006/main">
+            <a:off x="2590800" y="4362450"/>
+            <a:ext cx="476250" cy="438150"/>
+          </a:xfrm>
+          <a:prstGeom xmlns:a="http://schemas.openxmlformats.org/drawingml/2006/main" prst="rect">
+            <a:avLst/>
+          </a:prstGeom>
+          <a:ln xmlns:a="http://schemas.openxmlformats.org/drawingml/2006/main">
+            <a:noFill/>
+          </a:ln>
+        </p:spPr>
+        <p:txBody>
+          <a:bodyPr xmlns:a="http://schemas.openxmlformats.org/drawingml/2006/main" lIns="0" tIns="0" rIns="0" bIns="0" anchor="ctr">
+            <a:normAutofit fontScale="100000"/>
+          </a:bodyPr>
+          <a:lstStyle xmlns:a="http://schemas.openxmlformats.org/drawingml/2006/main"/>
+          <a:p xmlns:a="http://schemas.openxmlformats.org/drawingml/2006/main">
+            <a:pPr algn="ctr">
+              <a:defRPr sz="1200" b="1">
+                <a:solidFill>
+                  <a:srgbClr val="FFFFFF"/>
+                </a:solidFill>
+                <a:latin typeface="PingFang SC"/>
+                <a:ea typeface="PingFang SC"/>
+                <a:cs typeface="PingFang SC"/>
+              </a:defRPr>
+            </a:pPr>
+            <a:r>
+              <a:rPr sz="1200" b="1">
+                <a:solidFill>
+                  <a:srgbClr val="FFFFFF"/>
+                </a:solidFill>
+                <a:latin typeface="PingFang SC"/>
+                <a:ea typeface="PingFang SC"/>
+                <a:cs typeface="PingFang SC"/>
+              </a:rPr>
+              <a:t>完整性检查</a:t>
+            </a:r>
+          </a:p>
+        </p:txBody>
+      </p:sp>
+      <p:sp>
+        <p:nvSpPr>
+          <p:cNvPr id="22" name="">
+            <a:extLst xmlns:a="http://schemas.openxmlformats.org/drawingml/2006/main">
+              <a:ext uri="{FF2B5EF4-FFF2-40B4-BE49-F238E27FC236}">
+                <a16:creationId xmlns:a16="http://schemas.microsoft.com/office/drawing/2014/main" id="{35B9E28C-0B7F-47AD-93E3-8D83D276BC6F}"/>
+              </a:ext>
+            </a:extLst>
+          </p:cNvPr>
+          <p:cNvSpPr>
+            <a:spLocks xmlns:a="http://schemas.openxmlformats.org/drawingml/2006/main" noGrp="1"/>
+          </p:cNvSpPr>
+          <p:nvPr/>
+        </p:nvSpPr>
+        <p:spPr>
+          <a:xfrm xmlns:a="http://schemas.openxmlformats.org/drawingml/2006/main">
+            <a:off x="685800" y="4953000"/>
+            <a:ext cx="704850" cy="666750"/>
+          </a:xfrm>
+          <a:prstGeom xmlns:a="http://schemas.openxmlformats.org/drawingml/2006/main" prst="roundRect">
+            <a:avLst>
+              <a:gd name="adj" fmla="val 2857"/>
+            </a:avLst>
+          </a:prstGeom>
+          <a:solidFill xmlns:a="http://schemas.openxmlformats.org/drawingml/2006/main">
+            <a:srgbClr val="FFFFFF"/>
+          </a:solidFill>
+          <a:ln xmlns:a="http://schemas.openxmlformats.org/drawingml/2006/main" w="9525">
+            <a:solidFill>
+              <a:srgbClr val="E6EBF2"/>
+            </a:solidFill>
+          </a:ln>
+        </p:spPr>
+      </p:sp>
+      <p:sp>
+        <p:nvSpPr>
+          <p:cNvPr id="23" name="">
+            <a:extLst xmlns:a="http://schemas.openxmlformats.org/drawingml/2006/main">
+              <a:ext uri="{FF2B5EF4-FFF2-40B4-BE49-F238E27FC236}">
+                <a16:creationId xmlns:a16="http://schemas.microsoft.com/office/drawing/2014/main" id="{6B0247F7-D2ED-4B46-B748-AC98CB44808C}"/>
+              </a:ext>
+            </a:extLst>
+          </p:cNvPr>
+          <p:cNvSpPr>
+            <a:spLocks xmlns:a="http://schemas.openxmlformats.org/drawingml/2006/main" noGrp="1"/>
+          </p:cNvSpPr>
+          <p:nvPr/>
+        </p:nvSpPr>
+        <p:spPr>
+          <a:xfrm xmlns:a="http://schemas.openxmlformats.org/drawingml/2006/main">
+            <a:off x="800100" y="5067300"/>
+            <a:ext cx="476250" cy="438150"/>
+          </a:xfrm>
+          <a:prstGeom xmlns:a="http://schemas.openxmlformats.org/drawingml/2006/main" prst="rect">
+            <a:avLst/>
+          </a:prstGeom>
+          <a:ln xmlns:a="http://schemas.openxmlformats.org/drawingml/2006/main">
+            <a:noFill/>
+          </a:ln>
+        </p:spPr>
+        <p:txBody>
+          <a:bodyPr xmlns:a="http://schemas.openxmlformats.org/drawingml/2006/main" lIns="0" tIns="0" rIns="0" bIns="0" anchor="ctr">
+            <a:normAutofit fontScale="100000"/>
+          </a:bodyPr>
+          <a:lstStyle xmlns:a="http://schemas.openxmlformats.org/drawingml/2006/main"/>
+          <a:p xmlns:a="http://schemas.openxmlformats.org/drawingml/2006/main">
+            <a:pPr algn="ctr">
+              <a:defRPr sz="1200" b="1">
+                <a:solidFill>
+                  <a:srgbClr val="111827"/>
+                </a:solidFill>
+                <a:latin typeface="PingFang SC"/>
+                <a:ea typeface="PingFang SC"/>
+                <a:cs typeface="PingFang SC"/>
+              </a:defRPr>
+            </a:pPr>
+            <a:r>
+              <a:rPr sz="1200" b="1">
+                <a:solidFill>
+                  <a:srgbClr val="111827"/>
+                </a:solidFill>
+                <a:latin typeface="PingFang SC"/>
+                <a:ea typeface="PingFang SC"/>
+                <a:cs typeface="PingFang SC"/>
+              </a:rPr>
+              <a:t>受控分析</a:t>
+            </a:r>
+          </a:p>
+        </p:txBody>
+      </p:sp>
+      <p:sp>
+        <p:nvSpPr>
+          <p:cNvPr id="24" name="">
+            <a:extLst xmlns:a="http://schemas.openxmlformats.org/drawingml/2006/main">
+              <a:ext uri="{FF2B5EF4-FFF2-40B4-BE49-F238E27FC236}">
+                <a16:creationId xmlns:a16="http://schemas.microsoft.com/office/drawing/2014/main" id="{38C13DAC-A3C9-4E26-BE8B-F6ADD0CCAF2C}"/>
+              </a:ext>
+            </a:extLst>
+          </p:cNvPr>
+          <p:cNvSpPr>
+            <a:spLocks xmlns:a="http://schemas.openxmlformats.org/drawingml/2006/main" noGrp="1"/>
+          </p:cNvSpPr>
+          <p:nvPr/>
+        </p:nvSpPr>
+        <p:spPr>
+          <a:xfrm xmlns:a="http://schemas.openxmlformats.org/drawingml/2006/main">
+            <a:off x="1409700" y="5143500"/>
+            <a:ext cx="152400" cy="228600"/>
+          </a:xfrm>
+          <a:prstGeom xmlns:a="http://schemas.openxmlformats.org/drawingml/2006/main" prst="rect">
+            <a:avLst/>
+          </a:prstGeom>
+          <a:ln xmlns:a="http://schemas.openxmlformats.org/drawingml/2006/main">
+            <a:noFill/>
+          </a:ln>
+        </p:spPr>
+        <p:txBody>
+          <a:bodyPr xmlns:a="http://schemas.openxmlformats.org/drawingml/2006/main" lIns="0" tIns="0" rIns="0" bIns="0" anchor="t">
+            <a:normAutofit fontScale="100000"/>
+          </a:bodyPr>
+          <a:lstStyle xmlns:a="http://schemas.openxmlformats.org/drawingml/2006/main"/>
+          <a:p xmlns:a="http://schemas.openxmlformats.org/drawingml/2006/main">
+            <a:pPr algn="l">
+              <a:defRPr sz="1200" b="1">
+                <a:solidFill>
+                  <a:srgbClr val="145CFF"/>
+                </a:solidFill>
+                <a:latin typeface="PingFang SC"/>
+                <a:ea typeface="PingFang SC"/>
+                <a:cs typeface="PingFang SC"/>
+              </a:defRPr>
+            </a:pPr>
+            <a:r>
+              <a:rPr sz="1200" b="1">
+                <a:solidFill>
+                  <a:srgbClr val="145CFF"/>
+                </a:solidFill>
+                <a:latin typeface="PingFang SC"/>
+                <a:ea typeface="PingFang SC"/>
+                <a:cs typeface="PingFang SC"/>
+              </a:rPr>
+              <a:t>→</a:t>
+            </a:r>
+          </a:p>
+        </p:txBody>
+      </p:sp>
+      <p:sp>
+        <p:nvSpPr>
+          <p:cNvPr id="25" name="">
+            <a:extLst xmlns:a="http://schemas.openxmlformats.org/drawingml/2006/main">
+              <a:ext uri="{FF2B5EF4-FFF2-40B4-BE49-F238E27FC236}">
+                <a16:creationId xmlns:a16="http://schemas.microsoft.com/office/drawing/2014/main" id="{AB088619-A14A-47B2-B1C4-3291EAF60583}"/>
+              </a:ext>
+            </a:extLst>
+          </p:cNvPr>
+          <p:cNvSpPr>
+            <a:spLocks xmlns:a="http://schemas.openxmlformats.org/drawingml/2006/main" noGrp="1"/>
+          </p:cNvSpPr>
+          <p:nvPr/>
+        </p:nvSpPr>
+        <p:spPr>
+          <a:xfrm xmlns:a="http://schemas.openxmlformats.org/drawingml/2006/main">
+            <a:off x="1581150" y="4953000"/>
+            <a:ext cx="704850" cy="666750"/>
+          </a:xfrm>
+          <a:prstGeom xmlns:a="http://schemas.openxmlformats.org/drawingml/2006/main" prst="roundRect">
+            <a:avLst>
+              <a:gd name="adj" fmla="val 2857"/>
+            </a:avLst>
+          </a:prstGeom>
+          <a:solidFill xmlns:a="http://schemas.openxmlformats.org/drawingml/2006/main">
+            <a:srgbClr val="FFFFFF"/>
+          </a:solidFill>
+          <a:ln xmlns:a="http://schemas.openxmlformats.org/drawingml/2006/main" w="9525">
+            <a:solidFill>
+              <a:srgbClr val="E6EBF2"/>
+            </a:solidFill>
+          </a:ln>
+        </p:spPr>
+      </p:sp>
+      <p:sp>
+        <p:nvSpPr>
+          <p:cNvPr id="26" name="">
+            <a:extLst xmlns:a="http://schemas.openxmlformats.org/drawingml/2006/main">
+              <a:ext uri="{FF2B5EF4-FFF2-40B4-BE49-F238E27FC236}">
+                <a16:creationId xmlns:a16="http://schemas.microsoft.com/office/drawing/2014/main" id="{34E962E3-DCDB-4638-AA89-8C8AB5F7B57A}"/>
+              </a:ext>
+            </a:extLst>
+          </p:cNvPr>
+          <p:cNvSpPr>
+            <a:spLocks xmlns:a="http://schemas.openxmlformats.org/drawingml/2006/main" noGrp="1"/>
+          </p:cNvSpPr>
+          <p:nvPr/>
+        </p:nvSpPr>
+        <p:spPr>
+          <a:xfrm xmlns:a="http://schemas.openxmlformats.org/drawingml/2006/main">
+            <a:off x="1695450" y="5067300"/>
+            <a:ext cx="476250" cy="438150"/>
+          </a:xfrm>
+          <a:prstGeom xmlns:a="http://schemas.openxmlformats.org/drawingml/2006/main" prst="rect">
+            <a:avLst/>
+          </a:prstGeom>
+          <a:ln xmlns:a="http://schemas.openxmlformats.org/drawingml/2006/main">
+            <a:noFill/>
+          </a:ln>
+        </p:spPr>
+        <p:txBody>
+          <a:bodyPr xmlns:a="http://schemas.openxmlformats.org/drawingml/2006/main" lIns="0" tIns="0" rIns="0" bIns="0" anchor="ctr">
+            <a:normAutofit fontScale="100000"/>
+          </a:bodyPr>
+          <a:lstStyle xmlns:a="http://schemas.openxmlformats.org/drawingml/2006/main"/>
+          <a:p xmlns:a="http://schemas.openxmlformats.org/drawingml/2006/main">
+            <a:pPr algn="ctr">
+              <a:defRPr sz="1200" b="1">
+                <a:solidFill>
+                  <a:srgbClr val="111827"/>
+                </a:solidFill>
+                <a:latin typeface="PingFang SC"/>
+                <a:ea typeface="PingFang SC"/>
+                <a:cs typeface="PingFang SC"/>
+              </a:defRPr>
+            </a:pPr>
+            <a:r>
+              <a:rPr sz="1200" b="1">
+                <a:solidFill>
+                  <a:srgbClr val="111827"/>
+                </a:solidFill>
+                <a:latin typeface="PingFang SC"/>
+                <a:ea typeface="PingFang SC"/>
+                <a:cs typeface="PingFang SC"/>
+              </a:rPr>
+              <a:t>证据补充</a:t>
+            </a:r>
+          </a:p>
+        </p:txBody>
+      </p:sp>
+      <p:sp>
+        <p:nvSpPr>
+          <p:cNvPr id="27" name="">
+            <a:extLst xmlns:a="http://schemas.openxmlformats.org/drawingml/2006/main">
+              <a:ext uri="{FF2B5EF4-FFF2-40B4-BE49-F238E27FC236}">
+                <a16:creationId xmlns:a16="http://schemas.microsoft.com/office/drawing/2014/main" id="{EB108D87-4146-4A3F-9434-00FA28B51C4D}"/>
+              </a:ext>
+            </a:extLst>
+          </p:cNvPr>
+          <p:cNvSpPr>
+            <a:spLocks xmlns:a="http://schemas.openxmlformats.org/drawingml/2006/main" noGrp="1"/>
+          </p:cNvSpPr>
+          <p:nvPr/>
+        </p:nvSpPr>
+        <p:spPr>
+          <a:xfrm xmlns:a="http://schemas.openxmlformats.org/drawingml/2006/main">
+            <a:off x="2305050" y="5143500"/>
+            <a:ext cx="152400" cy="228600"/>
+          </a:xfrm>
+          <a:prstGeom xmlns:a="http://schemas.openxmlformats.org/drawingml/2006/main" prst="rect">
+            <a:avLst/>
+          </a:prstGeom>
+          <a:ln xmlns:a="http://schemas.openxmlformats.org/drawingml/2006/main">
+            <a:noFill/>
+          </a:ln>
+        </p:spPr>
+        <p:txBody>
+          <a:bodyPr xmlns:a="http://schemas.openxmlformats.org/drawingml/2006/main" lIns="0" tIns="0" rIns="0" bIns="0" anchor="t">
+            <a:normAutofit fontScale="100000"/>
+          </a:bodyPr>
+          <a:lstStyle xmlns:a="http://schemas.openxmlformats.org/drawingml/2006/main"/>
+          <a:p xmlns:a="http://schemas.openxmlformats.org/drawingml/2006/main">
+            <a:pPr algn="l">
+              <a:defRPr sz="1200" b="1">
+                <a:solidFill>
+                  <a:srgbClr val="145CFF"/>
+                </a:solidFill>
+                <a:latin typeface="PingFang SC"/>
+                <a:ea typeface="PingFang SC"/>
+                <a:cs typeface="PingFang SC"/>
+              </a:defRPr>
+            </a:pPr>
+            <a:r>
+              <a:rPr sz="1200" b="1">
+                <a:solidFill>
+                  <a:srgbClr val="145CFF"/>
+                </a:solidFill>
+                <a:latin typeface="PingFang SC"/>
+                <a:ea typeface="PingFang SC"/>
+                <a:cs typeface="PingFang SC"/>
+              </a:rPr>
+              <a:t>→</a:t>
+            </a:r>
+          </a:p>
+        </p:txBody>
+      </p:sp>
+      <p:sp>
+        <p:nvSpPr>
+          <p:cNvPr id="28" name="">
+            <a:extLst xmlns:a="http://schemas.openxmlformats.org/drawingml/2006/main">
+              <a:ext uri="{FF2B5EF4-FFF2-40B4-BE49-F238E27FC236}">
+                <a16:creationId xmlns:a16="http://schemas.microsoft.com/office/drawing/2014/main" id="{CFFE2F62-0764-4018-8E6B-A3B5AD824427}"/>
+              </a:ext>
+            </a:extLst>
+          </p:cNvPr>
+          <p:cNvSpPr>
+            <a:spLocks xmlns:a="http://schemas.openxmlformats.org/drawingml/2006/main" noGrp="1"/>
+          </p:cNvSpPr>
+          <p:nvPr/>
+        </p:nvSpPr>
+        <p:spPr>
+          <a:xfrm xmlns:a="http://schemas.openxmlformats.org/drawingml/2006/main">
+            <a:off x="2476500" y="4953000"/>
+            <a:ext cx="704850" cy="666750"/>
+          </a:xfrm>
+          <a:prstGeom xmlns:a="http://schemas.openxmlformats.org/drawingml/2006/main" prst="roundRect">
+            <a:avLst>
+              <a:gd name="adj" fmla="val 2857"/>
+            </a:avLst>
+          </a:prstGeom>
+          <a:solidFill xmlns:a="http://schemas.openxmlformats.org/drawingml/2006/main">
+            <a:srgbClr val="FFFFFF"/>
+          </a:solidFill>
+          <a:ln xmlns:a="http://schemas.openxmlformats.org/drawingml/2006/main" w="9525">
+            <a:solidFill>
+              <a:srgbClr val="E6EBF2"/>
+            </a:solidFill>
+          </a:ln>
+        </p:spPr>
+      </p:sp>
+      <p:sp>
+        <p:nvSpPr>
+          <p:cNvPr id="29" name="">
+            <a:extLst xmlns:a="http://schemas.openxmlformats.org/drawingml/2006/main">
+              <a:ext uri="{FF2B5EF4-FFF2-40B4-BE49-F238E27FC236}">
+                <a16:creationId xmlns:a16="http://schemas.microsoft.com/office/drawing/2014/main" id="{A77E3723-19FB-4F0C-9724-628AAB730423}"/>
+              </a:ext>
+            </a:extLst>
+          </p:cNvPr>
+          <p:cNvSpPr>
+            <a:spLocks xmlns:a="http://schemas.openxmlformats.org/drawingml/2006/main" noGrp="1"/>
+          </p:cNvSpPr>
+          <p:nvPr/>
+        </p:nvSpPr>
+        <p:spPr>
+          <a:xfrm xmlns:a="http://schemas.openxmlformats.org/drawingml/2006/main">
+            <a:off x="2590800" y="5067300"/>
+            <a:ext cx="476250" cy="438150"/>
+          </a:xfrm>
+          <a:prstGeom xmlns:a="http://schemas.openxmlformats.org/drawingml/2006/main" prst="rect">
+            <a:avLst/>
+          </a:prstGeom>
+          <a:ln xmlns:a="http://schemas.openxmlformats.org/drawingml/2006/main">
+            <a:noFill/>
+          </a:ln>
+        </p:spPr>
+        <p:txBody>
+          <a:bodyPr xmlns:a="http://schemas.openxmlformats.org/drawingml/2006/main" lIns="0" tIns="0" rIns="0" bIns="0" anchor="ctr">
+            <a:normAutofit fontScale="92191"/>
+          </a:bodyPr>
+          <a:lstStyle xmlns:a="http://schemas.openxmlformats.org/drawingml/2006/main"/>
+          <a:p xmlns:a="http://schemas.openxmlformats.org/drawingml/2006/main">
+            <a:pPr algn="ctr">
+              <a:defRPr sz="1200" b="1">
+                <a:solidFill>
+                  <a:srgbClr val="111827"/>
+                </a:solidFill>
+                <a:latin typeface="PingFang SC"/>
+                <a:ea typeface="PingFang SC"/>
+                <a:cs typeface="PingFang SC"/>
+              </a:defRPr>
+            </a:pPr>
+            <a:r>
+              <a:rPr sz="1200" b="1">
+                <a:solidFill>
+                  <a:srgbClr val="111827"/>
+                </a:solidFill>
+                <a:latin typeface="PingFang SC"/>
+                <a:ea typeface="PingFang SC"/>
+                <a:cs typeface="PingFang SC"/>
+              </a:rPr>
+              <a:t>AI Review</a:t>
+            </a:r>
+          </a:p>
+        </p:txBody>
+      </p:sp>
+      <p:sp>
+        <p:nvSpPr>
+          <p:cNvPr id="30" name="">
+            <a:extLst xmlns:a="http://schemas.openxmlformats.org/drawingml/2006/main">
+              <a:ext uri="{FF2B5EF4-FFF2-40B4-BE49-F238E27FC236}">
+                <a16:creationId xmlns:a16="http://schemas.microsoft.com/office/drawing/2014/main" id="{6FB89C23-5682-484B-AB0E-554CD14965DB}"/>
+              </a:ext>
+            </a:extLst>
+          </p:cNvPr>
+          <p:cNvSpPr>
+            <a:spLocks xmlns:a="http://schemas.openxmlformats.org/drawingml/2006/main" noGrp="1"/>
+          </p:cNvSpPr>
+          <p:nvPr/>
+        </p:nvSpPr>
+        <p:spPr>
+          <a:xfrm xmlns:a="http://schemas.openxmlformats.org/drawingml/2006/main">
+            <a:off x="3371850" y="2038350"/>
+            <a:ext cx="3143250" cy="838200"/>
+          </a:xfrm>
+          <a:prstGeom xmlns:a="http://schemas.openxmlformats.org/drawingml/2006/main" prst="rect">
+            <a:avLst/>
+          </a:prstGeom>
+          <a:solidFill xmlns:a="http://schemas.openxmlformats.org/drawingml/2006/main">
+            <a:srgbClr val="EAF1FF"/>
+          </a:solidFill>
+          <a:ln xmlns:a="http://schemas.openxmlformats.org/drawingml/2006/main">
+            <a:noFill/>
+          </a:ln>
+        </p:spPr>
+      </p:sp>
+      <p:sp>
+        <p:nvSpPr>
+          <p:cNvPr id="31" name="">
+            <a:extLst xmlns:a="http://schemas.openxmlformats.org/drawingml/2006/main">
+              <a:ext uri="{FF2B5EF4-FFF2-40B4-BE49-F238E27FC236}">
+                <a16:creationId xmlns:a16="http://schemas.microsoft.com/office/drawing/2014/main" id="{807D5252-FA46-4661-9690-C8E4126EC96A}"/>
+              </a:ext>
+            </a:extLst>
+          </p:cNvPr>
+          <p:cNvSpPr>
+            <a:spLocks xmlns:a="http://schemas.openxmlformats.org/drawingml/2006/main" noGrp="1"/>
+          </p:cNvSpPr>
+          <p:nvPr/>
+        </p:nvSpPr>
+        <p:spPr>
+          <a:xfrm xmlns:a="http://schemas.openxmlformats.org/drawingml/2006/main">
+            <a:off x="3638550" y="2209800"/>
+            <a:ext cx="1238250" cy="228600"/>
+          </a:xfrm>
+          <a:prstGeom xmlns:a="http://schemas.openxmlformats.org/drawingml/2006/main" prst="rect">
+            <a:avLst/>
+          </a:prstGeom>
+          <a:ln xmlns:a="http://schemas.openxmlformats.org/drawingml/2006/main">
+            <a:noFill/>
+          </a:ln>
+        </p:spPr>
+        <p:txBody>
+          <a:bodyPr xmlns:a="http://schemas.openxmlformats.org/drawingml/2006/main" lIns="0" tIns="0" rIns="0" bIns="0" anchor="t">
+            <a:normAutofit fontScale="95238"/>
+          </a:bodyPr>
+          <a:lstStyle xmlns:a="http://schemas.openxmlformats.org/drawingml/2006/main"/>
+          <a:p xmlns:a="http://schemas.openxmlformats.org/drawingml/2006/main">
+            <a:pPr algn="l">
+              <a:defRPr sz="1575" b="1">
+                <a:solidFill>
+                  <a:srgbClr val="111827"/>
+                </a:solidFill>
+                <a:latin typeface="PingFang SC"/>
+                <a:ea typeface="PingFang SC"/>
+                <a:cs typeface="PingFang SC"/>
+              </a:defRPr>
+            </a:pPr>
+            <a:r>
+              <a:rPr sz="1575" b="1">
+                <a:solidFill>
+                  <a:srgbClr val="111827"/>
+                </a:solidFill>
+                <a:latin typeface="PingFang SC"/>
+                <a:ea typeface="PingFang SC"/>
+                <a:cs typeface="PingFang SC"/>
+              </a:rPr>
+              <a:t>上下文材料</a:t>
+            </a:r>
+          </a:p>
+        </p:txBody>
+      </p:sp>
+      <p:sp>
+        <p:nvSpPr>
+          <p:cNvPr id="32" name="">
+            <a:extLst xmlns:a="http://schemas.openxmlformats.org/drawingml/2006/main">
+              <a:ext uri="{FF2B5EF4-FFF2-40B4-BE49-F238E27FC236}">
+                <a16:creationId xmlns:a16="http://schemas.microsoft.com/office/drawing/2014/main" id="{C6045E1D-0021-40CE-B20F-5EB65C04A3E5}"/>
+              </a:ext>
+            </a:extLst>
+          </p:cNvPr>
+          <p:cNvSpPr>
+            <a:spLocks xmlns:a="http://schemas.openxmlformats.org/drawingml/2006/main" noGrp="1"/>
+          </p:cNvSpPr>
+          <p:nvPr/>
+        </p:nvSpPr>
+        <p:spPr>
+          <a:xfrm xmlns:a="http://schemas.openxmlformats.org/drawingml/2006/main">
+            <a:off x="3638550" y="2495550"/>
+            <a:ext cx="2476500" cy="266700"/>
+          </a:xfrm>
+          <a:prstGeom xmlns:a="http://schemas.openxmlformats.org/drawingml/2006/main" prst="rect">
+            <a:avLst/>
+          </a:prstGeom>
+          <a:ln xmlns:a="http://schemas.openxmlformats.org/drawingml/2006/main">
+            <a:noFill/>
+          </a:ln>
+        </p:spPr>
+        <p:txBody>
+          <a:bodyPr xmlns:a="http://schemas.openxmlformats.org/drawingml/2006/main" lIns="0" tIns="0" rIns="0" bIns="0" anchor="t">
+            <a:normAutofit fontScale="83333"/>
+          </a:bodyPr>
+          <a:lstStyle xmlns:a="http://schemas.openxmlformats.org/drawingml/2006/main"/>
+          <a:p xmlns:a="http://schemas.openxmlformats.org/drawingml/2006/main">
+            <a:pPr algn="l">
+              <a:defRPr sz="1050" b="0">
+                <a:solidFill>
+                  <a:srgbClr val="273140"/>
+                </a:solidFill>
+                <a:latin typeface="PingFang SC"/>
+                <a:ea typeface="PingFang SC"/>
+                <a:cs typeface="PingFang SC"/>
+              </a:defRPr>
+            </a:pPr>
+            <a:r>
+              <a:rPr sz="1050" b="0">
+                <a:solidFill>
+                  <a:srgbClr val="273140"/>
+                </a:solidFill>
+                <a:latin typeface="PingFang SC"/>
+                <a:ea typeface="PingFang SC"/>
+                <a:cs typeface="PingFang SC"/>
+              </a:rPr>
+              <a:t>补充变更文件、函数窗口、EDK 元数据和上报链路。</a:t>
+            </a:r>
+          </a:p>
+        </p:txBody>
+      </p:sp>
+      <p:sp>
+        <p:nvSpPr>
+          <p:cNvPr id="33" name="">
+            <a:extLst xmlns:a="http://schemas.openxmlformats.org/drawingml/2006/main">
+              <a:ext uri="{FF2B5EF4-FFF2-40B4-BE49-F238E27FC236}">
+                <a16:creationId xmlns:a16="http://schemas.microsoft.com/office/drawing/2014/main" id="{70D3AB1D-860E-4340-A0AF-7AC453566AC9}"/>
+              </a:ext>
+            </a:extLst>
+          </p:cNvPr>
+          <p:cNvSpPr>
+            <a:spLocks xmlns:a="http://schemas.openxmlformats.org/drawingml/2006/main" noGrp="1"/>
+          </p:cNvSpPr>
+          <p:nvPr/>
+        </p:nvSpPr>
+        <p:spPr>
+          <a:xfrm xmlns:a="http://schemas.openxmlformats.org/drawingml/2006/main">
+            <a:off x="3371850" y="3143250"/>
+            <a:ext cx="3143250" cy="838200"/>
+          </a:xfrm>
+          <a:prstGeom xmlns:a="http://schemas.openxmlformats.org/drawingml/2006/main" prst="rect">
+            <a:avLst/>
+          </a:prstGeom>
+          <a:solidFill xmlns:a="http://schemas.openxmlformats.org/drawingml/2006/main">
+            <a:srgbClr val="EAF8F2"/>
+          </a:solidFill>
+          <a:ln xmlns:a="http://schemas.openxmlformats.org/drawingml/2006/main">
+            <a:noFill/>
+          </a:ln>
+        </p:spPr>
+      </p:sp>
+      <p:sp>
+        <p:nvSpPr>
+          <p:cNvPr id="34" name="">
+            <a:extLst xmlns:a="http://schemas.openxmlformats.org/drawingml/2006/main">
+              <a:ext uri="{FF2B5EF4-FFF2-40B4-BE49-F238E27FC236}">
+                <a16:creationId xmlns:a16="http://schemas.microsoft.com/office/drawing/2014/main" id="{475BD528-A608-4DCA-9A68-F05BA85A1846}"/>
+              </a:ext>
+            </a:extLst>
+          </p:cNvPr>
+          <p:cNvSpPr>
+            <a:spLocks xmlns:a="http://schemas.openxmlformats.org/drawingml/2006/main" noGrp="1"/>
+          </p:cNvSpPr>
+          <p:nvPr/>
+        </p:nvSpPr>
+        <p:spPr>
+          <a:xfrm xmlns:a="http://schemas.openxmlformats.org/drawingml/2006/main">
+            <a:off x="3638550" y="3314700"/>
+            <a:ext cx="1238250" cy="228600"/>
+          </a:xfrm>
+          <a:prstGeom xmlns:a="http://schemas.openxmlformats.org/drawingml/2006/main" prst="rect">
+            <a:avLst/>
+          </a:prstGeom>
+          <a:ln xmlns:a="http://schemas.openxmlformats.org/drawingml/2006/main">
+            <a:noFill/>
+          </a:ln>
+        </p:spPr>
+        <p:txBody>
+          <a:bodyPr xmlns:a="http://schemas.openxmlformats.org/drawingml/2006/main" lIns="0" tIns="0" rIns="0" bIns="0" anchor="t">
+            <a:normAutofit fontScale="95238"/>
+          </a:bodyPr>
+          <a:lstStyle xmlns:a="http://schemas.openxmlformats.org/drawingml/2006/main"/>
+          <a:p xmlns:a="http://schemas.openxmlformats.org/drawingml/2006/main">
+            <a:pPr algn="l">
+              <a:defRPr sz="1575" b="1">
+                <a:solidFill>
+                  <a:srgbClr val="111827"/>
+                </a:solidFill>
+                <a:latin typeface="PingFang SC"/>
+                <a:ea typeface="PingFang SC"/>
+                <a:cs typeface="PingFang SC"/>
+              </a:defRPr>
+            </a:pPr>
+            <a:r>
+              <a:rPr sz="1575" b="1">
+                <a:solidFill>
+                  <a:srgbClr val="111827"/>
+                </a:solidFill>
+                <a:latin typeface="PingFang SC"/>
+                <a:ea typeface="PingFang SC"/>
+                <a:cs typeface="PingFang SC"/>
+              </a:rPr>
+              <a:t>完整性检查</a:t>
+            </a:r>
+          </a:p>
+        </p:txBody>
+      </p:sp>
+      <p:sp>
+        <p:nvSpPr>
+          <p:cNvPr id="35" name="">
+            <a:extLst xmlns:a="http://schemas.openxmlformats.org/drawingml/2006/main">
+              <a:ext uri="{FF2B5EF4-FFF2-40B4-BE49-F238E27FC236}">
+                <a16:creationId xmlns:a16="http://schemas.microsoft.com/office/drawing/2014/main" id="{AB28ADB3-A2A8-4B67-A84A-19B5A350DF4D}"/>
+              </a:ext>
+            </a:extLst>
+          </p:cNvPr>
+          <p:cNvSpPr>
+            <a:spLocks xmlns:a="http://schemas.openxmlformats.org/drawingml/2006/main" noGrp="1"/>
+          </p:cNvSpPr>
+          <p:nvPr/>
+        </p:nvSpPr>
+        <p:spPr>
+          <a:xfrm xmlns:a="http://schemas.openxmlformats.org/drawingml/2006/main">
+            <a:off x="3638550" y="3600450"/>
+            <a:ext cx="2476500" cy="266700"/>
+          </a:xfrm>
+          <a:prstGeom xmlns:a="http://schemas.openxmlformats.org/drawingml/2006/main" prst="rect">
+            <a:avLst/>
+          </a:prstGeom>
+          <a:ln xmlns:a="http://schemas.openxmlformats.org/drawingml/2006/main">
+            <a:noFill/>
+          </a:ln>
+        </p:spPr>
+        <p:txBody>
+          <a:bodyPr xmlns:a="http://schemas.openxmlformats.org/drawingml/2006/main" lIns="0" tIns="0" rIns="0" bIns="0" anchor="t">
+            <a:normAutofit fontScale="83333"/>
+          </a:bodyPr>
+          <a:lstStyle xmlns:a="http://schemas.openxmlformats.org/drawingml/2006/main"/>
+          <a:p xmlns:a="http://schemas.openxmlformats.org/drawingml/2006/main">
+            <a:pPr algn="l">
+              <a:defRPr sz="1050" b="0">
+                <a:solidFill>
+                  <a:srgbClr val="273140"/>
+                </a:solidFill>
+                <a:latin typeface="PingFang SC"/>
+                <a:ea typeface="PingFang SC"/>
+                <a:cs typeface="PingFang SC"/>
+              </a:defRPr>
+            </a:pPr>
+            <a:r>
+              <a:rPr sz="1050" b="0">
+                <a:solidFill>
+                  <a:srgbClr val="273140"/>
+                </a:solidFill>
+                <a:latin typeface="PingFang SC"/>
+                <a:ea typeface="PingFang SC"/>
+                <a:cs typeface="PingFang SC"/>
+              </a:rPr>
+              <a:t>记录模块、配置、调用链和 reporting-flow 是否足够。</a:t>
+            </a:r>
+          </a:p>
+        </p:txBody>
+      </p:sp>
+      <p:sp>
+        <p:nvSpPr>
+          <p:cNvPr id="36" name="">
+            <a:extLst xmlns:a="http://schemas.openxmlformats.org/drawingml/2006/main">
+              <a:ext uri="{FF2B5EF4-FFF2-40B4-BE49-F238E27FC236}">
+                <a16:creationId xmlns:a16="http://schemas.microsoft.com/office/drawing/2014/main" id="{A151FAFA-7AF2-4A0A-BC18-BDB8B4589A94}"/>
+              </a:ext>
+            </a:extLst>
+          </p:cNvPr>
+          <p:cNvSpPr>
+            <a:spLocks xmlns:a="http://schemas.openxmlformats.org/drawingml/2006/main" noGrp="1"/>
+          </p:cNvSpPr>
+          <p:nvPr/>
+        </p:nvSpPr>
+        <p:spPr>
+          <a:xfrm xmlns:a="http://schemas.openxmlformats.org/drawingml/2006/main">
+            <a:off x="3371850" y="4248150"/>
+            <a:ext cx="3143250" cy="838200"/>
+          </a:xfrm>
+          <a:prstGeom xmlns:a="http://schemas.openxmlformats.org/drawingml/2006/main" prst="rect">
+            <a:avLst/>
+          </a:prstGeom>
+          <a:solidFill xmlns:a="http://schemas.openxmlformats.org/drawingml/2006/main">
+            <a:srgbClr val="FFF6DE"/>
+          </a:solidFill>
+          <a:ln xmlns:a="http://schemas.openxmlformats.org/drawingml/2006/main">
+            <a:noFill/>
+          </a:ln>
+        </p:spPr>
+      </p:sp>
+      <p:sp>
+        <p:nvSpPr>
+          <p:cNvPr id="37" name="">
+            <a:extLst xmlns:a="http://schemas.openxmlformats.org/drawingml/2006/main">
+              <a:ext uri="{FF2B5EF4-FFF2-40B4-BE49-F238E27FC236}">
+                <a16:creationId xmlns:a16="http://schemas.microsoft.com/office/drawing/2014/main" id="{6CB8B7D0-3707-415F-98AA-6304256852D7}"/>
+              </a:ext>
+            </a:extLst>
+          </p:cNvPr>
+          <p:cNvSpPr>
+            <a:spLocks xmlns:a="http://schemas.openxmlformats.org/drawingml/2006/main" noGrp="1"/>
+          </p:cNvSpPr>
+          <p:nvPr/>
+        </p:nvSpPr>
+        <p:spPr>
+          <a:xfrm xmlns:a="http://schemas.openxmlformats.org/drawingml/2006/main">
+            <a:off x="3638550" y="4419600"/>
+            <a:ext cx="1238250" cy="228600"/>
+          </a:xfrm>
+          <a:prstGeom xmlns:a="http://schemas.openxmlformats.org/drawingml/2006/main" prst="rect">
+            <a:avLst/>
+          </a:prstGeom>
+          <a:ln xmlns:a="http://schemas.openxmlformats.org/drawingml/2006/main">
+            <a:noFill/>
+          </a:ln>
+        </p:spPr>
+        <p:txBody>
+          <a:bodyPr xmlns:a="http://schemas.openxmlformats.org/drawingml/2006/main" lIns="0" tIns="0" rIns="0" bIns="0" anchor="t">
+            <a:normAutofit fontScale="95238"/>
+          </a:bodyPr>
+          <a:lstStyle xmlns:a="http://schemas.openxmlformats.org/drawingml/2006/main"/>
+          <a:p xmlns:a="http://schemas.openxmlformats.org/drawingml/2006/main">
+            <a:pPr algn="l">
+              <a:defRPr sz="1575" b="1">
+                <a:solidFill>
+                  <a:srgbClr val="111827"/>
+                </a:solidFill>
+                <a:latin typeface="PingFang SC"/>
+                <a:ea typeface="PingFang SC"/>
+                <a:cs typeface="PingFang SC"/>
+              </a:defRPr>
+            </a:pPr>
+            <a:r>
+              <a:rPr sz="1575" b="1">
+                <a:solidFill>
+                  <a:srgbClr val="111827"/>
+                </a:solidFill>
+                <a:latin typeface="PingFang SC"/>
+                <a:ea typeface="PingFang SC"/>
+                <a:cs typeface="PingFang SC"/>
+              </a:rPr>
+              <a:t>过程留痕</a:t>
+            </a:r>
+          </a:p>
+        </p:txBody>
+      </p:sp>
+      <p:sp>
+        <p:nvSpPr>
+          <p:cNvPr id="38" name="">
+            <a:extLst xmlns:a="http://schemas.openxmlformats.org/drawingml/2006/main">
+              <a:ext uri="{FF2B5EF4-FFF2-40B4-BE49-F238E27FC236}">
+                <a16:creationId xmlns:a16="http://schemas.microsoft.com/office/drawing/2014/main" id="{87F86E20-3F90-44F9-A5DC-3F949A1126E7}"/>
+              </a:ext>
+            </a:extLst>
+          </p:cNvPr>
+          <p:cNvSpPr>
+            <a:spLocks xmlns:a="http://schemas.openxmlformats.org/drawingml/2006/main" noGrp="1"/>
+          </p:cNvSpPr>
+          <p:nvPr/>
+        </p:nvSpPr>
+        <p:spPr>
+          <a:xfrm xmlns:a="http://schemas.openxmlformats.org/drawingml/2006/main">
+            <a:off x="3638550" y="4705350"/>
+            <a:ext cx="2476500" cy="266700"/>
+          </a:xfrm>
+          <a:prstGeom xmlns:a="http://schemas.openxmlformats.org/drawingml/2006/main" prst="rect">
+            <a:avLst/>
+          </a:prstGeom>
+          <a:ln xmlns:a="http://schemas.openxmlformats.org/drawingml/2006/main">
+            <a:noFill/>
+          </a:ln>
+        </p:spPr>
+        <p:txBody>
+          <a:bodyPr xmlns:a="http://schemas.openxmlformats.org/drawingml/2006/main" lIns="0" tIns="0" rIns="0" bIns="0" anchor="t">
+            <a:normAutofit fontScale="83333"/>
+          </a:bodyPr>
+          <a:lstStyle xmlns:a="http://schemas.openxmlformats.org/drawingml/2006/main"/>
+          <a:p xmlns:a="http://schemas.openxmlformats.org/drawingml/2006/main">
+            <a:pPr algn="l">
+              <a:defRPr sz="1050" b="0">
+                <a:solidFill>
+                  <a:srgbClr val="273140"/>
+                </a:solidFill>
+                <a:latin typeface="PingFang SC"/>
+                <a:ea typeface="PingFang SC"/>
+                <a:cs typeface="PingFang SC"/>
+              </a:defRPr>
+            </a:pPr>
+            <a:r>
+              <a:rPr sz="1050" b="0">
+                <a:solidFill>
+                  <a:srgbClr val="273140"/>
+                </a:solidFill>
+                <a:latin typeface="PingFang SC"/>
+                <a:ea typeface="PingFang SC"/>
+                <a:cs typeface="PingFang SC"/>
+              </a:rPr>
+              <a:t>输出上下文覆盖记录，管理员可回看缺什么、补了什么。</a:t>
+            </a:r>
+          </a:p>
+        </p:txBody>
+      </p:sp>
+      <p:sp>
+        <p:nvSpPr>
+          <p:cNvPr id="39" name="">
+            <a:extLst xmlns:a="http://schemas.openxmlformats.org/drawingml/2006/main">
+              <a:ext uri="{FF2B5EF4-FFF2-40B4-BE49-F238E27FC236}">
+                <a16:creationId xmlns:a16="http://schemas.microsoft.com/office/drawing/2014/main" id="{513E910D-B1E1-4CEA-8FDD-47A753EF3D7D}"/>
+              </a:ext>
+            </a:extLst>
+          </p:cNvPr>
+          <p:cNvSpPr>
+            <a:spLocks xmlns:a="http://schemas.openxmlformats.org/drawingml/2006/main" noGrp="1"/>
+          </p:cNvSpPr>
+          <p:nvPr/>
+        </p:nvSpPr>
+        <p:spPr>
+          <a:xfrm xmlns:a="http://schemas.openxmlformats.org/drawingml/2006/main">
+            <a:off x="7010400" y="1962150"/>
+            <a:ext cx="3429000" cy="2495550"/>
           </a:xfrm>
           <a:prstGeom xmlns:a="http://schemas.openxmlformats.org/drawingml/2006/main" prst="rect">
             <a:avLst/>
@@ -3010,22 +4050,22 @@
       </p:sp>
       <p:sp>
         <p:nvSpPr>
-          <p:cNvPr id="18" name="">
-            <a:extLst xmlns:a="http://schemas.openxmlformats.org/drawingml/2006/main">
-              <a:ext uri="{FF2B5EF4-FFF2-40B4-BE49-F238E27FC236}">
-                <a16:creationId xmlns:a16="http://schemas.microsoft.com/office/drawing/2014/main" id="{E23E915A-F254-46AF-B051-71DCE093A964}"/>
-              </a:ext>
-            </a:extLst>
-          </p:cNvPr>
-          <p:cNvSpPr>
-            <a:spLocks xmlns:a="http://schemas.openxmlformats.org/drawingml/2006/main" noGrp="1"/>
-          </p:cNvSpPr>
-          <p:nvPr/>
-        </p:nvSpPr>
-        <p:spPr>
-          <a:xfrm xmlns:a="http://schemas.openxmlformats.org/drawingml/2006/main">
-            <a:off x="7677150" y="2286000"/>
-            <a:ext cx="2724150" cy="285750"/>
+          <p:cNvPr id="40" name="">
+            <a:extLst xmlns:a="http://schemas.openxmlformats.org/drawingml/2006/main">
+              <a:ext uri="{FF2B5EF4-FFF2-40B4-BE49-F238E27FC236}">
+                <a16:creationId xmlns:a16="http://schemas.microsoft.com/office/drawing/2014/main" id="{7466C17E-AD2F-48EE-98AB-8D2427ABCDBC}"/>
+              </a:ext>
+            </a:extLst>
+          </p:cNvPr>
+          <p:cNvSpPr>
+            <a:spLocks xmlns:a="http://schemas.openxmlformats.org/drawingml/2006/main" noGrp="1"/>
+          </p:cNvSpPr>
+          <p:nvPr/>
+        </p:nvSpPr>
+        <p:spPr>
+          <a:xfrm xmlns:a="http://schemas.openxmlformats.org/drawingml/2006/main">
+            <a:off x="7258050" y="2209800"/>
+            <a:ext cx="2933700" cy="285750"/>
           </a:xfrm>
           <a:prstGeom xmlns:a="http://schemas.openxmlformats.org/drawingml/2006/main" prst="rect">
             <a:avLst/>
@@ -3066,22 +4106,22 @@
       </p:sp>
       <p:sp>
         <p:nvSpPr>
-          <p:cNvPr id="19" name="">
-            <a:extLst xmlns:a="http://schemas.openxmlformats.org/drawingml/2006/main">
-              <a:ext uri="{FF2B5EF4-FFF2-40B4-BE49-F238E27FC236}">
-                <a16:creationId xmlns:a16="http://schemas.microsoft.com/office/drawing/2014/main" id="{730924B6-A8FA-423C-89C2-558B0E67C480}"/>
-              </a:ext>
-            </a:extLst>
-          </p:cNvPr>
-          <p:cNvSpPr>
-            <a:spLocks xmlns:a="http://schemas.openxmlformats.org/drawingml/2006/main" noGrp="1"/>
-          </p:cNvSpPr>
-          <p:nvPr/>
-        </p:nvSpPr>
-        <p:spPr>
-          <a:xfrm xmlns:a="http://schemas.openxmlformats.org/drawingml/2006/main">
-            <a:off x="7753350" y="3276600"/>
-            <a:ext cx="2571750" cy="514350"/>
+          <p:cNvPr id="41" name="">
+            <a:extLst xmlns:a="http://schemas.openxmlformats.org/drawingml/2006/main">
+              <a:ext uri="{FF2B5EF4-FFF2-40B4-BE49-F238E27FC236}">
+                <a16:creationId xmlns:a16="http://schemas.microsoft.com/office/drawing/2014/main" id="{FF8C2172-059D-450B-A62C-D271D374B1AA}"/>
+              </a:ext>
+            </a:extLst>
+          </p:cNvPr>
+          <p:cNvSpPr>
+            <a:spLocks xmlns:a="http://schemas.openxmlformats.org/drawingml/2006/main" noGrp="1"/>
+          </p:cNvSpPr>
+          <p:nvPr/>
+        </p:nvSpPr>
+        <p:spPr>
+          <a:xfrm xmlns:a="http://schemas.openxmlformats.org/drawingml/2006/main">
+            <a:off x="7334250" y="3133725"/>
+            <a:ext cx="2781300" cy="514350"/>
           </a:xfrm>
           <a:prstGeom xmlns:a="http://schemas.openxmlformats.org/drawingml/2006/main" prst="rect">
             <a:avLst/>
@@ -3115,29 +4155,29 @@
                 <a:ea typeface="PingFang SC"/>
                 <a:cs typeface="PingFang SC"/>
               </a:rPr>
-              <a:t>AI Review 页面 / 评审结果截图</a:t>
-            </a:r>
-          </a:p>
-        </p:txBody>
-      </p:sp>
-      <p:sp>
-        <p:nvSpPr>
-          <p:cNvPr id="20" name="">
-            <a:extLst xmlns:a="http://schemas.openxmlformats.org/drawingml/2006/main">
-              <a:ext uri="{FF2B5EF4-FFF2-40B4-BE49-F238E27FC236}">
-                <a16:creationId xmlns:a16="http://schemas.microsoft.com/office/drawing/2014/main" id="{F53520C8-7B9C-43E1-BCE0-911A626C9805}"/>
-              </a:ext>
-            </a:extLst>
-          </p:cNvPr>
-          <p:cNvSpPr>
-            <a:spLocks xmlns:a="http://schemas.openxmlformats.org/drawingml/2006/main" noGrp="1"/>
-          </p:cNvSpPr>
-          <p:nvPr/>
-        </p:nvSpPr>
-        <p:spPr>
-          <a:xfrm xmlns:a="http://schemas.openxmlformats.org/drawingml/2006/main">
-            <a:off x="7791450" y="4248150"/>
-            <a:ext cx="2495550" cy="9525"/>
+              <a:t>上下文材料 / 覆盖记录 / 管理员页面截图</a:t>
+            </a:r>
+          </a:p>
+        </p:txBody>
+      </p:sp>
+      <p:sp>
+        <p:nvSpPr>
+          <p:cNvPr id="42" name="">
+            <a:extLst xmlns:a="http://schemas.openxmlformats.org/drawingml/2006/main">
+              <a:ext uri="{FF2B5EF4-FFF2-40B4-BE49-F238E27FC236}">
+                <a16:creationId xmlns:a16="http://schemas.microsoft.com/office/drawing/2014/main" id="{7F462AF6-5ADA-46BC-944F-918EB2E492BD}"/>
+              </a:ext>
+            </a:extLst>
+          </p:cNvPr>
+          <p:cNvSpPr>
+            <a:spLocks xmlns:a="http://schemas.openxmlformats.org/drawingml/2006/main" noGrp="1"/>
+          </p:cNvSpPr>
+          <p:nvPr/>
+        </p:nvSpPr>
+        <p:spPr>
+          <a:xfrm xmlns:a="http://schemas.openxmlformats.org/drawingml/2006/main">
+            <a:off x="7372350" y="4038600"/>
+            <a:ext cx="2705100" cy="9525"/>
           </a:xfrm>
           <a:prstGeom xmlns:a="http://schemas.openxmlformats.org/drawingml/2006/main" prst="rect">
             <a:avLst/>
@@ -3152,22 +4192,22 @@
       </p:sp>
       <p:sp>
         <p:nvSpPr>
-          <p:cNvPr id="21" name="">
-            <a:extLst xmlns:a="http://schemas.openxmlformats.org/drawingml/2006/main">
-              <a:ext uri="{FF2B5EF4-FFF2-40B4-BE49-F238E27FC236}">
-                <a16:creationId xmlns:a16="http://schemas.microsoft.com/office/drawing/2014/main" id="{A59273BA-BDB5-4D3B-8C18-6A82E522A1B1}"/>
-              </a:ext>
-            </a:extLst>
-          </p:cNvPr>
-          <p:cNvSpPr>
-            <a:spLocks xmlns:a="http://schemas.openxmlformats.org/drawingml/2006/main" noGrp="1"/>
-          </p:cNvSpPr>
-          <p:nvPr/>
-        </p:nvSpPr>
-        <p:spPr>
-          <a:xfrm xmlns:a="http://schemas.openxmlformats.org/drawingml/2006/main">
-            <a:off x="7753350" y="4343400"/>
-            <a:ext cx="2571750" cy="171450"/>
+          <p:cNvPr id="43" name="">
+            <a:extLst xmlns:a="http://schemas.openxmlformats.org/drawingml/2006/main">
+              <a:ext uri="{FF2B5EF4-FFF2-40B4-BE49-F238E27FC236}">
+                <a16:creationId xmlns:a16="http://schemas.microsoft.com/office/drawing/2014/main" id="{814A3E05-7FF5-4B90-ADA0-C111AB77BD8A}"/>
+              </a:ext>
+            </a:extLst>
+          </p:cNvPr>
+          <p:cNvSpPr>
+            <a:spLocks xmlns:a="http://schemas.openxmlformats.org/drawingml/2006/main" noGrp="1"/>
+          </p:cNvSpPr>
+          <p:nvPr/>
+        </p:nvSpPr>
+        <p:spPr>
+          <a:xfrm xmlns:a="http://schemas.openxmlformats.org/drawingml/2006/main">
+            <a:off x="7334250" y="4133850"/>
+            <a:ext cx="2781300" cy="171450"/>
           </a:xfrm>
           <a:prstGeom xmlns:a="http://schemas.openxmlformats.org/drawingml/2006/main" prst="rect">
             <a:avLst/>
@@ -3208,28 +4248,28 @@
       </p:sp>
       <p:sp>
         <p:nvSpPr>
-          <p:cNvPr id="22" name="">
-            <a:extLst xmlns:a="http://schemas.openxmlformats.org/drawingml/2006/main">
-              <a:ext uri="{FF2B5EF4-FFF2-40B4-BE49-F238E27FC236}">
-                <a16:creationId xmlns:a16="http://schemas.microsoft.com/office/drawing/2014/main" id="{8B2075B7-4770-44CF-A3FB-BF2C8B11BCD9}"/>
-              </a:ext>
-            </a:extLst>
-          </p:cNvPr>
-          <p:cNvSpPr>
-            <a:spLocks xmlns:a="http://schemas.openxmlformats.org/drawingml/2006/main" noGrp="1"/>
-          </p:cNvSpPr>
-          <p:nvPr/>
-        </p:nvSpPr>
-        <p:spPr>
-          <a:xfrm xmlns:a="http://schemas.openxmlformats.org/drawingml/2006/main">
-            <a:off x="781050" y="3981450"/>
-            <a:ext cx="66675" cy="228600"/>
+          <p:cNvPr id="44" name="">
+            <a:extLst xmlns:a="http://schemas.openxmlformats.org/drawingml/2006/main">
+              <a:ext uri="{FF2B5EF4-FFF2-40B4-BE49-F238E27FC236}">
+                <a16:creationId xmlns:a16="http://schemas.microsoft.com/office/drawing/2014/main" id="{4D3B0E42-3157-4DA6-8C9C-33E15F40EFB2}"/>
+              </a:ext>
+            </a:extLst>
+          </p:cNvPr>
+          <p:cNvSpPr>
+            <a:spLocks xmlns:a="http://schemas.openxmlformats.org/drawingml/2006/main" noGrp="1"/>
+          </p:cNvSpPr>
+          <p:nvPr/>
+        </p:nvSpPr>
+        <p:spPr>
+          <a:xfrm xmlns:a="http://schemas.openxmlformats.org/drawingml/2006/main">
+            <a:off x="7010400" y="4705350"/>
+            <a:ext cx="3429000" cy="361950"/>
           </a:xfrm>
           <a:prstGeom xmlns:a="http://schemas.openxmlformats.org/drawingml/2006/main" prst="rect">
             <a:avLst/>
           </a:prstGeom>
           <a:solidFill xmlns:a="http://schemas.openxmlformats.org/drawingml/2006/main">
-            <a:srgbClr val="145CFF"/>
+            <a:srgbClr val="111827"/>
           </a:solidFill>
           <a:ln xmlns:a="http://schemas.openxmlformats.org/drawingml/2006/main">
             <a:noFill/>
@@ -3238,22 +4278,22 @@
       </p:sp>
       <p:sp>
         <p:nvSpPr>
-          <p:cNvPr id="23" name="">
-            <a:extLst xmlns:a="http://schemas.openxmlformats.org/drawingml/2006/main">
-              <a:ext uri="{FF2B5EF4-FFF2-40B4-BE49-F238E27FC236}">
-                <a16:creationId xmlns:a16="http://schemas.microsoft.com/office/drawing/2014/main" id="{709A1C64-7371-4406-B714-C61DC5CB50A1}"/>
-              </a:ext>
-            </a:extLst>
-          </p:cNvPr>
-          <p:cNvSpPr>
-            <a:spLocks xmlns:a="http://schemas.openxmlformats.org/drawingml/2006/main" noGrp="1"/>
-          </p:cNvSpPr>
-          <p:nvPr/>
-        </p:nvSpPr>
-        <p:spPr>
-          <a:xfrm xmlns:a="http://schemas.openxmlformats.org/drawingml/2006/main">
-            <a:off x="914400" y="3990975"/>
-            <a:ext cx="2476500" cy="228600"/>
+          <p:cNvPr id="45" name="">
+            <a:extLst xmlns:a="http://schemas.openxmlformats.org/drawingml/2006/main">
+              <a:ext uri="{FF2B5EF4-FFF2-40B4-BE49-F238E27FC236}">
+                <a16:creationId xmlns:a16="http://schemas.microsoft.com/office/drawing/2014/main" id="{08EFE54A-0D49-48AF-B5F2-6F1F3954207F}"/>
+              </a:ext>
+            </a:extLst>
+          </p:cNvPr>
+          <p:cNvSpPr>
+            <a:spLocks xmlns:a="http://schemas.openxmlformats.org/drawingml/2006/main" noGrp="1"/>
+          </p:cNvSpPr>
+          <p:nvPr/>
+        </p:nvSpPr>
+        <p:spPr>
+          <a:xfrm xmlns:a="http://schemas.openxmlformats.org/drawingml/2006/main">
+            <a:off x="7124700" y="4810125"/>
+            <a:ext cx="388620" cy="171450"/>
           </a:xfrm>
           <a:prstGeom xmlns:a="http://schemas.openxmlformats.org/drawingml/2006/main" prst="rect">
             <a:avLst/>
@@ -3269,52 +4309,162 @@
           <a:lstStyle xmlns:a="http://schemas.openxmlformats.org/drawingml/2006/main"/>
           <a:p xmlns:a="http://schemas.openxmlformats.org/drawingml/2006/main">
             <a:pPr algn="l">
-              <a:defRPr sz="1275" b="1">
-                <a:solidFill>
-                  <a:srgbClr val="111827"/>
-                </a:solidFill>
-                <a:latin typeface="PingFang SC"/>
-                <a:ea typeface="PingFang SC"/>
-                <a:cs typeface="PingFang SC"/>
-              </a:defRPr>
-            </a:pPr>
-            <a:r>
-              <a:rPr sz="1275" b="1">
-                <a:solidFill>
-                  <a:srgbClr val="111827"/>
-                </a:solidFill>
-                <a:latin typeface="PingFang SC"/>
-                <a:ea typeface="PingFang SC"/>
-                <a:cs typeface="PingFang SC"/>
-              </a:rPr>
-              <a:t>新链路</a:t>
-            </a:r>
-          </a:p>
-        </p:txBody>
-      </p:sp>
-      <p:sp>
-        <p:nvSpPr>
-          <p:cNvPr id="24" name="">
-            <a:extLst xmlns:a="http://schemas.openxmlformats.org/drawingml/2006/main">
-              <a:ext uri="{FF2B5EF4-FFF2-40B4-BE49-F238E27FC236}">
-                <a16:creationId xmlns:a16="http://schemas.microsoft.com/office/drawing/2014/main" id="{FC771EE6-EAE3-4451-9B55-391D137B496E}"/>
-              </a:ext>
-            </a:extLst>
-          </p:cNvPr>
-          <p:cNvSpPr>
-            <a:spLocks xmlns:a="http://schemas.openxmlformats.org/drawingml/2006/main" noGrp="1"/>
-          </p:cNvSpPr>
-          <p:nvPr/>
-        </p:nvSpPr>
-        <p:spPr>
-          <a:xfrm xmlns:a="http://schemas.openxmlformats.org/drawingml/2006/main">
-            <a:off x="819150" y="4552950"/>
-            <a:ext cx="857250" cy="666750"/>
-          </a:xfrm>
-          <a:prstGeom xmlns:a="http://schemas.openxmlformats.org/drawingml/2006/main" prst="roundRect">
-            <a:avLst>
-              <a:gd name="adj" fmla="val 2857"/>
-            </a:avLst>
+              <a:defRPr sz="975" b="1">
+                <a:solidFill>
+                  <a:srgbClr val="FFFFFF"/>
+                </a:solidFill>
+                <a:latin typeface="PingFang SC"/>
+                <a:ea typeface="PingFang SC"/>
+                <a:cs typeface="PingFang SC"/>
+              </a:defRPr>
+            </a:pPr>
+            <a:r>
+              <a:rPr sz="975" b="1">
+                <a:solidFill>
+                  <a:srgbClr val="FFFFFF"/>
+                </a:solidFill>
+                <a:latin typeface="PingFang SC"/>
+                <a:ea typeface="PingFang SC"/>
+                <a:cs typeface="PingFang SC"/>
+              </a:rPr>
+              <a:t>工作项</a:t>
+            </a:r>
+          </a:p>
+        </p:txBody>
+      </p:sp>
+      <p:sp>
+        <p:nvSpPr>
+          <p:cNvPr id="46" name="">
+            <a:extLst xmlns:a="http://schemas.openxmlformats.org/drawingml/2006/main">
+              <a:ext uri="{FF2B5EF4-FFF2-40B4-BE49-F238E27FC236}">
+                <a16:creationId xmlns:a16="http://schemas.microsoft.com/office/drawing/2014/main" id="{29DA2B0D-9E77-4B70-AE47-A833FADB77C0}"/>
+              </a:ext>
+            </a:extLst>
+          </p:cNvPr>
+          <p:cNvSpPr>
+            <a:spLocks xmlns:a="http://schemas.openxmlformats.org/drawingml/2006/main" noGrp="1"/>
+          </p:cNvSpPr>
+          <p:nvPr/>
+        </p:nvSpPr>
+        <p:spPr>
+          <a:xfrm xmlns:a="http://schemas.openxmlformats.org/drawingml/2006/main">
+            <a:off x="7741920" y="4810125"/>
+            <a:ext cx="1657350" cy="171450"/>
+          </a:xfrm>
+          <a:prstGeom xmlns:a="http://schemas.openxmlformats.org/drawingml/2006/main" prst="rect">
+            <a:avLst/>
+          </a:prstGeom>
+          <a:ln xmlns:a="http://schemas.openxmlformats.org/drawingml/2006/main">
+            <a:noFill/>
+          </a:ln>
+        </p:spPr>
+        <p:txBody>
+          <a:bodyPr xmlns:a="http://schemas.openxmlformats.org/drawingml/2006/main" lIns="0" tIns="0" rIns="0" bIns="0" anchor="t">
+            <a:normAutofit fontScale="100000"/>
+          </a:bodyPr>
+          <a:lstStyle xmlns:a="http://schemas.openxmlformats.org/drawingml/2006/main"/>
+          <a:p xmlns:a="http://schemas.openxmlformats.org/drawingml/2006/main">
+            <a:pPr algn="l">
+              <a:defRPr sz="975" b="1">
+                <a:solidFill>
+                  <a:srgbClr val="FFFFFF"/>
+                </a:solidFill>
+                <a:latin typeface="PingFang SC"/>
+                <a:ea typeface="PingFang SC"/>
+                <a:cs typeface="PingFang SC"/>
+              </a:defRPr>
+            </a:pPr>
+            <a:r>
+              <a:rPr sz="975" b="1">
+                <a:solidFill>
+                  <a:srgbClr val="FFFFFF"/>
+                </a:solidFill>
+                <a:latin typeface="PingFang SC"/>
+                <a:ea typeface="PingFang SC"/>
+                <a:cs typeface="PingFang SC"/>
+              </a:rPr>
+              <a:t>交付结果</a:t>
+            </a:r>
+          </a:p>
+        </p:txBody>
+      </p:sp>
+      <p:sp>
+        <p:nvSpPr>
+          <p:cNvPr id="47" name="">
+            <a:extLst xmlns:a="http://schemas.openxmlformats.org/drawingml/2006/main">
+              <a:ext uri="{FF2B5EF4-FFF2-40B4-BE49-F238E27FC236}">
+                <a16:creationId xmlns:a16="http://schemas.microsoft.com/office/drawing/2014/main" id="{CEA7240C-0777-47EF-A986-20AC9206DF3E}"/>
+              </a:ext>
+            </a:extLst>
+          </p:cNvPr>
+          <p:cNvSpPr>
+            <a:spLocks xmlns:a="http://schemas.openxmlformats.org/drawingml/2006/main" noGrp="1"/>
+          </p:cNvSpPr>
+          <p:nvPr/>
+        </p:nvSpPr>
+        <p:spPr>
+          <a:xfrm xmlns:a="http://schemas.openxmlformats.org/drawingml/2006/main">
+            <a:off x="9627870" y="4810125"/>
+            <a:ext cx="697230" cy="171450"/>
+          </a:xfrm>
+          <a:prstGeom xmlns:a="http://schemas.openxmlformats.org/drawingml/2006/main" prst="rect">
+            <a:avLst/>
+          </a:prstGeom>
+          <a:ln xmlns:a="http://schemas.openxmlformats.org/drawingml/2006/main">
+            <a:noFill/>
+          </a:ln>
+        </p:spPr>
+        <p:txBody>
+          <a:bodyPr xmlns:a="http://schemas.openxmlformats.org/drawingml/2006/main" lIns="0" tIns="0" rIns="0" bIns="0" anchor="t">
+            <a:normAutofit fontScale="100000"/>
+          </a:bodyPr>
+          <a:lstStyle xmlns:a="http://schemas.openxmlformats.org/drawingml/2006/main"/>
+          <a:p xmlns:a="http://schemas.openxmlformats.org/drawingml/2006/main">
+            <a:pPr algn="ctr">
+              <a:defRPr sz="975" b="1">
+                <a:solidFill>
+                  <a:srgbClr val="FFFFFF"/>
+                </a:solidFill>
+                <a:latin typeface="PingFang SC"/>
+                <a:ea typeface="PingFang SC"/>
+                <a:cs typeface="PingFang SC"/>
+              </a:defRPr>
+            </a:pPr>
+            <a:r>
+              <a:rPr sz="975" b="1">
+                <a:solidFill>
+                  <a:srgbClr val="FFFFFF"/>
+                </a:solidFill>
+                <a:latin typeface="PingFang SC"/>
+                <a:ea typeface="PingFang SC"/>
+                <a:cs typeface="PingFang SC"/>
+              </a:rPr>
+              <a:t>状态口径</a:t>
+            </a:r>
+          </a:p>
+        </p:txBody>
+      </p:sp>
+      <p:sp>
+        <p:nvSpPr>
+          <p:cNvPr id="48" name="">
+            <a:extLst xmlns:a="http://schemas.openxmlformats.org/drawingml/2006/main">
+              <a:ext uri="{FF2B5EF4-FFF2-40B4-BE49-F238E27FC236}">
+                <a16:creationId xmlns:a16="http://schemas.microsoft.com/office/drawing/2014/main" id="{BD86D483-B836-4D21-9B5B-1FAF99809343}"/>
+              </a:ext>
+            </a:extLst>
+          </p:cNvPr>
+          <p:cNvSpPr>
+            <a:spLocks xmlns:a="http://schemas.openxmlformats.org/drawingml/2006/main" noGrp="1"/>
+          </p:cNvSpPr>
+          <p:nvPr/>
+        </p:nvSpPr>
+        <p:spPr>
+          <a:xfrm xmlns:a="http://schemas.openxmlformats.org/drawingml/2006/main">
+            <a:off x="7010400" y="5067300"/>
+            <a:ext cx="3429000" cy="361950"/>
+          </a:xfrm>
+          <a:prstGeom xmlns:a="http://schemas.openxmlformats.org/drawingml/2006/main" prst="rect">
+            <a:avLst/>
           </a:prstGeom>
           <a:solidFill xmlns:a="http://schemas.openxmlformats.org/drawingml/2006/main">
             <a:srgbClr val="FFFFFF"/>
@@ -3328,22 +4478,166 @@
       </p:sp>
       <p:sp>
         <p:nvSpPr>
-          <p:cNvPr id="25" name="">
-            <a:extLst xmlns:a="http://schemas.openxmlformats.org/drawingml/2006/main">
-              <a:ext uri="{FF2B5EF4-FFF2-40B4-BE49-F238E27FC236}">
-                <a16:creationId xmlns:a16="http://schemas.microsoft.com/office/drawing/2014/main" id="{081931FC-9976-448A-BD35-CE5146C8E2FB}"/>
-              </a:ext>
-            </a:extLst>
-          </p:cNvPr>
-          <p:cNvSpPr>
-            <a:spLocks xmlns:a="http://schemas.openxmlformats.org/drawingml/2006/main" noGrp="1"/>
-          </p:cNvSpPr>
-          <p:nvPr/>
-        </p:nvSpPr>
-        <p:spPr>
-          <a:xfrm xmlns:a="http://schemas.openxmlformats.org/drawingml/2006/main">
-            <a:off x="933450" y="4667250"/>
-            <a:ext cx="628650" cy="438150"/>
+          <p:cNvPr id="49" name="">
+            <a:extLst xmlns:a="http://schemas.openxmlformats.org/drawingml/2006/main">
+              <a:ext uri="{FF2B5EF4-FFF2-40B4-BE49-F238E27FC236}">
+                <a16:creationId xmlns:a16="http://schemas.microsoft.com/office/drawing/2014/main" id="{C4F48E52-B6E7-492C-A94E-54CE5D1CC43F}"/>
+              </a:ext>
+            </a:extLst>
+          </p:cNvPr>
+          <p:cNvSpPr>
+            <a:spLocks xmlns:a="http://schemas.openxmlformats.org/drawingml/2006/main" noGrp="1"/>
+          </p:cNvSpPr>
+          <p:nvPr/>
+        </p:nvSpPr>
+        <p:spPr>
+          <a:xfrm xmlns:a="http://schemas.openxmlformats.org/drawingml/2006/main">
+            <a:off x="7124700" y="5200650"/>
+            <a:ext cx="388620" cy="38100"/>
+          </a:xfrm>
+          <a:prstGeom xmlns:a="http://schemas.openxmlformats.org/drawingml/2006/main" prst="rect">
+            <a:avLst/>
+          </a:prstGeom>
+          <a:ln xmlns:a="http://schemas.openxmlformats.org/drawingml/2006/main">
+            <a:noFill/>
+          </a:ln>
+        </p:spPr>
+        <p:txBody>
+          <a:bodyPr xmlns:a="http://schemas.openxmlformats.org/drawingml/2006/main" lIns="0" tIns="0" rIns="0" bIns="0" anchor="t">
+            <a:normAutofit fontScale="23809"/>
+          </a:bodyPr>
+          <a:lstStyle xmlns:a="http://schemas.openxmlformats.org/drawingml/2006/main"/>
+          <a:p xmlns:a="http://schemas.openxmlformats.org/drawingml/2006/main">
+            <a:pPr algn="l">
+              <a:defRPr sz="1050" b="1">
+                <a:solidFill>
+                  <a:srgbClr val="111827"/>
+                </a:solidFill>
+                <a:latin typeface="PingFang SC"/>
+                <a:ea typeface="PingFang SC"/>
+                <a:cs typeface="PingFang SC"/>
+              </a:defRPr>
+            </a:pPr>
+            <a:r>
+              <a:rPr sz="1050" b="1">
+                <a:solidFill>
+                  <a:srgbClr val="111827"/>
+                </a:solidFill>
+                <a:latin typeface="PingFang SC"/>
+                <a:ea typeface="PingFang SC"/>
+                <a:cs typeface="PingFang SC"/>
+              </a:rPr>
+              <a:t>真实提交回放</a:t>
+            </a:r>
+          </a:p>
+        </p:txBody>
+      </p:sp>
+      <p:sp>
+        <p:nvSpPr>
+          <p:cNvPr id="50" name="">
+            <a:extLst xmlns:a="http://schemas.openxmlformats.org/drawingml/2006/main">
+              <a:ext uri="{FF2B5EF4-FFF2-40B4-BE49-F238E27FC236}">
+                <a16:creationId xmlns:a16="http://schemas.microsoft.com/office/drawing/2014/main" id="{9DAE566E-AFC5-4881-AB90-3A4E7E0BC949}"/>
+              </a:ext>
+            </a:extLst>
+          </p:cNvPr>
+          <p:cNvSpPr>
+            <a:spLocks xmlns:a="http://schemas.openxmlformats.org/drawingml/2006/main" noGrp="1"/>
+          </p:cNvSpPr>
+          <p:nvPr/>
+        </p:nvSpPr>
+        <p:spPr>
+          <a:xfrm xmlns:a="http://schemas.openxmlformats.org/drawingml/2006/main">
+            <a:off x="7741920" y="5200650"/>
+            <a:ext cx="1657350" cy="38100"/>
+          </a:xfrm>
+          <a:prstGeom xmlns:a="http://schemas.openxmlformats.org/drawingml/2006/main" prst="rect">
+            <a:avLst/>
+          </a:prstGeom>
+          <a:ln xmlns:a="http://schemas.openxmlformats.org/drawingml/2006/main">
+            <a:noFill/>
+          </a:ln>
+        </p:spPr>
+        <p:txBody>
+          <a:bodyPr xmlns:a="http://schemas.openxmlformats.org/drawingml/2006/main" lIns="0" tIns="0" rIns="0" bIns="0" anchor="t">
+            <a:normAutofit fontScale="24679"/>
+          </a:bodyPr>
+          <a:lstStyle xmlns:a="http://schemas.openxmlformats.org/drawingml/2006/main"/>
+          <a:p xmlns:a="http://schemas.openxmlformats.org/drawingml/2006/main">
+            <a:pPr algn="l">
+              <a:defRPr sz="1013" b="0">
+                <a:solidFill>
+                  <a:srgbClr val="273140"/>
+                </a:solidFill>
+                <a:latin typeface="PingFang SC"/>
+                <a:ea typeface="PingFang SC"/>
+                <a:cs typeface="PingFang SC"/>
+              </a:defRPr>
+            </a:pPr>
+            <a:r>
+              <a:rPr sz="1013" b="0">
+                <a:solidFill>
+                  <a:srgbClr val="273140"/>
+                </a:solidFill>
+                <a:latin typeface="PingFang SC"/>
+                <a:ea typeface="PingFang SC"/>
+                <a:cs typeface="PingFang SC"/>
+              </a:rPr>
+              <a:t>6 个 case 成功运行</a:t>
+            </a:r>
+          </a:p>
+        </p:txBody>
+      </p:sp>
+      <p:sp>
+        <p:nvSpPr>
+          <p:cNvPr id="51" name="">
+            <a:extLst xmlns:a="http://schemas.openxmlformats.org/drawingml/2006/main">
+              <a:ext uri="{FF2B5EF4-FFF2-40B4-BE49-F238E27FC236}">
+                <a16:creationId xmlns:a16="http://schemas.microsoft.com/office/drawing/2014/main" id="{F55D97AF-6E48-4CF8-ABD9-37F7C494E473}"/>
+              </a:ext>
+            </a:extLst>
+          </p:cNvPr>
+          <p:cNvSpPr>
+            <a:spLocks xmlns:a="http://schemas.openxmlformats.org/drawingml/2006/main" noGrp="1"/>
+          </p:cNvSpPr>
+          <p:nvPr/>
+        </p:nvSpPr>
+        <p:spPr>
+          <a:xfrm xmlns:a="http://schemas.openxmlformats.org/drawingml/2006/main">
+            <a:off x="9685020" y="5238750"/>
+            <a:ext cx="582930" cy="247650"/>
+          </a:xfrm>
+          <a:prstGeom xmlns:a="http://schemas.openxmlformats.org/drawingml/2006/main" prst="roundRect">
+            <a:avLst>
+              <a:gd name="adj" fmla="val 15385"/>
+            </a:avLst>
+          </a:prstGeom>
+          <a:solidFill xmlns:a="http://schemas.openxmlformats.org/drawingml/2006/main">
+            <a:srgbClr val="EAF8F2"/>
+          </a:solidFill>
+          <a:ln xmlns:a="http://schemas.openxmlformats.org/drawingml/2006/main">
+            <a:noFill/>
+          </a:ln>
+        </p:spPr>
+      </p:sp>
+      <p:sp>
+        <p:nvSpPr>
+          <p:cNvPr id="52" name="">
+            <a:extLst xmlns:a="http://schemas.openxmlformats.org/drawingml/2006/main">
+              <a:ext uri="{FF2B5EF4-FFF2-40B4-BE49-F238E27FC236}">
+                <a16:creationId xmlns:a16="http://schemas.microsoft.com/office/drawing/2014/main" id="{8F9F225E-DC65-4A33-8894-3105E5AE1776}"/>
+              </a:ext>
+            </a:extLst>
+          </p:cNvPr>
+          <p:cNvSpPr>
+            <a:spLocks xmlns:a="http://schemas.openxmlformats.org/drawingml/2006/main" noGrp="1"/>
+          </p:cNvSpPr>
+          <p:nvPr/>
+        </p:nvSpPr>
+        <p:spPr>
+          <a:xfrm xmlns:a="http://schemas.openxmlformats.org/drawingml/2006/main">
+            <a:off x="9780270" y="5276850"/>
+            <a:ext cx="392430" cy="171450"/>
           </a:xfrm>
           <a:prstGeom xmlns:a="http://schemas.openxmlformats.org/drawingml/2006/main" prst="rect">
             <a:avLst/>
@@ -3359,7 +4653,95 @@
           <a:lstStyle xmlns:a="http://schemas.openxmlformats.org/drawingml/2006/main"/>
           <a:p xmlns:a="http://schemas.openxmlformats.org/drawingml/2006/main">
             <a:pPr algn="ctr">
-              <a:defRPr sz="1200" b="1">
+              <a:defRPr sz="900" b="1">
+                <a:solidFill>
+                  <a:srgbClr val="12B886"/>
+                </a:solidFill>
+                <a:latin typeface="PingFang SC"/>
+                <a:ea typeface="PingFang SC"/>
+                <a:cs typeface="PingFang SC"/>
+              </a:defRPr>
+            </a:pPr>
+            <a:r>
+              <a:rPr sz="900" b="1">
+                <a:solidFill>
+                  <a:srgbClr val="12B886"/>
+                </a:solidFill>
+                <a:latin typeface="PingFang SC"/>
+                <a:ea typeface="PingFang SC"/>
+                <a:cs typeface="PingFang SC"/>
+              </a:rPr>
+              <a:t>已验证</a:t>
+            </a:r>
+          </a:p>
+        </p:txBody>
+      </p:sp>
+      <p:sp>
+        <p:nvSpPr>
+          <p:cNvPr id="53" name="">
+            <a:extLst xmlns:a="http://schemas.openxmlformats.org/drawingml/2006/main">
+              <a:ext uri="{FF2B5EF4-FFF2-40B4-BE49-F238E27FC236}">
+                <a16:creationId xmlns:a16="http://schemas.microsoft.com/office/drawing/2014/main" id="{CA238801-A6E9-467F-819D-7A4D8EE26296}"/>
+              </a:ext>
+            </a:extLst>
+          </p:cNvPr>
+          <p:cNvSpPr>
+            <a:spLocks xmlns:a="http://schemas.openxmlformats.org/drawingml/2006/main" noGrp="1"/>
+          </p:cNvSpPr>
+          <p:nvPr/>
+        </p:nvSpPr>
+        <p:spPr>
+          <a:xfrm xmlns:a="http://schemas.openxmlformats.org/drawingml/2006/main">
+            <a:off x="7010400" y="5429250"/>
+            <a:ext cx="3429000" cy="361950"/>
+          </a:xfrm>
+          <a:prstGeom xmlns:a="http://schemas.openxmlformats.org/drawingml/2006/main" prst="rect">
+            <a:avLst/>
+          </a:prstGeom>
+          <a:solidFill xmlns:a="http://schemas.openxmlformats.org/drawingml/2006/main">
+            <a:srgbClr val="F4F7FB"/>
+          </a:solidFill>
+          <a:ln xmlns:a="http://schemas.openxmlformats.org/drawingml/2006/main" w="9525">
+            <a:solidFill>
+              <a:srgbClr val="E6EBF2"/>
+            </a:solidFill>
+          </a:ln>
+        </p:spPr>
+      </p:sp>
+      <p:sp>
+        <p:nvSpPr>
+          <p:cNvPr id="54" name="">
+            <a:extLst xmlns:a="http://schemas.openxmlformats.org/drawingml/2006/main">
+              <a:ext uri="{FF2B5EF4-FFF2-40B4-BE49-F238E27FC236}">
+                <a16:creationId xmlns:a16="http://schemas.microsoft.com/office/drawing/2014/main" id="{0B28AC84-E87B-442D-81A5-89BA02A2B382}"/>
+              </a:ext>
+            </a:extLst>
+          </p:cNvPr>
+          <p:cNvSpPr>
+            <a:spLocks xmlns:a="http://schemas.openxmlformats.org/drawingml/2006/main" noGrp="1"/>
+          </p:cNvSpPr>
+          <p:nvPr/>
+        </p:nvSpPr>
+        <p:spPr>
+          <a:xfrm xmlns:a="http://schemas.openxmlformats.org/drawingml/2006/main">
+            <a:off x="7124700" y="5562600"/>
+            <a:ext cx="388620" cy="38100"/>
+          </a:xfrm>
+          <a:prstGeom xmlns:a="http://schemas.openxmlformats.org/drawingml/2006/main" prst="rect">
+            <a:avLst/>
+          </a:prstGeom>
+          <a:ln xmlns:a="http://schemas.openxmlformats.org/drawingml/2006/main">
+            <a:noFill/>
+          </a:ln>
+        </p:spPr>
+        <p:txBody>
+          <a:bodyPr xmlns:a="http://schemas.openxmlformats.org/drawingml/2006/main" lIns="0" tIns="0" rIns="0" bIns="0" anchor="t">
+            <a:normAutofit fontScale="23809"/>
+          </a:bodyPr>
+          <a:lstStyle xmlns:a="http://schemas.openxmlformats.org/drawingml/2006/main"/>
+          <a:p xmlns:a="http://schemas.openxmlformats.org/drawingml/2006/main">
+            <a:pPr algn="l">
+              <a:defRPr sz="1050" b="1">
                 <a:solidFill>
                   <a:srgbClr val="111827"/>
                 </a:solidFill>
@@ -3369,7 +4751,7 @@
               </a:defRPr>
             </a:pPr>
             <a:r>
-              <a:rPr sz="1200" b="1">
+              <a:rPr sz="1050" b="1">
                 <a:solidFill>
                   <a:srgbClr val="111827"/>
                 </a:solidFill>
@@ -3377,29 +4759,29 @@
                 <a:ea typeface="PingFang SC"/>
                 <a:cs typeface="PingFang SC"/>
               </a:rPr>
-              <a:t>代码变更</a:t>
-            </a:r>
-          </a:p>
-        </p:txBody>
-      </p:sp>
-      <p:sp>
-        <p:nvSpPr>
-          <p:cNvPr id="26" name="">
-            <a:extLst xmlns:a="http://schemas.openxmlformats.org/drawingml/2006/main">
-              <a:ext uri="{FF2B5EF4-FFF2-40B4-BE49-F238E27FC236}">
-                <a16:creationId xmlns:a16="http://schemas.microsoft.com/office/drawing/2014/main" id="{37BC9644-F94C-4646-8539-CDAEE60D55A3}"/>
-              </a:ext>
-            </a:extLst>
-          </p:cNvPr>
-          <p:cNvSpPr>
-            <a:spLocks xmlns:a="http://schemas.openxmlformats.org/drawingml/2006/main" noGrp="1"/>
-          </p:cNvSpPr>
-          <p:nvPr/>
-        </p:nvSpPr>
-        <p:spPr>
-          <a:xfrm xmlns:a="http://schemas.openxmlformats.org/drawingml/2006/main">
-            <a:off x="1695450" y="4743450"/>
-            <a:ext cx="190500" cy="247650"/>
+              <a:t>历史问题反向样本</a:t>
+            </a:r>
+          </a:p>
+        </p:txBody>
+      </p:sp>
+      <p:sp>
+        <p:nvSpPr>
+          <p:cNvPr id="55" name="">
+            <a:extLst xmlns:a="http://schemas.openxmlformats.org/drawingml/2006/main">
+              <a:ext uri="{FF2B5EF4-FFF2-40B4-BE49-F238E27FC236}">
+                <a16:creationId xmlns:a16="http://schemas.microsoft.com/office/drawing/2014/main" id="{DF869899-2AAE-44E0-B508-5FAD46DAAF2B}"/>
+              </a:ext>
+            </a:extLst>
+          </p:cNvPr>
+          <p:cNvSpPr>
+            <a:spLocks xmlns:a="http://schemas.openxmlformats.org/drawingml/2006/main" noGrp="1"/>
+          </p:cNvSpPr>
+          <p:nvPr/>
+        </p:nvSpPr>
+        <p:spPr>
+          <a:xfrm xmlns:a="http://schemas.openxmlformats.org/drawingml/2006/main">
+            <a:off x="7741920" y="5562600"/>
+            <a:ext cx="1657350" cy="38100"/>
           </a:xfrm>
           <a:prstGeom xmlns:a="http://schemas.openxmlformats.org/drawingml/2006/main" prst="rect">
             <a:avLst/>
@@ -3410,57 +4792,143 @@
         </p:spPr>
         <p:txBody>
           <a:bodyPr xmlns:a="http://schemas.openxmlformats.org/drawingml/2006/main" lIns="0" tIns="0" rIns="0" bIns="0" anchor="t">
-            <a:normAutofit fontScale="100000"/>
+            <a:normAutofit fontScale="24679"/>
           </a:bodyPr>
           <a:lstStyle xmlns:a="http://schemas.openxmlformats.org/drawingml/2006/main"/>
           <a:p xmlns:a="http://schemas.openxmlformats.org/drawingml/2006/main">
             <a:pPr algn="l">
-              <a:defRPr sz="1500" b="1">
-                <a:solidFill>
-                  <a:srgbClr val="145CFF"/>
-                </a:solidFill>
-                <a:latin typeface="PingFang SC"/>
-                <a:ea typeface="PingFang SC"/>
-                <a:cs typeface="PingFang SC"/>
-              </a:defRPr>
-            </a:pPr>
-            <a:r>
-              <a:rPr sz="1500" b="1">
-                <a:solidFill>
-                  <a:srgbClr val="145CFF"/>
-                </a:solidFill>
-                <a:latin typeface="PingFang SC"/>
-                <a:ea typeface="PingFang SC"/>
-                <a:cs typeface="PingFang SC"/>
-              </a:rPr>
-              <a:t>→</a:t>
-            </a:r>
-          </a:p>
-        </p:txBody>
-      </p:sp>
-      <p:sp>
-        <p:nvSpPr>
-          <p:cNvPr id="27" name="">
-            <a:extLst xmlns:a="http://schemas.openxmlformats.org/drawingml/2006/main">
-              <a:ext uri="{FF2B5EF4-FFF2-40B4-BE49-F238E27FC236}">
-                <a16:creationId xmlns:a16="http://schemas.microsoft.com/office/drawing/2014/main" id="{28427800-81C4-4958-AC5E-F834C3E366E2}"/>
-              </a:ext>
-            </a:extLst>
-          </p:cNvPr>
-          <p:cNvSpPr>
-            <a:spLocks xmlns:a="http://schemas.openxmlformats.org/drawingml/2006/main" noGrp="1"/>
-          </p:cNvSpPr>
-          <p:nvPr/>
-        </p:nvSpPr>
-        <p:spPr>
-          <a:xfrm xmlns:a="http://schemas.openxmlformats.org/drawingml/2006/main">
-            <a:off x="1847850" y="4552950"/>
-            <a:ext cx="857250" cy="666750"/>
+              <a:defRPr sz="1013" b="0">
+                <a:solidFill>
+                  <a:srgbClr val="273140"/>
+                </a:solidFill>
+                <a:latin typeface="PingFang SC"/>
+                <a:ea typeface="PingFang SC"/>
+                <a:cs typeface="PingFang SC"/>
+              </a:defRPr>
+            </a:pPr>
+            <a:r>
+              <a:rPr sz="1013" b="0">
+                <a:solidFill>
+                  <a:srgbClr val="273140"/>
+                </a:solidFill>
+                <a:latin typeface="PingFang SC"/>
+                <a:ea typeface="PingFang SC"/>
+                <a:cs typeface="PingFang SC"/>
+              </a:rPr>
+              <a:t>4 / 4 在中间过程触达预期风险</a:t>
+            </a:r>
+          </a:p>
+        </p:txBody>
+      </p:sp>
+      <p:sp>
+        <p:nvSpPr>
+          <p:cNvPr id="56" name="">
+            <a:extLst xmlns:a="http://schemas.openxmlformats.org/drawingml/2006/main">
+              <a:ext uri="{FF2B5EF4-FFF2-40B4-BE49-F238E27FC236}">
+                <a16:creationId xmlns:a16="http://schemas.microsoft.com/office/drawing/2014/main" id="{42DA83A8-6577-4E79-AE24-1997D37839B5}"/>
+              </a:ext>
+            </a:extLst>
+          </p:cNvPr>
+          <p:cNvSpPr>
+            <a:spLocks xmlns:a="http://schemas.openxmlformats.org/drawingml/2006/main" noGrp="1"/>
+          </p:cNvSpPr>
+          <p:nvPr/>
+        </p:nvSpPr>
+        <p:spPr>
+          <a:xfrm xmlns:a="http://schemas.openxmlformats.org/drawingml/2006/main">
+            <a:off x="9685020" y="5600700"/>
+            <a:ext cx="582930" cy="247650"/>
           </a:xfrm>
           <a:prstGeom xmlns:a="http://schemas.openxmlformats.org/drawingml/2006/main" prst="roundRect">
             <a:avLst>
-              <a:gd name="adj" fmla="val 2857"/>
+              <a:gd name="adj" fmla="val 15385"/>
             </a:avLst>
+          </a:prstGeom>
+          <a:solidFill xmlns:a="http://schemas.openxmlformats.org/drawingml/2006/main">
+            <a:srgbClr val="EAF1FF"/>
+          </a:solidFill>
+          <a:ln xmlns:a="http://schemas.openxmlformats.org/drawingml/2006/main">
+            <a:noFill/>
+          </a:ln>
+        </p:spPr>
+      </p:sp>
+      <p:sp>
+        <p:nvSpPr>
+          <p:cNvPr id="57" name="">
+            <a:extLst xmlns:a="http://schemas.openxmlformats.org/drawingml/2006/main">
+              <a:ext uri="{FF2B5EF4-FFF2-40B4-BE49-F238E27FC236}">
+                <a16:creationId xmlns:a16="http://schemas.microsoft.com/office/drawing/2014/main" id="{5699ECC7-FE06-472B-A710-B462B0175EC5}"/>
+              </a:ext>
+            </a:extLst>
+          </p:cNvPr>
+          <p:cNvSpPr>
+            <a:spLocks xmlns:a="http://schemas.openxmlformats.org/drawingml/2006/main" noGrp="1"/>
+          </p:cNvSpPr>
+          <p:nvPr/>
+        </p:nvSpPr>
+        <p:spPr>
+          <a:xfrm xmlns:a="http://schemas.openxmlformats.org/drawingml/2006/main">
+            <a:off x="9780270" y="5638800"/>
+            <a:ext cx="392430" cy="171450"/>
+          </a:xfrm>
+          <a:prstGeom xmlns:a="http://schemas.openxmlformats.org/drawingml/2006/main" prst="rect">
+            <a:avLst/>
+          </a:prstGeom>
+          <a:ln xmlns:a="http://schemas.openxmlformats.org/drawingml/2006/main">
+            <a:noFill/>
+          </a:ln>
+        </p:spPr>
+        <p:txBody>
+          <a:bodyPr xmlns:a="http://schemas.openxmlformats.org/drawingml/2006/main" lIns="0" tIns="0" rIns="0" bIns="0" anchor="ctr">
+            <a:normAutofit fontScale="100000"/>
+          </a:bodyPr>
+          <a:lstStyle xmlns:a="http://schemas.openxmlformats.org/drawingml/2006/main"/>
+          <a:p xmlns:a="http://schemas.openxmlformats.org/drawingml/2006/main">
+            <a:pPr algn="ctr">
+              <a:defRPr sz="900" b="1">
+                <a:solidFill>
+                  <a:srgbClr val="145CFF"/>
+                </a:solidFill>
+                <a:latin typeface="PingFang SC"/>
+                <a:ea typeface="PingFang SC"/>
+                <a:cs typeface="PingFang SC"/>
+              </a:defRPr>
+            </a:pPr>
+            <a:r>
+              <a:rPr sz="900" b="1">
+                <a:solidFill>
+                  <a:srgbClr val="145CFF"/>
+                </a:solidFill>
+                <a:latin typeface="PingFang SC"/>
+                <a:ea typeface="PingFang SC"/>
+                <a:cs typeface="PingFang SC"/>
+              </a:rPr>
+              <a:t>触达</a:t>
+            </a:r>
+          </a:p>
+        </p:txBody>
+      </p:sp>
+      <p:sp>
+        <p:nvSpPr>
+          <p:cNvPr id="58" name="">
+            <a:extLst xmlns:a="http://schemas.openxmlformats.org/drawingml/2006/main">
+              <a:ext uri="{FF2B5EF4-FFF2-40B4-BE49-F238E27FC236}">
+                <a16:creationId xmlns:a16="http://schemas.microsoft.com/office/drawing/2014/main" id="{A51F61F5-0512-4EB5-82BF-09D304C14C79}"/>
+              </a:ext>
+            </a:extLst>
+          </p:cNvPr>
+          <p:cNvSpPr>
+            <a:spLocks xmlns:a="http://schemas.openxmlformats.org/drawingml/2006/main" noGrp="1"/>
+          </p:cNvSpPr>
+          <p:nvPr/>
+        </p:nvSpPr>
+        <p:spPr>
+          <a:xfrm xmlns:a="http://schemas.openxmlformats.org/drawingml/2006/main">
+            <a:off x="7010400" y="5791200"/>
+            <a:ext cx="3429000" cy="361950"/>
+          </a:xfrm>
+          <a:prstGeom xmlns:a="http://schemas.openxmlformats.org/drawingml/2006/main" prst="rect">
+            <a:avLst/>
           </a:prstGeom>
           <a:solidFill xmlns:a="http://schemas.openxmlformats.org/drawingml/2006/main">
             <a:srgbClr val="FFFFFF"/>
@@ -3474,38 +4942,38 @@
       </p:sp>
       <p:sp>
         <p:nvSpPr>
-          <p:cNvPr id="28" name="">
-            <a:extLst xmlns:a="http://schemas.openxmlformats.org/drawingml/2006/main">
-              <a:ext uri="{FF2B5EF4-FFF2-40B4-BE49-F238E27FC236}">
-                <a16:creationId xmlns:a16="http://schemas.microsoft.com/office/drawing/2014/main" id="{E4DD4724-CB46-4C14-A808-4D7C325DA19A}"/>
-              </a:ext>
-            </a:extLst>
-          </p:cNvPr>
-          <p:cNvSpPr>
-            <a:spLocks xmlns:a="http://schemas.openxmlformats.org/drawingml/2006/main" noGrp="1"/>
-          </p:cNvSpPr>
-          <p:nvPr/>
-        </p:nvSpPr>
-        <p:spPr>
-          <a:xfrm xmlns:a="http://schemas.openxmlformats.org/drawingml/2006/main">
-            <a:off x="1962150" y="4667250"/>
-            <a:ext cx="628650" cy="438150"/>
-          </a:xfrm>
-          <a:prstGeom xmlns:a="http://schemas.openxmlformats.org/drawingml/2006/main" prst="rect">
-            <a:avLst/>
-          </a:prstGeom>
-          <a:ln xmlns:a="http://schemas.openxmlformats.org/drawingml/2006/main">
-            <a:noFill/>
-          </a:ln>
-        </p:spPr>
-        <p:txBody>
-          <a:bodyPr xmlns:a="http://schemas.openxmlformats.org/drawingml/2006/main" lIns="0" tIns="0" rIns="0" bIns="0" anchor="ctr">
-            <a:normAutofit fontScale="100000"/>
-          </a:bodyPr>
-          <a:lstStyle xmlns:a="http://schemas.openxmlformats.org/drawingml/2006/main"/>
-          <a:p xmlns:a="http://schemas.openxmlformats.org/drawingml/2006/main">
-            <a:pPr algn="ctr">
-              <a:defRPr sz="1200" b="1">
+          <p:cNvPr id="59" name="">
+            <a:extLst xmlns:a="http://schemas.openxmlformats.org/drawingml/2006/main">
+              <a:ext uri="{FF2B5EF4-FFF2-40B4-BE49-F238E27FC236}">
+                <a16:creationId xmlns:a16="http://schemas.microsoft.com/office/drawing/2014/main" id="{1033DFB2-6202-4F87-BA2D-B846FD586E03}"/>
+              </a:ext>
+            </a:extLst>
+          </p:cNvPr>
+          <p:cNvSpPr>
+            <a:spLocks xmlns:a="http://schemas.openxmlformats.org/drawingml/2006/main" noGrp="1"/>
+          </p:cNvSpPr>
+          <p:nvPr/>
+        </p:nvSpPr>
+        <p:spPr>
+          <a:xfrm xmlns:a="http://schemas.openxmlformats.org/drawingml/2006/main">
+            <a:off x="7124700" y="5924550"/>
+            <a:ext cx="388620" cy="38100"/>
+          </a:xfrm>
+          <a:prstGeom xmlns:a="http://schemas.openxmlformats.org/drawingml/2006/main" prst="rect">
+            <a:avLst/>
+          </a:prstGeom>
+          <a:ln xmlns:a="http://schemas.openxmlformats.org/drawingml/2006/main">
+            <a:noFill/>
+          </a:ln>
+        </p:spPr>
+        <p:txBody>
+          <a:bodyPr xmlns:a="http://schemas.openxmlformats.org/drawingml/2006/main" lIns="0" tIns="0" rIns="0" bIns="0" anchor="t">
+            <a:normAutofit fontScale="23809"/>
+          </a:bodyPr>
+          <a:lstStyle xmlns:a="http://schemas.openxmlformats.org/drawingml/2006/main"/>
+          <a:p xmlns:a="http://schemas.openxmlformats.org/drawingml/2006/main">
+            <a:pPr algn="l">
+              <a:defRPr sz="1050" b="1">
                 <a:solidFill>
                   <a:srgbClr val="111827"/>
                 </a:solidFill>
@@ -3515,7 +4983,7 @@
               </a:defRPr>
             </a:pPr>
             <a:r>
-              <a:rPr sz="1200" b="1">
+              <a:rPr sz="1050" b="1">
                 <a:solidFill>
                   <a:srgbClr val="111827"/>
                 </a:solidFill>
@@ -3523,29 +4991,29 @@
                 <a:ea typeface="PingFang SC"/>
                 <a:cs typeface="PingFang SC"/>
               </a:rPr>
-              <a:t>上下文材料</a:t>
-            </a:r>
-          </a:p>
-        </p:txBody>
-      </p:sp>
-      <p:sp>
-        <p:nvSpPr>
-          <p:cNvPr id="29" name="">
-            <a:extLst xmlns:a="http://schemas.openxmlformats.org/drawingml/2006/main">
-              <a:ext uri="{FF2B5EF4-FFF2-40B4-BE49-F238E27FC236}">
-                <a16:creationId xmlns:a16="http://schemas.microsoft.com/office/drawing/2014/main" id="{CDC01599-0DAD-4C78-82CA-E2ED789EB6AF}"/>
-              </a:ext>
-            </a:extLst>
-          </p:cNvPr>
-          <p:cNvSpPr>
-            <a:spLocks xmlns:a="http://schemas.openxmlformats.org/drawingml/2006/main" noGrp="1"/>
-          </p:cNvSpPr>
-          <p:nvPr/>
-        </p:nvSpPr>
-        <p:spPr>
-          <a:xfrm xmlns:a="http://schemas.openxmlformats.org/drawingml/2006/main">
-            <a:off x="2724150" y="4743450"/>
-            <a:ext cx="190500" cy="247650"/>
+              <a:t>negative 负样本</a:t>
+            </a:r>
+          </a:p>
+        </p:txBody>
+      </p:sp>
+      <p:sp>
+        <p:nvSpPr>
+          <p:cNvPr id="60" name="">
+            <a:extLst xmlns:a="http://schemas.openxmlformats.org/drawingml/2006/main">
+              <a:ext uri="{FF2B5EF4-FFF2-40B4-BE49-F238E27FC236}">
+                <a16:creationId xmlns:a16="http://schemas.microsoft.com/office/drawing/2014/main" id="{2A7196DA-EAB0-4892-BCD5-496601E67611}"/>
+              </a:ext>
+            </a:extLst>
+          </p:cNvPr>
+          <p:cNvSpPr>
+            <a:spLocks xmlns:a="http://schemas.openxmlformats.org/drawingml/2006/main" noGrp="1"/>
+          </p:cNvSpPr>
+          <p:nvPr/>
+        </p:nvSpPr>
+        <p:spPr>
+          <a:xfrm xmlns:a="http://schemas.openxmlformats.org/drawingml/2006/main">
+            <a:off x="7741920" y="5924550"/>
+            <a:ext cx="1657350" cy="38100"/>
           </a:xfrm>
           <a:prstGeom xmlns:a="http://schemas.openxmlformats.org/drawingml/2006/main" prst="rect">
             <a:avLst/>
@@ -3556,86 +5024,84 @@
         </p:spPr>
         <p:txBody>
           <a:bodyPr xmlns:a="http://schemas.openxmlformats.org/drawingml/2006/main" lIns="0" tIns="0" rIns="0" bIns="0" anchor="t">
-            <a:normAutofit fontScale="100000"/>
+            <a:normAutofit fontScale="24679"/>
           </a:bodyPr>
           <a:lstStyle xmlns:a="http://schemas.openxmlformats.org/drawingml/2006/main"/>
           <a:p xmlns:a="http://schemas.openxmlformats.org/drawingml/2006/main">
             <a:pPr algn="l">
-              <a:defRPr sz="1500" b="1">
-                <a:solidFill>
-                  <a:srgbClr val="145CFF"/>
-                </a:solidFill>
-                <a:latin typeface="PingFang SC"/>
-                <a:ea typeface="PingFang SC"/>
-                <a:cs typeface="PingFang SC"/>
-              </a:defRPr>
-            </a:pPr>
-            <a:r>
-              <a:rPr sz="1500" b="1">
-                <a:solidFill>
-                  <a:srgbClr val="145CFF"/>
-                </a:solidFill>
-                <a:latin typeface="PingFang SC"/>
-                <a:ea typeface="PingFang SC"/>
-                <a:cs typeface="PingFang SC"/>
-              </a:rPr>
-              <a:t>→</a:t>
-            </a:r>
-          </a:p>
-        </p:txBody>
-      </p:sp>
-      <p:sp>
-        <p:nvSpPr>
-          <p:cNvPr id="30" name="">
-            <a:extLst xmlns:a="http://schemas.openxmlformats.org/drawingml/2006/main">
-              <a:ext uri="{FF2B5EF4-FFF2-40B4-BE49-F238E27FC236}">
-                <a16:creationId xmlns:a16="http://schemas.microsoft.com/office/drawing/2014/main" id="{9F4BE15F-ADC6-437F-9679-37317E47F604}"/>
-              </a:ext>
-            </a:extLst>
-          </p:cNvPr>
-          <p:cNvSpPr>
-            <a:spLocks xmlns:a="http://schemas.openxmlformats.org/drawingml/2006/main" noGrp="1"/>
-          </p:cNvSpPr>
-          <p:nvPr/>
-        </p:nvSpPr>
-        <p:spPr>
-          <a:xfrm xmlns:a="http://schemas.openxmlformats.org/drawingml/2006/main">
-            <a:off x="2876550" y="4552950"/>
-            <a:ext cx="857250" cy="666750"/>
+              <a:defRPr sz="1013" b="0">
+                <a:solidFill>
+                  <a:srgbClr val="273140"/>
+                </a:solidFill>
+                <a:latin typeface="PingFang SC"/>
+                <a:ea typeface="PingFang SC"/>
+                <a:cs typeface="PingFang SC"/>
+              </a:defRPr>
+            </a:pPr>
+            <a:r>
+              <a:rPr sz="1013" b="0">
+                <a:solidFill>
+                  <a:srgbClr val="273140"/>
+                </a:solidFill>
+                <a:latin typeface="PingFang SC"/>
+                <a:ea typeface="PingFang SC"/>
+                <a:cs typeface="PingFang SC"/>
+              </a:rPr>
+              <a:t>2 个正常改动未进入正式问题</a:t>
+            </a:r>
+          </a:p>
+        </p:txBody>
+      </p:sp>
+      <p:sp>
+        <p:nvSpPr>
+          <p:cNvPr id="61" name="">
+            <a:extLst xmlns:a="http://schemas.openxmlformats.org/drawingml/2006/main">
+              <a:ext uri="{FF2B5EF4-FFF2-40B4-BE49-F238E27FC236}">
+                <a16:creationId xmlns:a16="http://schemas.microsoft.com/office/drawing/2014/main" id="{E931466B-AF1A-4AB9-AAD3-E467DBC07820}"/>
+              </a:ext>
+            </a:extLst>
+          </p:cNvPr>
+          <p:cNvSpPr>
+            <a:spLocks xmlns:a="http://schemas.openxmlformats.org/drawingml/2006/main" noGrp="1"/>
+          </p:cNvSpPr>
+          <p:nvPr/>
+        </p:nvSpPr>
+        <p:spPr>
+          <a:xfrm xmlns:a="http://schemas.openxmlformats.org/drawingml/2006/main">
+            <a:off x="9685020" y="5962650"/>
+            <a:ext cx="582930" cy="247650"/>
           </a:xfrm>
           <a:prstGeom xmlns:a="http://schemas.openxmlformats.org/drawingml/2006/main" prst="roundRect">
             <a:avLst>
-              <a:gd name="adj" fmla="val 2857"/>
+              <a:gd name="adj" fmla="val 15385"/>
             </a:avLst>
           </a:prstGeom>
           <a:solidFill xmlns:a="http://schemas.openxmlformats.org/drawingml/2006/main">
-            <a:srgbClr val="FFFFFF"/>
+            <a:srgbClr val="EAF8F2"/>
           </a:solidFill>
-          <a:ln xmlns:a="http://schemas.openxmlformats.org/drawingml/2006/main" w="9525">
-            <a:solidFill>
-              <a:srgbClr val="E6EBF2"/>
-            </a:solidFill>
-          </a:ln>
-        </p:spPr>
-      </p:sp>
-      <p:sp>
-        <p:nvSpPr>
-          <p:cNvPr id="31" name="">
-            <a:extLst xmlns:a="http://schemas.openxmlformats.org/drawingml/2006/main">
-              <a:ext uri="{FF2B5EF4-FFF2-40B4-BE49-F238E27FC236}">
-                <a16:creationId xmlns:a16="http://schemas.microsoft.com/office/drawing/2014/main" id="{D1E87111-16AE-4E4A-955F-7F5D71BEC50D}"/>
-              </a:ext>
-            </a:extLst>
-          </p:cNvPr>
-          <p:cNvSpPr>
-            <a:spLocks xmlns:a="http://schemas.openxmlformats.org/drawingml/2006/main" noGrp="1"/>
-          </p:cNvSpPr>
-          <p:nvPr/>
-        </p:nvSpPr>
-        <p:spPr>
-          <a:xfrm xmlns:a="http://schemas.openxmlformats.org/drawingml/2006/main">
-            <a:off x="2990850" y="4667250"/>
-            <a:ext cx="628650" cy="438150"/>
+          <a:ln xmlns:a="http://schemas.openxmlformats.org/drawingml/2006/main">
+            <a:noFill/>
+          </a:ln>
+        </p:spPr>
+      </p:sp>
+      <p:sp>
+        <p:nvSpPr>
+          <p:cNvPr id="62" name="">
+            <a:extLst xmlns:a="http://schemas.openxmlformats.org/drawingml/2006/main">
+              <a:ext uri="{FF2B5EF4-FFF2-40B4-BE49-F238E27FC236}">
+                <a16:creationId xmlns:a16="http://schemas.microsoft.com/office/drawing/2014/main" id="{14BB0298-4223-4C81-8E31-1A850FAF2673}"/>
+              </a:ext>
+            </a:extLst>
+          </p:cNvPr>
+          <p:cNvSpPr>
+            <a:spLocks xmlns:a="http://schemas.openxmlformats.org/drawingml/2006/main" noGrp="1"/>
+          </p:cNvSpPr>
+          <p:nvPr/>
+        </p:nvSpPr>
+        <p:spPr>
+          <a:xfrm xmlns:a="http://schemas.openxmlformats.org/drawingml/2006/main">
+            <a:off x="9780270" y="6000750"/>
+            <a:ext cx="392430" cy="171450"/>
           </a:xfrm>
           <a:prstGeom xmlns:a="http://schemas.openxmlformats.org/drawingml/2006/main" prst="rect">
             <a:avLst/>
@@ -3646,52 +5112,52 @@
         </p:spPr>
         <p:txBody>
           <a:bodyPr xmlns:a="http://schemas.openxmlformats.org/drawingml/2006/main" lIns="0" tIns="0" rIns="0" bIns="0" anchor="ctr">
-            <a:normAutofit fontScale="100000"/>
+            <a:normAutofit fontScale="68687"/>
           </a:bodyPr>
           <a:lstStyle xmlns:a="http://schemas.openxmlformats.org/drawingml/2006/main"/>
           <a:p xmlns:a="http://schemas.openxmlformats.org/drawingml/2006/main">
             <a:pPr algn="ctr">
-              <a:defRPr sz="1200" b="1">
-                <a:solidFill>
-                  <a:srgbClr val="111827"/>
-                </a:solidFill>
-                <a:latin typeface="PingFang SC"/>
-                <a:ea typeface="PingFang SC"/>
-                <a:cs typeface="PingFang SC"/>
-              </a:defRPr>
-            </a:pPr>
-            <a:r>
-              <a:rPr sz="1200" b="1">
-                <a:solidFill>
-                  <a:srgbClr val="111827"/>
-                </a:solidFill>
-                <a:latin typeface="PingFang SC"/>
-                <a:ea typeface="PingFang SC"/>
-                <a:cs typeface="PingFang SC"/>
-              </a:rPr>
-              <a:t>完整性检查</a:t>
-            </a:r>
-          </a:p>
-        </p:txBody>
-      </p:sp>
-      <p:sp>
-        <p:nvSpPr>
-          <p:cNvPr id="32" name="">
-            <a:extLst xmlns:a="http://schemas.openxmlformats.org/drawingml/2006/main">
-              <a:ext uri="{FF2B5EF4-FFF2-40B4-BE49-F238E27FC236}">
-                <a16:creationId xmlns:a16="http://schemas.microsoft.com/office/drawing/2014/main" id="{355A8F50-5C42-474E-9E0F-88CA1B6E55C8}"/>
-              </a:ext>
-            </a:extLst>
-          </p:cNvPr>
-          <p:cNvSpPr>
-            <a:spLocks xmlns:a="http://schemas.openxmlformats.org/drawingml/2006/main" noGrp="1"/>
-          </p:cNvSpPr>
-          <p:nvPr/>
-        </p:nvSpPr>
-        <p:spPr>
-          <a:xfrm xmlns:a="http://schemas.openxmlformats.org/drawingml/2006/main">
-            <a:off x="3752850" y="4743450"/>
-            <a:ext cx="190500" cy="247650"/>
+              <a:defRPr sz="900" b="1">
+                <a:solidFill>
+                  <a:srgbClr val="12B886"/>
+                </a:solidFill>
+                <a:latin typeface="PingFang SC"/>
+                <a:ea typeface="PingFang SC"/>
+                <a:cs typeface="PingFang SC"/>
+              </a:defRPr>
+            </a:pPr>
+            <a:r>
+              <a:rPr sz="900" b="1">
+                <a:solidFill>
+                  <a:srgbClr val="12B886"/>
+                </a:solidFill>
+                <a:latin typeface="PingFang SC"/>
+                <a:ea typeface="PingFang SC"/>
+                <a:cs typeface="PingFang SC"/>
+              </a:rPr>
+              <a:t>无正式误报</a:t>
+            </a:r>
+          </a:p>
+        </p:txBody>
+      </p:sp>
+      <p:sp>
+        <p:nvSpPr>
+          <p:cNvPr id="63" name="">
+            <a:extLst xmlns:a="http://schemas.openxmlformats.org/drawingml/2006/main">
+              <a:ext uri="{FF2B5EF4-FFF2-40B4-BE49-F238E27FC236}">
+                <a16:creationId xmlns:a16="http://schemas.microsoft.com/office/drawing/2014/main" id="{DCF95E28-0B93-4B09-909A-E401E7861B09}"/>
+              </a:ext>
+            </a:extLst>
+          </p:cNvPr>
+          <p:cNvSpPr>
+            <a:spLocks xmlns:a="http://schemas.openxmlformats.org/drawingml/2006/main" noGrp="1"/>
+          </p:cNvSpPr>
+          <p:nvPr/>
+        </p:nvSpPr>
+        <p:spPr>
+          <a:xfrm xmlns:a="http://schemas.openxmlformats.org/drawingml/2006/main">
+            <a:off x="685800" y="5962650"/>
+            <a:ext cx="5905500" cy="304800"/>
           </a:xfrm>
           <a:prstGeom xmlns:a="http://schemas.openxmlformats.org/drawingml/2006/main" prst="rect">
             <a:avLst/>
@@ -3702,536 +5168,12 @@
         </p:spPr>
         <p:txBody>
           <a:bodyPr xmlns:a="http://schemas.openxmlformats.org/drawingml/2006/main" lIns="0" tIns="0" rIns="0" bIns="0" anchor="t">
-            <a:normAutofit fontScale="100000"/>
+            <a:normAutofit fontScale="88889"/>
           </a:bodyPr>
           <a:lstStyle xmlns:a="http://schemas.openxmlformats.org/drawingml/2006/main"/>
           <a:p xmlns:a="http://schemas.openxmlformats.org/drawingml/2006/main">
             <a:pPr algn="l">
-              <a:defRPr sz="1500" b="1">
-                <a:solidFill>
-                  <a:srgbClr val="145CFF"/>
-                </a:solidFill>
-                <a:latin typeface="PingFang SC"/>
-                <a:ea typeface="PingFang SC"/>
-                <a:cs typeface="PingFang SC"/>
-              </a:defRPr>
-            </a:pPr>
-            <a:r>
-              <a:rPr sz="1500" b="1">
-                <a:solidFill>
-                  <a:srgbClr val="145CFF"/>
-                </a:solidFill>
-                <a:latin typeface="PingFang SC"/>
-                <a:ea typeface="PingFang SC"/>
-                <a:cs typeface="PingFang SC"/>
-              </a:rPr>
-              <a:t>→</a:t>
-            </a:r>
-          </a:p>
-        </p:txBody>
-      </p:sp>
-      <p:sp>
-        <p:nvSpPr>
-          <p:cNvPr id="33" name="">
-            <a:extLst xmlns:a="http://schemas.openxmlformats.org/drawingml/2006/main">
-              <a:ext uri="{FF2B5EF4-FFF2-40B4-BE49-F238E27FC236}">
-                <a16:creationId xmlns:a16="http://schemas.microsoft.com/office/drawing/2014/main" id="{6EE04085-50ED-4B92-9A30-3830DC9C1222}"/>
-              </a:ext>
-            </a:extLst>
-          </p:cNvPr>
-          <p:cNvSpPr>
-            <a:spLocks xmlns:a="http://schemas.openxmlformats.org/drawingml/2006/main" noGrp="1"/>
-          </p:cNvSpPr>
-          <p:nvPr/>
-        </p:nvSpPr>
-        <p:spPr>
-          <a:xfrm xmlns:a="http://schemas.openxmlformats.org/drawingml/2006/main">
-            <a:off x="3905250" y="4552950"/>
-            <a:ext cx="857250" cy="666750"/>
-          </a:xfrm>
-          <a:prstGeom xmlns:a="http://schemas.openxmlformats.org/drawingml/2006/main" prst="roundRect">
-            <a:avLst>
-              <a:gd name="adj" fmla="val 2857"/>
-            </a:avLst>
-          </a:prstGeom>
-          <a:solidFill xmlns:a="http://schemas.openxmlformats.org/drawingml/2006/main">
-            <a:srgbClr val="111827"/>
-          </a:solidFill>
-          <a:ln xmlns:a="http://schemas.openxmlformats.org/drawingml/2006/main" w="9525">
-            <a:solidFill>
-              <a:srgbClr val="E6EBF2"/>
-            </a:solidFill>
-          </a:ln>
-        </p:spPr>
-      </p:sp>
-      <p:sp>
-        <p:nvSpPr>
-          <p:cNvPr id="34" name="">
-            <a:extLst xmlns:a="http://schemas.openxmlformats.org/drawingml/2006/main">
-              <a:ext uri="{FF2B5EF4-FFF2-40B4-BE49-F238E27FC236}">
-                <a16:creationId xmlns:a16="http://schemas.microsoft.com/office/drawing/2014/main" id="{F4BF0486-633F-4F5F-B253-15ED17014EC4}"/>
-              </a:ext>
-            </a:extLst>
-          </p:cNvPr>
-          <p:cNvSpPr>
-            <a:spLocks xmlns:a="http://schemas.openxmlformats.org/drawingml/2006/main" noGrp="1"/>
-          </p:cNvSpPr>
-          <p:nvPr/>
-        </p:nvSpPr>
-        <p:spPr>
-          <a:xfrm xmlns:a="http://schemas.openxmlformats.org/drawingml/2006/main">
-            <a:off x="4019550" y="4667250"/>
-            <a:ext cx="628650" cy="438150"/>
-          </a:xfrm>
-          <a:prstGeom xmlns:a="http://schemas.openxmlformats.org/drawingml/2006/main" prst="rect">
-            <a:avLst/>
-          </a:prstGeom>
-          <a:ln xmlns:a="http://schemas.openxmlformats.org/drawingml/2006/main">
-            <a:noFill/>
-          </a:ln>
-        </p:spPr>
-        <p:txBody>
-          <a:bodyPr xmlns:a="http://schemas.openxmlformats.org/drawingml/2006/main" lIns="0" tIns="0" rIns="0" bIns="0" anchor="ctr">
-            <a:normAutofit fontScale="100000"/>
-          </a:bodyPr>
-          <a:lstStyle xmlns:a="http://schemas.openxmlformats.org/drawingml/2006/main"/>
-          <a:p xmlns:a="http://schemas.openxmlformats.org/drawingml/2006/main">
-            <a:pPr algn="ctr">
-              <a:defRPr sz="1200" b="1">
-                <a:solidFill>
-                  <a:srgbClr val="FFFFFF"/>
-                </a:solidFill>
-                <a:latin typeface="PingFang SC"/>
-                <a:ea typeface="PingFang SC"/>
-                <a:cs typeface="PingFang SC"/>
-              </a:defRPr>
-            </a:pPr>
-            <a:r>
-              <a:rPr sz="1200" b="1">
-                <a:solidFill>
-                  <a:srgbClr val="FFFFFF"/>
-                </a:solidFill>
-                <a:latin typeface="PingFang SC"/>
-                <a:ea typeface="PingFang SC"/>
-                <a:cs typeface="PingFang SC"/>
-              </a:rPr>
-              <a:t>风险识别</a:t>
-            </a:r>
-          </a:p>
-        </p:txBody>
-      </p:sp>
-      <p:sp>
-        <p:nvSpPr>
-          <p:cNvPr id="35" name="">
-            <a:extLst xmlns:a="http://schemas.openxmlformats.org/drawingml/2006/main">
-              <a:ext uri="{FF2B5EF4-FFF2-40B4-BE49-F238E27FC236}">
-                <a16:creationId xmlns:a16="http://schemas.microsoft.com/office/drawing/2014/main" id="{D43E4239-BBAE-4B14-B273-D39B163516D6}"/>
-              </a:ext>
-            </a:extLst>
-          </p:cNvPr>
-          <p:cNvSpPr>
-            <a:spLocks xmlns:a="http://schemas.openxmlformats.org/drawingml/2006/main" noGrp="1"/>
-          </p:cNvSpPr>
-          <p:nvPr/>
-        </p:nvSpPr>
-        <p:spPr>
-          <a:xfrm xmlns:a="http://schemas.openxmlformats.org/drawingml/2006/main">
-            <a:off x="4781550" y="4743450"/>
-            <a:ext cx="190500" cy="247650"/>
-          </a:xfrm>
-          <a:prstGeom xmlns:a="http://schemas.openxmlformats.org/drawingml/2006/main" prst="rect">
-            <a:avLst/>
-          </a:prstGeom>
-          <a:ln xmlns:a="http://schemas.openxmlformats.org/drawingml/2006/main">
-            <a:noFill/>
-          </a:ln>
-        </p:spPr>
-        <p:txBody>
-          <a:bodyPr xmlns:a="http://schemas.openxmlformats.org/drawingml/2006/main" lIns="0" tIns="0" rIns="0" bIns="0" anchor="t">
-            <a:normAutofit fontScale="100000"/>
-          </a:bodyPr>
-          <a:lstStyle xmlns:a="http://schemas.openxmlformats.org/drawingml/2006/main"/>
-          <a:p xmlns:a="http://schemas.openxmlformats.org/drawingml/2006/main">
-            <a:pPr algn="l">
-              <a:defRPr sz="1500" b="1">
-                <a:solidFill>
-                  <a:srgbClr val="145CFF"/>
-                </a:solidFill>
-                <a:latin typeface="PingFang SC"/>
-                <a:ea typeface="PingFang SC"/>
-                <a:cs typeface="PingFang SC"/>
-              </a:defRPr>
-            </a:pPr>
-            <a:r>
-              <a:rPr sz="1500" b="1">
-                <a:solidFill>
-                  <a:srgbClr val="145CFF"/>
-                </a:solidFill>
-                <a:latin typeface="PingFang SC"/>
-                <a:ea typeface="PingFang SC"/>
-                <a:cs typeface="PingFang SC"/>
-              </a:rPr>
-              <a:t>→</a:t>
-            </a:r>
-          </a:p>
-        </p:txBody>
-      </p:sp>
-      <p:sp>
-        <p:nvSpPr>
-          <p:cNvPr id="36" name="">
-            <a:extLst xmlns:a="http://schemas.openxmlformats.org/drawingml/2006/main">
-              <a:ext uri="{FF2B5EF4-FFF2-40B4-BE49-F238E27FC236}">
-                <a16:creationId xmlns:a16="http://schemas.microsoft.com/office/drawing/2014/main" id="{1D547C1D-6CB6-40F0-A79A-70B549BD1F9E}"/>
-              </a:ext>
-            </a:extLst>
-          </p:cNvPr>
-          <p:cNvSpPr>
-            <a:spLocks xmlns:a="http://schemas.openxmlformats.org/drawingml/2006/main" noGrp="1"/>
-          </p:cNvSpPr>
-          <p:nvPr/>
-        </p:nvSpPr>
-        <p:spPr>
-          <a:xfrm xmlns:a="http://schemas.openxmlformats.org/drawingml/2006/main">
-            <a:off x="4933950" y="4552950"/>
-            <a:ext cx="857250" cy="666750"/>
-          </a:xfrm>
-          <a:prstGeom xmlns:a="http://schemas.openxmlformats.org/drawingml/2006/main" prst="roundRect">
-            <a:avLst>
-              <a:gd name="adj" fmla="val 2857"/>
-            </a:avLst>
-          </a:prstGeom>
-          <a:solidFill xmlns:a="http://schemas.openxmlformats.org/drawingml/2006/main">
-            <a:srgbClr val="FFFFFF"/>
-          </a:solidFill>
-          <a:ln xmlns:a="http://schemas.openxmlformats.org/drawingml/2006/main" w="9525">
-            <a:solidFill>
-              <a:srgbClr val="E6EBF2"/>
-            </a:solidFill>
-          </a:ln>
-        </p:spPr>
-      </p:sp>
-      <p:sp>
-        <p:nvSpPr>
-          <p:cNvPr id="37" name="">
-            <a:extLst xmlns:a="http://schemas.openxmlformats.org/drawingml/2006/main">
-              <a:ext uri="{FF2B5EF4-FFF2-40B4-BE49-F238E27FC236}">
-                <a16:creationId xmlns:a16="http://schemas.microsoft.com/office/drawing/2014/main" id="{90AC3DC2-7C4E-4997-A5FF-1307F29D4473}"/>
-              </a:ext>
-            </a:extLst>
-          </p:cNvPr>
-          <p:cNvSpPr>
-            <a:spLocks xmlns:a="http://schemas.openxmlformats.org/drawingml/2006/main" noGrp="1"/>
-          </p:cNvSpPr>
-          <p:nvPr/>
-        </p:nvSpPr>
-        <p:spPr>
-          <a:xfrm xmlns:a="http://schemas.openxmlformats.org/drawingml/2006/main">
-            <a:off x="5048250" y="4667250"/>
-            <a:ext cx="628650" cy="438150"/>
-          </a:xfrm>
-          <a:prstGeom xmlns:a="http://schemas.openxmlformats.org/drawingml/2006/main" prst="rect">
-            <a:avLst/>
-          </a:prstGeom>
-          <a:ln xmlns:a="http://schemas.openxmlformats.org/drawingml/2006/main">
-            <a:noFill/>
-          </a:ln>
-        </p:spPr>
-        <p:txBody>
-          <a:bodyPr xmlns:a="http://schemas.openxmlformats.org/drawingml/2006/main" lIns="0" tIns="0" rIns="0" bIns="0" anchor="ctr">
-            <a:normAutofit fontScale="100000"/>
-          </a:bodyPr>
-          <a:lstStyle xmlns:a="http://schemas.openxmlformats.org/drawingml/2006/main"/>
-          <a:p xmlns:a="http://schemas.openxmlformats.org/drawingml/2006/main">
-            <a:pPr algn="ctr">
-              <a:defRPr sz="1200" b="1">
-                <a:solidFill>
-                  <a:srgbClr val="111827"/>
-                </a:solidFill>
-                <a:latin typeface="PingFang SC"/>
-                <a:ea typeface="PingFang SC"/>
-                <a:cs typeface="PingFang SC"/>
-              </a:defRPr>
-            </a:pPr>
-            <a:r>
-              <a:rPr sz="1200" b="1">
-                <a:solidFill>
-                  <a:srgbClr val="111827"/>
-                </a:solidFill>
-                <a:latin typeface="PingFang SC"/>
-                <a:ea typeface="PingFang SC"/>
-                <a:cs typeface="PingFang SC"/>
-              </a:rPr>
-              <a:t>复核校验</a:t>
-            </a:r>
-          </a:p>
-        </p:txBody>
-      </p:sp>
-      <p:sp>
-        <p:nvSpPr>
-          <p:cNvPr id="38" name="">
-            <a:extLst xmlns:a="http://schemas.openxmlformats.org/drawingml/2006/main">
-              <a:ext uri="{FF2B5EF4-FFF2-40B4-BE49-F238E27FC236}">
-                <a16:creationId xmlns:a16="http://schemas.microsoft.com/office/drawing/2014/main" id="{DF9AE81A-3231-4E85-9EEC-C200F37529E6}"/>
-              </a:ext>
-            </a:extLst>
-          </p:cNvPr>
-          <p:cNvSpPr>
-            <a:spLocks xmlns:a="http://schemas.openxmlformats.org/drawingml/2006/main" noGrp="1"/>
-          </p:cNvSpPr>
-          <p:nvPr/>
-        </p:nvSpPr>
-        <p:spPr>
-          <a:xfrm xmlns:a="http://schemas.openxmlformats.org/drawingml/2006/main">
-            <a:off x="5810250" y="4743450"/>
-            <a:ext cx="190500" cy="247650"/>
-          </a:xfrm>
-          <a:prstGeom xmlns:a="http://schemas.openxmlformats.org/drawingml/2006/main" prst="rect">
-            <a:avLst/>
-          </a:prstGeom>
-          <a:ln xmlns:a="http://schemas.openxmlformats.org/drawingml/2006/main">
-            <a:noFill/>
-          </a:ln>
-        </p:spPr>
-        <p:txBody>
-          <a:bodyPr xmlns:a="http://schemas.openxmlformats.org/drawingml/2006/main" lIns="0" tIns="0" rIns="0" bIns="0" anchor="t">
-            <a:normAutofit fontScale="100000"/>
-          </a:bodyPr>
-          <a:lstStyle xmlns:a="http://schemas.openxmlformats.org/drawingml/2006/main"/>
-          <a:p xmlns:a="http://schemas.openxmlformats.org/drawingml/2006/main">
-            <a:pPr algn="l">
-              <a:defRPr sz="1500" b="1">
-                <a:solidFill>
-                  <a:srgbClr val="145CFF"/>
-                </a:solidFill>
-                <a:latin typeface="PingFang SC"/>
-                <a:ea typeface="PingFang SC"/>
-                <a:cs typeface="PingFang SC"/>
-              </a:defRPr>
-            </a:pPr>
-            <a:r>
-              <a:rPr sz="1500" b="1">
-                <a:solidFill>
-                  <a:srgbClr val="145CFF"/>
-                </a:solidFill>
-                <a:latin typeface="PingFang SC"/>
-                <a:ea typeface="PingFang SC"/>
-                <a:cs typeface="PingFang SC"/>
-              </a:rPr>
-              <a:t>→</a:t>
-            </a:r>
-          </a:p>
-        </p:txBody>
-      </p:sp>
-      <p:sp>
-        <p:nvSpPr>
-          <p:cNvPr id="39" name="">
-            <a:extLst xmlns:a="http://schemas.openxmlformats.org/drawingml/2006/main">
-              <a:ext uri="{FF2B5EF4-FFF2-40B4-BE49-F238E27FC236}">
-                <a16:creationId xmlns:a16="http://schemas.microsoft.com/office/drawing/2014/main" id="{8F68DA98-D42E-4FA8-9BA7-C1BF5074858D}"/>
-              </a:ext>
-            </a:extLst>
-          </p:cNvPr>
-          <p:cNvSpPr>
-            <a:spLocks xmlns:a="http://schemas.openxmlformats.org/drawingml/2006/main" noGrp="1"/>
-          </p:cNvSpPr>
-          <p:nvPr/>
-        </p:nvSpPr>
-        <p:spPr>
-          <a:xfrm xmlns:a="http://schemas.openxmlformats.org/drawingml/2006/main">
-            <a:off x="5962650" y="4552950"/>
-            <a:ext cx="857250" cy="666750"/>
-          </a:xfrm>
-          <a:prstGeom xmlns:a="http://schemas.openxmlformats.org/drawingml/2006/main" prst="roundRect">
-            <a:avLst>
-              <a:gd name="adj" fmla="val 2857"/>
-            </a:avLst>
-          </a:prstGeom>
-          <a:solidFill xmlns:a="http://schemas.openxmlformats.org/drawingml/2006/main">
-            <a:srgbClr val="FFFFFF"/>
-          </a:solidFill>
-          <a:ln xmlns:a="http://schemas.openxmlformats.org/drawingml/2006/main" w="9525">
-            <a:solidFill>
-              <a:srgbClr val="E6EBF2"/>
-            </a:solidFill>
-          </a:ln>
-        </p:spPr>
-      </p:sp>
-      <p:sp>
-        <p:nvSpPr>
-          <p:cNvPr id="40" name="">
-            <a:extLst xmlns:a="http://schemas.openxmlformats.org/drawingml/2006/main">
-              <a:ext uri="{FF2B5EF4-FFF2-40B4-BE49-F238E27FC236}">
-                <a16:creationId xmlns:a16="http://schemas.microsoft.com/office/drawing/2014/main" id="{2B271E0F-8EFE-4D6C-BA95-E04B9B2E706C}"/>
-              </a:ext>
-            </a:extLst>
-          </p:cNvPr>
-          <p:cNvSpPr>
-            <a:spLocks xmlns:a="http://schemas.openxmlformats.org/drawingml/2006/main" noGrp="1"/>
-          </p:cNvSpPr>
-          <p:nvPr/>
-        </p:nvSpPr>
-        <p:spPr>
-          <a:xfrm xmlns:a="http://schemas.openxmlformats.org/drawingml/2006/main">
-            <a:off x="6076950" y="4667250"/>
-            <a:ext cx="628650" cy="438150"/>
-          </a:xfrm>
-          <a:prstGeom xmlns:a="http://schemas.openxmlformats.org/drawingml/2006/main" prst="rect">
-            <a:avLst/>
-          </a:prstGeom>
-          <a:ln xmlns:a="http://schemas.openxmlformats.org/drawingml/2006/main">
-            <a:noFill/>
-          </a:ln>
-        </p:spPr>
-        <p:txBody>
-          <a:bodyPr xmlns:a="http://schemas.openxmlformats.org/drawingml/2006/main" lIns="0" tIns="0" rIns="0" bIns="0" anchor="ctr">
-            <a:normAutofit fontScale="88534"/>
-          </a:bodyPr>
-          <a:lstStyle xmlns:a="http://schemas.openxmlformats.org/drawingml/2006/main"/>
-          <a:p xmlns:a="http://schemas.openxmlformats.org/drawingml/2006/main">
-            <a:pPr algn="ctr">
-              <a:defRPr sz="1200" b="1">
-                <a:solidFill>
-                  <a:srgbClr val="111827"/>
-                </a:solidFill>
-                <a:latin typeface="PingFang SC"/>
-                <a:ea typeface="PingFang SC"/>
-                <a:cs typeface="PingFang SC"/>
-              </a:defRPr>
-            </a:pPr>
-            <a:r>
-              <a:rPr sz="1200" b="1">
-                <a:solidFill>
-                  <a:srgbClr val="111827"/>
-                </a:solidFill>
-                <a:latin typeface="PingFang SC"/>
-                <a:ea typeface="PingFang SC"/>
-                <a:cs typeface="PingFang SC"/>
-              </a:rPr>
-              <a:t>AI Review 页面</a:t>
-            </a:r>
-          </a:p>
-        </p:txBody>
-      </p:sp>
-      <p:sp>
-        <p:nvSpPr>
-          <p:cNvPr id="41" name="">
-            <a:extLst xmlns:a="http://schemas.openxmlformats.org/drawingml/2006/main">
-              <a:ext uri="{FF2B5EF4-FFF2-40B4-BE49-F238E27FC236}">
-                <a16:creationId xmlns:a16="http://schemas.microsoft.com/office/drawing/2014/main" id="{8FB6E78D-F6A9-49FA-A4CD-07B8183F2458}"/>
-              </a:ext>
-            </a:extLst>
-          </p:cNvPr>
-          <p:cNvSpPr>
-            <a:spLocks xmlns:a="http://schemas.openxmlformats.org/drawingml/2006/main" noGrp="1"/>
-          </p:cNvSpPr>
-          <p:nvPr/>
-        </p:nvSpPr>
-        <p:spPr>
-          <a:xfrm xmlns:a="http://schemas.openxmlformats.org/drawingml/2006/main">
-            <a:off x="7429500" y="4972050"/>
-            <a:ext cx="3219450" cy="704850"/>
-          </a:xfrm>
-          <a:prstGeom xmlns:a="http://schemas.openxmlformats.org/drawingml/2006/main" prst="rect">
-            <a:avLst/>
-          </a:prstGeom>
-          <a:solidFill xmlns:a="http://schemas.openxmlformats.org/drawingml/2006/main">
-            <a:srgbClr val="FFF6DE"/>
-          </a:solidFill>
-          <a:ln xmlns:a="http://schemas.openxmlformats.org/drawingml/2006/main">
-            <a:noFill/>
-          </a:ln>
-        </p:spPr>
-      </p:sp>
-      <p:sp>
-        <p:nvSpPr>
-          <p:cNvPr id="42" name="">
-            <a:extLst xmlns:a="http://schemas.openxmlformats.org/drawingml/2006/main">
-              <a:ext uri="{FF2B5EF4-FFF2-40B4-BE49-F238E27FC236}">
-                <a16:creationId xmlns:a16="http://schemas.microsoft.com/office/drawing/2014/main" id="{3607F872-FDAF-4277-BF6F-319A3CC82B1E}"/>
-              </a:ext>
-            </a:extLst>
-          </p:cNvPr>
-          <p:cNvSpPr>
-            <a:spLocks xmlns:a="http://schemas.openxmlformats.org/drawingml/2006/main" noGrp="1"/>
-          </p:cNvSpPr>
-          <p:nvPr/>
-        </p:nvSpPr>
-        <p:spPr>
-          <a:xfrm xmlns:a="http://schemas.openxmlformats.org/drawingml/2006/main">
-            <a:off x="7677150" y="5105400"/>
-            <a:ext cx="2724150" cy="228600"/>
-          </a:xfrm>
-          <a:prstGeom xmlns:a="http://schemas.openxmlformats.org/drawingml/2006/main" prst="rect">
-            <a:avLst/>
-          </a:prstGeom>
-          <a:ln xmlns:a="http://schemas.openxmlformats.org/drawingml/2006/main">
-            <a:noFill/>
-          </a:ln>
-        </p:spPr>
-        <p:txBody>
-          <a:bodyPr xmlns:a="http://schemas.openxmlformats.org/drawingml/2006/main" lIns="0" tIns="0" rIns="0" bIns="0" anchor="t">
-            <a:normAutofit fontScale="100000"/>
-          </a:bodyPr>
-          <a:lstStyle xmlns:a="http://schemas.openxmlformats.org/drawingml/2006/main"/>
-          <a:p xmlns:a="http://schemas.openxmlformats.org/drawingml/2006/main">
-            <a:pPr algn="l">
-              <a:defRPr sz="1500" b="1">
-                <a:solidFill>
-                  <a:srgbClr val="111827"/>
-                </a:solidFill>
-                <a:latin typeface="PingFang SC"/>
-                <a:ea typeface="PingFang SC"/>
-                <a:cs typeface="PingFang SC"/>
-              </a:defRPr>
-            </a:pPr>
-            <a:r>
-              <a:rPr sz="1500" b="1">
-                <a:solidFill>
-                  <a:srgbClr val="111827"/>
-                </a:solidFill>
-                <a:latin typeface="PingFang SC"/>
-                <a:ea typeface="PingFang SC"/>
-                <a:cs typeface="PingFang SC"/>
-              </a:rPr>
-              <a:t>AI Review 留痕</a:t>
-            </a:r>
-          </a:p>
-        </p:txBody>
-      </p:sp>
-      <p:sp>
-        <p:nvSpPr>
-          <p:cNvPr id="43" name="">
-            <a:extLst xmlns:a="http://schemas.openxmlformats.org/drawingml/2006/main">
-              <a:ext uri="{FF2B5EF4-FFF2-40B4-BE49-F238E27FC236}">
-                <a16:creationId xmlns:a16="http://schemas.microsoft.com/office/drawing/2014/main" id="{610446FE-29C6-48E9-BA94-F06AF274758C}"/>
-              </a:ext>
-            </a:extLst>
-          </p:cNvPr>
-          <p:cNvSpPr>
-            <a:spLocks xmlns:a="http://schemas.openxmlformats.org/drawingml/2006/main" noGrp="1"/>
-          </p:cNvSpPr>
-          <p:nvPr/>
-        </p:nvSpPr>
-        <p:spPr>
-          <a:xfrm xmlns:a="http://schemas.openxmlformats.org/drawingml/2006/main">
-            <a:off x="7677150" y="5372100"/>
-            <a:ext cx="2724150" cy="209550"/>
-          </a:xfrm>
-          <a:prstGeom xmlns:a="http://schemas.openxmlformats.org/drawingml/2006/main" prst="rect">
-            <a:avLst/>
-          </a:prstGeom>
-          <a:ln xmlns:a="http://schemas.openxmlformats.org/drawingml/2006/main">
-            <a:noFill/>
-          </a:ln>
-        </p:spPr>
-        <p:txBody>
-          <a:bodyPr xmlns:a="http://schemas.openxmlformats.org/drawingml/2006/main" lIns="0" tIns="0" rIns="0" bIns="0" anchor="t">
-            <a:normAutofit fontScale="100000"/>
-          </a:bodyPr>
-          <a:lstStyle xmlns:a="http://schemas.openxmlformats.org/drawingml/2006/main"/>
-          <a:p xmlns:a="http://schemas.openxmlformats.org/drawingml/2006/main">
-            <a:pPr algn="l">
-              <a:defRPr sz="1050" b="0">
+              <a:defRPr sz="1125" b="0">
                 <a:solidFill>
                   <a:srgbClr val="273140"/>
                 </a:solidFill>
@@ -4241,7 +5183,7 @@
               </a:defRPr>
             </a:pPr>
             <a:r>
-              <a:rPr sz="1050" b="0">
+              <a:rPr sz="1125" b="0">
                 <a:solidFill>
                   <a:srgbClr val="273140"/>
                 </a:solidFill>
@@ -4249,63 +5191,7 @@
                 <a:ea typeface="PingFang SC"/>
                 <a:cs typeface="PingFang SC"/>
               </a:rPr>
-              <a:t>保留上下文材料、识别过程和处置记录。</a:t>
-            </a:r>
-          </a:p>
-        </p:txBody>
-      </p:sp>
-      <p:sp>
-        <p:nvSpPr>
-          <p:cNvPr id="44" name="">
-            <a:extLst xmlns:a="http://schemas.openxmlformats.org/drawingml/2006/main">
-              <a:ext uri="{FF2B5EF4-FFF2-40B4-BE49-F238E27FC236}">
-                <a16:creationId xmlns:a16="http://schemas.microsoft.com/office/drawing/2014/main" id="{B89019AF-1A24-4A29-9FA1-7CDF1934F58F}"/>
-              </a:ext>
-            </a:extLst>
-          </p:cNvPr>
-          <p:cNvSpPr>
-            <a:spLocks xmlns:a="http://schemas.openxmlformats.org/drawingml/2006/main" noGrp="1"/>
-          </p:cNvSpPr>
-          <p:nvPr/>
-        </p:nvSpPr>
-        <p:spPr>
-          <a:xfrm xmlns:a="http://schemas.openxmlformats.org/drawingml/2006/main">
-            <a:off x="819150" y="5562600"/>
-            <a:ext cx="5810250" cy="533400"/>
-          </a:xfrm>
-          <a:prstGeom xmlns:a="http://schemas.openxmlformats.org/drawingml/2006/main" prst="rect">
-            <a:avLst/>
-          </a:prstGeom>
-          <a:ln xmlns:a="http://schemas.openxmlformats.org/drawingml/2006/main">
-            <a:noFill/>
-          </a:ln>
-        </p:spPr>
-        <p:txBody>
-          <a:bodyPr xmlns:a="http://schemas.openxmlformats.org/drawingml/2006/main" lIns="0" tIns="0" rIns="0" bIns="0" anchor="t">
-            <a:normAutofit fontScale="91503"/>
-          </a:bodyPr>
-          <a:lstStyle xmlns:a="http://schemas.openxmlformats.org/drawingml/2006/main"/>
-          <a:p xmlns:a="http://schemas.openxmlformats.org/drawingml/2006/main">
-            <a:pPr algn="l">
-              <a:defRPr sz="1275" b="0">
-                <a:solidFill>
-                  <a:srgbClr val="273140"/>
-                </a:solidFill>
-                <a:latin typeface="PingFang SC"/>
-                <a:ea typeface="PingFang SC"/>
-                <a:cs typeface="PingFang SC"/>
-              </a:defRPr>
-            </a:pPr>
-            <a:r>
-              <a:rPr sz="1275" b="0">
-                <a:solidFill>
-                  <a:srgbClr val="273140"/>
-                </a:solidFill>
-                <a:latin typeface="PingFang SC"/>
-                <a:ea typeface="PingFang SC"/>
-                <a:cs typeface="PingFang SC"/>
-              </a:rPr>
-              <a:t>团队仍通过 AI Review 页面查看最终结果；后台增加上下文材料和过程记录，用于解释“为什么报 / 为什么不报”。</a:t>
+              <a:t>重点不是页面换样式，而是审查前先判断材料是否足够；评论为空也能区分“无明确问题”还是“上下文 / 证据不足”。</a:t>
             </a:r>
           </a:p>
         </p:txBody>
@@ -4313,7 +5199,7 @@
     </p:spTree>
     <p:extLst>
       <p:ext uri="{BB962C8B-B14F-4D97-AF65-F5344CB8AC3E}">
-        <p14:creationId xmlns:p14="http://schemas.microsoft.com/office/powerpoint/2010/main" val="1053383430"/>
+        <p14:creationId xmlns:p14="http://schemas.microsoft.com/office/powerpoint/2010/main" val="2122598543"/>
       </p:ext>
     </p:extLst>
   </p:cSld>
@@ -4344,7 +5230,7 @@
           <p:cNvPr id="1" name="">
             <a:extLst xmlns:a="http://schemas.openxmlformats.org/drawingml/2006/main">
               <a:ext uri="{FF2B5EF4-FFF2-40B4-BE49-F238E27FC236}">
-                <a16:creationId xmlns:a16="http://schemas.microsoft.com/office/drawing/2014/main" id="{14BEBE18-0A39-4146-84C6-D5E636AA6ABF}"/>
+                <a16:creationId xmlns:a16="http://schemas.microsoft.com/office/drawing/2014/main" id="{1C6A0A1B-A5D8-47CE-8DDE-37A4BB807295}"/>
               </a:ext>
             </a:extLst>
           </p:cNvPr>
@@ -4374,7 +5260,7 @@
           <p:cNvPr id="2" name="">
             <a:extLst xmlns:a="http://schemas.openxmlformats.org/drawingml/2006/main">
               <a:ext uri="{FF2B5EF4-FFF2-40B4-BE49-F238E27FC236}">
-                <a16:creationId xmlns:a16="http://schemas.microsoft.com/office/drawing/2014/main" id="{312D55B2-9B15-4E97-8705-45909677E7F4}"/>
+                <a16:creationId xmlns:a16="http://schemas.microsoft.com/office/drawing/2014/main" id="{743D86B5-2EC4-4A79-B249-59ECABB62A93}"/>
               </a:ext>
             </a:extLst>
           </p:cNvPr>
@@ -4404,7 +5290,7 @@
           <p:cNvPr id="3" name="">
             <a:extLst xmlns:a="http://schemas.openxmlformats.org/drawingml/2006/main">
               <a:ext uri="{FF2B5EF4-FFF2-40B4-BE49-F238E27FC236}">
-                <a16:creationId xmlns:a16="http://schemas.microsoft.com/office/drawing/2014/main" id="{9AED0656-9C9D-4C26-9F26-CC66F4CD1371}"/>
+                <a16:creationId xmlns:a16="http://schemas.microsoft.com/office/drawing/2014/main" id="{595C5C47-6F4D-4EB8-A947-BEA462F135B2}"/>
               </a:ext>
             </a:extLst>
           </p:cNvPr>
@@ -4460,7 +5346,7 @@
           <p:cNvPr id="4" name="">
             <a:extLst xmlns:a="http://schemas.openxmlformats.org/drawingml/2006/main">
               <a:ext uri="{FF2B5EF4-FFF2-40B4-BE49-F238E27FC236}">
-                <a16:creationId xmlns:a16="http://schemas.microsoft.com/office/drawing/2014/main" id="{CAA219C0-DF8B-457F-B40C-185EC8EB2898}"/>
+                <a16:creationId xmlns:a16="http://schemas.microsoft.com/office/drawing/2014/main" id="{9DBCF3AA-8F84-4AEF-8F39-6DA98013C223}"/>
               </a:ext>
             </a:extLst>
           </p:cNvPr>
@@ -4483,7 +5369,7 @@
         </p:spPr>
         <p:txBody>
           <a:bodyPr xmlns:a="http://schemas.openxmlformats.org/drawingml/2006/main" lIns="0" tIns="0" rIns="0" bIns="0" anchor="t">
-            <a:normAutofit fontScale="100000"/>
+            <a:normAutofit fontScale="96354"/>
           </a:bodyPr>
           <a:lstStyle xmlns:a="http://schemas.openxmlformats.org/drawingml/2006/main"/>
           <a:p xmlns:a="http://schemas.openxmlformats.org/drawingml/2006/main">
@@ -4506,7 +5392,7 @@
                 <a:ea typeface="PingFang SC"/>
                 <a:cs typeface="PingFang SC"/>
               </a:rPr>
-              <a:t>代表样本回放用于验证风险是否进入 AI Review 可见路径</a:t>
+              <a:t>风险处置台账将“模型看到的风险”沉淀为可见、可追踪、可复盘的处置记录</a:t>
             </a:r>
           </a:p>
         </p:txBody>
@@ -4516,7 +5402,7 @@
           <p:cNvPr id="5" name="">
             <a:extLst xmlns:a="http://schemas.openxmlformats.org/drawingml/2006/main">
               <a:ext uri="{FF2B5EF4-FFF2-40B4-BE49-F238E27FC236}">
-                <a16:creationId xmlns:a16="http://schemas.microsoft.com/office/drawing/2014/main" id="{1141D760-1A6B-4E56-A600-DCDE9A619B74}"/>
+                <a16:creationId xmlns:a16="http://schemas.microsoft.com/office/drawing/2014/main" id="{254F17E9-6B41-49C9-9292-4D51E4F1697B}"/>
               </a:ext>
             </a:extLst>
           </p:cNvPr>
@@ -4546,7 +5432,7 @@
           <p:cNvPr id="6" name="">
             <a:extLst xmlns:a="http://schemas.openxmlformats.org/drawingml/2006/main">
               <a:ext uri="{FF2B5EF4-FFF2-40B4-BE49-F238E27FC236}">
-                <a16:creationId xmlns:a16="http://schemas.microsoft.com/office/drawing/2014/main" id="{48250E78-CF98-4EB0-BD0C-9721DFFFDC6E}"/>
+                <a16:creationId xmlns:a16="http://schemas.microsoft.com/office/drawing/2014/main" id="{E881386F-CA97-414F-9210-0A460344F081}"/>
               </a:ext>
             </a:extLst>
           </p:cNvPr>
@@ -4602,23 +5488,449 @@
           <p:cNvPr id="7" name="">
             <a:extLst xmlns:a="http://schemas.openxmlformats.org/drawingml/2006/main">
               <a:ext uri="{FF2B5EF4-FFF2-40B4-BE49-F238E27FC236}">
-                <a16:creationId xmlns:a16="http://schemas.microsoft.com/office/drawing/2014/main" id="{3E025510-B4D3-405A-B551-63218D75931A}"/>
-              </a:ext>
-            </a:extLst>
-          </p:cNvPr>
-          <p:cNvSpPr>
-            <a:spLocks xmlns:a="http://schemas.openxmlformats.org/drawingml/2006/main" noGrp="1"/>
-          </p:cNvSpPr>
-          <p:nvPr/>
-        </p:nvSpPr>
-        <p:spPr>
-          <a:xfrm xmlns:a="http://schemas.openxmlformats.org/drawingml/2006/main">
-            <a:off x="742950" y="2038350"/>
-            <a:ext cx="2381250" cy="1428750"/>
+                <a16:creationId xmlns:a16="http://schemas.microsoft.com/office/drawing/2014/main" id="{4308854E-DBD9-44EE-AA0A-E1F2D97B034B}"/>
+              </a:ext>
+            </a:extLst>
+          </p:cNvPr>
+          <p:cNvSpPr>
+            <a:spLocks xmlns:a="http://schemas.openxmlformats.org/drawingml/2006/main" noGrp="1"/>
+          </p:cNvSpPr>
+          <p:nvPr/>
+        </p:nvSpPr>
+        <p:spPr>
+          <a:xfrm xmlns:a="http://schemas.openxmlformats.org/drawingml/2006/main">
+            <a:off x="685800" y="1962150"/>
+            <a:ext cx="2057400" cy="990600"/>
+          </a:xfrm>
+          <a:prstGeom xmlns:a="http://schemas.openxmlformats.org/drawingml/2006/main" prst="rect">
+            <a:avLst/>
+          </a:prstGeom>
+          <a:solidFill xmlns:a="http://schemas.openxmlformats.org/drawingml/2006/main">
+            <a:srgbClr val="FFF2F2"/>
+          </a:solidFill>
+          <a:ln xmlns:a="http://schemas.openxmlformats.org/drawingml/2006/main">
+            <a:noFill/>
+          </a:ln>
+        </p:spPr>
+      </p:sp>
+      <p:sp>
+        <p:nvSpPr>
+          <p:cNvPr id="8" name="">
+            <a:extLst xmlns:a="http://schemas.openxmlformats.org/drawingml/2006/main">
+              <a:ext uri="{FF2B5EF4-FFF2-40B4-BE49-F238E27FC236}">
+                <a16:creationId xmlns:a16="http://schemas.microsoft.com/office/drawing/2014/main" id="{F2A8DED7-9EB8-4BB7-A95F-5D38DD366F26}"/>
+              </a:ext>
+            </a:extLst>
+          </p:cNvPr>
+          <p:cNvSpPr>
+            <a:spLocks xmlns:a="http://schemas.openxmlformats.org/drawingml/2006/main" noGrp="1"/>
+          </p:cNvSpPr>
+          <p:nvPr/>
+        </p:nvSpPr>
+        <p:spPr>
+          <a:xfrm xmlns:a="http://schemas.openxmlformats.org/drawingml/2006/main">
+            <a:off x="876300" y="2152650"/>
+            <a:ext cx="1143000" cy="228600"/>
+          </a:xfrm>
+          <a:prstGeom xmlns:a="http://schemas.openxmlformats.org/drawingml/2006/main" prst="rect">
+            <a:avLst/>
+          </a:prstGeom>
+          <a:ln xmlns:a="http://schemas.openxmlformats.org/drawingml/2006/main">
+            <a:noFill/>
+          </a:ln>
+        </p:spPr>
+        <p:txBody>
+          <a:bodyPr xmlns:a="http://schemas.openxmlformats.org/drawingml/2006/main" lIns="0" tIns="0" rIns="0" bIns="0" anchor="t">
+            <a:normAutofit fontScale="95238"/>
+          </a:bodyPr>
+          <a:lstStyle xmlns:a="http://schemas.openxmlformats.org/drawingml/2006/main"/>
+          <a:p xmlns:a="http://schemas.openxmlformats.org/drawingml/2006/main">
+            <a:pPr algn="l">
+              <a:defRPr sz="1575" b="1">
+                <a:solidFill>
+                  <a:srgbClr val="111827"/>
+                </a:solidFill>
+                <a:latin typeface="PingFang SC"/>
+                <a:ea typeface="PingFang SC"/>
+                <a:cs typeface="PingFang SC"/>
+              </a:defRPr>
+            </a:pPr>
+            <a:r>
+              <a:rPr sz="1575" b="1">
+                <a:solidFill>
+                  <a:srgbClr val="111827"/>
+                </a:solidFill>
+                <a:latin typeface="PingFang SC"/>
+                <a:ea typeface="PingFang SC"/>
+                <a:cs typeface="PingFang SC"/>
+              </a:rPr>
+              <a:t>问题断点</a:t>
+            </a:r>
+          </a:p>
+        </p:txBody>
+      </p:sp>
+      <p:sp>
+        <p:nvSpPr>
+          <p:cNvPr id="9" name="">
+            <a:extLst xmlns:a="http://schemas.openxmlformats.org/drawingml/2006/main">
+              <a:ext uri="{FF2B5EF4-FFF2-40B4-BE49-F238E27FC236}">
+                <a16:creationId xmlns:a16="http://schemas.microsoft.com/office/drawing/2014/main" id="{C6A2F4C8-C270-4159-8403-BE0EA33B18E9}"/>
+              </a:ext>
+            </a:extLst>
+          </p:cNvPr>
+          <p:cNvSpPr>
+            <a:spLocks xmlns:a="http://schemas.openxmlformats.org/drawingml/2006/main" noGrp="1"/>
+          </p:cNvSpPr>
+          <p:nvPr/>
+        </p:nvSpPr>
+        <p:spPr>
+          <a:xfrm xmlns:a="http://schemas.openxmlformats.org/drawingml/2006/main">
+            <a:off x="876300" y="2514600"/>
+            <a:ext cx="1619250" cy="323850"/>
+          </a:xfrm>
+          <a:prstGeom xmlns:a="http://schemas.openxmlformats.org/drawingml/2006/main" prst="rect">
+            <a:avLst/>
+          </a:prstGeom>
+          <a:ln xmlns:a="http://schemas.openxmlformats.org/drawingml/2006/main">
+            <a:noFill/>
+          </a:ln>
+        </p:spPr>
+        <p:txBody>
+          <a:bodyPr xmlns:a="http://schemas.openxmlformats.org/drawingml/2006/main" lIns="0" tIns="0" rIns="0" bIns="0" anchor="t">
+            <a:normAutofit fontScale="96785"/>
+          </a:bodyPr>
+          <a:lstStyle xmlns:a="http://schemas.openxmlformats.org/drawingml/2006/main"/>
+          <a:p xmlns:a="http://schemas.openxmlformats.org/drawingml/2006/main">
+            <a:pPr algn="l">
+              <a:defRPr sz="1013" b="0">
+                <a:solidFill>
+                  <a:srgbClr val="273140"/>
+                </a:solidFill>
+                <a:latin typeface="PingFang SC"/>
+                <a:ea typeface="PingFang SC"/>
+                <a:cs typeface="PingFang SC"/>
+              </a:defRPr>
+            </a:pPr>
+            <a:r>
+              <a:rPr sz="1013" b="0">
+                <a:solidFill>
+                  <a:srgbClr val="273140"/>
+                </a:solidFill>
+                <a:latin typeface="PingFang SC"/>
+                <a:ea typeface="PingFang SC"/>
+                <a:cs typeface="PingFang SC"/>
+              </a:rPr>
+              <a:t>早期能在分析过程看到风险，但正式评论可能只有一部分。</a:t>
+            </a:r>
+          </a:p>
+        </p:txBody>
+      </p:sp>
+      <p:sp>
+        <p:nvSpPr>
+          <p:cNvPr id="10" name="">
+            <a:extLst xmlns:a="http://schemas.openxmlformats.org/drawingml/2006/main">
+              <a:ext uri="{FF2B5EF4-FFF2-40B4-BE49-F238E27FC236}">
+                <a16:creationId xmlns:a16="http://schemas.microsoft.com/office/drawing/2014/main" id="{7A5FCEF7-06F2-4B57-8A21-C425E33AD3BD}"/>
+              </a:ext>
+            </a:extLst>
+          </p:cNvPr>
+          <p:cNvSpPr>
+            <a:spLocks xmlns:a="http://schemas.openxmlformats.org/drawingml/2006/main" noGrp="1"/>
+          </p:cNvSpPr>
+          <p:nvPr/>
+        </p:nvSpPr>
+        <p:spPr>
+          <a:xfrm xmlns:a="http://schemas.openxmlformats.org/drawingml/2006/main">
+            <a:off x="3009900" y="1962150"/>
+            <a:ext cx="2057400" cy="990600"/>
+          </a:xfrm>
+          <a:prstGeom xmlns:a="http://schemas.openxmlformats.org/drawingml/2006/main" prst="rect">
+            <a:avLst/>
+          </a:prstGeom>
+          <a:solidFill xmlns:a="http://schemas.openxmlformats.org/drawingml/2006/main">
+            <a:srgbClr val="EAF1FF"/>
+          </a:solidFill>
+          <a:ln xmlns:a="http://schemas.openxmlformats.org/drawingml/2006/main">
+            <a:noFill/>
+          </a:ln>
+        </p:spPr>
+      </p:sp>
+      <p:sp>
+        <p:nvSpPr>
+          <p:cNvPr id="11" name="">
+            <a:extLst xmlns:a="http://schemas.openxmlformats.org/drawingml/2006/main">
+              <a:ext uri="{FF2B5EF4-FFF2-40B4-BE49-F238E27FC236}">
+                <a16:creationId xmlns:a16="http://schemas.microsoft.com/office/drawing/2014/main" id="{1D609F40-22EC-4958-886D-4C5031AC781D}"/>
+              </a:ext>
+            </a:extLst>
+          </p:cNvPr>
+          <p:cNvSpPr>
+            <a:spLocks xmlns:a="http://schemas.openxmlformats.org/drawingml/2006/main" noGrp="1"/>
+          </p:cNvSpPr>
+          <p:nvPr/>
+        </p:nvSpPr>
+        <p:spPr>
+          <a:xfrm xmlns:a="http://schemas.openxmlformats.org/drawingml/2006/main">
+            <a:off x="3200400" y="2152650"/>
+            <a:ext cx="1143000" cy="228600"/>
+          </a:xfrm>
+          <a:prstGeom xmlns:a="http://schemas.openxmlformats.org/drawingml/2006/main" prst="rect">
+            <a:avLst/>
+          </a:prstGeom>
+          <a:ln xmlns:a="http://schemas.openxmlformats.org/drawingml/2006/main">
+            <a:noFill/>
+          </a:ln>
+        </p:spPr>
+        <p:txBody>
+          <a:bodyPr xmlns:a="http://schemas.openxmlformats.org/drawingml/2006/main" lIns="0" tIns="0" rIns="0" bIns="0" anchor="t">
+            <a:normAutofit fontScale="95238"/>
+          </a:bodyPr>
+          <a:lstStyle xmlns:a="http://schemas.openxmlformats.org/drawingml/2006/main"/>
+          <a:p xmlns:a="http://schemas.openxmlformats.org/drawingml/2006/main">
+            <a:pPr algn="l">
+              <a:defRPr sz="1575" b="1">
+                <a:solidFill>
+                  <a:srgbClr val="111827"/>
+                </a:solidFill>
+                <a:latin typeface="PingFang SC"/>
+                <a:ea typeface="PingFang SC"/>
+                <a:cs typeface="PingFang SC"/>
+              </a:defRPr>
+            </a:pPr>
+            <a:r>
+              <a:rPr sz="1575" b="1">
+                <a:solidFill>
+                  <a:srgbClr val="111827"/>
+                </a:solidFill>
+                <a:latin typeface="PingFang SC"/>
+                <a:ea typeface="PingFang SC"/>
+                <a:cs typeface="PingFang SC"/>
+              </a:rPr>
+              <a:t>修复动作</a:t>
+            </a:r>
+          </a:p>
+        </p:txBody>
+      </p:sp>
+      <p:sp>
+        <p:nvSpPr>
+          <p:cNvPr id="12" name="">
+            <a:extLst xmlns:a="http://schemas.openxmlformats.org/drawingml/2006/main">
+              <a:ext uri="{FF2B5EF4-FFF2-40B4-BE49-F238E27FC236}">
+                <a16:creationId xmlns:a16="http://schemas.microsoft.com/office/drawing/2014/main" id="{224B3C10-A09A-4B57-A6A2-44D8F145B308}"/>
+              </a:ext>
+            </a:extLst>
+          </p:cNvPr>
+          <p:cNvSpPr>
+            <a:spLocks xmlns:a="http://schemas.openxmlformats.org/drawingml/2006/main" noGrp="1"/>
+          </p:cNvSpPr>
+          <p:nvPr/>
+        </p:nvSpPr>
+        <p:spPr>
+          <a:xfrm xmlns:a="http://schemas.openxmlformats.org/drawingml/2006/main">
+            <a:off x="3200400" y="2514600"/>
+            <a:ext cx="1619250" cy="323850"/>
+          </a:xfrm>
+          <a:prstGeom xmlns:a="http://schemas.openxmlformats.org/drawingml/2006/main" prst="rect">
+            <a:avLst/>
+          </a:prstGeom>
+          <a:ln xmlns:a="http://schemas.openxmlformats.org/drawingml/2006/main">
+            <a:noFill/>
+          </a:ln>
+        </p:spPr>
+        <p:txBody>
+          <a:bodyPr xmlns:a="http://schemas.openxmlformats.org/drawingml/2006/main" lIns="0" tIns="0" rIns="0" bIns="0" anchor="t">
+            <a:normAutofit fontScale="78646"/>
+          </a:bodyPr>
+          <a:lstStyle xmlns:a="http://schemas.openxmlformats.org/drawingml/2006/main"/>
+          <a:p xmlns:a="http://schemas.openxmlformats.org/drawingml/2006/main">
+            <a:pPr algn="l">
+              <a:defRPr sz="1013" b="0">
+                <a:solidFill>
+                  <a:srgbClr val="273140"/>
+                </a:solidFill>
+                <a:latin typeface="PingFang SC"/>
+                <a:ea typeface="PingFang SC"/>
+                <a:cs typeface="PingFang SC"/>
+              </a:defRPr>
+            </a:pPr>
+            <a:r>
+              <a:rPr sz="1013" b="0">
+                <a:solidFill>
+                  <a:srgbClr val="273140"/>
+                </a:solidFill>
+                <a:latin typeface="PingFang SC"/>
+                <a:ea typeface="PingFang SC"/>
+                <a:cs typeface="PingFang SC"/>
+              </a:rPr>
+              <a:t>新增风险处置台账，要求每条风险都有正式问题、待确认或排除记录。</a:t>
+            </a:r>
+          </a:p>
+        </p:txBody>
+      </p:sp>
+      <p:sp>
+        <p:nvSpPr>
+          <p:cNvPr id="13" name="">
+            <a:extLst xmlns:a="http://schemas.openxmlformats.org/drawingml/2006/main">
+              <a:ext uri="{FF2B5EF4-FFF2-40B4-BE49-F238E27FC236}">
+                <a16:creationId xmlns:a16="http://schemas.microsoft.com/office/drawing/2014/main" id="{BE0443BA-7B99-47FC-A318-08443998FD96}"/>
+              </a:ext>
+            </a:extLst>
+          </p:cNvPr>
+          <p:cNvSpPr>
+            <a:spLocks xmlns:a="http://schemas.openxmlformats.org/drawingml/2006/main" noGrp="1"/>
+          </p:cNvSpPr>
+          <p:nvPr/>
+        </p:nvSpPr>
+        <p:spPr>
+          <a:xfrm xmlns:a="http://schemas.openxmlformats.org/drawingml/2006/main">
+            <a:off x="5334000" y="1962150"/>
+            <a:ext cx="2057400" cy="990600"/>
+          </a:xfrm>
+          <a:prstGeom xmlns:a="http://schemas.openxmlformats.org/drawingml/2006/main" prst="rect">
+            <a:avLst/>
+          </a:prstGeom>
+          <a:solidFill xmlns:a="http://schemas.openxmlformats.org/drawingml/2006/main">
+            <a:srgbClr val="EAF8F2"/>
+          </a:solidFill>
+          <a:ln xmlns:a="http://schemas.openxmlformats.org/drawingml/2006/main">
+            <a:noFill/>
+          </a:ln>
+        </p:spPr>
+      </p:sp>
+      <p:sp>
+        <p:nvSpPr>
+          <p:cNvPr id="14" name="">
+            <a:extLst xmlns:a="http://schemas.openxmlformats.org/drawingml/2006/main">
+              <a:ext uri="{FF2B5EF4-FFF2-40B4-BE49-F238E27FC236}">
+                <a16:creationId xmlns:a16="http://schemas.microsoft.com/office/drawing/2014/main" id="{4CCCCB5F-704A-41AA-8612-BBE0F0474768}"/>
+              </a:ext>
+            </a:extLst>
+          </p:cNvPr>
+          <p:cNvSpPr>
+            <a:spLocks xmlns:a="http://schemas.openxmlformats.org/drawingml/2006/main" noGrp="1"/>
+          </p:cNvSpPr>
+          <p:nvPr/>
+        </p:nvSpPr>
+        <p:spPr>
+          <a:xfrm xmlns:a="http://schemas.openxmlformats.org/drawingml/2006/main">
+            <a:off x="5524500" y="2152650"/>
+            <a:ext cx="1143000" cy="228600"/>
+          </a:xfrm>
+          <a:prstGeom xmlns:a="http://schemas.openxmlformats.org/drawingml/2006/main" prst="rect">
+            <a:avLst/>
+          </a:prstGeom>
+          <a:ln xmlns:a="http://schemas.openxmlformats.org/drawingml/2006/main">
+            <a:noFill/>
+          </a:ln>
+        </p:spPr>
+        <p:txBody>
+          <a:bodyPr xmlns:a="http://schemas.openxmlformats.org/drawingml/2006/main" lIns="0" tIns="0" rIns="0" bIns="0" anchor="t">
+            <a:normAutofit fontScale="95238"/>
+          </a:bodyPr>
+          <a:lstStyle xmlns:a="http://schemas.openxmlformats.org/drawingml/2006/main"/>
+          <a:p xmlns:a="http://schemas.openxmlformats.org/drawingml/2006/main">
+            <a:pPr algn="l">
+              <a:defRPr sz="1575" b="1">
+                <a:solidFill>
+                  <a:srgbClr val="111827"/>
+                </a:solidFill>
+                <a:latin typeface="PingFang SC"/>
+                <a:ea typeface="PingFang SC"/>
+                <a:cs typeface="PingFang SC"/>
+              </a:defRPr>
+            </a:pPr>
+            <a:r>
+              <a:rPr sz="1575" b="1">
+                <a:solidFill>
+                  <a:srgbClr val="111827"/>
+                </a:solidFill>
+                <a:latin typeface="PingFang SC"/>
+                <a:ea typeface="PingFang SC"/>
+                <a:cs typeface="PingFang SC"/>
+              </a:rPr>
+              <a:t>结果收益</a:t>
+            </a:r>
+          </a:p>
+        </p:txBody>
+      </p:sp>
+      <p:sp>
+        <p:nvSpPr>
+          <p:cNvPr id="15" name="">
+            <a:extLst xmlns:a="http://schemas.openxmlformats.org/drawingml/2006/main">
+              <a:ext uri="{FF2B5EF4-FFF2-40B4-BE49-F238E27FC236}">
+                <a16:creationId xmlns:a16="http://schemas.microsoft.com/office/drawing/2014/main" id="{A253D23B-3119-4658-9791-C0A27CCA0E99}"/>
+              </a:ext>
+            </a:extLst>
+          </p:cNvPr>
+          <p:cNvSpPr>
+            <a:spLocks xmlns:a="http://schemas.openxmlformats.org/drawingml/2006/main" noGrp="1"/>
+          </p:cNvSpPr>
+          <p:nvPr/>
+        </p:nvSpPr>
+        <p:spPr>
+          <a:xfrm xmlns:a="http://schemas.openxmlformats.org/drawingml/2006/main">
+            <a:off x="5524500" y="2514600"/>
+            <a:ext cx="1619250" cy="323850"/>
+          </a:xfrm>
+          <a:prstGeom xmlns:a="http://schemas.openxmlformats.org/drawingml/2006/main" prst="rect">
+            <a:avLst/>
+          </a:prstGeom>
+          <a:ln xmlns:a="http://schemas.openxmlformats.org/drawingml/2006/main">
+            <a:noFill/>
+          </a:ln>
+        </p:spPr>
+        <p:txBody>
+          <a:bodyPr xmlns:a="http://schemas.openxmlformats.org/drawingml/2006/main" lIns="0" tIns="0" rIns="0" bIns="0" anchor="t">
+            <a:normAutofit fontScale="89900"/>
+          </a:bodyPr>
+          <a:lstStyle xmlns:a="http://schemas.openxmlformats.org/drawingml/2006/main"/>
+          <a:p xmlns:a="http://schemas.openxmlformats.org/drawingml/2006/main">
+            <a:pPr algn="l">
+              <a:defRPr sz="1013" b="0">
+                <a:solidFill>
+                  <a:srgbClr val="273140"/>
+                </a:solidFill>
+                <a:latin typeface="PingFang SC"/>
+                <a:ea typeface="PingFang SC"/>
+                <a:cs typeface="PingFang SC"/>
+              </a:defRPr>
+            </a:pPr>
+            <a:r>
+              <a:rPr sz="1013" b="0">
+                <a:solidFill>
+                  <a:srgbClr val="273140"/>
+                </a:solidFill>
+                <a:latin typeface="PingFang SC"/>
+                <a:ea typeface="PingFang SC"/>
+                <a:cs typeface="PingFang SC"/>
+              </a:rPr>
+              <a:t>风险从中间过程进入可见结果，后台能解释为什么保留或排除。</a:t>
+            </a:r>
+          </a:p>
+        </p:txBody>
+      </p:sp>
+      <p:sp>
+        <p:nvSpPr>
+          <p:cNvPr id="16" name="">
+            <a:extLst xmlns:a="http://schemas.openxmlformats.org/drawingml/2006/main">
+              <a:ext uri="{FF2B5EF4-FFF2-40B4-BE49-F238E27FC236}">
+                <a16:creationId xmlns:a16="http://schemas.microsoft.com/office/drawing/2014/main" id="{5F9AE26E-7219-437E-9D25-52B3E6BFA0CD}"/>
+              </a:ext>
+            </a:extLst>
+          </p:cNvPr>
+          <p:cNvSpPr>
+            <a:spLocks xmlns:a="http://schemas.openxmlformats.org/drawingml/2006/main" noGrp="1"/>
+          </p:cNvSpPr>
+          <p:nvPr/>
+        </p:nvSpPr>
+        <p:spPr>
+          <a:xfrm xmlns:a="http://schemas.openxmlformats.org/drawingml/2006/main">
+            <a:off x="685800" y="3276600"/>
+            <a:ext cx="6534150" cy="1962150"/>
           </a:xfrm>
           <a:prstGeom xmlns:a="http://schemas.openxmlformats.org/drawingml/2006/main" prst="roundRect">
             <a:avLst>
-              <a:gd name="adj" fmla="val 1333"/>
+              <a:gd name="adj" fmla="val 971"/>
             </a:avLst>
           </a:prstGeom>
           <a:solidFill xmlns:a="http://schemas.openxmlformats.org/drawingml/2006/main">
@@ -4633,22 +5945,22 @@
       </p:sp>
       <p:sp>
         <p:nvSpPr>
-          <p:cNvPr id="8" name="">
-            <a:extLst xmlns:a="http://schemas.openxmlformats.org/drawingml/2006/main">
-              <a:ext uri="{FF2B5EF4-FFF2-40B4-BE49-F238E27FC236}">
-                <a16:creationId xmlns:a16="http://schemas.microsoft.com/office/drawing/2014/main" id="{B8223E71-FE5D-4632-95FF-A359E3BCDDEB}"/>
-              </a:ext>
-            </a:extLst>
-          </p:cNvPr>
-          <p:cNvSpPr>
-            <a:spLocks xmlns:a="http://schemas.openxmlformats.org/drawingml/2006/main" noGrp="1"/>
-          </p:cNvSpPr>
-          <p:nvPr/>
-        </p:nvSpPr>
-        <p:spPr>
-          <a:xfrm xmlns:a="http://schemas.openxmlformats.org/drawingml/2006/main">
-            <a:off x="1009650" y="2305050"/>
-            <a:ext cx="1428750" cy="266700"/>
+          <p:cNvPr id="17" name="">
+            <a:extLst xmlns:a="http://schemas.openxmlformats.org/drawingml/2006/main">
+              <a:ext uri="{FF2B5EF4-FFF2-40B4-BE49-F238E27FC236}">
+                <a16:creationId xmlns:a16="http://schemas.microsoft.com/office/drawing/2014/main" id="{5B0F013C-A7C5-4103-B3D8-CD17148BB969}"/>
+              </a:ext>
+            </a:extLst>
+          </p:cNvPr>
+          <p:cNvSpPr>
+            <a:spLocks xmlns:a="http://schemas.openxmlformats.org/drawingml/2006/main" noGrp="1"/>
+          </p:cNvSpPr>
+          <p:nvPr/>
+        </p:nvSpPr>
+        <p:spPr>
+          <a:xfrm xmlns:a="http://schemas.openxmlformats.org/drawingml/2006/main">
+            <a:off x="914400" y="3486150"/>
+            <a:ext cx="1714500" cy="228600"/>
           </a:xfrm>
           <a:prstGeom xmlns:a="http://schemas.openxmlformats.org/drawingml/2006/main" prst="rect">
             <a:avLst/>
@@ -4659,52 +5971,82 @@
         </p:spPr>
         <p:txBody>
           <a:bodyPr xmlns:a="http://schemas.openxmlformats.org/drawingml/2006/main" lIns="0" tIns="0" rIns="0" bIns="0" anchor="t">
-            <a:normAutofit fontScale="97222"/>
+            <a:normAutofit fontScale="100000"/>
           </a:bodyPr>
           <a:lstStyle xmlns:a="http://schemas.openxmlformats.org/drawingml/2006/main"/>
           <a:p xmlns:a="http://schemas.openxmlformats.org/drawingml/2006/main">
             <a:pPr algn="l">
-              <a:defRPr sz="1800" b="1">
-                <a:solidFill>
-                  <a:srgbClr val="E03131"/>
-                </a:solidFill>
-                <a:latin typeface="PingFang SC"/>
-                <a:ea typeface="PingFang SC"/>
-                <a:cs typeface="PingFang SC"/>
-              </a:defRPr>
-            </a:pPr>
-            <a:r>
-              <a:rPr sz="1800" b="1">
-                <a:solidFill>
-                  <a:srgbClr val="E03131"/>
-                </a:solidFill>
-                <a:latin typeface="PingFang SC"/>
-                <a:ea typeface="PingFang SC"/>
-                <a:cs typeface="PingFang SC"/>
-              </a:rPr>
-              <a:t>风险样本</a:t>
-            </a:r>
-          </a:p>
-        </p:txBody>
-      </p:sp>
-      <p:sp>
-        <p:nvSpPr>
-          <p:cNvPr id="9" name="">
-            <a:extLst xmlns:a="http://schemas.openxmlformats.org/drawingml/2006/main">
-              <a:ext uri="{FF2B5EF4-FFF2-40B4-BE49-F238E27FC236}">
-                <a16:creationId xmlns:a16="http://schemas.microsoft.com/office/drawing/2014/main" id="{F9213973-F536-49D0-98A3-7B973E174715}"/>
-              </a:ext>
-            </a:extLst>
-          </p:cNvPr>
-          <p:cNvSpPr>
-            <a:spLocks xmlns:a="http://schemas.openxmlformats.org/drawingml/2006/main" noGrp="1"/>
-          </p:cNvSpPr>
-          <p:nvPr/>
-        </p:nvSpPr>
-        <p:spPr>
-          <a:xfrm xmlns:a="http://schemas.openxmlformats.org/drawingml/2006/main">
-            <a:off x="1009650" y="2781300"/>
-            <a:ext cx="1714500" cy="438150"/>
+              <a:defRPr sz="1500" b="1">
+                <a:solidFill>
+                  <a:srgbClr val="111827"/>
+                </a:solidFill>
+                <a:latin typeface="PingFang SC"/>
+                <a:ea typeface="PingFang SC"/>
+                <a:cs typeface="PingFang SC"/>
+              </a:defRPr>
+            </a:pPr>
+            <a:r>
+              <a:rPr sz="1500" b="1">
+                <a:solidFill>
+                  <a:srgbClr val="111827"/>
+                </a:solidFill>
+                <a:latin typeface="PingFang SC"/>
+                <a:ea typeface="PingFang SC"/>
+                <a:cs typeface="PingFang SC"/>
+              </a:rPr>
+              <a:t>代表样本回放</a:t>
+            </a:r>
+          </a:p>
+        </p:txBody>
+      </p:sp>
+      <p:sp>
+        <p:nvSpPr>
+          <p:cNvPr id="18" name="">
+            <a:extLst xmlns:a="http://schemas.openxmlformats.org/drawingml/2006/main">
+              <a:ext uri="{FF2B5EF4-FFF2-40B4-BE49-F238E27FC236}">
+                <a16:creationId xmlns:a16="http://schemas.microsoft.com/office/drawing/2014/main" id="{59D220E6-E278-4EE8-A081-1510578C8033}"/>
+              </a:ext>
+            </a:extLst>
+          </p:cNvPr>
+          <p:cNvSpPr>
+            <a:spLocks xmlns:a="http://schemas.openxmlformats.org/drawingml/2006/main" noGrp="1"/>
+          </p:cNvSpPr>
+          <p:nvPr/>
+        </p:nvSpPr>
+        <p:spPr>
+          <a:xfrm xmlns:a="http://schemas.openxmlformats.org/drawingml/2006/main">
+            <a:off x="914400" y="3867150"/>
+            <a:ext cx="6076950" cy="228600"/>
+          </a:xfrm>
+          <a:prstGeom xmlns:a="http://schemas.openxmlformats.org/drawingml/2006/main" prst="rect">
+            <a:avLst/>
+          </a:prstGeom>
+          <a:solidFill xmlns:a="http://schemas.openxmlformats.org/drawingml/2006/main">
+            <a:srgbClr val="FFFFFF"/>
+          </a:solidFill>
+          <a:ln xmlns:a="http://schemas.openxmlformats.org/drawingml/2006/main">
+            <a:noFill/>
+          </a:ln>
+        </p:spPr>
+      </p:sp>
+      <p:sp>
+        <p:nvSpPr>
+          <p:cNvPr id="19" name="">
+            <a:extLst xmlns:a="http://schemas.openxmlformats.org/drawingml/2006/main">
+              <a:ext uri="{FF2B5EF4-FFF2-40B4-BE49-F238E27FC236}">
+                <a16:creationId xmlns:a16="http://schemas.microsoft.com/office/drawing/2014/main" id="{CDAE990B-0129-415A-B2B1-08192710F3E2}"/>
+              </a:ext>
+            </a:extLst>
+          </p:cNvPr>
+          <p:cNvSpPr>
+            <a:spLocks xmlns:a="http://schemas.openxmlformats.org/drawingml/2006/main" noGrp="1"/>
+          </p:cNvSpPr>
+          <p:nvPr/>
+        </p:nvSpPr>
+        <p:spPr>
+          <a:xfrm xmlns:a="http://schemas.openxmlformats.org/drawingml/2006/main">
+            <a:off x="1047750" y="3905250"/>
+            <a:ext cx="552450" cy="133350"/>
           </a:xfrm>
           <a:prstGeom xmlns:a="http://schemas.openxmlformats.org/drawingml/2006/main" prst="rect">
             <a:avLst/>
@@ -4715,14 +6057,1062 @@
         </p:spPr>
         <p:txBody>
           <a:bodyPr xmlns:a="http://schemas.openxmlformats.org/drawingml/2006/main" lIns="0" tIns="0" rIns="0" bIns="0" anchor="t">
-            <a:normAutofit fontScale="96279"/>
+            <a:normAutofit fontScale="100000"/>
           </a:bodyPr>
           <a:lstStyle xmlns:a="http://schemas.openxmlformats.org/drawingml/2006/main"/>
           <a:p xmlns:a="http://schemas.openxmlformats.org/drawingml/2006/main">
             <a:pPr algn="l">
+              <a:defRPr sz="863" b="1">
+                <a:solidFill>
+                  <a:srgbClr val="145CFF"/>
+                </a:solidFill>
+                <a:latin typeface="Menlo"/>
+                <a:ea typeface="Menlo"/>
+                <a:cs typeface="Menlo"/>
+              </a:defRPr>
+            </a:pPr>
+            <a:r>
+              <a:rPr sz="863" b="1">
+                <a:solidFill>
+                  <a:srgbClr val="145CFF"/>
+                </a:solidFill>
+                <a:latin typeface="Menlo"/>
+                <a:ea typeface="Menlo"/>
+                <a:cs typeface="Menlo"/>
+              </a:rPr>
+              <a:t>RF001</a:t>
+            </a:r>
+          </a:p>
+        </p:txBody>
+      </p:sp>
+      <p:sp>
+        <p:nvSpPr>
+          <p:cNvPr id="20" name="">
+            <a:extLst xmlns:a="http://schemas.openxmlformats.org/drawingml/2006/main">
+              <a:ext uri="{FF2B5EF4-FFF2-40B4-BE49-F238E27FC236}">
+                <a16:creationId xmlns:a16="http://schemas.microsoft.com/office/drawing/2014/main" id="{7E3F5D94-4066-430F-A422-9372F025C6DB}"/>
+              </a:ext>
+            </a:extLst>
+          </p:cNvPr>
+          <p:cNvSpPr>
+            <a:spLocks xmlns:a="http://schemas.openxmlformats.org/drawingml/2006/main" noGrp="1"/>
+          </p:cNvSpPr>
+          <p:nvPr/>
+        </p:nvSpPr>
+        <p:spPr>
+          <a:xfrm xmlns:a="http://schemas.openxmlformats.org/drawingml/2006/main">
+            <a:off x="1752600" y="3905250"/>
+            <a:ext cx="2381250" cy="133350"/>
+          </a:xfrm>
+          <a:prstGeom xmlns:a="http://schemas.openxmlformats.org/drawingml/2006/main" prst="rect">
+            <a:avLst/>
+          </a:prstGeom>
+          <a:ln xmlns:a="http://schemas.openxmlformats.org/drawingml/2006/main">
+            <a:noFill/>
+          </a:ln>
+        </p:spPr>
+        <p:txBody>
+          <a:bodyPr xmlns:a="http://schemas.openxmlformats.org/drawingml/2006/main" lIns="0" tIns="0" rIns="0" bIns="0" anchor="t">
+            <a:normAutofit fontScale="93284"/>
+          </a:bodyPr>
+          <a:lstStyle xmlns:a="http://schemas.openxmlformats.org/drawingml/2006/main"/>
+          <a:p xmlns:a="http://schemas.openxmlformats.org/drawingml/2006/main">
+            <a:pPr algn="l">
+              <a:defRPr sz="938" b="0">
+                <a:solidFill>
+                  <a:srgbClr val="273140"/>
+                </a:solidFill>
+                <a:latin typeface="PingFang SC"/>
+                <a:ea typeface="PingFang SC"/>
+                <a:cs typeface="PingFang SC"/>
+              </a:defRPr>
+            </a:pPr>
+            <a:r>
+              <a:rPr sz="938" b="0">
+                <a:solidFill>
+                  <a:srgbClr val="273140"/>
+                </a:solidFill>
+                <a:latin typeface="PingFang SC"/>
+                <a:ea typeface="PingFang SC"/>
+                <a:cs typeface="PingFang SC"/>
+              </a:rPr>
+              <a:t>固定 buffer 风险</a:t>
+            </a:r>
+          </a:p>
+        </p:txBody>
+      </p:sp>
+      <p:sp>
+        <p:nvSpPr>
+          <p:cNvPr id="21" name="">
+            <a:extLst xmlns:a="http://schemas.openxmlformats.org/drawingml/2006/main">
+              <a:ext uri="{FF2B5EF4-FFF2-40B4-BE49-F238E27FC236}">
+                <a16:creationId xmlns:a16="http://schemas.microsoft.com/office/drawing/2014/main" id="{505C576D-DBBC-4589-B03E-A3ABC8463526}"/>
+              </a:ext>
+            </a:extLst>
+          </p:cNvPr>
+          <p:cNvSpPr>
+            <a:spLocks xmlns:a="http://schemas.openxmlformats.org/drawingml/2006/main" noGrp="1"/>
+          </p:cNvSpPr>
+          <p:nvPr/>
+        </p:nvSpPr>
+        <p:spPr>
+          <a:xfrm xmlns:a="http://schemas.openxmlformats.org/drawingml/2006/main">
+            <a:off x="4362450" y="3905250"/>
+            <a:ext cx="2381250" cy="133350"/>
+          </a:xfrm>
+          <a:prstGeom xmlns:a="http://schemas.openxmlformats.org/drawingml/2006/main" prst="rect">
+            <a:avLst/>
+          </a:prstGeom>
+          <a:ln xmlns:a="http://schemas.openxmlformats.org/drawingml/2006/main">
+            <a:noFill/>
+          </a:ln>
+        </p:spPr>
+        <p:txBody>
+          <a:bodyPr xmlns:a="http://schemas.openxmlformats.org/drawingml/2006/main" lIns="0" tIns="0" rIns="0" bIns="0" anchor="t">
+            <a:normAutofit fontScale="93284"/>
+          </a:bodyPr>
+          <a:lstStyle xmlns:a="http://schemas.openxmlformats.org/drawingml/2006/main"/>
+          <a:p xmlns:a="http://schemas.openxmlformats.org/drawingml/2006/main">
+            <a:pPr algn="l">
+              <a:defRPr sz="938" b="1">
+                <a:solidFill>
+                  <a:srgbClr val="111827"/>
+                </a:solidFill>
+                <a:latin typeface="PingFang SC"/>
+                <a:ea typeface="PingFang SC"/>
+                <a:cs typeface="PingFang SC"/>
+              </a:defRPr>
+            </a:pPr>
+            <a:r>
+              <a:rPr sz="938" b="1">
+                <a:solidFill>
+                  <a:srgbClr val="111827"/>
+                </a:solidFill>
+                <a:latin typeface="PingFang SC"/>
+                <a:ea typeface="PingFang SC"/>
+                <a:cs typeface="PingFang SC"/>
+              </a:rPr>
+              <a:t>正式问题</a:t>
+            </a:r>
+          </a:p>
+        </p:txBody>
+      </p:sp>
+      <p:sp>
+        <p:nvSpPr>
+          <p:cNvPr id="22" name="">
+            <a:extLst xmlns:a="http://schemas.openxmlformats.org/drawingml/2006/main">
+              <a:ext uri="{FF2B5EF4-FFF2-40B4-BE49-F238E27FC236}">
+                <a16:creationId xmlns:a16="http://schemas.microsoft.com/office/drawing/2014/main" id="{ECF88119-91E8-4284-8B8E-12807BCF54B8}"/>
+              </a:ext>
+            </a:extLst>
+          </p:cNvPr>
+          <p:cNvSpPr>
+            <a:spLocks xmlns:a="http://schemas.openxmlformats.org/drawingml/2006/main" noGrp="1"/>
+          </p:cNvSpPr>
+          <p:nvPr/>
+        </p:nvSpPr>
+        <p:spPr>
+          <a:xfrm xmlns:a="http://schemas.openxmlformats.org/drawingml/2006/main">
+            <a:off x="914400" y="4133850"/>
+            <a:ext cx="6076950" cy="228600"/>
+          </a:xfrm>
+          <a:prstGeom xmlns:a="http://schemas.openxmlformats.org/drawingml/2006/main" prst="rect">
+            <a:avLst/>
+          </a:prstGeom>
+          <a:solidFill xmlns:a="http://schemas.openxmlformats.org/drawingml/2006/main">
+            <a:srgbClr val="F6F8FC"/>
+          </a:solidFill>
+          <a:ln xmlns:a="http://schemas.openxmlformats.org/drawingml/2006/main">
+            <a:noFill/>
+          </a:ln>
+        </p:spPr>
+      </p:sp>
+      <p:sp>
+        <p:nvSpPr>
+          <p:cNvPr id="23" name="">
+            <a:extLst xmlns:a="http://schemas.openxmlformats.org/drawingml/2006/main">
+              <a:ext uri="{FF2B5EF4-FFF2-40B4-BE49-F238E27FC236}">
+                <a16:creationId xmlns:a16="http://schemas.microsoft.com/office/drawing/2014/main" id="{9EE8CFDA-AD41-4445-BE5F-C40F220DBB69}"/>
+              </a:ext>
+            </a:extLst>
+          </p:cNvPr>
+          <p:cNvSpPr>
+            <a:spLocks xmlns:a="http://schemas.openxmlformats.org/drawingml/2006/main" noGrp="1"/>
+          </p:cNvSpPr>
+          <p:nvPr/>
+        </p:nvSpPr>
+        <p:spPr>
+          <a:xfrm xmlns:a="http://schemas.openxmlformats.org/drawingml/2006/main">
+            <a:off x="1047750" y="4171950"/>
+            <a:ext cx="552450" cy="133350"/>
+          </a:xfrm>
+          <a:prstGeom xmlns:a="http://schemas.openxmlformats.org/drawingml/2006/main" prst="rect">
+            <a:avLst/>
+          </a:prstGeom>
+          <a:ln xmlns:a="http://schemas.openxmlformats.org/drawingml/2006/main">
+            <a:noFill/>
+          </a:ln>
+        </p:spPr>
+        <p:txBody>
+          <a:bodyPr xmlns:a="http://schemas.openxmlformats.org/drawingml/2006/main" lIns="0" tIns="0" rIns="0" bIns="0" anchor="t">
+            <a:normAutofit fontScale="100000"/>
+          </a:bodyPr>
+          <a:lstStyle xmlns:a="http://schemas.openxmlformats.org/drawingml/2006/main"/>
+          <a:p xmlns:a="http://schemas.openxmlformats.org/drawingml/2006/main">
+            <a:pPr algn="l">
+              <a:defRPr sz="863" b="1">
+                <a:solidFill>
+                  <a:srgbClr val="145CFF"/>
+                </a:solidFill>
+                <a:latin typeface="Menlo"/>
+                <a:ea typeface="Menlo"/>
+                <a:cs typeface="Menlo"/>
+              </a:defRPr>
+            </a:pPr>
+            <a:r>
+              <a:rPr sz="863" b="1">
+                <a:solidFill>
+                  <a:srgbClr val="145CFF"/>
+                </a:solidFill>
+                <a:latin typeface="Menlo"/>
+                <a:ea typeface="Menlo"/>
+                <a:cs typeface="Menlo"/>
+              </a:rPr>
+              <a:t>RF003</a:t>
+            </a:r>
+          </a:p>
+        </p:txBody>
+      </p:sp>
+      <p:sp>
+        <p:nvSpPr>
+          <p:cNvPr id="24" name="">
+            <a:extLst xmlns:a="http://schemas.openxmlformats.org/drawingml/2006/main">
+              <a:ext uri="{FF2B5EF4-FFF2-40B4-BE49-F238E27FC236}">
+                <a16:creationId xmlns:a16="http://schemas.microsoft.com/office/drawing/2014/main" id="{8B461E8F-2BB3-477B-BA27-546290C5B620}"/>
+              </a:ext>
+            </a:extLst>
+          </p:cNvPr>
+          <p:cNvSpPr>
+            <a:spLocks xmlns:a="http://schemas.openxmlformats.org/drawingml/2006/main" noGrp="1"/>
+          </p:cNvSpPr>
+          <p:nvPr/>
+        </p:nvSpPr>
+        <p:spPr>
+          <a:xfrm xmlns:a="http://schemas.openxmlformats.org/drawingml/2006/main">
+            <a:off x="1752600" y="4171950"/>
+            <a:ext cx="2381250" cy="133350"/>
+          </a:xfrm>
+          <a:prstGeom xmlns:a="http://schemas.openxmlformats.org/drawingml/2006/main" prst="rect">
+            <a:avLst/>
+          </a:prstGeom>
+          <a:ln xmlns:a="http://schemas.openxmlformats.org/drawingml/2006/main">
+            <a:noFill/>
+          </a:ln>
+        </p:spPr>
+        <p:txBody>
+          <a:bodyPr xmlns:a="http://schemas.openxmlformats.org/drawingml/2006/main" lIns="0" tIns="0" rIns="0" bIns="0" anchor="t">
+            <a:normAutofit fontScale="93284"/>
+          </a:bodyPr>
+          <a:lstStyle xmlns:a="http://schemas.openxmlformats.org/drawingml/2006/main"/>
+          <a:p xmlns:a="http://schemas.openxmlformats.org/drawingml/2006/main">
+            <a:pPr algn="l">
+              <a:defRPr sz="938" b="0">
+                <a:solidFill>
+                  <a:srgbClr val="273140"/>
+                </a:solidFill>
+                <a:latin typeface="PingFang SC"/>
+                <a:ea typeface="PingFang SC"/>
+                <a:cs typeface="PingFang SC"/>
+              </a:defRPr>
+            </a:pPr>
+            <a:r>
+              <a:rPr sz="938" b="0">
+                <a:solidFill>
+                  <a:srgbClr val="273140"/>
+                </a:solidFill>
+                <a:latin typeface="PingFang SC"/>
+                <a:ea typeface="PingFang SC"/>
+                <a:cs typeface="PingFang SC"/>
+              </a:rPr>
+              <a:t>链路异常处理风险</a:t>
+            </a:r>
+          </a:p>
+        </p:txBody>
+      </p:sp>
+      <p:sp>
+        <p:nvSpPr>
+          <p:cNvPr id="25" name="">
+            <a:extLst xmlns:a="http://schemas.openxmlformats.org/drawingml/2006/main">
+              <a:ext uri="{FF2B5EF4-FFF2-40B4-BE49-F238E27FC236}">
+                <a16:creationId xmlns:a16="http://schemas.microsoft.com/office/drawing/2014/main" id="{E25E8AD6-3D7F-4952-B721-914C06EDFB47}"/>
+              </a:ext>
+            </a:extLst>
+          </p:cNvPr>
+          <p:cNvSpPr>
+            <a:spLocks xmlns:a="http://schemas.openxmlformats.org/drawingml/2006/main" noGrp="1"/>
+          </p:cNvSpPr>
+          <p:nvPr/>
+        </p:nvSpPr>
+        <p:spPr>
+          <a:xfrm xmlns:a="http://schemas.openxmlformats.org/drawingml/2006/main">
+            <a:off x="4362450" y="4171950"/>
+            <a:ext cx="2381250" cy="133350"/>
+          </a:xfrm>
+          <a:prstGeom xmlns:a="http://schemas.openxmlformats.org/drawingml/2006/main" prst="rect">
+            <a:avLst/>
+          </a:prstGeom>
+          <a:ln xmlns:a="http://schemas.openxmlformats.org/drawingml/2006/main">
+            <a:noFill/>
+          </a:ln>
+        </p:spPr>
+        <p:txBody>
+          <a:bodyPr xmlns:a="http://schemas.openxmlformats.org/drawingml/2006/main" lIns="0" tIns="0" rIns="0" bIns="0" anchor="t">
+            <a:normAutofit fontScale="93284"/>
+          </a:bodyPr>
+          <a:lstStyle xmlns:a="http://schemas.openxmlformats.org/drawingml/2006/main"/>
+          <a:p xmlns:a="http://schemas.openxmlformats.org/drawingml/2006/main">
+            <a:pPr algn="l">
+              <a:defRPr sz="938" b="1">
+                <a:solidFill>
+                  <a:srgbClr val="111827"/>
+                </a:solidFill>
+                <a:latin typeface="PingFang SC"/>
+                <a:ea typeface="PingFang SC"/>
+                <a:cs typeface="PingFang SC"/>
+              </a:defRPr>
+            </a:pPr>
+            <a:r>
+              <a:rPr sz="938" b="1">
+                <a:solidFill>
+                  <a:srgbClr val="111827"/>
+                </a:solidFill>
+                <a:latin typeface="PingFang SC"/>
+                <a:ea typeface="PingFang SC"/>
+                <a:cs typeface="PingFang SC"/>
+              </a:rPr>
+              <a:t>正式问题 + 后台追踪</a:t>
+            </a:r>
+          </a:p>
+        </p:txBody>
+      </p:sp>
+      <p:sp>
+        <p:nvSpPr>
+          <p:cNvPr id="26" name="">
+            <a:extLst xmlns:a="http://schemas.openxmlformats.org/drawingml/2006/main">
+              <a:ext uri="{FF2B5EF4-FFF2-40B4-BE49-F238E27FC236}">
+                <a16:creationId xmlns:a16="http://schemas.microsoft.com/office/drawing/2014/main" id="{30D2E242-F670-41EE-9AEE-F3B465866B16}"/>
+              </a:ext>
+            </a:extLst>
+          </p:cNvPr>
+          <p:cNvSpPr>
+            <a:spLocks xmlns:a="http://schemas.openxmlformats.org/drawingml/2006/main" noGrp="1"/>
+          </p:cNvSpPr>
+          <p:nvPr/>
+        </p:nvSpPr>
+        <p:spPr>
+          <a:xfrm xmlns:a="http://schemas.openxmlformats.org/drawingml/2006/main">
+            <a:off x="914400" y="4400550"/>
+            <a:ext cx="6076950" cy="228600"/>
+          </a:xfrm>
+          <a:prstGeom xmlns:a="http://schemas.openxmlformats.org/drawingml/2006/main" prst="rect">
+            <a:avLst/>
+          </a:prstGeom>
+          <a:solidFill xmlns:a="http://schemas.openxmlformats.org/drawingml/2006/main">
+            <a:srgbClr val="FFFFFF"/>
+          </a:solidFill>
+          <a:ln xmlns:a="http://schemas.openxmlformats.org/drawingml/2006/main">
+            <a:noFill/>
+          </a:ln>
+        </p:spPr>
+      </p:sp>
+      <p:sp>
+        <p:nvSpPr>
+          <p:cNvPr id="27" name="">
+            <a:extLst xmlns:a="http://schemas.openxmlformats.org/drawingml/2006/main">
+              <a:ext uri="{FF2B5EF4-FFF2-40B4-BE49-F238E27FC236}">
+                <a16:creationId xmlns:a16="http://schemas.microsoft.com/office/drawing/2014/main" id="{8F3BF7EC-9A49-41F4-8793-B0E835F3E4DC}"/>
+              </a:ext>
+            </a:extLst>
+          </p:cNvPr>
+          <p:cNvSpPr>
+            <a:spLocks xmlns:a="http://schemas.openxmlformats.org/drawingml/2006/main" noGrp="1"/>
+          </p:cNvSpPr>
+          <p:nvPr/>
+        </p:nvSpPr>
+        <p:spPr>
+          <a:xfrm xmlns:a="http://schemas.openxmlformats.org/drawingml/2006/main">
+            <a:off x="1047750" y="4438650"/>
+            <a:ext cx="552450" cy="133350"/>
+          </a:xfrm>
+          <a:prstGeom xmlns:a="http://schemas.openxmlformats.org/drawingml/2006/main" prst="rect">
+            <a:avLst/>
+          </a:prstGeom>
+          <a:ln xmlns:a="http://schemas.openxmlformats.org/drawingml/2006/main">
+            <a:noFill/>
+          </a:ln>
+        </p:spPr>
+        <p:txBody>
+          <a:bodyPr xmlns:a="http://schemas.openxmlformats.org/drawingml/2006/main" lIns="0" tIns="0" rIns="0" bIns="0" anchor="t">
+            <a:normAutofit fontScale="100000"/>
+          </a:bodyPr>
+          <a:lstStyle xmlns:a="http://schemas.openxmlformats.org/drawingml/2006/main"/>
+          <a:p xmlns:a="http://schemas.openxmlformats.org/drawingml/2006/main">
+            <a:pPr algn="l">
+              <a:defRPr sz="863" b="1">
+                <a:solidFill>
+                  <a:srgbClr val="145CFF"/>
+                </a:solidFill>
+                <a:latin typeface="Menlo"/>
+                <a:ea typeface="Menlo"/>
+                <a:cs typeface="Menlo"/>
+              </a:defRPr>
+            </a:pPr>
+            <a:r>
+              <a:rPr sz="863" b="1">
+                <a:solidFill>
+                  <a:srgbClr val="145CFF"/>
+                </a:solidFill>
+                <a:latin typeface="Menlo"/>
+                <a:ea typeface="Menlo"/>
+                <a:cs typeface="Menlo"/>
+              </a:rPr>
+              <a:t>RF004</a:t>
+            </a:r>
+          </a:p>
+        </p:txBody>
+      </p:sp>
+      <p:sp>
+        <p:nvSpPr>
+          <p:cNvPr id="28" name="">
+            <a:extLst xmlns:a="http://schemas.openxmlformats.org/drawingml/2006/main">
+              <a:ext uri="{FF2B5EF4-FFF2-40B4-BE49-F238E27FC236}">
+                <a16:creationId xmlns:a16="http://schemas.microsoft.com/office/drawing/2014/main" id="{7FCAFDC9-92E9-409B-9879-88F6FBA5E7AD}"/>
+              </a:ext>
+            </a:extLst>
+          </p:cNvPr>
+          <p:cNvSpPr>
+            <a:spLocks xmlns:a="http://schemas.openxmlformats.org/drawingml/2006/main" noGrp="1"/>
+          </p:cNvSpPr>
+          <p:nvPr/>
+        </p:nvSpPr>
+        <p:spPr>
+          <a:xfrm xmlns:a="http://schemas.openxmlformats.org/drawingml/2006/main">
+            <a:off x="1752600" y="4438650"/>
+            <a:ext cx="2381250" cy="133350"/>
+          </a:xfrm>
+          <a:prstGeom xmlns:a="http://schemas.openxmlformats.org/drawingml/2006/main" prst="rect">
+            <a:avLst/>
+          </a:prstGeom>
+          <a:ln xmlns:a="http://schemas.openxmlformats.org/drawingml/2006/main">
+            <a:noFill/>
+          </a:ln>
+        </p:spPr>
+        <p:txBody>
+          <a:bodyPr xmlns:a="http://schemas.openxmlformats.org/drawingml/2006/main" lIns="0" tIns="0" rIns="0" bIns="0" anchor="t">
+            <a:normAutofit fontScale="93284"/>
+          </a:bodyPr>
+          <a:lstStyle xmlns:a="http://schemas.openxmlformats.org/drawingml/2006/main"/>
+          <a:p xmlns:a="http://schemas.openxmlformats.org/drawingml/2006/main">
+            <a:pPr algn="l">
+              <a:defRPr sz="938" b="0">
+                <a:solidFill>
+                  <a:srgbClr val="273140"/>
+                </a:solidFill>
+                <a:latin typeface="PingFang SC"/>
+                <a:ea typeface="PingFang SC"/>
+                <a:cs typeface="PingFang SC"/>
+              </a:defRPr>
+            </a:pPr>
+            <a:r>
+              <a:rPr sz="938" b="0">
+                <a:solidFill>
+                  <a:srgbClr val="273140"/>
+                </a:solidFill>
+                <a:latin typeface="PingFang SC"/>
+                <a:ea typeface="PingFang SC"/>
+                <a:cs typeface="PingFang SC"/>
+              </a:rPr>
+              <a:t>长度和异常上报风险</a:t>
+            </a:r>
+          </a:p>
+        </p:txBody>
+      </p:sp>
+      <p:sp>
+        <p:nvSpPr>
+          <p:cNvPr id="29" name="">
+            <a:extLst xmlns:a="http://schemas.openxmlformats.org/drawingml/2006/main">
+              <a:ext uri="{FF2B5EF4-FFF2-40B4-BE49-F238E27FC236}">
+                <a16:creationId xmlns:a16="http://schemas.microsoft.com/office/drawing/2014/main" id="{BEA54DB5-84C1-4831-B4A2-E1FD6277F814}"/>
+              </a:ext>
+            </a:extLst>
+          </p:cNvPr>
+          <p:cNvSpPr>
+            <a:spLocks xmlns:a="http://schemas.openxmlformats.org/drawingml/2006/main" noGrp="1"/>
+          </p:cNvSpPr>
+          <p:nvPr/>
+        </p:nvSpPr>
+        <p:spPr>
+          <a:xfrm xmlns:a="http://schemas.openxmlformats.org/drawingml/2006/main">
+            <a:off x="4362450" y="4438650"/>
+            <a:ext cx="2381250" cy="133350"/>
+          </a:xfrm>
+          <a:prstGeom xmlns:a="http://schemas.openxmlformats.org/drawingml/2006/main" prst="rect">
+            <a:avLst/>
+          </a:prstGeom>
+          <a:ln xmlns:a="http://schemas.openxmlformats.org/drawingml/2006/main">
+            <a:noFill/>
+          </a:ln>
+        </p:spPr>
+        <p:txBody>
+          <a:bodyPr xmlns:a="http://schemas.openxmlformats.org/drawingml/2006/main" lIns="0" tIns="0" rIns="0" bIns="0" anchor="t">
+            <a:normAutofit fontScale="93284"/>
+          </a:bodyPr>
+          <a:lstStyle xmlns:a="http://schemas.openxmlformats.org/drawingml/2006/main"/>
+          <a:p xmlns:a="http://schemas.openxmlformats.org/drawingml/2006/main">
+            <a:pPr algn="l">
+              <a:defRPr sz="938" b="1">
+                <a:solidFill>
+                  <a:srgbClr val="111827"/>
+                </a:solidFill>
+                <a:latin typeface="PingFang SC"/>
+                <a:ea typeface="PingFang SC"/>
+                <a:cs typeface="PingFang SC"/>
+              </a:defRPr>
+            </a:pPr>
+            <a:r>
+              <a:rPr sz="938" b="1">
+                <a:solidFill>
+                  <a:srgbClr val="111827"/>
+                </a:solidFill>
+                <a:latin typeface="PingFang SC"/>
+                <a:ea typeface="PingFang SC"/>
+                <a:cs typeface="PingFang SC"/>
+              </a:rPr>
+              <a:t>2 个正式问题 + 待确认</a:t>
+            </a:r>
+          </a:p>
+        </p:txBody>
+      </p:sp>
+      <p:sp>
+        <p:nvSpPr>
+          <p:cNvPr id="30" name="">
+            <a:extLst xmlns:a="http://schemas.openxmlformats.org/drawingml/2006/main">
+              <a:ext uri="{FF2B5EF4-FFF2-40B4-BE49-F238E27FC236}">
+                <a16:creationId xmlns:a16="http://schemas.microsoft.com/office/drawing/2014/main" id="{146D24DE-59C9-4721-9F79-EBFABA9345FD}"/>
+              </a:ext>
+            </a:extLst>
+          </p:cNvPr>
+          <p:cNvSpPr>
+            <a:spLocks xmlns:a="http://schemas.openxmlformats.org/drawingml/2006/main" noGrp="1"/>
+          </p:cNvSpPr>
+          <p:nvPr/>
+        </p:nvSpPr>
+        <p:spPr>
+          <a:xfrm xmlns:a="http://schemas.openxmlformats.org/drawingml/2006/main">
+            <a:off x="914400" y="4667250"/>
+            <a:ext cx="6076950" cy="228600"/>
+          </a:xfrm>
+          <a:prstGeom xmlns:a="http://schemas.openxmlformats.org/drawingml/2006/main" prst="rect">
+            <a:avLst/>
+          </a:prstGeom>
+          <a:solidFill xmlns:a="http://schemas.openxmlformats.org/drawingml/2006/main">
+            <a:srgbClr val="F6F8FC"/>
+          </a:solidFill>
+          <a:ln xmlns:a="http://schemas.openxmlformats.org/drawingml/2006/main">
+            <a:noFill/>
+          </a:ln>
+        </p:spPr>
+      </p:sp>
+      <p:sp>
+        <p:nvSpPr>
+          <p:cNvPr id="31" name="">
+            <a:extLst xmlns:a="http://schemas.openxmlformats.org/drawingml/2006/main">
+              <a:ext uri="{FF2B5EF4-FFF2-40B4-BE49-F238E27FC236}">
+                <a16:creationId xmlns:a16="http://schemas.microsoft.com/office/drawing/2014/main" id="{FE371948-D41C-4BFC-A8F5-E5CB6EB1A590}"/>
+              </a:ext>
+            </a:extLst>
+          </p:cNvPr>
+          <p:cNvSpPr>
+            <a:spLocks xmlns:a="http://schemas.openxmlformats.org/drawingml/2006/main" noGrp="1"/>
+          </p:cNvSpPr>
+          <p:nvPr/>
+        </p:nvSpPr>
+        <p:spPr>
+          <a:xfrm xmlns:a="http://schemas.openxmlformats.org/drawingml/2006/main">
+            <a:off x="1047750" y="4705350"/>
+            <a:ext cx="552450" cy="133350"/>
+          </a:xfrm>
+          <a:prstGeom xmlns:a="http://schemas.openxmlformats.org/drawingml/2006/main" prst="rect">
+            <a:avLst/>
+          </a:prstGeom>
+          <a:ln xmlns:a="http://schemas.openxmlformats.org/drawingml/2006/main">
+            <a:noFill/>
+          </a:ln>
+        </p:spPr>
+        <p:txBody>
+          <a:bodyPr xmlns:a="http://schemas.openxmlformats.org/drawingml/2006/main" lIns="0" tIns="0" rIns="0" bIns="0" anchor="t">
+            <a:normAutofit fontScale="100000"/>
+          </a:bodyPr>
+          <a:lstStyle xmlns:a="http://schemas.openxmlformats.org/drawingml/2006/main"/>
+          <a:p xmlns:a="http://schemas.openxmlformats.org/drawingml/2006/main">
+            <a:pPr algn="l">
+              <a:defRPr sz="863" b="1">
+                <a:solidFill>
+                  <a:srgbClr val="145CFF"/>
+                </a:solidFill>
+                <a:latin typeface="Menlo"/>
+                <a:ea typeface="Menlo"/>
+                <a:cs typeface="Menlo"/>
+              </a:defRPr>
+            </a:pPr>
+            <a:r>
+              <a:rPr sz="863" b="1">
+                <a:solidFill>
+                  <a:srgbClr val="145CFF"/>
+                </a:solidFill>
+                <a:latin typeface="Menlo"/>
+                <a:ea typeface="Menlo"/>
+                <a:cs typeface="Menlo"/>
+              </a:rPr>
+              <a:t>NEG001</a:t>
+            </a:r>
+          </a:p>
+        </p:txBody>
+      </p:sp>
+      <p:sp>
+        <p:nvSpPr>
+          <p:cNvPr id="32" name="">
+            <a:extLst xmlns:a="http://schemas.openxmlformats.org/drawingml/2006/main">
+              <a:ext uri="{FF2B5EF4-FFF2-40B4-BE49-F238E27FC236}">
+                <a16:creationId xmlns:a16="http://schemas.microsoft.com/office/drawing/2014/main" id="{2B1399B2-D510-4707-8512-207569715549}"/>
+              </a:ext>
+            </a:extLst>
+          </p:cNvPr>
+          <p:cNvSpPr>
+            <a:spLocks xmlns:a="http://schemas.openxmlformats.org/drawingml/2006/main" noGrp="1"/>
+          </p:cNvSpPr>
+          <p:nvPr/>
+        </p:nvSpPr>
+        <p:spPr>
+          <a:xfrm xmlns:a="http://schemas.openxmlformats.org/drawingml/2006/main">
+            <a:off x="1752600" y="4705350"/>
+            <a:ext cx="2381250" cy="133350"/>
+          </a:xfrm>
+          <a:prstGeom xmlns:a="http://schemas.openxmlformats.org/drawingml/2006/main" prst="rect">
+            <a:avLst/>
+          </a:prstGeom>
+          <a:ln xmlns:a="http://schemas.openxmlformats.org/drawingml/2006/main">
+            <a:noFill/>
+          </a:ln>
+        </p:spPr>
+        <p:txBody>
+          <a:bodyPr xmlns:a="http://schemas.openxmlformats.org/drawingml/2006/main" lIns="0" tIns="0" rIns="0" bIns="0" anchor="t">
+            <a:normAutofit fontScale="93284"/>
+          </a:bodyPr>
+          <a:lstStyle xmlns:a="http://schemas.openxmlformats.org/drawingml/2006/main"/>
+          <a:p xmlns:a="http://schemas.openxmlformats.org/drawingml/2006/main">
+            <a:pPr algn="l">
+              <a:defRPr sz="938" b="0">
+                <a:solidFill>
+                  <a:srgbClr val="273140"/>
+                </a:solidFill>
+                <a:latin typeface="PingFang SC"/>
+                <a:ea typeface="PingFang SC"/>
+                <a:cs typeface="PingFang SC"/>
+              </a:defRPr>
+            </a:pPr>
+            <a:r>
+              <a:rPr sz="938" b="0">
+                <a:solidFill>
+                  <a:srgbClr val="273140"/>
+                </a:solidFill>
+                <a:latin typeface="PingFang SC"/>
+                <a:ea typeface="PingFang SC"/>
+                <a:cs typeface="PingFang SC"/>
+              </a:rPr>
+              <a:t>MFGID 正常扩展</a:t>
+            </a:r>
+          </a:p>
+        </p:txBody>
+      </p:sp>
+      <p:sp>
+        <p:nvSpPr>
+          <p:cNvPr id="33" name="">
+            <a:extLst xmlns:a="http://schemas.openxmlformats.org/drawingml/2006/main">
+              <a:ext uri="{FF2B5EF4-FFF2-40B4-BE49-F238E27FC236}">
+                <a16:creationId xmlns:a16="http://schemas.microsoft.com/office/drawing/2014/main" id="{89EB6A7A-9E3E-49A8-933E-CE736F7F1659}"/>
+              </a:ext>
+            </a:extLst>
+          </p:cNvPr>
+          <p:cNvSpPr>
+            <a:spLocks xmlns:a="http://schemas.openxmlformats.org/drawingml/2006/main" noGrp="1"/>
+          </p:cNvSpPr>
+          <p:nvPr/>
+        </p:nvSpPr>
+        <p:spPr>
+          <a:xfrm xmlns:a="http://schemas.openxmlformats.org/drawingml/2006/main">
+            <a:off x="4362450" y="4705350"/>
+            <a:ext cx="2381250" cy="133350"/>
+          </a:xfrm>
+          <a:prstGeom xmlns:a="http://schemas.openxmlformats.org/drawingml/2006/main" prst="rect">
+            <a:avLst/>
+          </a:prstGeom>
+          <a:ln xmlns:a="http://schemas.openxmlformats.org/drawingml/2006/main">
+            <a:noFill/>
+          </a:ln>
+        </p:spPr>
+        <p:txBody>
+          <a:bodyPr xmlns:a="http://schemas.openxmlformats.org/drawingml/2006/main" lIns="0" tIns="0" rIns="0" bIns="0" anchor="t">
+            <a:normAutofit fontScale="93284"/>
+          </a:bodyPr>
+          <a:lstStyle xmlns:a="http://schemas.openxmlformats.org/drawingml/2006/main"/>
+          <a:p xmlns:a="http://schemas.openxmlformats.org/drawingml/2006/main">
+            <a:pPr algn="l">
+              <a:defRPr sz="938" b="1">
+                <a:solidFill>
+                  <a:srgbClr val="12B886"/>
+                </a:solidFill>
+                <a:latin typeface="PingFang SC"/>
+                <a:ea typeface="PingFang SC"/>
+                <a:cs typeface="PingFang SC"/>
+              </a:defRPr>
+            </a:pPr>
+            <a:r>
+              <a:rPr sz="938" b="1">
+                <a:solidFill>
+                  <a:srgbClr val="12B886"/>
+                </a:solidFill>
+                <a:latin typeface="PingFang SC"/>
+                <a:ea typeface="PingFang SC"/>
+                <a:cs typeface="PingFang SC"/>
+              </a:rPr>
+              <a:t>无用户可见正式评论</a:t>
+            </a:r>
+          </a:p>
+        </p:txBody>
+      </p:sp>
+      <p:sp>
+        <p:nvSpPr>
+          <p:cNvPr id="34" name="">
+            <a:extLst xmlns:a="http://schemas.openxmlformats.org/drawingml/2006/main">
+              <a:ext uri="{FF2B5EF4-FFF2-40B4-BE49-F238E27FC236}">
+                <a16:creationId xmlns:a16="http://schemas.microsoft.com/office/drawing/2014/main" id="{DF5BA0AF-D7AF-4CF4-9BE7-0D5F5B30CA2C}"/>
+              </a:ext>
+            </a:extLst>
+          </p:cNvPr>
+          <p:cNvSpPr>
+            <a:spLocks xmlns:a="http://schemas.openxmlformats.org/drawingml/2006/main" noGrp="1"/>
+          </p:cNvSpPr>
+          <p:nvPr/>
+        </p:nvSpPr>
+        <p:spPr>
+          <a:xfrm xmlns:a="http://schemas.openxmlformats.org/drawingml/2006/main">
+            <a:off x="914400" y="4933950"/>
+            <a:ext cx="6076950" cy="228600"/>
+          </a:xfrm>
+          <a:prstGeom xmlns:a="http://schemas.openxmlformats.org/drawingml/2006/main" prst="rect">
+            <a:avLst/>
+          </a:prstGeom>
+          <a:solidFill xmlns:a="http://schemas.openxmlformats.org/drawingml/2006/main">
+            <a:srgbClr val="FFFFFF"/>
+          </a:solidFill>
+          <a:ln xmlns:a="http://schemas.openxmlformats.org/drawingml/2006/main">
+            <a:noFill/>
+          </a:ln>
+        </p:spPr>
+      </p:sp>
+      <p:sp>
+        <p:nvSpPr>
+          <p:cNvPr id="35" name="">
+            <a:extLst xmlns:a="http://schemas.openxmlformats.org/drawingml/2006/main">
+              <a:ext uri="{FF2B5EF4-FFF2-40B4-BE49-F238E27FC236}">
+                <a16:creationId xmlns:a16="http://schemas.microsoft.com/office/drawing/2014/main" id="{1A57B459-E921-4A97-983A-BFEEE9664C9F}"/>
+              </a:ext>
+            </a:extLst>
+          </p:cNvPr>
+          <p:cNvSpPr>
+            <a:spLocks xmlns:a="http://schemas.openxmlformats.org/drawingml/2006/main" noGrp="1"/>
+          </p:cNvSpPr>
+          <p:nvPr/>
+        </p:nvSpPr>
+        <p:spPr>
+          <a:xfrm xmlns:a="http://schemas.openxmlformats.org/drawingml/2006/main">
+            <a:off x="1047750" y="4972050"/>
+            <a:ext cx="552450" cy="133350"/>
+          </a:xfrm>
+          <a:prstGeom xmlns:a="http://schemas.openxmlformats.org/drawingml/2006/main" prst="rect">
+            <a:avLst/>
+          </a:prstGeom>
+          <a:ln xmlns:a="http://schemas.openxmlformats.org/drawingml/2006/main">
+            <a:noFill/>
+          </a:ln>
+        </p:spPr>
+        <p:txBody>
+          <a:bodyPr xmlns:a="http://schemas.openxmlformats.org/drawingml/2006/main" lIns="0" tIns="0" rIns="0" bIns="0" anchor="t">
+            <a:normAutofit fontScale="100000"/>
+          </a:bodyPr>
+          <a:lstStyle xmlns:a="http://schemas.openxmlformats.org/drawingml/2006/main"/>
+          <a:p xmlns:a="http://schemas.openxmlformats.org/drawingml/2006/main">
+            <a:pPr algn="l">
+              <a:defRPr sz="863" b="1">
+                <a:solidFill>
+                  <a:srgbClr val="145CFF"/>
+                </a:solidFill>
+                <a:latin typeface="Menlo"/>
+                <a:ea typeface="Menlo"/>
+                <a:cs typeface="Menlo"/>
+              </a:defRPr>
+            </a:pPr>
+            <a:r>
+              <a:rPr sz="863" b="1">
+                <a:solidFill>
+                  <a:srgbClr val="145CFF"/>
+                </a:solidFill>
+                <a:latin typeface="Menlo"/>
+                <a:ea typeface="Menlo"/>
+                <a:cs typeface="Menlo"/>
+              </a:rPr>
+              <a:t>NEG002</a:t>
+            </a:r>
+          </a:p>
+        </p:txBody>
+      </p:sp>
+      <p:sp>
+        <p:nvSpPr>
+          <p:cNvPr id="36" name="">
+            <a:extLst xmlns:a="http://schemas.openxmlformats.org/drawingml/2006/main">
+              <a:ext uri="{FF2B5EF4-FFF2-40B4-BE49-F238E27FC236}">
+                <a16:creationId xmlns:a16="http://schemas.microsoft.com/office/drawing/2014/main" id="{82B1F0CF-E484-420C-9B4C-3738557B9294}"/>
+              </a:ext>
+            </a:extLst>
+          </p:cNvPr>
+          <p:cNvSpPr>
+            <a:spLocks xmlns:a="http://schemas.openxmlformats.org/drawingml/2006/main" noGrp="1"/>
+          </p:cNvSpPr>
+          <p:nvPr/>
+        </p:nvSpPr>
+        <p:spPr>
+          <a:xfrm xmlns:a="http://schemas.openxmlformats.org/drawingml/2006/main">
+            <a:off x="1752600" y="4972050"/>
+            <a:ext cx="2381250" cy="133350"/>
+          </a:xfrm>
+          <a:prstGeom xmlns:a="http://schemas.openxmlformats.org/drawingml/2006/main" prst="rect">
+            <a:avLst/>
+          </a:prstGeom>
+          <a:ln xmlns:a="http://schemas.openxmlformats.org/drawingml/2006/main">
+            <a:noFill/>
+          </a:ln>
+        </p:spPr>
+        <p:txBody>
+          <a:bodyPr xmlns:a="http://schemas.openxmlformats.org/drawingml/2006/main" lIns="0" tIns="0" rIns="0" bIns="0" anchor="t">
+            <a:normAutofit fontScale="93284"/>
+          </a:bodyPr>
+          <a:lstStyle xmlns:a="http://schemas.openxmlformats.org/drawingml/2006/main"/>
+          <a:p xmlns:a="http://schemas.openxmlformats.org/drawingml/2006/main">
+            <a:pPr algn="l">
+              <a:defRPr sz="938" b="0">
+                <a:solidFill>
+                  <a:srgbClr val="273140"/>
+                </a:solidFill>
+                <a:latin typeface="PingFang SC"/>
+                <a:ea typeface="PingFang SC"/>
+                <a:cs typeface="PingFang SC"/>
+              </a:defRPr>
+            </a:pPr>
+            <a:r>
+              <a:rPr sz="938" b="0">
+                <a:solidFill>
+                  <a:srgbClr val="273140"/>
+                </a:solidFill>
+                <a:latin typeface="PingFang SC"/>
+                <a:ea typeface="PingFang SC"/>
+                <a:cs typeface="PingFang SC"/>
+              </a:rPr>
+              <a:t>字符串清理</a:t>
+            </a:r>
+          </a:p>
+        </p:txBody>
+      </p:sp>
+      <p:sp>
+        <p:nvSpPr>
+          <p:cNvPr id="37" name="">
+            <a:extLst xmlns:a="http://schemas.openxmlformats.org/drawingml/2006/main">
+              <a:ext uri="{FF2B5EF4-FFF2-40B4-BE49-F238E27FC236}">
+                <a16:creationId xmlns:a16="http://schemas.microsoft.com/office/drawing/2014/main" id="{D1DD9467-5665-45DD-A3B8-4E4A108D288C}"/>
+              </a:ext>
+            </a:extLst>
+          </p:cNvPr>
+          <p:cNvSpPr>
+            <a:spLocks xmlns:a="http://schemas.openxmlformats.org/drawingml/2006/main" noGrp="1"/>
+          </p:cNvSpPr>
+          <p:nvPr/>
+        </p:nvSpPr>
+        <p:spPr>
+          <a:xfrm xmlns:a="http://schemas.openxmlformats.org/drawingml/2006/main">
+            <a:off x="4362450" y="4972050"/>
+            <a:ext cx="2381250" cy="133350"/>
+          </a:xfrm>
+          <a:prstGeom xmlns:a="http://schemas.openxmlformats.org/drawingml/2006/main" prst="rect">
+            <a:avLst/>
+          </a:prstGeom>
+          <a:ln xmlns:a="http://schemas.openxmlformats.org/drawingml/2006/main">
+            <a:noFill/>
+          </a:ln>
+        </p:spPr>
+        <p:txBody>
+          <a:bodyPr xmlns:a="http://schemas.openxmlformats.org/drawingml/2006/main" lIns="0" tIns="0" rIns="0" bIns="0" anchor="t">
+            <a:normAutofit fontScale="93284"/>
+          </a:bodyPr>
+          <a:lstStyle xmlns:a="http://schemas.openxmlformats.org/drawingml/2006/main"/>
+          <a:p xmlns:a="http://schemas.openxmlformats.org/drawingml/2006/main">
+            <a:pPr algn="l">
+              <a:defRPr sz="938" b="1">
+                <a:solidFill>
+                  <a:srgbClr val="12B886"/>
+                </a:solidFill>
+                <a:latin typeface="PingFang SC"/>
+                <a:ea typeface="PingFang SC"/>
+                <a:cs typeface="PingFang SC"/>
+              </a:defRPr>
+            </a:pPr>
+            <a:r>
+              <a:rPr sz="938" b="1">
+                <a:solidFill>
+                  <a:srgbClr val="12B886"/>
+                </a:solidFill>
+                <a:latin typeface="PingFang SC"/>
+                <a:ea typeface="PingFang SC"/>
+                <a:cs typeface="PingFang SC"/>
+              </a:rPr>
+              <a:t>无用户可见正式评论</a:t>
+            </a:r>
+          </a:p>
+        </p:txBody>
+      </p:sp>
+      <p:sp>
+        <p:nvSpPr>
+          <p:cNvPr id="38" name="">
+            <a:extLst xmlns:a="http://schemas.openxmlformats.org/drawingml/2006/main">
+              <a:ext uri="{FF2B5EF4-FFF2-40B4-BE49-F238E27FC236}">
+                <a16:creationId xmlns:a16="http://schemas.microsoft.com/office/drawing/2014/main" id="{F1AF5E0A-E5F0-4B47-B703-79AF15CF4FBD}"/>
+              </a:ext>
+            </a:extLst>
+          </p:cNvPr>
+          <p:cNvSpPr>
+            <a:spLocks xmlns:a="http://schemas.openxmlformats.org/drawingml/2006/main" noGrp="1"/>
+          </p:cNvSpPr>
+          <p:nvPr/>
+        </p:nvSpPr>
+        <p:spPr>
+          <a:xfrm xmlns:a="http://schemas.openxmlformats.org/drawingml/2006/main">
+            <a:off x="7658100" y="1962150"/>
+            <a:ext cx="3124200" cy="2552700"/>
+          </a:xfrm>
+          <a:prstGeom xmlns:a="http://schemas.openxmlformats.org/drawingml/2006/main" prst="rect">
+            <a:avLst/>
+          </a:prstGeom>
+          <a:solidFill xmlns:a="http://schemas.openxmlformats.org/drawingml/2006/main">
+            <a:srgbClr val="F8FAFE"/>
+          </a:solidFill>
+          <a:ln xmlns:a="http://schemas.openxmlformats.org/drawingml/2006/main" w="9525">
+            <a:solidFill>
+              <a:srgbClr val="CBD5E1"/>
+            </a:solidFill>
+          </a:ln>
+        </p:spPr>
+      </p:sp>
+      <p:sp>
+        <p:nvSpPr>
+          <p:cNvPr id="39" name="">
+            <a:extLst xmlns:a="http://schemas.openxmlformats.org/drawingml/2006/main">
+              <a:ext uri="{FF2B5EF4-FFF2-40B4-BE49-F238E27FC236}">
+                <a16:creationId xmlns:a16="http://schemas.microsoft.com/office/drawing/2014/main" id="{43F4725B-AB66-49D5-8489-46AE802B8049}"/>
+              </a:ext>
+            </a:extLst>
+          </p:cNvPr>
+          <p:cNvSpPr>
+            <a:spLocks xmlns:a="http://schemas.openxmlformats.org/drawingml/2006/main" noGrp="1"/>
+          </p:cNvSpPr>
+          <p:nvPr/>
+        </p:nvSpPr>
+        <p:spPr>
+          <a:xfrm xmlns:a="http://schemas.openxmlformats.org/drawingml/2006/main">
+            <a:off x="7905750" y="2209800"/>
+            <a:ext cx="2628900" cy="285750"/>
+          </a:xfrm>
+          <a:prstGeom xmlns:a="http://schemas.openxmlformats.org/drawingml/2006/main" prst="rect">
+            <a:avLst/>
+          </a:prstGeom>
+          <a:ln xmlns:a="http://schemas.openxmlformats.org/drawingml/2006/main">
+            <a:noFill/>
+          </a:ln>
+        </p:spPr>
+        <p:txBody>
+          <a:bodyPr xmlns:a="http://schemas.openxmlformats.org/drawingml/2006/main" lIns="0" tIns="0" rIns="0" bIns="0" anchor="t">
+            <a:normAutofit fontScale="100000"/>
+          </a:bodyPr>
+          <a:lstStyle xmlns:a="http://schemas.openxmlformats.org/drawingml/2006/main"/>
+          <a:p xmlns:a="http://schemas.openxmlformats.org/drawingml/2006/main">
+            <a:pPr algn="ctr">
+              <a:defRPr sz="1650" b="1">
+                <a:solidFill>
+                  <a:srgbClr val="111827"/>
+                </a:solidFill>
+                <a:latin typeface="PingFang SC"/>
+                <a:ea typeface="PingFang SC"/>
+                <a:cs typeface="PingFang SC"/>
+              </a:defRPr>
+            </a:pPr>
+            <a:r>
+              <a:rPr sz="1650" b="1">
+                <a:solidFill>
+                  <a:srgbClr val="111827"/>
+                </a:solidFill>
+                <a:latin typeface="PingFang SC"/>
+                <a:ea typeface="PingFang SC"/>
+                <a:cs typeface="PingFang SC"/>
+              </a:rPr>
+              <a:t>截图位 2</a:t>
+            </a:r>
+          </a:p>
+        </p:txBody>
+      </p:sp>
+      <p:sp>
+        <p:nvSpPr>
+          <p:cNvPr id="40" name="">
+            <a:extLst xmlns:a="http://schemas.openxmlformats.org/drawingml/2006/main">
+              <a:ext uri="{FF2B5EF4-FFF2-40B4-BE49-F238E27FC236}">
+                <a16:creationId xmlns:a16="http://schemas.microsoft.com/office/drawing/2014/main" id="{8A68B9E6-9B7A-4DA8-8E3A-BC01B3BBDF12}"/>
+              </a:ext>
+            </a:extLst>
+          </p:cNvPr>
+          <p:cNvSpPr>
+            <a:spLocks xmlns:a="http://schemas.openxmlformats.org/drawingml/2006/main" noGrp="1"/>
+          </p:cNvSpPr>
+          <p:nvPr/>
+        </p:nvSpPr>
+        <p:spPr>
+          <a:xfrm xmlns:a="http://schemas.openxmlformats.org/drawingml/2006/main">
+            <a:off x="7981950" y="3162300"/>
+            <a:ext cx="2476500" cy="514350"/>
+          </a:xfrm>
+          <a:prstGeom xmlns:a="http://schemas.openxmlformats.org/drawingml/2006/main" prst="rect">
+            <a:avLst/>
+          </a:prstGeom>
+          <a:ln xmlns:a="http://schemas.openxmlformats.org/drawingml/2006/main">
+            <a:noFill/>
+          </a:ln>
+        </p:spPr>
+        <p:txBody>
+          <a:bodyPr xmlns:a="http://schemas.openxmlformats.org/drawingml/2006/main" lIns="0" tIns="0" rIns="0" bIns="0" anchor="ctr">
+            <a:normAutofit fontScale="100000"/>
+          </a:bodyPr>
+          <a:lstStyle xmlns:a="http://schemas.openxmlformats.org/drawingml/2006/main"/>
+          <a:p xmlns:a="http://schemas.openxmlformats.org/drawingml/2006/main">
+            <a:pPr algn="ctr">
               <a:defRPr sz="1275" b="0">
                 <a:solidFill>
-                  <a:srgbClr val="273140"/>
+                  <a:srgbClr val="5B6472"/>
                 </a:solidFill>
                 <a:latin typeface="PingFang SC"/>
                 <a:ea typeface="PingFang SC"/>
@@ -4732,39 +7122,125 @@
             <a:r>
               <a:rPr sz="1275" b="0">
                 <a:solidFill>
-                  <a:srgbClr val="273140"/>
-                </a:solidFill>
-                <a:latin typeface="PingFang SC"/>
-                <a:ea typeface="PingFang SC"/>
-                <a:cs typeface="PingFang SC"/>
-              </a:rPr>
-              <a:t>用历史问题反向还原，观察模型能否识别风险。</a:t>
-            </a:r>
-          </a:p>
-        </p:txBody>
-      </p:sp>
-      <p:sp>
-        <p:nvSpPr>
-          <p:cNvPr id="10" name="">
-            <a:extLst xmlns:a="http://schemas.openxmlformats.org/drawingml/2006/main">
-              <a:ext uri="{FF2B5EF4-FFF2-40B4-BE49-F238E27FC236}">
-                <a16:creationId xmlns:a16="http://schemas.microsoft.com/office/drawing/2014/main" id="{FD2603CF-CA4C-433E-9630-D75554E15E12}"/>
-              </a:ext>
-            </a:extLst>
-          </p:cNvPr>
-          <p:cNvSpPr>
-            <a:spLocks xmlns:a="http://schemas.openxmlformats.org/drawingml/2006/main" noGrp="1"/>
-          </p:cNvSpPr>
-          <p:nvPr/>
-        </p:nvSpPr>
-        <p:spPr>
-          <a:xfrm xmlns:a="http://schemas.openxmlformats.org/drawingml/2006/main">
-            <a:off x="3429000" y="2038350"/>
-            <a:ext cx="2381250" cy="1428750"/>
+                  <a:srgbClr val="5B6472"/>
+                </a:solidFill>
+                <a:latin typeface="PingFang SC"/>
+                <a:ea typeface="PingFang SC"/>
+                <a:cs typeface="PingFang SC"/>
+              </a:rPr>
+              <a:t>正式问题 / 待确认项 / 后台处置记录截图</a:t>
+            </a:r>
+          </a:p>
+        </p:txBody>
+      </p:sp>
+      <p:sp>
+        <p:nvSpPr>
+          <p:cNvPr id="41" name="">
+            <a:extLst xmlns:a="http://schemas.openxmlformats.org/drawingml/2006/main">
+              <a:ext uri="{FF2B5EF4-FFF2-40B4-BE49-F238E27FC236}">
+                <a16:creationId xmlns:a16="http://schemas.microsoft.com/office/drawing/2014/main" id="{BAA9AB52-6DBC-4EE4-B377-CB1222ECC6FB}"/>
+              </a:ext>
+            </a:extLst>
+          </p:cNvPr>
+          <p:cNvSpPr>
+            <a:spLocks xmlns:a="http://schemas.openxmlformats.org/drawingml/2006/main" noGrp="1"/>
+          </p:cNvSpPr>
+          <p:nvPr/>
+        </p:nvSpPr>
+        <p:spPr>
+          <a:xfrm xmlns:a="http://schemas.openxmlformats.org/drawingml/2006/main">
+            <a:off x="8020050" y="4095750"/>
+            <a:ext cx="2400300" cy="9525"/>
+          </a:xfrm>
+          <a:prstGeom xmlns:a="http://schemas.openxmlformats.org/drawingml/2006/main" prst="rect">
+            <a:avLst/>
+          </a:prstGeom>
+          <a:solidFill xmlns:a="http://schemas.openxmlformats.org/drawingml/2006/main">
+            <a:srgbClr val="E6EBF2"/>
+          </a:solidFill>
+          <a:ln xmlns:a="http://schemas.openxmlformats.org/drawingml/2006/main">
+            <a:noFill/>
+          </a:ln>
+        </p:spPr>
+      </p:sp>
+      <p:sp>
+        <p:nvSpPr>
+          <p:cNvPr id="42" name="">
+            <a:extLst xmlns:a="http://schemas.openxmlformats.org/drawingml/2006/main">
+              <a:ext uri="{FF2B5EF4-FFF2-40B4-BE49-F238E27FC236}">
+                <a16:creationId xmlns:a16="http://schemas.microsoft.com/office/drawing/2014/main" id="{EAAD4D9A-2386-456F-9D9E-4CC7F65E4D33}"/>
+              </a:ext>
+            </a:extLst>
+          </p:cNvPr>
+          <p:cNvSpPr>
+            <a:spLocks xmlns:a="http://schemas.openxmlformats.org/drawingml/2006/main" noGrp="1"/>
+          </p:cNvSpPr>
+          <p:nvPr/>
+        </p:nvSpPr>
+        <p:spPr>
+          <a:xfrm xmlns:a="http://schemas.openxmlformats.org/drawingml/2006/main">
+            <a:off x="7981950" y="4191000"/>
+            <a:ext cx="2476500" cy="171450"/>
+          </a:xfrm>
+          <a:prstGeom xmlns:a="http://schemas.openxmlformats.org/drawingml/2006/main" prst="rect">
+            <a:avLst/>
+          </a:prstGeom>
+          <a:ln xmlns:a="http://schemas.openxmlformats.org/drawingml/2006/main">
+            <a:noFill/>
+          </a:ln>
+        </p:spPr>
+        <p:txBody>
+          <a:bodyPr xmlns:a="http://schemas.openxmlformats.org/drawingml/2006/main" lIns="0" tIns="0" rIns="0" bIns="0" anchor="t">
+            <a:normAutofit fontScale="100000"/>
+          </a:bodyPr>
+          <a:lstStyle xmlns:a="http://schemas.openxmlformats.org/drawingml/2006/main"/>
+          <a:p xmlns:a="http://schemas.openxmlformats.org/drawingml/2006/main">
+            <a:pPr algn="ctr">
+              <a:defRPr sz="900" b="0">
+                <a:solidFill>
+                  <a:srgbClr val="5B6472"/>
+                </a:solidFill>
+                <a:latin typeface="PingFang SC"/>
+                <a:ea typeface="PingFang SC"/>
+                <a:cs typeface="PingFang SC"/>
+              </a:defRPr>
+            </a:pPr>
+            <a:r>
+              <a:rPr sz="900" b="0">
+                <a:solidFill>
+                  <a:srgbClr val="5B6472"/>
+                </a:solidFill>
+                <a:latin typeface="PingFang SC"/>
+                <a:ea typeface="PingFang SC"/>
+                <a:cs typeface="PingFang SC"/>
+              </a:rPr>
+              <a:t>后续替换为实际截图</a:t>
+            </a:r>
+          </a:p>
+        </p:txBody>
+      </p:sp>
+      <p:sp>
+        <p:nvSpPr>
+          <p:cNvPr id="43" name="">
+            <a:extLst xmlns:a="http://schemas.openxmlformats.org/drawingml/2006/main">
+              <a:ext uri="{FF2B5EF4-FFF2-40B4-BE49-F238E27FC236}">
+                <a16:creationId xmlns:a16="http://schemas.microsoft.com/office/drawing/2014/main" id="{4B558E9E-7669-4BB6-9ADC-57C82BC3E413}"/>
+              </a:ext>
+            </a:extLst>
+          </p:cNvPr>
+          <p:cNvSpPr>
+            <a:spLocks xmlns:a="http://schemas.openxmlformats.org/drawingml/2006/main" noGrp="1"/>
+          </p:cNvSpPr>
+          <p:nvPr/>
+        </p:nvSpPr>
+        <p:spPr>
+          <a:xfrm xmlns:a="http://schemas.openxmlformats.org/drawingml/2006/main">
+            <a:off x="7658100" y="4800600"/>
+            <a:ext cx="1428750" cy="1333500"/>
           </a:xfrm>
           <a:prstGeom xmlns:a="http://schemas.openxmlformats.org/drawingml/2006/main" prst="roundRect">
             <a:avLst>
-              <a:gd name="adj" fmla="val 1333"/>
+              <a:gd name="adj" fmla="val 1429"/>
             </a:avLst>
           </a:prstGeom>
           <a:solidFill xmlns:a="http://schemas.openxmlformats.org/drawingml/2006/main">
@@ -4779,22 +7255,52 @@
       </p:sp>
       <p:sp>
         <p:nvSpPr>
-          <p:cNvPr id="11" name="">
-            <a:extLst xmlns:a="http://schemas.openxmlformats.org/drawingml/2006/main">
-              <a:ext uri="{FF2B5EF4-FFF2-40B4-BE49-F238E27FC236}">
-                <a16:creationId xmlns:a16="http://schemas.microsoft.com/office/drawing/2014/main" id="{90FC1995-5956-4171-9D55-43A1F97CFF29}"/>
-              </a:ext>
-            </a:extLst>
-          </p:cNvPr>
-          <p:cNvSpPr>
-            <a:spLocks xmlns:a="http://schemas.openxmlformats.org/drawingml/2006/main" noGrp="1"/>
-          </p:cNvSpPr>
-          <p:nvPr/>
-        </p:nvSpPr>
-        <p:spPr>
-          <a:xfrm xmlns:a="http://schemas.openxmlformats.org/drawingml/2006/main">
-            <a:off x="3695700" y="2305050"/>
-            <a:ext cx="1428750" cy="266700"/>
+          <p:cNvPr id="44" name="">
+            <a:extLst xmlns:a="http://schemas.openxmlformats.org/drawingml/2006/main">
+              <a:ext uri="{FF2B5EF4-FFF2-40B4-BE49-F238E27FC236}">
+                <a16:creationId xmlns:a16="http://schemas.microsoft.com/office/drawing/2014/main" id="{2A874E9F-2430-4DE5-86CD-E5CF71EE33DE}"/>
+              </a:ext>
+            </a:extLst>
+          </p:cNvPr>
+          <p:cNvSpPr>
+            <a:spLocks xmlns:a="http://schemas.openxmlformats.org/drawingml/2006/main" noGrp="1"/>
+          </p:cNvSpPr>
+          <p:nvPr/>
+        </p:nvSpPr>
+        <p:spPr>
+          <a:xfrm xmlns:a="http://schemas.openxmlformats.org/drawingml/2006/main">
+            <a:off x="7658100" y="4800600"/>
+            <a:ext cx="57150" cy="1333500"/>
+          </a:xfrm>
+          <a:prstGeom xmlns:a="http://schemas.openxmlformats.org/drawingml/2006/main" prst="rect">
+            <a:avLst/>
+          </a:prstGeom>
+          <a:solidFill xmlns:a="http://schemas.openxmlformats.org/drawingml/2006/main">
+            <a:srgbClr val="145CFF"/>
+          </a:solidFill>
+          <a:ln xmlns:a="http://schemas.openxmlformats.org/drawingml/2006/main">
+            <a:noFill/>
+          </a:ln>
+        </p:spPr>
+      </p:sp>
+      <p:sp>
+        <p:nvSpPr>
+          <p:cNvPr id="45" name="">
+            <a:extLst xmlns:a="http://schemas.openxmlformats.org/drawingml/2006/main">
+              <a:ext uri="{FF2B5EF4-FFF2-40B4-BE49-F238E27FC236}">
+                <a16:creationId xmlns:a16="http://schemas.microsoft.com/office/drawing/2014/main" id="{2BE11C71-2378-4A5E-AF52-753A4180B4C2}"/>
+              </a:ext>
+            </a:extLst>
+          </p:cNvPr>
+          <p:cNvSpPr>
+            <a:spLocks xmlns:a="http://schemas.openxmlformats.org/drawingml/2006/main" noGrp="1"/>
+          </p:cNvSpPr>
+          <p:nvPr/>
+        </p:nvSpPr>
+        <p:spPr>
+          <a:xfrm xmlns:a="http://schemas.openxmlformats.org/drawingml/2006/main">
+            <a:off x="7867650" y="5010150"/>
+            <a:ext cx="1009650" cy="361950"/>
           </a:xfrm>
           <a:prstGeom xmlns:a="http://schemas.openxmlformats.org/drawingml/2006/main" prst="rect">
             <a:avLst/>
@@ -4805,52 +7311,52 @@
         </p:spPr>
         <p:txBody>
           <a:bodyPr xmlns:a="http://schemas.openxmlformats.org/drawingml/2006/main" lIns="0" tIns="0" rIns="0" bIns="0" anchor="t">
-            <a:normAutofit fontScale="97222"/>
+            <a:normAutofit fontScale="93137"/>
           </a:bodyPr>
           <a:lstStyle xmlns:a="http://schemas.openxmlformats.org/drawingml/2006/main"/>
           <a:p xmlns:a="http://schemas.openxmlformats.org/drawingml/2006/main">
             <a:pPr algn="l">
-              <a:defRPr sz="1800" b="1">
-                <a:solidFill>
-                  <a:srgbClr val="12B886"/>
-                </a:solidFill>
-                <a:latin typeface="PingFang SC"/>
-                <a:ea typeface="PingFang SC"/>
-                <a:cs typeface="PingFang SC"/>
-              </a:defRPr>
-            </a:pPr>
-            <a:r>
-              <a:rPr sz="1800" b="1">
-                <a:solidFill>
-                  <a:srgbClr val="12B886"/>
-                </a:solidFill>
-                <a:latin typeface="PingFang SC"/>
-                <a:ea typeface="PingFang SC"/>
-                <a:cs typeface="PingFang SC"/>
-              </a:rPr>
-              <a:t>负样本</a:t>
-            </a:r>
-          </a:p>
-        </p:txBody>
-      </p:sp>
-      <p:sp>
-        <p:nvSpPr>
-          <p:cNvPr id="12" name="">
-            <a:extLst xmlns:a="http://schemas.openxmlformats.org/drawingml/2006/main">
-              <a:ext uri="{FF2B5EF4-FFF2-40B4-BE49-F238E27FC236}">
-                <a16:creationId xmlns:a16="http://schemas.microsoft.com/office/drawing/2014/main" id="{FD348D3F-F84C-49EC-A005-7AC1F3686E96}"/>
-              </a:ext>
-            </a:extLst>
-          </p:cNvPr>
-          <p:cNvSpPr>
-            <a:spLocks xmlns:a="http://schemas.openxmlformats.org/drawingml/2006/main" noGrp="1"/>
-          </p:cNvSpPr>
-          <p:nvPr/>
-        </p:nvSpPr>
-        <p:spPr>
-          <a:xfrm xmlns:a="http://schemas.openxmlformats.org/drawingml/2006/main">
-            <a:off x="3695700" y="2781300"/>
-            <a:ext cx="1714500" cy="438150"/>
+              <a:defRPr sz="2550" b="1">
+                <a:solidFill>
+                  <a:srgbClr val="145CFF"/>
+                </a:solidFill>
+                <a:latin typeface="Menlo"/>
+                <a:ea typeface="Menlo"/>
+                <a:cs typeface="Menlo"/>
+              </a:defRPr>
+            </a:pPr>
+            <a:r>
+              <a:rPr sz="2550" b="1">
+                <a:solidFill>
+                  <a:srgbClr val="145CFF"/>
+                </a:solidFill>
+                <a:latin typeface="Menlo"/>
+                <a:ea typeface="Menlo"/>
+                <a:cs typeface="Menlo"/>
+              </a:rPr>
+              <a:t>3/3</a:t>
+            </a:r>
+          </a:p>
+        </p:txBody>
+      </p:sp>
+      <p:sp>
+        <p:nvSpPr>
+          <p:cNvPr id="46" name="">
+            <a:extLst xmlns:a="http://schemas.openxmlformats.org/drawingml/2006/main">
+              <a:ext uri="{FF2B5EF4-FFF2-40B4-BE49-F238E27FC236}">
+                <a16:creationId xmlns:a16="http://schemas.microsoft.com/office/drawing/2014/main" id="{022C382F-E4D3-43B6-BCF3-FE2EB540F7D8}"/>
+              </a:ext>
+            </a:extLst>
+          </p:cNvPr>
+          <p:cNvSpPr>
+            <a:spLocks xmlns:a="http://schemas.openxmlformats.org/drawingml/2006/main" noGrp="1"/>
+          </p:cNvSpPr>
+          <p:nvPr/>
+        </p:nvSpPr>
+        <p:spPr>
+          <a:xfrm xmlns:a="http://schemas.openxmlformats.org/drawingml/2006/main">
+            <a:off x="7867650" y="5429250"/>
+            <a:ext cx="1009650" cy="247650"/>
           </a:xfrm>
           <a:prstGeom xmlns:a="http://schemas.openxmlformats.org/drawingml/2006/main" prst="rect">
             <a:avLst/>
@@ -4861,84 +7367,52 @@
         </p:spPr>
         <p:txBody>
           <a:bodyPr xmlns:a="http://schemas.openxmlformats.org/drawingml/2006/main" lIns="0" tIns="0" rIns="0" bIns="0" anchor="t">
-            <a:normAutofit fontScale="88250"/>
+            <a:normAutofit fontScale="98125"/>
           </a:bodyPr>
           <a:lstStyle xmlns:a="http://schemas.openxmlformats.org/drawingml/2006/main"/>
           <a:p xmlns:a="http://schemas.openxmlformats.org/drawingml/2006/main">
             <a:pPr algn="l">
-              <a:defRPr sz="1275" b="0">
-                <a:solidFill>
-                  <a:srgbClr val="273140"/>
-                </a:solidFill>
-                <a:latin typeface="PingFang SC"/>
-                <a:ea typeface="PingFang SC"/>
-                <a:cs typeface="PingFang SC"/>
-              </a:defRPr>
-            </a:pPr>
-            <a:r>
-              <a:rPr sz="1275" b="0">
-                <a:solidFill>
-                  <a:srgbClr val="273140"/>
-                </a:solidFill>
-                <a:latin typeface="PingFang SC"/>
-                <a:ea typeface="PingFang SC"/>
-                <a:cs typeface="PingFang SC"/>
-              </a:rPr>
-              <a:t>用正常兼容性修改和字符串清理，观察是否被误报。</a:t>
-            </a:r>
-          </a:p>
-        </p:txBody>
-      </p:sp>
-      <p:sp>
-        <p:nvSpPr>
-          <p:cNvPr id="13" name="">
-            <a:extLst xmlns:a="http://schemas.openxmlformats.org/drawingml/2006/main">
-              <a:ext uri="{FF2B5EF4-FFF2-40B4-BE49-F238E27FC236}">
-                <a16:creationId xmlns:a16="http://schemas.microsoft.com/office/drawing/2014/main" id="{508AB191-3F3C-4CF4-BF18-086DCDABA02A}"/>
-              </a:ext>
-            </a:extLst>
-          </p:cNvPr>
-          <p:cNvSpPr>
-            <a:spLocks xmlns:a="http://schemas.openxmlformats.org/drawingml/2006/main" noGrp="1"/>
-          </p:cNvSpPr>
-          <p:nvPr/>
-        </p:nvSpPr>
-        <p:spPr>
-          <a:xfrm xmlns:a="http://schemas.openxmlformats.org/drawingml/2006/main">
-            <a:off x="7162800" y="2038350"/>
-            <a:ext cx="3486150" cy="2857500"/>
-          </a:xfrm>
-          <a:prstGeom xmlns:a="http://schemas.openxmlformats.org/drawingml/2006/main" prst="rect">
-            <a:avLst/>
-          </a:prstGeom>
-          <a:solidFill xmlns:a="http://schemas.openxmlformats.org/drawingml/2006/main">
-            <a:srgbClr val="F8FAFE"/>
-          </a:solidFill>
-          <a:ln xmlns:a="http://schemas.openxmlformats.org/drawingml/2006/main" w="9525">
-            <a:solidFill>
-              <a:srgbClr val="CBD5E1"/>
-            </a:solidFill>
-          </a:ln>
-        </p:spPr>
-      </p:sp>
-      <p:sp>
-        <p:nvSpPr>
-          <p:cNvPr id="14" name="">
-            <a:extLst xmlns:a="http://schemas.openxmlformats.org/drawingml/2006/main">
-              <a:ext uri="{FF2B5EF4-FFF2-40B4-BE49-F238E27FC236}">
-                <a16:creationId xmlns:a16="http://schemas.microsoft.com/office/drawing/2014/main" id="{AD1AB3E3-7EB1-43F2-945D-84D450828C37}"/>
-              </a:ext>
-            </a:extLst>
-          </p:cNvPr>
-          <p:cNvSpPr>
-            <a:spLocks xmlns:a="http://schemas.openxmlformats.org/drawingml/2006/main" noGrp="1"/>
-          </p:cNvSpPr>
-          <p:nvPr/>
-        </p:nvSpPr>
-        <p:spPr>
-          <a:xfrm xmlns:a="http://schemas.openxmlformats.org/drawingml/2006/main">
-            <a:off x="7410450" y="2286000"/>
-            <a:ext cx="2990850" cy="285750"/>
+              <a:defRPr sz="1350" b="1">
+                <a:solidFill>
+                  <a:srgbClr val="111827"/>
+                </a:solidFill>
+                <a:latin typeface="PingFang SC"/>
+                <a:ea typeface="PingFang SC"/>
+                <a:cs typeface="PingFang SC"/>
+              </a:defRPr>
+            </a:pPr>
+            <a:r>
+              <a:rPr sz="1350" b="1">
+                <a:solidFill>
+                  <a:srgbClr val="111827"/>
+                </a:solidFill>
+                <a:latin typeface="PingFang SC"/>
+                <a:ea typeface="PingFang SC"/>
+                <a:cs typeface="PingFang SC"/>
+              </a:rPr>
+              <a:t>风险样本可见</a:t>
+            </a:r>
+          </a:p>
+        </p:txBody>
+      </p:sp>
+      <p:sp>
+        <p:nvSpPr>
+          <p:cNvPr id="47" name="">
+            <a:extLst xmlns:a="http://schemas.openxmlformats.org/drawingml/2006/main">
+              <a:ext uri="{FF2B5EF4-FFF2-40B4-BE49-F238E27FC236}">
+                <a16:creationId xmlns:a16="http://schemas.microsoft.com/office/drawing/2014/main" id="{DEFC533E-E217-4113-9D3B-2EF0F12126A5}"/>
+              </a:ext>
+            </a:extLst>
+          </p:cNvPr>
+          <p:cNvSpPr>
+            <a:spLocks xmlns:a="http://schemas.openxmlformats.org/drawingml/2006/main" noGrp="1"/>
+          </p:cNvSpPr>
+          <p:nvPr/>
+        </p:nvSpPr>
+        <p:spPr>
+          <a:xfrm xmlns:a="http://schemas.openxmlformats.org/drawingml/2006/main">
+            <a:off x="7867650" y="5715000"/>
+            <a:ext cx="1009650" cy="285750"/>
           </a:xfrm>
           <a:prstGeom xmlns:a="http://schemas.openxmlformats.org/drawingml/2006/main" prst="rect">
             <a:avLst/>
@@ -4953,64 +7427,8 @@
           </a:bodyPr>
           <a:lstStyle xmlns:a="http://schemas.openxmlformats.org/drawingml/2006/main"/>
           <a:p xmlns:a="http://schemas.openxmlformats.org/drawingml/2006/main">
-            <a:pPr algn="ctr">
-              <a:defRPr sz="1650" b="1">
-                <a:solidFill>
-                  <a:srgbClr val="111827"/>
-                </a:solidFill>
-                <a:latin typeface="PingFang SC"/>
-                <a:ea typeface="PingFang SC"/>
-                <a:cs typeface="PingFang SC"/>
-              </a:defRPr>
-            </a:pPr>
-            <a:r>
-              <a:rPr sz="1650" b="1">
-                <a:solidFill>
-                  <a:srgbClr val="111827"/>
-                </a:solidFill>
-                <a:latin typeface="PingFang SC"/>
-                <a:ea typeface="PingFang SC"/>
-                <a:cs typeface="PingFang SC"/>
-              </a:rPr>
-              <a:t>截图位 2</a:t>
-            </a:r>
-          </a:p>
-        </p:txBody>
-      </p:sp>
-      <p:sp>
-        <p:nvSpPr>
-          <p:cNvPr id="15" name="">
-            <a:extLst xmlns:a="http://schemas.openxmlformats.org/drawingml/2006/main">
-              <a:ext uri="{FF2B5EF4-FFF2-40B4-BE49-F238E27FC236}">
-                <a16:creationId xmlns:a16="http://schemas.microsoft.com/office/drawing/2014/main" id="{0BA66204-9AF3-4B7E-87EF-CE42D099040B}"/>
-              </a:ext>
-            </a:extLst>
-          </p:cNvPr>
-          <p:cNvSpPr>
-            <a:spLocks xmlns:a="http://schemas.openxmlformats.org/drawingml/2006/main" noGrp="1"/>
-          </p:cNvSpPr>
-          <p:nvPr/>
-        </p:nvSpPr>
-        <p:spPr>
-          <a:xfrm xmlns:a="http://schemas.openxmlformats.org/drawingml/2006/main">
-            <a:off x="7486650" y="3390900"/>
-            <a:ext cx="2838450" cy="514350"/>
-          </a:xfrm>
-          <a:prstGeom xmlns:a="http://schemas.openxmlformats.org/drawingml/2006/main" prst="rect">
-            <a:avLst/>
-          </a:prstGeom>
-          <a:ln xmlns:a="http://schemas.openxmlformats.org/drawingml/2006/main">
-            <a:noFill/>
-          </a:ln>
-        </p:spPr>
-        <p:txBody>
-          <a:bodyPr xmlns:a="http://schemas.openxmlformats.org/drawingml/2006/main" lIns="0" tIns="0" rIns="0" bIns="0" anchor="ctr">
-            <a:normAutofit fontScale="100000"/>
-          </a:bodyPr>
-          <a:lstStyle xmlns:a="http://schemas.openxmlformats.org/drawingml/2006/main"/>
-          <a:p xmlns:a="http://schemas.openxmlformats.org/drawingml/2006/main">
-            <a:pPr algn="ctr">
-              <a:defRPr sz="1275" b="0">
+            <a:pPr algn="l">
+              <a:defRPr sz="900" b="0">
                 <a:solidFill>
                   <a:srgbClr val="5B6472"/>
                 </a:solidFill>
@@ -5020,7 +7438,7 @@
               </a:defRPr>
             </a:pPr>
             <a:r>
-              <a:rPr sz="1275" b="0">
+              <a:rPr sz="900" b="0">
                 <a:solidFill>
                   <a:srgbClr val="5B6472"/>
                 </a:solidFill>
@@ -5028,115 +7446,29 @@
                 <a:ea typeface="PingFang SC"/>
                 <a:cs typeface="PingFang SC"/>
               </a:rPr>
-              <a:t>风险识别结果 / 正式问题项截图</a:t>
-            </a:r>
-          </a:p>
-        </p:txBody>
-      </p:sp>
-      <p:sp>
-        <p:nvSpPr>
-          <p:cNvPr id="16" name="">
-            <a:extLst xmlns:a="http://schemas.openxmlformats.org/drawingml/2006/main">
-              <a:ext uri="{FF2B5EF4-FFF2-40B4-BE49-F238E27FC236}">
-                <a16:creationId xmlns:a16="http://schemas.microsoft.com/office/drawing/2014/main" id="{405FD72E-9040-4499-AC93-E55E1B05D384}"/>
-              </a:ext>
-            </a:extLst>
-          </p:cNvPr>
-          <p:cNvSpPr>
-            <a:spLocks xmlns:a="http://schemas.openxmlformats.org/drawingml/2006/main" noGrp="1"/>
-          </p:cNvSpPr>
-          <p:nvPr/>
-        </p:nvSpPr>
-        <p:spPr>
-          <a:xfrm xmlns:a="http://schemas.openxmlformats.org/drawingml/2006/main">
-            <a:off x="7524750" y="4476750"/>
-            <a:ext cx="2762250" cy="9525"/>
-          </a:xfrm>
-          <a:prstGeom xmlns:a="http://schemas.openxmlformats.org/drawingml/2006/main" prst="rect">
-            <a:avLst/>
-          </a:prstGeom>
-          <a:solidFill xmlns:a="http://schemas.openxmlformats.org/drawingml/2006/main">
-            <a:srgbClr val="E6EBF2"/>
-          </a:solidFill>
-          <a:ln xmlns:a="http://schemas.openxmlformats.org/drawingml/2006/main">
-            <a:noFill/>
-          </a:ln>
-        </p:spPr>
-      </p:sp>
-      <p:sp>
-        <p:nvSpPr>
-          <p:cNvPr id="17" name="">
-            <a:extLst xmlns:a="http://schemas.openxmlformats.org/drawingml/2006/main">
-              <a:ext uri="{FF2B5EF4-FFF2-40B4-BE49-F238E27FC236}">
-                <a16:creationId xmlns:a16="http://schemas.microsoft.com/office/drawing/2014/main" id="{3C852FE1-489A-4E7A-AF44-0C6277DCF6EC}"/>
-              </a:ext>
-            </a:extLst>
-          </p:cNvPr>
-          <p:cNvSpPr>
-            <a:spLocks xmlns:a="http://schemas.openxmlformats.org/drawingml/2006/main" noGrp="1"/>
-          </p:cNvSpPr>
-          <p:nvPr/>
-        </p:nvSpPr>
-        <p:spPr>
-          <a:xfrm xmlns:a="http://schemas.openxmlformats.org/drawingml/2006/main">
-            <a:off x="7486650" y="4572000"/>
-            <a:ext cx="2838450" cy="171450"/>
-          </a:xfrm>
-          <a:prstGeom xmlns:a="http://schemas.openxmlformats.org/drawingml/2006/main" prst="rect">
-            <a:avLst/>
-          </a:prstGeom>
-          <a:ln xmlns:a="http://schemas.openxmlformats.org/drawingml/2006/main">
-            <a:noFill/>
-          </a:ln>
-        </p:spPr>
-        <p:txBody>
-          <a:bodyPr xmlns:a="http://schemas.openxmlformats.org/drawingml/2006/main" lIns="0" tIns="0" rIns="0" bIns="0" anchor="t">
-            <a:normAutofit fontScale="100000"/>
-          </a:bodyPr>
-          <a:lstStyle xmlns:a="http://schemas.openxmlformats.org/drawingml/2006/main"/>
-          <a:p xmlns:a="http://schemas.openxmlformats.org/drawingml/2006/main">
-            <a:pPr algn="ctr">
-              <a:defRPr sz="900" b="0">
-                <a:solidFill>
-                  <a:srgbClr val="5B6472"/>
-                </a:solidFill>
-                <a:latin typeface="PingFang SC"/>
-                <a:ea typeface="PingFang SC"/>
-                <a:cs typeface="PingFang SC"/>
-              </a:defRPr>
-            </a:pPr>
-            <a:r>
-              <a:rPr sz="900" b="0">
-                <a:solidFill>
-                  <a:srgbClr val="5B6472"/>
-                </a:solidFill>
-                <a:latin typeface="PingFang SC"/>
-                <a:ea typeface="PingFang SC"/>
-                <a:cs typeface="PingFang SC"/>
-              </a:rPr>
-              <a:t>后续替换为实际截图</a:t>
-            </a:r>
-          </a:p>
-        </p:txBody>
-      </p:sp>
-      <p:sp>
-        <p:nvSpPr>
-          <p:cNvPr id="18" name="">
-            <a:extLst xmlns:a="http://schemas.openxmlformats.org/drawingml/2006/main">
-              <a:ext uri="{FF2B5EF4-FFF2-40B4-BE49-F238E27FC236}">
-                <a16:creationId xmlns:a16="http://schemas.microsoft.com/office/drawing/2014/main" id="{525A34DF-1709-441C-8135-7A6B61B36E4D}"/>
-              </a:ext>
-            </a:extLst>
-          </p:cNvPr>
-          <p:cNvSpPr>
-            <a:spLocks xmlns:a="http://schemas.openxmlformats.org/drawingml/2006/main" noGrp="1"/>
-          </p:cNvSpPr>
-          <p:nvPr/>
-        </p:nvSpPr>
-        <p:spPr>
-          <a:xfrm xmlns:a="http://schemas.openxmlformats.org/drawingml/2006/main">
-            <a:off x="742950" y="4095750"/>
-            <a:ext cx="1905000" cy="1333500"/>
+              <a:t>RF 样本</a:t>
+            </a:r>
+          </a:p>
+        </p:txBody>
+      </p:sp>
+      <p:sp>
+        <p:nvSpPr>
+          <p:cNvPr id="48" name="">
+            <a:extLst xmlns:a="http://schemas.openxmlformats.org/drawingml/2006/main">
+              <a:ext uri="{FF2B5EF4-FFF2-40B4-BE49-F238E27FC236}">
+                <a16:creationId xmlns:a16="http://schemas.microsoft.com/office/drawing/2014/main" id="{8DF4B74F-BD2F-4C39-9801-CA709D15CD26}"/>
+              </a:ext>
+            </a:extLst>
+          </p:cNvPr>
+          <p:cNvSpPr>
+            <a:spLocks xmlns:a="http://schemas.openxmlformats.org/drawingml/2006/main" noGrp="1"/>
+          </p:cNvSpPr>
+          <p:nvPr/>
+        </p:nvSpPr>
+        <p:spPr>
+          <a:xfrm xmlns:a="http://schemas.openxmlformats.org/drawingml/2006/main">
+            <a:off x="9353550" y="4800600"/>
+            <a:ext cx="1428750" cy="1333500"/>
           </a:xfrm>
           <a:prstGeom xmlns:a="http://schemas.openxmlformats.org/drawingml/2006/main" prst="roundRect">
             <a:avLst>
@@ -5155,28 +7487,28 @@
       </p:sp>
       <p:sp>
         <p:nvSpPr>
-          <p:cNvPr id="19" name="">
-            <a:extLst xmlns:a="http://schemas.openxmlformats.org/drawingml/2006/main">
-              <a:ext uri="{FF2B5EF4-FFF2-40B4-BE49-F238E27FC236}">
-                <a16:creationId xmlns:a16="http://schemas.microsoft.com/office/drawing/2014/main" id="{3CE2F9BF-5D85-4DD4-83DA-8ACD4A1FBA16}"/>
-              </a:ext>
-            </a:extLst>
-          </p:cNvPr>
-          <p:cNvSpPr>
-            <a:spLocks xmlns:a="http://schemas.openxmlformats.org/drawingml/2006/main" noGrp="1"/>
-          </p:cNvSpPr>
-          <p:nvPr/>
-        </p:nvSpPr>
-        <p:spPr>
-          <a:xfrm xmlns:a="http://schemas.openxmlformats.org/drawingml/2006/main">
-            <a:off x="742950" y="4095750"/>
+          <p:cNvPr id="49" name="">
+            <a:extLst xmlns:a="http://schemas.openxmlformats.org/drawingml/2006/main">
+              <a:ext uri="{FF2B5EF4-FFF2-40B4-BE49-F238E27FC236}">
+                <a16:creationId xmlns:a16="http://schemas.microsoft.com/office/drawing/2014/main" id="{1BFB729F-F4CC-45AC-8A4A-D1D6358806E9}"/>
+              </a:ext>
+            </a:extLst>
+          </p:cNvPr>
+          <p:cNvSpPr>
+            <a:spLocks xmlns:a="http://schemas.openxmlformats.org/drawingml/2006/main" noGrp="1"/>
+          </p:cNvSpPr>
+          <p:nvPr/>
+        </p:nvSpPr>
+        <p:spPr>
+          <a:xfrm xmlns:a="http://schemas.openxmlformats.org/drawingml/2006/main">
+            <a:off x="9353550" y="4800600"/>
             <a:ext cx="57150" cy="1333500"/>
           </a:xfrm>
           <a:prstGeom xmlns:a="http://schemas.openxmlformats.org/drawingml/2006/main" prst="rect">
             <a:avLst/>
           </a:prstGeom>
           <a:solidFill xmlns:a="http://schemas.openxmlformats.org/drawingml/2006/main">
-            <a:srgbClr val="145CFF"/>
+            <a:srgbClr val="12B886"/>
           </a:solidFill>
           <a:ln xmlns:a="http://schemas.openxmlformats.org/drawingml/2006/main">
             <a:noFill/>
@@ -5185,22 +7517,22 @@
       </p:sp>
       <p:sp>
         <p:nvSpPr>
-          <p:cNvPr id="20" name="">
-            <a:extLst xmlns:a="http://schemas.openxmlformats.org/drawingml/2006/main">
-              <a:ext uri="{FF2B5EF4-FFF2-40B4-BE49-F238E27FC236}">
-                <a16:creationId xmlns:a16="http://schemas.microsoft.com/office/drawing/2014/main" id="{CA90A7C6-E2C1-4B35-96EB-CB4077D440C5}"/>
-              </a:ext>
-            </a:extLst>
-          </p:cNvPr>
-          <p:cNvSpPr>
-            <a:spLocks xmlns:a="http://schemas.openxmlformats.org/drawingml/2006/main" noGrp="1"/>
-          </p:cNvSpPr>
-          <p:nvPr/>
-        </p:nvSpPr>
-        <p:spPr>
-          <a:xfrm xmlns:a="http://schemas.openxmlformats.org/drawingml/2006/main">
-            <a:off x="952500" y="4305300"/>
-            <a:ext cx="1485900" cy="361950"/>
+          <p:cNvPr id="50" name="">
+            <a:extLst xmlns:a="http://schemas.openxmlformats.org/drawingml/2006/main">
+              <a:ext uri="{FF2B5EF4-FFF2-40B4-BE49-F238E27FC236}">
+                <a16:creationId xmlns:a16="http://schemas.microsoft.com/office/drawing/2014/main" id="{C4BCEAB3-A978-430E-9514-94AE9ED31656}"/>
+              </a:ext>
+            </a:extLst>
+          </p:cNvPr>
+          <p:cNvSpPr>
+            <a:spLocks xmlns:a="http://schemas.openxmlformats.org/drawingml/2006/main" noGrp="1"/>
+          </p:cNvSpPr>
+          <p:nvPr/>
+        </p:nvSpPr>
+        <p:spPr>
+          <a:xfrm xmlns:a="http://schemas.openxmlformats.org/drawingml/2006/main">
+            <a:off x="9563100" y="5010150"/>
+            <a:ext cx="1009650" cy="361950"/>
           </a:xfrm>
           <a:prstGeom xmlns:a="http://schemas.openxmlformats.org/drawingml/2006/main" prst="rect">
             <a:avLst/>
@@ -5218,7 +7550,7 @@
             <a:pPr algn="l">
               <a:defRPr sz="2550" b="1">
                 <a:solidFill>
-                  <a:srgbClr val="145CFF"/>
+                  <a:srgbClr val="12B886"/>
                 </a:solidFill>
                 <a:latin typeface="Menlo"/>
                 <a:ea typeface="Menlo"/>
@@ -5228,35 +7560,91 @@
             <a:r>
               <a:rPr sz="2550" b="1">
                 <a:solidFill>
-                  <a:srgbClr val="145CFF"/>
+                  <a:srgbClr val="12B886"/>
                 </a:solidFill>
                 <a:latin typeface="Menlo"/>
                 <a:ea typeface="Menlo"/>
                 <a:cs typeface="Menlo"/>
               </a:rPr>
-              <a:t>4/4</a:t>
-            </a:r>
-          </a:p>
-        </p:txBody>
-      </p:sp>
-      <p:sp>
-        <p:nvSpPr>
-          <p:cNvPr id="21" name="">
-            <a:extLst xmlns:a="http://schemas.openxmlformats.org/drawingml/2006/main">
-              <a:ext uri="{FF2B5EF4-FFF2-40B4-BE49-F238E27FC236}">
-                <a16:creationId xmlns:a16="http://schemas.microsoft.com/office/drawing/2014/main" id="{BB0AA0F7-0541-44C9-AAE6-24334DA8565B}"/>
-              </a:ext>
-            </a:extLst>
-          </p:cNvPr>
-          <p:cNvSpPr>
-            <a:spLocks xmlns:a="http://schemas.openxmlformats.org/drawingml/2006/main" noGrp="1"/>
-          </p:cNvSpPr>
-          <p:nvPr/>
-        </p:nvSpPr>
-        <p:spPr>
-          <a:xfrm xmlns:a="http://schemas.openxmlformats.org/drawingml/2006/main">
-            <a:off x="952500" y="4724400"/>
-            <a:ext cx="1485900" cy="247650"/>
+              <a:t>0</a:t>
+            </a:r>
+          </a:p>
+        </p:txBody>
+      </p:sp>
+      <p:sp>
+        <p:nvSpPr>
+          <p:cNvPr id="51" name="">
+            <a:extLst xmlns:a="http://schemas.openxmlformats.org/drawingml/2006/main">
+              <a:ext uri="{FF2B5EF4-FFF2-40B4-BE49-F238E27FC236}">
+                <a16:creationId xmlns:a16="http://schemas.microsoft.com/office/drawing/2014/main" id="{19BB0FAC-7D1C-45C1-B4BB-AC0A0E3777F8}"/>
+              </a:ext>
+            </a:extLst>
+          </p:cNvPr>
+          <p:cNvSpPr>
+            <a:spLocks xmlns:a="http://schemas.openxmlformats.org/drawingml/2006/main" noGrp="1"/>
+          </p:cNvSpPr>
+          <p:nvPr/>
+        </p:nvSpPr>
+        <p:spPr>
+          <a:xfrm xmlns:a="http://schemas.openxmlformats.org/drawingml/2006/main">
+            <a:off x="9563100" y="5429250"/>
+            <a:ext cx="1009650" cy="247650"/>
+          </a:xfrm>
+          <a:prstGeom xmlns:a="http://schemas.openxmlformats.org/drawingml/2006/main" prst="rect">
+            <a:avLst/>
+          </a:prstGeom>
+          <a:ln xmlns:a="http://schemas.openxmlformats.org/drawingml/2006/main">
+            <a:noFill/>
+          </a:ln>
+        </p:spPr>
+        <p:txBody>
+          <a:bodyPr xmlns:a="http://schemas.openxmlformats.org/drawingml/2006/main" lIns="0" tIns="0" rIns="0" bIns="0" anchor="t">
+            <a:normAutofit fontScale="98125"/>
+          </a:bodyPr>
+          <a:lstStyle xmlns:a="http://schemas.openxmlformats.org/drawingml/2006/main"/>
+          <a:p xmlns:a="http://schemas.openxmlformats.org/drawingml/2006/main">
+            <a:pPr algn="l">
+              <a:defRPr sz="1350" b="1">
+                <a:solidFill>
+                  <a:srgbClr val="111827"/>
+                </a:solidFill>
+                <a:latin typeface="PingFang SC"/>
+                <a:ea typeface="PingFang SC"/>
+                <a:cs typeface="PingFang SC"/>
+              </a:defRPr>
+            </a:pPr>
+            <a:r>
+              <a:rPr sz="1350" b="1">
+                <a:solidFill>
+                  <a:srgbClr val="111827"/>
+                </a:solidFill>
+                <a:latin typeface="PingFang SC"/>
+                <a:ea typeface="PingFang SC"/>
+                <a:cs typeface="PingFang SC"/>
+              </a:rPr>
+              <a:t>新增正式误报</a:t>
+            </a:r>
+          </a:p>
+        </p:txBody>
+      </p:sp>
+      <p:sp>
+        <p:nvSpPr>
+          <p:cNvPr id="52" name="">
+            <a:extLst xmlns:a="http://schemas.openxmlformats.org/drawingml/2006/main">
+              <a:ext uri="{FF2B5EF4-FFF2-40B4-BE49-F238E27FC236}">
+                <a16:creationId xmlns:a16="http://schemas.microsoft.com/office/drawing/2014/main" id="{2A49D186-6C29-4D37-B104-640BB75ED421}"/>
+              </a:ext>
+            </a:extLst>
+          </p:cNvPr>
+          <p:cNvSpPr>
+            <a:spLocks xmlns:a="http://schemas.openxmlformats.org/drawingml/2006/main" noGrp="1"/>
+          </p:cNvSpPr>
+          <p:nvPr/>
+        </p:nvSpPr>
+        <p:spPr>
+          <a:xfrm xmlns:a="http://schemas.openxmlformats.org/drawingml/2006/main">
+            <a:off x="9563100" y="5715000"/>
+            <a:ext cx="1009650" cy="285750"/>
           </a:xfrm>
           <a:prstGeom xmlns:a="http://schemas.openxmlformats.org/drawingml/2006/main" prst="rect">
             <a:avLst/>
@@ -5272,62 +7660,6 @@
           <a:lstStyle xmlns:a="http://schemas.openxmlformats.org/drawingml/2006/main"/>
           <a:p xmlns:a="http://schemas.openxmlformats.org/drawingml/2006/main">
             <a:pPr algn="l">
-              <a:defRPr sz="1350" b="1">
-                <a:solidFill>
-                  <a:srgbClr val="111827"/>
-                </a:solidFill>
-                <a:latin typeface="PingFang SC"/>
-                <a:ea typeface="PingFang SC"/>
-                <a:cs typeface="PingFang SC"/>
-              </a:defRPr>
-            </a:pPr>
-            <a:r>
-              <a:rPr sz="1350" b="1">
-                <a:solidFill>
-                  <a:srgbClr val="111827"/>
-                </a:solidFill>
-                <a:latin typeface="PingFang SC"/>
-                <a:ea typeface="PingFang SC"/>
-                <a:cs typeface="PingFang SC"/>
-              </a:rPr>
-              <a:t>风险样本识别</a:t>
-            </a:r>
-          </a:p>
-        </p:txBody>
-      </p:sp>
-      <p:sp>
-        <p:nvSpPr>
-          <p:cNvPr id="22" name="">
-            <a:extLst xmlns:a="http://schemas.openxmlformats.org/drawingml/2006/main">
-              <a:ext uri="{FF2B5EF4-FFF2-40B4-BE49-F238E27FC236}">
-                <a16:creationId xmlns:a16="http://schemas.microsoft.com/office/drawing/2014/main" id="{0395291C-A3B2-47C7-AF59-030896C8A62B}"/>
-              </a:ext>
-            </a:extLst>
-          </p:cNvPr>
-          <p:cNvSpPr>
-            <a:spLocks xmlns:a="http://schemas.openxmlformats.org/drawingml/2006/main" noGrp="1"/>
-          </p:cNvSpPr>
-          <p:nvPr/>
-        </p:nvSpPr>
-        <p:spPr>
-          <a:xfrm xmlns:a="http://schemas.openxmlformats.org/drawingml/2006/main">
-            <a:off x="952500" y="5010150"/>
-            <a:ext cx="1485900" cy="285750"/>
-          </a:xfrm>
-          <a:prstGeom xmlns:a="http://schemas.openxmlformats.org/drawingml/2006/main" prst="rect">
-            <a:avLst/>
-          </a:prstGeom>
-          <a:ln xmlns:a="http://schemas.openxmlformats.org/drawingml/2006/main">
-            <a:noFill/>
-          </a:ln>
-        </p:spPr>
-        <p:txBody>
-          <a:bodyPr xmlns:a="http://schemas.openxmlformats.org/drawingml/2006/main" lIns="0" tIns="0" rIns="0" bIns="0" anchor="t">
-            <a:normAutofit fontScale="100000"/>
-          </a:bodyPr>
-          <a:lstStyle xmlns:a="http://schemas.openxmlformats.org/drawingml/2006/main"/>
-          <a:p xmlns:a="http://schemas.openxmlformats.org/drawingml/2006/main">
-            <a:pPr algn="l">
               <a:defRPr sz="900" b="0">
                 <a:solidFill>
                   <a:srgbClr val="5B6472"/>
@@ -5346,527 +7678,115 @@
                 <a:ea typeface="PingFang SC"/>
                 <a:cs typeface="PingFang SC"/>
               </a:rPr>
-              <a:t>规划阶段触达风险</a:t>
-            </a:r>
-          </a:p>
-        </p:txBody>
-      </p:sp>
-      <p:sp>
-        <p:nvSpPr>
-          <p:cNvPr id="23" name="">
-            <a:extLst xmlns:a="http://schemas.openxmlformats.org/drawingml/2006/main">
-              <a:ext uri="{FF2B5EF4-FFF2-40B4-BE49-F238E27FC236}">
-                <a16:creationId xmlns:a16="http://schemas.microsoft.com/office/drawing/2014/main" id="{8BEB5720-E00B-427E-8099-3A25258CBA29}"/>
-              </a:ext>
-            </a:extLst>
-          </p:cNvPr>
-          <p:cNvSpPr>
-            <a:spLocks xmlns:a="http://schemas.openxmlformats.org/drawingml/2006/main" noGrp="1"/>
-          </p:cNvSpPr>
-          <p:nvPr/>
-        </p:nvSpPr>
-        <p:spPr>
-          <a:xfrm xmlns:a="http://schemas.openxmlformats.org/drawingml/2006/main">
-            <a:off x="2952750" y="4095750"/>
-            <a:ext cx="1905000" cy="1333500"/>
-          </a:xfrm>
-          <a:prstGeom xmlns:a="http://schemas.openxmlformats.org/drawingml/2006/main" prst="roundRect">
-            <a:avLst>
-              <a:gd name="adj" fmla="val 1429"/>
-            </a:avLst>
-          </a:prstGeom>
-          <a:solidFill xmlns:a="http://schemas.openxmlformats.org/drawingml/2006/main">
-            <a:srgbClr val="FFFFFF"/>
-          </a:solidFill>
-          <a:ln xmlns:a="http://schemas.openxmlformats.org/drawingml/2006/main" w="9525">
-            <a:solidFill>
-              <a:srgbClr val="E6EBF2"/>
-            </a:solidFill>
-          </a:ln>
-        </p:spPr>
-      </p:sp>
-      <p:sp>
-        <p:nvSpPr>
-          <p:cNvPr id="24" name="">
-            <a:extLst xmlns:a="http://schemas.openxmlformats.org/drawingml/2006/main">
-              <a:ext uri="{FF2B5EF4-FFF2-40B4-BE49-F238E27FC236}">
-                <a16:creationId xmlns:a16="http://schemas.microsoft.com/office/drawing/2014/main" id="{30762210-E2B1-443A-A7A8-3815E4697385}"/>
-              </a:ext>
-            </a:extLst>
-          </p:cNvPr>
-          <p:cNvSpPr>
-            <a:spLocks xmlns:a="http://schemas.openxmlformats.org/drawingml/2006/main" noGrp="1"/>
-          </p:cNvSpPr>
-          <p:nvPr/>
-        </p:nvSpPr>
-        <p:spPr>
-          <a:xfrm xmlns:a="http://schemas.openxmlformats.org/drawingml/2006/main">
-            <a:off x="2952750" y="4095750"/>
-            <a:ext cx="57150" cy="1333500"/>
-          </a:xfrm>
-          <a:prstGeom xmlns:a="http://schemas.openxmlformats.org/drawingml/2006/main" prst="rect">
-            <a:avLst/>
-          </a:prstGeom>
-          <a:solidFill xmlns:a="http://schemas.openxmlformats.org/drawingml/2006/main">
-            <a:srgbClr val="F59F00"/>
-          </a:solidFill>
-          <a:ln xmlns:a="http://schemas.openxmlformats.org/drawingml/2006/main">
-            <a:noFill/>
-          </a:ln>
-        </p:spPr>
-      </p:sp>
-      <p:sp>
-        <p:nvSpPr>
-          <p:cNvPr id="25" name="">
-            <a:extLst xmlns:a="http://schemas.openxmlformats.org/drawingml/2006/main">
-              <a:ext uri="{FF2B5EF4-FFF2-40B4-BE49-F238E27FC236}">
-                <a16:creationId xmlns:a16="http://schemas.microsoft.com/office/drawing/2014/main" id="{D203D8F9-D7E0-470C-8EB4-B2867C7EAB86}"/>
-              </a:ext>
-            </a:extLst>
-          </p:cNvPr>
-          <p:cNvSpPr>
-            <a:spLocks xmlns:a="http://schemas.openxmlformats.org/drawingml/2006/main" noGrp="1"/>
-          </p:cNvSpPr>
-          <p:nvPr/>
-        </p:nvSpPr>
-        <p:spPr>
-          <a:xfrm xmlns:a="http://schemas.openxmlformats.org/drawingml/2006/main">
-            <a:off x="3162300" y="4305300"/>
-            <a:ext cx="1485900" cy="361950"/>
-          </a:xfrm>
-          <a:prstGeom xmlns:a="http://schemas.openxmlformats.org/drawingml/2006/main" prst="rect">
-            <a:avLst/>
-          </a:prstGeom>
-          <a:ln xmlns:a="http://schemas.openxmlformats.org/drawingml/2006/main">
-            <a:noFill/>
-          </a:ln>
-        </p:spPr>
-        <p:txBody>
-          <a:bodyPr xmlns:a="http://schemas.openxmlformats.org/drawingml/2006/main" lIns="0" tIns="0" rIns="0" bIns="0" anchor="t">
-            <a:normAutofit fontScale="93137"/>
-          </a:bodyPr>
-          <a:lstStyle xmlns:a="http://schemas.openxmlformats.org/drawingml/2006/main"/>
-          <a:p xmlns:a="http://schemas.openxmlformats.org/drawingml/2006/main">
-            <a:pPr algn="l">
-              <a:defRPr sz="2550" b="1">
-                <a:solidFill>
-                  <a:srgbClr val="F59F00"/>
-                </a:solidFill>
-                <a:latin typeface="Menlo"/>
-                <a:ea typeface="Menlo"/>
-                <a:cs typeface="Menlo"/>
-              </a:defRPr>
-            </a:pPr>
-            <a:r>
-              <a:rPr sz="2550" b="1">
-                <a:solidFill>
-                  <a:srgbClr val="F59F00"/>
-                </a:solidFill>
-                <a:latin typeface="Menlo"/>
-                <a:ea typeface="Menlo"/>
-                <a:cs typeface="Menlo"/>
-              </a:rPr>
-              <a:t>可见</a:t>
-            </a:r>
-          </a:p>
-        </p:txBody>
-      </p:sp>
-      <p:sp>
-        <p:nvSpPr>
-          <p:cNvPr id="26" name="">
-            <a:extLst xmlns:a="http://schemas.openxmlformats.org/drawingml/2006/main">
-              <a:ext uri="{FF2B5EF4-FFF2-40B4-BE49-F238E27FC236}">
-                <a16:creationId xmlns:a16="http://schemas.microsoft.com/office/drawing/2014/main" id="{D5F52192-A0F7-491A-8279-9B0D7908DEDA}"/>
-              </a:ext>
-            </a:extLst>
-          </p:cNvPr>
-          <p:cNvSpPr>
-            <a:spLocks xmlns:a="http://schemas.openxmlformats.org/drawingml/2006/main" noGrp="1"/>
-          </p:cNvSpPr>
-          <p:nvPr/>
-        </p:nvSpPr>
-        <p:spPr>
-          <a:xfrm xmlns:a="http://schemas.openxmlformats.org/drawingml/2006/main">
-            <a:off x="3162300" y="4724400"/>
-            <a:ext cx="1485900" cy="247650"/>
-          </a:xfrm>
-          <a:prstGeom xmlns:a="http://schemas.openxmlformats.org/drawingml/2006/main" prst="rect">
-            <a:avLst/>
-          </a:prstGeom>
-          <a:ln xmlns:a="http://schemas.openxmlformats.org/drawingml/2006/main">
-            <a:noFill/>
-          </a:ln>
-        </p:spPr>
-        <p:txBody>
-          <a:bodyPr xmlns:a="http://schemas.openxmlformats.org/drawingml/2006/main" lIns="0" tIns="0" rIns="0" bIns="0" anchor="t">
-            <a:normAutofit fontScale="100000"/>
-          </a:bodyPr>
-          <a:lstStyle xmlns:a="http://schemas.openxmlformats.org/drawingml/2006/main"/>
-          <a:p xmlns:a="http://schemas.openxmlformats.org/drawingml/2006/main">
-            <a:pPr algn="l">
-              <a:defRPr sz="1350" b="1">
-                <a:solidFill>
-                  <a:srgbClr val="111827"/>
-                </a:solidFill>
-                <a:latin typeface="PingFang SC"/>
-                <a:ea typeface="PingFang SC"/>
-                <a:cs typeface="PingFang SC"/>
-              </a:defRPr>
-            </a:pPr>
-            <a:r>
-              <a:rPr sz="1350" b="1">
-                <a:solidFill>
-                  <a:srgbClr val="111827"/>
-                </a:solidFill>
-                <a:latin typeface="PingFang SC"/>
-                <a:ea typeface="PingFang SC"/>
-                <a:cs typeface="PingFang SC"/>
-              </a:rPr>
-              <a:t>处置路径</a:t>
-            </a:r>
-          </a:p>
-        </p:txBody>
-      </p:sp>
-      <p:sp>
-        <p:nvSpPr>
-          <p:cNvPr id="27" name="">
-            <a:extLst xmlns:a="http://schemas.openxmlformats.org/drawingml/2006/main">
-              <a:ext uri="{FF2B5EF4-FFF2-40B4-BE49-F238E27FC236}">
-                <a16:creationId xmlns:a16="http://schemas.microsoft.com/office/drawing/2014/main" id="{E4E6DC95-84B8-44E0-80B2-2FCDD5FFB66A}"/>
-              </a:ext>
-            </a:extLst>
-          </p:cNvPr>
-          <p:cNvSpPr>
-            <a:spLocks xmlns:a="http://schemas.openxmlformats.org/drawingml/2006/main" noGrp="1"/>
-          </p:cNvSpPr>
-          <p:nvPr/>
-        </p:nvSpPr>
-        <p:spPr>
-          <a:xfrm xmlns:a="http://schemas.openxmlformats.org/drawingml/2006/main">
-            <a:off x="3162300" y="5010150"/>
-            <a:ext cx="1485900" cy="285750"/>
-          </a:xfrm>
-          <a:prstGeom xmlns:a="http://schemas.openxmlformats.org/drawingml/2006/main" prst="rect">
-            <a:avLst/>
-          </a:prstGeom>
-          <a:ln xmlns:a="http://schemas.openxmlformats.org/drawingml/2006/main">
-            <a:noFill/>
-          </a:ln>
-        </p:spPr>
-        <p:txBody>
-          <a:bodyPr xmlns:a="http://schemas.openxmlformats.org/drawingml/2006/main" lIns="0" tIns="0" rIns="0" bIns="0" anchor="t">
-            <a:normAutofit fontScale="100000"/>
-          </a:bodyPr>
-          <a:lstStyle xmlns:a="http://schemas.openxmlformats.org/drawingml/2006/main"/>
-          <a:p xmlns:a="http://schemas.openxmlformats.org/drawingml/2006/main">
-            <a:pPr algn="l">
-              <a:defRPr sz="900" b="0">
-                <a:solidFill>
-                  <a:srgbClr val="5B6472"/>
-                </a:solidFill>
-                <a:latin typeface="PingFang SC"/>
-                <a:ea typeface="PingFang SC"/>
-                <a:cs typeface="PingFang SC"/>
-              </a:defRPr>
-            </a:pPr>
-            <a:r>
-              <a:rPr sz="900" b="0">
-                <a:solidFill>
-                  <a:srgbClr val="5B6472"/>
-                </a:solidFill>
-                <a:latin typeface="PingFang SC"/>
-                <a:ea typeface="PingFang SC"/>
-                <a:cs typeface="PingFang SC"/>
-              </a:rPr>
-              <a:t>部分风险进入正式问题或复核</a:t>
-            </a:r>
-          </a:p>
-        </p:txBody>
-      </p:sp>
-      <p:sp>
-        <p:nvSpPr>
-          <p:cNvPr id="28" name="">
-            <a:extLst xmlns:a="http://schemas.openxmlformats.org/drawingml/2006/main">
-              <a:ext uri="{FF2B5EF4-FFF2-40B4-BE49-F238E27FC236}">
-                <a16:creationId xmlns:a16="http://schemas.microsoft.com/office/drawing/2014/main" id="{ADBF50FC-681E-42EC-A0DF-7F206B378006}"/>
-              </a:ext>
-            </a:extLst>
-          </p:cNvPr>
-          <p:cNvSpPr>
-            <a:spLocks xmlns:a="http://schemas.openxmlformats.org/drawingml/2006/main" noGrp="1"/>
-          </p:cNvSpPr>
-          <p:nvPr/>
-        </p:nvSpPr>
-        <p:spPr>
-          <a:xfrm xmlns:a="http://schemas.openxmlformats.org/drawingml/2006/main">
-            <a:off x="5162550" y="4095750"/>
-            <a:ext cx="1905000" cy="1333500"/>
-          </a:xfrm>
-          <a:prstGeom xmlns:a="http://schemas.openxmlformats.org/drawingml/2006/main" prst="roundRect">
-            <a:avLst>
-              <a:gd name="adj" fmla="val 1429"/>
-            </a:avLst>
-          </a:prstGeom>
-          <a:solidFill xmlns:a="http://schemas.openxmlformats.org/drawingml/2006/main">
-            <a:srgbClr val="FFFFFF"/>
-          </a:solidFill>
-          <a:ln xmlns:a="http://schemas.openxmlformats.org/drawingml/2006/main" w="9525">
-            <a:solidFill>
-              <a:srgbClr val="E6EBF2"/>
-            </a:solidFill>
-          </a:ln>
-        </p:spPr>
-      </p:sp>
-      <p:sp>
-        <p:nvSpPr>
-          <p:cNvPr id="29" name="">
-            <a:extLst xmlns:a="http://schemas.openxmlformats.org/drawingml/2006/main">
-              <a:ext uri="{FF2B5EF4-FFF2-40B4-BE49-F238E27FC236}">
-                <a16:creationId xmlns:a16="http://schemas.microsoft.com/office/drawing/2014/main" id="{137943F6-2CEA-4315-8BB2-9D34F3CC848C}"/>
-              </a:ext>
-            </a:extLst>
-          </p:cNvPr>
-          <p:cNvSpPr>
-            <a:spLocks xmlns:a="http://schemas.openxmlformats.org/drawingml/2006/main" noGrp="1"/>
-          </p:cNvSpPr>
-          <p:nvPr/>
-        </p:nvSpPr>
-        <p:spPr>
-          <a:xfrm xmlns:a="http://schemas.openxmlformats.org/drawingml/2006/main">
-            <a:off x="5162550" y="4095750"/>
-            <a:ext cx="57150" cy="1333500"/>
-          </a:xfrm>
-          <a:prstGeom xmlns:a="http://schemas.openxmlformats.org/drawingml/2006/main" prst="rect">
-            <a:avLst/>
-          </a:prstGeom>
-          <a:solidFill xmlns:a="http://schemas.openxmlformats.org/drawingml/2006/main">
-            <a:srgbClr val="12B886"/>
-          </a:solidFill>
-          <a:ln xmlns:a="http://schemas.openxmlformats.org/drawingml/2006/main">
-            <a:noFill/>
-          </a:ln>
-        </p:spPr>
-      </p:sp>
-      <p:sp>
-        <p:nvSpPr>
-          <p:cNvPr id="30" name="">
-            <a:extLst xmlns:a="http://schemas.openxmlformats.org/drawingml/2006/main">
-              <a:ext uri="{FF2B5EF4-FFF2-40B4-BE49-F238E27FC236}">
-                <a16:creationId xmlns:a16="http://schemas.microsoft.com/office/drawing/2014/main" id="{F2500EDF-1DD5-415A-8544-9C56A321BF01}"/>
-              </a:ext>
-            </a:extLst>
-          </p:cNvPr>
-          <p:cNvSpPr>
-            <a:spLocks xmlns:a="http://schemas.openxmlformats.org/drawingml/2006/main" noGrp="1"/>
-          </p:cNvSpPr>
-          <p:nvPr/>
-        </p:nvSpPr>
-        <p:spPr>
-          <a:xfrm xmlns:a="http://schemas.openxmlformats.org/drawingml/2006/main">
-            <a:off x="5372100" y="4305300"/>
-            <a:ext cx="1485900" cy="361950"/>
-          </a:xfrm>
-          <a:prstGeom xmlns:a="http://schemas.openxmlformats.org/drawingml/2006/main" prst="rect">
-            <a:avLst/>
-          </a:prstGeom>
-          <a:ln xmlns:a="http://schemas.openxmlformats.org/drawingml/2006/main">
-            <a:noFill/>
-          </a:ln>
-        </p:spPr>
-        <p:txBody>
-          <a:bodyPr xmlns:a="http://schemas.openxmlformats.org/drawingml/2006/main" lIns="0" tIns="0" rIns="0" bIns="0" anchor="t">
-            <a:normAutofit fontScale="93137"/>
-          </a:bodyPr>
-          <a:lstStyle xmlns:a="http://schemas.openxmlformats.org/drawingml/2006/main"/>
-          <a:p xmlns:a="http://schemas.openxmlformats.org/drawingml/2006/main">
-            <a:pPr algn="l">
-              <a:defRPr sz="2550" b="1">
-                <a:solidFill>
-                  <a:srgbClr val="12B886"/>
-                </a:solidFill>
-                <a:latin typeface="Menlo"/>
-                <a:ea typeface="Menlo"/>
-                <a:cs typeface="Menlo"/>
-              </a:defRPr>
-            </a:pPr>
-            <a:r>
-              <a:rPr sz="2550" b="1">
-                <a:solidFill>
-                  <a:srgbClr val="12B886"/>
-                </a:solidFill>
-                <a:latin typeface="Menlo"/>
-                <a:ea typeface="Menlo"/>
-                <a:cs typeface="Menlo"/>
-              </a:rPr>
-              <a:t>0</a:t>
-            </a:r>
-          </a:p>
-        </p:txBody>
-      </p:sp>
-      <p:sp>
-        <p:nvSpPr>
-          <p:cNvPr id="31" name="">
-            <a:extLst xmlns:a="http://schemas.openxmlformats.org/drawingml/2006/main">
-              <a:ext uri="{FF2B5EF4-FFF2-40B4-BE49-F238E27FC236}">
-                <a16:creationId xmlns:a16="http://schemas.microsoft.com/office/drawing/2014/main" id="{C108C71C-8F6C-48D1-A128-2C238E701BD2}"/>
-              </a:ext>
-            </a:extLst>
-          </p:cNvPr>
-          <p:cNvSpPr>
-            <a:spLocks xmlns:a="http://schemas.openxmlformats.org/drawingml/2006/main" noGrp="1"/>
-          </p:cNvSpPr>
-          <p:nvPr/>
-        </p:nvSpPr>
-        <p:spPr>
-          <a:xfrm xmlns:a="http://schemas.openxmlformats.org/drawingml/2006/main">
-            <a:off x="5372100" y="4724400"/>
-            <a:ext cx="1485900" cy="247650"/>
-          </a:xfrm>
-          <a:prstGeom xmlns:a="http://schemas.openxmlformats.org/drawingml/2006/main" prst="rect">
-            <a:avLst/>
-          </a:prstGeom>
-          <a:ln xmlns:a="http://schemas.openxmlformats.org/drawingml/2006/main">
-            <a:noFill/>
-          </a:ln>
-        </p:spPr>
-        <p:txBody>
-          <a:bodyPr xmlns:a="http://schemas.openxmlformats.org/drawingml/2006/main" lIns="0" tIns="0" rIns="0" bIns="0" anchor="t">
-            <a:normAutofit fontScale="100000"/>
-          </a:bodyPr>
-          <a:lstStyle xmlns:a="http://schemas.openxmlformats.org/drawingml/2006/main"/>
-          <a:p xmlns:a="http://schemas.openxmlformats.org/drawingml/2006/main">
-            <a:pPr algn="l">
-              <a:defRPr sz="1350" b="1">
-                <a:solidFill>
-                  <a:srgbClr val="111827"/>
-                </a:solidFill>
-                <a:latin typeface="PingFang SC"/>
-                <a:ea typeface="PingFang SC"/>
-                <a:cs typeface="PingFang SC"/>
-              </a:defRPr>
-            </a:pPr>
-            <a:r>
-              <a:rPr sz="1350" b="1">
-                <a:solidFill>
-                  <a:srgbClr val="111827"/>
-                </a:solidFill>
-                <a:latin typeface="PingFang SC"/>
-                <a:ea typeface="PingFang SC"/>
-                <a:cs typeface="PingFang SC"/>
-              </a:rPr>
-              <a:t>新增正式误报</a:t>
-            </a:r>
-          </a:p>
-        </p:txBody>
-      </p:sp>
-      <p:sp>
-        <p:nvSpPr>
-          <p:cNvPr id="32" name="">
-            <a:extLst xmlns:a="http://schemas.openxmlformats.org/drawingml/2006/main">
-              <a:ext uri="{FF2B5EF4-FFF2-40B4-BE49-F238E27FC236}">
-                <a16:creationId xmlns:a16="http://schemas.microsoft.com/office/drawing/2014/main" id="{89DACBFE-F324-4E94-B321-855280C44DCB}"/>
-              </a:ext>
-            </a:extLst>
-          </p:cNvPr>
-          <p:cNvSpPr>
-            <a:spLocks xmlns:a="http://schemas.openxmlformats.org/drawingml/2006/main" noGrp="1"/>
-          </p:cNvSpPr>
-          <p:nvPr/>
-        </p:nvSpPr>
-        <p:spPr>
-          <a:xfrm xmlns:a="http://schemas.openxmlformats.org/drawingml/2006/main">
-            <a:off x="5372100" y="5010150"/>
-            <a:ext cx="1485900" cy="285750"/>
-          </a:xfrm>
-          <a:prstGeom xmlns:a="http://schemas.openxmlformats.org/drawingml/2006/main" prst="rect">
-            <a:avLst/>
-          </a:prstGeom>
-          <a:ln xmlns:a="http://schemas.openxmlformats.org/drawingml/2006/main">
-            <a:noFill/>
-          </a:ln>
-        </p:spPr>
-        <p:txBody>
-          <a:bodyPr xmlns:a="http://schemas.openxmlformats.org/drawingml/2006/main" lIns="0" tIns="0" rIns="0" bIns="0" anchor="t">
-            <a:normAutofit fontScale="100000"/>
-          </a:bodyPr>
-          <a:lstStyle xmlns:a="http://schemas.openxmlformats.org/drawingml/2006/main"/>
-          <a:p xmlns:a="http://schemas.openxmlformats.org/drawingml/2006/main">
-            <a:pPr algn="l">
-              <a:defRPr sz="900" b="0">
-                <a:solidFill>
-                  <a:srgbClr val="5B6472"/>
-                </a:solidFill>
-                <a:latin typeface="PingFang SC"/>
-                <a:ea typeface="PingFang SC"/>
-                <a:cs typeface="PingFang SC"/>
-              </a:defRPr>
-            </a:pPr>
-            <a:r>
-              <a:rPr sz="900" b="0">
-                <a:solidFill>
-                  <a:srgbClr val="5B6472"/>
-                </a:solidFill>
-                <a:latin typeface="PingFang SC"/>
-                <a:ea typeface="PingFang SC"/>
-                <a:cs typeface="PingFang SC"/>
-              </a:rPr>
-              <a:t>负样本当前范围内</a:t>
-            </a:r>
-          </a:p>
-        </p:txBody>
-      </p:sp>
-      <p:sp>
-        <p:nvSpPr>
-          <p:cNvPr id="33" name="">
-            <a:extLst xmlns:a="http://schemas.openxmlformats.org/drawingml/2006/main">
-              <a:ext uri="{FF2B5EF4-FFF2-40B4-BE49-F238E27FC236}">
-                <a16:creationId xmlns:a16="http://schemas.microsoft.com/office/drawing/2014/main" id="{EF3DA328-0420-498F-989F-765659010CB0}"/>
-              </a:ext>
-            </a:extLst>
-          </p:cNvPr>
-          <p:cNvSpPr>
-            <a:spLocks xmlns:a="http://schemas.openxmlformats.org/drawingml/2006/main" noGrp="1"/>
-          </p:cNvSpPr>
-          <p:nvPr/>
-        </p:nvSpPr>
-        <p:spPr>
-          <a:xfrm xmlns:a="http://schemas.openxmlformats.org/drawingml/2006/main">
-            <a:off x="7162800" y="5200650"/>
-            <a:ext cx="3486150" cy="723900"/>
-          </a:xfrm>
-          <a:prstGeom xmlns:a="http://schemas.openxmlformats.org/drawingml/2006/main" prst="roundRect">
-            <a:avLst>
-              <a:gd name="adj" fmla="val 2632"/>
-            </a:avLst>
+              <a:t>NEG 当前样本</a:t>
+            </a:r>
+          </a:p>
+        </p:txBody>
+      </p:sp>
+      <p:sp>
+        <p:nvSpPr>
+          <p:cNvPr id="53" name="">
+            <a:extLst xmlns:a="http://schemas.openxmlformats.org/drawingml/2006/main">
+              <a:ext uri="{FF2B5EF4-FFF2-40B4-BE49-F238E27FC236}">
+                <a16:creationId xmlns:a16="http://schemas.microsoft.com/office/drawing/2014/main" id="{8F18F4D1-60A0-4599-9EAE-3206D755B9B5}"/>
+              </a:ext>
+            </a:extLst>
+          </p:cNvPr>
+          <p:cNvSpPr>
+            <a:spLocks xmlns:a="http://schemas.openxmlformats.org/drawingml/2006/main" noGrp="1"/>
+          </p:cNvSpPr>
+          <p:nvPr/>
+        </p:nvSpPr>
+        <p:spPr>
+          <a:xfrm xmlns:a="http://schemas.openxmlformats.org/drawingml/2006/main">
+            <a:off x="685800" y="6229350"/>
+            <a:ext cx="10096500" cy="419100"/>
+          </a:xfrm>
+          <a:prstGeom xmlns:a="http://schemas.openxmlformats.org/drawingml/2006/main" prst="rect">
+            <a:avLst/>
           </a:prstGeom>
           <a:solidFill xmlns:a="http://schemas.openxmlformats.org/drawingml/2006/main">
             <a:srgbClr val="111827"/>
           </a:solidFill>
-          <a:ln xmlns:a="http://schemas.openxmlformats.org/drawingml/2006/main" w="9525">
-            <a:solidFill>
-              <a:srgbClr val="E6EBF2"/>
-            </a:solidFill>
-          </a:ln>
-        </p:spPr>
-      </p:sp>
-      <p:sp>
-        <p:nvSpPr>
-          <p:cNvPr id="34" name="">
-            <a:extLst xmlns:a="http://schemas.openxmlformats.org/drawingml/2006/main">
-              <a:ext uri="{FF2B5EF4-FFF2-40B4-BE49-F238E27FC236}">
-                <a16:creationId xmlns:a16="http://schemas.microsoft.com/office/drawing/2014/main" id="{93D4526E-C99B-4810-8B5F-FC53FF646C76}"/>
-              </a:ext>
-            </a:extLst>
-          </p:cNvPr>
-          <p:cNvSpPr>
-            <a:spLocks xmlns:a="http://schemas.openxmlformats.org/drawingml/2006/main" noGrp="1"/>
-          </p:cNvSpPr>
-          <p:nvPr/>
-        </p:nvSpPr>
-        <p:spPr>
-          <a:xfrm xmlns:a="http://schemas.openxmlformats.org/drawingml/2006/main">
-            <a:off x="7448550" y="5391150"/>
-            <a:ext cx="1143000" cy="228600"/>
+          <a:ln xmlns:a="http://schemas.openxmlformats.org/drawingml/2006/main">
+            <a:noFill/>
+          </a:ln>
+        </p:spPr>
+      </p:sp>
+      <p:sp>
+        <p:nvSpPr>
+          <p:cNvPr id="54" name="">
+            <a:extLst xmlns:a="http://schemas.openxmlformats.org/drawingml/2006/main">
+              <a:ext uri="{FF2B5EF4-FFF2-40B4-BE49-F238E27FC236}">
+                <a16:creationId xmlns:a16="http://schemas.microsoft.com/office/drawing/2014/main" id="{22E45AD4-F1A2-4CB4-A88C-AAE645271A0D}"/>
+              </a:ext>
+            </a:extLst>
+          </p:cNvPr>
+          <p:cNvSpPr>
+            <a:spLocks xmlns:a="http://schemas.openxmlformats.org/drawingml/2006/main" noGrp="1"/>
+          </p:cNvSpPr>
+          <p:nvPr/>
+        </p:nvSpPr>
+        <p:spPr>
+          <a:xfrm xmlns:a="http://schemas.openxmlformats.org/drawingml/2006/main">
+            <a:off x="952500" y="6343650"/>
+            <a:ext cx="571500" cy="171450"/>
+          </a:xfrm>
+          <a:prstGeom xmlns:a="http://schemas.openxmlformats.org/drawingml/2006/main" prst="rect">
+            <a:avLst/>
+          </a:prstGeom>
+          <a:ln xmlns:a="http://schemas.openxmlformats.org/drawingml/2006/main">
+            <a:noFill/>
+          </a:ln>
+        </p:spPr>
+        <p:txBody>
+          <a:bodyPr xmlns:a="http://schemas.openxmlformats.org/drawingml/2006/main" lIns="0" tIns="0" rIns="0" bIns="0" anchor="t">
+            <a:normAutofit fontScale="93750"/>
+          </a:bodyPr>
+          <a:lstStyle xmlns:a="http://schemas.openxmlformats.org/drawingml/2006/main"/>
+          <a:p xmlns:a="http://schemas.openxmlformats.org/drawingml/2006/main">
+            <a:pPr algn="l">
+              <a:defRPr sz="1200" b="1">
+                <a:solidFill>
+                  <a:srgbClr val="FFFFFF"/>
+                </a:solidFill>
+                <a:latin typeface="PingFang SC"/>
+                <a:ea typeface="PingFang SC"/>
+                <a:cs typeface="PingFang SC"/>
+              </a:defRPr>
+            </a:pPr>
+            <a:r>
+              <a:rPr sz="1200" b="1">
+                <a:solidFill>
+                  <a:srgbClr val="FFFFFF"/>
+                </a:solidFill>
+                <a:latin typeface="PingFang SC"/>
+                <a:ea typeface="PingFang SC"/>
+                <a:cs typeface="PingFang SC"/>
+              </a:rPr>
+              <a:t>边界</a:t>
+            </a:r>
+          </a:p>
+        </p:txBody>
+      </p:sp>
+      <p:sp>
+        <p:nvSpPr>
+          <p:cNvPr id="55" name="">
+            <a:extLst xmlns:a="http://schemas.openxmlformats.org/drawingml/2006/main">
+              <a:ext uri="{FF2B5EF4-FFF2-40B4-BE49-F238E27FC236}">
+                <a16:creationId xmlns:a16="http://schemas.microsoft.com/office/drawing/2014/main" id="{B635AAB6-EC72-4C74-9659-00EA54D6AC43}"/>
+              </a:ext>
+            </a:extLst>
+          </p:cNvPr>
+          <p:cNvSpPr>
+            <a:spLocks xmlns:a="http://schemas.openxmlformats.org/drawingml/2006/main" noGrp="1"/>
+          </p:cNvSpPr>
+          <p:nvPr/>
+        </p:nvSpPr>
+        <p:spPr>
+          <a:xfrm xmlns:a="http://schemas.openxmlformats.org/drawingml/2006/main">
+            <a:off x="1657350" y="6324600"/>
+            <a:ext cx="7905750" cy="190500"/>
           </a:xfrm>
           <a:prstGeom xmlns:a="http://schemas.openxmlformats.org/drawingml/2006/main" prst="rect">
             <a:avLst/>
@@ -5882,7 +7802,7 @@
           <a:lstStyle xmlns:a="http://schemas.openxmlformats.org/drawingml/2006/main"/>
           <a:p xmlns:a="http://schemas.openxmlformats.org/drawingml/2006/main">
             <a:pPr algn="l">
-              <a:defRPr sz="1500" b="1">
+              <a:defRPr sz="1125" b="0">
                 <a:solidFill>
                   <a:srgbClr val="FFFFFF"/>
                 </a:solidFill>
@@ -5892,7 +7812,7 @@
               </a:defRPr>
             </a:pPr>
             <a:r>
-              <a:rPr sz="1500" b="1">
+              <a:rPr sz="1125" b="0">
                 <a:solidFill>
                   <a:srgbClr val="FFFFFF"/>
                 </a:solidFill>
@@ -5900,63 +7820,7 @@
                 <a:ea typeface="PingFang SC"/>
                 <a:cs typeface="PingFang SC"/>
               </a:rPr>
-              <a:t>结论边界</a:t>
-            </a:r>
-          </a:p>
-        </p:txBody>
-      </p:sp>
-      <p:sp>
-        <p:nvSpPr>
-          <p:cNvPr id="35" name="">
-            <a:extLst xmlns:a="http://schemas.openxmlformats.org/drawingml/2006/main">
-              <a:ext uri="{FF2B5EF4-FFF2-40B4-BE49-F238E27FC236}">
-                <a16:creationId xmlns:a16="http://schemas.microsoft.com/office/drawing/2014/main" id="{D963DE9D-A497-401C-B299-61089F5FDE04}"/>
-              </a:ext>
-            </a:extLst>
-          </p:cNvPr>
-          <p:cNvSpPr>
-            <a:spLocks xmlns:a="http://schemas.openxmlformats.org/drawingml/2006/main" noGrp="1"/>
-          </p:cNvSpPr>
-          <p:nvPr/>
-        </p:nvSpPr>
-        <p:spPr>
-          <a:xfrm xmlns:a="http://schemas.openxmlformats.org/drawingml/2006/main">
-            <a:off x="8705850" y="5391150"/>
-            <a:ext cx="1619250" cy="323850"/>
-          </a:xfrm>
-          <a:prstGeom xmlns:a="http://schemas.openxmlformats.org/drawingml/2006/main" prst="rect">
-            <a:avLst/>
-          </a:prstGeom>
-          <a:ln xmlns:a="http://schemas.openxmlformats.org/drawingml/2006/main">
-            <a:noFill/>
-          </a:ln>
-        </p:spPr>
-        <p:txBody>
-          <a:bodyPr xmlns:a="http://schemas.openxmlformats.org/drawingml/2006/main" lIns="0" tIns="0" rIns="0" bIns="0" anchor="t">
-            <a:normAutofit fontScale="100000"/>
-          </a:bodyPr>
-          <a:lstStyle xmlns:a="http://schemas.openxmlformats.org/drawingml/2006/main"/>
-          <a:p xmlns:a="http://schemas.openxmlformats.org/drawingml/2006/main">
-            <a:pPr algn="l">
-              <a:defRPr sz="1050" b="0">
-                <a:solidFill>
-                  <a:srgbClr val="FFFFFF"/>
-                </a:solidFill>
-                <a:latin typeface="PingFang SC"/>
-                <a:ea typeface="PingFang SC"/>
-                <a:cs typeface="PingFang SC"/>
-              </a:defRPr>
-            </a:pPr>
-            <a:r>
-              <a:rPr sz="1050" b="0">
-                <a:solidFill>
-                  <a:srgbClr val="FFFFFF"/>
-                </a:solidFill>
-                <a:latin typeface="PingFang SC"/>
-                <a:ea typeface="PingFang SC"/>
-                <a:cs typeface="PingFang SC"/>
-              </a:rPr>
-              <a:t>该页只说明链路改善，不扩大为全场景准确率结论。</a:t>
+              <a:t>只说明代表样本回放改善，不扩大为全场景准确率结论；线上误报和漏报仍需继续用真实样本扩充。</a:t>
             </a:r>
           </a:p>
         </p:txBody>
@@ -5964,7 +7828,7 @@
     </p:spTree>
     <p:extLst>
       <p:ext uri="{BB962C8B-B14F-4D97-AF65-F5344CB8AC3E}">
-        <p14:creationId xmlns:p14="http://schemas.microsoft.com/office/powerpoint/2010/main" val="53063656"/>
+        <p14:creationId xmlns:p14="http://schemas.microsoft.com/office/powerpoint/2010/main" val="407325186"/>
       </p:ext>
     </p:extLst>
   </p:cSld>
@@ -5995,7 +7859,7 @@
           <p:cNvPr id="1" name="">
             <a:extLst xmlns:a="http://schemas.openxmlformats.org/drawingml/2006/main">
               <a:ext uri="{FF2B5EF4-FFF2-40B4-BE49-F238E27FC236}">
-                <a16:creationId xmlns:a16="http://schemas.microsoft.com/office/drawing/2014/main" id="{42D57FB0-6E83-4623-A1F0-CE070F3DBB12}"/>
+                <a16:creationId xmlns:a16="http://schemas.microsoft.com/office/drawing/2014/main" id="{BD001891-D989-4A18-894B-AF907998F374}"/>
               </a:ext>
             </a:extLst>
           </p:cNvPr>
@@ -6025,7 +7889,7 @@
           <p:cNvPr id="2" name="">
             <a:extLst xmlns:a="http://schemas.openxmlformats.org/drawingml/2006/main">
               <a:ext uri="{FF2B5EF4-FFF2-40B4-BE49-F238E27FC236}">
-                <a16:creationId xmlns:a16="http://schemas.microsoft.com/office/drawing/2014/main" id="{080CD089-B5BD-4F50-BCE2-BD88365A9B82}"/>
+                <a16:creationId xmlns:a16="http://schemas.microsoft.com/office/drawing/2014/main" id="{1B97D590-D0EA-40E1-8A2F-9A7AF3A62FCD}"/>
               </a:ext>
             </a:extLst>
           </p:cNvPr>
@@ -6055,7 +7919,7 @@
           <p:cNvPr id="3" name="">
             <a:extLst xmlns:a="http://schemas.openxmlformats.org/drawingml/2006/main">
               <a:ext uri="{FF2B5EF4-FFF2-40B4-BE49-F238E27FC236}">
-                <a16:creationId xmlns:a16="http://schemas.microsoft.com/office/drawing/2014/main" id="{C36A17D0-D780-4A80-A6C9-70119AB09364}"/>
+                <a16:creationId xmlns:a16="http://schemas.microsoft.com/office/drawing/2014/main" id="{68891E8A-EE55-4FD8-8289-EDF9D0B53540}"/>
               </a:ext>
             </a:extLst>
           </p:cNvPr>
@@ -6111,7 +7975,7 @@
           <p:cNvPr id="4" name="">
             <a:extLst xmlns:a="http://schemas.openxmlformats.org/drawingml/2006/main">
               <a:ext uri="{FF2B5EF4-FFF2-40B4-BE49-F238E27FC236}">
-                <a16:creationId xmlns:a16="http://schemas.microsoft.com/office/drawing/2014/main" id="{FA3FDDC7-6F89-4133-B533-E219E956054E}"/>
+                <a16:creationId xmlns:a16="http://schemas.microsoft.com/office/drawing/2014/main" id="{503934F9-8386-4CC5-B5D0-A13F41889DC8}"/>
               </a:ext>
             </a:extLst>
           </p:cNvPr>
@@ -6167,7 +8031,7 @@
           <p:cNvPr id="5" name="">
             <a:extLst xmlns:a="http://schemas.openxmlformats.org/drawingml/2006/main">
               <a:ext uri="{FF2B5EF4-FFF2-40B4-BE49-F238E27FC236}">
-                <a16:creationId xmlns:a16="http://schemas.microsoft.com/office/drawing/2014/main" id="{9935C523-2BF2-4E11-80E3-F18E76BD4BDF}"/>
+                <a16:creationId xmlns:a16="http://schemas.microsoft.com/office/drawing/2014/main" id="{C6E9EED4-F2B9-44E1-ABC2-9F0802213467}"/>
               </a:ext>
             </a:extLst>
           </p:cNvPr>
@@ -6197,7 +8061,7 @@
           <p:cNvPr id="6" name="">
             <a:extLst xmlns:a="http://schemas.openxmlformats.org/drawingml/2006/main">
               <a:ext uri="{FF2B5EF4-FFF2-40B4-BE49-F238E27FC236}">
-                <a16:creationId xmlns:a16="http://schemas.microsoft.com/office/drawing/2014/main" id="{10ECEB50-740F-462E-BA1F-578F7001EBAA}"/>
+                <a16:creationId xmlns:a16="http://schemas.microsoft.com/office/drawing/2014/main" id="{330E162E-F384-4E23-A313-D28F2B84F7D1}"/>
               </a:ext>
             </a:extLst>
           </p:cNvPr>
@@ -6253,7 +8117,7 @@
           <p:cNvPr id="7" name="">
             <a:extLst xmlns:a="http://schemas.openxmlformats.org/drawingml/2006/main">
               <a:ext uri="{FF2B5EF4-FFF2-40B4-BE49-F238E27FC236}">
-                <a16:creationId xmlns:a16="http://schemas.microsoft.com/office/drawing/2014/main" id="{0037AAEB-7105-4D25-92A7-70255279A319}"/>
+                <a16:creationId xmlns:a16="http://schemas.microsoft.com/office/drawing/2014/main" id="{6258017C-A5D7-4162-9569-BF16304334CF}"/>
               </a:ext>
             </a:extLst>
           </p:cNvPr>
@@ -6287,7 +8151,7 @@
           <p:cNvPr id="8" name="">
             <a:extLst xmlns:a="http://schemas.openxmlformats.org/drawingml/2006/main">
               <a:ext uri="{FF2B5EF4-FFF2-40B4-BE49-F238E27FC236}">
-                <a16:creationId xmlns:a16="http://schemas.microsoft.com/office/drawing/2014/main" id="{0172EEC0-2621-4825-9B91-35D54E9489CE}"/>
+                <a16:creationId xmlns:a16="http://schemas.microsoft.com/office/drawing/2014/main" id="{C0E26276-910D-4EBA-84FC-1E6E838887EB}"/>
               </a:ext>
             </a:extLst>
           </p:cNvPr>
@@ -6317,7 +8181,7 @@
           <p:cNvPr id="9" name="">
             <a:extLst xmlns:a="http://schemas.openxmlformats.org/drawingml/2006/main">
               <a:ext uri="{FF2B5EF4-FFF2-40B4-BE49-F238E27FC236}">
-                <a16:creationId xmlns:a16="http://schemas.microsoft.com/office/drawing/2014/main" id="{65D05FEF-3E63-4BC7-BAF8-AC56B98F0A60}"/>
+                <a16:creationId xmlns:a16="http://schemas.microsoft.com/office/drawing/2014/main" id="{D34EAF79-BA17-4C16-8BA3-544EE9B1FE42}"/>
               </a:ext>
             </a:extLst>
           </p:cNvPr>
@@ -6373,7 +8237,7 @@
           <p:cNvPr id="10" name="">
             <a:extLst xmlns:a="http://schemas.openxmlformats.org/drawingml/2006/main">
               <a:ext uri="{FF2B5EF4-FFF2-40B4-BE49-F238E27FC236}">
-                <a16:creationId xmlns:a16="http://schemas.microsoft.com/office/drawing/2014/main" id="{02AC8BAD-B363-47AF-8BA5-AFC546081E20}"/>
+                <a16:creationId xmlns:a16="http://schemas.microsoft.com/office/drawing/2014/main" id="{4F8D5AB6-EF89-4859-AFA9-DC11F8980D9B}"/>
               </a:ext>
             </a:extLst>
           </p:cNvPr>
@@ -6429,7 +8293,7 @@
           <p:cNvPr id="11" name="">
             <a:extLst xmlns:a="http://schemas.openxmlformats.org/drawingml/2006/main">
               <a:ext uri="{FF2B5EF4-FFF2-40B4-BE49-F238E27FC236}">
-                <a16:creationId xmlns:a16="http://schemas.microsoft.com/office/drawing/2014/main" id="{888BB30A-4E3D-4D52-B000-BE66CC1DA84C}"/>
+                <a16:creationId xmlns:a16="http://schemas.microsoft.com/office/drawing/2014/main" id="{6EDDB43F-D70E-4F0A-9867-4D89FB4628E8}"/>
               </a:ext>
             </a:extLst>
           </p:cNvPr>
@@ -6485,7 +8349,7 @@
           <p:cNvPr id="12" name="">
             <a:extLst xmlns:a="http://schemas.openxmlformats.org/drawingml/2006/main">
               <a:ext uri="{FF2B5EF4-FFF2-40B4-BE49-F238E27FC236}">
-                <a16:creationId xmlns:a16="http://schemas.microsoft.com/office/drawing/2014/main" id="{F6EC9F54-9C90-4C57-AB2F-F78E6CF0F3CB}"/>
+                <a16:creationId xmlns:a16="http://schemas.microsoft.com/office/drawing/2014/main" id="{304BB783-A606-4B07-AE4C-1A1AD3A155EF}"/>
               </a:ext>
             </a:extLst>
           </p:cNvPr>
@@ -6519,7 +8383,7 @@
           <p:cNvPr id="13" name="">
             <a:extLst xmlns:a="http://schemas.openxmlformats.org/drawingml/2006/main">
               <a:ext uri="{FF2B5EF4-FFF2-40B4-BE49-F238E27FC236}">
-                <a16:creationId xmlns:a16="http://schemas.microsoft.com/office/drawing/2014/main" id="{F3E89D0E-B692-4062-A49B-78063345AE38}"/>
+                <a16:creationId xmlns:a16="http://schemas.microsoft.com/office/drawing/2014/main" id="{E97B0EBD-43D1-432C-8E87-5DFCC38F4C23}"/>
               </a:ext>
             </a:extLst>
           </p:cNvPr>
@@ -6549,7 +8413,7 @@
           <p:cNvPr id="14" name="">
             <a:extLst xmlns:a="http://schemas.openxmlformats.org/drawingml/2006/main">
               <a:ext uri="{FF2B5EF4-FFF2-40B4-BE49-F238E27FC236}">
-                <a16:creationId xmlns:a16="http://schemas.microsoft.com/office/drawing/2014/main" id="{00D00DAE-7297-4CAD-9C61-FD12F0A7ED8E}"/>
+                <a16:creationId xmlns:a16="http://schemas.microsoft.com/office/drawing/2014/main" id="{8E3252EA-60B3-4A7D-88CC-88693E2D6544}"/>
               </a:ext>
             </a:extLst>
           </p:cNvPr>
@@ -6605,7 +8469,7 @@
           <p:cNvPr id="15" name="">
             <a:extLst xmlns:a="http://schemas.openxmlformats.org/drawingml/2006/main">
               <a:ext uri="{FF2B5EF4-FFF2-40B4-BE49-F238E27FC236}">
-                <a16:creationId xmlns:a16="http://schemas.microsoft.com/office/drawing/2014/main" id="{2F591DBC-CF86-4D5E-AC5A-ED3A406F7B6B}"/>
+                <a16:creationId xmlns:a16="http://schemas.microsoft.com/office/drawing/2014/main" id="{78859485-019E-405D-96F7-1D154F0A0639}"/>
               </a:ext>
             </a:extLst>
           </p:cNvPr>
@@ -6661,7 +8525,7 @@
           <p:cNvPr id="16" name="">
             <a:extLst xmlns:a="http://schemas.openxmlformats.org/drawingml/2006/main">
               <a:ext uri="{FF2B5EF4-FFF2-40B4-BE49-F238E27FC236}">
-                <a16:creationId xmlns:a16="http://schemas.microsoft.com/office/drawing/2014/main" id="{9588C777-F230-4704-B34E-D18A9BC2B5C2}"/>
+                <a16:creationId xmlns:a16="http://schemas.microsoft.com/office/drawing/2014/main" id="{0767D82A-3CE5-4ADE-B7F7-099611E365B3}"/>
               </a:ext>
             </a:extLst>
           </p:cNvPr>
@@ -6717,7 +8581,7 @@
           <p:cNvPr id="17" name="">
             <a:extLst xmlns:a="http://schemas.openxmlformats.org/drawingml/2006/main">
               <a:ext uri="{FF2B5EF4-FFF2-40B4-BE49-F238E27FC236}">
-                <a16:creationId xmlns:a16="http://schemas.microsoft.com/office/drawing/2014/main" id="{7ABC4565-1517-4212-AB08-9039A28FC27D}"/>
+                <a16:creationId xmlns:a16="http://schemas.microsoft.com/office/drawing/2014/main" id="{A1DD0EE8-C33B-4CEE-9706-84DB6DF1CD63}"/>
               </a:ext>
             </a:extLst>
           </p:cNvPr>
@@ -6747,7 +8611,7 @@
           <p:cNvPr id="18" name="">
             <a:extLst xmlns:a="http://schemas.openxmlformats.org/drawingml/2006/main">
               <a:ext uri="{FF2B5EF4-FFF2-40B4-BE49-F238E27FC236}">
-                <a16:creationId xmlns:a16="http://schemas.microsoft.com/office/drawing/2014/main" id="{47E097F6-3B7C-4C7B-ABB8-F29F42E3BBD1}"/>
+                <a16:creationId xmlns:a16="http://schemas.microsoft.com/office/drawing/2014/main" id="{E19F37BF-EC56-4918-B2A1-208EB149E9A2}"/>
               </a:ext>
             </a:extLst>
           </p:cNvPr>
@@ -6803,7 +8667,7 @@
           <p:cNvPr id="19" name="">
             <a:extLst xmlns:a="http://schemas.openxmlformats.org/drawingml/2006/main">
               <a:ext uri="{FF2B5EF4-FFF2-40B4-BE49-F238E27FC236}">
-                <a16:creationId xmlns:a16="http://schemas.microsoft.com/office/drawing/2014/main" id="{7834524A-4993-420D-9C2C-AFD4B5E70B31}"/>
+                <a16:creationId xmlns:a16="http://schemas.microsoft.com/office/drawing/2014/main" id="{D62A9930-D011-4156-A31B-DBAB84CCF541}"/>
               </a:ext>
             </a:extLst>
           </p:cNvPr>
@@ -6859,7 +8723,7 @@
           <p:cNvPr id="20" name="">
             <a:extLst xmlns:a="http://schemas.openxmlformats.org/drawingml/2006/main">
               <a:ext uri="{FF2B5EF4-FFF2-40B4-BE49-F238E27FC236}">
-                <a16:creationId xmlns:a16="http://schemas.microsoft.com/office/drawing/2014/main" id="{D41050E3-FE8B-4A64-AD73-F3107DFBA24E}"/>
+                <a16:creationId xmlns:a16="http://schemas.microsoft.com/office/drawing/2014/main" id="{3CFC32A5-0549-457A-A7C8-81A55AF4F782}"/>
               </a:ext>
             </a:extLst>
           </p:cNvPr>
@@ -6913,7 +8777,7 @@
     </p:spTree>
     <p:extLst>
       <p:ext uri="{BB962C8B-B14F-4D97-AF65-F5344CB8AC3E}">
-        <p14:creationId xmlns:p14="http://schemas.microsoft.com/office/powerpoint/2010/main" val="18377337"/>
+        <p14:creationId xmlns:p14="http://schemas.microsoft.com/office/powerpoint/2010/main" val="2042741053"/>
       </p:ext>
     </p:extLst>
   </p:cSld>
@@ -6944,7 +8808,7 @@
           <p:cNvPr id="1" name="">
             <a:extLst xmlns:a="http://schemas.openxmlformats.org/drawingml/2006/main">
               <a:ext uri="{FF2B5EF4-FFF2-40B4-BE49-F238E27FC236}">
-                <a16:creationId xmlns:a16="http://schemas.microsoft.com/office/drawing/2014/main" id="{B30318EA-5BF9-45F7-B963-97F82035C227}"/>
+                <a16:creationId xmlns:a16="http://schemas.microsoft.com/office/drawing/2014/main" id="{840A62C1-5ED8-4A9F-B5C8-4269CD4E2050}"/>
               </a:ext>
             </a:extLst>
           </p:cNvPr>
@@ -6974,7 +8838,7 @@
           <p:cNvPr id="2" name="">
             <a:extLst xmlns:a="http://schemas.openxmlformats.org/drawingml/2006/main">
               <a:ext uri="{FF2B5EF4-FFF2-40B4-BE49-F238E27FC236}">
-                <a16:creationId xmlns:a16="http://schemas.microsoft.com/office/drawing/2014/main" id="{6C3C65CF-42F0-4FFD-8795-83A3936CE3CC}"/>
+                <a16:creationId xmlns:a16="http://schemas.microsoft.com/office/drawing/2014/main" id="{A589E0A3-CF1A-4E2E-A54F-3FAB38EB2105}"/>
               </a:ext>
             </a:extLst>
           </p:cNvPr>
@@ -7004,7 +8868,7 @@
           <p:cNvPr id="3" name="">
             <a:extLst xmlns:a="http://schemas.openxmlformats.org/drawingml/2006/main">
               <a:ext uri="{FF2B5EF4-FFF2-40B4-BE49-F238E27FC236}">
-                <a16:creationId xmlns:a16="http://schemas.microsoft.com/office/drawing/2014/main" id="{76E27CFD-0DF2-4D4B-ABD6-3BC86625A5EA}"/>
+                <a16:creationId xmlns:a16="http://schemas.microsoft.com/office/drawing/2014/main" id="{958B9F1C-0965-46B6-8785-01C9B1081CE9}"/>
               </a:ext>
             </a:extLst>
           </p:cNvPr>
@@ -7060,7 +8924,7 @@
           <p:cNvPr id="4" name="">
             <a:extLst xmlns:a="http://schemas.openxmlformats.org/drawingml/2006/main">
               <a:ext uri="{FF2B5EF4-FFF2-40B4-BE49-F238E27FC236}">
-                <a16:creationId xmlns:a16="http://schemas.microsoft.com/office/drawing/2014/main" id="{38B51A7C-2D69-410A-9D9C-56C3B7A81DCE}"/>
+                <a16:creationId xmlns:a16="http://schemas.microsoft.com/office/drawing/2014/main" id="{8C0F95F4-83C6-44BD-AEAF-826A06610F98}"/>
               </a:ext>
             </a:extLst>
           </p:cNvPr>
@@ -7116,7 +8980,7 @@
           <p:cNvPr id="5" name="">
             <a:extLst xmlns:a="http://schemas.openxmlformats.org/drawingml/2006/main">
               <a:ext uri="{FF2B5EF4-FFF2-40B4-BE49-F238E27FC236}">
-                <a16:creationId xmlns:a16="http://schemas.microsoft.com/office/drawing/2014/main" id="{64E18188-5233-4788-A3A9-88101C556AC3}"/>
+                <a16:creationId xmlns:a16="http://schemas.microsoft.com/office/drawing/2014/main" id="{806045F2-1037-4B35-A2C9-8DDB792A605D}"/>
               </a:ext>
             </a:extLst>
           </p:cNvPr>
@@ -7146,7 +9010,7 @@
           <p:cNvPr id="6" name="">
             <a:extLst xmlns:a="http://schemas.openxmlformats.org/drawingml/2006/main">
               <a:ext uri="{FF2B5EF4-FFF2-40B4-BE49-F238E27FC236}">
-                <a16:creationId xmlns:a16="http://schemas.microsoft.com/office/drawing/2014/main" id="{C6C5E068-E44C-4D89-BB4A-A84B4F2BBB56}"/>
+                <a16:creationId xmlns:a16="http://schemas.microsoft.com/office/drawing/2014/main" id="{D18A0125-6CDF-4A4F-9E10-275794C94CD9}"/>
               </a:ext>
             </a:extLst>
           </p:cNvPr>
@@ -7202,7 +9066,7 @@
           <p:cNvPr id="7" name="">
             <a:extLst xmlns:a="http://schemas.openxmlformats.org/drawingml/2006/main">
               <a:ext uri="{FF2B5EF4-FFF2-40B4-BE49-F238E27FC236}">
-                <a16:creationId xmlns:a16="http://schemas.microsoft.com/office/drawing/2014/main" id="{56E4F14E-D3E3-448F-A92F-4E05810EB258}"/>
+                <a16:creationId xmlns:a16="http://schemas.microsoft.com/office/drawing/2014/main" id="{B394EEA9-AEAF-4A8F-91A0-7CB46645C2EC}"/>
               </a:ext>
             </a:extLst>
           </p:cNvPr>
@@ -7236,7 +9100,7 @@
           <p:cNvPr id="8" name="">
             <a:extLst xmlns:a="http://schemas.openxmlformats.org/drawingml/2006/main">
               <a:ext uri="{FF2B5EF4-FFF2-40B4-BE49-F238E27FC236}">
-                <a16:creationId xmlns:a16="http://schemas.microsoft.com/office/drawing/2014/main" id="{FC1BD8EB-B25F-48E7-B544-DA4AE6F84ED4}"/>
+                <a16:creationId xmlns:a16="http://schemas.microsoft.com/office/drawing/2014/main" id="{E34A2550-1FA1-4559-B4E6-DADC2540EA00}"/>
               </a:ext>
             </a:extLst>
           </p:cNvPr>
@@ -7266,7 +9130,7 @@
           <p:cNvPr id="9" name="">
             <a:extLst xmlns:a="http://schemas.openxmlformats.org/drawingml/2006/main">
               <a:ext uri="{FF2B5EF4-FFF2-40B4-BE49-F238E27FC236}">
-                <a16:creationId xmlns:a16="http://schemas.microsoft.com/office/drawing/2014/main" id="{8BE792E6-984A-4178-8307-02C0C0B7C9CE}"/>
+                <a16:creationId xmlns:a16="http://schemas.microsoft.com/office/drawing/2014/main" id="{4E629F2E-972B-4477-9DB0-254996FE9E2A}"/>
               </a:ext>
             </a:extLst>
           </p:cNvPr>
@@ -7322,7 +9186,7 @@
           <p:cNvPr id="10" name="">
             <a:extLst xmlns:a="http://schemas.openxmlformats.org/drawingml/2006/main">
               <a:ext uri="{FF2B5EF4-FFF2-40B4-BE49-F238E27FC236}">
-                <a16:creationId xmlns:a16="http://schemas.microsoft.com/office/drawing/2014/main" id="{773E3F00-9CCF-4FAC-8597-6AE88EFA4B20}"/>
+                <a16:creationId xmlns:a16="http://schemas.microsoft.com/office/drawing/2014/main" id="{4FDF17DE-6FDE-4765-B10F-7F8960F6152E}"/>
               </a:ext>
             </a:extLst>
           </p:cNvPr>
@@ -7378,7 +9242,7 @@
           <p:cNvPr id="11" name="">
             <a:extLst xmlns:a="http://schemas.openxmlformats.org/drawingml/2006/main">
               <a:ext uri="{FF2B5EF4-FFF2-40B4-BE49-F238E27FC236}">
-                <a16:creationId xmlns:a16="http://schemas.microsoft.com/office/drawing/2014/main" id="{455AEF80-B0EF-4A4E-A5DF-A6A88ACB0FBB}"/>
+                <a16:creationId xmlns:a16="http://schemas.microsoft.com/office/drawing/2014/main" id="{7C1CF100-25F6-4DB8-9A04-B0CAA11CB37D}"/>
               </a:ext>
             </a:extLst>
           </p:cNvPr>
@@ -7434,7 +9298,7 @@
           <p:cNvPr id="12" name="">
             <a:extLst xmlns:a="http://schemas.openxmlformats.org/drawingml/2006/main">
               <a:ext uri="{FF2B5EF4-FFF2-40B4-BE49-F238E27FC236}">
-                <a16:creationId xmlns:a16="http://schemas.microsoft.com/office/drawing/2014/main" id="{BEDAE072-87B0-40E8-B3DD-AEEB8B7F314E}"/>
+                <a16:creationId xmlns:a16="http://schemas.microsoft.com/office/drawing/2014/main" id="{B688B708-CDCA-43EE-BFCD-A26517353BC8}"/>
               </a:ext>
             </a:extLst>
           </p:cNvPr>
@@ -7468,7 +9332,7 @@
           <p:cNvPr id="13" name="">
             <a:extLst xmlns:a="http://schemas.openxmlformats.org/drawingml/2006/main">
               <a:ext uri="{FF2B5EF4-FFF2-40B4-BE49-F238E27FC236}">
-                <a16:creationId xmlns:a16="http://schemas.microsoft.com/office/drawing/2014/main" id="{80BC832E-2A9B-4E75-B443-39023C505731}"/>
+                <a16:creationId xmlns:a16="http://schemas.microsoft.com/office/drawing/2014/main" id="{EA418AF9-9A99-4A9A-BE15-9A291E449D25}"/>
               </a:ext>
             </a:extLst>
           </p:cNvPr>
@@ -7498,7 +9362,7 @@
           <p:cNvPr id="14" name="">
             <a:extLst xmlns:a="http://schemas.openxmlformats.org/drawingml/2006/main">
               <a:ext uri="{FF2B5EF4-FFF2-40B4-BE49-F238E27FC236}">
-                <a16:creationId xmlns:a16="http://schemas.microsoft.com/office/drawing/2014/main" id="{50C83387-C6CB-410A-9A4E-43155208B7B1}"/>
+                <a16:creationId xmlns:a16="http://schemas.microsoft.com/office/drawing/2014/main" id="{70791EDE-257D-4CA3-B8A3-B6EF562115F6}"/>
               </a:ext>
             </a:extLst>
           </p:cNvPr>
@@ -7554,7 +9418,7 @@
           <p:cNvPr id="15" name="">
             <a:extLst xmlns:a="http://schemas.openxmlformats.org/drawingml/2006/main">
               <a:ext uri="{FF2B5EF4-FFF2-40B4-BE49-F238E27FC236}">
-                <a16:creationId xmlns:a16="http://schemas.microsoft.com/office/drawing/2014/main" id="{AE741232-8D02-462F-B3A8-525A61D88CD1}"/>
+                <a16:creationId xmlns:a16="http://schemas.microsoft.com/office/drawing/2014/main" id="{0E2AF769-8CE7-4B89-A085-B7C8400A254E}"/>
               </a:ext>
             </a:extLst>
           </p:cNvPr>
@@ -7610,7 +9474,7 @@
           <p:cNvPr id="16" name="">
             <a:extLst xmlns:a="http://schemas.openxmlformats.org/drawingml/2006/main">
               <a:ext uri="{FF2B5EF4-FFF2-40B4-BE49-F238E27FC236}">
-                <a16:creationId xmlns:a16="http://schemas.microsoft.com/office/drawing/2014/main" id="{58B21C91-6E6B-4BC6-BE42-21BC8356EA21}"/>
+                <a16:creationId xmlns:a16="http://schemas.microsoft.com/office/drawing/2014/main" id="{80DB5E28-9C65-453D-843D-69A316F7D23E}"/>
               </a:ext>
             </a:extLst>
           </p:cNvPr>
@@ -7666,7 +9530,7 @@
           <p:cNvPr id="17" name="">
             <a:extLst xmlns:a="http://schemas.openxmlformats.org/drawingml/2006/main">
               <a:ext uri="{FF2B5EF4-FFF2-40B4-BE49-F238E27FC236}">
-                <a16:creationId xmlns:a16="http://schemas.microsoft.com/office/drawing/2014/main" id="{F339813E-F531-419B-978E-A47ABAA5BF14}"/>
+                <a16:creationId xmlns:a16="http://schemas.microsoft.com/office/drawing/2014/main" id="{AB8D188E-6E96-4D8B-ADFB-C0BD46DFC378}"/>
               </a:ext>
             </a:extLst>
           </p:cNvPr>
@@ -7700,7 +9564,7 @@
           <p:cNvPr id="18" name="">
             <a:extLst xmlns:a="http://schemas.openxmlformats.org/drawingml/2006/main">
               <a:ext uri="{FF2B5EF4-FFF2-40B4-BE49-F238E27FC236}">
-                <a16:creationId xmlns:a16="http://schemas.microsoft.com/office/drawing/2014/main" id="{B6A4FC83-0814-481B-A11C-A27C4C5F6059}"/>
+                <a16:creationId xmlns:a16="http://schemas.microsoft.com/office/drawing/2014/main" id="{D32610D7-A3C1-43CF-A1E5-0FC5DCA42FF3}"/>
               </a:ext>
             </a:extLst>
           </p:cNvPr>
@@ -7730,7 +9594,7 @@
           <p:cNvPr id="19" name="">
             <a:extLst xmlns:a="http://schemas.openxmlformats.org/drawingml/2006/main">
               <a:ext uri="{FF2B5EF4-FFF2-40B4-BE49-F238E27FC236}">
-                <a16:creationId xmlns:a16="http://schemas.microsoft.com/office/drawing/2014/main" id="{57A898E6-2778-48B9-88BE-14452C5DD23A}"/>
+                <a16:creationId xmlns:a16="http://schemas.microsoft.com/office/drawing/2014/main" id="{6C4EFE9E-DC94-409A-B99E-4561B20C9BD3}"/>
               </a:ext>
             </a:extLst>
           </p:cNvPr>
@@ -7786,7 +9650,7 @@
           <p:cNvPr id="20" name="">
             <a:extLst xmlns:a="http://schemas.openxmlformats.org/drawingml/2006/main">
               <a:ext uri="{FF2B5EF4-FFF2-40B4-BE49-F238E27FC236}">
-                <a16:creationId xmlns:a16="http://schemas.microsoft.com/office/drawing/2014/main" id="{7767A0AB-2BBA-4378-9C06-69F16594A470}"/>
+                <a16:creationId xmlns:a16="http://schemas.microsoft.com/office/drawing/2014/main" id="{65C851FF-1175-457F-BC3F-A3461F3F6FC5}"/>
               </a:ext>
             </a:extLst>
           </p:cNvPr>
@@ -7842,7 +9706,7 @@
           <p:cNvPr id="21" name="">
             <a:extLst xmlns:a="http://schemas.openxmlformats.org/drawingml/2006/main">
               <a:ext uri="{FF2B5EF4-FFF2-40B4-BE49-F238E27FC236}">
-                <a16:creationId xmlns:a16="http://schemas.microsoft.com/office/drawing/2014/main" id="{2F7731C8-7A2A-4958-9203-FCE914DC3EC3}"/>
+                <a16:creationId xmlns:a16="http://schemas.microsoft.com/office/drawing/2014/main" id="{00E284C9-3D69-4166-A7F5-E43114F51F33}"/>
               </a:ext>
             </a:extLst>
           </p:cNvPr>
@@ -7898,7 +9762,7 @@
           <p:cNvPr id="22" name="">
             <a:extLst xmlns:a="http://schemas.openxmlformats.org/drawingml/2006/main">
               <a:ext uri="{FF2B5EF4-FFF2-40B4-BE49-F238E27FC236}">
-                <a16:creationId xmlns:a16="http://schemas.microsoft.com/office/drawing/2014/main" id="{5D73447C-730C-423D-B31D-07F143DC0EA3}"/>
+                <a16:creationId xmlns:a16="http://schemas.microsoft.com/office/drawing/2014/main" id="{A67FC8B9-B971-4373-9C48-9993BD44AC16}"/>
               </a:ext>
             </a:extLst>
           </p:cNvPr>
@@ -7928,7 +9792,7 @@
           <p:cNvPr id="23" name="">
             <a:extLst xmlns:a="http://schemas.openxmlformats.org/drawingml/2006/main">
               <a:ext uri="{FF2B5EF4-FFF2-40B4-BE49-F238E27FC236}">
-                <a16:creationId xmlns:a16="http://schemas.microsoft.com/office/drawing/2014/main" id="{1B3A8AC5-E05A-4525-8D20-FAC564D99E3D}"/>
+                <a16:creationId xmlns:a16="http://schemas.microsoft.com/office/drawing/2014/main" id="{2350DB37-EEC6-475B-B9CE-15657745B26F}"/>
               </a:ext>
             </a:extLst>
           </p:cNvPr>
@@ -7984,7 +9848,7 @@
           <p:cNvPr id="24" name="">
             <a:extLst xmlns:a="http://schemas.openxmlformats.org/drawingml/2006/main">
               <a:ext uri="{FF2B5EF4-FFF2-40B4-BE49-F238E27FC236}">
-                <a16:creationId xmlns:a16="http://schemas.microsoft.com/office/drawing/2014/main" id="{2F0D1DC4-3D79-4761-BE97-49FC914F0619}"/>
+                <a16:creationId xmlns:a16="http://schemas.microsoft.com/office/drawing/2014/main" id="{ABB5BF34-6837-407E-9EF1-93F91E5624F0}"/>
               </a:ext>
             </a:extLst>
           </p:cNvPr>
@@ -8038,7 +9902,7 @@
     </p:spTree>
     <p:extLst>
       <p:ext uri="{BB962C8B-B14F-4D97-AF65-F5344CB8AC3E}">
-        <p14:creationId xmlns:p14="http://schemas.microsoft.com/office/powerpoint/2010/main" val="1809381805"/>
+        <p14:creationId xmlns:p14="http://schemas.microsoft.com/office/powerpoint/2010/main" val="1109093723"/>
       </p:ext>
     </p:extLst>
   </p:cSld>
@@ -8069,7 +9933,7 @@
           <p:cNvPr id="1" name="">
             <a:extLst xmlns:a="http://schemas.openxmlformats.org/drawingml/2006/main">
               <a:ext uri="{FF2B5EF4-FFF2-40B4-BE49-F238E27FC236}">
-                <a16:creationId xmlns:a16="http://schemas.microsoft.com/office/drawing/2014/main" id="{D9A70353-BEFB-4E17-8B6A-F1844ED2F052}"/>
+                <a16:creationId xmlns:a16="http://schemas.microsoft.com/office/drawing/2014/main" id="{B02977E5-C6D0-468E-AA91-7FF2EC48FB45}"/>
               </a:ext>
             </a:extLst>
           </p:cNvPr>
@@ -8099,7 +9963,7 @@
           <p:cNvPr id="2" name="">
             <a:extLst xmlns:a="http://schemas.openxmlformats.org/drawingml/2006/main">
               <a:ext uri="{FF2B5EF4-FFF2-40B4-BE49-F238E27FC236}">
-                <a16:creationId xmlns:a16="http://schemas.microsoft.com/office/drawing/2014/main" id="{A19BEA4B-6BBE-4C00-ADFF-2DBB327D3BDF}"/>
+                <a16:creationId xmlns:a16="http://schemas.microsoft.com/office/drawing/2014/main" id="{D9A63ABD-9865-4065-8D85-AB7FC15AD711}"/>
               </a:ext>
             </a:extLst>
           </p:cNvPr>
@@ -8129,7 +9993,7 @@
           <p:cNvPr id="3" name="">
             <a:extLst xmlns:a="http://schemas.openxmlformats.org/drawingml/2006/main">
               <a:ext uri="{FF2B5EF4-FFF2-40B4-BE49-F238E27FC236}">
-                <a16:creationId xmlns:a16="http://schemas.microsoft.com/office/drawing/2014/main" id="{1B2BBC6F-15BA-479B-9257-2C90E41BDDAB}"/>
+                <a16:creationId xmlns:a16="http://schemas.microsoft.com/office/drawing/2014/main" id="{2262282C-5DD1-4BEE-91D0-F5A3E44F5367}"/>
               </a:ext>
             </a:extLst>
           </p:cNvPr>
@@ -8185,7 +10049,7 @@
           <p:cNvPr id="4" name="">
             <a:extLst xmlns:a="http://schemas.openxmlformats.org/drawingml/2006/main">
               <a:ext uri="{FF2B5EF4-FFF2-40B4-BE49-F238E27FC236}">
-                <a16:creationId xmlns:a16="http://schemas.microsoft.com/office/drawing/2014/main" id="{11F6EF93-AE70-4495-B233-ECCA74909188}"/>
+                <a16:creationId xmlns:a16="http://schemas.microsoft.com/office/drawing/2014/main" id="{A46CC521-29C8-48EC-900D-8B8B320BDA92}"/>
               </a:ext>
             </a:extLst>
           </p:cNvPr>
@@ -8241,7 +10105,7 @@
           <p:cNvPr id="5" name="">
             <a:extLst xmlns:a="http://schemas.openxmlformats.org/drawingml/2006/main">
               <a:ext uri="{FF2B5EF4-FFF2-40B4-BE49-F238E27FC236}">
-                <a16:creationId xmlns:a16="http://schemas.microsoft.com/office/drawing/2014/main" id="{939A92F0-667B-42BB-9DFC-C74467FBC147}"/>
+                <a16:creationId xmlns:a16="http://schemas.microsoft.com/office/drawing/2014/main" id="{2C3E7B4E-8BF7-4F08-A9B4-3249C7F09E4B}"/>
               </a:ext>
             </a:extLst>
           </p:cNvPr>
@@ -8271,7 +10135,7 @@
           <p:cNvPr id="6" name="">
             <a:extLst xmlns:a="http://schemas.openxmlformats.org/drawingml/2006/main">
               <a:ext uri="{FF2B5EF4-FFF2-40B4-BE49-F238E27FC236}">
-                <a16:creationId xmlns:a16="http://schemas.microsoft.com/office/drawing/2014/main" id="{D494CFDE-2C89-478F-88CB-DEEBC9702B27}"/>
+                <a16:creationId xmlns:a16="http://schemas.microsoft.com/office/drawing/2014/main" id="{AD13B421-FF77-4B38-A67A-390044C88716}"/>
               </a:ext>
             </a:extLst>
           </p:cNvPr>
@@ -8327,7 +10191,7 @@
           <p:cNvPr id="7" name="">
             <a:extLst xmlns:a="http://schemas.openxmlformats.org/drawingml/2006/main">
               <a:ext uri="{FF2B5EF4-FFF2-40B4-BE49-F238E27FC236}">
-                <a16:creationId xmlns:a16="http://schemas.microsoft.com/office/drawing/2014/main" id="{C6154AA8-E656-4F06-B492-A86D031E195B}"/>
+                <a16:creationId xmlns:a16="http://schemas.microsoft.com/office/drawing/2014/main" id="{BE85233C-98F9-4A05-B21E-988079F0DB53}"/>
               </a:ext>
             </a:extLst>
           </p:cNvPr>
@@ -8357,7 +10221,7 @@
           <p:cNvPr id="8" name="">
             <a:extLst xmlns:a="http://schemas.openxmlformats.org/drawingml/2006/main">
               <a:ext uri="{FF2B5EF4-FFF2-40B4-BE49-F238E27FC236}">
-                <a16:creationId xmlns:a16="http://schemas.microsoft.com/office/drawing/2014/main" id="{8DF80551-2C98-45AD-9DFD-433A03100406}"/>
+                <a16:creationId xmlns:a16="http://schemas.microsoft.com/office/drawing/2014/main" id="{B54CB9E5-E538-4E3E-B2FB-552D85C3C505}"/>
               </a:ext>
             </a:extLst>
           </p:cNvPr>
@@ -8413,7 +10277,7 @@
           <p:cNvPr id="9" name="">
             <a:extLst xmlns:a="http://schemas.openxmlformats.org/drawingml/2006/main">
               <a:ext uri="{FF2B5EF4-FFF2-40B4-BE49-F238E27FC236}">
-                <a16:creationId xmlns:a16="http://schemas.microsoft.com/office/drawing/2014/main" id="{BFD9CE40-8435-4751-BB1E-B9F8EF8F7173}"/>
+                <a16:creationId xmlns:a16="http://schemas.microsoft.com/office/drawing/2014/main" id="{1D312F97-E778-4006-B455-9030D918A76C}"/>
               </a:ext>
             </a:extLst>
           </p:cNvPr>
@@ -8469,7 +10333,7 @@
           <p:cNvPr id="10" name="">
             <a:extLst xmlns:a="http://schemas.openxmlformats.org/drawingml/2006/main">
               <a:ext uri="{FF2B5EF4-FFF2-40B4-BE49-F238E27FC236}">
-                <a16:creationId xmlns:a16="http://schemas.microsoft.com/office/drawing/2014/main" id="{DBAAF251-ED1A-4E7B-91AE-B09702FBE972}"/>
+                <a16:creationId xmlns:a16="http://schemas.microsoft.com/office/drawing/2014/main" id="{FC8A7119-1D22-4478-B945-419D57EE526E}"/>
               </a:ext>
             </a:extLst>
           </p:cNvPr>
@@ -8525,7 +10389,7 @@
           <p:cNvPr id="11" name="">
             <a:extLst xmlns:a="http://schemas.openxmlformats.org/drawingml/2006/main">
               <a:ext uri="{FF2B5EF4-FFF2-40B4-BE49-F238E27FC236}">
-                <a16:creationId xmlns:a16="http://schemas.microsoft.com/office/drawing/2014/main" id="{F32B374E-9676-442F-9C2A-C178F757AC69}"/>
+                <a16:creationId xmlns:a16="http://schemas.microsoft.com/office/drawing/2014/main" id="{CFCA6704-619B-4FAF-B782-0FB9AFCBA354}"/>
               </a:ext>
             </a:extLst>
           </p:cNvPr>
@@ -8555,7 +10419,7 @@
           <p:cNvPr id="12" name="">
             <a:extLst xmlns:a="http://schemas.openxmlformats.org/drawingml/2006/main">
               <a:ext uri="{FF2B5EF4-FFF2-40B4-BE49-F238E27FC236}">
-                <a16:creationId xmlns:a16="http://schemas.microsoft.com/office/drawing/2014/main" id="{EB826B20-5175-47FE-975A-4C27153FEE4C}"/>
+                <a16:creationId xmlns:a16="http://schemas.microsoft.com/office/drawing/2014/main" id="{3F582207-D6B1-4BB2-A008-C0018FF47A94}"/>
               </a:ext>
             </a:extLst>
           </p:cNvPr>
@@ -8611,7 +10475,7 @@
           <p:cNvPr id="13" name="">
             <a:extLst xmlns:a="http://schemas.openxmlformats.org/drawingml/2006/main">
               <a:ext uri="{FF2B5EF4-FFF2-40B4-BE49-F238E27FC236}">
-                <a16:creationId xmlns:a16="http://schemas.microsoft.com/office/drawing/2014/main" id="{E44B37EF-E6D2-4C95-BC6C-AA5B0A14C12D}"/>
+                <a16:creationId xmlns:a16="http://schemas.microsoft.com/office/drawing/2014/main" id="{DD3CC685-2B8B-4335-A10C-25629A2D553C}"/>
               </a:ext>
             </a:extLst>
           </p:cNvPr>
@@ -8667,7 +10531,7 @@
           <p:cNvPr id="14" name="">
             <a:extLst xmlns:a="http://schemas.openxmlformats.org/drawingml/2006/main">
               <a:ext uri="{FF2B5EF4-FFF2-40B4-BE49-F238E27FC236}">
-                <a16:creationId xmlns:a16="http://schemas.microsoft.com/office/drawing/2014/main" id="{990A5775-90B1-4292-B6CB-B535F22FDDEA}"/>
+                <a16:creationId xmlns:a16="http://schemas.microsoft.com/office/drawing/2014/main" id="{1425BBF9-6B76-48EE-8C77-2B148D519B6C}"/>
               </a:ext>
             </a:extLst>
           </p:cNvPr>
@@ -8723,7 +10587,7 @@
           <p:cNvPr id="15" name="">
             <a:extLst xmlns:a="http://schemas.openxmlformats.org/drawingml/2006/main">
               <a:ext uri="{FF2B5EF4-FFF2-40B4-BE49-F238E27FC236}">
-                <a16:creationId xmlns:a16="http://schemas.microsoft.com/office/drawing/2014/main" id="{5AF69CF2-4196-460B-B9AD-DC18D0629368}"/>
+                <a16:creationId xmlns:a16="http://schemas.microsoft.com/office/drawing/2014/main" id="{9311B2CF-AFDE-4DE0-B1A8-989C3B3A7C4C}"/>
               </a:ext>
             </a:extLst>
           </p:cNvPr>
@@ -8753,7 +10617,7 @@
           <p:cNvPr id="16" name="">
             <a:extLst xmlns:a="http://schemas.openxmlformats.org/drawingml/2006/main">
               <a:ext uri="{FF2B5EF4-FFF2-40B4-BE49-F238E27FC236}">
-                <a16:creationId xmlns:a16="http://schemas.microsoft.com/office/drawing/2014/main" id="{576A93FA-2695-40A6-8F43-8185F3E8BDD7}"/>
+                <a16:creationId xmlns:a16="http://schemas.microsoft.com/office/drawing/2014/main" id="{8672752A-A12F-4D23-A87D-8764C22FEC60}"/>
               </a:ext>
             </a:extLst>
           </p:cNvPr>
@@ -8809,7 +10673,7 @@
           <p:cNvPr id="17" name="">
             <a:extLst xmlns:a="http://schemas.openxmlformats.org/drawingml/2006/main">
               <a:ext uri="{FF2B5EF4-FFF2-40B4-BE49-F238E27FC236}">
-                <a16:creationId xmlns:a16="http://schemas.microsoft.com/office/drawing/2014/main" id="{ED119FCA-B1D3-4EC7-8A81-D0E21FE5DBF6}"/>
+                <a16:creationId xmlns:a16="http://schemas.microsoft.com/office/drawing/2014/main" id="{D954D7FF-E94F-4116-9837-876A24D20087}"/>
               </a:ext>
             </a:extLst>
           </p:cNvPr>
@@ -8865,7 +10729,7 @@
           <p:cNvPr id="18" name="">
             <a:extLst xmlns:a="http://schemas.openxmlformats.org/drawingml/2006/main">
               <a:ext uri="{FF2B5EF4-FFF2-40B4-BE49-F238E27FC236}">
-                <a16:creationId xmlns:a16="http://schemas.microsoft.com/office/drawing/2014/main" id="{225E2A9B-7D22-4E6C-9880-C562C4479EDF}"/>
+                <a16:creationId xmlns:a16="http://schemas.microsoft.com/office/drawing/2014/main" id="{390383A5-6424-487D-BB46-277B75840824}"/>
               </a:ext>
             </a:extLst>
           </p:cNvPr>
@@ -8921,7 +10785,7 @@
           <p:cNvPr id="19" name="">
             <a:extLst xmlns:a="http://schemas.openxmlformats.org/drawingml/2006/main">
               <a:ext uri="{FF2B5EF4-FFF2-40B4-BE49-F238E27FC236}">
-                <a16:creationId xmlns:a16="http://schemas.microsoft.com/office/drawing/2014/main" id="{68D9B473-59B1-4C6B-A1B5-5897193CA5FD}"/>
+                <a16:creationId xmlns:a16="http://schemas.microsoft.com/office/drawing/2014/main" id="{1605CAFE-250A-45D1-9163-0087991C439E}"/>
               </a:ext>
             </a:extLst>
           </p:cNvPr>
@@ -8949,7 +10813,7 @@
     </p:spTree>
     <p:extLst>
       <p:ext uri="{BB962C8B-B14F-4D97-AF65-F5344CB8AC3E}">
-        <p14:creationId xmlns:p14="http://schemas.microsoft.com/office/powerpoint/2010/main" val="1433434548"/>
+        <p14:creationId xmlns:p14="http://schemas.microsoft.com/office/powerpoint/2010/main" val="818854248"/>
       </p:ext>
     </p:extLst>
   </p:cSld>
@@ -8980,7 +10844,7 @@
           <p:cNvPr id="1" name="">
             <a:extLst xmlns:a="http://schemas.openxmlformats.org/drawingml/2006/main">
               <a:ext uri="{FF2B5EF4-FFF2-40B4-BE49-F238E27FC236}">
-                <a16:creationId xmlns:a16="http://schemas.microsoft.com/office/drawing/2014/main" id="{BBE53AB8-C37A-4405-94CF-3D4827905D0A}"/>
+                <a16:creationId xmlns:a16="http://schemas.microsoft.com/office/drawing/2014/main" id="{57A7826F-BB80-4663-8B9A-750CA26D9693}"/>
               </a:ext>
             </a:extLst>
           </p:cNvPr>
@@ -9010,7 +10874,7 @@
           <p:cNvPr id="2" name="">
             <a:extLst xmlns:a="http://schemas.openxmlformats.org/drawingml/2006/main">
               <a:ext uri="{FF2B5EF4-FFF2-40B4-BE49-F238E27FC236}">
-                <a16:creationId xmlns:a16="http://schemas.microsoft.com/office/drawing/2014/main" id="{20857AAF-1FB5-43B2-9BC8-CC8C67503AE8}"/>
+                <a16:creationId xmlns:a16="http://schemas.microsoft.com/office/drawing/2014/main" id="{45A8B5E1-8264-42B7-9162-6B06C2E26618}"/>
               </a:ext>
             </a:extLst>
           </p:cNvPr>
@@ -9040,7 +10904,7 @@
           <p:cNvPr id="3" name="">
             <a:extLst xmlns:a="http://schemas.openxmlformats.org/drawingml/2006/main">
               <a:ext uri="{FF2B5EF4-FFF2-40B4-BE49-F238E27FC236}">
-                <a16:creationId xmlns:a16="http://schemas.microsoft.com/office/drawing/2014/main" id="{B661DFE5-643E-4517-B810-DBB242F6A9AF}"/>
+                <a16:creationId xmlns:a16="http://schemas.microsoft.com/office/drawing/2014/main" id="{97060D25-6EE4-480B-83F0-867625E07AF4}"/>
               </a:ext>
             </a:extLst>
           </p:cNvPr>
@@ -9096,7 +10960,7 @@
           <p:cNvPr id="4" name="">
             <a:extLst xmlns:a="http://schemas.openxmlformats.org/drawingml/2006/main">
               <a:ext uri="{FF2B5EF4-FFF2-40B4-BE49-F238E27FC236}">
-                <a16:creationId xmlns:a16="http://schemas.microsoft.com/office/drawing/2014/main" id="{79BC1528-D66E-4F32-BE9E-DBCA89E05384}"/>
+                <a16:creationId xmlns:a16="http://schemas.microsoft.com/office/drawing/2014/main" id="{948748F3-A7A5-417F-9047-17E8858CDF42}"/>
               </a:ext>
             </a:extLst>
           </p:cNvPr>
@@ -9152,7 +11016,7 @@
           <p:cNvPr id="5" name="">
             <a:extLst xmlns:a="http://schemas.openxmlformats.org/drawingml/2006/main">
               <a:ext uri="{FF2B5EF4-FFF2-40B4-BE49-F238E27FC236}">
-                <a16:creationId xmlns:a16="http://schemas.microsoft.com/office/drawing/2014/main" id="{2DA18D6B-E6B7-4B32-A456-B0D8DECB8BAF}"/>
+                <a16:creationId xmlns:a16="http://schemas.microsoft.com/office/drawing/2014/main" id="{6B367B25-5A00-4AF1-8837-1F8CC3476B45}"/>
               </a:ext>
             </a:extLst>
           </p:cNvPr>
@@ -9182,7 +11046,7 @@
           <p:cNvPr id="6" name="">
             <a:extLst xmlns:a="http://schemas.openxmlformats.org/drawingml/2006/main">
               <a:ext uri="{FF2B5EF4-FFF2-40B4-BE49-F238E27FC236}">
-                <a16:creationId xmlns:a16="http://schemas.microsoft.com/office/drawing/2014/main" id="{77992C7B-EF64-4604-8A48-DFEFBC5B1F1B}"/>
+                <a16:creationId xmlns:a16="http://schemas.microsoft.com/office/drawing/2014/main" id="{2842ADD0-4B00-4D83-90F5-884743CD54AE}"/>
               </a:ext>
             </a:extLst>
           </p:cNvPr>
@@ -9238,7 +11102,7 @@
           <p:cNvPr id="7" name="">
             <a:extLst xmlns:a="http://schemas.openxmlformats.org/drawingml/2006/main">
               <a:ext uri="{FF2B5EF4-FFF2-40B4-BE49-F238E27FC236}">
-                <a16:creationId xmlns:a16="http://schemas.microsoft.com/office/drawing/2014/main" id="{9D792B45-D6D1-4FDC-B313-46B43BDC149E}"/>
+                <a16:creationId xmlns:a16="http://schemas.microsoft.com/office/drawing/2014/main" id="{4B72A310-5A05-4C60-ABFE-FA37AD476460}"/>
               </a:ext>
             </a:extLst>
           </p:cNvPr>
@@ -9268,7 +11132,7 @@
           <p:cNvPr id="8" name="">
             <a:extLst xmlns:a="http://schemas.openxmlformats.org/drawingml/2006/main">
               <a:ext uri="{FF2B5EF4-FFF2-40B4-BE49-F238E27FC236}">
-                <a16:creationId xmlns:a16="http://schemas.microsoft.com/office/drawing/2014/main" id="{CFD10B42-E821-47E2-805C-E4BC45A6B3EB}"/>
+                <a16:creationId xmlns:a16="http://schemas.microsoft.com/office/drawing/2014/main" id="{7E15D756-2EC4-4EF9-8DD8-8CACF62AA946}"/>
               </a:ext>
             </a:extLst>
           </p:cNvPr>
@@ -9324,7 +11188,7 @@
           <p:cNvPr id="9" name="">
             <a:extLst xmlns:a="http://schemas.openxmlformats.org/drawingml/2006/main">
               <a:ext uri="{FF2B5EF4-FFF2-40B4-BE49-F238E27FC236}">
-                <a16:creationId xmlns:a16="http://schemas.microsoft.com/office/drawing/2014/main" id="{BFE0909B-ED2D-4C0D-B751-24118FCF2F5D}"/>
+                <a16:creationId xmlns:a16="http://schemas.microsoft.com/office/drawing/2014/main" id="{EDA056D4-1C99-4971-BB14-A4AEC0657708}"/>
               </a:ext>
             </a:extLst>
           </p:cNvPr>
@@ -9380,7 +11244,7 @@
           <p:cNvPr id="10" name="">
             <a:extLst xmlns:a="http://schemas.openxmlformats.org/drawingml/2006/main">
               <a:ext uri="{FF2B5EF4-FFF2-40B4-BE49-F238E27FC236}">
-                <a16:creationId xmlns:a16="http://schemas.microsoft.com/office/drawing/2014/main" id="{CD907B5A-2D5F-471F-AF71-D5904FBE8AE6}"/>
+                <a16:creationId xmlns:a16="http://schemas.microsoft.com/office/drawing/2014/main" id="{FD80DDB2-54AC-4AB9-9781-74908B6939FF}"/>
               </a:ext>
             </a:extLst>
           </p:cNvPr>
@@ -9436,7 +11300,7 @@
           <p:cNvPr id="11" name="">
             <a:extLst xmlns:a="http://schemas.openxmlformats.org/drawingml/2006/main">
               <a:ext uri="{FF2B5EF4-FFF2-40B4-BE49-F238E27FC236}">
-                <a16:creationId xmlns:a16="http://schemas.microsoft.com/office/drawing/2014/main" id="{6F6D07AB-12A5-489A-9147-14DB07472B3F}"/>
+                <a16:creationId xmlns:a16="http://schemas.microsoft.com/office/drawing/2014/main" id="{F54154C2-EDC8-4325-A25C-E24AA05C08FE}"/>
               </a:ext>
             </a:extLst>
           </p:cNvPr>
@@ -9468,7 +11332,7 @@
           <p:cNvPr id="12" name="">
             <a:extLst xmlns:a="http://schemas.openxmlformats.org/drawingml/2006/main">
               <a:ext uri="{FF2B5EF4-FFF2-40B4-BE49-F238E27FC236}">
-                <a16:creationId xmlns:a16="http://schemas.microsoft.com/office/drawing/2014/main" id="{B90A5B5B-397C-47DC-9436-D37F78E8C0A6}"/>
+                <a16:creationId xmlns:a16="http://schemas.microsoft.com/office/drawing/2014/main" id="{F461D491-A392-4337-B61F-27102D2DCE7E}"/>
               </a:ext>
             </a:extLst>
           </p:cNvPr>
@@ -9524,7 +11388,7 @@
           <p:cNvPr id="13" name="">
             <a:extLst xmlns:a="http://schemas.openxmlformats.org/drawingml/2006/main">
               <a:ext uri="{FF2B5EF4-FFF2-40B4-BE49-F238E27FC236}">
-                <a16:creationId xmlns:a16="http://schemas.microsoft.com/office/drawing/2014/main" id="{2A0B0E7B-52C2-4879-A643-7B4570ECA3DE}"/>
+                <a16:creationId xmlns:a16="http://schemas.microsoft.com/office/drawing/2014/main" id="{5B8554A5-61D0-4DAA-AF1D-1851CE8421E1}"/>
               </a:ext>
             </a:extLst>
           </p:cNvPr>
@@ -9580,7 +11444,7 @@
           <p:cNvPr id="14" name="">
             <a:extLst xmlns:a="http://schemas.openxmlformats.org/drawingml/2006/main">
               <a:ext uri="{FF2B5EF4-FFF2-40B4-BE49-F238E27FC236}">
-                <a16:creationId xmlns:a16="http://schemas.microsoft.com/office/drawing/2014/main" id="{7C8A25CD-558F-4279-B075-E41F838759CB}"/>
+                <a16:creationId xmlns:a16="http://schemas.microsoft.com/office/drawing/2014/main" id="{D5CE1C89-9E08-4C8F-B61E-A34518CB4004}"/>
               </a:ext>
             </a:extLst>
           </p:cNvPr>
@@ -9612,7 +11476,7 @@
           <p:cNvPr id="15" name="">
             <a:extLst xmlns:a="http://schemas.openxmlformats.org/drawingml/2006/main">
               <a:ext uri="{FF2B5EF4-FFF2-40B4-BE49-F238E27FC236}">
-                <a16:creationId xmlns:a16="http://schemas.microsoft.com/office/drawing/2014/main" id="{86BE2B71-009B-4CBF-8209-49D122C5E3A2}"/>
+                <a16:creationId xmlns:a16="http://schemas.microsoft.com/office/drawing/2014/main" id="{EF507C49-514A-49CE-82F6-64DC917420CC}"/>
               </a:ext>
             </a:extLst>
           </p:cNvPr>
@@ -9668,7 +11532,7 @@
           <p:cNvPr id="16" name="">
             <a:extLst xmlns:a="http://schemas.openxmlformats.org/drawingml/2006/main">
               <a:ext uri="{FF2B5EF4-FFF2-40B4-BE49-F238E27FC236}">
-                <a16:creationId xmlns:a16="http://schemas.microsoft.com/office/drawing/2014/main" id="{F3D1D1D7-BCDA-4D35-9045-C8FCAA705CBF}"/>
+                <a16:creationId xmlns:a16="http://schemas.microsoft.com/office/drawing/2014/main" id="{5B9F0364-6E32-4075-A604-245CF243FF70}"/>
               </a:ext>
             </a:extLst>
           </p:cNvPr>
@@ -9700,7 +11564,7 @@
           <p:cNvPr id="17" name="">
             <a:extLst xmlns:a="http://schemas.openxmlformats.org/drawingml/2006/main">
               <a:ext uri="{FF2B5EF4-FFF2-40B4-BE49-F238E27FC236}">
-                <a16:creationId xmlns:a16="http://schemas.microsoft.com/office/drawing/2014/main" id="{53F6CB58-E034-4E2A-BDFD-0C76E55118F6}"/>
+                <a16:creationId xmlns:a16="http://schemas.microsoft.com/office/drawing/2014/main" id="{2776F34F-7BD7-4741-B89C-F808B7E580D7}"/>
               </a:ext>
             </a:extLst>
           </p:cNvPr>
@@ -9756,7 +11620,7 @@
           <p:cNvPr id="18" name="">
             <a:extLst xmlns:a="http://schemas.openxmlformats.org/drawingml/2006/main">
               <a:ext uri="{FF2B5EF4-FFF2-40B4-BE49-F238E27FC236}">
-                <a16:creationId xmlns:a16="http://schemas.microsoft.com/office/drawing/2014/main" id="{774B1ECD-009B-47E6-AA5B-426903193B93}"/>
+                <a16:creationId xmlns:a16="http://schemas.microsoft.com/office/drawing/2014/main" id="{C19937C4-3213-4594-82C8-84B889E384C7}"/>
               </a:ext>
             </a:extLst>
           </p:cNvPr>
@@ -9812,7 +11676,7 @@
           <p:cNvPr id="19" name="">
             <a:extLst xmlns:a="http://schemas.openxmlformats.org/drawingml/2006/main">
               <a:ext uri="{FF2B5EF4-FFF2-40B4-BE49-F238E27FC236}">
-                <a16:creationId xmlns:a16="http://schemas.microsoft.com/office/drawing/2014/main" id="{414170EF-F549-42D4-9BCB-420DF94DD430}"/>
+                <a16:creationId xmlns:a16="http://schemas.microsoft.com/office/drawing/2014/main" id="{F0D46B5F-8BFF-4037-9C73-53E3026EA3EA}"/>
               </a:ext>
             </a:extLst>
           </p:cNvPr>
@@ -9844,7 +11708,7 @@
           <p:cNvPr id="20" name="">
             <a:extLst xmlns:a="http://schemas.openxmlformats.org/drawingml/2006/main">
               <a:ext uri="{FF2B5EF4-FFF2-40B4-BE49-F238E27FC236}">
-                <a16:creationId xmlns:a16="http://schemas.microsoft.com/office/drawing/2014/main" id="{9FED20EC-40DE-486B-BB23-5A1AF4B72189}"/>
+                <a16:creationId xmlns:a16="http://schemas.microsoft.com/office/drawing/2014/main" id="{7CA80212-EBAF-4268-A9E2-D7411C5F520A}"/>
               </a:ext>
             </a:extLst>
           </p:cNvPr>
@@ -9900,7 +11764,7 @@
           <p:cNvPr id="21" name="">
             <a:extLst xmlns:a="http://schemas.openxmlformats.org/drawingml/2006/main">
               <a:ext uri="{FF2B5EF4-FFF2-40B4-BE49-F238E27FC236}">
-                <a16:creationId xmlns:a16="http://schemas.microsoft.com/office/drawing/2014/main" id="{13CFCDD8-8574-4B9D-9CCE-916C75F4A26A}"/>
+                <a16:creationId xmlns:a16="http://schemas.microsoft.com/office/drawing/2014/main" id="{694CB477-FB64-40C2-94DF-BA4C9E78EF44}"/>
               </a:ext>
             </a:extLst>
           </p:cNvPr>
@@ -9932,7 +11796,7 @@
           <p:cNvPr id="22" name="">
             <a:extLst xmlns:a="http://schemas.openxmlformats.org/drawingml/2006/main">
               <a:ext uri="{FF2B5EF4-FFF2-40B4-BE49-F238E27FC236}">
-                <a16:creationId xmlns:a16="http://schemas.microsoft.com/office/drawing/2014/main" id="{D7A447D2-6D77-400C-A9B2-328B36E9A8D2}"/>
+                <a16:creationId xmlns:a16="http://schemas.microsoft.com/office/drawing/2014/main" id="{316893B5-10BB-4A7A-B90B-B70CAE7149D7}"/>
               </a:ext>
             </a:extLst>
           </p:cNvPr>
@@ -9988,7 +11852,7 @@
           <p:cNvPr id="23" name="">
             <a:extLst xmlns:a="http://schemas.openxmlformats.org/drawingml/2006/main">
               <a:ext uri="{FF2B5EF4-FFF2-40B4-BE49-F238E27FC236}">
-                <a16:creationId xmlns:a16="http://schemas.microsoft.com/office/drawing/2014/main" id="{4909C46D-E84F-4E6F-843A-0A80F2ACD46F}"/>
+                <a16:creationId xmlns:a16="http://schemas.microsoft.com/office/drawing/2014/main" id="{893F8D07-8DF2-402C-B2E2-A78CBCB325F8}"/>
               </a:ext>
             </a:extLst>
           </p:cNvPr>
@@ -10044,7 +11908,7 @@
           <p:cNvPr id="24" name="">
             <a:extLst xmlns:a="http://schemas.openxmlformats.org/drawingml/2006/main">
               <a:ext uri="{FF2B5EF4-FFF2-40B4-BE49-F238E27FC236}">
-                <a16:creationId xmlns:a16="http://schemas.microsoft.com/office/drawing/2014/main" id="{CA9C9CAF-2E1B-48AD-B84A-03B58BDE2219}"/>
+                <a16:creationId xmlns:a16="http://schemas.microsoft.com/office/drawing/2014/main" id="{EB441894-5F26-49E8-9493-85803666DE63}"/>
               </a:ext>
             </a:extLst>
           </p:cNvPr>
@@ -10076,7 +11940,7 @@
           <p:cNvPr id="25" name="">
             <a:extLst xmlns:a="http://schemas.openxmlformats.org/drawingml/2006/main">
               <a:ext uri="{FF2B5EF4-FFF2-40B4-BE49-F238E27FC236}">
-                <a16:creationId xmlns:a16="http://schemas.microsoft.com/office/drawing/2014/main" id="{A5A98A04-A811-429D-A01B-A08C648FC726}"/>
+                <a16:creationId xmlns:a16="http://schemas.microsoft.com/office/drawing/2014/main" id="{99154057-C448-4BD6-89DF-44BE191DA178}"/>
               </a:ext>
             </a:extLst>
           </p:cNvPr>
@@ -10132,7 +11996,7 @@
           <p:cNvPr id="26" name="">
             <a:extLst xmlns:a="http://schemas.openxmlformats.org/drawingml/2006/main">
               <a:ext uri="{FF2B5EF4-FFF2-40B4-BE49-F238E27FC236}">
-                <a16:creationId xmlns:a16="http://schemas.microsoft.com/office/drawing/2014/main" id="{C1DAD328-5B35-4596-A8E0-3E3D343931AD}"/>
+                <a16:creationId xmlns:a16="http://schemas.microsoft.com/office/drawing/2014/main" id="{61E82979-CC2C-4930-8566-508E2FE949CE}"/>
               </a:ext>
             </a:extLst>
           </p:cNvPr>
@@ -10164,7 +12028,7 @@
           <p:cNvPr id="27" name="">
             <a:extLst xmlns:a="http://schemas.openxmlformats.org/drawingml/2006/main">
               <a:ext uri="{FF2B5EF4-FFF2-40B4-BE49-F238E27FC236}">
-                <a16:creationId xmlns:a16="http://schemas.microsoft.com/office/drawing/2014/main" id="{C6A90980-454A-492A-92B2-2F15EB0C692A}"/>
+                <a16:creationId xmlns:a16="http://schemas.microsoft.com/office/drawing/2014/main" id="{BEAB3CCB-4B24-4DC8-AB25-8F1BAC8EC316}"/>
               </a:ext>
             </a:extLst>
           </p:cNvPr>
@@ -10220,7 +12084,7 @@
           <p:cNvPr id="28" name="">
             <a:extLst xmlns:a="http://schemas.openxmlformats.org/drawingml/2006/main">
               <a:ext uri="{FF2B5EF4-FFF2-40B4-BE49-F238E27FC236}">
-                <a16:creationId xmlns:a16="http://schemas.microsoft.com/office/drawing/2014/main" id="{03652D90-FC4C-4B6C-97BF-55E7690138C4}"/>
+                <a16:creationId xmlns:a16="http://schemas.microsoft.com/office/drawing/2014/main" id="{42BAC495-772D-4743-B382-B81E3E5D850F}"/>
               </a:ext>
             </a:extLst>
           </p:cNvPr>
@@ -10276,7 +12140,7 @@
           <p:cNvPr id="29" name="">
             <a:extLst xmlns:a="http://schemas.openxmlformats.org/drawingml/2006/main">
               <a:ext uri="{FF2B5EF4-FFF2-40B4-BE49-F238E27FC236}">
-                <a16:creationId xmlns:a16="http://schemas.microsoft.com/office/drawing/2014/main" id="{297A2505-E459-4065-BF7E-1DBC0C6BC744}"/>
+                <a16:creationId xmlns:a16="http://schemas.microsoft.com/office/drawing/2014/main" id="{486E281E-B2A3-449C-BF68-AF4D5680478A}"/>
               </a:ext>
             </a:extLst>
           </p:cNvPr>
@@ -10308,7 +12172,7 @@
           <p:cNvPr id="30" name="">
             <a:extLst xmlns:a="http://schemas.openxmlformats.org/drawingml/2006/main">
               <a:ext uri="{FF2B5EF4-FFF2-40B4-BE49-F238E27FC236}">
-                <a16:creationId xmlns:a16="http://schemas.microsoft.com/office/drawing/2014/main" id="{8A60E105-4F1F-4073-AAAD-135B2158D0E5}"/>
+                <a16:creationId xmlns:a16="http://schemas.microsoft.com/office/drawing/2014/main" id="{D33B963D-E381-46D1-B799-3147A1BAB24E}"/>
               </a:ext>
             </a:extLst>
           </p:cNvPr>
@@ -10362,7 +12226,7 @@
     </p:spTree>
     <p:extLst>
       <p:ext uri="{BB962C8B-B14F-4D97-AF65-F5344CB8AC3E}">
-        <p14:creationId xmlns:p14="http://schemas.microsoft.com/office/powerpoint/2010/main" val="1193836786"/>
+        <p14:creationId xmlns:p14="http://schemas.microsoft.com/office/powerpoint/2010/main" val="1700053294"/>
       </p:ext>
     </p:extLst>
   </p:cSld>
@@ -10393,7 +12257,7 @@
           <p:cNvPr id="1" name="">
             <a:extLst xmlns:a="http://schemas.openxmlformats.org/drawingml/2006/main">
               <a:ext uri="{FF2B5EF4-FFF2-40B4-BE49-F238E27FC236}">
-                <a16:creationId xmlns:a16="http://schemas.microsoft.com/office/drawing/2014/main" id="{078E5E03-778E-4092-97A4-6AB13177846E}"/>
+                <a16:creationId xmlns:a16="http://schemas.microsoft.com/office/drawing/2014/main" id="{378BD00D-D6C1-4003-B094-C0948F93E6D4}"/>
               </a:ext>
             </a:extLst>
           </p:cNvPr>
@@ -10423,7 +12287,7 @@
           <p:cNvPr id="2" name="">
             <a:extLst xmlns:a="http://schemas.openxmlformats.org/drawingml/2006/main">
               <a:ext uri="{FF2B5EF4-FFF2-40B4-BE49-F238E27FC236}">
-                <a16:creationId xmlns:a16="http://schemas.microsoft.com/office/drawing/2014/main" id="{8146BB01-FC4C-4E97-A1BC-9C8F2023385D}"/>
+                <a16:creationId xmlns:a16="http://schemas.microsoft.com/office/drawing/2014/main" id="{57E0DE7C-8596-4F30-9232-8E96F191A84C}"/>
               </a:ext>
             </a:extLst>
           </p:cNvPr>
@@ -10453,7 +12317,7 @@
           <p:cNvPr id="3" name="">
             <a:extLst xmlns:a="http://schemas.openxmlformats.org/drawingml/2006/main">
               <a:ext uri="{FF2B5EF4-FFF2-40B4-BE49-F238E27FC236}">
-                <a16:creationId xmlns:a16="http://schemas.microsoft.com/office/drawing/2014/main" id="{9619349F-E758-4FAA-988F-629B562D7FE4}"/>
+                <a16:creationId xmlns:a16="http://schemas.microsoft.com/office/drawing/2014/main" id="{900A3555-282C-49F3-BC8D-816BD588DFD6}"/>
               </a:ext>
             </a:extLst>
           </p:cNvPr>
@@ -10509,7 +12373,7 @@
           <p:cNvPr id="4" name="">
             <a:extLst xmlns:a="http://schemas.openxmlformats.org/drawingml/2006/main">
               <a:ext uri="{FF2B5EF4-FFF2-40B4-BE49-F238E27FC236}">
-                <a16:creationId xmlns:a16="http://schemas.microsoft.com/office/drawing/2014/main" id="{A91B8F39-DCF6-4D38-BAB9-4C61AAE06ECF}"/>
+                <a16:creationId xmlns:a16="http://schemas.microsoft.com/office/drawing/2014/main" id="{E1B7C525-70F6-4A65-A2F6-77D99A7294C5}"/>
               </a:ext>
             </a:extLst>
           </p:cNvPr>
@@ -10565,7 +12429,7 @@
           <p:cNvPr id="5" name="">
             <a:extLst xmlns:a="http://schemas.openxmlformats.org/drawingml/2006/main">
               <a:ext uri="{FF2B5EF4-FFF2-40B4-BE49-F238E27FC236}">
-                <a16:creationId xmlns:a16="http://schemas.microsoft.com/office/drawing/2014/main" id="{C1ED7119-ED32-4276-96FC-05965C77FD73}"/>
+                <a16:creationId xmlns:a16="http://schemas.microsoft.com/office/drawing/2014/main" id="{83541BEB-C13A-45EC-9B79-F0BCC9DA8E5E}"/>
               </a:ext>
             </a:extLst>
           </p:cNvPr>
@@ -10595,7 +12459,7 @@
           <p:cNvPr id="6" name="">
             <a:extLst xmlns:a="http://schemas.openxmlformats.org/drawingml/2006/main">
               <a:ext uri="{FF2B5EF4-FFF2-40B4-BE49-F238E27FC236}">
-                <a16:creationId xmlns:a16="http://schemas.microsoft.com/office/drawing/2014/main" id="{9C805401-2002-4D46-9FC8-D66A131C8483}"/>
+                <a16:creationId xmlns:a16="http://schemas.microsoft.com/office/drawing/2014/main" id="{5FAB45B4-EFBC-4B42-8E95-33E869D92653}"/>
               </a:ext>
             </a:extLst>
           </p:cNvPr>
@@ -10651,7 +12515,7 @@
           <p:cNvPr id="7" name="">
             <a:extLst xmlns:a="http://schemas.openxmlformats.org/drawingml/2006/main">
               <a:ext uri="{FF2B5EF4-FFF2-40B4-BE49-F238E27FC236}">
-                <a16:creationId xmlns:a16="http://schemas.microsoft.com/office/drawing/2014/main" id="{E8F6CB8F-1E92-485D-93EF-CA2DE99A7A1F}"/>
+                <a16:creationId xmlns:a16="http://schemas.microsoft.com/office/drawing/2014/main" id="{A66000B2-3E16-4F1D-8A43-66E40A4F9C56}"/>
               </a:ext>
             </a:extLst>
           </p:cNvPr>
@@ -10685,7 +12549,7 @@
           <p:cNvPr id="8" name="">
             <a:extLst xmlns:a="http://schemas.openxmlformats.org/drawingml/2006/main">
               <a:ext uri="{FF2B5EF4-FFF2-40B4-BE49-F238E27FC236}">
-                <a16:creationId xmlns:a16="http://schemas.microsoft.com/office/drawing/2014/main" id="{838C4061-8C91-4E58-897A-D760D9B37E99}"/>
+                <a16:creationId xmlns:a16="http://schemas.microsoft.com/office/drawing/2014/main" id="{EBBAD4E2-571B-48C7-8C60-057F016CB8EA}"/>
               </a:ext>
             </a:extLst>
           </p:cNvPr>
@@ -10764,7 +12628,7 @@
           <p:cNvPr id="9" name="">
             <a:extLst xmlns:a="http://schemas.openxmlformats.org/drawingml/2006/main">
               <a:ext uri="{FF2B5EF4-FFF2-40B4-BE49-F238E27FC236}">
-                <a16:creationId xmlns:a16="http://schemas.microsoft.com/office/drawing/2014/main" id="{3C4D3F80-7919-4C13-94CB-2384563A1979}"/>
+                <a16:creationId xmlns:a16="http://schemas.microsoft.com/office/drawing/2014/main" id="{A9B1B566-29FA-492B-BAB9-8B412AA65890}"/>
               </a:ext>
             </a:extLst>
           </p:cNvPr>
@@ -10820,7 +12684,7 @@
           <p:cNvPr id="10" name="">
             <a:extLst xmlns:a="http://schemas.openxmlformats.org/drawingml/2006/main">
               <a:ext uri="{FF2B5EF4-FFF2-40B4-BE49-F238E27FC236}">
-                <a16:creationId xmlns:a16="http://schemas.microsoft.com/office/drawing/2014/main" id="{B9C8F440-B4F9-43EB-9A43-30717C5D5459}"/>
+                <a16:creationId xmlns:a16="http://schemas.microsoft.com/office/drawing/2014/main" id="{FC9397B4-FDF0-4256-9F7B-FCA2B4DC566B}"/>
               </a:ext>
             </a:extLst>
           </p:cNvPr>
@@ -10854,7 +12718,7 @@
           <p:cNvPr id="11" name="">
             <a:extLst xmlns:a="http://schemas.openxmlformats.org/drawingml/2006/main">
               <a:ext uri="{FF2B5EF4-FFF2-40B4-BE49-F238E27FC236}">
-                <a16:creationId xmlns:a16="http://schemas.microsoft.com/office/drawing/2014/main" id="{FDAC7572-9551-4685-B5B8-AF2A6CAD95D2}"/>
+                <a16:creationId xmlns:a16="http://schemas.microsoft.com/office/drawing/2014/main" id="{AC374438-C86B-4EFC-BC48-43B76EA085A7}"/>
               </a:ext>
             </a:extLst>
           </p:cNvPr>
@@ -10933,7 +12797,7 @@
           <p:cNvPr id="12" name="">
             <a:extLst xmlns:a="http://schemas.openxmlformats.org/drawingml/2006/main">
               <a:ext uri="{FF2B5EF4-FFF2-40B4-BE49-F238E27FC236}">
-                <a16:creationId xmlns:a16="http://schemas.microsoft.com/office/drawing/2014/main" id="{9BAA7412-1D63-4D4F-BAC8-634D4B348F20}"/>
+                <a16:creationId xmlns:a16="http://schemas.microsoft.com/office/drawing/2014/main" id="{6F612B25-8639-4F2F-BB40-47CD5D5BE04D}"/>
               </a:ext>
             </a:extLst>
           </p:cNvPr>
@@ -10989,7 +12853,7 @@
           <p:cNvPr id="13" name="">
             <a:extLst xmlns:a="http://schemas.openxmlformats.org/drawingml/2006/main">
               <a:ext uri="{FF2B5EF4-FFF2-40B4-BE49-F238E27FC236}">
-                <a16:creationId xmlns:a16="http://schemas.microsoft.com/office/drawing/2014/main" id="{845EC9A0-A5AB-4CC1-8ECE-F612C84CBFA3}"/>
+                <a16:creationId xmlns:a16="http://schemas.microsoft.com/office/drawing/2014/main" id="{7AF4D43E-C9DE-42C2-BDFB-799E0D821632}"/>
               </a:ext>
             </a:extLst>
           </p:cNvPr>
@@ -11023,7 +12887,7 @@
           <p:cNvPr id="14" name="">
             <a:extLst xmlns:a="http://schemas.openxmlformats.org/drawingml/2006/main">
               <a:ext uri="{FF2B5EF4-FFF2-40B4-BE49-F238E27FC236}">
-                <a16:creationId xmlns:a16="http://schemas.microsoft.com/office/drawing/2014/main" id="{C7909F87-39C9-4B51-8ABA-F416C4BE4E10}"/>
+                <a16:creationId xmlns:a16="http://schemas.microsoft.com/office/drawing/2014/main" id="{8527AD36-395F-41C8-B61B-C172739DA4EE}"/>
               </a:ext>
             </a:extLst>
           </p:cNvPr>
@@ -11102,7 +12966,7 @@
           <p:cNvPr id="15" name="">
             <a:extLst xmlns:a="http://schemas.openxmlformats.org/drawingml/2006/main">
               <a:ext uri="{FF2B5EF4-FFF2-40B4-BE49-F238E27FC236}">
-                <a16:creationId xmlns:a16="http://schemas.microsoft.com/office/drawing/2014/main" id="{4CC6E02D-EC3D-4E90-9F25-49FA20A08CC2}"/>
+                <a16:creationId xmlns:a16="http://schemas.microsoft.com/office/drawing/2014/main" id="{76BF9F91-79BC-466C-BC1C-810463BBADA0}"/>
               </a:ext>
             </a:extLst>
           </p:cNvPr>
@@ -11158,7 +13022,7 @@
           <p:cNvPr id="16" name="">
             <a:extLst xmlns:a="http://schemas.openxmlformats.org/drawingml/2006/main">
               <a:ext uri="{FF2B5EF4-FFF2-40B4-BE49-F238E27FC236}">
-                <a16:creationId xmlns:a16="http://schemas.microsoft.com/office/drawing/2014/main" id="{D9675EDA-4AD3-4668-A35D-5DAC91155F63}"/>
+                <a16:creationId xmlns:a16="http://schemas.microsoft.com/office/drawing/2014/main" id="{5524837E-CC77-47D9-8038-461A0D8A96B5}"/>
               </a:ext>
             </a:extLst>
           </p:cNvPr>
@@ -11192,7 +13056,7 @@
           <p:cNvPr id="17" name="">
             <a:extLst xmlns:a="http://schemas.openxmlformats.org/drawingml/2006/main">
               <a:ext uri="{FF2B5EF4-FFF2-40B4-BE49-F238E27FC236}">
-                <a16:creationId xmlns:a16="http://schemas.microsoft.com/office/drawing/2014/main" id="{69946D22-F281-4283-B8FA-55A32B461B0B}"/>
+                <a16:creationId xmlns:a16="http://schemas.microsoft.com/office/drawing/2014/main" id="{28F296C8-02F8-4FF7-BFCA-6B5FF0236C57}"/>
               </a:ext>
             </a:extLst>
           </p:cNvPr>
@@ -11248,7 +13112,7 @@
           <p:cNvPr id="18" name="">
             <a:extLst xmlns:a="http://schemas.openxmlformats.org/drawingml/2006/main">
               <a:ext uri="{FF2B5EF4-FFF2-40B4-BE49-F238E27FC236}">
-                <a16:creationId xmlns:a16="http://schemas.microsoft.com/office/drawing/2014/main" id="{374851FF-D4DB-498B-981C-173C2118B024}"/>
+                <a16:creationId xmlns:a16="http://schemas.microsoft.com/office/drawing/2014/main" id="{A3D3C6D8-72FC-4C8D-8E39-33E125AECFEF}"/>
               </a:ext>
             </a:extLst>
           </p:cNvPr>
@@ -11304,7 +13168,7 @@
           <p:cNvPr id="19" name="">
             <a:extLst xmlns:a="http://schemas.openxmlformats.org/drawingml/2006/main">
               <a:ext uri="{FF2B5EF4-FFF2-40B4-BE49-F238E27FC236}">
-                <a16:creationId xmlns:a16="http://schemas.microsoft.com/office/drawing/2014/main" id="{2E1A91CD-CECD-4F78-A0F0-02503904CD1C}"/>
+                <a16:creationId xmlns:a16="http://schemas.microsoft.com/office/drawing/2014/main" id="{ED724323-51C6-4DD3-ADB8-F89B2B6F01BC}"/>
               </a:ext>
             </a:extLst>
           </p:cNvPr>
@@ -11338,7 +13202,7 @@
           <p:cNvPr id="20" name="">
             <a:extLst xmlns:a="http://schemas.openxmlformats.org/drawingml/2006/main">
               <a:ext uri="{FF2B5EF4-FFF2-40B4-BE49-F238E27FC236}">
-                <a16:creationId xmlns:a16="http://schemas.microsoft.com/office/drawing/2014/main" id="{BA99214A-C42C-44B6-91D5-6D44DFB0697E}"/>
+                <a16:creationId xmlns:a16="http://schemas.microsoft.com/office/drawing/2014/main" id="{283234CA-8B5F-4BA5-B2A9-E0917E4D24E5}"/>
               </a:ext>
             </a:extLst>
           </p:cNvPr>
@@ -11417,7 +13281,7 @@
           <p:cNvPr id="21" name="">
             <a:extLst xmlns:a="http://schemas.openxmlformats.org/drawingml/2006/main">
               <a:ext uri="{FF2B5EF4-FFF2-40B4-BE49-F238E27FC236}">
-                <a16:creationId xmlns:a16="http://schemas.microsoft.com/office/drawing/2014/main" id="{BE7565B5-6710-466B-9118-E98A292B088D}"/>
+                <a16:creationId xmlns:a16="http://schemas.microsoft.com/office/drawing/2014/main" id="{DC69BE23-937D-426D-BE84-BB98D354E12D}"/>
               </a:ext>
             </a:extLst>
           </p:cNvPr>
@@ -11451,7 +13315,7 @@
           <p:cNvPr id="22" name="">
             <a:extLst xmlns:a="http://schemas.openxmlformats.org/drawingml/2006/main">
               <a:ext uri="{FF2B5EF4-FFF2-40B4-BE49-F238E27FC236}">
-                <a16:creationId xmlns:a16="http://schemas.microsoft.com/office/drawing/2014/main" id="{D65E6F6C-7B41-4EF8-A661-A7EF7A6FEB09}"/>
+                <a16:creationId xmlns:a16="http://schemas.microsoft.com/office/drawing/2014/main" id="{09A3A27E-BD5A-4C37-BCCD-FA03B42E8BF3}"/>
               </a:ext>
             </a:extLst>
           </p:cNvPr>
@@ -11481,7 +13345,7 @@
           <p:cNvPr id="23" name="">
             <a:extLst xmlns:a="http://schemas.openxmlformats.org/drawingml/2006/main">
               <a:ext uri="{FF2B5EF4-FFF2-40B4-BE49-F238E27FC236}">
-                <a16:creationId xmlns:a16="http://schemas.microsoft.com/office/drawing/2014/main" id="{6E5111E7-5B16-4D93-AB25-0D9CE32CB12A}"/>
+                <a16:creationId xmlns:a16="http://schemas.microsoft.com/office/drawing/2014/main" id="{EAF6B490-3729-4A7C-84B2-5A1208A02345}"/>
               </a:ext>
             </a:extLst>
           </p:cNvPr>
@@ -11537,7 +13401,7 @@
           <p:cNvPr id="24" name="">
             <a:extLst xmlns:a="http://schemas.openxmlformats.org/drawingml/2006/main">
               <a:ext uri="{FF2B5EF4-FFF2-40B4-BE49-F238E27FC236}">
-                <a16:creationId xmlns:a16="http://schemas.microsoft.com/office/drawing/2014/main" id="{82E5051D-1383-4162-B38B-A8F9D8A2F4DB}"/>
+                <a16:creationId xmlns:a16="http://schemas.microsoft.com/office/drawing/2014/main" id="{09EF20A3-6A1A-4A05-9575-A32850B3D1AB}"/>
               </a:ext>
             </a:extLst>
           </p:cNvPr>
@@ -11593,7 +13457,7 @@
           <p:cNvPr id="25" name="">
             <a:extLst xmlns:a="http://schemas.openxmlformats.org/drawingml/2006/main">
               <a:ext uri="{FF2B5EF4-FFF2-40B4-BE49-F238E27FC236}">
-                <a16:creationId xmlns:a16="http://schemas.microsoft.com/office/drawing/2014/main" id="{7073C03D-99A8-4070-AA09-812695D2DD50}"/>
+                <a16:creationId xmlns:a16="http://schemas.microsoft.com/office/drawing/2014/main" id="{90E34765-FFEF-4B10-8352-66F4D8A04100}"/>
               </a:ext>
             </a:extLst>
           </p:cNvPr>
@@ -11649,7 +13513,7 @@
           <p:cNvPr id="26" name="">
             <a:extLst xmlns:a="http://schemas.openxmlformats.org/drawingml/2006/main">
               <a:ext uri="{FF2B5EF4-FFF2-40B4-BE49-F238E27FC236}">
-                <a16:creationId xmlns:a16="http://schemas.microsoft.com/office/drawing/2014/main" id="{22D4E10C-3EB8-4A0C-B7BD-775AA8775D60}"/>
+                <a16:creationId xmlns:a16="http://schemas.microsoft.com/office/drawing/2014/main" id="{D103202A-6247-4DA5-8868-B495A3EA7E3C}"/>
               </a:ext>
             </a:extLst>
           </p:cNvPr>
@@ -11683,7 +13547,7 @@
           <p:cNvPr id="27" name="">
             <a:extLst xmlns:a="http://schemas.openxmlformats.org/drawingml/2006/main">
               <a:ext uri="{FF2B5EF4-FFF2-40B4-BE49-F238E27FC236}">
-                <a16:creationId xmlns:a16="http://schemas.microsoft.com/office/drawing/2014/main" id="{1FA25C32-5590-4354-8399-4091F4341CA5}"/>
+                <a16:creationId xmlns:a16="http://schemas.microsoft.com/office/drawing/2014/main" id="{ABA7F6DD-21E1-41E5-A8C1-D5FDC9F0EA01}"/>
               </a:ext>
             </a:extLst>
           </p:cNvPr>
@@ -11713,7 +13577,7 @@
           <p:cNvPr id="28" name="">
             <a:extLst xmlns:a="http://schemas.openxmlformats.org/drawingml/2006/main">
               <a:ext uri="{FF2B5EF4-FFF2-40B4-BE49-F238E27FC236}">
-                <a16:creationId xmlns:a16="http://schemas.microsoft.com/office/drawing/2014/main" id="{4C9B678F-7747-4D40-8B75-886DFCAAE91C}"/>
+                <a16:creationId xmlns:a16="http://schemas.microsoft.com/office/drawing/2014/main" id="{A20930BA-4508-452C-B43A-1DDB5F4E424D}"/>
               </a:ext>
             </a:extLst>
           </p:cNvPr>
@@ -11769,7 +13633,7 @@
           <p:cNvPr id="29" name="">
             <a:extLst xmlns:a="http://schemas.openxmlformats.org/drawingml/2006/main">
               <a:ext uri="{FF2B5EF4-FFF2-40B4-BE49-F238E27FC236}">
-                <a16:creationId xmlns:a16="http://schemas.microsoft.com/office/drawing/2014/main" id="{C610F8D4-8712-4815-8C95-9AC69090AECF}"/>
+                <a16:creationId xmlns:a16="http://schemas.microsoft.com/office/drawing/2014/main" id="{8C2D032C-F98B-411F-9C58-1BBD71A45D27}"/>
               </a:ext>
             </a:extLst>
           </p:cNvPr>
@@ -11825,7 +13689,7 @@
           <p:cNvPr id="30" name="">
             <a:extLst xmlns:a="http://schemas.openxmlformats.org/drawingml/2006/main">
               <a:ext uri="{FF2B5EF4-FFF2-40B4-BE49-F238E27FC236}">
-                <a16:creationId xmlns:a16="http://schemas.microsoft.com/office/drawing/2014/main" id="{4B7C1F34-96F7-42F3-B000-6851364A36B2}"/>
+                <a16:creationId xmlns:a16="http://schemas.microsoft.com/office/drawing/2014/main" id="{3CECFCED-6F43-424C-A742-5EFB99B2A7E8}"/>
               </a:ext>
             </a:extLst>
           </p:cNvPr>
@@ -11881,7 +13745,7 @@
           <p:cNvPr id="31" name="">
             <a:extLst xmlns:a="http://schemas.openxmlformats.org/drawingml/2006/main">
               <a:ext uri="{FF2B5EF4-FFF2-40B4-BE49-F238E27FC236}">
-                <a16:creationId xmlns:a16="http://schemas.microsoft.com/office/drawing/2014/main" id="{EFC9E84E-0E24-437B-97E3-F0DD994A5B03}"/>
+                <a16:creationId xmlns:a16="http://schemas.microsoft.com/office/drawing/2014/main" id="{3B73EA0C-4FDE-4B81-BFD8-D37C09709611}"/>
               </a:ext>
             </a:extLst>
           </p:cNvPr>
@@ -11915,7 +13779,7 @@
           <p:cNvPr id="32" name="">
             <a:extLst xmlns:a="http://schemas.openxmlformats.org/drawingml/2006/main">
               <a:ext uri="{FF2B5EF4-FFF2-40B4-BE49-F238E27FC236}">
-                <a16:creationId xmlns:a16="http://schemas.microsoft.com/office/drawing/2014/main" id="{A28AEE04-0D1C-41E2-8FD1-2D98C0836875}"/>
+                <a16:creationId xmlns:a16="http://schemas.microsoft.com/office/drawing/2014/main" id="{AA598353-30A5-4B4B-954C-5B648340E596}"/>
               </a:ext>
             </a:extLst>
           </p:cNvPr>
@@ -11945,7 +13809,7 @@
           <p:cNvPr id="33" name="">
             <a:extLst xmlns:a="http://schemas.openxmlformats.org/drawingml/2006/main">
               <a:ext uri="{FF2B5EF4-FFF2-40B4-BE49-F238E27FC236}">
-                <a16:creationId xmlns:a16="http://schemas.microsoft.com/office/drawing/2014/main" id="{36310085-4BF4-4AC3-A5D3-EE0CBD5B59BE}"/>
+                <a16:creationId xmlns:a16="http://schemas.microsoft.com/office/drawing/2014/main" id="{603A39F9-720C-468B-93AF-B748635E9F7F}"/>
               </a:ext>
             </a:extLst>
           </p:cNvPr>
@@ -12001,7 +13865,7 @@
           <p:cNvPr id="34" name="">
             <a:extLst xmlns:a="http://schemas.openxmlformats.org/drawingml/2006/main">
               <a:ext uri="{FF2B5EF4-FFF2-40B4-BE49-F238E27FC236}">
-                <a16:creationId xmlns:a16="http://schemas.microsoft.com/office/drawing/2014/main" id="{268715D9-0A86-4B34-8225-FEC7D5C8ACBE}"/>
+                <a16:creationId xmlns:a16="http://schemas.microsoft.com/office/drawing/2014/main" id="{6F754995-112A-48FE-AB50-FD9A06032983}"/>
               </a:ext>
             </a:extLst>
           </p:cNvPr>
@@ -12057,7 +13921,7 @@
           <p:cNvPr id="35" name="">
             <a:extLst xmlns:a="http://schemas.openxmlformats.org/drawingml/2006/main">
               <a:ext uri="{FF2B5EF4-FFF2-40B4-BE49-F238E27FC236}">
-                <a16:creationId xmlns:a16="http://schemas.microsoft.com/office/drawing/2014/main" id="{DCEB7F44-C2EC-4DC9-ABFA-222314D0B513}"/>
+                <a16:creationId xmlns:a16="http://schemas.microsoft.com/office/drawing/2014/main" id="{E3846B1E-D2CA-436F-9E64-FBE1EA52C0B2}"/>
               </a:ext>
             </a:extLst>
           </p:cNvPr>
@@ -12113,7 +13977,7 @@
           <p:cNvPr id="36" name="">
             <a:extLst xmlns:a="http://schemas.openxmlformats.org/drawingml/2006/main">
               <a:ext uri="{FF2B5EF4-FFF2-40B4-BE49-F238E27FC236}">
-                <a16:creationId xmlns:a16="http://schemas.microsoft.com/office/drawing/2014/main" id="{2DC87341-8844-4672-8EBB-5CB84D8BE3C0}"/>
+                <a16:creationId xmlns:a16="http://schemas.microsoft.com/office/drawing/2014/main" id="{BE402306-DA46-4F09-BFEF-810E01B4DF9C}"/>
               </a:ext>
             </a:extLst>
           </p:cNvPr>
@@ -12167,7 +14031,7 @@
     </p:spTree>
     <p:extLst>
       <p:ext uri="{BB962C8B-B14F-4D97-AF65-F5344CB8AC3E}">
-        <p14:creationId xmlns:p14="http://schemas.microsoft.com/office/powerpoint/2010/main" val="333063938"/>
+        <p14:creationId xmlns:p14="http://schemas.microsoft.com/office/powerpoint/2010/main" val="332929932"/>
       </p:ext>
     </p:extLst>
   </p:cSld>
@@ -12198,7 +14062,7 @@
           <p:cNvPr id="1" name="">
             <a:extLst xmlns:a="http://schemas.openxmlformats.org/drawingml/2006/main">
               <a:ext uri="{FF2B5EF4-FFF2-40B4-BE49-F238E27FC236}">
-                <a16:creationId xmlns:a16="http://schemas.microsoft.com/office/drawing/2014/main" id="{B1F605C9-D310-4DDE-9C5D-38590212132C}"/>
+                <a16:creationId xmlns:a16="http://schemas.microsoft.com/office/drawing/2014/main" id="{1DFEF125-75E0-4597-B86E-F4E1E0FBB46B}"/>
               </a:ext>
             </a:extLst>
           </p:cNvPr>
@@ -12228,7 +14092,7 @@
           <p:cNvPr id="2" name="">
             <a:extLst xmlns:a="http://schemas.openxmlformats.org/drawingml/2006/main">
               <a:ext uri="{FF2B5EF4-FFF2-40B4-BE49-F238E27FC236}">
-                <a16:creationId xmlns:a16="http://schemas.microsoft.com/office/drawing/2014/main" id="{F0640CD8-418C-4505-84C0-E66A269A2B3D}"/>
+                <a16:creationId xmlns:a16="http://schemas.microsoft.com/office/drawing/2014/main" id="{3FB84625-E834-4EFF-B9DC-A485020AB2E2}"/>
               </a:ext>
             </a:extLst>
           </p:cNvPr>
@@ -12258,7 +14122,7 @@
           <p:cNvPr id="3" name="">
             <a:extLst xmlns:a="http://schemas.openxmlformats.org/drawingml/2006/main">
               <a:ext uri="{FF2B5EF4-FFF2-40B4-BE49-F238E27FC236}">
-                <a16:creationId xmlns:a16="http://schemas.microsoft.com/office/drawing/2014/main" id="{9DCC0A7E-D35F-456B-A4B9-1D28B48DDB80}"/>
+                <a16:creationId xmlns:a16="http://schemas.microsoft.com/office/drawing/2014/main" id="{31B2DC8E-E9F5-4725-BF12-6BAA3B69D4D6}"/>
               </a:ext>
             </a:extLst>
           </p:cNvPr>
@@ -12314,7 +14178,7 @@
           <p:cNvPr id="4" name="">
             <a:extLst xmlns:a="http://schemas.openxmlformats.org/drawingml/2006/main">
               <a:ext uri="{FF2B5EF4-FFF2-40B4-BE49-F238E27FC236}">
-                <a16:creationId xmlns:a16="http://schemas.microsoft.com/office/drawing/2014/main" id="{F9A759D8-C6C7-47F3-BA94-DCED7EE0D1CD}"/>
+                <a16:creationId xmlns:a16="http://schemas.microsoft.com/office/drawing/2014/main" id="{B5404823-EADA-4E7B-BF88-1326689FA65F}"/>
               </a:ext>
             </a:extLst>
           </p:cNvPr>
@@ -12370,7 +14234,7 @@
           <p:cNvPr id="5" name="">
             <a:extLst xmlns:a="http://schemas.openxmlformats.org/drawingml/2006/main">
               <a:ext uri="{FF2B5EF4-FFF2-40B4-BE49-F238E27FC236}">
-                <a16:creationId xmlns:a16="http://schemas.microsoft.com/office/drawing/2014/main" id="{B943046F-75D0-4FFE-988A-49561BB8B8A9}"/>
+                <a16:creationId xmlns:a16="http://schemas.microsoft.com/office/drawing/2014/main" id="{50CF491C-2E05-4008-9F15-0F5602FC3D0C}"/>
               </a:ext>
             </a:extLst>
           </p:cNvPr>
@@ -12400,7 +14264,7 @@
           <p:cNvPr id="6" name="">
             <a:extLst xmlns:a="http://schemas.openxmlformats.org/drawingml/2006/main">
               <a:ext uri="{FF2B5EF4-FFF2-40B4-BE49-F238E27FC236}">
-                <a16:creationId xmlns:a16="http://schemas.microsoft.com/office/drawing/2014/main" id="{ACA7B6C3-2359-48C2-A637-B8497046A1FF}"/>
+                <a16:creationId xmlns:a16="http://schemas.microsoft.com/office/drawing/2014/main" id="{5FE4E0A7-EBB9-42CE-A8A8-B04FE42789A7}"/>
               </a:ext>
             </a:extLst>
           </p:cNvPr>
@@ -12456,7 +14320,7 @@
           <p:cNvPr id="7" name="">
             <a:extLst xmlns:a="http://schemas.openxmlformats.org/drawingml/2006/main">
               <a:ext uri="{FF2B5EF4-FFF2-40B4-BE49-F238E27FC236}">
-                <a16:creationId xmlns:a16="http://schemas.microsoft.com/office/drawing/2014/main" id="{70E11931-4402-4215-A89B-02490B6C9709}"/>
+                <a16:creationId xmlns:a16="http://schemas.microsoft.com/office/drawing/2014/main" id="{64E13FF7-8EC5-486B-8394-23DC6094ADEA}"/>
               </a:ext>
             </a:extLst>
           </p:cNvPr>
@@ -12486,7 +14350,7 @@
           <p:cNvPr id="8" name="">
             <a:extLst xmlns:a="http://schemas.openxmlformats.org/drawingml/2006/main">
               <a:ext uri="{FF2B5EF4-FFF2-40B4-BE49-F238E27FC236}">
-                <a16:creationId xmlns:a16="http://schemas.microsoft.com/office/drawing/2014/main" id="{CEA4A9F0-A60C-48C8-B513-F2C54C8F49B9}"/>
+                <a16:creationId xmlns:a16="http://schemas.microsoft.com/office/drawing/2014/main" id="{C9715C32-3C1B-4BF4-B2DD-DB9C4A9F5AEB}"/>
               </a:ext>
             </a:extLst>
           </p:cNvPr>
@@ -12542,7 +14406,7 @@
           <p:cNvPr id="9" name="">
             <a:extLst xmlns:a="http://schemas.openxmlformats.org/drawingml/2006/main">
               <a:ext uri="{FF2B5EF4-FFF2-40B4-BE49-F238E27FC236}">
-                <a16:creationId xmlns:a16="http://schemas.microsoft.com/office/drawing/2014/main" id="{76D58FAF-7F5E-48CD-B34D-C5CA3FDAA823}"/>
+                <a16:creationId xmlns:a16="http://schemas.microsoft.com/office/drawing/2014/main" id="{FEDE569C-30B8-4598-A5C6-108E5C4EE361}"/>
               </a:ext>
             </a:extLst>
           </p:cNvPr>
@@ -12576,7 +14440,7 @@
           <p:cNvPr id="10" name="">
             <a:extLst xmlns:a="http://schemas.openxmlformats.org/drawingml/2006/main">
               <a:ext uri="{FF2B5EF4-FFF2-40B4-BE49-F238E27FC236}">
-                <a16:creationId xmlns:a16="http://schemas.microsoft.com/office/drawing/2014/main" id="{608524EC-D359-4D8C-8F65-179B2C89B00D}"/>
+                <a16:creationId xmlns:a16="http://schemas.microsoft.com/office/drawing/2014/main" id="{117432EA-6860-4DD5-82BF-72309782D45F}"/>
               </a:ext>
             </a:extLst>
           </p:cNvPr>
@@ -12606,7 +14470,7 @@
           <p:cNvPr id="11" name="">
             <a:extLst xmlns:a="http://schemas.openxmlformats.org/drawingml/2006/main">
               <a:ext uri="{FF2B5EF4-FFF2-40B4-BE49-F238E27FC236}">
-                <a16:creationId xmlns:a16="http://schemas.microsoft.com/office/drawing/2014/main" id="{638C4A66-7751-4A7E-87BD-7CC29036957C}"/>
+                <a16:creationId xmlns:a16="http://schemas.microsoft.com/office/drawing/2014/main" id="{B92934F1-97DD-4F00-B696-9EBE0C04B0A7}"/>
               </a:ext>
             </a:extLst>
           </p:cNvPr>
@@ -12662,7 +14526,7 @@
           <p:cNvPr id="12" name="">
             <a:extLst xmlns:a="http://schemas.openxmlformats.org/drawingml/2006/main">
               <a:ext uri="{FF2B5EF4-FFF2-40B4-BE49-F238E27FC236}">
-                <a16:creationId xmlns:a16="http://schemas.microsoft.com/office/drawing/2014/main" id="{5DB0496C-6F36-4D30-8280-4860EDE0B36F}"/>
+                <a16:creationId xmlns:a16="http://schemas.microsoft.com/office/drawing/2014/main" id="{F60E1ECA-EA56-4F42-BAD0-346C7461555A}"/>
               </a:ext>
             </a:extLst>
           </p:cNvPr>
@@ -12692,7 +14556,7 @@
           <p:cNvPr id="13" name="">
             <a:extLst xmlns:a="http://schemas.openxmlformats.org/drawingml/2006/main">
               <a:ext uri="{FF2B5EF4-FFF2-40B4-BE49-F238E27FC236}">
-                <a16:creationId xmlns:a16="http://schemas.microsoft.com/office/drawing/2014/main" id="{F7A377A6-BFBE-4513-83B2-6D231C72963D}"/>
+                <a16:creationId xmlns:a16="http://schemas.microsoft.com/office/drawing/2014/main" id="{F534D1DB-08D2-4E34-BA9D-F136D4D2BE15}"/>
               </a:ext>
             </a:extLst>
           </p:cNvPr>
@@ -12748,7 +14612,7 @@
           <p:cNvPr id="14" name="">
             <a:extLst xmlns:a="http://schemas.openxmlformats.org/drawingml/2006/main">
               <a:ext uri="{FF2B5EF4-FFF2-40B4-BE49-F238E27FC236}">
-                <a16:creationId xmlns:a16="http://schemas.microsoft.com/office/drawing/2014/main" id="{98049155-6363-4E97-9D89-0D128B9CB133}"/>
+                <a16:creationId xmlns:a16="http://schemas.microsoft.com/office/drawing/2014/main" id="{F83AEC8C-74BA-4C4B-A987-E6D7DEE8374B}"/>
               </a:ext>
             </a:extLst>
           </p:cNvPr>
@@ -12778,7 +14642,7 @@
           <p:cNvPr id="15" name="">
             <a:extLst xmlns:a="http://schemas.openxmlformats.org/drawingml/2006/main">
               <a:ext uri="{FF2B5EF4-FFF2-40B4-BE49-F238E27FC236}">
-                <a16:creationId xmlns:a16="http://schemas.microsoft.com/office/drawing/2014/main" id="{F25F5C1C-F27C-43F6-B4FD-D5DC549F470A}"/>
+                <a16:creationId xmlns:a16="http://schemas.microsoft.com/office/drawing/2014/main" id="{E93F2BC8-D980-46B9-8B04-84077A7911D6}"/>
               </a:ext>
             </a:extLst>
           </p:cNvPr>
@@ -12834,7 +14698,7 @@
           <p:cNvPr id="16" name="">
             <a:extLst xmlns:a="http://schemas.openxmlformats.org/drawingml/2006/main">
               <a:ext uri="{FF2B5EF4-FFF2-40B4-BE49-F238E27FC236}">
-                <a16:creationId xmlns:a16="http://schemas.microsoft.com/office/drawing/2014/main" id="{258CB134-4825-4B21-B58F-56ABA48997A1}"/>
+                <a16:creationId xmlns:a16="http://schemas.microsoft.com/office/drawing/2014/main" id="{46DD8C82-3D25-4CF0-8448-096425A311C1}"/>
               </a:ext>
             </a:extLst>
           </p:cNvPr>
@@ -12868,7 +14732,7 @@
           <p:cNvPr id="17" name="">
             <a:extLst xmlns:a="http://schemas.openxmlformats.org/drawingml/2006/main">
               <a:ext uri="{FF2B5EF4-FFF2-40B4-BE49-F238E27FC236}">
-                <a16:creationId xmlns:a16="http://schemas.microsoft.com/office/drawing/2014/main" id="{1465730A-8E6A-43E8-9C9D-789C48E66CF3}"/>
+                <a16:creationId xmlns:a16="http://schemas.microsoft.com/office/drawing/2014/main" id="{C4D13821-58E8-487F-93A8-C5DEF832FB52}"/>
               </a:ext>
             </a:extLst>
           </p:cNvPr>
@@ -12898,7 +14762,7 @@
           <p:cNvPr id="18" name="">
             <a:extLst xmlns:a="http://schemas.openxmlformats.org/drawingml/2006/main">
               <a:ext uri="{FF2B5EF4-FFF2-40B4-BE49-F238E27FC236}">
-                <a16:creationId xmlns:a16="http://schemas.microsoft.com/office/drawing/2014/main" id="{731D1854-B2A9-497E-8D2E-896161C30A1D}"/>
+                <a16:creationId xmlns:a16="http://schemas.microsoft.com/office/drawing/2014/main" id="{D1CDE08B-98B2-424B-8848-E199FEDDECED}"/>
               </a:ext>
             </a:extLst>
           </p:cNvPr>
@@ -12954,7 +14818,7 @@
           <p:cNvPr id="19" name="">
             <a:extLst xmlns:a="http://schemas.openxmlformats.org/drawingml/2006/main">
               <a:ext uri="{FF2B5EF4-FFF2-40B4-BE49-F238E27FC236}">
-                <a16:creationId xmlns:a16="http://schemas.microsoft.com/office/drawing/2014/main" id="{54FF2BC0-90F5-490A-B2F9-C28B95B81B72}"/>
+                <a16:creationId xmlns:a16="http://schemas.microsoft.com/office/drawing/2014/main" id="{D5937454-D0C7-42B7-A12D-F4D2089BB631}"/>
               </a:ext>
             </a:extLst>
           </p:cNvPr>
@@ -12984,7 +14848,7 @@
           <p:cNvPr id="20" name="">
             <a:extLst xmlns:a="http://schemas.openxmlformats.org/drawingml/2006/main">
               <a:ext uri="{FF2B5EF4-FFF2-40B4-BE49-F238E27FC236}">
-                <a16:creationId xmlns:a16="http://schemas.microsoft.com/office/drawing/2014/main" id="{28780E12-4615-4EDE-B560-55C55B1BF9B9}"/>
+                <a16:creationId xmlns:a16="http://schemas.microsoft.com/office/drawing/2014/main" id="{2F46A0C7-C7E8-4411-9E2B-CC0E912CACDB}"/>
               </a:ext>
             </a:extLst>
           </p:cNvPr>
@@ -13040,7 +14904,7 @@
           <p:cNvPr id="21" name="">
             <a:extLst xmlns:a="http://schemas.openxmlformats.org/drawingml/2006/main">
               <a:ext uri="{FF2B5EF4-FFF2-40B4-BE49-F238E27FC236}">
-                <a16:creationId xmlns:a16="http://schemas.microsoft.com/office/drawing/2014/main" id="{6652B05B-0EA2-4FC1-B156-666E725062DD}"/>
+                <a16:creationId xmlns:a16="http://schemas.microsoft.com/office/drawing/2014/main" id="{96C48649-CB32-44D3-9C35-5804800AEEE7}"/>
               </a:ext>
             </a:extLst>
           </p:cNvPr>
@@ -13099,7 +14963,7 @@
           <p:cNvPr id="22" name="">
             <a:extLst xmlns:a="http://schemas.openxmlformats.org/drawingml/2006/main">
               <a:ext uri="{FF2B5EF4-FFF2-40B4-BE49-F238E27FC236}">
-                <a16:creationId xmlns:a16="http://schemas.microsoft.com/office/drawing/2014/main" id="{3D965CF5-5DB2-4A2E-A1C4-649454F0F9F8}"/>
+                <a16:creationId xmlns:a16="http://schemas.microsoft.com/office/drawing/2014/main" id="{19B91C1E-9970-466A-B89E-67F7EA89C6F4}"/>
               </a:ext>
             </a:extLst>
           </p:cNvPr>
@@ -13159,7 +15023,7 @@
           <p:nvPr/>
         </p:nvPicPr>
         <p:blipFill>
-          <a:blip xmlns:r="http://schemas.openxmlformats.org/officeDocument/2006/relationships" xmlns:a="http://schemas.openxmlformats.org/drawingml/2006/main" r:embed="Rfed679fb036047a1"/>
+          <a:blip xmlns:r="http://schemas.openxmlformats.org/officeDocument/2006/relationships" xmlns:a="http://schemas.openxmlformats.org/drawingml/2006/main" r:embed="Rc4bb7d03ffd74e38"/>
           <a:stretch xmlns:a="http://schemas.openxmlformats.org/drawingml/2006/main"/>
         </p:blipFill>
         <p:spPr>
@@ -13177,7 +15041,7 @@
           <p:cNvPr id="24" name="">
             <a:extLst xmlns:a="http://schemas.openxmlformats.org/drawingml/2006/main">
               <a:ext uri="{FF2B5EF4-FFF2-40B4-BE49-F238E27FC236}">
-                <a16:creationId xmlns:a16="http://schemas.microsoft.com/office/drawing/2014/main" id="{F64B78CB-EEB0-4234-B2EE-D97CF61CBD72}"/>
+                <a16:creationId xmlns:a16="http://schemas.microsoft.com/office/drawing/2014/main" id="{EB729531-BF25-45E8-B74A-827251198AA9}"/>
               </a:ext>
             </a:extLst>
           </p:cNvPr>
@@ -13231,7 +15095,7 @@
     </p:spTree>
     <p:extLst>
       <p:ext uri="{BB962C8B-B14F-4D97-AF65-F5344CB8AC3E}">
-        <p14:creationId xmlns:p14="http://schemas.microsoft.com/office/powerpoint/2010/main" val="1010328273"/>
+        <p14:creationId xmlns:p14="http://schemas.microsoft.com/office/powerpoint/2010/main" val="803446706"/>
       </p:ext>
     </p:extLst>
   </p:cSld>
@@ -13262,7 +15126,7 @@
           <p:cNvPr id="1" name="">
             <a:extLst xmlns:a="http://schemas.openxmlformats.org/drawingml/2006/main">
               <a:ext uri="{FF2B5EF4-FFF2-40B4-BE49-F238E27FC236}">
-                <a16:creationId xmlns:a16="http://schemas.microsoft.com/office/drawing/2014/main" id="{83C57110-4DE5-47A0-9C66-6F760F0E180F}"/>
+                <a16:creationId xmlns:a16="http://schemas.microsoft.com/office/drawing/2014/main" id="{02DC2B00-013D-4AEA-AF1E-66CCDC17EEAC}"/>
               </a:ext>
             </a:extLst>
           </p:cNvPr>
@@ -13292,7 +15156,7 @@
           <p:cNvPr id="2" name="">
             <a:extLst xmlns:a="http://schemas.openxmlformats.org/drawingml/2006/main">
               <a:ext uri="{FF2B5EF4-FFF2-40B4-BE49-F238E27FC236}">
-                <a16:creationId xmlns:a16="http://schemas.microsoft.com/office/drawing/2014/main" id="{775B25D8-09C9-480B-81DB-B961ACAF115F}"/>
+                <a16:creationId xmlns:a16="http://schemas.microsoft.com/office/drawing/2014/main" id="{73501D9D-BC90-4CB6-ABDD-CE9838E4670C}"/>
               </a:ext>
             </a:extLst>
           </p:cNvPr>
@@ -13322,7 +15186,7 @@
           <p:cNvPr id="3" name="">
             <a:extLst xmlns:a="http://schemas.openxmlformats.org/drawingml/2006/main">
               <a:ext uri="{FF2B5EF4-FFF2-40B4-BE49-F238E27FC236}">
-                <a16:creationId xmlns:a16="http://schemas.microsoft.com/office/drawing/2014/main" id="{8B149407-18F9-4D3B-9B26-F55013C36A7B}"/>
+                <a16:creationId xmlns:a16="http://schemas.microsoft.com/office/drawing/2014/main" id="{CE48DF68-6179-43FB-B1FB-A3CF796A096C}"/>
               </a:ext>
             </a:extLst>
           </p:cNvPr>
@@ -13378,7 +15242,7 @@
           <p:cNvPr id="4" name="">
             <a:extLst xmlns:a="http://schemas.openxmlformats.org/drawingml/2006/main">
               <a:ext uri="{FF2B5EF4-FFF2-40B4-BE49-F238E27FC236}">
-                <a16:creationId xmlns:a16="http://schemas.microsoft.com/office/drawing/2014/main" id="{BE173249-0F09-47B7-8625-8B6256FAE43A}"/>
+                <a16:creationId xmlns:a16="http://schemas.microsoft.com/office/drawing/2014/main" id="{36A17736-947D-4A2B-A03D-DB9B17F93048}"/>
               </a:ext>
             </a:extLst>
           </p:cNvPr>
@@ -13434,7 +15298,7 @@
           <p:cNvPr id="5" name="">
             <a:extLst xmlns:a="http://schemas.openxmlformats.org/drawingml/2006/main">
               <a:ext uri="{FF2B5EF4-FFF2-40B4-BE49-F238E27FC236}">
-                <a16:creationId xmlns:a16="http://schemas.microsoft.com/office/drawing/2014/main" id="{122B5251-C981-42A9-AC3B-87F5AF766CC4}"/>
+                <a16:creationId xmlns:a16="http://schemas.microsoft.com/office/drawing/2014/main" id="{6D866009-2C7D-4C1E-BCC6-DDCE2628F261}"/>
               </a:ext>
             </a:extLst>
           </p:cNvPr>
@@ -13464,7 +15328,7 @@
           <p:cNvPr id="6" name="">
             <a:extLst xmlns:a="http://schemas.openxmlformats.org/drawingml/2006/main">
               <a:ext uri="{FF2B5EF4-FFF2-40B4-BE49-F238E27FC236}">
-                <a16:creationId xmlns:a16="http://schemas.microsoft.com/office/drawing/2014/main" id="{7F34F550-125A-45AA-BE7D-4C0C6A381DC7}"/>
+                <a16:creationId xmlns:a16="http://schemas.microsoft.com/office/drawing/2014/main" id="{17B34F7B-5E66-43D7-8560-85816B4C2504}"/>
               </a:ext>
             </a:extLst>
           </p:cNvPr>
@@ -13520,7 +15384,7 @@
           <p:cNvPr id="7" name="">
             <a:extLst xmlns:a="http://schemas.openxmlformats.org/drawingml/2006/main">
               <a:ext uri="{FF2B5EF4-FFF2-40B4-BE49-F238E27FC236}">
-                <a16:creationId xmlns:a16="http://schemas.microsoft.com/office/drawing/2014/main" id="{5B227FE8-F757-43A3-BBD4-56D7D8BCD023}"/>
+                <a16:creationId xmlns:a16="http://schemas.microsoft.com/office/drawing/2014/main" id="{1001F924-E445-44C1-9498-A074547E9A65}"/>
               </a:ext>
             </a:extLst>
           </p:cNvPr>
@@ -13554,7 +15418,7 @@
           <p:cNvPr id="8" name="">
             <a:extLst xmlns:a="http://schemas.openxmlformats.org/drawingml/2006/main">
               <a:ext uri="{FF2B5EF4-FFF2-40B4-BE49-F238E27FC236}">
-                <a16:creationId xmlns:a16="http://schemas.microsoft.com/office/drawing/2014/main" id="{DB2DC450-207C-40C5-A8DF-AC804FF5CB03}"/>
+                <a16:creationId xmlns:a16="http://schemas.microsoft.com/office/drawing/2014/main" id="{07428317-53B8-4937-A191-3E963D3DDC5D}"/>
               </a:ext>
             </a:extLst>
           </p:cNvPr>
@@ -13610,7 +15474,7 @@
           <p:cNvPr id="9" name="">
             <a:extLst xmlns:a="http://schemas.openxmlformats.org/drawingml/2006/main">
               <a:ext uri="{FF2B5EF4-FFF2-40B4-BE49-F238E27FC236}">
-                <a16:creationId xmlns:a16="http://schemas.microsoft.com/office/drawing/2014/main" id="{D8532416-7D98-4F33-815E-FF7092F4E6E9}"/>
+                <a16:creationId xmlns:a16="http://schemas.microsoft.com/office/drawing/2014/main" id="{3CEDF1EC-F2D0-4897-A86B-4749B3ADC78E}"/>
               </a:ext>
             </a:extLst>
           </p:cNvPr>
@@ -13666,7 +15530,7 @@
           <p:cNvPr id="10" name="">
             <a:extLst xmlns:a="http://schemas.openxmlformats.org/drawingml/2006/main">
               <a:ext uri="{FF2B5EF4-FFF2-40B4-BE49-F238E27FC236}">
-                <a16:creationId xmlns:a16="http://schemas.microsoft.com/office/drawing/2014/main" id="{F262BA5C-8CAC-4136-AE1B-FF588A08D538}"/>
+                <a16:creationId xmlns:a16="http://schemas.microsoft.com/office/drawing/2014/main" id="{2E3E6340-D067-40CE-92D2-69FFF90C7EE0}"/>
               </a:ext>
             </a:extLst>
           </p:cNvPr>
@@ -13700,7 +15564,7 @@
           <p:cNvPr id="11" name="">
             <a:extLst xmlns:a="http://schemas.openxmlformats.org/drawingml/2006/main">
               <a:ext uri="{FF2B5EF4-FFF2-40B4-BE49-F238E27FC236}">
-                <a16:creationId xmlns:a16="http://schemas.microsoft.com/office/drawing/2014/main" id="{0AFDD620-AE3C-4047-A80F-94A93E18B121}"/>
+                <a16:creationId xmlns:a16="http://schemas.microsoft.com/office/drawing/2014/main" id="{BB35FE6F-70B8-454A-AD68-43D5A39B6BB2}"/>
               </a:ext>
             </a:extLst>
           </p:cNvPr>
@@ -13756,7 +15620,7 @@
           <p:cNvPr id="12" name="">
             <a:extLst xmlns:a="http://schemas.openxmlformats.org/drawingml/2006/main">
               <a:ext uri="{FF2B5EF4-FFF2-40B4-BE49-F238E27FC236}">
-                <a16:creationId xmlns:a16="http://schemas.microsoft.com/office/drawing/2014/main" id="{19338D00-824A-4F2A-AA16-4D2253A96DED}"/>
+                <a16:creationId xmlns:a16="http://schemas.microsoft.com/office/drawing/2014/main" id="{192FC56A-2F2A-4249-A3E3-19A83438C462}"/>
               </a:ext>
             </a:extLst>
           </p:cNvPr>
@@ -13812,7 +15676,7 @@
           <p:cNvPr id="13" name="">
             <a:extLst xmlns:a="http://schemas.openxmlformats.org/drawingml/2006/main">
               <a:ext uri="{FF2B5EF4-FFF2-40B4-BE49-F238E27FC236}">
-                <a16:creationId xmlns:a16="http://schemas.microsoft.com/office/drawing/2014/main" id="{19F7511D-B9F9-4C45-B4E2-0994BB6F4639}"/>
+                <a16:creationId xmlns:a16="http://schemas.microsoft.com/office/drawing/2014/main" id="{72C2461A-DFBC-439A-9865-E90F36F7E171}"/>
               </a:ext>
             </a:extLst>
           </p:cNvPr>
@@ -13846,7 +15710,7 @@
           <p:cNvPr id="14" name="">
             <a:extLst xmlns:a="http://schemas.openxmlformats.org/drawingml/2006/main">
               <a:ext uri="{FF2B5EF4-FFF2-40B4-BE49-F238E27FC236}">
-                <a16:creationId xmlns:a16="http://schemas.microsoft.com/office/drawing/2014/main" id="{BD664EE7-BB6F-4486-9014-54EFD409BD1A}"/>
+                <a16:creationId xmlns:a16="http://schemas.microsoft.com/office/drawing/2014/main" id="{37893B3C-FDFA-460B-BD78-F6B3785DCAB1}"/>
               </a:ext>
             </a:extLst>
           </p:cNvPr>
@@ -13902,7 +15766,7 @@
           <p:cNvPr id="15" name="">
             <a:extLst xmlns:a="http://schemas.openxmlformats.org/drawingml/2006/main">
               <a:ext uri="{FF2B5EF4-FFF2-40B4-BE49-F238E27FC236}">
-                <a16:creationId xmlns:a16="http://schemas.microsoft.com/office/drawing/2014/main" id="{44FE45A4-5A07-4729-92BA-804688133D35}"/>
+                <a16:creationId xmlns:a16="http://schemas.microsoft.com/office/drawing/2014/main" id="{1FECDC42-8C61-4373-9CB3-FAEC77EF29CF}"/>
               </a:ext>
             </a:extLst>
           </p:cNvPr>
@@ -13936,7 +15800,7 @@
           <p:cNvPr id="16" name="">
             <a:extLst xmlns:a="http://schemas.openxmlformats.org/drawingml/2006/main">
               <a:ext uri="{FF2B5EF4-FFF2-40B4-BE49-F238E27FC236}">
-                <a16:creationId xmlns:a16="http://schemas.microsoft.com/office/drawing/2014/main" id="{00AA6597-9526-4A6E-811D-04125C31E28E}"/>
+                <a16:creationId xmlns:a16="http://schemas.microsoft.com/office/drawing/2014/main" id="{7B8CC51C-39FD-4711-AED7-9DEEA341A38D}"/>
               </a:ext>
             </a:extLst>
           </p:cNvPr>
@@ -13992,7 +15856,7 @@
           <p:cNvPr id="17" name="">
             <a:extLst xmlns:a="http://schemas.openxmlformats.org/drawingml/2006/main">
               <a:ext uri="{FF2B5EF4-FFF2-40B4-BE49-F238E27FC236}">
-                <a16:creationId xmlns:a16="http://schemas.microsoft.com/office/drawing/2014/main" id="{B097CCCF-B6D8-4667-882A-5663C6118BC4}"/>
+                <a16:creationId xmlns:a16="http://schemas.microsoft.com/office/drawing/2014/main" id="{4F0245E6-3667-4618-A794-BC76B6F93253}"/>
               </a:ext>
             </a:extLst>
           </p:cNvPr>
@@ -14048,7 +15912,7 @@
           <p:cNvPr id="18" name="">
             <a:extLst xmlns:a="http://schemas.openxmlformats.org/drawingml/2006/main">
               <a:ext uri="{FF2B5EF4-FFF2-40B4-BE49-F238E27FC236}">
-                <a16:creationId xmlns:a16="http://schemas.microsoft.com/office/drawing/2014/main" id="{F57F7EAF-E293-44A0-9601-5185CE823093}"/>
+                <a16:creationId xmlns:a16="http://schemas.microsoft.com/office/drawing/2014/main" id="{FD3B90DD-CDCE-4021-9968-6A3F1940EF0B}"/>
               </a:ext>
             </a:extLst>
           </p:cNvPr>
@@ -14082,7 +15946,7 @@
           <p:cNvPr id="19" name="">
             <a:extLst xmlns:a="http://schemas.openxmlformats.org/drawingml/2006/main">
               <a:ext uri="{FF2B5EF4-FFF2-40B4-BE49-F238E27FC236}">
-                <a16:creationId xmlns:a16="http://schemas.microsoft.com/office/drawing/2014/main" id="{3FF23425-3D0E-4B96-B422-E30F380E4588}"/>
+                <a16:creationId xmlns:a16="http://schemas.microsoft.com/office/drawing/2014/main" id="{1BCA99C1-12B0-4195-9A5E-0A0BBBDDC18B}"/>
               </a:ext>
             </a:extLst>
           </p:cNvPr>
@@ -14138,7 +16002,7 @@
           <p:cNvPr id="20" name="">
             <a:extLst xmlns:a="http://schemas.openxmlformats.org/drawingml/2006/main">
               <a:ext uri="{FF2B5EF4-FFF2-40B4-BE49-F238E27FC236}">
-                <a16:creationId xmlns:a16="http://schemas.microsoft.com/office/drawing/2014/main" id="{DB2EB62F-86B5-4753-9CCA-8034D5A17FA5}"/>
+                <a16:creationId xmlns:a16="http://schemas.microsoft.com/office/drawing/2014/main" id="{67F2A80A-180D-4CDD-B33C-6DF4F2D93E18}"/>
               </a:ext>
             </a:extLst>
           </p:cNvPr>
@@ -14194,7 +16058,7 @@
           <p:cNvPr id="21" name="">
             <a:extLst xmlns:a="http://schemas.openxmlformats.org/drawingml/2006/main">
               <a:ext uri="{FF2B5EF4-FFF2-40B4-BE49-F238E27FC236}">
-                <a16:creationId xmlns:a16="http://schemas.microsoft.com/office/drawing/2014/main" id="{3F96A93B-3A8F-489D-829A-3BE10A4E2771}"/>
+                <a16:creationId xmlns:a16="http://schemas.microsoft.com/office/drawing/2014/main" id="{C6E087AA-BD86-4CCB-97B9-4F4EEFCCFEFE}"/>
               </a:ext>
             </a:extLst>
           </p:cNvPr>
@@ -14228,7 +16092,7 @@
           <p:cNvPr id="22" name="">
             <a:extLst xmlns:a="http://schemas.openxmlformats.org/drawingml/2006/main">
               <a:ext uri="{FF2B5EF4-FFF2-40B4-BE49-F238E27FC236}">
-                <a16:creationId xmlns:a16="http://schemas.microsoft.com/office/drawing/2014/main" id="{F72E79EC-174A-494C-B4FC-9A1226E0B793}"/>
+                <a16:creationId xmlns:a16="http://schemas.microsoft.com/office/drawing/2014/main" id="{D014DCAD-EB8F-4479-84BF-F6F325EF5222}"/>
               </a:ext>
             </a:extLst>
           </p:cNvPr>
@@ -14284,7 +16148,7 @@
           <p:cNvPr id="23" name="">
             <a:extLst xmlns:a="http://schemas.openxmlformats.org/drawingml/2006/main">
               <a:ext uri="{FF2B5EF4-FFF2-40B4-BE49-F238E27FC236}">
-                <a16:creationId xmlns:a16="http://schemas.microsoft.com/office/drawing/2014/main" id="{BB619951-0867-4FD2-89BD-25C1435E2630}"/>
+                <a16:creationId xmlns:a16="http://schemas.microsoft.com/office/drawing/2014/main" id="{048F9138-4ECE-4EAD-9B8D-B6BA88E23445}"/>
               </a:ext>
             </a:extLst>
           </p:cNvPr>
@@ -14314,7 +16178,7 @@
           <p:cNvPr id="24" name="">
             <a:extLst xmlns:a="http://schemas.openxmlformats.org/drawingml/2006/main">
               <a:ext uri="{FF2B5EF4-FFF2-40B4-BE49-F238E27FC236}">
-                <a16:creationId xmlns:a16="http://schemas.microsoft.com/office/drawing/2014/main" id="{7EFC5698-C8ED-471E-B0B5-110D47E0F585}"/>
+                <a16:creationId xmlns:a16="http://schemas.microsoft.com/office/drawing/2014/main" id="{9E4F3D18-AE50-4AE4-83B2-418C96B6D1CF}"/>
               </a:ext>
             </a:extLst>
           </p:cNvPr>
@@ -14370,7 +16234,7 @@
           <p:cNvPr id="25" name="">
             <a:extLst xmlns:a="http://schemas.openxmlformats.org/drawingml/2006/main">
               <a:ext uri="{FF2B5EF4-FFF2-40B4-BE49-F238E27FC236}">
-                <a16:creationId xmlns:a16="http://schemas.microsoft.com/office/drawing/2014/main" id="{F422B12A-12DD-4FF6-9226-977E429CFEAC}"/>
+                <a16:creationId xmlns:a16="http://schemas.microsoft.com/office/drawing/2014/main" id="{A6066090-8342-4D04-9ED5-821ACF36E305}"/>
               </a:ext>
             </a:extLst>
           </p:cNvPr>
@@ -14400,7 +16264,7 @@
           <p:cNvPr id="26" name="">
             <a:extLst xmlns:a="http://schemas.openxmlformats.org/drawingml/2006/main">
               <a:ext uri="{FF2B5EF4-FFF2-40B4-BE49-F238E27FC236}">
-                <a16:creationId xmlns:a16="http://schemas.microsoft.com/office/drawing/2014/main" id="{F6DA0718-2EC2-4BCC-8C9B-7F4F7F592280}"/>
+                <a16:creationId xmlns:a16="http://schemas.microsoft.com/office/drawing/2014/main" id="{686DC658-8117-4C9E-8222-886A853A9C2E}"/>
               </a:ext>
             </a:extLst>
           </p:cNvPr>
@@ -14456,7 +16320,7 @@
           <p:cNvPr id="27" name="">
             <a:extLst xmlns:a="http://schemas.openxmlformats.org/drawingml/2006/main">
               <a:ext uri="{FF2B5EF4-FFF2-40B4-BE49-F238E27FC236}">
-                <a16:creationId xmlns:a16="http://schemas.microsoft.com/office/drawing/2014/main" id="{0637D025-661B-450B-8F87-94C62DB99952}"/>
+                <a16:creationId xmlns:a16="http://schemas.microsoft.com/office/drawing/2014/main" id="{D207437A-A49B-4DA8-8135-98D611270AC5}"/>
               </a:ext>
             </a:extLst>
           </p:cNvPr>
@@ -14486,7 +16350,7 @@
           <p:cNvPr id="28" name="">
             <a:extLst xmlns:a="http://schemas.openxmlformats.org/drawingml/2006/main">
               <a:ext uri="{FF2B5EF4-FFF2-40B4-BE49-F238E27FC236}">
-                <a16:creationId xmlns:a16="http://schemas.microsoft.com/office/drawing/2014/main" id="{4A214870-DB1C-41D6-9C8F-2A5D62724349}"/>
+                <a16:creationId xmlns:a16="http://schemas.microsoft.com/office/drawing/2014/main" id="{DFAD1A80-57C7-48A1-AA03-54379A165BDF}"/>
               </a:ext>
             </a:extLst>
           </p:cNvPr>
@@ -14542,7 +16406,7 @@
           <p:cNvPr id="29" name="">
             <a:extLst xmlns:a="http://schemas.openxmlformats.org/drawingml/2006/main">
               <a:ext uri="{FF2B5EF4-FFF2-40B4-BE49-F238E27FC236}">
-                <a16:creationId xmlns:a16="http://schemas.microsoft.com/office/drawing/2014/main" id="{C8F67866-E23E-41E1-9AD5-6CCA10B05D8F}"/>
+                <a16:creationId xmlns:a16="http://schemas.microsoft.com/office/drawing/2014/main" id="{8A159DED-F0CC-4092-82C5-B823C4D75E74}"/>
               </a:ext>
             </a:extLst>
           </p:cNvPr>
@@ -14572,7 +16436,7 @@
           <p:cNvPr id="30" name="">
             <a:extLst xmlns:a="http://schemas.openxmlformats.org/drawingml/2006/main">
               <a:ext uri="{FF2B5EF4-FFF2-40B4-BE49-F238E27FC236}">
-                <a16:creationId xmlns:a16="http://schemas.microsoft.com/office/drawing/2014/main" id="{C701E62B-C4AD-4EF5-A6C8-AD75CF20D901}"/>
+                <a16:creationId xmlns:a16="http://schemas.microsoft.com/office/drawing/2014/main" id="{93895C30-1715-406D-9CD6-474EB6148F2B}"/>
               </a:ext>
             </a:extLst>
           </p:cNvPr>
@@ -14628,7 +16492,7 @@
           <p:cNvPr id="31" name="">
             <a:extLst xmlns:a="http://schemas.openxmlformats.org/drawingml/2006/main">
               <a:ext uri="{FF2B5EF4-FFF2-40B4-BE49-F238E27FC236}">
-                <a16:creationId xmlns:a16="http://schemas.microsoft.com/office/drawing/2014/main" id="{D966791C-F2BD-4C57-A41D-AAE1C80A41B2}"/>
+                <a16:creationId xmlns:a16="http://schemas.microsoft.com/office/drawing/2014/main" id="{DB780851-FDA9-4F4A-9732-0FB056FFF85E}"/>
               </a:ext>
             </a:extLst>
           </p:cNvPr>
@@ -14658,7 +16522,7 @@
           <p:cNvPr id="32" name="">
             <a:extLst xmlns:a="http://schemas.openxmlformats.org/drawingml/2006/main">
               <a:ext uri="{FF2B5EF4-FFF2-40B4-BE49-F238E27FC236}">
-                <a16:creationId xmlns:a16="http://schemas.microsoft.com/office/drawing/2014/main" id="{CC7889E9-AC7A-4428-9060-A72948FB25F4}"/>
+                <a16:creationId xmlns:a16="http://schemas.microsoft.com/office/drawing/2014/main" id="{68475BF4-513B-4EBC-9F66-71C3586281FE}"/>
               </a:ext>
             </a:extLst>
           </p:cNvPr>
@@ -14718,7 +16582,7 @@
           <p:nvPr/>
         </p:nvPicPr>
         <p:blipFill>
-          <a:blip xmlns:r="http://schemas.openxmlformats.org/officeDocument/2006/relationships" xmlns:a="http://schemas.openxmlformats.org/drawingml/2006/main" r:embed="R7d43362183ec409a"/>
+          <a:blip xmlns:r="http://schemas.openxmlformats.org/officeDocument/2006/relationships" xmlns:a="http://schemas.openxmlformats.org/drawingml/2006/main" r:embed="R50990e645f7446f2"/>
           <a:stretch xmlns:a="http://schemas.openxmlformats.org/drawingml/2006/main"/>
         </p:blipFill>
         <p:spPr>
@@ -14736,7 +16600,7 @@
           <p:cNvPr id="34" name="">
             <a:extLst xmlns:a="http://schemas.openxmlformats.org/drawingml/2006/main">
               <a:ext uri="{FF2B5EF4-FFF2-40B4-BE49-F238E27FC236}">
-                <a16:creationId xmlns:a16="http://schemas.microsoft.com/office/drawing/2014/main" id="{9C38AEB9-5501-4D1F-B73E-130DC3B7EBCF}"/>
+                <a16:creationId xmlns:a16="http://schemas.microsoft.com/office/drawing/2014/main" id="{CBC6DF93-1A0F-4C63-AFF8-4FD83F53D289}"/>
               </a:ext>
             </a:extLst>
           </p:cNvPr>
@@ -14790,7 +16654,7 @@
     </p:spTree>
     <p:extLst>
       <p:ext uri="{BB962C8B-B14F-4D97-AF65-F5344CB8AC3E}">
-        <p14:creationId xmlns:p14="http://schemas.microsoft.com/office/powerpoint/2010/main" val="269086079"/>
+        <p14:creationId xmlns:p14="http://schemas.microsoft.com/office/powerpoint/2010/main" val="2023191688"/>
       </p:ext>
     </p:extLst>
   </p:cSld>
@@ -14821,7 +16685,7 @@
           <p:cNvPr id="1" name="">
             <a:extLst xmlns:a="http://schemas.openxmlformats.org/drawingml/2006/main">
               <a:ext uri="{FF2B5EF4-FFF2-40B4-BE49-F238E27FC236}">
-                <a16:creationId xmlns:a16="http://schemas.microsoft.com/office/drawing/2014/main" id="{3B350073-E3AD-456B-8592-A59266591ECE}"/>
+                <a16:creationId xmlns:a16="http://schemas.microsoft.com/office/drawing/2014/main" id="{F404D8B8-5084-46FA-82B6-5202F975D0D4}"/>
               </a:ext>
             </a:extLst>
           </p:cNvPr>
@@ -14851,7 +16715,7 @@
           <p:cNvPr id="2" name="">
             <a:extLst xmlns:a="http://schemas.openxmlformats.org/drawingml/2006/main">
               <a:ext uri="{FF2B5EF4-FFF2-40B4-BE49-F238E27FC236}">
-                <a16:creationId xmlns:a16="http://schemas.microsoft.com/office/drawing/2014/main" id="{A27B00FC-D444-4DD0-8E7F-5BCD20D6992F}"/>
+                <a16:creationId xmlns:a16="http://schemas.microsoft.com/office/drawing/2014/main" id="{99C26D3B-AB08-4F69-AAB8-954F80B1CD57}"/>
               </a:ext>
             </a:extLst>
           </p:cNvPr>
@@ -14881,7 +16745,7 @@
           <p:cNvPr id="3" name="">
             <a:extLst xmlns:a="http://schemas.openxmlformats.org/drawingml/2006/main">
               <a:ext uri="{FF2B5EF4-FFF2-40B4-BE49-F238E27FC236}">
-                <a16:creationId xmlns:a16="http://schemas.microsoft.com/office/drawing/2014/main" id="{567111C9-A49B-4E8D-831E-22D2C80D04CB}"/>
+                <a16:creationId xmlns:a16="http://schemas.microsoft.com/office/drawing/2014/main" id="{484A7A09-DE7C-46B1-A8FF-22C33802F343}"/>
               </a:ext>
             </a:extLst>
           </p:cNvPr>
@@ -14937,7 +16801,7 @@
           <p:cNvPr id="4" name="">
             <a:extLst xmlns:a="http://schemas.openxmlformats.org/drawingml/2006/main">
               <a:ext uri="{FF2B5EF4-FFF2-40B4-BE49-F238E27FC236}">
-                <a16:creationId xmlns:a16="http://schemas.microsoft.com/office/drawing/2014/main" id="{671B13E8-B954-4DB6-9883-A6F5A02AFED2}"/>
+                <a16:creationId xmlns:a16="http://schemas.microsoft.com/office/drawing/2014/main" id="{74D3DE2D-DC41-4A11-8264-63F220CAF280}"/>
               </a:ext>
             </a:extLst>
           </p:cNvPr>
@@ -14993,7 +16857,7 @@
           <p:cNvPr id="5" name="">
             <a:extLst xmlns:a="http://schemas.openxmlformats.org/drawingml/2006/main">
               <a:ext uri="{FF2B5EF4-FFF2-40B4-BE49-F238E27FC236}">
-                <a16:creationId xmlns:a16="http://schemas.microsoft.com/office/drawing/2014/main" id="{1DB3C5AC-65DC-4BA2-B676-7EAD85F32E62}"/>
+                <a16:creationId xmlns:a16="http://schemas.microsoft.com/office/drawing/2014/main" id="{1ADE990F-E7B0-46E5-8D41-837B400168F8}"/>
               </a:ext>
             </a:extLst>
           </p:cNvPr>
@@ -15023,7 +16887,7 @@
           <p:cNvPr id="6" name="">
             <a:extLst xmlns:a="http://schemas.openxmlformats.org/drawingml/2006/main">
               <a:ext uri="{FF2B5EF4-FFF2-40B4-BE49-F238E27FC236}">
-                <a16:creationId xmlns:a16="http://schemas.microsoft.com/office/drawing/2014/main" id="{118CD2FC-634E-479F-A126-58DEB44BF2CC}"/>
+                <a16:creationId xmlns:a16="http://schemas.microsoft.com/office/drawing/2014/main" id="{555696CB-8C40-4DA3-852C-BE4D0D9C2EBB}"/>
               </a:ext>
             </a:extLst>
           </p:cNvPr>
@@ -15079,7 +16943,7 @@
           <p:cNvPr id="7" name="">
             <a:extLst xmlns:a="http://schemas.openxmlformats.org/drawingml/2006/main">
               <a:ext uri="{FF2B5EF4-FFF2-40B4-BE49-F238E27FC236}">
-                <a16:creationId xmlns:a16="http://schemas.microsoft.com/office/drawing/2014/main" id="{DBFD9642-ED9C-4782-B6EE-0B2A0E2CFA84}"/>
+                <a16:creationId xmlns:a16="http://schemas.microsoft.com/office/drawing/2014/main" id="{AEFF2E51-3C26-438A-AC82-642D59931539}"/>
               </a:ext>
             </a:extLst>
           </p:cNvPr>
@@ -15109,7 +16973,7 @@
           <p:cNvPr id="8" name="">
             <a:extLst xmlns:a="http://schemas.openxmlformats.org/drawingml/2006/main">
               <a:ext uri="{FF2B5EF4-FFF2-40B4-BE49-F238E27FC236}">
-                <a16:creationId xmlns:a16="http://schemas.microsoft.com/office/drawing/2014/main" id="{E8E445E4-414B-4AF4-9EC7-C50F68061DD4}"/>
+                <a16:creationId xmlns:a16="http://schemas.microsoft.com/office/drawing/2014/main" id="{26F7A66B-01CE-4FED-9028-218487E18128}"/>
               </a:ext>
             </a:extLst>
           </p:cNvPr>
@@ -15165,7 +17029,7 @@
           <p:cNvPr id="9" name="">
             <a:extLst xmlns:a="http://schemas.openxmlformats.org/drawingml/2006/main">
               <a:ext uri="{FF2B5EF4-FFF2-40B4-BE49-F238E27FC236}">
-                <a16:creationId xmlns:a16="http://schemas.microsoft.com/office/drawing/2014/main" id="{8DD2CDF5-4D9B-499D-9570-88FA7E3BF72F}"/>
+                <a16:creationId xmlns:a16="http://schemas.microsoft.com/office/drawing/2014/main" id="{7D1AD913-E8A1-4BB6-B4A6-44F3904210C8}"/>
               </a:ext>
             </a:extLst>
           </p:cNvPr>
@@ -15221,7 +17085,7 @@
           <p:cNvPr id="10" name="">
             <a:extLst xmlns:a="http://schemas.openxmlformats.org/drawingml/2006/main">
               <a:ext uri="{FF2B5EF4-FFF2-40B4-BE49-F238E27FC236}">
-                <a16:creationId xmlns:a16="http://schemas.microsoft.com/office/drawing/2014/main" id="{1C0B4AE6-D913-49F0-AE5C-2CB151F74F77}"/>
+                <a16:creationId xmlns:a16="http://schemas.microsoft.com/office/drawing/2014/main" id="{D33DC514-F898-46D1-9A1C-865060758C84}"/>
               </a:ext>
             </a:extLst>
           </p:cNvPr>
@@ -15251,7 +17115,7 @@
           <p:cNvPr id="11" name="">
             <a:extLst xmlns:a="http://schemas.openxmlformats.org/drawingml/2006/main">
               <a:ext uri="{FF2B5EF4-FFF2-40B4-BE49-F238E27FC236}">
-                <a16:creationId xmlns:a16="http://schemas.microsoft.com/office/drawing/2014/main" id="{49212512-8A61-4875-B0F2-A90406C292E2}"/>
+                <a16:creationId xmlns:a16="http://schemas.microsoft.com/office/drawing/2014/main" id="{3C0F49DD-54F5-4CCA-B9DD-DCFD854893C0}"/>
               </a:ext>
             </a:extLst>
           </p:cNvPr>
@@ -15281,7 +17145,7 @@
           <p:cNvPr id="12" name="">
             <a:extLst xmlns:a="http://schemas.openxmlformats.org/drawingml/2006/main">
               <a:ext uri="{FF2B5EF4-FFF2-40B4-BE49-F238E27FC236}">
-                <a16:creationId xmlns:a16="http://schemas.microsoft.com/office/drawing/2014/main" id="{2B1DEBAB-7DF9-4052-9A88-0095B3FF7878}"/>
+                <a16:creationId xmlns:a16="http://schemas.microsoft.com/office/drawing/2014/main" id="{29889D17-8B41-4EAC-88E3-4C3A4B48D4B5}"/>
               </a:ext>
             </a:extLst>
           </p:cNvPr>
@@ -15337,7 +17201,7 @@
           <p:cNvPr id="13" name="">
             <a:extLst xmlns:a="http://schemas.openxmlformats.org/drawingml/2006/main">
               <a:ext uri="{FF2B5EF4-FFF2-40B4-BE49-F238E27FC236}">
-                <a16:creationId xmlns:a16="http://schemas.microsoft.com/office/drawing/2014/main" id="{5AB47E37-8122-4204-A1FF-3A0E422E11D4}"/>
+                <a16:creationId xmlns:a16="http://schemas.microsoft.com/office/drawing/2014/main" id="{73AE75E5-AD97-4908-98F2-C79BBD56A705}"/>
               </a:ext>
             </a:extLst>
           </p:cNvPr>
@@ -15393,7 +17257,7 @@
           <p:cNvPr id="14" name="">
             <a:extLst xmlns:a="http://schemas.openxmlformats.org/drawingml/2006/main">
               <a:ext uri="{FF2B5EF4-FFF2-40B4-BE49-F238E27FC236}">
-                <a16:creationId xmlns:a16="http://schemas.microsoft.com/office/drawing/2014/main" id="{2A425506-B03A-4F74-B611-5D4BF493CC07}"/>
+                <a16:creationId xmlns:a16="http://schemas.microsoft.com/office/drawing/2014/main" id="{AE57007D-4C46-4F2A-A94E-AF522D7C0E4F}"/>
               </a:ext>
             </a:extLst>
           </p:cNvPr>
@@ -15423,7 +17287,7 @@
           <p:cNvPr id="15" name="">
             <a:extLst xmlns:a="http://schemas.openxmlformats.org/drawingml/2006/main">
               <a:ext uri="{FF2B5EF4-FFF2-40B4-BE49-F238E27FC236}">
-                <a16:creationId xmlns:a16="http://schemas.microsoft.com/office/drawing/2014/main" id="{95466443-019A-4654-9192-C3BF8930B4FE}"/>
+                <a16:creationId xmlns:a16="http://schemas.microsoft.com/office/drawing/2014/main" id="{C61FD799-7821-4EFC-AE44-E7DC4023A5D6}"/>
               </a:ext>
             </a:extLst>
           </p:cNvPr>
@@ -15453,7 +17317,7 @@
           <p:cNvPr id="16" name="">
             <a:extLst xmlns:a="http://schemas.openxmlformats.org/drawingml/2006/main">
               <a:ext uri="{FF2B5EF4-FFF2-40B4-BE49-F238E27FC236}">
-                <a16:creationId xmlns:a16="http://schemas.microsoft.com/office/drawing/2014/main" id="{4FB13907-C37E-4AF2-99F2-3A63D8FFA09A}"/>
+                <a16:creationId xmlns:a16="http://schemas.microsoft.com/office/drawing/2014/main" id="{755B2DEF-F72B-4883-8DB1-7B0A7978E2C0}"/>
               </a:ext>
             </a:extLst>
           </p:cNvPr>
@@ -15509,7 +17373,7 @@
           <p:cNvPr id="17" name="">
             <a:extLst xmlns:a="http://schemas.openxmlformats.org/drawingml/2006/main">
               <a:ext uri="{FF2B5EF4-FFF2-40B4-BE49-F238E27FC236}">
-                <a16:creationId xmlns:a16="http://schemas.microsoft.com/office/drawing/2014/main" id="{DF9AE0D7-087A-4704-95DB-4C26C96397D2}"/>
+                <a16:creationId xmlns:a16="http://schemas.microsoft.com/office/drawing/2014/main" id="{9F09C0C5-6B08-46F8-A0D5-EF7D6C68015B}"/>
               </a:ext>
             </a:extLst>
           </p:cNvPr>
@@ -15565,7 +17429,7 @@
           <p:cNvPr id="18" name="">
             <a:extLst xmlns:a="http://schemas.openxmlformats.org/drawingml/2006/main">
               <a:ext uri="{FF2B5EF4-FFF2-40B4-BE49-F238E27FC236}">
-                <a16:creationId xmlns:a16="http://schemas.microsoft.com/office/drawing/2014/main" id="{5315EC89-BF78-4286-B553-37C164DE9D11}"/>
+                <a16:creationId xmlns:a16="http://schemas.microsoft.com/office/drawing/2014/main" id="{E78671F1-6306-4462-B6DA-FE38260F9387}"/>
               </a:ext>
             </a:extLst>
           </p:cNvPr>
@@ -15595,7 +17459,7 @@
           <p:cNvPr id="19" name="">
             <a:extLst xmlns:a="http://schemas.openxmlformats.org/drawingml/2006/main">
               <a:ext uri="{FF2B5EF4-FFF2-40B4-BE49-F238E27FC236}">
-                <a16:creationId xmlns:a16="http://schemas.microsoft.com/office/drawing/2014/main" id="{756FE745-2BC2-4002-826F-6AB4E158FB3D}"/>
+                <a16:creationId xmlns:a16="http://schemas.microsoft.com/office/drawing/2014/main" id="{C8E7C577-DAB5-44D4-B835-9928F80108BE}"/>
               </a:ext>
             </a:extLst>
           </p:cNvPr>
@@ -15625,7 +17489,7 @@
           <p:cNvPr id="20" name="">
             <a:extLst xmlns:a="http://schemas.openxmlformats.org/drawingml/2006/main">
               <a:ext uri="{FF2B5EF4-FFF2-40B4-BE49-F238E27FC236}">
-                <a16:creationId xmlns:a16="http://schemas.microsoft.com/office/drawing/2014/main" id="{E2F77433-A2F5-445A-84A0-D65F654A1897}"/>
+                <a16:creationId xmlns:a16="http://schemas.microsoft.com/office/drawing/2014/main" id="{F8CC7FA9-79A5-443A-B8E3-7D67B47FD4AD}"/>
               </a:ext>
             </a:extLst>
           </p:cNvPr>
@@ -15681,7 +17545,7 @@
           <p:cNvPr id="21" name="">
             <a:extLst xmlns:a="http://schemas.openxmlformats.org/drawingml/2006/main">
               <a:ext uri="{FF2B5EF4-FFF2-40B4-BE49-F238E27FC236}">
-                <a16:creationId xmlns:a16="http://schemas.microsoft.com/office/drawing/2014/main" id="{D2A127B2-106E-40E9-B4FA-AC0B49234759}"/>
+                <a16:creationId xmlns:a16="http://schemas.microsoft.com/office/drawing/2014/main" id="{3B80494F-A28B-41BB-BE8A-DC640ABF3600}"/>
               </a:ext>
             </a:extLst>
           </p:cNvPr>
@@ -15737,7 +17601,7 @@
           <p:cNvPr id="22" name="">
             <a:extLst xmlns:a="http://schemas.openxmlformats.org/drawingml/2006/main">
               <a:ext uri="{FF2B5EF4-FFF2-40B4-BE49-F238E27FC236}">
-                <a16:creationId xmlns:a16="http://schemas.microsoft.com/office/drawing/2014/main" id="{0C7C8EDF-D701-437E-88F8-E7D18ECB4E57}"/>
+                <a16:creationId xmlns:a16="http://schemas.microsoft.com/office/drawing/2014/main" id="{B751D2AA-E3B6-4FF3-AB78-EC7808F9634D}"/>
               </a:ext>
             </a:extLst>
           </p:cNvPr>
@@ -15767,7 +17631,7 @@
           <p:cNvPr id="23" name="">
             <a:extLst xmlns:a="http://schemas.openxmlformats.org/drawingml/2006/main">
               <a:ext uri="{FF2B5EF4-FFF2-40B4-BE49-F238E27FC236}">
-                <a16:creationId xmlns:a16="http://schemas.microsoft.com/office/drawing/2014/main" id="{F0632B87-95E7-4F25-9630-3E3402233723}"/>
+                <a16:creationId xmlns:a16="http://schemas.microsoft.com/office/drawing/2014/main" id="{E7402FF2-51C8-4241-85FC-630F8B2ECB41}"/>
               </a:ext>
             </a:extLst>
           </p:cNvPr>
@@ -15797,7 +17661,7 @@
           <p:cNvPr id="24" name="">
             <a:extLst xmlns:a="http://schemas.openxmlformats.org/drawingml/2006/main">
               <a:ext uri="{FF2B5EF4-FFF2-40B4-BE49-F238E27FC236}">
-                <a16:creationId xmlns:a16="http://schemas.microsoft.com/office/drawing/2014/main" id="{D9F61057-52FA-4DC8-B3FC-37354731074B}"/>
+                <a16:creationId xmlns:a16="http://schemas.microsoft.com/office/drawing/2014/main" id="{CF0017C5-8AD7-4D38-AF9B-C1CA468D95BD}"/>
               </a:ext>
             </a:extLst>
           </p:cNvPr>
@@ -15853,7 +17717,7 @@
           <p:cNvPr id="25" name="">
             <a:extLst xmlns:a="http://schemas.openxmlformats.org/drawingml/2006/main">
               <a:ext uri="{FF2B5EF4-FFF2-40B4-BE49-F238E27FC236}">
-                <a16:creationId xmlns:a16="http://schemas.microsoft.com/office/drawing/2014/main" id="{C2149A04-87BB-467B-8691-78B0886C633F}"/>
+                <a16:creationId xmlns:a16="http://schemas.microsoft.com/office/drawing/2014/main" id="{844A982C-C36E-41D9-B242-D8EA537BE343}"/>
               </a:ext>
             </a:extLst>
           </p:cNvPr>
@@ -15909,7 +17773,7 @@
           <p:cNvPr id="26" name="">
             <a:extLst xmlns:a="http://schemas.openxmlformats.org/drawingml/2006/main">
               <a:ext uri="{FF2B5EF4-FFF2-40B4-BE49-F238E27FC236}">
-                <a16:creationId xmlns:a16="http://schemas.microsoft.com/office/drawing/2014/main" id="{A71C7E9A-79ED-4E37-95C6-279ABE52BE87}"/>
+                <a16:creationId xmlns:a16="http://schemas.microsoft.com/office/drawing/2014/main" id="{ABA34EEE-845D-496D-A501-50F47B4D7A59}"/>
               </a:ext>
             </a:extLst>
           </p:cNvPr>
@@ -15939,7 +17803,7 @@
           <p:cNvPr id="27" name="">
             <a:extLst xmlns:a="http://schemas.openxmlformats.org/drawingml/2006/main">
               <a:ext uri="{FF2B5EF4-FFF2-40B4-BE49-F238E27FC236}">
-                <a16:creationId xmlns:a16="http://schemas.microsoft.com/office/drawing/2014/main" id="{706D5DB6-9A6F-407E-BFD5-51DC66D02F81}"/>
+                <a16:creationId xmlns:a16="http://schemas.microsoft.com/office/drawing/2014/main" id="{F56F4BDF-1E1C-4E34-91BF-C9DFDD87C2E7}"/>
               </a:ext>
             </a:extLst>
           </p:cNvPr>
@@ -15969,7 +17833,7 @@
           <p:cNvPr id="28" name="">
             <a:extLst xmlns:a="http://schemas.openxmlformats.org/drawingml/2006/main">
               <a:ext uri="{FF2B5EF4-FFF2-40B4-BE49-F238E27FC236}">
-                <a16:creationId xmlns:a16="http://schemas.microsoft.com/office/drawing/2014/main" id="{8FABA21E-EE8C-42A5-996E-768889973040}"/>
+                <a16:creationId xmlns:a16="http://schemas.microsoft.com/office/drawing/2014/main" id="{4DFF6388-F979-41C9-9501-352FDF1D34D2}"/>
               </a:ext>
             </a:extLst>
           </p:cNvPr>
@@ -16025,7 +17889,7 @@
           <p:cNvPr id="29" name="">
             <a:extLst xmlns:a="http://schemas.openxmlformats.org/drawingml/2006/main">
               <a:ext uri="{FF2B5EF4-FFF2-40B4-BE49-F238E27FC236}">
-                <a16:creationId xmlns:a16="http://schemas.microsoft.com/office/drawing/2014/main" id="{1DC23D3A-8B59-4811-A454-F17DE1A53C0F}"/>
+                <a16:creationId xmlns:a16="http://schemas.microsoft.com/office/drawing/2014/main" id="{D22B7A7A-E92D-400E-A7E1-FC60F36CA419}"/>
               </a:ext>
             </a:extLst>
           </p:cNvPr>
@@ -16081,7 +17945,7 @@
           <p:cNvPr id="30" name="">
             <a:extLst xmlns:a="http://schemas.openxmlformats.org/drawingml/2006/main">
               <a:ext uri="{FF2B5EF4-FFF2-40B4-BE49-F238E27FC236}">
-                <a16:creationId xmlns:a16="http://schemas.microsoft.com/office/drawing/2014/main" id="{B3393FCD-7B11-4475-8E00-D08945124B67}"/>
+                <a16:creationId xmlns:a16="http://schemas.microsoft.com/office/drawing/2014/main" id="{B9826E06-4D12-4AB6-A3AE-A336865450E2}"/>
               </a:ext>
             </a:extLst>
           </p:cNvPr>
@@ -16115,7 +17979,7 @@
           <p:cNvPr id="31" name="">
             <a:extLst xmlns:a="http://schemas.openxmlformats.org/drawingml/2006/main">
               <a:ext uri="{FF2B5EF4-FFF2-40B4-BE49-F238E27FC236}">
-                <a16:creationId xmlns:a16="http://schemas.microsoft.com/office/drawing/2014/main" id="{20165AC0-1FBF-4AC6-9784-16A8740F05D9}"/>
+                <a16:creationId xmlns:a16="http://schemas.microsoft.com/office/drawing/2014/main" id="{3F58AEA7-CFD0-4A53-BF6A-A7C6C15C3B1C}"/>
               </a:ext>
             </a:extLst>
           </p:cNvPr>
@@ -16171,7 +18035,7 @@
           <p:cNvPr id="32" name="">
             <a:extLst xmlns:a="http://schemas.openxmlformats.org/drawingml/2006/main">
               <a:ext uri="{FF2B5EF4-FFF2-40B4-BE49-F238E27FC236}">
-                <a16:creationId xmlns:a16="http://schemas.microsoft.com/office/drawing/2014/main" id="{DCFBABB9-BFAC-4FB9-A1FC-1E58B270AE6F}"/>
+                <a16:creationId xmlns:a16="http://schemas.microsoft.com/office/drawing/2014/main" id="{F3FB887B-3727-4ED1-8B8E-FC60B6757998}"/>
               </a:ext>
             </a:extLst>
           </p:cNvPr>
@@ -16201,7 +18065,7 @@
           <p:cNvPr id="33" name="">
             <a:extLst xmlns:a="http://schemas.openxmlformats.org/drawingml/2006/main">
               <a:ext uri="{FF2B5EF4-FFF2-40B4-BE49-F238E27FC236}">
-                <a16:creationId xmlns:a16="http://schemas.microsoft.com/office/drawing/2014/main" id="{3C13D38D-4570-426A-A037-C8154484E652}"/>
+                <a16:creationId xmlns:a16="http://schemas.microsoft.com/office/drawing/2014/main" id="{5E13B056-E486-4F8A-AA01-7F3EB803FFF4}"/>
               </a:ext>
             </a:extLst>
           </p:cNvPr>
@@ -16257,7 +18121,7 @@
           <p:cNvPr id="34" name="">
             <a:extLst xmlns:a="http://schemas.openxmlformats.org/drawingml/2006/main">
               <a:ext uri="{FF2B5EF4-FFF2-40B4-BE49-F238E27FC236}">
-                <a16:creationId xmlns:a16="http://schemas.microsoft.com/office/drawing/2014/main" id="{146C8D07-2ECE-45D4-A105-F5B9F0AED0FF}"/>
+                <a16:creationId xmlns:a16="http://schemas.microsoft.com/office/drawing/2014/main" id="{B42B2623-7A71-4246-9318-19B3A00CC127}"/>
               </a:ext>
             </a:extLst>
           </p:cNvPr>
@@ -16287,7 +18151,7 @@
           <p:cNvPr id="35" name="">
             <a:extLst xmlns:a="http://schemas.openxmlformats.org/drawingml/2006/main">
               <a:ext uri="{FF2B5EF4-FFF2-40B4-BE49-F238E27FC236}">
-                <a16:creationId xmlns:a16="http://schemas.microsoft.com/office/drawing/2014/main" id="{9422A05B-5FD2-48D5-9185-D892BFCB28E3}"/>
+                <a16:creationId xmlns:a16="http://schemas.microsoft.com/office/drawing/2014/main" id="{D9415C93-0749-4971-BBA5-62D6F39480E2}"/>
               </a:ext>
             </a:extLst>
           </p:cNvPr>
@@ -16343,7 +18207,7 @@
           <p:cNvPr id="36" name="">
             <a:extLst xmlns:a="http://schemas.openxmlformats.org/drawingml/2006/main">
               <a:ext uri="{FF2B5EF4-FFF2-40B4-BE49-F238E27FC236}">
-                <a16:creationId xmlns:a16="http://schemas.microsoft.com/office/drawing/2014/main" id="{72A83463-274E-4C0A-BBBA-476C2F250E85}"/>
+                <a16:creationId xmlns:a16="http://schemas.microsoft.com/office/drawing/2014/main" id="{69DAEFDC-6C13-4CFC-9F6C-498BA91348AC}"/>
               </a:ext>
             </a:extLst>
           </p:cNvPr>
@@ -16373,7 +18237,7 @@
           <p:cNvPr id="37" name="">
             <a:extLst xmlns:a="http://schemas.openxmlformats.org/drawingml/2006/main">
               <a:ext uri="{FF2B5EF4-FFF2-40B4-BE49-F238E27FC236}">
-                <a16:creationId xmlns:a16="http://schemas.microsoft.com/office/drawing/2014/main" id="{42F5D5EF-F1D2-4F02-A462-484E3ADC916F}"/>
+                <a16:creationId xmlns:a16="http://schemas.microsoft.com/office/drawing/2014/main" id="{3D99912A-EFE6-419F-BF14-9BEFBE464C60}"/>
               </a:ext>
             </a:extLst>
           </p:cNvPr>
@@ -16433,7 +18297,7 @@
           <p:nvPr/>
         </p:nvPicPr>
         <p:blipFill>
-          <a:blip xmlns:r="http://schemas.openxmlformats.org/officeDocument/2006/relationships" xmlns:a="http://schemas.openxmlformats.org/drawingml/2006/main" r:embed="R58037890672e4ed3"/>
+          <a:blip xmlns:r="http://schemas.openxmlformats.org/officeDocument/2006/relationships" xmlns:a="http://schemas.openxmlformats.org/drawingml/2006/main" r:embed="R3691ff396f6c4a4e"/>
           <a:stretch xmlns:a="http://schemas.openxmlformats.org/drawingml/2006/main"/>
         </p:blipFill>
         <p:spPr>
@@ -16451,7 +18315,7 @@
           <p:cNvPr id="39" name="">
             <a:extLst xmlns:a="http://schemas.openxmlformats.org/drawingml/2006/main">
               <a:ext uri="{FF2B5EF4-FFF2-40B4-BE49-F238E27FC236}">
-                <a16:creationId xmlns:a16="http://schemas.microsoft.com/office/drawing/2014/main" id="{CDB8023E-71A8-4E03-9343-FFC029B5E394}"/>
+                <a16:creationId xmlns:a16="http://schemas.microsoft.com/office/drawing/2014/main" id="{812514C5-19ED-458A-9C04-B20B41A41BC9}"/>
               </a:ext>
             </a:extLst>
           </p:cNvPr>
@@ -16511,7 +18375,7 @@
           <p:nvPr/>
         </p:nvPicPr>
         <p:blipFill>
-          <a:blip xmlns:r="http://schemas.openxmlformats.org/officeDocument/2006/relationships" xmlns:a="http://schemas.openxmlformats.org/drawingml/2006/main" r:embed="Ra54e5e4469564775"/>
+          <a:blip xmlns:r="http://schemas.openxmlformats.org/officeDocument/2006/relationships" xmlns:a="http://schemas.openxmlformats.org/drawingml/2006/main" r:embed="R527a09cc4dae4a32"/>
           <a:stretch xmlns:a="http://schemas.openxmlformats.org/drawingml/2006/main"/>
         </p:blipFill>
         <p:spPr>
@@ -16529,7 +18393,7 @@
           <p:cNvPr id="41" name="">
             <a:extLst xmlns:a="http://schemas.openxmlformats.org/drawingml/2006/main">
               <a:ext uri="{FF2B5EF4-FFF2-40B4-BE49-F238E27FC236}">
-                <a16:creationId xmlns:a16="http://schemas.microsoft.com/office/drawing/2014/main" id="{96949649-7183-411A-ADD3-9B183B90358D}"/>
+                <a16:creationId xmlns:a16="http://schemas.microsoft.com/office/drawing/2014/main" id="{F3851A02-7A8D-465D-A916-A7625026253D}"/>
               </a:ext>
             </a:extLst>
           </p:cNvPr>
@@ -16583,7 +18447,7 @@
     </p:spTree>
     <p:extLst>
       <p:ext uri="{BB962C8B-B14F-4D97-AF65-F5344CB8AC3E}">
-        <p14:creationId xmlns:p14="http://schemas.microsoft.com/office/powerpoint/2010/main" val="1957345456"/>
+        <p14:creationId xmlns:p14="http://schemas.microsoft.com/office/powerpoint/2010/main" val="1361197324"/>
       </p:ext>
     </p:extLst>
   </p:cSld>
@@ -16614,7 +18478,7 @@
           <p:cNvPr id="1" name="">
             <a:extLst xmlns:a="http://schemas.openxmlformats.org/drawingml/2006/main">
               <a:ext uri="{FF2B5EF4-FFF2-40B4-BE49-F238E27FC236}">
-                <a16:creationId xmlns:a16="http://schemas.microsoft.com/office/drawing/2014/main" id="{FF7652BC-24A0-4038-B42A-82EF5E0006B8}"/>
+                <a16:creationId xmlns:a16="http://schemas.microsoft.com/office/drawing/2014/main" id="{9B8416F0-4EC9-4A13-A20B-6B38579A590F}"/>
               </a:ext>
             </a:extLst>
           </p:cNvPr>
@@ -16644,7 +18508,7 @@
           <p:cNvPr id="2" name="">
             <a:extLst xmlns:a="http://schemas.openxmlformats.org/drawingml/2006/main">
               <a:ext uri="{FF2B5EF4-FFF2-40B4-BE49-F238E27FC236}">
-                <a16:creationId xmlns:a16="http://schemas.microsoft.com/office/drawing/2014/main" id="{9B134DE4-1E73-4AB6-8260-EE0216046FA1}"/>
+                <a16:creationId xmlns:a16="http://schemas.microsoft.com/office/drawing/2014/main" id="{25484278-1CD5-4036-812F-3E1F5EC2ED69}"/>
               </a:ext>
             </a:extLst>
           </p:cNvPr>
@@ -16674,7 +18538,7 @@
           <p:cNvPr id="3" name="">
             <a:extLst xmlns:a="http://schemas.openxmlformats.org/drawingml/2006/main">
               <a:ext uri="{FF2B5EF4-FFF2-40B4-BE49-F238E27FC236}">
-                <a16:creationId xmlns:a16="http://schemas.microsoft.com/office/drawing/2014/main" id="{7DC21895-CA0C-4263-8D8F-2C6AA82DBA89}"/>
+                <a16:creationId xmlns:a16="http://schemas.microsoft.com/office/drawing/2014/main" id="{0BECCC21-2DCD-4509-8688-A0A31889AC42}"/>
               </a:ext>
             </a:extLst>
           </p:cNvPr>
@@ -16730,7 +18594,7 @@
           <p:cNvPr id="4" name="">
             <a:extLst xmlns:a="http://schemas.openxmlformats.org/drawingml/2006/main">
               <a:ext uri="{FF2B5EF4-FFF2-40B4-BE49-F238E27FC236}">
-                <a16:creationId xmlns:a16="http://schemas.microsoft.com/office/drawing/2014/main" id="{FED89DCA-655F-434A-9789-6D7FE4A4EF86}"/>
+                <a16:creationId xmlns:a16="http://schemas.microsoft.com/office/drawing/2014/main" id="{840CED40-8777-4683-9360-DE2A161934B0}"/>
               </a:ext>
             </a:extLst>
           </p:cNvPr>
@@ -16786,7 +18650,7 @@
           <p:cNvPr id="5" name="">
             <a:extLst xmlns:a="http://schemas.openxmlformats.org/drawingml/2006/main">
               <a:ext uri="{FF2B5EF4-FFF2-40B4-BE49-F238E27FC236}">
-                <a16:creationId xmlns:a16="http://schemas.microsoft.com/office/drawing/2014/main" id="{5D3E99B7-DAF8-4FC2-B090-4E0B75E30A04}"/>
+                <a16:creationId xmlns:a16="http://schemas.microsoft.com/office/drawing/2014/main" id="{16B1128A-8575-46EE-915E-03D0D09F3773}"/>
               </a:ext>
             </a:extLst>
           </p:cNvPr>
@@ -16816,7 +18680,7 @@
           <p:cNvPr id="6" name="">
             <a:extLst xmlns:a="http://schemas.openxmlformats.org/drawingml/2006/main">
               <a:ext uri="{FF2B5EF4-FFF2-40B4-BE49-F238E27FC236}">
-                <a16:creationId xmlns:a16="http://schemas.microsoft.com/office/drawing/2014/main" id="{672691AB-8F31-4926-8AA5-5B976A793F41}"/>
+                <a16:creationId xmlns:a16="http://schemas.microsoft.com/office/drawing/2014/main" id="{3E8809E3-F8F6-4AEA-93BA-C7116EECDAA3}"/>
               </a:ext>
             </a:extLst>
           </p:cNvPr>
@@ -16872,7 +18736,7 @@
           <p:cNvPr id="7" name="">
             <a:extLst xmlns:a="http://schemas.openxmlformats.org/drawingml/2006/main">
               <a:ext uri="{FF2B5EF4-FFF2-40B4-BE49-F238E27FC236}">
-                <a16:creationId xmlns:a16="http://schemas.microsoft.com/office/drawing/2014/main" id="{B2615EDE-8A4C-4B20-B6B0-E6DEF08C358A}"/>
+                <a16:creationId xmlns:a16="http://schemas.microsoft.com/office/drawing/2014/main" id="{FC028D9F-B656-4988-AB45-C98DF4BEA0BA}"/>
               </a:ext>
             </a:extLst>
           </p:cNvPr>
@@ -16906,7 +18770,7 @@
           <p:cNvPr id="8" name="">
             <a:extLst xmlns:a="http://schemas.openxmlformats.org/drawingml/2006/main">
               <a:ext uri="{FF2B5EF4-FFF2-40B4-BE49-F238E27FC236}">
-                <a16:creationId xmlns:a16="http://schemas.microsoft.com/office/drawing/2014/main" id="{C9BBD43A-230A-4E46-A5D1-69AF8F83F6D6}"/>
+                <a16:creationId xmlns:a16="http://schemas.microsoft.com/office/drawing/2014/main" id="{000D2F79-EEFF-438E-80D1-DA7DB43B3C91}"/>
               </a:ext>
             </a:extLst>
           </p:cNvPr>
@@ -16985,7 +18849,7 @@
           <p:cNvPr id="9" name="">
             <a:extLst xmlns:a="http://schemas.openxmlformats.org/drawingml/2006/main">
               <a:ext uri="{FF2B5EF4-FFF2-40B4-BE49-F238E27FC236}">
-                <a16:creationId xmlns:a16="http://schemas.microsoft.com/office/drawing/2014/main" id="{97794565-45D4-4F92-AF25-B1CC160A5373}"/>
+                <a16:creationId xmlns:a16="http://schemas.microsoft.com/office/drawing/2014/main" id="{2FF3A63A-3256-4700-8A6C-8BCEE181CD5F}"/>
               </a:ext>
             </a:extLst>
           </p:cNvPr>
@@ -17041,7 +18905,7 @@
           <p:cNvPr id="10" name="">
             <a:extLst xmlns:a="http://schemas.openxmlformats.org/drawingml/2006/main">
               <a:ext uri="{FF2B5EF4-FFF2-40B4-BE49-F238E27FC236}">
-                <a16:creationId xmlns:a16="http://schemas.microsoft.com/office/drawing/2014/main" id="{930E31ED-AFAB-47A3-92DC-D5D8D6542C20}"/>
+                <a16:creationId xmlns:a16="http://schemas.microsoft.com/office/drawing/2014/main" id="{C7626C6D-0287-47CD-9A50-B97F2518DA01}"/>
               </a:ext>
             </a:extLst>
           </p:cNvPr>
@@ -17075,7 +18939,7 @@
           <p:cNvPr id="11" name="">
             <a:extLst xmlns:a="http://schemas.openxmlformats.org/drawingml/2006/main">
               <a:ext uri="{FF2B5EF4-FFF2-40B4-BE49-F238E27FC236}">
-                <a16:creationId xmlns:a16="http://schemas.microsoft.com/office/drawing/2014/main" id="{CB566F3A-9183-4C19-8ED7-B4252D79B930}"/>
+                <a16:creationId xmlns:a16="http://schemas.microsoft.com/office/drawing/2014/main" id="{464A339E-7B90-4B55-B2C4-343EEE0FA2F0}"/>
               </a:ext>
             </a:extLst>
           </p:cNvPr>
@@ -17131,7 +18995,7 @@
           <p:cNvPr id="12" name="">
             <a:extLst xmlns:a="http://schemas.openxmlformats.org/drawingml/2006/main">
               <a:ext uri="{FF2B5EF4-FFF2-40B4-BE49-F238E27FC236}">
-                <a16:creationId xmlns:a16="http://schemas.microsoft.com/office/drawing/2014/main" id="{1644B21C-3571-4C2D-BB20-E2A49E39332F}"/>
+                <a16:creationId xmlns:a16="http://schemas.microsoft.com/office/drawing/2014/main" id="{21F1081A-0B13-469A-8B7B-A5D67C1D54A6}"/>
               </a:ext>
             </a:extLst>
           </p:cNvPr>
@@ -17187,7 +19051,7 @@
           <p:cNvPr id="13" name="">
             <a:extLst xmlns:a="http://schemas.openxmlformats.org/drawingml/2006/main">
               <a:ext uri="{FF2B5EF4-FFF2-40B4-BE49-F238E27FC236}">
-                <a16:creationId xmlns:a16="http://schemas.microsoft.com/office/drawing/2014/main" id="{74D1AE83-BC35-48A1-9332-6C97F525D232}"/>
+                <a16:creationId xmlns:a16="http://schemas.microsoft.com/office/drawing/2014/main" id="{8294A043-615E-4B61-BCF9-5806AF4FAEBF}"/>
               </a:ext>
             </a:extLst>
           </p:cNvPr>
@@ -17221,7 +19085,7 @@
           <p:cNvPr id="14" name="">
             <a:extLst xmlns:a="http://schemas.openxmlformats.org/drawingml/2006/main">
               <a:ext uri="{FF2B5EF4-FFF2-40B4-BE49-F238E27FC236}">
-                <a16:creationId xmlns:a16="http://schemas.microsoft.com/office/drawing/2014/main" id="{B6605AD8-5C89-4C06-8C74-EBA5F6398964}"/>
+                <a16:creationId xmlns:a16="http://schemas.microsoft.com/office/drawing/2014/main" id="{B1820F07-2F3D-4094-BC33-3BB54496C023}"/>
               </a:ext>
             </a:extLst>
           </p:cNvPr>
@@ -17277,7 +19141,7 @@
           <p:cNvPr id="15" name="">
             <a:extLst xmlns:a="http://schemas.openxmlformats.org/drawingml/2006/main">
               <a:ext uri="{FF2B5EF4-FFF2-40B4-BE49-F238E27FC236}">
-                <a16:creationId xmlns:a16="http://schemas.microsoft.com/office/drawing/2014/main" id="{95A568C0-BD91-490C-A7DD-3127298F488A}"/>
+                <a16:creationId xmlns:a16="http://schemas.microsoft.com/office/drawing/2014/main" id="{135B60BE-B84B-4670-8672-57B81206E13D}"/>
               </a:ext>
             </a:extLst>
           </p:cNvPr>
@@ -17333,7 +19197,7 @@
           <p:cNvPr id="16" name="">
             <a:extLst xmlns:a="http://schemas.openxmlformats.org/drawingml/2006/main">
               <a:ext uri="{FF2B5EF4-FFF2-40B4-BE49-F238E27FC236}">
-                <a16:creationId xmlns:a16="http://schemas.microsoft.com/office/drawing/2014/main" id="{02C43B5C-7F9E-45E2-9B40-47D02E0090F6}"/>
+                <a16:creationId xmlns:a16="http://schemas.microsoft.com/office/drawing/2014/main" id="{68F717C1-317C-4C8A-9B5A-2ADDAB298F57}"/>
               </a:ext>
             </a:extLst>
           </p:cNvPr>
@@ -17367,7 +19231,7 @@
           <p:cNvPr id="17" name="">
             <a:extLst xmlns:a="http://schemas.openxmlformats.org/drawingml/2006/main">
               <a:ext uri="{FF2B5EF4-FFF2-40B4-BE49-F238E27FC236}">
-                <a16:creationId xmlns:a16="http://schemas.microsoft.com/office/drawing/2014/main" id="{D8A924CC-3787-434B-AB49-436A6B9AFBC0}"/>
+                <a16:creationId xmlns:a16="http://schemas.microsoft.com/office/drawing/2014/main" id="{6D96C7B8-82E0-4DC2-A532-E8724B0EB94A}"/>
               </a:ext>
             </a:extLst>
           </p:cNvPr>
@@ -17423,7 +19287,7 @@
           <p:cNvPr id="18" name="">
             <a:extLst xmlns:a="http://schemas.openxmlformats.org/drawingml/2006/main">
               <a:ext uri="{FF2B5EF4-FFF2-40B4-BE49-F238E27FC236}">
-                <a16:creationId xmlns:a16="http://schemas.microsoft.com/office/drawing/2014/main" id="{E4BECB87-6A4D-4FD2-ABC6-2AD1DC462E89}"/>
+                <a16:creationId xmlns:a16="http://schemas.microsoft.com/office/drawing/2014/main" id="{D7B0D216-319F-4F73-AA12-5E7B1F15B59B}"/>
               </a:ext>
             </a:extLst>
           </p:cNvPr>
@@ -17479,7 +19343,7 @@
           <p:cNvPr id="19" name="">
             <a:extLst xmlns:a="http://schemas.openxmlformats.org/drawingml/2006/main">
               <a:ext uri="{FF2B5EF4-FFF2-40B4-BE49-F238E27FC236}">
-                <a16:creationId xmlns:a16="http://schemas.microsoft.com/office/drawing/2014/main" id="{5F79FDE9-FDF8-4DED-9C8F-2966C348974C}"/>
+                <a16:creationId xmlns:a16="http://schemas.microsoft.com/office/drawing/2014/main" id="{7AAA76C7-CCD8-4278-8A44-FA5823E36D37}"/>
               </a:ext>
             </a:extLst>
           </p:cNvPr>
@@ -17513,7 +19377,7 @@
           <p:cNvPr id="20" name="">
             <a:extLst xmlns:a="http://schemas.openxmlformats.org/drawingml/2006/main">
               <a:ext uri="{FF2B5EF4-FFF2-40B4-BE49-F238E27FC236}">
-                <a16:creationId xmlns:a16="http://schemas.microsoft.com/office/drawing/2014/main" id="{9F10B25B-3F51-4DC3-A85E-D57B7E900C1E}"/>
+                <a16:creationId xmlns:a16="http://schemas.microsoft.com/office/drawing/2014/main" id="{AFE2BD16-D1D3-4C7A-B6E5-950B3D5CF535}"/>
               </a:ext>
             </a:extLst>
           </p:cNvPr>
@@ -17569,7 +19433,7 @@
           <p:cNvPr id="21" name="">
             <a:extLst xmlns:a="http://schemas.openxmlformats.org/drawingml/2006/main">
               <a:ext uri="{FF2B5EF4-FFF2-40B4-BE49-F238E27FC236}">
-                <a16:creationId xmlns:a16="http://schemas.microsoft.com/office/drawing/2014/main" id="{356E5DBC-0EF7-42EF-9176-566AD1EA84DF}"/>
+                <a16:creationId xmlns:a16="http://schemas.microsoft.com/office/drawing/2014/main" id="{6C35FDAA-FCA6-458D-9ABD-6D63692295AB}"/>
               </a:ext>
             </a:extLst>
           </p:cNvPr>
@@ -17603,7 +19467,7 @@
           <p:cNvPr id="22" name="">
             <a:extLst xmlns:a="http://schemas.openxmlformats.org/drawingml/2006/main">
               <a:ext uri="{FF2B5EF4-FFF2-40B4-BE49-F238E27FC236}">
-                <a16:creationId xmlns:a16="http://schemas.microsoft.com/office/drawing/2014/main" id="{55A80FCB-76B9-4F5F-B1C0-F03AF5EAACAC}"/>
+                <a16:creationId xmlns:a16="http://schemas.microsoft.com/office/drawing/2014/main" id="{179CDBE2-6FAB-4249-BFEA-71F5EA88E109}"/>
               </a:ext>
             </a:extLst>
           </p:cNvPr>
@@ -17659,7 +19523,7 @@
           <p:cNvPr id="23" name="">
             <a:extLst xmlns:a="http://schemas.openxmlformats.org/drawingml/2006/main">
               <a:ext uri="{FF2B5EF4-FFF2-40B4-BE49-F238E27FC236}">
-                <a16:creationId xmlns:a16="http://schemas.microsoft.com/office/drawing/2014/main" id="{04C55F5F-FBE9-4A64-A8C3-E2B4532DF668}"/>
+                <a16:creationId xmlns:a16="http://schemas.microsoft.com/office/drawing/2014/main" id="{B1529BD9-6294-4760-89A9-EF5D0A15F967}"/>
               </a:ext>
             </a:extLst>
           </p:cNvPr>
@@ -17715,7 +19579,7 @@
           <p:cNvPr id="24" name="">
             <a:extLst xmlns:a="http://schemas.openxmlformats.org/drawingml/2006/main">
               <a:ext uri="{FF2B5EF4-FFF2-40B4-BE49-F238E27FC236}">
-                <a16:creationId xmlns:a16="http://schemas.microsoft.com/office/drawing/2014/main" id="{5032C0D3-8090-4728-94D3-3FD171597407}"/>
+                <a16:creationId xmlns:a16="http://schemas.microsoft.com/office/drawing/2014/main" id="{752DA1B3-3A48-4276-814F-6510054C9141}"/>
               </a:ext>
             </a:extLst>
           </p:cNvPr>
@@ -17771,7 +19635,7 @@
           <p:cNvPr id="25" name="">
             <a:extLst xmlns:a="http://schemas.openxmlformats.org/drawingml/2006/main">
               <a:ext uri="{FF2B5EF4-FFF2-40B4-BE49-F238E27FC236}">
-                <a16:creationId xmlns:a16="http://schemas.microsoft.com/office/drawing/2014/main" id="{8975F0B8-5A51-4B66-8B9A-2797E6528207}"/>
+                <a16:creationId xmlns:a16="http://schemas.microsoft.com/office/drawing/2014/main" id="{473228A3-782E-40CA-9D09-FBAB90B7B6D2}"/>
               </a:ext>
             </a:extLst>
           </p:cNvPr>
@@ -17827,7 +19691,7 @@
           <p:cNvPr id="26" name="">
             <a:extLst xmlns:a="http://schemas.openxmlformats.org/drawingml/2006/main">
               <a:ext uri="{FF2B5EF4-FFF2-40B4-BE49-F238E27FC236}">
-                <a16:creationId xmlns:a16="http://schemas.microsoft.com/office/drawing/2014/main" id="{D8787808-01B5-4063-9053-8AB4D1733150}"/>
+                <a16:creationId xmlns:a16="http://schemas.microsoft.com/office/drawing/2014/main" id="{C11A06D5-729C-47FD-90B3-03C56CC63173}"/>
               </a:ext>
             </a:extLst>
           </p:cNvPr>
@@ -17859,7 +19723,7 @@
           <p:cNvPr id="27" name="">
             <a:extLst xmlns:a="http://schemas.openxmlformats.org/drawingml/2006/main">
               <a:ext uri="{FF2B5EF4-FFF2-40B4-BE49-F238E27FC236}">
-                <a16:creationId xmlns:a16="http://schemas.microsoft.com/office/drawing/2014/main" id="{96B7438D-1D0E-48F1-AF2A-22F8794EF644}"/>
+                <a16:creationId xmlns:a16="http://schemas.microsoft.com/office/drawing/2014/main" id="{DFCA74F0-5B64-462A-88BA-6795F201B426}"/>
               </a:ext>
             </a:extLst>
           </p:cNvPr>
@@ -17915,7 +19779,7 @@
           <p:cNvPr id="28" name="">
             <a:extLst xmlns:a="http://schemas.openxmlformats.org/drawingml/2006/main">
               <a:ext uri="{FF2B5EF4-FFF2-40B4-BE49-F238E27FC236}">
-                <a16:creationId xmlns:a16="http://schemas.microsoft.com/office/drawing/2014/main" id="{07F622D7-6B0D-4FE6-A3B6-4B16E02FDD71}"/>
+                <a16:creationId xmlns:a16="http://schemas.microsoft.com/office/drawing/2014/main" id="{CCD3416F-5793-4E12-B3BC-F4804A2C68BC}"/>
               </a:ext>
             </a:extLst>
           </p:cNvPr>
@@ -17947,7 +19811,7 @@
           <p:cNvPr id="29" name="">
             <a:extLst xmlns:a="http://schemas.openxmlformats.org/drawingml/2006/main">
               <a:ext uri="{FF2B5EF4-FFF2-40B4-BE49-F238E27FC236}">
-                <a16:creationId xmlns:a16="http://schemas.microsoft.com/office/drawing/2014/main" id="{3DA64A5F-D36D-446B-A6FC-50DA8FE21A3C}"/>
+                <a16:creationId xmlns:a16="http://schemas.microsoft.com/office/drawing/2014/main" id="{5D3408DF-1245-4194-BD74-F7F75DF29C4C}"/>
               </a:ext>
             </a:extLst>
           </p:cNvPr>
@@ -18003,7 +19867,7 @@
           <p:cNvPr id="30" name="">
             <a:extLst xmlns:a="http://schemas.openxmlformats.org/drawingml/2006/main">
               <a:ext uri="{FF2B5EF4-FFF2-40B4-BE49-F238E27FC236}">
-                <a16:creationId xmlns:a16="http://schemas.microsoft.com/office/drawing/2014/main" id="{202A1D6E-4756-48E8-82D3-491372994099}"/>
+                <a16:creationId xmlns:a16="http://schemas.microsoft.com/office/drawing/2014/main" id="{9FE55038-9DC8-4D75-98AA-5D17A5D9EF63}"/>
               </a:ext>
             </a:extLst>
           </p:cNvPr>
@@ -18035,7 +19899,7 @@
           <p:cNvPr id="31" name="">
             <a:extLst xmlns:a="http://schemas.openxmlformats.org/drawingml/2006/main">
               <a:ext uri="{FF2B5EF4-FFF2-40B4-BE49-F238E27FC236}">
-                <a16:creationId xmlns:a16="http://schemas.microsoft.com/office/drawing/2014/main" id="{C430E2EB-1468-4E94-8629-2ECC6B46F770}"/>
+                <a16:creationId xmlns:a16="http://schemas.microsoft.com/office/drawing/2014/main" id="{F12016B9-6063-432E-ADAF-A7AF9793DE56}"/>
               </a:ext>
             </a:extLst>
           </p:cNvPr>
@@ -18095,7 +19959,7 @@
           <p:nvPr/>
         </p:nvPicPr>
         <p:blipFill>
-          <a:blip xmlns:r="http://schemas.openxmlformats.org/officeDocument/2006/relationships" xmlns:a="http://schemas.openxmlformats.org/drawingml/2006/main" r:embed="R2d1bb68d11da4263"/>
+          <a:blip xmlns:r="http://schemas.openxmlformats.org/officeDocument/2006/relationships" xmlns:a="http://schemas.openxmlformats.org/drawingml/2006/main" r:embed="R7e711d70fc7e41d0"/>
           <a:stretch xmlns:a="http://schemas.openxmlformats.org/drawingml/2006/main"/>
         </p:blipFill>
         <p:spPr>
@@ -18113,7 +19977,7 @@
           <p:cNvPr id="33" name="">
             <a:extLst xmlns:a="http://schemas.openxmlformats.org/drawingml/2006/main">
               <a:ext uri="{FF2B5EF4-FFF2-40B4-BE49-F238E27FC236}">
-                <a16:creationId xmlns:a16="http://schemas.microsoft.com/office/drawing/2014/main" id="{F9F6590B-3161-4354-86ED-CFE3119A3587}"/>
+                <a16:creationId xmlns:a16="http://schemas.microsoft.com/office/drawing/2014/main" id="{FC0506BE-4F2B-4846-8C85-0BFB15BCC365}"/>
               </a:ext>
             </a:extLst>
           </p:cNvPr>
@@ -18173,7 +20037,7 @@
           <p:nvPr/>
         </p:nvPicPr>
         <p:blipFill>
-          <a:blip xmlns:r="http://schemas.openxmlformats.org/officeDocument/2006/relationships" xmlns:a="http://schemas.openxmlformats.org/drawingml/2006/main" r:embed="R6d118b56ace64c27"/>
+          <a:blip xmlns:r="http://schemas.openxmlformats.org/officeDocument/2006/relationships" xmlns:a="http://schemas.openxmlformats.org/drawingml/2006/main" r:embed="R4d5bcb2e714a4cd9"/>
           <a:stretch xmlns:a="http://schemas.openxmlformats.org/drawingml/2006/main"/>
         </p:blipFill>
         <p:spPr>
@@ -18191,7 +20055,7 @@
           <p:cNvPr id="35" name="">
             <a:extLst xmlns:a="http://schemas.openxmlformats.org/drawingml/2006/main">
               <a:ext uri="{FF2B5EF4-FFF2-40B4-BE49-F238E27FC236}">
-                <a16:creationId xmlns:a16="http://schemas.microsoft.com/office/drawing/2014/main" id="{231B82BE-56FA-451E-8173-1B15FE729FB4}"/>
+                <a16:creationId xmlns:a16="http://schemas.microsoft.com/office/drawing/2014/main" id="{8A65CBFA-F1DF-45B9-A468-5AC75DB7D633}"/>
               </a:ext>
             </a:extLst>
           </p:cNvPr>
@@ -18245,7 +20109,7 @@
     </p:spTree>
     <p:extLst>
       <p:ext uri="{BB962C8B-B14F-4D97-AF65-F5344CB8AC3E}">
-        <p14:creationId xmlns:p14="http://schemas.microsoft.com/office/powerpoint/2010/main" val="1240165977"/>
+        <p14:creationId xmlns:p14="http://schemas.microsoft.com/office/powerpoint/2010/main" val="1742453660"/>
       </p:ext>
     </p:extLst>
   </p:cSld>

--- a/ppt_work/bios_ai_stage_report_package_20260528/05_BIOS_AI_阶段汇报_瑞士工程风.pptx
+++ b/ppt_work/bios_ai_stage_report_package_20260528/05_BIOS_AI_阶段汇报_瑞士工程风.pptx
@@ -2,24 +2,24 @@
 <file path=ppt/presentation.xml><?xml version="1.0" encoding="utf-8"?>
 <p:presentation xmlns:p="http://schemas.openxmlformats.org/presentationml/2006/main">
   <p:sldMasterIdLst>
-    <p:sldMasterId xmlns:r="http://schemas.openxmlformats.org/officeDocument/2006/relationships" id="2147483648" r:id="Ra9bd52ae05014e28"/>
+    <p:sldMasterId xmlns:r="http://schemas.openxmlformats.org/officeDocument/2006/relationships" id="2147483648" r:id="Rcb94839904634eaf"/>
   </p:sldMasterIdLst>
   <p:notesMasterIdLst>
-    <p:notesMasterId xmlns:r="http://schemas.openxmlformats.org/officeDocument/2006/relationships" r:id="Re800e32c9e014e01"/>
+    <p:notesMasterId xmlns:r="http://schemas.openxmlformats.org/officeDocument/2006/relationships" r:id="Rb2ee10f815a44a64"/>
   </p:notesMasterIdLst>
   <p:sldIdLst>
-    <p:sldId xmlns:r="http://schemas.openxmlformats.org/officeDocument/2006/relationships" id="256" r:id="Rf9f57ef34758479a"/>
-    <p:sldId xmlns:r="http://schemas.openxmlformats.org/officeDocument/2006/relationships" id="257" r:id="R2b1e4a32ebf54187"/>
-    <p:sldId xmlns:r="http://schemas.openxmlformats.org/officeDocument/2006/relationships" id="258" r:id="R29d2984245ad4e14"/>
-    <p:sldId xmlns:r="http://schemas.openxmlformats.org/officeDocument/2006/relationships" id="259" r:id="R2bd9fa72cffc4f07"/>
-    <p:sldId xmlns:r="http://schemas.openxmlformats.org/officeDocument/2006/relationships" id="260" r:id="Rb4fe0576500f46bd"/>
-    <p:sldId xmlns:r="http://schemas.openxmlformats.org/officeDocument/2006/relationships" id="261" r:id="R5903e3fbdbc04dfe"/>
-    <p:sldId xmlns:r="http://schemas.openxmlformats.org/officeDocument/2006/relationships" id="262" r:id="R8bdbecaf2d5d42a3"/>
-    <p:sldId xmlns:r="http://schemas.openxmlformats.org/officeDocument/2006/relationships" id="263" r:id="R2a4d58637dd94269"/>
-    <p:sldId xmlns:r="http://schemas.openxmlformats.org/officeDocument/2006/relationships" id="264" r:id="Rfb0a3b8ec1fa4ca9"/>
-    <p:sldId xmlns:r="http://schemas.openxmlformats.org/officeDocument/2006/relationships" id="265" r:id="R314eccfcf752449b"/>
-    <p:sldId xmlns:r="http://schemas.openxmlformats.org/officeDocument/2006/relationships" id="266" r:id="Rf514b0f9b00d4700"/>
-    <p:sldId xmlns:r="http://schemas.openxmlformats.org/officeDocument/2006/relationships" id="267" r:id="R49bc9948f34a4911"/>
+    <p:sldId xmlns:r="http://schemas.openxmlformats.org/officeDocument/2006/relationships" id="256" r:id="R7ea82245d1d64d00"/>
+    <p:sldId xmlns:r="http://schemas.openxmlformats.org/officeDocument/2006/relationships" id="257" r:id="R301d2b2c1e394273"/>
+    <p:sldId xmlns:r="http://schemas.openxmlformats.org/officeDocument/2006/relationships" id="258" r:id="R0b70a1bfa98840b3"/>
+    <p:sldId xmlns:r="http://schemas.openxmlformats.org/officeDocument/2006/relationships" id="259" r:id="R4f613dbccb964da4"/>
+    <p:sldId xmlns:r="http://schemas.openxmlformats.org/officeDocument/2006/relationships" id="260" r:id="R57b8419c030c47da"/>
+    <p:sldId xmlns:r="http://schemas.openxmlformats.org/officeDocument/2006/relationships" id="261" r:id="Rb6827ad651d7479a"/>
+    <p:sldId xmlns:r="http://schemas.openxmlformats.org/officeDocument/2006/relationships" id="262" r:id="Rce025a3a82204b0a"/>
+    <p:sldId xmlns:r="http://schemas.openxmlformats.org/officeDocument/2006/relationships" id="263" r:id="R95f1757a68824c33"/>
+    <p:sldId xmlns:r="http://schemas.openxmlformats.org/officeDocument/2006/relationships" id="264" r:id="Rc957f23bbc654c95"/>
+    <p:sldId xmlns:r="http://schemas.openxmlformats.org/officeDocument/2006/relationships" id="265" r:id="R1f0b8a1b95bd45ab"/>
+    <p:sldId xmlns:r="http://schemas.openxmlformats.org/officeDocument/2006/relationships" id="266" r:id="R96bf72886c44435c"/>
+    <p:sldId xmlns:r="http://schemas.openxmlformats.org/officeDocument/2006/relationships" id="267" r:id="R546b8645afeb43ae"/>
   </p:sldIdLst>
   <p:sldSz cx="12192000" cy="6858000"/>
   <p:notesSz cx="6858000" cy="9144000"/>
@@ -1292,7 +1292,7 @@
   </p:cSld>
   <p:clrMap bg1="lt1" tx1="dk1" bg2="lt2" tx2="dk2" accent1="accent1" accent2="accent2" accent3="accent3" accent4="accent4" accent5="accent5" accent6="accent6" hlink="hlink" folHlink="folHlink"/>
   <p:sldLayoutIdLst>
-    <p:sldLayoutId xmlns:r="http://schemas.openxmlformats.org/officeDocument/2006/relationships" id="2147483649" r:id="R7837d89dc2e7497a"/>
+    <p:sldLayoutId xmlns:r="http://schemas.openxmlformats.org/officeDocument/2006/relationships" id="2147483649" r:id="R6e4d5cd2cb0d4bd7"/>
   </p:sldLayoutIdLst>
   <p:txStyles>
     <p:titleStyle>
@@ -1598,7 +1598,7 @@
           <p:cNvPr id="1" name="">
             <a:extLst xmlns:a="http://schemas.openxmlformats.org/drawingml/2006/main">
               <a:ext uri="{FF2B5EF4-FFF2-40B4-BE49-F238E27FC236}">
-                <a16:creationId xmlns:a16="http://schemas.microsoft.com/office/drawing/2014/main" id="{D20FB9BB-6DF7-4D4C-ADC8-660D2EA2CD5A}"/>
+                <a16:creationId xmlns:a16="http://schemas.microsoft.com/office/drawing/2014/main" id="{7FFFE5F2-4ABF-4C12-B241-6F523C629DCF}"/>
               </a:ext>
             </a:extLst>
           </p:cNvPr>
@@ -1628,7 +1628,7 @@
           <p:cNvPr id="2" name="">
             <a:extLst xmlns:a="http://schemas.openxmlformats.org/drawingml/2006/main">
               <a:ext uri="{FF2B5EF4-FFF2-40B4-BE49-F238E27FC236}">
-                <a16:creationId xmlns:a16="http://schemas.microsoft.com/office/drawing/2014/main" id="{C52D5E36-3D30-4E0B-8E69-CF6CC03B00BF}"/>
+                <a16:creationId xmlns:a16="http://schemas.microsoft.com/office/drawing/2014/main" id="{F884D79F-9091-42D6-9224-0269AD7C64E7}"/>
               </a:ext>
             </a:extLst>
           </p:cNvPr>
@@ -1658,7 +1658,7 @@
           <p:cNvPr id="3" name="">
             <a:extLst xmlns:a="http://schemas.openxmlformats.org/drawingml/2006/main">
               <a:ext uri="{FF2B5EF4-FFF2-40B4-BE49-F238E27FC236}">
-                <a16:creationId xmlns:a16="http://schemas.microsoft.com/office/drawing/2014/main" id="{004D73B7-A567-4F3A-B687-BACCFBDDE85A}"/>
+                <a16:creationId xmlns:a16="http://schemas.microsoft.com/office/drawing/2014/main" id="{CA29FCDD-BE04-4D62-9CE2-DBE44F0DCDE5}"/>
               </a:ext>
             </a:extLst>
           </p:cNvPr>
@@ -1688,75 +1688,19 @@
           <p:cNvPr id="4" name="">
             <a:extLst xmlns:a="http://schemas.openxmlformats.org/drawingml/2006/main">
               <a:ext uri="{FF2B5EF4-FFF2-40B4-BE49-F238E27FC236}">
-                <a16:creationId xmlns:a16="http://schemas.microsoft.com/office/drawing/2014/main" id="{B577BF34-3FB2-4DB0-B56B-1BAD4E0727B6}"/>
-              </a:ext>
-            </a:extLst>
-          </p:cNvPr>
-          <p:cNvSpPr>
-            <a:spLocks xmlns:a="http://schemas.openxmlformats.org/drawingml/2006/main" noGrp="1"/>
-          </p:cNvSpPr>
-          <p:nvPr/>
-        </p:nvSpPr>
-        <p:spPr>
-          <a:xfrm xmlns:a="http://schemas.openxmlformats.org/drawingml/2006/main">
-            <a:off x="1066800" y="1238250"/>
-            <a:ext cx="7048500" cy="609600"/>
-          </a:xfrm>
-          <a:prstGeom xmlns:a="http://schemas.openxmlformats.org/drawingml/2006/main" prst="rect">
-            <a:avLst/>
-          </a:prstGeom>
-          <a:ln xmlns:a="http://schemas.openxmlformats.org/drawingml/2006/main">
-            <a:noFill/>
-          </a:ln>
-        </p:spPr>
-        <p:txBody>
-          <a:bodyPr xmlns:a="http://schemas.openxmlformats.org/drawingml/2006/main" lIns="0" tIns="0" rIns="0" bIns="0" anchor="t">
-            <a:normAutofit fontScale="98765"/>
-          </a:bodyPr>
-          <a:lstStyle xmlns:a="http://schemas.openxmlformats.org/drawingml/2006/main"/>
-          <a:p xmlns:a="http://schemas.openxmlformats.org/drawingml/2006/main">
-            <a:pPr algn="l">
-              <a:defRPr sz="4050" b="1">
-                <a:solidFill>
-                  <a:srgbClr val="111827"/>
-                </a:solidFill>
-                <a:latin typeface="PingFang SC"/>
-                <a:ea typeface="PingFang SC"/>
-                <a:cs typeface="PingFang SC"/>
-              </a:defRPr>
-            </a:pPr>
-            <a:r>
-              <a:rPr sz="4050" b="1">
-                <a:solidFill>
-                  <a:srgbClr val="111827"/>
-                </a:solidFill>
-                <a:latin typeface="PingFang SC"/>
-                <a:ea typeface="PingFang SC"/>
-                <a:cs typeface="PingFang SC"/>
-              </a:rPr>
-              <a:t>BIOS / SMBIOS 适配</a:t>
-            </a:r>
-          </a:p>
-        </p:txBody>
-      </p:sp>
-      <p:sp>
-        <p:nvSpPr>
-          <p:cNvPr id="5" name="">
-            <a:extLst xmlns:a="http://schemas.openxmlformats.org/drawingml/2006/main">
-              <a:ext uri="{FF2B5EF4-FFF2-40B4-BE49-F238E27FC236}">
-                <a16:creationId xmlns:a16="http://schemas.microsoft.com/office/drawing/2014/main" id="{1DE840AC-A8BB-47EE-9697-A74489306AD2}"/>
-              </a:ext>
-            </a:extLst>
-          </p:cNvPr>
-          <p:cNvSpPr>
-            <a:spLocks xmlns:a="http://schemas.openxmlformats.org/drawingml/2006/main" noGrp="1"/>
-          </p:cNvSpPr>
-          <p:nvPr/>
-        </p:nvSpPr>
-        <p:spPr>
-          <a:xfrm xmlns:a="http://schemas.openxmlformats.org/drawingml/2006/main">
-            <a:off x="1066800" y="1885950"/>
-            <a:ext cx="7239000" cy="609600"/>
+                <a16:creationId xmlns:a16="http://schemas.microsoft.com/office/drawing/2014/main" id="{9D6385C4-3D1D-4DE7-A015-5774CAC5A831}"/>
+              </a:ext>
+            </a:extLst>
+          </p:cNvPr>
+          <p:cNvSpPr>
+            <a:spLocks xmlns:a="http://schemas.openxmlformats.org/drawingml/2006/main" noGrp="1"/>
+          </p:cNvSpPr>
+          <p:nvPr/>
+        </p:nvSpPr>
+        <p:spPr>
+          <a:xfrm xmlns:a="http://schemas.openxmlformats.org/drawingml/2006/main">
+            <a:off x="1066800" y="1333500"/>
+            <a:ext cx="7048500" cy="723900"/>
           </a:xfrm>
           <a:prstGeom xmlns:a="http://schemas.openxmlformats.org/drawingml/2006/main" prst="rect">
             <a:avLst/>
@@ -1772,7 +1716,7 @@
           <a:lstStyle xmlns:a="http://schemas.openxmlformats.org/drawingml/2006/main"/>
           <a:p xmlns:a="http://schemas.openxmlformats.org/drawingml/2006/main">
             <a:pPr algn="l">
-              <a:defRPr sz="3150" b="1">
+              <a:defRPr sz="4650" b="1">
                 <a:solidFill>
                   <a:srgbClr val="111827"/>
                 </a:solidFill>
@@ -1782,7 +1726,7 @@
               </a:defRPr>
             </a:pPr>
             <a:r>
-              <a:rPr sz="3150" b="1">
+              <a:rPr sz="4650" b="1">
                 <a:solidFill>
                   <a:srgbClr val="111827"/>
                 </a:solidFill>
@@ -1790,7 +1734,63 @@
                 <a:ea typeface="PingFang SC"/>
                 <a:cs typeface="PingFang SC"/>
               </a:rPr>
-              <a:t>与 AI 辅助工程闭环阶段汇报</a:t>
+              <a:t>5月月度汇报</a:t>
+            </a:r>
+          </a:p>
+        </p:txBody>
+      </p:sp>
+      <p:sp>
+        <p:nvSpPr>
+          <p:cNvPr id="5" name="">
+            <a:extLst xmlns:a="http://schemas.openxmlformats.org/drawingml/2006/main">
+              <a:ext uri="{FF2B5EF4-FFF2-40B4-BE49-F238E27FC236}">
+                <a16:creationId xmlns:a16="http://schemas.microsoft.com/office/drawing/2014/main" id="{47BC9DA5-DC6E-4C6F-9599-0E05B4935DE6}"/>
+              </a:ext>
+            </a:extLst>
+          </p:cNvPr>
+          <p:cNvSpPr>
+            <a:spLocks xmlns:a="http://schemas.openxmlformats.org/drawingml/2006/main" noGrp="1"/>
+          </p:cNvSpPr>
+          <p:nvPr/>
+        </p:nvSpPr>
+        <p:spPr>
+          <a:xfrm xmlns:a="http://schemas.openxmlformats.org/drawingml/2006/main">
+            <a:off x="1066800" y="2133600"/>
+            <a:ext cx="7239000" cy="457200"/>
+          </a:xfrm>
+          <a:prstGeom xmlns:a="http://schemas.openxmlformats.org/drawingml/2006/main" prst="rect">
+            <a:avLst/>
+          </a:prstGeom>
+          <a:ln xmlns:a="http://schemas.openxmlformats.org/drawingml/2006/main">
+            <a:noFill/>
+          </a:ln>
+        </p:spPr>
+        <p:txBody>
+          <a:bodyPr xmlns:a="http://schemas.openxmlformats.org/drawingml/2006/main" lIns="0" tIns="0" rIns="0" bIns="0" anchor="t">
+            <a:normAutofit fontScale="100000"/>
+          </a:bodyPr>
+          <a:lstStyle xmlns:a="http://schemas.openxmlformats.org/drawingml/2006/main"/>
+          <a:p xmlns:a="http://schemas.openxmlformats.org/drawingml/2006/main">
+            <a:pPr algn="l">
+              <a:defRPr sz="2400" b="1">
+                <a:solidFill>
+                  <a:srgbClr val="111827"/>
+                </a:solidFill>
+                <a:latin typeface="PingFang SC"/>
+                <a:ea typeface="PingFang SC"/>
+                <a:cs typeface="PingFang SC"/>
+              </a:defRPr>
+            </a:pPr>
+            <a:r>
+              <a:rPr sz="2400" b="1">
+                <a:solidFill>
+                  <a:srgbClr val="111827"/>
+                </a:solidFill>
+                <a:latin typeface="PingFang SC"/>
+                <a:ea typeface="PingFang SC"/>
+                <a:cs typeface="PingFang SC"/>
+              </a:rPr>
+              <a:t>BIOS / SMBIOS 适配与 AI 辅助工程闭环</a:t>
             </a:r>
           </a:p>
         </p:txBody>
@@ -1800,7 +1800,7 @@
           <p:cNvPr id="6" name="">
             <a:extLst xmlns:a="http://schemas.openxmlformats.org/drawingml/2006/main">
               <a:ext uri="{FF2B5EF4-FFF2-40B4-BE49-F238E27FC236}">
-                <a16:creationId xmlns:a16="http://schemas.microsoft.com/office/drawing/2014/main" id="{BBA455A6-FBDA-404D-A741-4991D616EDC5}"/>
+                <a16:creationId xmlns:a16="http://schemas.microsoft.com/office/drawing/2014/main" id="{663B6B7A-7B02-4E7C-BB82-0FFAF339B93D}"/>
               </a:ext>
             </a:extLst>
           </p:cNvPr>
@@ -1856,7 +1856,7 @@
           <p:cNvPr id="7" name="">
             <a:extLst xmlns:a="http://schemas.openxmlformats.org/drawingml/2006/main">
               <a:ext uri="{FF2B5EF4-FFF2-40B4-BE49-F238E27FC236}">
-                <a16:creationId xmlns:a16="http://schemas.microsoft.com/office/drawing/2014/main" id="{4E7B0A90-A4DD-4B4C-822F-3C948905A58A}"/>
+                <a16:creationId xmlns:a16="http://schemas.microsoft.com/office/drawing/2014/main" id="{19D385FF-AE30-40DB-9C0C-33386944B30E}"/>
               </a:ext>
             </a:extLst>
           </p:cNvPr>
@@ -1886,7 +1886,7 @@
           <p:cNvPr id="8" name="">
             <a:extLst xmlns:a="http://schemas.openxmlformats.org/drawingml/2006/main">
               <a:ext uri="{FF2B5EF4-FFF2-40B4-BE49-F238E27FC236}">
-                <a16:creationId xmlns:a16="http://schemas.microsoft.com/office/drawing/2014/main" id="{EA122BCB-9049-4161-98CF-92E9C671581D}"/>
+                <a16:creationId xmlns:a16="http://schemas.microsoft.com/office/drawing/2014/main" id="{DDF8ECD8-F15E-4182-A420-BD59DEE7A15A}"/>
               </a:ext>
             </a:extLst>
           </p:cNvPr>
@@ -1916,7 +1916,7 @@
           <p:cNvPr id="9" name="">
             <a:extLst xmlns:a="http://schemas.openxmlformats.org/drawingml/2006/main">
               <a:ext uri="{FF2B5EF4-FFF2-40B4-BE49-F238E27FC236}">
-                <a16:creationId xmlns:a16="http://schemas.microsoft.com/office/drawing/2014/main" id="{85DCC37D-AB7A-4B23-8608-8188F633C5C6}"/>
+                <a16:creationId xmlns:a16="http://schemas.microsoft.com/office/drawing/2014/main" id="{8F0CB145-A608-404F-9D7B-1C1D16A45736}"/>
               </a:ext>
             </a:extLst>
           </p:cNvPr>
@@ -1972,7 +1972,7 @@
           <p:cNvPr id="10" name="">
             <a:extLst xmlns:a="http://schemas.openxmlformats.org/drawingml/2006/main">
               <a:ext uri="{FF2B5EF4-FFF2-40B4-BE49-F238E27FC236}">
-                <a16:creationId xmlns:a16="http://schemas.microsoft.com/office/drawing/2014/main" id="{70096F58-18FC-4318-AD56-C7DD21A11E3E}"/>
+                <a16:creationId xmlns:a16="http://schemas.microsoft.com/office/drawing/2014/main" id="{56E71592-9AEE-474C-BED9-AE066AC081A2}"/>
               </a:ext>
             </a:extLst>
           </p:cNvPr>
@@ -2028,7 +2028,7 @@
           <p:cNvPr id="11" name="">
             <a:extLst xmlns:a="http://schemas.openxmlformats.org/drawingml/2006/main">
               <a:ext uri="{FF2B5EF4-FFF2-40B4-BE49-F238E27FC236}">
-                <a16:creationId xmlns:a16="http://schemas.microsoft.com/office/drawing/2014/main" id="{B5C000D4-317E-491D-9F50-1FBAD532EB25}"/>
+                <a16:creationId xmlns:a16="http://schemas.microsoft.com/office/drawing/2014/main" id="{427E3E0D-EA50-4553-AF87-E7F6345B88A9}"/>
               </a:ext>
             </a:extLst>
           </p:cNvPr>
@@ -2058,7 +2058,7 @@
           <p:cNvPr id="12" name="">
             <a:extLst xmlns:a="http://schemas.openxmlformats.org/drawingml/2006/main">
               <a:ext uri="{FF2B5EF4-FFF2-40B4-BE49-F238E27FC236}">
-                <a16:creationId xmlns:a16="http://schemas.microsoft.com/office/drawing/2014/main" id="{AB3871A7-C33A-46B0-94A7-7C07BC659541}"/>
+                <a16:creationId xmlns:a16="http://schemas.microsoft.com/office/drawing/2014/main" id="{3B652280-13D4-424B-9C7D-B8829FE3DF62}"/>
               </a:ext>
             </a:extLst>
           </p:cNvPr>
@@ -2114,7 +2114,7 @@
           <p:cNvPr id="13" name="">
             <a:extLst xmlns:a="http://schemas.openxmlformats.org/drawingml/2006/main">
               <a:ext uri="{FF2B5EF4-FFF2-40B4-BE49-F238E27FC236}">
-                <a16:creationId xmlns:a16="http://schemas.microsoft.com/office/drawing/2014/main" id="{F770186A-8E23-4093-A71A-C821D2D66A57}"/>
+                <a16:creationId xmlns:a16="http://schemas.microsoft.com/office/drawing/2014/main" id="{776D9650-5592-4ABB-8332-BA8B4A474552}"/>
               </a:ext>
             </a:extLst>
           </p:cNvPr>
@@ -2160,7 +2160,7 @@
                 <a:ea typeface="PingFang SC"/>
                 <a:cs typeface="PingFang SC"/>
               </a:rPr>
-              <a:t>研发工程组</a:t>
+              <a:t>BIOS 腾讯组</a:t>
             </a:r>
           </a:p>
         </p:txBody>
@@ -2170,7 +2170,7 @@
           <p:cNvPr id="14" name="">
             <a:extLst xmlns:a="http://schemas.openxmlformats.org/drawingml/2006/main">
               <a:ext uri="{FF2B5EF4-FFF2-40B4-BE49-F238E27FC236}">
-                <a16:creationId xmlns:a16="http://schemas.microsoft.com/office/drawing/2014/main" id="{3EDB1280-1046-43C3-9FF9-FDDCF1A767D3}"/>
+                <a16:creationId xmlns:a16="http://schemas.microsoft.com/office/drawing/2014/main" id="{24C0295B-3F2C-4E45-AF27-9CA92CC9E7F8}"/>
               </a:ext>
             </a:extLst>
           </p:cNvPr>
@@ -2224,7 +2224,7 @@
     </p:spTree>
     <p:extLst>
       <p:ext uri="{BB962C8B-B14F-4D97-AF65-F5344CB8AC3E}">
-        <p14:creationId xmlns:p14="http://schemas.microsoft.com/office/powerpoint/2010/main" val="1182961626"/>
+        <p14:creationId xmlns:p14="http://schemas.microsoft.com/office/powerpoint/2010/main" val="687290454"/>
       </p:ext>
     </p:extLst>
   </p:cSld>
@@ -2255,7 +2255,7 @@
           <p:cNvPr id="1" name="">
             <a:extLst xmlns:a="http://schemas.openxmlformats.org/drawingml/2006/main">
               <a:ext uri="{FF2B5EF4-FFF2-40B4-BE49-F238E27FC236}">
-                <a16:creationId xmlns:a16="http://schemas.microsoft.com/office/drawing/2014/main" id="{EECADFBA-296D-4E70-9826-9C07AD3C92FD}"/>
+                <a16:creationId xmlns:a16="http://schemas.microsoft.com/office/drawing/2014/main" id="{DB10E0EB-0B23-4C56-B142-96E3B60BA967}"/>
               </a:ext>
             </a:extLst>
           </p:cNvPr>
@@ -2285,7 +2285,7 @@
           <p:cNvPr id="2" name="">
             <a:extLst xmlns:a="http://schemas.openxmlformats.org/drawingml/2006/main">
               <a:ext uri="{FF2B5EF4-FFF2-40B4-BE49-F238E27FC236}">
-                <a16:creationId xmlns:a16="http://schemas.microsoft.com/office/drawing/2014/main" id="{B3452303-8F86-414B-93CC-79BF771DF3B5}"/>
+                <a16:creationId xmlns:a16="http://schemas.microsoft.com/office/drawing/2014/main" id="{7477D18F-7060-4B2F-A0F3-0B51138D2A7F}"/>
               </a:ext>
             </a:extLst>
           </p:cNvPr>
@@ -2315,7 +2315,7 @@
           <p:cNvPr id="3" name="">
             <a:extLst xmlns:a="http://schemas.openxmlformats.org/drawingml/2006/main">
               <a:ext uri="{FF2B5EF4-FFF2-40B4-BE49-F238E27FC236}">
-                <a16:creationId xmlns:a16="http://schemas.microsoft.com/office/drawing/2014/main" id="{701A0C3A-04ED-43DA-A679-524976EAA7F1}"/>
+                <a16:creationId xmlns:a16="http://schemas.microsoft.com/office/drawing/2014/main" id="{360E4F90-73B8-4FEB-B6B0-7AE2E87B2080}"/>
               </a:ext>
             </a:extLst>
           </p:cNvPr>
@@ -2371,7 +2371,7 @@
           <p:cNvPr id="4" name="">
             <a:extLst xmlns:a="http://schemas.openxmlformats.org/drawingml/2006/main">
               <a:ext uri="{FF2B5EF4-FFF2-40B4-BE49-F238E27FC236}">
-                <a16:creationId xmlns:a16="http://schemas.microsoft.com/office/drawing/2014/main" id="{D67CE3B9-426A-4A86-B989-EA2755DBC33F}"/>
+                <a16:creationId xmlns:a16="http://schemas.microsoft.com/office/drawing/2014/main" id="{451318DC-DCD5-4EC7-94D5-FCA27C5D59D7}"/>
               </a:ext>
             </a:extLst>
           </p:cNvPr>
@@ -2427,7 +2427,7 @@
           <p:cNvPr id="5" name="">
             <a:extLst xmlns:a="http://schemas.openxmlformats.org/drawingml/2006/main">
               <a:ext uri="{FF2B5EF4-FFF2-40B4-BE49-F238E27FC236}">
-                <a16:creationId xmlns:a16="http://schemas.microsoft.com/office/drawing/2014/main" id="{2A537595-9C2C-4E14-B0AD-48E5493998B4}"/>
+                <a16:creationId xmlns:a16="http://schemas.microsoft.com/office/drawing/2014/main" id="{5BFAF69F-9494-4BB2-B9A0-5FF9FA4CD864}"/>
               </a:ext>
             </a:extLst>
           </p:cNvPr>
@@ -2457,7 +2457,7 @@
           <p:cNvPr id="6" name="">
             <a:extLst xmlns:a="http://schemas.openxmlformats.org/drawingml/2006/main">
               <a:ext uri="{FF2B5EF4-FFF2-40B4-BE49-F238E27FC236}">
-                <a16:creationId xmlns:a16="http://schemas.microsoft.com/office/drawing/2014/main" id="{CB91EB09-84C7-4796-818E-0820A8AAD9A4}"/>
+                <a16:creationId xmlns:a16="http://schemas.microsoft.com/office/drawing/2014/main" id="{256D1A67-8020-4654-BA55-49B8B1FC9B26}"/>
               </a:ext>
             </a:extLst>
           </p:cNvPr>
@@ -2513,7 +2513,7 @@
           <p:cNvPr id="7" name="">
             <a:extLst xmlns:a="http://schemas.openxmlformats.org/drawingml/2006/main">
               <a:ext uri="{FF2B5EF4-FFF2-40B4-BE49-F238E27FC236}">
-                <a16:creationId xmlns:a16="http://schemas.microsoft.com/office/drawing/2014/main" id="{CB142CE7-F656-4CCC-8DF9-024B2C80C5B2}"/>
+                <a16:creationId xmlns:a16="http://schemas.microsoft.com/office/drawing/2014/main" id="{EAF3B8F7-7EDE-4DCC-BC0C-45BB07912EBE}"/>
               </a:ext>
             </a:extLst>
           </p:cNvPr>
@@ -2543,7 +2543,7 @@
           <p:cNvPr id="8" name="">
             <a:extLst xmlns:a="http://schemas.openxmlformats.org/drawingml/2006/main">
               <a:ext uri="{FF2B5EF4-FFF2-40B4-BE49-F238E27FC236}">
-                <a16:creationId xmlns:a16="http://schemas.microsoft.com/office/drawing/2014/main" id="{152357E0-88BC-4844-9050-F0AA4F174A82}"/>
+                <a16:creationId xmlns:a16="http://schemas.microsoft.com/office/drawing/2014/main" id="{4C0985E6-A936-4C1F-A71C-2A6FAD8F16D0}"/>
               </a:ext>
             </a:extLst>
           </p:cNvPr>
@@ -2599,7 +2599,7 @@
           <p:cNvPr id="9" name="">
             <a:extLst xmlns:a="http://schemas.openxmlformats.org/drawingml/2006/main">
               <a:ext uri="{FF2B5EF4-FFF2-40B4-BE49-F238E27FC236}">
-                <a16:creationId xmlns:a16="http://schemas.microsoft.com/office/drawing/2014/main" id="{3478184F-20EA-4103-AE77-1D18C915F41B}"/>
+                <a16:creationId xmlns:a16="http://schemas.microsoft.com/office/drawing/2014/main" id="{CECE69BA-64B7-4398-BD1C-F9025F3A2AD7}"/>
               </a:ext>
             </a:extLst>
           </p:cNvPr>
@@ -2633,7 +2633,7 @@
           <p:cNvPr id="10" name="">
             <a:extLst xmlns:a="http://schemas.openxmlformats.org/drawingml/2006/main">
               <a:ext uri="{FF2B5EF4-FFF2-40B4-BE49-F238E27FC236}">
-                <a16:creationId xmlns:a16="http://schemas.microsoft.com/office/drawing/2014/main" id="{9AF32516-EB90-4D75-86BC-3BB008F89E4B}"/>
+                <a16:creationId xmlns:a16="http://schemas.microsoft.com/office/drawing/2014/main" id="{C1968CD8-F330-4E1C-84FF-5471751B4EFA}"/>
               </a:ext>
             </a:extLst>
           </p:cNvPr>
@@ -2689,7 +2689,7 @@
           <p:cNvPr id="11" name="">
             <a:extLst xmlns:a="http://schemas.openxmlformats.org/drawingml/2006/main">
               <a:ext uri="{FF2B5EF4-FFF2-40B4-BE49-F238E27FC236}">
-                <a16:creationId xmlns:a16="http://schemas.microsoft.com/office/drawing/2014/main" id="{05BE1AF6-CDEB-420E-B56B-879E91F12D4E}"/>
+                <a16:creationId xmlns:a16="http://schemas.microsoft.com/office/drawing/2014/main" id="{7457059C-0512-436A-9DA7-80E1D202146D}"/>
               </a:ext>
             </a:extLst>
           </p:cNvPr>
@@ -2745,7 +2745,7 @@
           <p:cNvPr id="12" name="">
             <a:extLst xmlns:a="http://schemas.openxmlformats.org/drawingml/2006/main">
               <a:ext uri="{FF2B5EF4-FFF2-40B4-BE49-F238E27FC236}">
-                <a16:creationId xmlns:a16="http://schemas.microsoft.com/office/drawing/2014/main" id="{FFDE5C36-7931-4496-A435-CD5172E0011E}"/>
+                <a16:creationId xmlns:a16="http://schemas.microsoft.com/office/drawing/2014/main" id="{0B40EC7F-547C-4B99-B4CF-35F127287037}"/>
               </a:ext>
             </a:extLst>
           </p:cNvPr>
@@ -2775,7 +2775,7 @@
           <p:cNvPr id="13" name="">
             <a:extLst xmlns:a="http://schemas.openxmlformats.org/drawingml/2006/main">
               <a:ext uri="{FF2B5EF4-FFF2-40B4-BE49-F238E27FC236}">
-                <a16:creationId xmlns:a16="http://schemas.microsoft.com/office/drawing/2014/main" id="{C15253FB-BE76-4DC2-AA40-65C89DEF19CA}"/>
+                <a16:creationId xmlns:a16="http://schemas.microsoft.com/office/drawing/2014/main" id="{4E105274-45D7-48BC-86CA-D73D5965D1E4}"/>
               </a:ext>
             </a:extLst>
           </p:cNvPr>
@@ -2831,7 +2831,7 @@
           <p:cNvPr id="14" name="">
             <a:extLst xmlns:a="http://schemas.openxmlformats.org/drawingml/2006/main">
               <a:ext uri="{FF2B5EF4-FFF2-40B4-BE49-F238E27FC236}">
-                <a16:creationId xmlns:a16="http://schemas.microsoft.com/office/drawing/2014/main" id="{1D045320-137C-42D1-836B-70273C0489A2}"/>
+                <a16:creationId xmlns:a16="http://schemas.microsoft.com/office/drawing/2014/main" id="{EDA4DAE6-6476-45FC-938B-3FB2BC7BB0A1}"/>
               </a:ext>
             </a:extLst>
           </p:cNvPr>
@@ -2865,7 +2865,7 @@
           <p:cNvPr id="15" name="">
             <a:extLst xmlns:a="http://schemas.openxmlformats.org/drawingml/2006/main">
               <a:ext uri="{FF2B5EF4-FFF2-40B4-BE49-F238E27FC236}">
-                <a16:creationId xmlns:a16="http://schemas.microsoft.com/office/drawing/2014/main" id="{E3043D72-2CA1-4A33-98D6-B290E3FEB858}"/>
+                <a16:creationId xmlns:a16="http://schemas.microsoft.com/office/drawing/2014/main" id="{D62C6899-2E3C-4991-9941-653AF5082647}"/>
               </a:ext>
             </a:extLst>
           </p:cNvPr>
@@ -2921,7 +2921,7 @@
           <p:cNvPr id="16" name="">
             <a:extLst xmlns:a="http://schemas.openxmlformats.org/drawingml/2006/main">
               <a:ext uri="{FF2B5EF4-FFF2-40B4-BE49-F238E27FC236}">
-                <a16:creationId xmlns:a16="http://schemas.microsoft.com/office/drawing/2014/main" id="{B85CFF44-246C-4FF8-85E7-BFE4E41DCDB5}"/>
+                <a16:creationId xmlns:a16="http://schemas.microsoft.com/office/drawing/2014/main" id="{A121015A-DA79-4278-B572-34FCC939553B}"/>
               </a:ext>
             </a:extLst>
           </p:cNvPr>
@@ -2977,7 +2977,7 @@
           <p:cNvPr id="17" name="">
             <a:extLst xmlns:a="http://schemas.openxmlformats.org/drawingml/2006/main">
               <a:ext uri="{FF2B5EF4-FFF2-40B4-BE49-F238E27FC236}">
-                <a16:creationId xmlns:a16="http://schemas.microsoft.com/office/drawing/2014/main" id="{5B1E6E86-3E8F-424C-B679-C4CEA9B918CB}"/>
+                <a16:creationId xmlns:a16="http://schemas.microsoft.com/office/drawing/2014/main" id="{5BC8BB0A-EAE6-477C-8742-82B0B565DED2}"/>
               </a:ext>
             </a:extLst>
           </p:cNvPr>
@@ -3011,7 +3011,7 @@
           <p:cNvPr id="18" name="">
             <a:extLst xmlns:a="http://schemas.openxmlformats.org/drawingml/2006/main">
               <a:ext uri="{FF2B5EF4-FFF2-40B4-BE49-F238E27FC236}">
-                <a16:creationId xmlns:a16="http://schemas.microsoft.com/office/drawing/2014/main" id="{75AC37EC-C2DD-4DA4-B4FF-2BD443B969A1}"/>
+                <a16:creationId xmlns:a16="http://schemas.microsoft.com/office/drawing/2014/main" id="{25672E4E-9962-4251-8D94-AAEB3C49AAD6}"/>
               </a:ext>
             </a:extLst>
           </p:cNvPr>
@@ -3067,7 +3067,7 @@
           <p:cNvPr id="19" name="">
             <a:extLst xmlns:a="http://schemas.openxmlformats.org/drawingml/2006/main">
               <a:ext uri="{FF2B5EF4-FFF2-40B4-BE49-F238E27FC236}">
-                <a16:creationId xmlns:a16="http://schemas.microsoft.com/office/drawing/2014/main" id="{D689E087-A4BD-4ACA-8417-0D304AEC749A}"/>
+                <a16:creationId xmlns:a16="http://schemas.microsoft.com/office/drawing/2014/main" id="{80178C0C-102F-42B4-B2A1-E9957D0A2A3A}"/>
               </a:ext>
             </a:extLst>
           </p:cNvPr>
@@ -3123,7 +3123,7 @@
           <p:cNvPr id="20" name="">
             <a:extLst xmlns:a="http://schemas.openxmlformats.org/drawingml/2006/main">
               <a:ext uri="{FF2B5EF4-FFF2-40B4-BE49-F238E27FC236}">
-                <a16:creationId xmlns:a16="http://schemas.microsoft.com/office/drawing/2014/main" id="{751926DD-3A94-4D79-AAA1-494FEAC5D4AC}"/>
+                <a16:creationId xmlns:a16="http://schemas.microsoft.com/office/drawing/2014/main" id="{1A901004-10F6-4156-A74C-A45084B705FC}"/>
               </a:ext>
             </a:extLst>
           </p:cNvPr>
@@ -3157,7 +3157,7 @@
           <p:cNvPr id="21" name="">
             <a:extLst xmlns:a="http://schemas.openxmlformats.org/drawingml/2006/main">
               <a:ext uri="{FF2B5EF4-FFF2-40B4-BE49-F238E27FC236}">
-                <a16:creationId xmlns:a16="http://schemas.microsoft.com/office/drawing/2014/main" id="{B1F0D53D-2603-4CB3-A5CD-F7544F1C896C}"/>
+                <a16:creationId xmlns:a16="http://schemas.microsoft.com/office/drawing/2014/main" id="{4BCEB9EE-B1EC-4026-B97E-D1EDC70A410D}"/>
               </a:ext>
             </a:extLst>
           </p:cNvPr>
@@ -3213,7 +3213,7 @@
           <p:cNvPr id="22" name="">
             <a:extLst xmlns:a="http://schemas.openxmlformats.org/drawingml/2006/main">
               <a:ext uri="{FF2B5EF4-FFF2-40B4-BE49-F238E27FC236}">
-                <a16:creationId xmlns:a16="http://schemas.microsoft.com/office/drawing/2014/main" id="{35B9E28C-0B7F-47AD-93E3-8D83D276BC6F}"/>
+                <a16:creationId xmlns:a16="http://schemas.microsoft.com/office/drawing/2014/main" id="{FF153E05-38C0-4040-9C7E-9DF302D3A833}"/>
               </a:ext>
             </a:extLst>
           </p:cNvPr>
@@ -3247,7 +3247,7 @@
           <p:cNvPr id="23" name="">
             <a:extLst xmlns:a="http://schemas.openxmlformats.org/drawingml/2006/main">
               <a:ext uri="{FF2B5EF4-FFF2-40B4-BE49-F238E27FC236}">
-                <a16:creationId xmlns:a16="http://schemas.microsoft.com/office/drawing/2014/main" id="{6B0247F7-D2ED-4B46-B748-AC98CB44808C}"/>
+                <a16:creationId xmlns:a16="http://schemas.microsoft.com/office/drawing/2014/main" id="{8AC51051-3D77-48F2-B4D3-391B72E611D3}"/>
               </a:ext>
             </a:extLst>
           </p:cNvPr>
@@ -3303,7 +3303,7 @@
           <p:cNvPr id="24" name="">
             <a:extLst xmlns:a="http://schemas.openxmlformats.org/drawingml/2006/main">
               <a:ext uri="{FF2B5EF4-FFF2-40B4-BE49-F238E27FC236}">
-                <a16:creationId xmlns:a16="http://schemas.microsoft.com/office/drawing/2014/main" id="{38C13DAC-A3C9-4E26-BE8B-F6ADD0CCAF2C}"/>
+                <a16:creationId xmlns:a16="http://schemas.microsoft.com/office/drawing/2014/main" id="{5F3AAD3B-A777-4C7D-934B-00EE792A0D97}"/>
               </a:ext>
             </a:extLst>
           </p:cNvPr>
@@ -3359,7 +3359,7 @@
           <p:cNvPr id="25" name="">
             <a:extLst xmlns:a="http://schemas.openxmlformats.org/drawingml/2006/main">
               <a:ext uri="{FF2B5EF4-FFF2-40B4-BE49-F238E27FC236}">
-                <a16:creationId xmlns:a16="http://schemas.microsoft.com/office/drawing/2014/main" id="{AB088619-A14A-47B2-B1C4-3291EAF60583}"/>
+                <a16:creationId xmlns:a16="http://schemas.microsoft.com/office/drawing/2014/main" id="{D1C3E892-3C79-4FDB-AD00-859455B65110}"/>
               </a:ext>
             </a:extLst>
           </p:cNvPr>
@@ -3393,7 +3393,7 @@
           <p:cNvPr id="26" name="">
             <a:extLst xmlns:a="http://schemas.openxmlformats.org/drawingml/2006/main">
               <a:ext uri="{FF2B5EF4-FFF2-40B4-BE49-F238E27FC236}">
-                <a16:creationId xmlns:a16="http://schemas.microsoft.com/office/drawing/2014/main" id="{34E962E3-DCDB-4638-AA89-8C8AB5F7B57A}"/>
+                <a16:creationId xmlns:a16="http://schemas.microsoft.com/office/drawing/2014/main" id="{4FFC756B-2D10-4E0D-8B33-08B666294BAF}"/>
               </a:ext>
             </a:extLst>
           </p:cNvPr>
@@ -3449,7 +3449,7 @@
           <p:cNvPr id="27" name="">
             <a:extLst xmlns:a="http://schemas.openxmlformats.org/drawingml/2006/main">
               <a:ext uri="{FF2B5EF4-FFF2-40B4-BE49-F238E27FC236}">
-                <a16:creationId xmlns:a16="http://schemas.microsoft.com/office/drawing/2014/main" id="{EB108D87-4146-4A3F-9434-00FA28B51C4D}"/>
+                <a16:creationId xmlns:a16="http://schemas.microsoft.com/office/drawing/2014/main" id="{22DD544C-6544-49A1-A20E-154FC3D69C65}"/>
               </a:ext>
             </a:extLst>
           </p:cNvPr>
@@ -3505,7 +3505,7 @@
           <p:cNvPr id="28" name="">
             <a:extLst xmlns:a="http://schemas.openxmlformats.org/drawingml/2006/main">
               <a:ext uri="{FF2B5EF4-FFF2-40B4-BE49-F238E27FC236}">
-                <a16:creationId xmlns:a16="http://schemas.microsoft.com/office/drawing/2014/main" id="{CFFE2F62-0764-4018-8E6B-A3B5AD824427}"/>
+                <a16:creationId xmlns:a16="http://schemas.microsoft.com/office/drawing/2014/main" id="{E0E34000-506B-40CD-B7BA-9F8F2ED49BAA}"/>
               </a:ext>
             </a:extLst>
           </p:cNvPr>
@@ -3539,7 +3539,7 @@
           <p:cNvPr id="29" name="">
             <a:extLst xmlns:a="http://schemas.openxmlformats.org/drawingml/2006/main">
               <a:ext uri="{FF2B5EF4-FFF2-40B4-BE49-F238E27FC236}">
-                <a16:creationId xmlns:a16="http://schemas.microsoft.com/office/drawing/2014/main" id="{A77E3723-19FB-4F0C-9724-628AAB730423}"/>
+                <a16:creationId xmlns:a16="http://schemas.microsoft.com/office/drawing/2014/main" id="{7ECA005E-C99E-4CA3-9FB7-3BF29F8128DF}"/>
               </a:ext>
             </a:extLst>
           </p:cNvPr>
@@ -3595,7 +3595,7 @@
           <p:cNvPr id="30" name="">
             <a:extLst xmlns:a="http://schemas.openxmlformats.org/drawingml/2006/main">
               <a:ext uri="{FF2B5EF4-FFF2-40B4-BE49-F238E27FC236}">
-                <a16:creationId xmlns:a16="http://schemas.microsoft.com/office/drawing/2014/main" id="{6FB89C23-5682-484B-AB0E-554CD14965DB}"/>
+                <a16:creationId xmlns:a16="http://schemas.microsoft.com/office/drawing/2014/main" id="{8C7E4E62-CE57-4D57-BE78-A965DE4E80D4}"/>
               </a:ext>
             </a:extLst>
           </p:cNvPr>
@@ -3625,7 +3625,7 @@
           <p:cNvPr id="31" name="">
             <a:extLst xmlns:a="http://schemas.openxmlformats.org/drawingml/2006/main">
               <a:ext uri="{FF2B5EF4-FFF2-40B4-BE49-F238E27FC236}">
-                <a16:creationId xmlns:a16="http://schemas.microsoft.com/office/drawing/2014/main" id="{807D5252-FA46-4661-9690-C8E4126EC96A}"/>
+                <a16:creationId xmlns:a16="http://schemas.microsoft.com/office/drawing/2014/main" id="{12B29A5F-F6D5-4C2B-A7B6-6AE1C7A999BA}"/>
               </a:ext>
             </a:extLst>
           </p:cNvPr>
@@ -3681,7 +3681,7 @@
           <p:cNvPr id="32" name="">
             <a:extLst xmlns:a="http://schemas.openxmlformats.org/drawingml/2006/main">
               <a:ext uri="{FF2B5EF4-FFF2-40B4-BE49-F238E27FC236}">
-                <a16:creationId xmlns:a16="http://schemas.microsoft.com/office/drawing/2014/main" id="{C6045E1D-0021-40CE-B20F-5EB65C04A3E5}"/>
+                <a16:creationId xmlns:a16="http://schemas.microsoft.com/office/drawing/2014/main" id="{2A510C63-DE29-4461-96A5-66712B53316B}"/>
               </a:ext>
             </a:extLst>
           </p:cNvPr>
@@ -3737,7 +3737,7 @@
           <p:cNvPr id="33" name="">
             <a:extLst xmlns:a="http://schemas.openxmlformats.org/drawingml/2006/main">
               <a:ext uri="{FF2B5EF4-FFF2-40B4-BE49-F238E27FC236}">
-                <a16:creationId xmlns:a16="http://schemas.microsoft.com/office/drawing/2014/main" id="{70D3AB1D-860E-4340-A0AF-7AC453566AC9}"/>
+                <a16:creationId xmlns:a16="http://schemas.microsoft.com/office/drawing/2014/main" id="{D31DF38E-98D1-43E8-8DC7-BB458C60A84F}"/>
               </a:ext>
             </a:extLst>
           </p:cNvPr>
@@ -3767,7 +3767,7 @@
           <p:cNvPr id="34" name="">
             <a:extLst xmlns:a="http://schemas.openxmlformats.org/drawingml/2006/main">
               <a:ext uri="{FF2B5EF4-FFF2-40B4-BE49-F238E27FC236}">
-                <a16:creationId xmlns:a16="http://schemas.microsoft.com/office/drawing/2014/main" id="{475BD528-A608-4DCA-9A68-F05BA85A1846}"/>
+                <a16:creationId xmlns:a16="http://schemas.microsoft.com/office/drawing/2014/main" id="{744730E8-70EF-4DE2-A4B5-26A3CCA0C7D7}"/>
               </a:ext>
             </a:extLst>
           </p:cNvPr>
@@ -3823,7 +3823,7 @@
           <p:cNvPr id="35" name="">
             <a:extLst xmlns:a="http://schemas.openxmlformats.org/drawingml/2006/main">
               <a:ext uri="{FF2B5EF4-FFF2-40B4-BE49-F238E27FC236}">
-                <a16:creationId xmlns:a16="http://schemas.microsoft.com/office/drawing/2014/main" id="{AB28ADB3-A2A8-4B67-A84A-19B5A350DF4D}"/>
+                <a16:creationId xmlns:a16="http://schemas.microsoft.com/office/drawing/2014/main" id="{ED33162A-135B-4473-AC82-E166D3799E7C}"/>
               </a:ext>
             </a:extLst>
           </p:cNvPr>
@@ -3846,7 +3846,7 @@
         </p:spPr>
         <p:txBody>
           <a:bodyPr xmlns:a="http://schemas.openxmlformats.org/drawingml/2006/main" lIns="0" tIns="0" rIns="0" bIns="0" anchor="t">
-            <a:normAutofit fontScale="83333"/>
+            <a:normAutofit fontScale="88482"/>
           </a:bodyPr>
           <a:lstStyle xmlns:a="http://schemas.openxmlformats.org/drawingml/2006/main"/>
           <a:p xmlns:a="http://schemas.openxmlformats.org/drawingml/2006/main">
@@ -3869,7 +3869,7 @@
                 <a:ea typeface="PingFang SC"/>
                 <a:cs typeface="PingFang SC"/>
               </a:rPr>
-              <a:t>记录模块、配置、调用链和 reporting-flow 是否足够。</a:t>
+              <a:t>记录模块、配置、调用链和上报路径是否足够。</a:t>
             </a:r>
           </a:p>
         </p:txBody>
@@ -3879,7 +3879,7 @@
           <p:cNvPr id="36" name="">
             <a:extLst xmlns:a="http://schemas.openxmlformats.org/drawingml/2006/main">
               <a:ext uri="{FF2B5EF4-FFF2-40B4-BE49-F238E27FC236}">
-                <a16:creationId xmlns:a16="http://schemas.microsoft.com/office/drawing/2014/main" id="{A151FAFA-7AF2-4A0A-BC18-BDB8B4589A94}"/>
+                <a16:creationId xmlns:a16="http://schemas.microsoft.com/office/drawing/2014/main" id="{3805A13D-C041-4785-96ED-0BEC254BA7F9}"/>
               </a:ext>
             </a:extLst>
           </p:cNvPr>
@@ -3909,7 +3909,7 @@
           <p:cNvPr id="37" name="">
             <a:extLst xmlns:a="http://schemas.openxmlformats.org/drawingml/2006/main">
               <a:ext uri="{FF2B5EF4-FFF2-40B4-BE49-F238E27FC236}">
-                <a16:creationId xmlns:a16="http://schemas.microsoft.com/office/drawing/2014/main" id="{6CB8B7D0-3707-415F-98AA-6304256852D7}"/>
+                <a16:creationId xmlns:a16="http://schemas.microsoft.com/office/drawing/2014/main" id="{4921CE74-AC7E-4D41-801A-589FE1312B2A}"/>
               </a:ext>
             </a:extLst>
           </p:cNvPr>
@@ -3965,7 +3965,7 @@
           <p:cNvPr id="38" name="">
             <a:extLst xmlns:a="http://schemas.openxmlformats.org/drawingml/2006/main">
               <a:ext uri="{FF2B5EF4-FFF2-40B4-BE49-F238E27FC236}">
-                <a16:creationId xmlns:a16="http://schemas.microsoft.com/office/drawing/2014/main" id="{87F86E20-3F90-44F9-A5DC-3F949A1126E7}"/>
+                <a16:creationId xmlns:a16="http://schemas.microsoft.com/office/drawing/2014/main" id="{07F5BFDA-8BE8-452C-BF23-FCEDA2919B5E}"/>
               </a:ext>
             </a:extLst>
           </p:cNvPr>
@@ -4016,56 +4016,46 @@
           </a:p>
         </p:txBody>
       </p:sp>
-      <p:sp>
-        <p:nvSpPr>
-          <p:cNvPr id="39" name="">
-            <a:extLst xmlns:a="http://schemas.openxmlformats.org/drawingml/2006/main">
-              <a:ext uri="{FF2B5EF4-FFF2-40B4-BE49-F238E27FC236}">
-                <a16:creationId xmlns:a16="http://schemas.microsoft.com/office/drawing/2014/main" id="{513E910D-B1E1-4CEA-8FDD-47A753EF3D7D}"/>
-              </a:ext>
-            </a:extLst>
-          </p:cNvPr>
-          <p:cNvSpPr>
-            <a:spLocks xmlns:a="http://schemas.openxmlformats.org/drawingml/2006/main" noGrp="1"/>
-          </p:cNvSpPr>
-          <p:nvPr/>
-        </p:nvSpPr>
-        <p:spPr>
-          <a:xfrm xmlns:a="http://schemas.openxmlformats.org/drawingml/2006/main">
-            <a:off x="7010400" y="1962150"/>
-            <a:ext cx="3429000" cy="2495550"/>
-          </a:xfrm>
-          <a:prstGeom xmlns:a="http://schemas.openxmlformats.org/drawingml/2006/main" prst="rect">
-            <a:avLst/>
-          </a:prstGeom>
-          <a:solidFill xmlns:a="http://schemas.openxmlformats.org/drawingml/2006/main">
-            <a:srgbClr val="F8FAFE"/>
-          </a:solidFill>
-          <a:ln xmlns:a="http://schemas.openxmlformats.org/drawingml/2006/main" w="9525">
-            <a:solidFill>
-              <a:srgbClr val="CBD5E1"/>
-            </a:solidFill>
-          </a:ln>
-        </p:spPr>
-      </p:sp>
+      <p:pic>
+        <p:nvPicPr>
+          <p:cNvPr id="39" name=""/>
+          <p:cNvPicPr>
+            <a:picLocks xmlns:a="http://schemas.openxmlformats.org/drawingml/2006/main" noChangeAspect="1"/>
+          </p:cNvPicPr>
+          <p:nvPr/>
+        </p:nvPicPr>
+        <p:blipFill>
+          <a:blip xmlns:r="http://schemas.openxmlformats.org/officeDocument/2006/relationships" xmlns:a="http://schemas.openxmlformats.org/drawingml/2006/main" r:embed="R84cfe77cfce9458e"/>
+          <a:stretch xmlns:a="http://schemas.openxmlformats.org/drawingml/2006/main"/>
+        </p:blipFill>
+        <p:spPr>
+          <a:xfrm xmlns:a="http://schemas.openxmlformats.org/drawingml/2006/main">
+            <a:off x="7940505" y="1809750"/>
+            <a:ext cx="1568790" cy="2457450"/>
+          </a:xfrm>
+          <a:prstGeom xmlns:a="http://schemas.openxmlformats.org/drawingml/2006/main" prst="rect">
+            <a:avLst/>
+          </a:prstGeom>
+        </p:spPr>
+      </p:pic>
       <p:sp>
         <p:nvSpPr>
           <p:cNvPr id="40" name="">
             <a:extLst xmlns:a="http://schemas.openxmlformats.org/drawingml/2006/main">
               <a:ext uri="{FF2B5EF4-FFF2-40B4-BE49-F238E27FC236}">
-                <a16:creationId xmlns:a16="http://schemas.microsoft.com/office/drawing/2014/main" id="{7466C17E-AD2F-48EE-98AB-8D2427ABCDBC}"/>
-              </a:ext>
-            </a:extLst>
-          </p:cNvPr>
-          <p:cNvSpPr>
-            <a:spLocks xmlns:a="http://schemas.openxmlformats.org/drawingml/2006/main" noGrp="1"/>
-          </p:cNvSpPr>
-          <p:nvPr/>
-        </p:nvSpPr>
-        <p:spPr>
-          <a:xfrm xmlns:a="http://schemas.openxmlformats.org/drawingml/2006/main">
-            <a:off x="7258050" y="2209800"/>
-            <a:ext cx="2933700" cy="285750"/>
+                <a16:creationId xmlns:a16="http://schemas.microsoft.com/office/drawing/2014/main" id="{218C7145-0563-4E0B-A9BB-D8FF7EB85E60}"/>
+              </a:ext>
+            </a:extLst>
+          </p:cNvPr>
+          <p:cNvSpPr>
+            <a:spLocks xmlns:a="http://schemas.openxmlformats.org/drawingml/2006/main" noGrp="1"/>
+          </p:cNvSpPr>
+          <p:nvPr/>
+        </p:nvSpPr>
+        <p:spPr>
+          <a:xfrm xmlns:a="http://schemas.openxmlformats.org/drawingml/2006/main">
+            <a:off x="7010400" y="4343400"/>
+            <a:ext cx="3429000" cy="190500"/>
           </a:xfrm>
           <a:prstGeom xmlns:a="http://schemas.openxmlformats.org/drawingml/2006/main" prst="rect">
             <a:avLst/>
@@ -4081,25 +4071,25 @@
           <a:lstStyle xmlns:a="http://schemas.openxmlformats.org/drawingml/2006/main"/>
           <a:p xmlns:a="http://schemas.openxmlformats.org/drawingml/2006/main">
             <a:pPr algn="ctr">
-              <a:defRPr sz="1650" b="1">
-                <a:solidFill>
-                  <a:srgbClr val="111827"/>
-                </a:solidFill>
-                <a:latin typeface="PingFang SC"/>
-                <a:ea typeface="PingFang SC"/>
-                <a:cs typeface="PingFang SC"/>
-              </a:defRPr>
-            </a:pPr>
-            <a:r>
-              <a:rPr sz="1650" b="1">
-                <a:solidFill>
-                  <a:srgbClr val="111827"/>
-                </a:solidFill>
-                <a:latin typeface="PingFang SC"/>
-                <a:ea typeface="PingFang SC"/>
-                <a:cs typeface="PingFang SC"/>
-              </a:rPr>
-              <a:t>截图位 1</a:t>
+              <a:defRPr sz="900" b="1">
+                <a:solidFill>
+                  <a:srgbClr val="5B6472"/>
+                </a:solidFill>
+                <a:latin typeface="PingFang SC"/>
+                <a:ea typeface="PingFang SC"/>
+                <a:cs typeface="PingFang SC"/>
+              </a:defRPr>
+            </a:pPr>
+            <a:r>
+              <a:rPr sz="900" b="1">
+                <a:solidFill>
+                  <a:srgbClr val="5B6472"/>
+                </a:solidFill>
+                <a:latin typeface="PingFang SC"/>
+                <a:ea typeface="PingFang SC"/>
+                <a:cs typeface="PingFang SC"/>
+              </a:rPr>
+              <a:t>AI Review 上下文材料与 planner 记录</a:t>
             </a:r>
           </a:p>
         </p:txBody>
@@ -4109,149 +4099,7 @@
           <p:cNvPr id="41" name="">
             <a:extLst xmlns:a="http://schemas.openxmlformats.org/drawingml/2006/main">
               <a:ext uri="{FF2B5EF4-FFF2-40B4-BE49-F238E27FC236}">
-                <a16:creationId xmlns:a16="http://schemas.microsoft.com/office/drawing/2014/main" id="{FF8C2172-059D-450B-A62C-D271D374B1AA}"/>
-              </a:ext>
-            </a:extLst>
-          </p:cNvPr>
-          <p:cNvSpPr>
-            <a:spLocks xmlns:a="http://schemas.openxmlformats.org/drawingml/2006/main" noGrp="1"/>
-          </p:cNvSpPr>
-          <p:nvPr/>
-        </p:nvSpPr>
-        <p:spPr>
-          <a:xfrm xmlns:a="http://schemas.openxmlformats.org/drawingml/2006/main">
-            <a:off x="7334250" y="3133725"/>
-            <a:ext cx="2781300" cy="514350"/>
-          </a:xfrm>
-          <a:prstGeom xmlns:a="http://schemas.openxmlformats.org/drawingml/2006/main" prst="rect">
-            <a:avLst/>
-          </a:prstGeom>
-          <a:ln xmlns:a="http://schemas.openxmlformats.org/drawingml/2006/main">
-            <a:noFill/>
-          </a:ln>
-        </p:spPr>
-        <p:txBody>
-          <a:bodyPr xmlns:a="http://schemas.openxmlformats.org/drawingml/2006/main" lIns="0" tIns="0" rIns="0" bIns="0" anchor="ctr">
-            <a:normAutofit fontScale="100000"/>
-          </a:bodyPr>
-          <a:lstStyle xmlns:a="http://schemas.openxmlformats.org/drawingml/2006/main"/>
-          <a:p xmlns:a="http://schemas.openxmlformats.org/drawingml/2006/main">
-            <a:pPr algn="ctr">
-              <a:defRPr sz="1275" b="0">
-                <a:solidFill>
-                  <a:srgbClr val="5B6472"/>
-                </a:solidFill>
-                <a:latin typeface="PingFang SC"/>
-                <a:ea typeface="PingFang SC"/>
-                <a:cs typeface="PingFang SC"/>
-              </a:defRPr>
-            </a:pPr>
-            <a:r>
-              <a:rPr sz="1275" b="0">
-                <a:solidFill>
-                  <a:srgbClr val="5B6472"/>
-                </a:solidFill>
-                <a:latin typeface="PingFang SC"/>
-                <a:ea typeface="PingFang SC"/>
-                <a:cs typeface="PingFang SC"/>
-              </a:rPr>
-              <a:t>上下文材料 / 覆盖记录 / 管理员页面截图</a:t>
-            </a:r>
-          </a:p>
-        </p:txBody>
-      </p:sp>
-      <p:sp>
-        <p:nvSpPr>
-          <p:cNvPr id="42" name="">
-            <a:extLst xmlns:a="http://schemas.openxmlformats.org/drawingml/2006/main">
-              <a:ext uri="{FF2B5EF4-FFF2-40B4-BE49-F238E27FC236}">
-                <a16:creationId xmlns:a16="http://schemas.microsoft.com/office/drawing/2014/main" id="{7F462AF6-5ADA-46BC-944F-918EB2E492BD}"/>
-              </a:ext>
-            </a:extLst>
-          </p:cNvPr>
-          <p:cNvSpPr>
-            <a:spLocks xmlns:a="http://schemas.openxmlformats.org/drawingml/2006/main" noGrp="1"/>
-          </p:cNvSpPr>
-          <p:nvPr/>
-        </p:nvSpPr>
-        <p:spPr>
-          <a:xfrm xmlns:a="http://schemas.openxmlformats.org/drawingml/2006/main">
-            <a:off x="7372350" y="4038600"/>
-            <a:ext cx="2705100" cy="9525"/>
-          </a:xfrm>
-          <a:prstGeom xmlns:a="http://schemas.openxmlformats.org/drawingml/2006/main" prst="rect">
-            <a:avLst/>
-          </a:prstGeom>
-          <a:solidFill xmlns:a="http://schemas.openxmlformats.org/drawingml/2006/main">
-            <a:srgbClr val="E6EBF2"/>
-          </a:solidFill>
-          <a:ln xmlns:a="http://schemas.openxmlformats.org/drawingml/2006/main">
-            <a:noFill/>
-          </a:ln>
-        </p:spPr>
-      </p:sp>
-      <p:sp>
-        <p:nvSpPr>
-          <p:cNvPr id="43" name="">
-            <a:extLst xmlns:a="http://schemas.openxmlformats.org/drawingml/2006/main">
-              <a:ext uri="{FF2B5EF4-FFF2-40B4-BE49-F238E27FC236}">
-                <a16:creationId xmlns:a16="http://schemas.microsoft.com/office/drawing/2014/main" id="{814A3E05-7FF5-4B90-ADA0-C111AB77BD8A}"/>
-              </a:ext>
-            </a:extLst>
-          </p:cNvPr>
-          <p:cNvSpPr>
-            <a:spLocks xmlns:a="http://schemas.openxmlformats.org/drawingml/2006/main" noGrp="1"/>
-          </p:cNvSpPr>
-          <p:nvPr/>
-        </p:nvSpPr>
-        <p:spPr>
-          <a:xfrm xmlns:a="http://schemas.openxmlformats.org/drawingml/2006/main">
-            <a:off x="7334250" y="4133850"/>
-            <a:ext cx="2781300" cy="171450"/>
-          </a:xfrm>
-          <a:prstGeom xmlns:a="http://schemas.openxmlformats.org/drawingml/2006/main" prst="rect">
-            <a:avLst/>
-          </a:prstGeom>
-          <a:ln xmlns:a="http://schemas.openxmlformats.org/drawingml/2006/main">
-            <a:noFill/>
-          </a:ln>
-        </p:spPr>
-        <p:txBody>
-          <a:bodyPr xmlns:a="http://schemas.openxmlformats.org/drawingml/2006/main" lIns="0" tIns="0" rIns="0" bIns="0" anchor="t">
-            <a:normAutofit fontScale="100000"/>
-          </a:bodyPr>
-          <a:lstStyle xmlns:a="http://schemas.openxmlformats.org/drawingml/2006/main"/>
-          <a:p xmlns:a="http://schemas.openxmlformats.org/drawingml/2006/main">
-            <a:pPr algn="ctr">
-              <a:defRPr sz="900" b="0">
-                <a:solidFill>
-                  <a:srgbClr val="5B6472"/>
-                </a:solidFill>
-                <a:latin typeface="PingFang SC"/>
-                <a:ea typeface="PingFang SC"/>
-                <a:cs typeface="PingFang SC"/>
-              </a:defRPr>
-            </a:pPr>
-            <a:r>
-              <a:rPr sz="900" b="0">
-                <a:solidFill>
-                  <a:srgbClr val="5B6472"/>
-                </a:solidFill>
-                <a:latin typeface="PingFang SC"/>
-                <a:ea typeface="PingFang SC"/>
-                <a:cs typeface="PingFang SC"/>
-              </a:rPr>
-              <a:t>后续替换为实际截图</a:t>
-            </a:r>
-          </a:p>
-        </p:txBody>
-      </p:sp>
-      <p:sp>
-        <p:nvSpPr>
-          <p:cNvPr id="44" name="">
-            <a:extLst xmlns:a="http://schemas.openxmlformats.org/drawingml/2006/main">
-              <a:ext uri="{FF2B5EF4-FFF2-40B4-BE49-F238E27FC236}">
-                <a16:creationId xmlns:a16="http://schemas.microsoft.com/office/drawing/2014/main" id="{4D3B0E42-3157-4DA6-8C9C-33E15F40EFB2}"/>
+                <a16:creationId xmlns:a16="http://schemas.microsoft.com/office/drawing/2014/main" id="{E57C7C8E-F795-4116-9A66-DA6CB46A7793}"/>
               </a:ext>
             </a:extLst>
           </p:cNvPr>
@@ -4278,10 +4126,10 @@
       </p:sp>
       <p:sp>
         <p:nvSpPr>
-          <p:cNvPr id="45" name="">
-            <a:extLst xmlns:a="http://schemas.openxmlformats.org/drawingml/2006/main">
-              <a:ext uri="{FF2B5EF4-FFF2-40B4-BE49-F238E27FC236}">
-                <a16:creationId xmlns:a16="http://schemas.microsoft.com/office/drawing/2014/main" id="{08EFE54A-0D49-48AF-B5F2-6F1F3954207F}"/>
+          <p:cNvPr id="42" name="">
+            <a:extLst xmlns:a="http://schemas.openxmlformats.org/drawingml/2006/main">
+              <a:ext uri="{FF2B5EF4-FFF2-40B4-BE49-F238E27FC236}">
+                <a16:creationId xmlns:a16="http://schemas.microsoft.com/office/drawing/2014/main" id="{46A43D46-CD44-4D4D-A284-DA1A62ED918B}"/>
               </a:ext>
             </a:extLst>
           </p:cNvPr>
@@ -4334,10 +4182,10 @@
       </p:sp>
       <p:sp>
         <p:nvSpPr>
-          <p:cNvPr id="46" name="">
-            <a:extLst xmlns:a="http://schemas.openxmlformats.org/drawingml/2006/main">
-              <a:ext uri="{FF2B5EF4-FFF2-40B4-BE49-F238E27FC236}">
-                <a16:creationId xmlns:a16="http://schemas.microsoft.com/office/drawing/2014/main" id="{29DA2B0D-9E77-4B70-AE47-A833FADB77C0}"/>
+          <p:cNvPr id="43" name="">
+            <a:extLst xmlns:a="http://schemas.openxmlformats.org/drawingml/2006/main">
+              <a:ext uri="{FF2B5EF4-FFF2-40B4-BE49-F238E27FC236}">
+                <a16:creationId xmlns:a16="http://schemas.microsoft.com/office/drawing/2014/main" id="{A5B8C2A8-8CA4-4B61-B241-D65159E47A48}"/>
               </a:ext>
             </a:extLst>
           </p:cNvPr>
@@ -4390,10 +4238,10 @@
       </p:sp>
       <p:sp>
         <p:nvSpPr>
-          <p:cNvPr id="47" name="">
-            <a:extLst xmlns:a="http://schemas.openxmlformats.org/drawingml/2006/main">
-              <a:ext uri="{FF2B5EF4-FFF2-40B4-BE49-F238E27FC236}">
-                <a16:creationId xmlns:a16="http://schemas.microsoft.com/office/drawing/2014/main" id="{CEA7240C-0777-47EF-A986-20AC9206DF3E}"/>
+          <p:cNvPr id="44" name="">
+            <a:extLst xmlns:a="http://schemas.openxmlformats.org/drawingml/2006/main">
+              <a:ext uri="{FF2B5EF4-FFF2-40B4-BE49-F238E27FC236}">
+                <a16:creationId xmlns:a16="http://schemas.microsoft.com/office/drawing/2014/main" id="{5D5CFE33-A378-4301-978E-CF183439D88E}"/>
               </a:ext>
             </a:extLst>
           </p:cNvPr>
@@ -4446,10 +4294,10 @@
       </p:sp>
       <p:sp>
         <p:nvSpPr>
-          <p:cNvPr id="48" name="">
-            <a:extLst xmlns:a="http://schemas.openxmlformats.org/drawingml/2006/main">
-              <a:ext uri="{FF2B5EF4-FFF2-40B4-BE49-F238E27FC236}">
-                <a16:creationId xmlns:a16="http://schemas.microsoft.com/office/drawing/2014/main" id="{BD86D483-B836-4D21-9B5B-1FAF99809343}"/>
+          <p:cNvPr id="45" name="">
+            <a:extLst xmlns:a="http://schemas.openxmlformats.org/drawingml/2006/main">
+              <a:ext uri="{FF2B5EF4-FFF2-40B4-BE49-F238E27FC236}">
+                <a16:creationId xmlns:a16="http://schemas.microsoft.com/office/drawing/2014/main" id="{B35EDAB3-6024-47F0-B60D-7B907B6E8CF7}"/>
               </a:ext>
             </a:extLst>
           </p:cNvPr>
@@ -4478,10 +4326,10 @@
       </p:sp>
       <p:sp>
         <p:nvSpPr>
-          <p:cNvPr id="49" name="">
-            <a:extLst xmlns:a="http://schemas.openxmlformats.org/drawingml/2006/main">
-              <a:ext uri="{FF2B5EF4-FFF2-40B4-BE49-F238E27FC236}">
-                <a16:creationId xmlns:a16="http://schemas.microsoft.com/office/drawing/2014/main" id="{C4F48E52-B6E7-492C-A94E-54CE5D1CC43F}"/>
+          <p:cNvPr id="46" name="">
+            <a:extLst xmlns:a="http://schemas.openxmlformats.org/drawingml/2006/main">
+              <a:ext uri="{FF2B5EF4-FFF2-40B4-BE49-F238E27FC236}">
+                <a16:creationId xmlns:a16="http://schemas.microsoft.com/office/drawing/2014/main" id="{005A6DAC-96A4-49B8-8D55-1109489B03AC}"/>
               </a:ext>
             </a:extLst>
           </p:cNvPr>
@@ -4534,10 +4382,10 @@
       </p:sp>
       <p:sp>
         <p:nvSpPr>
-          <p:cNvPr id="50" name="">
-            <a:extLst xmlns:a="http://schemas.openxmlformats.org/drawingml/2006/main">
-              <a:ext uri="{FF2B5EF4-FFF2-40B4-BE49-F238E27FC236}">
-                <a16:creationId xmlns:a16="http://schemas.microsoft.com/office/drawing/2014/main" id="{9DAE566E-AFC5-4881-AB90-3A4E7E0BC949}"/>
+          <p:cNvPr id="47" name="">
+            <a:extLst xmlns:a="http://schemas.openxmlformats.org/drawingml/2006/main">
+              <a:ext uri="{FF2B5EF4-FFF2-40B4-BE49-F238E27FC236}">
+                <a16:creationId xmlns:a16="http://schemas.microsoft.com/office/drawing/2014/main" id="{753B85FE-3D95-41E7-A20D-E4CC5AF601C6}"/>
               </a:ext>
             </a:extLst>
           </p:cNvPr>
@@ -4590,10 +4438,10 @@
       </p:sp>
       <p:sp>
         <p:nvSpPr>
-          <p:cNvPr id="51" name="">
-            <a:extLst xmlns:a="http://schemas.openxmlformats.org/drawingml/2006/main">
-              <a:ext uri="{FF2B5EF4-FFF2-40B4-BE49-F238E27FC236}">
-                <a16:creationId xmlns:a16="http://schemas.microsoft.com/office/drawing/2014/main" id="{F55D97AF-6E48-4CF8-ABD9-37F7C494E473}"/>
+          <p:cNvPr id="48" name="">
+            <a:extLst xmlns:a="http://schemas.openxmlformats.org/drawingml/2006/main">
+              <a:ext uri="{FF2B5EF4-FFF2-40B4-BE49-F238E27FC236}">
+                <a16:creationId xmlns:a16="http://schemas.microsoft.com/office/drawing/2014/main" id="{1B910323-7EB7-44E9-AB20-AFB5E3FE5D03}"/>
               </a:ext>
             </a:extLst>
           </p:cNvPr>
@@ -4622,10 +4470,10 @@
       </p:sp>
       <p:sp>
         <p:nvSpPr>
-          <p:cNvPr id="52" name="">
-            <a:extLst xmlns:a="http://schemas.openxmlformats.org/drawingml/2006/main">
-              <a:ext uri="{FF2B5EF4-FFF2-40B4-BE49-F238E27FC236}">
-                <a16:creationId xmlns:a16="http://schemas.microsoft.com/office/drawing/2014/main" id="{8F9F225E-DC65-4A33-8894-3105E5AE1776}"/>
+          <p:cNvPr id="49" name="">
+            <a:extLst xmlns:a="http://schemas.openxmlformats.org/drawingml/2006/main">
+              <a:ext uri="{FF2B5EF4-FFF2-40B4-BE49-F238E27FC236}">
+                <a16:creationId xmlns:a16="http://schemas.microsoft.com/office/drawing/2014/main" id="{EEB7DE28-238B-48EC-809A-D0506F63B6D1}"/>
               </a:ext>
             </a:extLst>
           </p:cNvPr>
@@ -4678,10 +4526,10 @@
       </p:sp>
       <p:sp>
         <p:nvSpPr>
-          <p:cNvPr id="53" name="">
-            <a:extLst xmlns:a="http://schemas.openxmlformats.org/drawingml/2006/main">
-              <a:ext uri="{FF2B5EF4-FFF2-40B4-BE49-F238E27FC236}">
-                <a16:creationId xmlns:a16="http://schemas.microsoft.com/office/drawing/2014/main" id="{CA238801-A6E9-467F-819D-7A4D8EE26296}"/>
+          <p:cNvPr id="50" name="">
+            <a:extLst xmlns:a="http://schemas.openxmlformats.org/drawingml/2006/main">
+              <a:ext uri="{FF2B5EF4-FFF2-40B4-BE49-F238E27FC236}">
+                <a16:creationId xmlns:a16="http://schemas.microsoft.com/office/drawing/2014/main" id="{EBC656A5-66DF-4013-9DA3-22A096D96A61}"/>
               </a:ext>
             </a:extLst>
           </p:cNvPr>
@@ -4710,10 +4558,10 @@
       </p:sp>
       <p:sp>
         <p:nvSpPr>
-          <p:cNvPr id="54" name="">
-            <a:extLst xmlns:a="http://schemas.openxmlformats.org/drawingml/2006/main">
-              <a:ext uri="{FF2B5EF4-FFF2-40B4-BE49-F238E27FC236}">
-                <a16:creationId xmlns:a16="http://schemas.microsoft.com/office/drawing/2014/main" id="{0B28AC84-E87B-442D-81A5-89BA02A2B382}"/>
+          <p:cNvPr id="51" name="">
+            <a:extLst xmlns:a="http://schemas.openxmlformats.org/drawingml/2006/main">
+              <a:ext uri="{FF2B5EF4-FFF2-40B4-BE49-F238E27FC236}">
+                <a16:creationId xmlns:a16="http://schemas.microsoft.com/office/drawing/2014/main" id="{6A93E403-7F18-4056-AB72-6E35853F93F0}"/>
               </a:ext>
             </a:extLst>
           </p:cNvPr>
@@ -4766,10 +4614,10 @@
       </p:sp>
       <p:sp>
         <p:nvSpPr>
-          <p:cNvPr id="55" name="">
-            <a:extLst xmlns:a="http://schemas.openxmlformats.org/drawingml/2006/main">
-              <a:ext uri="{FF2B5EF4-FFF2-40B4-BE49-F238E27FC236}">
-                <a16:creationId xmlns:a16="http://schemas.microsoft.com/office/drawing/2014/main" id="{DF869899-2AAE-44E0-B508-5FAD46DAAF2B}"/>
+          <p:cNvPr id="52" name="">
+            <a:extLst xmlns:a="http://schemas.openxmlformats.org/drawingml/2006/main">
+              <a:ext uri="{FF2B5EF4-FFF2-40B4-BE49-F238E27FC236}">
+                <a16:creationId xmlns:a16="http://schemas.microsoft.com/office/drawing/2014/main" id="{47521E64-026A-45D8-8CAE-ACD537BDB33C}"/>
               </a:ext>
             </a:extLst>
           </p:cNvPr>
@@ -4822,10 +4670,10 @@
       </p:sp>
       <p:sp>
         <p:nvSpPr>
-          <p:cNvPr id="56" name="">
-            <a:extLst xmlns:a="http://schemas.openxmlformats.org/drawingml/2006/main">
-              <a:ext uri="{FF2B5EF4-FFF2-40B4-BE49-F238E27FC236}">
-                <a16:creationId xmlns:a16="http://schemas.microsoft.com/office/drawing/2014/main" id="{42DA83A8-6577-4E79-AE24-1997D37839B5}"/>
+          <p:cNvPr id="53" name="">
+            <a:extLst xmlns:a="http://schemas.openxmlformats.org/drawingml/2006/main">
+              <a:ext uri="{FF2B5EF4-FFF2-40B4-BE49-F238E27FC236}">
+                <a16:creationId xmlns:a16="http://schemas.microsoft.com/office/drawing/2014/main" id="{2BE19BD6-7AE2-4F1A-8B33-95940153436A}"/>
               </a:ext>
             </a:extLst>
           </p:cNvPr>
@@ -4854,10 +4702,10 @@
       </p:sp>
       <p:sp>
         <p:nvSpPr>
-          <p:cNvPr id="57" name="">
-            <a:extLst xmlns:a="http://schemas.openxmlformats.org/drawingml/2006/main">
-              <a:ext uri="{FF2B5EF4-FFF2-40B4-BE49-F238E27FC236}">
-                <a16:creationId xmlns:a16="http://schemas.microsoft.com/office/drawing/2014/main" id="{5699ECC7-FE06-472B-A710-B462B0175EC5}"/>
+          <p:cNvPr id="54" name="">
+            <a:extLst xmlns:a="http://schemas.openxmlformats.org/drawingml/2006/main">
+              <a:ext uri="{FF2B5EF4-FFF2-40B4-BE49-F238E27FC236}">
+                <a16:creationId xmlns:a16="http://schemas.microsoft.com/office/drawing/2014/main" id="{AA54DEB0-1CFC-478C-AA6A-A8F270D44E2C}"/>
               </a:ext>
             </a:extLst>
           </p:cNvPr>
@@ -4910,10 +4758,10 @@
       </p:sp>
       <p:sp>
         <p:nvSpPr>
-          <p:cNvPr id="58" name="">
-            <a:extLst xmlns:a="http://schemas.openxmlformats.org/drawingml/2006/main">
-              <a:ext uri="{FF2B5EF4-FFF2-40B4-BE49-F238E27FC236}">
-                <a16:creationId xmlns:a16="http://schemas.microsoft.com/office/drawing/2014/main" id="{A51F61F5-0512-4EB5-82BF-09D304C14C79}"/>
+          <p:cNvPr id="55" name="">
+            <a:extLst xmlns:a="http://schemas.openxmlformats.org/drawingml/2006/main">
+              <a:ext uri="{FF2B5EF4-FFF2-40B4-BE49-F238E27FC236}">
+                <a16:creationId xmlns:a16="http://schemas.microsoft.com/office/drawing/2014/main" id="{9A3B2632-DEFE-4DE0-9ABD-690786283833}"/>
               </a:ext>
             </a:extLst>
           </p:cNvPr>
@@ -4942,10 +4790,10 @@
       </p:sp>
       <p:sp>
         <p:nvSpPr>
-          <p:cNvPr id="59" name="">
-            <a:extLst xmlns:a="http://schemas.openxmlformats.org/drawingml/2006/main">
-              <a:ext uri="{FF2B5EF4-FFF2-40B4-BE49-F238E27FC236}">
-                <a16:creationId xmlns:a16="http://schemas.microsoft.com/office/drawing/2014/main" id="{1033DFB2-6202-4F87-BA2D-B846FD586E03}"/>
+          <p:cNvPr id="56" name="">
+            <a:extLst xmlns:a="http://schemas.openxmlformats.org/drawingml/2006/main">
+              <a:ext uri="{FF2B5EF4-FFF2-40B4-BE49-F238E27FC236}">
+                <a16:creationId xmlns:a16="http://schemas.microsoft.com/office/drawing/2014/main" id="{26E66158-54E5-4BF6-9D5C-D762F6BD1352}"/>
               </a:ext>
             </a:extLst>
           </p:cNvPr>
@@ -4998,10 +4846,10 @@
       </p:sp>
       <p:sp>
         <p:nvSpPr>
-          <p:cNvPr id="60" name="">
-            <a:extLst xmlns:a="http://schemas.openxmlformats.org/drawingml/2006/main">
-              <a:ext uri="{FF2B5EF4-FFF2-40B4-BE49-F238E27FC236}">
-                <a16:creationId xmlns:a16="http://schemas.microsoft.com/office/drawing/2014/main" id="{2A7196DA-EAB0-4892-BCD5-496601E67611}"/>
+          <p:cNvPr id="57" name="">
+            <a:extLst xmlns:a="http://schemas.openxmlformats.org/drawingml/2006/main">
+              <a:ext uri="{FF2B5EF4-FFF2-40B4-BE49-F238E27FC236}">
+                <a16:creationId xmlns:a16="http://schemas.microsoft.com/office/drawing/2014/main" id="{99C65D39-CC3B-42ED-A151-9C08E1F345D6}"/>
               </a:ext>
             </a:extLst>
           </p:cNvPr>
@@ -5054,10 +4902,10 @@
       </p:sp>
       <p:sp>
         <p:nvSpPr>
-          <p:cNvPr id="61" name="">
-            <a:extLst xmlns:a="http://schemas.openxmlformats.org/drawingml/2006/main">
-              <a:ext uri="{FF2B5EF4-FFF2-40B4-BE49-F238E27FC236}">
-                <a16:creationId xmlns:a16="http://schemas.microsoft.com/office/drawing/2014/main" id="{E931466B-AF1A-4AB9-AAD3-E467DBC07820}"/>
+          <p:cNvPr id="58" name="">
+            <a:extLst xmlns:a="http://schemas.openxmlformats.org/drawingml/2006/main">
+              <a:ext uri="{FF2B5EF4-FFF2-40B4-BE49-F238E27FC236}">
+                <a16:creationId xmlns:a16="http://schemas.microsoft.com/office/drawing/2014/main" id="{BF680136-6BA6-4F02-9804-70D0C9B2B558}"/>
               </a:ext>
             </a:extLst>
           </p:cNvPr>
@@ -5086,10 +4934,10 @@
       </p:sp>
       <p:sp>
         <p:nvSpPr>
-          <p:cNvPr id="62" name="">
-            <a:extLst xmlns:a="http://schemas.openxmlformats.org/drawingml/2006/main">
-              <a:ext uri="{FF2B5EF4-FFF2-40B4-BE49-F238E27FC236}">
-                <a16:creationId xmlns:a16="http://schemas.microsoft.com/office/drawing/2014/main" id="{14BB0298-4223-4C81-8E31-1A850FAF2673}"/>
+          <p:cNvPr id="59" name="">
+            <a:extLst xmlns:a="http://schemas.openxmlformats.org/drawingml/2006/main">
+              <a:ext uri="{FF2B5EF4-FFF2-40B4-BE49-F238E27FC236}">
+                <a16:creationId xmlns:a16="http://schemas.microsoft.com/office/drawing/2014/main" id="{40722A44-7530-446E-91F1-11D38B9F5F10}"/>
               </a:ext>
             </a:extLst>
           </p:cNvPr>
@@ -5142,10 +4990,10 @@
       </p:sp>
       <p:sp>
         <p:nvSpPr>
-          <p:cNvPr id="63" name="">
-            <a:extLst xmlns:a="http://schemas.openxmlformats.org/drawingml/2006/main">
-              <a:ext uri="{FF2B5EF4-FFF2-40B4-BE49-F238E27FC236}">
-                <a16:creationId xmlns:a16="http://schemas.microsoft.com/office/drawing/2014/main" id="{DCF95E28-0B93-4B09-909A-E401E7861B09}"/>
+          <p:cNvPr id="60" name="">
+            <a:extLst xmlns:a="http://schemas.openxmlformats.org/drawingml/2006/main">
+              <a:ext uri="{FF2B5EF4-FFF2-40B4-BE49-F238E27FC236}">
+                <a16:creationId xmlns:a16="http://schemas.microsoft.com/office/drawing/2014/main" id="{B8D6E892-25E3-400F-9247-BE30026F69B2}"/>
               </a:ext>
             </a:extLst>
           </p:cNvPr>
@@ -5199,7 +5047,7 @@
     </p:spTree>
     <p:extLst>
       <p:ext uri="{BB962C8B-B14F-4D97-AF65-F5344CB8AC3E}">
-        <p14:creationId xmlns:p14="http://schemas.microsoft.com/office/powerpoint/2010/main" val="2122598543"/>
+        <p14:creationId xmlns:p14="http://schemas.microsoft.com/office/powerpoint/2010/main" val="399999307"/>
       </p:ext>
     </p:extLst>
   </p:cSld>
@@ -5230,7 +5078,7 @@
           <p:cNvPr id="1" name="">
             <a:extLst xmlns:a="http://schemas.openxmlformats.org/drawingml/2006/main">
               <a:ext uri="{FF2B5EF4-FFF2-40B4-BE49-F238E27FC236}">
-                <a16:creationId xmlns:a16="http://schemas.microsoft.com/office/drawing/2014/main" id="{1C6A0A1B-A5D8-47CE-8DDE-37A4BB807295}"/>
+                <a16:creationId xmlns:a16="http://schemas.microsoft.com/office/drawing/2014/main" id="{965F3626-9FF4-420C-8FDF-D92B7434CE85}"/>
               </a:ext>
             </a:extLst>
           </p:cNvPr>
@@ -5260,7 +5108,7 @@
           <p:cNvPr id="2" name="">
             <a:extLst xmlns:a="http://schemas.openxmlformats.org/drawingml/2006/main">
               <a:ext uri="{FF2B5EF4-FFF2-40B4-BE49-F238E27FC236}">
-                <a16:creationId xmlns:a16="http://schemas.microsoft.com/office/drawing/2014/main" id="{743D86B5-2EC4-4A79-B249-59ECABB62A93}"/>
+                <a16:creationId xmlns:a16="http://schemas.microsoft.com/office/drawing/2014/main" id="{36C174BC-C2B6-4BF4-940F-2007F545B078}"/>
               </a:ext>
             </a:extLst>
           </p:cNvPr>
@@ -5290,7 +5138,7 @@
           <p:cNvPr id="3" name="">
             <a:extLst xmlns:a="http://schemas.openxmlformats.org/drawingml/2006/main">
               <a:ext uri="{FF2B5EF4-FFF2-40B4-BE49-F238E27FC236}">
-                <a16:creationId xmlns:a16="http://schemas.microsoft.com/office/drawing/2014/main" id="{595C5C47-6F4D-4EB8-A947-BEA462F135B2}"/>
+                <a16:creationId xmlns:a16="http://schemas.microsoft.com/office/drawing/2014/main" id="{7E23244E-679C-41BC-921C-9E72DE0AAD16}"/>
               </a:ext>
             </a:extLst>
           </p:cNvPr>
@@ -5346,7 +5194,7 @@
           <p:cNvPr id="4" name="">
             <a:extLst xmlns:a="http://schemas.openxmlformats.org/drawingml/2006/main">
               <a:ext uri="{FF2B5EF4-FFF2-40B4-BE49-F238E27FC236}">
-                <a16:creationId xmlns:a16="http://schemas.microsoft.com/office/drawing/2014/main" id="{9DBCF3AA-8F84-4AEF-8F39-6DA98013C223}"/>
+                <a16:creationId xmlns:a16="http://schemas.microsoft.com/office/drawing/2014/main" id="{8B5157BD-A17C-4CBA-B1C6-43B05AD26F9A}"/>
               </a:ext>
             </a:extLst>
           </p:cNvPr>
@@ -5392,7 +5240,7 @@
                 <a:ea typeface="PingFang SC"/>
                 <a:cs typeface="PingFang SC"/>
               </a:rPr>
-              <a:t>风险处置台账将“模型看到的风险”沉淀为可见、可追踪、可复盘的处置记录</a:t>
+              <a:t>管理员界面将模型看到的风险沉淀为可见、可追踪、可复盘的处置记录</a:t>
             </a:r>
           </a:p>
         </p:txBody>
@@ -5402,7 +5250,7 @@
           <p:cNvPr id="5" name="">
             <a:extLst xmlns:a="http://schemas.openxmlformats.org/drawingml/2006/main">
               <a:ext uri="{FF2B5EF4-FFF2-40B4-BE49-F238E27FC236}">
-                <a16:creationId xmlns:a16="http://schemas.microsoft.com/office/drawing/2014/main" id="{254F17E9-6B41-49C9-9292-4D51E4F1697B}"/>
+                <a16:creationId xmlns:a16="http://schemas.microsoft.com/office/drawing/2014/main" id="{89BEA9D7-EE39-418D-95C9-87C602BA08D5}"/>
               </a:ext>
             </a:extLst>
           </p:cNvPr>
@@ -5432,7 +5280,7 @@
           <p:cNvPr id="6" name="">
             <a:extLst xmlns:a="http://schemas.openxmlformats.org/drawingml/2006/main">
               <a:ext uri="{FF2B5EF4-FFF2-40B4-BE49-F238E27FC236}">
-                <a16:creationId xmlns:a16="http://schemas.microsoft.com/office/drawing/2014/main" id="{E881386F-CA97-414F-9210-0A460344F081}"/>
+                <a16:creationId xmlns:a16="http://schemas.microsoft.com/office/drawing/2014/main" id="{4AF9FF31-0EBF-49B2-9338-0D737AFC49B9}"/>
               </a:ext>
             </a:extLst>
           </p:cNvPr>
@@ -5488,7 +5336,7 @@
           <p:cNvPr id="7" name="">
             <a:extLst xmlns:a="http://schemas.openxmlformats.org/drawingml/2006/main">
               <a:ext uri="{FF2B5EF4-FFF2-40B4-BE49-F238E27FC236}">
-                <a16:creationId xmlns:a16="http://schemas.microsoft.com/office/drawing/2014/main" id="{4308854E-DBD9-44EE-AA0A-E1F2D97B034B}"/>
+                <a16:creationId xmlns:a16="http://schemas.microsoft.com/office/drawing/2014/main" id="{5BB8F87B-F043-44E3-9032-498E69DE530F}"/>
               </a:ext>
             </a:extLst>
           </p:cNvPr>
@@ -5518,7 +5366,7 @@
           <p:cNvPr id="8" name="">
             <a:extLst xmlns:a="http://schemas.openxmlformats.org/drawingml/2006/main">
               <a:ext uri="{FF2B5EF4-FFF2-40B4-BE49-F238E27FC236}">
-                <a16:creationId xmlns:a16="http://schemas.microsoft.com/office/drawing/2014/main" id="{F2A8DED7-9EB8-4BB7-A95F-5D38DD366F26}"/>
+                <a16:creationId xmlns:a16="http://schemas.microsoft.com/office/drawing/2014/main" id="{A1FA8982-0A99-4B53-B7B0-FE52F011F2AA}"/>
               </a:ext>
             </a:extLst>
           </p:cNvPr>
@@ -5574,7 +5422,7 @@
           <p:cNvPr id="9" name="">
             <a:extLst xmlns:a="http://schemas.openxmlformats.org/drawingml/2006/main">
               <a:ext uri="{FF2B5EF4-FFF2-40B4-BE49-F238E27FC236}">
-                <a16:creationId xmlns:a16="http://schemas.microsoft.com/office/drawing/2014/main" id="{C6A2F4C8-C270-4159-8403-BE0EA33B18E9}"/>
+                <a16:creationId xmlns:a16="http://schemas.microsoft.com/office/drawing/2014/main" id="{D6DC878B-FE21-47AF-9E79-A0B68E937B36}"/>
               </a:ext>
             </a:extLst>
           </p:cNvPr>
@@ -5630,7 +5478,7 @@
           <p:cNvPr id="10" name="">
             <a:extLst xmlns:a="http://schemas.openxmlformats.org/drawingml/2006/main">
               <a:ext uri="{FF2B5EF4-FFF2-40B4-BE49-F238E27FC236}">
-                <a16:creationId xmlns:a16="http://schemas.microsoft.com/office/drawing/2014/main" id="{7A5FCEF7-06F2-4B57-8A21-C425E33AD3BD}"/>
+                <a16:creationId xmlns:a16="http://schemas.microsoft.com/office/drawing/2014/main" id="{20AE5FC6-F438-42E4-AFC3-CECDA60BAC0E}"/>
               </a:ext>
             </a:extLst>
           </p:cNvPr>
@@ -5660,7 +5508,7 @@
           <p:cNvPr id="11" name="">
             <a:extLst xmlns:a="http://schemas.openxmlformats.org/drawingml/2006/main">
               <a:ext uri="{FF2B5EF4-FFF2-40B4-BE49-F238E27FC236}">
-                <a16:creationId xmlns:a16="http://schemas.microsoft.com/office/drawing/2014/main" id="{1D609F40-22EC-4958-886D-4C5031AC781D}"/>
+                <a16:creationId xmlns:a16="http://schemas.microsoft.com/office/drawing/2014/main" id="{4D17E544-363F-4C4D-916B-604D17EEE994}"/>
               </a:ext>
             </a:extLst>
           </p:cNvPr>
@@ -5716,7 +5564,7 @@
           <p:cNvPr id="12" name="">
             <a:extLst xmlns:a="http://schemas.openxmlformats.org/drawingml/2006/main">
               <a:ext uri="{FF2B5EF4-FFF2-40B4-BE49-F238E27FC236}">
-                <a16:creationId xmlns:a16="http://schemas.microsoft.com/office/drawing/2014/main" id="{224B3C10-A09A-4B57-A6A2-44D8F145B308}"/>
+                <a16:creationId xmlns:a16="http://schemas.microsoft.com/office/drawing/2014/main" id="{6F45D5AC-C5BA-47F2-B6AF-11D04410B1D9}"/>
               </a:ext>
             </a:extLst>
           </p:cNvPr>
@@ -5739,7 +5587,7 @@
         </p:spPr>
         <p:txBody>
           <a:bodyPr xmlns:a="http://schemas.openxmlformats.org/drawingml/2006/main" lIns="0" tIns="0" rIns="0" bIns="0" anchor="t">
-            <a:normAutofit fontScale="78646"/>
+            <a:normAutofit fontScale="69947"/>
           </a:bodyPr>
           <a:lstStyle xmlns:a="http://schemas.openxmlformats.org/drawingml/2006/main"/>
           <a:p xmlns:a="http://schemas.openxmlformats.org/drawingml/2006/main">
@@ -5762,7 +5610,7 @@
                 <a:ea typeface="PingFang SC"/>
                 <a:cs typeface="PingFang SC"/>
               </a:rPr>
-              <a:t>新增风险处置台账，要求每条风险都有正式问题、待确认或排除记录。</a:t>
+              <a:t>新增管理员界面的台账检查，要求每条风险都有正式问题、待确认或排除记录。</a:t>
             </a:r>
           </a:p>
         </p:txBody>
@@ -5772,7 +5620,7 @@
           <p:cNvPr id="13" name="">
             <a:extLst xmlns:a="http://schemas.openxmlformats.org/drawingml/2006/main">
               <a:ext uri="{FF2B5EF4-FFF2-40B4-BE49-F238E27FC236}">
-                <a16:creationId xmlns:a16="http://schemas.microsoft.com/office/drawing/2014/main" id="{BE0443BA-7B99-47FC-A318-08443998FD96}"/>
+                <a16:creationId xmlns:a16="http://schemas.microsoft.com/office/drawing/2014/main" id="{58B35F35-B7A6-4993-8C7B-04D671B02C97}"/>
               </a:ext>
             </a:extLst>
           </p:cNvPr>
@@ -5802,7 +5650,7 @@
           <p:cNvPr id="14" name="">
             <a:extLst xmlns:a="http://schemas.openxmlformats.org/drawingml/2006/main">
               <a:ext uri="{FF2B5EF4-FFF2-40B4-BE49-F238E27FC236}">
-                <a16:creationId xmlns:a16="http://schemas.microsoft.com/office/drawing/2014/main" id="{4CCCCB5F-704A-41AA-8612-BBE0F0474768}"/>
+                <a16:creationId xmlns:a16="http://schemas.microsoft.com/office/drawing/2014/main" id="{BC40020B-FBDA-43E9-8E52-C95716528021}"/>
               </a:ext>
             </a:extLst>
           </p:cNvPr>
@@ -5858,7 +5706,7 @@
           <p:cNvPr id="15" name="">
             <a:extLst xmlns:a="http://schemas.openxmlformats.org/drawingml/2006/main">
               <a:ext uri="{FF2B5EF4-FFF2-40B4-BE49-F238E27FC236}">
-                <a16:creationId xmlns:a16="http://schemas.microsoft.com/office/drawing/2014/main" id="{A253D23B-3119-4658-9791-C0A27CCA0E99}"/>
+                <a16:creationId xmlns:a16="http://schemas.microsoft.com/office/drawing/2014/main" id="{A9349040-CE4B-4B99-A9F0-3453CD9F3D30}"/>
               </a:ext>
             </a:extLst>
           </p:cNvPr>
@@ -5914,7 +5762,7 @@
           <p:cNvPr id="16" name="">
             <a:extLst xmlns:a="http://schemas.openxmlformats.org/drawingml/2006/main">
               <a:ext uri="{FF2B5EF4-FFF2-40B4-BE49-F238E27FC236}">
-                <a16:creationId xmlns:a16="http://schemas.microsoft.com/office/drawing/2014/main" id="{5F9AE26E-7219-437E-9D25-52B3E6BFA0CD}"/>
+                <a16:creationId xmlns:a16="http://schemas.microsoft.com/office/drawing/2014/main" id="{D783CF39-1E94-44E1-9EF7-37196391521A}"/>
               </a:ext>
             </a:extLst>
           </p:cNvPr>
@@ -5948,7 +5796,7 @@
           <p:cNvPr id="17" name="">
             <a:extLst xmlns:a="http://schemas.openxmlformats.org/drawingml/2006/main">
               <a:ext uri="{FF2B5EF4-FFF2-40B4-BE49-F238E27FC236}">
-                <a16:creationId xmlns:a16="http://schemas.microsoft.com/office/drawing/2014/main" id="{5B0F013C-A7C5-4103-B3D8-CD17148BB969}"/>
+                <a16:creationId xmlns:a16="http://schemas.microsoft.com/office/drawing/2014/main" id="{5381046C-9A20-4C8A-940F-14311C42B799}"/>
               </a:ext>
             </a:extLst>
           </p:cNvPr>
@@ -6004,7 +5852,7 @@
           <p:cNvPr id="18" name="">
             <a:extLst xmlns:a="http://schemas.openxmlformats.org/drawingml/2006/main">
               <a:ext uri="{FF2B5EF4-FFF2-40B4-BE49-F238E27FC236}">
-                <a16:creationId xmlns:a16="http://schemas.microsoft.com/office/drawing/2014/main" id="{59D220E6-E278-4EE8-A081-1510578C8033}"/>
+                <a16:creationId xmlns:a16="http://schemas.microsoft.com/office/drawing/2014/main" id="{2CCB8A37-7247-4AC4-8310-6FB8B83E5D6E}"/>
               </a:ext>
             </a:extLst>
           </p:cNvPr>
@@ -6034,7 +5882,7 @@
           <p:cNvPr id="19" name="">
             <a:extLst xmlns:a="http://schemas.openxmlformats.org/drawingml/2006/main">
               <a:ext uri="{FF2B5EF4-FFF2-40B4-BE49-F238E27FC236}">
-                <a16:creationId xmlns:a16="http://schemas.microsoft.com/office/drawing/2014/main" id="{CDAE990B-0129-415A-B2B1-08192710F3E2}"/>
+                <a16:creationId xmlns:a16="http://schemas.microsoft.com/office/drawing/2014/main" id="{24FD7DBD-7CF9-46FA-B0BA-7D8A89B1C948}"/>
               </a:ext>
             </a:extLst>
           </p:cNvPr>
@@ -6090,7 +5938,7 @@
           <p:cNvPr id="20" name="">
             <a:extLst xmlns:a="http://schemas.openxmlformats.org/drawingml/2006/main">
               <a:ext uri="{FF2B5EF4-FFF2-40B4-BE49-F238E27FC236}">
-                <a16:creationId xmlns:a16="http://schemas.microsoft.com/office/drawing/2014/main" id="{7E3F5D94-4066-430F-A422-9372F025C6DB}"/>
+                <a16:creationId xmlns:a16="http://schemas.microsoft.com/office/drawing/2014/main" id="{E98716AE-ABB7-40C8-A4C2-C507D988E4CE}"/>
               </a:ext>
             </a:extLst>
           </p:cNvPr>
@@ -6146,7 +5994,7 @@
           <p:cNvPr id="21" name="">
             <a:extLst xmlns:a="http://schemas.openxmlformats.org/drawingml/2006/main">
               <a:ext uri="{FF2B5EF4-FFF2-40B4-BE49-F238E27FC236}">
-                <a16:creationId xmlns:a16="http://schemas.microsoft.com/office/drawing/2014/main" id="{505C576D-DBBC-4589-B03E-A3ABC8463526}"/>
+                <a16:creationId xmlns:a16="http://schemas.microsoft.com/office/drawing/2014/main" id="{6C2228E1-7724-4B10-A867-5263701E8E67}"/>
               </a:ext>
             </a:extLst>
           </p:cNvPr>
@@ -6202,7 +6050,7 @@
           <p:cNvPr id="22" name="">
             <a:extLst xmlns:a="http://schemas.openxmlformats.org/drawingml/2006/main">
               <a:ext uri="{FF2B5EF4-FFF2-40B4-BE49-F238E27FC236}">
-                <a16:creationId xmlns:a16="http://schemas.microsoft.com/office/drawing/2014/main" id="{ECF88119-91E8-4284-8B8E-12807BCF54B8}"/>
+                <a16:creationId xmlns:a16="http://schemas.microsoft.com/office/drawing/2014/main" id="{2D52B439-FCD6-4CAB-96F0-EC8AF00E4979}"/>
               </a:ext>
             </a:extLst>
           </p:cNvPr>
@@ -6232,7 +6080,7 @@
           <p:cNvPr id="23" name="">
             <a:extLst xmlns:a="http://schemas.openxmlformats.org/drawingml/2006/main">
               <a:ext uri="{FF2B5EF4-FFF2-40B4-BE49-F238E27FC236}">
-                <a16:creationId xmlns:a16="http://schemas.microsoft.com/office/drawing/2014/main" id="{9EE8CFDA-AD41-4445-BE5F-C40F220DBB69}"/>
+                <a16:creationId xmlns:a16="http://schemas.microsoft.com/office/drawing/2014/main" id="{B989469E-6763-46E6-BE6E-FF97F7036732}"/>
               </a:ext>
             </a:extLst>
           </p:cNvPr>
@@ -6288,7 +6136,7 @@
           <p:cNvPr id="24" name="">
             <a:extLst xmlns:a="http://schemas.openxmlformats.org/drawingml/2006/main">
               <a:ext uri="{FF2B5EF4-FFF2-40B4-BE49-F238E27FC236}">
-                <a16:creationId xmlns:a16="http://schemas.microsoft.com/office/drawing/2014/main" id="{8B461E8F-2BB3-477B-BA27-546290C5B620}"/>
+                <a16:creationId xmlns:a16="http://schemas.microsoft.com/office/drawing/2014/main" id="{D5F30543-E619-444F-8E18-530846B40AD5}"/>
               </a:ext>
             </a:extLst>
           </p:cNvPr>
@@ -6344,7 +6192,7 @@
           <p:cNvPr id="25" name="">
             <a:extLst xmlns:a="http://schemas.openxmlformats.org/drawingml/2006/main">
               <a:ext uri="{FF2B5EF4-FFF2-40B4-BE49-F238E27FC236}">
-                <a16:creationId xmlns:a16="http://schemas.microsoft.com/office/drawing/2014/main" id="{E25E8AD6-3D7F-4952-B721-914C06EDFB47}"/>
+                <a16:creationId xmlns:a16="http://schemas.microsoft.com/office/drawing/2014/main" id="{00764ADC-CA5D-4639-985F-94931FDCDCB1}"/>
               </a:ext>
             </a:extLst>
           </p:cNvPr>
@@ -6400,7 +6248,7 @@
           <p:cNvPr id="26" name="">
             <a:extLst xmlns:a="http://schemas.openxmlformats.org/drawingml/2006/main">
               <a:ext uri="{FF2B5EF4-FFF2-40B4-BE49-F238E27FC236}">
-                <a16:creationId xmlns:a16="http://schemas.microsoft.com/office/drawing/2014/main" id="{30D2E242-F670-41EE-9AEE-F3B465866B16}"/>
+                <a16:creationId xmlns:a16="http://schemas.microsoft.com/office/drawing/2014/main" id="{A94A16F6-31E2-40AD-B481-984B671223C6}"/>
               </a:ext>
             </a:extLst>
           </p:cNvPr>
@@ -6430,7 +6278,7 @@
           <p:cNvPr id="27" name="">
             <a:extLst xmlns:a="http://schemas.openxmlformats.org/drawingml/2006/main">
               <a:ext uri="{FF2B5EF4-FFF2-40B4-BE49-F238E27FC236}">
-                <a16:creationId xmlns:a16="http://schemas.microsoft.com/office/drawing/2014/main" id="{8F3BF7EC-9A49-41F4-8793-B0E835F3E4DC}"/>
+                <a16:creationId xmlns:a16="http://schemas.microsoft.com/office/drawing/2014/main" id="{3219E980-734F-4FF0-98F6-75AF6ED8D2D9}"/>
               </a:ext>
             </a:extLst>
           </p:cNvPr>
@@ -6486,7 +6334,7 @@
           <p:cNvPr id="28" name="">
             <a:extLst xmlns:a="http://schemas.openxmlformats.org/drawingml/2006/main">
               <a:ext uri="{FF2B5EF4-FFF2-40B4-BE49-F238E27FC236}">
-                <a16:creationId xmlns:a16="http://schemas.microsoft.com/office/drawing/2014/main" id="{7FCAFDC9-92E9-409B-9879-88F6FBA5E7AD}"/>
+                <a16:creationId xmlns:a16="http://schemas.microsoft.com/office/drawing/2014/main" id="{25CB77CC-BC28-4940-B0B8-6B55ACAADFB0}"/>
               </a:ext>
             </a:extLst>
           </p:cNvPr>
@@ -6542,7 +6390,7 @@
           <p:cNvPr id="29" name="">
             <a:extLst xmlns:a="http://schemas.openxmlformats.org/drawingml/2006/main">
               <a:ext uri="{FF2B5EF4-FFF2-40B4-BE49-F238E27FC236}">
-                <a16:creationId xmlns:a16="http://schemas.microsoft.com/office/drawing/2014/main" id="{BEA54DB5-84C1-4831-B4A2-E1FD6277F814}"/>
+                <a16:creationId xmlns:a16="http://schemas.microsoft.com/office/drawing/2014/main" id="{CA4537E7-5673-48E0-9899-71E55AC8A626}"/>
               </a:ext>
             </a:extLst>
           </p:cNvPr>
@@ -6598,7 +6446,7 @@
           <p:cNvPr id="30" name="">
             <a:extLst xmlns:a="http://schemas.openxmlformats.org/drawingml/2006/main">
               <a:ext uri="{FF2B5EF4-FFF2-40B4-BE49-F238E27FC236}">
-                <a16:creationId xmlns:a16="http://schemas.microsoft.com/office/drawing/2014/main" id="{146D24DE-59C9-4721-9F79-EBFABA9345FD}"/>
+                <a16:creationId xmlns:a16="http://schemas.microsoft.com/office/drawing/2014/main" id="{33329724-9BBC-4E17-B80B-A46551A5BD73}"/>
               </a:ext>
             </a:extLst>
           </p:cNvPr>
@@ -6628,7 +6476,7 @@
           <p:cNvPr id="31" name="">
             <a:extLst xmlns:a="http://schemas.openxmlformats.org/drawingml/2006/main">
               <a:ext uri="{FF2B5EF4-FFF2-40B4-BE49-F238E27FC236}">
-                <a16:creationId xmlns:a16="http://schemas.microsoft.com/office/drawing/2014/main" id="{FE371948-D41C-4BFC-A8F5-E5CB6EB1A590}"/>
+                <a16:creationId xmlns:a16="http://schemas.microsoft.com/office/drawing/2014/main" id="{640CE6EF-4777-4294-9D1B-6A8F428D1B5A}"/>
               </a:ext>
             </a:extLst>
           </p:cNvPr>
@@ -6684,7 +6532,7 @@
           <p:cNvPr id="32" name="">
             <a:extLst xmlns:a="http://schemas.openxmlformats.org/drawingml/2006/main">
               <a:ext uri="{FF2B5EF4-FFF2-40B4-BE49-F238E27FC236}">
-                <a16:creationId xmlns:a16="http://schemas.microsoft.com/office/drawing/2014/main" id="{2B1399B2-D510-4707-8512-207569715549}"/>
+                <a16:creationId xmlns:a16="http://schemas.microsoft.com/office/drawing/2014/main" id="{9DF62A0E-98EB-4D10-8918-D04AD20ECA0F}"/>
               </a:ext>
             </a:extLst>
           </p:cNvPr>
@@ -6740,7 +6588,7 @@
           <p:cNvPr id="33" name="">
             <a:extLst xmlns:a="http://schemas.openxmlformats.org/drawingml/2006/main">
               <a:ext uri="{FF2B5EF4-FFF2-40B4-BE49-F238E27FC236}">
-                <a16:creationId xmlns:a16="http://schemas.microsoft.com/office/drawing/2014/main" id="{89EB6A7A-9E3E-49A8-933E-CE736F7F1659}"/>
+                <a16:creationId xmlns:a16="http://schemas.microsoft.com/office/drawing/2014/main" id="{E21E798F-4951-487B-8DA7-436D14F37C06}"/>
               </a:ext>
             </a:extLst>
           </p:cNvPr>
@@ -6796,7 +6644,7 @@
           <p:cNvPr id="34" name="">
             <a:extLst xmlns:a="http://schemas.openxmlformats.org/drawingml/2006/main">
               <a:ext uri="{FF2B5EF4-FFF2-40B4-BE49-F238E27FC236}">
-                <a16:creationId xmlns:a16="http://schemas.microsoft.com/office/drawing/2014/main" id="{DF5BA0AF-D7AF-4CF4-9BE7-0D5F5B30CA2C}"/>
+                <a16:creationId xmlns:a16="http://schemas.microsoft.com/office/drawing/2014/main" id="{277539FA-A280-4E38-9C4E-A9D3B033B6F2}"/>
               </a:ext>
             </a:extLst>
           </p:cNvPr>
@@ -6826,7 +6674,7 @@
           <p:cNvPr id="35" name="">
             <a:extLst xmlns:a="http://schemas.openxmlformats.org/drawingml/2006/main">
               <a:ext uri="{FF2B5EF4-FFF2-40B4-BE49-F238E27FC236}">
-                <a16:creationId xmlns:a16="http://schemas.microsoft.com/office/drawing/2014/main" id="{1A57B459-E921-4A97-983A-BFEEE9664C9F}"/>
+                <a16:creationId xmlns:a16="http://schemas.microsoft.com/office/drawing/2014/main" id="{94D84730-C59D-46AC-9096-1645A9EEDFD3}"/>
               </a:ext>
             </a:extLst>
           </p:cNvPr>
@@ -6882,7 +6730,7 @@
           <p:cNvPr id="36" name="">
             <a:extLst xmlns:a="http://schemas.openxmlformats.org/drawingml/2006/main">
               <a:ext uri="{FF2B5EF4-FFF2-40B4-BE49-F238E27FC236}">
-                <a16:creationId xmlns:a16="http://schemas.microsoft.com/office/drawing/2014/main" id="{82B1F0CF-E484-420C-9B4C-3738557B9294}"/>
+                <a16:creationId xmlns:a16="http://schemas.microsoft.com/office/drawing/2014/main" id="{9EA10D85-8AE5-405E-B15F-45B272C056C6}"/>
               </a:ext>
             </a:extLst>
           </p:cNvPr>
@@ -6938,7 +6786,7 @@
           <p:cNvPr id="37" name="">
             <a:extLst xmlns:a="http://schemas.openxmlformats.org/drawingml/2006/main">
               <a:ext uri="{FF2B5EF4-FFF2-40B4-BE49-F238E27FC236}">
-                <a16:creationId xmlns:a16="http://schemas.microsoft.com/office/drawing/2014/main" id="{D1DD9467-5665-45DD-A3B8-4E4A108D288C}"/>
+                <a16:creationId xmlns:a16="http://schemas.microsoft.com/office/drawing/2014/main" id="{E8914C28-AFB5-4122-AE9C-F9312DB8CECE}"/>
               </a:ext>
             </a:extLst>
           </p:cNvPr>
@@ -6989,56 +6837,46 @@
           </a:p>
         </p:txBody>
       </p:sp>
-      <p:sp>
-        <p:nvSpPr>
-          <p:cNvPr id="38" name="">
-            <a:extLst xmlns:a="http://schemas.openxmlformats.org/drawingml/2006/main">
-              <a:ext uri="{FF2B5EF4-FFF2-40B4-BE49-F238E27FC236}">
-                <a16:creationId xmlns:a16="http://schemas.microsoft.com/office/drawing/2014/main" id="{F1AF5E0A-E5F0-4B47-B703-79AF15CF4FBD}"/>
-              </a:ext>
-            </a:extLst>
-          </p:cNvPr>
-          <p:cNvSpPr>
-            <a:spLocks xmlns:a="http://schemas.openxmlformats.org/drawingml/2006/main" noGrp="1"/>
-          </p:cNvSpPr>
-          <p:nvPr/>
-        </p:nvSpPr>
-        <p:spPr>
-          <a:xfrm xmlns:a="http://schemas.openxmlformats.org/drawingml/2006/main">
-            <a:off x="7658100" y="1962150"/>
-            <a:ext cx="3124200" cy="2552700"/>
-          </a:xfrm>
-          <a:prstGeom xmlns:a="http://schemas.openxmlformats.org/drawingml/2006/main" prst="rect">
-            <a:avLst/>
-          </a:prstGeom>
-          <a:solidFill xmlns:a="http://schemas.openxmlformats.org/drawingml/2006/main">
-            <a:srgbClr val="F8FAFE"/>
-          </a:solidFill>
-          <a:ln xmlns:a="http://schemas.openxmlformats.org/drawingml/2006/main" w="9525">
-            <a:solidFill>
-              <a:srgbClr val="CBD5E1"/>
-            </a:solidFill>
-          </a:ln>
-        </p:spPr>
-      </p:sp>
+      <p:pic>
+        <p:nvPicPr>
+          <p:cNvPr id="38" name=""/>
+          <p:cNvPicPr>
+            <a:picLocks xmlns:a="http://schemas.openxmlformats.org/drawingml/2006/main" noChangeAspect="1"/>
+          </p:cNvPicPr>
+          <p:nvPr/>
+        </p:nvPicPr>
+        <p:blipFill>
+          <a:blip xmlns:r="http://schemas.openxmlformats.org/officeDocument/2006/relationships" xmlns:a="http://schemas.openxmlformats.org/drawingml/2006/main" r:embed="Re67978dd31e14df3"/>
+          <a:stretch xmlns:a="http://schemas.openxmlformats.org/drawingml/2006/main"/>
+        </p:blipFill>
+        <p:spPr>
+          <a:xfrm xmlns:a="http://schemas.openxmlformats.org/drawingml/2006/main">
+            <a:off x="8107805" y="1866900"/>
+            <a:ext cx="2148590" cy="2438400"/>
+          </a:xfrm>
+          <a:prstGeom xmlns:a="http://schemas.openxmlformats.org/drawingml/2006/main" prst="rect">
+            <a:avLst/>
+          </a:prstGeom>
+        </p:spPr>
+      </p:pic>
       <p:sp>
         <p:nvSpPr>
           <p:cNvPr id="39" name="">
             <a:extLst xmlns:a="http://schemas.openxmlformats.org/drawingml/2006/main">
               <a:ext uri="{FF2B5EF4-FFF2-40B4-BE49-F238E27FC236}">
-                <a16:creationId xmlns:a16="http://schemas.microsoft.com/office/drawing/2014/main" id="{43F4725B-AB66-49D5-8489-46AE802B8049}"/>
-              </a:ext>
-            </a:extLst>
-          </p:cNvPr>
-          <p:cNvSpPr>
-            <a:spLocks xmlns:a="http://schemas.openxmlformats.org/drawingml/2006/main" noGrp="1"/>
-          </p:cNvSpPr>
-          <p:nvPr/>
-        </p:nvSpPr>
-        <p:spPr>
-          <a:xfrm xmlns:a="http://schemas.openxmlformats.org/drawingml/2006/main">
-            <a:off x="7905750" y="2209800"/>
-            <a:ext cx="2628900" cy="285750"/>
+                <a16:creationId xmlns:a16="http://schemas.microsoft.com/office/drawing/2014/main" id="{8AF266FB-FA0B-4AB0-94FC-2AF33F4C3818}"/>
+              </a:ext>
+            </a:extLst>
+          </p:cNvPr>
+          <p:cNvSpPr>
+            <a:spLocks xmlns:a="http://schemas.openxmlformats.org/drawingml/2006/main" noGrp="1"/>
+          </p:cNvSpPr>
+          <p:nvPr/>
+        </p:nvSpPr>
+        <p:spPr>
+          <a:xfrm xmlns:a="http://schemas.openxmlformats.org/drawingml/2006/main">
+            <a:off x="7753350" y="4381500"/>
+            <a:ext cx="2857500" cy="190500"/>
           </a:xfrm>
           <a:prstGeom xmlns:a="http://schemas.openxmlformats.org/drawingml/2006/main" prst="rect">
             <a:avLst/>
@@ -7054,25 +6892,25 @@
           <a:lstStyle xmlns:a="http://schemas.openxmlformats.org/drawingml/2006/main"/>
           <a:p xmlns:a="http://schemas.openxmlformats.org/drawingml/2006/main">
             <a:pPr algn="ctr">
-              <a:defRPr sz="1650" b="1">
-                <a:solidFill>
-                  <a:srgbClr val="111827"/>
-                </a:solidFill>
-                <a:latin typeface="PingFang SC"/>
-                <a:ea typeface="PingFang SC"/>
-                <a:cs typeface="PingFang SC"/>
-              </a:defRPr>
-            </a:pPr>
-            <a:r>
-              <a:rPr sz="1650" b="1">
-                <a:solidFill>
-                  <a:srgbClr val="111827"/>
-                </a:solidFill>
-                <a:latin typeface="PingFang SC"/>
-                <a:ea typeface="PingFang SC"/>
-                <a:cs typeface="PingFang SC"/>
-              </a:rPr>
-              <a:t>截图位 2</a:t>
+              <a:defRPr sz="900" b="1">
+                <a:solidFill>
+                  <a:srgbClr val="5B6472"/>
+                </a:solidFill>
+                <a:latin typeface="PingFang SC"/>
+                <a:ea typeface="PingFang SC"/>
+                <a:cs typeface="PingFang SC"/>
+              </a:defRPr>
+            </a:pPr>
+            <a:r>
+              <a:rPr sz="900" b="1">
+                <a:solidFill>
+                  <a:srgbClr val="5B6472"/>
+                </a:solidFill>
+                <a:latin typeface="PingFang SC"/>
+                <a:ea typeface="PingFang SC"/>
+                <a:cs typeface="PingFang SC"/>
+              </a:rPr>
+              <a:t>AI Review 待确认项与后台处置记录</a:t>
             </a:r>
           </a:p>
         </p:txBody>
@@ -7082,149 +6920,7 @@
           <p:cNvPr id="40" name="">
             <a:extLst xmlns:a="http://schemas.openxmlformats.org/drawingml/2006/main">
               <a:ext uri="{FF2B5EF4-FFF2-40B4-BE49-F238E27FC236}">
-                <a16:creationId xmlns:a16="http://schemas.microsoft.com/office/drawing/2014/main" id="{8A68B9E6-9B7A-4DA8-8E3A-BC01B3BBDF12}"/>
-              </a:ext>
-            </a:extLst>
-          </p:cNvPr>
-          <p:cNvSpPr>
-            <a:spLocks xmlns:a="http://schemas.openxmlformats.org/drawingml/2006/main" noGrp="1"/>
-          </p:cNvSpPr>
-          <p:nvPr/>
-        </p:nvSpPr>
-        <p:spPr>
-          <a:xfrm xmlns:a="http://schemas.openxmlformats.org/drawingml/2006/main">
-            <a:off x="7981950" y="3162300"/>
-            <a:ext cx="2476500" cy="514350"/>
-          </a:xfrm>
-          <a:prstGeom xmlns:a="http://schemas.openxmlformats.org/drawingml/2006/main" prst="rect">
-            <a:avLst/>
-          </a:prstGeom>
-          <a:ln xmlns:a="http://schemas.openxmlformats.org/drawingml/2006/main">
-            <a:noFill/>
-          </a:ln>
-        </p:spPr>
-        <p:txBody>
-          <a:bodyPr xmlns:a="http://schemas.openxmlformats.org/drawingml/2006/main" lIns="0" tIns="0" rIns="0" bIns="0" anchor="ctr">
-            <a:normAutofit fontScale="100000"/>
-          </a:bodyPr>
-          <a:lstStyle xmlns:a="http://schemas.openxmlformats.org/drawingml/2006/main"/>
-          <a:p xmlns:a="http://schemas.openxmlformats.org/drawingml/2006/main">
-            <a:pPr algn="ctr">
-              <a:defRPr sz="1275" b="0">
-                <a:solidFill>
-                  <a:srgbClr val="5B6472"/>
-                </a:solidFill>
-                <a:latin typeface="PingFang SC"/>
-                <a:ea typeface="PingFang SC"/>
-                <a:cs typeface="PingFang SC"/>
-              </a:defRPr>
-            </a:pPr>
-            <a:r>
-              <a:rPr sz="1275" b="0">
-                <a:solidFill>
-                  <a:srgbClr val="5B6472"/>
-                </a:solidFill>
-                <a:latin typeface="PingFang SC"/>
-                <a:ea typeface="PingFang SC"/>
-                <a:cs typeface="PingFang SC"/>
-              </a:rPr>
-              <a:t>正式问题 / 待确认项 / 后台处置记录截图</a:t>
-            </a:r>
-          </a:p>
-        </p:txBody>
-      </p:sp>
-      <p:sp>
-        <p:nvSpPr>
-          <p:cNvPr id="41" name="">
-            <a:extLst xmlns:a="http://schemas.openxmlformats.org/drawingml/2006/main">
-              <a:ext uri="{FF2B5EF4-FFF2-40B4-BE49-F238E27FC236}">
-                <a16:creationId xmlns:a16="http://schemas.microsoft.com/office/drawing/2014/main" id="{BAA9AB52-6DBC-4EE4-B377-CB1222ECC6FB}"/>
-              </a:ext>
-            </a:extLst>
-          </p:cNvPr>
-          <p:cNvSpPr>
-            <a:spLocks xmlns:a="http://schemas.openxmlformats.org/drawingml/2006/main" noGrp="1"/>
-          </p:cNvSpPr>
-          <p:nvPr/>
-        </p:nvSpPr>
-        <p:spPr>
-          <a:xfrm xmlns:a="http://schemas.openxmlformats.org/drawingml/2006/main">
-            <a:off x="8020050" y="4095750"/>
-            <a:ext cx="2400300" cy="9525"/>
-          </a:xfrm>
-          <a:prstGeom xmlns:a="http://schemas.openxmlformats.org/drawingml/2006/main" prst="rect">
-            <a:avLst/>
-          </a:prstGeom>
-          <a:solidFill xmlns:a="http://schemas.openxmlformats.org/drawingml/2006/main">
-            <a:srgbClr val="E6EBF2"/>
-          </a:solidFill>
-          <a:ln xmlns:a="http://schemas.openxmlformats.org/drawingml/2006/main">
-            <a:noFill/>
-          </a:ln>
-        </p:spPr>
-      </p:sp>
-      <p:sp>
-        <p:nvSpPr>
-          <p:cNvPr id="42" name="">
-            <a:extLst xmlns:a="http://schemas.openxmlformats.org/drawingml/2006/main">
-              <a:ext uri="{FF2B5EF4-FFF2-40B4-BE49-F238E27FC236}">
-                <a16:creationId xmlns:a16="http://schemas.microsoft.com/office/drawing/2014/main" id="{EAAD4D9A-2386-456F-9D9E-4CC7F65E4D33}"/>
-              </a:ext>
-            </a:extLst>
-          </p:cNvPr>
-          <p:cNvSpPr>
-            <a:spLocks xmlns:a="http://schemas.openxmlformats.org/drawingml/2006/main" noGrp="1"/>
-          </p:cNvSpPr>
-          <p:nvPr/>
-        </p:nvSpPr>
-        <p:spPr>
-          <a:xfrm xmlns:a="http://schemas.openxmlformats.org/drawingml/2006/main">
-            <a:off x="7981950" y="4191000"/>
-            <a:ext cx="2476500" cy="171450"/>
-          </a:xfrm>
-          <a:prstGeom xmlns:a="http://schemas.openxmlformats.org/drawingml/2006/main" prst="rect">
-            <a:avLst/>
-          </a:prstGeom>
-          <a:ln xmlns:a="http://schemas.openxmlformats.org/drawingml/2006/main">
-            <a:noFill/>
-          </a:ln>
-        </p:spPr>
-        <p:txBody>
-          <a:bodyPr xmlns:a="http://schemas.openxmlformats.org/drawingml/2006/main" lIns="0" tIns="0" rIns="0" bIns="0" anchor="t">
-            <a:normAutofit fontScale="100000"/>
-          </a:bodyPr>
-          <a:lstStyle xmlns:a="http://schemas.openxmlformats.org/drawingml/2006/main"/>
-          <a:p xmlns:a="http://schemas.openxmlformats.org/drawingml/2006/main">
-            <a:pPr algn="ctr">
-              <a:defRPr sz="900" b="0">
-                <a:solidFill>
-                  <a:srgbClr val="5B6472"/>
-                </a:solidFill>
-                <a:latin typeface="PingFang SC"/>
-                <a:ea typeface="PingFang SC"/>
-                <a:cs typeface="PingFang SC"/>
-              </a:defRPr>
-            </a:pPr>
-            <a:r>
-              <a:rPr sz="900" b="0">
-                <a:solidFill>
-                  <a:srgbClr val="5B6472"/>
-                </a:solidFill>
-                <a:latin typeface="PingFang SC"/>
-                <a:ea typeface="PingFang SC"/>
-                <a:cs typeface="PingFang SC"/>
-              </a:rPr>
-              <a:t>后续替换为实际截图</a:t>
-            </a:r>
-          </a:p>
-        </p:txBody>
-      </p:sp>
-      <p:sp>
-        <p:nvSpPr>
-          <p:cNvPr id="43" name="">
-            <a:extLst xmlns:a="http://schemas.openxmlformats.org/drawingml/2006/main">
-              <a:ext uri="{FF2B5EF4-FFF2-40B4-BE49-F238E27FC236}">
-                <a16:creationId xmlns:a16="http://schemas.microsoft.com/office/drawing/2014/main" id="{4B558E9E-7669-4BB6-9ADC-57C82BC3E413}"/>
+                <a16:creationId xmlns:a16="http://schemas.microsoft.com/office/drawing/2014/main" id="{1C494700-8C70-415D-88B2-B6BF7BF1ABEC}"/>
               </a:ext>
             </a:extLst>
           </p:cNvPr>
@@ -7255,10 +6951,10 @@
       </p:sp>
       <p:sp>
         <p:nvSpPr>
-          <p:cNvPr id="44" name="">
-            <a:extLst xmlns:a="http://schemas.openxmlformats.org/drawingml/2006/main">
-              <a:ext uri="{FF2B5EF4-FFF2-40B4-BE49-F238E27FC236}">
-                <a16:creationId xmlns:a16="http://schemas.microsoft.com/office/drawing/2014/main" id="{2A874E9F-2430-4DE5-86CD-E5CF71EE33DE}"/>
+          <p:cNvPr id="41" name="">
+            <a:extLst xmlns:a="http://schemas.openxmlformats.org/drawingml/2006/main">
+              <a:ext uri="{FF2B5EF4-FFF2-40B4-BE49-F238E27FC236}">
+                <a16:creationId xmlns:a16="http://schemas.microsoft.com/office/drawing/2014/main" id="{B4BE7A89-9C93-4BE7-A56F-847119029C9C}"/>
               </a:ext>
             </a:extLst>
           </p:cNvPr>
@@ -7285,10 +6981,10 @@
       </p:sp>
       <p:sp>
         <p:nvSpPr>
-          <p:cNvPr id="45" name="">
-            <a:extLst xmlns:a="http://schemas.openxmlformats.org/drawingml/2006/main">
-              <a:ext uri="{FF2B5EF4-FFF2-40B4-BE49-F238E27FC236}">
-                <a16:creationId xmlns:a16="http://schemas.microsoft.com/office/drawing/2014/main" id="{2BE11C71-2378-4A5E-AF52-753A4180B4C2}"/>
+          <p:cNvPr id="42" name="">
+            <a:extLst xmlns:a="http://schemas.openxmlformats.org/drawingml/2006/main">
+              <a:ext uri="{FF2B5EF4-FFF2-40B4-BE49-F238E27FC236}">
+                <a16:creationId xmlns:a16="http://schemas.microsoft.com/office/drawing/2014/main" id="{49CFC485-BFD7-4C6C-BE58-4352575765E3}"/>
               </a:ext>
             </a:extLst>
           </p:cNvPr>
@@ -7341,10 +7037,10 @@
       </p:sp>
       <p:sp>
         <p:nvSpPr>
-          <p:cNvPr id="46" name="">
-            <a:extLst xmlns:a="http://schemas.openxmlformats.org/drawingml/2006/main">
-              <a:ext uri="{FF2B5EF4-FFF2-40B4-BE49-F238E27FC236}">
-                <a16:creationId xmlns:a16="http://schemas.microsoft.com/office/drawing/2014/main" id="{022C382F-E4D3-43B6-BCF3-FE2EB540F7D8}"/>
+          <p:cNvPr id="43" name="">
+            <a:extLst xmlns:a="http://schemas.openxmlformats.org/drawingml/2006/main">
+              <a:ext uri="{FF2B5EF4-FFF2-40B4-BE49-F238E27FC236}">
+                <a16:creationId xmlns:a16="http://schemas.microsoft.com/office/drawing/2014/main" id="{6F3AE585-AA52-4F87-92E0-4CE89A8ABAD2}"/>
               </a:ext>
             </a:extLst>
           </p:cNvPr>
@@ -7397,10 +7093,10 @@
       </p:sp>
       <p:sp>
         <p:nvSpPr>
-          <p:cNvPr id="47" name="">
-            <a:extLst xmlns:a="http://schemas.openxmlformats.org/drawingml/2006/main">
-              <a:ext uri="{FF2B5EF4-FFF2-40B4-BE49-F238E27FC236}">
-                <a16:creationId xmlns:a16="http://schemas.microsoft.com/office/drawing/2014/main" id="{DEFC533E-E217-4113-9D3B-2EF0F12126A5}"/>
+          <p:cNvPr id="44" name="">
+            <a:extLst xmlns:a="http://schemas.openxmlformats.org/drawingml/2006/main">
+              <a:ext uri="{FF2B5EF4-FFF2-40B4-BE49-F238E27FC236}">
+                <a16:creationId xmlns:a16="http://schemas.microsoft.com/office/drawing/2014/main" id="{77017200-61DC-4514-8216-5A97B64EDC6E}"/>
               </a:ext>
             </a:extLst>
           </p:cNvPr>
@@ -7453,10 +7149,10 @@
       </p:sp>
       <p:sp>
         <p:nvSpPr>
-          <p:cNvPr id="48" name="">
-            <a:extLst xmlns:a="http://schemas.openxmlformats.org/drawingml/2006/main">
-              <a:ext uri="{FF2B5EF4-FFF2-40B4-BE49-F238E27FC236}">
-                <a16:creationId xmlns:a16="http://schemas.microsoft.com/office/drawing/2014/main" id="{8DF4B74F-BD2F-4C39-9801-CA709D15CD26}"/>
+          <p:cNvPr id="45" name="">
+            <a:extLst xmlns:a="http://schemas.openxmlformats.org/drawingml/2006/main">
+              <a:ext uri="{FF2B5EF4-FFF2-40B4-BE49-F238E27FC236}">
+                <a16:creationId xmlns:a16="http://schemas.microsoft.com/office/drawing/2014/main" id="{E979ACBC-CBB6-4176-8FEC-E6E2A8F8F94C}"/>
               </a:ext>
             </a:extLst>
           </p:cNvPr>
@@ -7487,10 +7183,10 @@
       </p:sp>
       <p:sp>
         <p:nvSpPr>
-          <p:cNvPr id="49" name="">
-            <a:extLst xmlns:a="http://schemas.openxmlformats.org/drawingml/2006/main">
-              <a:ext uri="{FF2B5EF4-FFF2-40B4-BE49-F238E27FC236}">
-                <a16:creationId xmlns:a16="http://schemas.microsoft.com/office/drawing/2014/main" id="{1BFB729F-F4CC-45AC-8A4A-D1D6358806E9}"/>
+          <p:cNvPr id="46" name="">
+            <a:extLst xmlns:a="http://schemas.openxmlformats.org/drawingml/2006/main">
+              <a:ext uri="{FF2B5EF4-FFF2-40B4-BE49-F238E27FC236}">
+                <a16:creationId xmlns:a16="http://schemas.microsoft.com/office/drawing/2014/main" id="{5B2D6F8F-E503-4EA3-AF8F-B07F26DB3965}"/>
               </a:ext>
             </a:extLst>
           </p:cNvPr>
@@ -7517,10 +7213,10 @@
       </p:sp>
       <p:sp>
         <p:nvSpPr>
-          <p:cNvPr id="50" name="">
-            <a:extLst xmlns:a="http://schemas.openxmlformats.org/drawingml/2006/main">
-              <a:ext uri="{FF2B5EF4-FFF2-40B4-BE49-F238E27FC236}">
-                <a16:creationId xmlns:a16="http://schemas.microsoft.com/office/drawing/2014/main" id="{C4BCEAB3-A978-430E-9514-94AE9ED31656}"/>
+          <p:cNvPr id="47" name="">
+            <a:extLst xmlns:a="http://schemas.openxmlformats.org/drawingml/2006/main">
+              <a:ext uri="{FF2B5EF4-FFF2-40B4-BE49-F238E27FC236}">
+                <a16:creationId xmlns:a16="http://schemas.microsoft.com/office/drawing/2014/main" id="{8A0E7B20-F1B3-4421-ADA8-9A997CDF577D}"/>
               </a:ext>
             </a:extLst>
           </p:cNvPr>
@@ -7573,10 +7269,10 @@
       </p:sp>
       <p:sp>
         <p:nvSpPr>
-          <p:cNvPr id="51" name="">
-            <a:extLst xmlns:a="http://schemas.openxmlformats.org/drawingml/2006/main">
-              <a:ext uri="{FF2B5EF4-FFF2-40B4-BE49-F238E27FC236}">
-                <a16:creationId xmlns:a16="http://schemas.microsoft.com/office/drawing/2014/main" id="{19BB0FAC-7D1C-45C1-B4BB-AC0A0E3777F8}"/>
+          <p:cNvPr id="48" name="">
+            <a:extLst xmlns:a="http://schemas.openxmlformats.org/drawingml/2006/main">
+              <a:ext uri="{FF2B5EF4-FFF2-40B4-BE49-F238E27FC236}">
+                <a16:creationId xmlns:a16="http://schemas.microsoft.com/office/drawing/2014/main" id="{6BDF603C-78D6-4709-BECC-008D215AACBE}"/>
               </a:ext>
             </a:extLst>
           </p:cNvPr>
@@ -7629,10 +7325,10 @@
       </p:sp>
       <p:sp>
         <p:nvSpPr>
-          <p:cNvPr id="52" name="">
-            <a:extLst xmlns:a="http://schemas.openxmlformats.org/drawingml/2006/main">
-              <a:ext uri="{FF2B5EF4-FFF2-40B4-BE49-F238E27FC236}">
-                <a16:creationId xmlns:a16="http://schemas.microsoft.com/office/drawing/2014/main" id="{2A49D186-6C29-4D37-B104-640BB75ED421}"/>
+          <p:cNvPr id="49" name="">
+            <a:extLst xmlns:a="http://schemas.openxmlformats.org/drawingml/2006/main">
+              <a:ext uri="{FF2B5EF4-FFF2-40B4-BE49-F238E27FC236}">
+                <a16:creationId xmlns:a16="http://schemas.microsoft.com/office/drawing/2014/main" id="{BDFD4308-542A-47B3-AE9F-2AD95F27A3C8}"/>
               </a:ext>
             </a:extLst>
           </p:cNvPr>
@@ -7685,10 +7381,10 @@
       </p:sp>
       <p:sp>
         <p:nvSpPr>
-          <p:cNvPr id="53" name="">
-            <a:extLst xmlns:a="http://schemas.openxmlformats.org/drawingml/2006/main">
-              <a:ext uri="{FF2B5EF4-FFF2-40B4-BE49-F238E27FC236}">
-                <a16:creationId xmlns:a16="http://schemas.microsoft.com/office/drawing/2014/main" id="{8F18F4D1-60A0-4599-9EAE-3206D755B9B5}"/>
+          <p:cNvPr id="50" name="">
+            <a:extLst xmlns:a="http://schemas.openxmlformats.org/drawingml/2006/main">
+              <a:ext uri="{FF2B5EF4-FFF2-40B4-BE49-F238E27FC236}">
+                <a16:creationId xmlns:a16="http://schemas.microsoft.com/office/drawing/2014/main" id="{5DE77EA0-71CF-485C-83FD-1B63CB7E682E}"/>
               </a:ext>
             </a:extLst>
           </p:cNvPr>
@@ -7715,10 +7411,10 @@
       </p:sp>
       <p:sp>
         <p:nvSpPr>
-          <p:cNvPr id="54" name="">
-            <a:extLst xmlns:a="http://schemas.openxmlformats.org/drawingml/2006/main">
-              <a:ext uri="{FF2B5EF4-FFF2-40B4-BE49-F238E27FC236}">
-                <a16:creationId xmlns:a16="http://schemas.microsoft.com/office/drawing/2014/main" id="{22E45AD4-F1A2-4CB4-A88C-AAE645271A0D}"/>
+          <p:cNvPr id="51" name="">
+            <a:extLst xmlns:a="http://schemas.openxmlformats.org/drawingml/2006/main">
+              <a:ext uri="{FF2B5EF4-FFF2-40B4-BE49-F238E27FC236}">
+                <a16:creationId xmlns:a16="http://schemas.microsoft.com/office/drawing/2014/main" id="{2B7D85CD-5690-4B55-B202-4B9527EE7F63}"/>
               </a:ext>
             </a:extLst>
           </p:cNvPr>
@@ -7771,10 +7467,10 @@
       </p:sp>
       <p:sp>
         <p:nvSpPr>
-          <p:cNvPr id="55" name="">
-            <a:extLst xmlns:a="http://schemas.openxmlformats.org/drawingml/2006/main">
-              <a:ext uri="{FF2B5EF4-FFF2-40B4-BE49-F238E27FC236}">
-                <a16:creationId xmlns:a16="http://schemas.microsoft.com/office/drawing/2014/main" id="{B635AAB6-EC72-4C74-9659-00EA54D6AC43}"/>
+          <p:cNvPr id="52" name="">
+            <a:extLst xmlns:a="http://schemas.openxmlformats.org/drawingml/2006/main">
+              <a:ext uri="{FF2B5EF4-FFF2-40B4-BE49-F238E27FC236}">
+                <a16:creationId xmlns:a16="http://schemas.microsoft.com/office/drawing/2014/main" id="{27D1CD33-E3BB-4B58-8403-54001C37A4BD}"/>
               </a:ext>
             </a:extLst>
           </p:cNvPr>
@@ -7820,7 +7516,7 @@
                 <a:ea typeface="PingFang SC"/>
                 <a:cs typeface="PingFang SC"/>
               </a:rPr>
-              <a:t>只说明代表样本回放改善，不扩大为全场景准确率结论；线上误报和漏报仍需继续用真实样本扩充。</a:t>
+              <a:t>可以看出代表样本回放改善；后续继续添加实际案例进行迭代，不扩大为全场景准确率结论。</a:t>
             </a:r>
           </a:p>
         </p:txBody>
@@ -7828,7 +7524,7 @@
     </p:spTree>
     <p:extLst>
       <p:ext uri="{BB962C8B-B14F-4D97-AF65-F5344CB8AC3E}">
-        <p14:creationId xmlns:p14="http://schemas.microsoft.com/office/powerpoint/2010/main" val="407325186"/>
+        <p14:creationId xmlns:p14="http://schemas.microsoft.com/office/powerpoint/2010/main" val="599370245"/>
       </p:ext>
     </p:extLst>
   </p:cSld>
@@ -7859,7 +7555,7 @@
           <p:cNvPr id="1" name="">
             <a:extLst xmlns:a="http://schemas.openxmlformats.org/drawingml/2006/main">
               <a:ext uri="{FF2B5EF4-FFF2-40B4-BE49-F238E27FC236}">
-                <a16:creationId xmlns:a16="http://schemas.microsoft.com/office/drawing/2014/main" id="{BD001891-D989-4A18-894B-AF907998F374}"/>
+                <a16:creationId xmlns:a16="http://schemas.microsoft.com/office/drawing/2014/main" id="{40B28920-F141-4DFB-8F4F-27DAFC13C6FE}"/>
               </a:ext>
             </a:extLst>
           </p:cNvPr>
@@ -7889,7 +7585,7 @@
           <p:cNvPr id="2" name="">
             <a:extLst xmlns:a="http://schemas.openxmlformats.org/drawingml/2006/main">
               <a:ext uri="{FF2B5EF4-FFF2-40B4-BE49-F238E27FC236}">
-                <a16:creationId xmlns:a16="http://schemas.microsoft.com/office/drawing/2014/main" id="{1B97D590-D0EA-40E1-8A2F-9A7AF3A62FCD}"/>
+                <a16:creationId xmlns:a16="http://schemas.microsoft.com/office/drawing/2014/main" id="{13A17595-1545-4A04-BD17-6D7F089F8FCF}"/>
               </a:ext>
             </a:extLst>
           </p:cNvPr>
@@ -7919,7 +7615,7 @@
           <p:cNvPr id="3" name="">
             <a:extLst xmlns:a="http://schemas.openxmlformats.org/drawingml/2006/main">
               <a:ext uri="{FF2B5EF4-FFF2-40B4-BE49-F238E27FC236}">
-                <a16:creationId xmlns:a16="http://schemas.microsoft.com/office/drawing/2014/main" id="{68891E8A-EE55-4FD8-8289-EDF9D0B53540}"/>
+                <a16:creationId xmlns:a16="http://schemas.microsoft.com/office/drawing/2014/main" id="{10BF76E7-B889-4656-9F50-8786F68FF8A1}"/>
               </a:ext>
             </a:extLst>
           </p:cNvPr>
@@ -7975,7 +7671,7 @@
           <p:cNvPr id="4" name="">
             <a:extLst xmlns:a="http://schemas.openxmlformats.org/drawingml/2006/main">
               <a:ext uri="{FF2B5EF4-FFF2-40B4-BE49-F238E27FC236}">
-                <a16:creationId xmlns:a16="http://schemas.microsoft.com/office/drawing/2014/main" id="{503934F9-8386-4CC5-B5D0-A13F41889DC8}"/>
+                <a16:creationId xmlns:a16="http://schemas.microsoft.com/office/drawing/2014/main" id="{A7C59DD0-389A-4CD6-B6BE-DB8DDCAED274}"/>
               </a:ext>
             </a:extLst>
           </p:cNvPr>
@@ -8031,7 +7727,7 @@
           <p:cNvPr id="5" name="">
             <a:extLst xmlns:a="http://schemas.openxmlformats.org/drawingml/2006/main">
               <a:ext uri="{FF2B5EF4-FFF2-40B4-BE49-F238E27FC236}">
-                <a16:creationId xmlns:a16="http://schemas.microsoft.com/office/drawing/2014/main" id="{C6E9EED4-F2B9-44E1-ABC2-9F0802213467}"/>
+                <a16:creationId xmlns:a16="http://schemas.microsoft.com/office/drawing/2014/main" id="{01BA4476-246E-4AEB-9885-194F7751754F}"/>
               </a:ext>
             </a:extLst>
           </p:cNvPr>
@@ -8061,7 +7757,7 @@
           <p:cNvPr id="6" name="">
             <a:extLst xmlns:a="http://schemas.openxmlformats.org/drawingml/2006/main">
               <a:ext uri="{FF2B5EF4-FFF2-40B4-BE49-F238E27FC236}">
-                <a16:creationId xmlns:a16="http://schemas.microsoft.com/office/drawing/2014/main" id="{330E162E-F384-4E23-A313-D28F2B84F7D1}"/>
+                <a16:creationId xmlns:a16="http://schemas.microsoft.com/office/drawing/2014/main" id="{897B82D5-203C-4FDE-ACCB-9EEE046601E2}"/>
               </a:ext>
             </a:extLst>
           </p:cNvPr>
@@ -8117,7 +7813,7 @@
           <p:cNvPr id="7" name="">
             <a:extLst xmlns:a="http://schemas.openxmlformats.org/drawingml/2006/main">
               <a:ext uri="{FF2B5EF4-FFF2-40B4-BE49-F238E27FC236}">
-                <a16:creationId xmlns:a16="http://schemas.microsoft.com/office/drawing/2014/main" id="{6258017C-A5D7-4162-9569-BF16304334CF}"/>
+                <a16:creationId xmlns:a16="http://schemas.microsoft.com/office/drawing/2014/main" id="{0868AEB1-5555-4238-9879-A8CBFF3D55EB}"/>
               </a:ext>
             </a:extLst>
           </p:cNvPr>
@@ -8151,7 +7847,7 @@
           <p:cNvPr id="8" name="">
             <a:extLst xmlns:a="http://schemas.openxmlformats.org/drawingml/2006/main">
               <a:ext uri="{FF2B5EF4-FFF2-40B4-BE49-F238E27FC236}">
-                <a16:creationId xmlns:a16="http://schemas.microsoft.com/office/drawing/2014/main" id="{C0E26276-910D-4EBA-84FC-1E6E838887EB}"/>
+                <a16:creationId xmlns:a16="http://schemas.microsoft.com/office/drawing/2014/main" id="{C53B10F0-2A14-4A66-B892-34F93770FA60}"/>
               </a:ext>
             </a:extLst>
           </p:cNvPr>
@@ -8181,7 +7877,7 @@
           <p:cNvPr id="9" name="">
             <a:extLst xmlns:a="http://schemas.openxmlformats.org/drawingml/2006/main">
               <a:ext uri="{FF2B5EF4-FFF2-40B4-BE49-F238E27FC236}">
-                <a16:creationId xmlns:a16="http://schemas.microsoft.com/office/drawing/2014/main" id="{D34EAF79-BA17-4C16-8BA3-544EE9B1FE42}"/>
+                <a16:creationId xmlns:a16="http://schemas.microsoft.com/office/drawing/2014/main" id="{BF2DD952-E8C8-4141-AAA6-44080E42DFAC}"/>
               </a:ext>
             </a:extLst>
           </p:cNvPr>
@@ -8237,7 +7933,7 @@
           <p:cNvPr id="10" name="">
             <a:extLst xmlns:a="http://schemas.openxmlformats.org/drawingml/2006/main">
               <a:ext uri="{FF2B5EF4-FFF2-40B4-BE49-F238E27FC236}">
-                <a16:creationId xmlns:a16="http://schemas.microsoft.com/office/drawing/2014/main" id="{4F8D5AB6-EF89-4859-AFA9-DC11F8980D9B}"/>
+                <a16:creationId xmlns:a16="http://schemas.microsoft.com/office/drawing/2014/main" id="{00529FA7-D3F4-454D-B329-6B024548C0EA}"/>
               </a:ext>
             </a:extLst>
           </p:cNvPr>
@@ -8293,7 +7989,7 @@
           <p:cNvPr id="11" name="">
             <a:extLst xmlns:a="http://schemas.openxmlformats.org/drawingml/2006/main">
               <a:ext uri="{FF2B5EF4-FFF2-40B4-BE49-F238E27FC236}">
-                <a16:creationId xmlns:a16="http://schemas.microsoft.com/office/drawing/2014/main" id="{6EDDB43F-D70E-4F0A-9867-4D89FB4628E8}"/>
+                <a16:creationId xmlns:a16="http://schemas.microsoft.com/office/drawing/2014/main" id="{D2AF7004-CB3E-43EC-BFA6-AB0C170C6BA6}"/>
               </a:ext>
             </a:extLst>
           </p:cNvPr>
@@ -8349,7 +8045,7 @@
           <p:cNvPr id="12" name="">
             <a:extLst xmlns:a="http://schemas.openxmlformats.org/drawingml/2006/main">
               <a:ext uri="{FF2B5EF4-FFF2-40B4-BE49-F238E27FC236}">
-                <a16:creationId xmlns:a16="http://schemas.microsoft.com/office/drawing/2014/main" id="{304BB783-A606-4B07-AE4C-1A1AD3A155EF}"/>
+                <a16:creationId xmlns:a16="http://schemas.microsoft.com/office/drawing/2014/main" id="{BF9506C1-655F-4DF9-8EA9-C05B4322970C}"/>
               </a:ext>
             </a:extLst>
           </p:cNvPr>
@@ -8383,7 +8079,7 @@
           <p:cNvPr id="13" name="">
             <a:extLst xmlns:a="http://schemas.openxmlformats.org/drawingml/2006/main">
               <a:ext uri="{FF2B5EF4-FFF2-40B4-BE49-F238E27FC236}">
-                <a16:creationId xmlns:a16="http://schemas.microsoft.com/office/drawing/2014/main" id="{E97B0EBD-43D1-432C-8E87-5DFCC38F4C23}"/>
+                <a16:creationId xmlns:a16="http://schemas.microsoft.com/office/drawing/2014/main" id="{CFA28E26-7206-463B-8A1A-99B736B1EEBA}"/>
               </a:ext>
             </a:extLst>
           </p:cNvPr>
@@ -8413,7 +8109,7 @@
           <p:cNvPr id="14" name="">
             <a:extLst xmlns:a="http://schemas.openxmlformats.org/drawingml/2006/main">
               <a:ext uri="{FF2B5EF4-FFF2-40B4-BE49-F238E27FC236}">
-                <a16:creationId xmlns:a16="http://schemas.microsoft.com/office/drawing/2014/main" id="{8E3252EA-60B3-4A7D-88CC-88693E2D6544}"/>
+                <a16:creationId xmlns:a16="http://schemas.microsoft.com/office/drawing/2014/main" id="{A99DC77E-8AE5-4BAB-AF08-C857D62A9FB6}"/>
               </a:ext>
             </a:extLst>
           </p:cNvPr>
@@ -8469,7 +8165,7 @@
           <p:cNvPr id="15" name="">
             <a:extLst xmlns:a="http://schemas.openxmlformats.org/drawingml/2006/main">
               <a:ext uri="{FF2B5EF4-FFF2-40B4-BE49-F238E27FC236}">
-                <a16:creationId xmlns:a16="http://schemas.microsoft.com/office/drawing/2014/main" id="{78859485-019E-405D-96F7-1D154F0A0639}"/>
+                <a16:creationId xmlns:a16="http://schemas.microsoft.com/office/drawing/2014/main" id="{529486FF-B724-42E3-9190-DF72E1831BE7}"/>
               </a:ext>
             </a:extLst>
           </p:cNvPr>
@@ -8525,7 +8221,7 @@
           <p:cNvPr id="16" name="">
             <a:extLst xmlns:a="http://schemas.openxmlformats.org/drawingml/2006/main">
               <a:ext uri="{FF2B5EF4-FFF2-40B4-BE49-F238E27FC236}">
-                <a16:creationId xmlns:a16="http://schemas.microsoft.com/office/drawing/2014/main" id="{0767D82A-3CE5-4ADE-B7F7-099611E365B3}"/>
+                <a16:creationId xmlns:a16="http://schemas.microsoft.com/office/drawing/2014/main" id="{C77A63FA-9A28-4977-9BB5-0672F8B33037}"/>
               </a:ext>
             </a:extLst>
           </p:cNvPr>
@@ -8581,7 +8277,7 @@
           <p:cNvPr id="17" name="">
             <a:extLst xmlns:a="http://schemas.openxmlformats.org/drawingml/2006/main">
               <a:ext uri="{FF2B5EF4-FFF2-40B4-BE49-F238E27FC236}">
-                <a16:creationId xmlns:a16="http://schemas.microsoft.com/office/drawing/2014/main" id="{A1DD0EE8-C33B-4CEE-9706-84DB6DF1CD63}"/>
+                <a16:creationId xmlns:a16="http://schemas.microsoft.com/office/drawing/2014/main" id="{642FDC7F-DAF5-4CDF-B94D-7BCD649007A3}"/>
               </a:ext>
             </a:extLst>
           </p:cNvPr>
@@ -8611,7 +8307,7 @@
           <p:cNvPr id="18" name="">
             <a:extLst xmlns:a="http://schemas.openxmlformats.org/drawingml/2006/main">
               <a:ext uri="{FF2B5EF4-FFF2-40B4-BE49-F238E27FC236}">
-                <a16:creationId xmlns:a16="http://schemas.microsoft.com/office/drawing/2014/main" id="{E19F37BF-EC56-4918-B2A1-208EB149E9A2}"/>
+                <a16:creationId xmlns:a16="http://schemas.microsoft.com/office/drawing/2014/main" id="{BC509037-6AE3-40C5-81EE-F55A1D458B64}"/>
               </a:ext>
             </a:extLst>
           </p:cNvPr>
@@ -8667,7 +8363,7 @@
           <p:cNvPr id="19" name="">
             <a:extLst xmlns:a="http://schemas.openxmlformats.org/drawingml/2006/main">
               <a:ext uri="{FF2B5EF4-FFF2-40B4-BE49-F238E27FC236}">
-                <a16:creationId xmlns:a16="http://schemas.microsoft.com/office/drawing/2014/main" id="{D62A9930-D011-4156-A31B-DBAB84CCF541}"/>
+                <a16:creationId xmlns:a16="http://schemas.microsoft.com/office/drawing/2014/main" id="{21C9241C-869C-4EA5-A86E-7C8149E2609E}"/>
               </a:ext>
             </a:extLst>
           </p:cNvPr>
@@ -8723,7 +8419,7 @@
           <p:cNvPr id="20" name="">
             <a:extLst xmlns:a="http://schemas.openxmlformats.org/drawingml/2006/main">
               <a:ext uri="{FF2B5EF4-FFF2-40B4-BE49-F238E27FC236}">
-                <a16:creationId xmlns:a16="http://schemas.microsoft.com/office/drawing/2014/main" id="{3CFC32A5-0549-457A-A7C8-81A55AF4F782}"/>
+                <a16:creationId xmlns:a16="http://schemas.microsoft.com/office/drawing/2014/main" id="{6BB001FC-C0A7-4A04-9FE2-2BC73530610B}"/>
               </a:ext>
             </a:extLst>
           </p:cNvPr>
@@ -8777,7 +8473,7 @@
     </p:spTree>
     <p:extLst>
       <p:ext uri="{BB962C8B-B14F-4D97-AF65-F5344CB8AC3E}">
-        <p14:creationId xmlns:p14="http://schemas.microsoft.com/office/powerpoint/2010/main" val="2042741053"/>
+        <p14:creationId xmlns:p14="http://schemas.microsoft.com/office/powerpoint/2010/main" val="141334135"/>
       </p:ext>
     </p:extLst>
   </p:cSld>
@@ -8808,7 +8504,7 @@
           <p:cNvPr id="1" name="">
             <a:extLst xmlns:a="http://schemas.openxmlformats.org/drawingml/2006/main">
               <a:ext uri="{FF2B5EF4-FFF2-40B4-BE49-F238E27FC236}">
-                <a16:creationId xmlns:a16="http://schemas.microsoft.com/office/drawing/2014/main" id="{840A62C1-5ED8-4A9F-B5C8-4269CD4E2050}"/>
+                <a16:creationId xmlns:a16="http://schemas.microsoft.com/office/drawing/2014/main" id="{4A3A7519-3B1D-4DE4-B1B2-E511ED52099F}"/>
               </a:ext>
             </a:extLst>
           </p:cNvPr>
@@ -8838,7 +8534,7 @@
           <p:cNvPr id="2" name="">
             <a:extLst xmlns:a="http://schemas.openxmlformats.org/drawingml/2006/main">
               <a:ext uri="{FF2B5EF4-FFF2-40B4-BE49-F238E27FC236}">
-                <a16:creationId xmlns:a16="http://schemas.microsoft.com/office/drawing/2014/main" id="{A589E0A3-CF1A-4E2E-A54F-3FAB38EB2105}"/>
+                <a16:creationId xmlns:a16="http://schemas.microsoft.com/office/drawing/2014/main" id="{65FDCE20-8111-4EA6-960E-4497E4F06EF9}"/>
               </a:ext>
             </a:extLst>
           </p:cNvPr>
@@ -8868,7 +8564,7 @@
           <p:cNvPr id="3" name="">
             <a:extLst xmlns:a="http://schemas.openxmlformats.org/drawingml/2006/main">
               <a:ext uri="{FF2B5EF4-FFF2-40B4-BE49-F238E27FC236}">
-                <a16:creationId xmlns:a16="http://schemas.microsoft.com/office/drawing/2014/main" id="{958B9F1C-0965-46B6-8785-01C9B1081CE9}"/>
+                <a16:creationId xmlns:a16="http://schemas.microsoft.com/office/drawing/2014/main" id="{15C989C7-0E4A-4C66-8D3C-81EB842A4201}"/>
               </a:ext>
             </a:extLst>
           </p:cNvPr>
@@ -8924,7 +8620,7 @@
           <p:cNvPr id="4" name="">
             <a:extLst xmlns:a="http://schemas.openxmlformats.org/drawingml/2006/main">
               <a:ext uri="{FF2B5EF4-FFF2-40B4-BE49-F238E27FC236}">
-                <a16:creationId xmlns:a16="http://schemas.microsoft.com/office/drawing/2014/main" id="{8C0F95F4-83C6-44BD-AEAF-826A06610F98}"/>
+                <a16:creationId xmlns:a16="http://schemas.microsoft.com/office/drawing/2014/main" id="{6B60FA80-271B-4E7A-A2B9-A9C68DA9104F}"/>
               </a:ext>
             </a:extLst>
           </p:cNvPr>
@@ -8970,7 +8666,7 @@
                 <a:ea typeface="PingFang SC"/>
                 <a:cs typeface="PingFang SC"/>
               </a:rPr>
-              <a:t>本阶段完成客户可见信息适配，并跑通 SMBIOS 场景的 AI 辅助工程闭环</a:t>
+              <a:t>本阶段完成客户可见信息适配，并跑通 SMBIOS 场景的 AI 辅助工程最小闭环</a:t>
             </a:r>
           </a:p>
         </p:txBody>
@@ -8980,7 +8676,7 @@
           <p:cNvPr id="5" name="">
             <a:extLst xmlns:a="http://schemas.openxmlformats.org/drawingml/2006/main">
               <a:ext uri="{FF2B5EF4-FFF2-40B4-BE49-F238E27FC236}">
-                <a16:creationId xmlns:a16="http://schemas.microsoft.com/office/drawing/2014/main" id="{806045F2-1037-4B35-A2C9-8DDB792A605D}"/>
+                <a16:creationId xmlns:a16="http://schemas.microsoft.com/office/drawing/2014/main" id="{3C6D2806-DF1A-4D30-9B68-0FFA433965E5}"/>
               </a:ext>
             </a:extLst>
           </p:cNvPr>
@@ -9010,7 +8706,7 @@
           <p:cNvPr id="6" name="">
             <a:extLst xmlns:a="http://schemas.openxmlformats.org/drawingml/2006/main">
               <a:ext uri="{FF2B5EF4-FFF2-40B4-BE49-F238E27FC236}">
-                <a16:creationId xmlns:a16="http://schemas.microsoft.com/office/drawing/2014/main" id="{D18A0125-6CDF-4A4F-9E10-275794C94CD9}"/>
+                <a16:creationId xmlns:a16="http://schemas.microsoft.com/office/drawing/2014/main" id="{793BB4A5-A01C-4CB9-B2E6-58F644CCAAC9}"/>
               </a:ext>
             </a:extLst>
           </p:cNvPr>
@@ -9066,7 +8762,7 @@
           <p:cNvPr id="7" name="">
             <a:extLst xmlns:a="http://schemas.openxmlformats.org/drawingml/2006/main">
               <a:ext uri="{FF2B5EF4-FFF2-40B4-BE49-F238E27FC236}">
-                <a16:creationId xmlns:a16="http://schemas.microsoft.com/office/drawing/2014/main" id="{B394EEA9-AEAF-4A8F-91A0-7CB46645C2EC}"/>
+                <a16:creationId xmlns:a16="http://schemas.microsoft.com/office/drawing/2014/main" id="{3AB440BA-799C-4134-B54E-A107374E55F6}"/>
               </a:ext>
             </a:extLst>
           </p:cNvPr>
@@ -9100,7 +8796,7 @@
           <p:cNvPr id="8" name="">
             <a:extLst xmlns:a="http://schemas.openxmlformats.org/drawingml/2006/main">
               <a:ext uri="{FF2B5EF4-FFF2-40B4-BE49-F238E27FC236}">
-                <a16:creationId xmlns:a16="http://schemas.microsoft.com/office/drawing/2014/main" id="{E34A2550-1FA1-4559-B4E6-DADC2540EA00}"/>
+                <a16:creationId xmlns:a16="http://schemas.microsoft.com/office/drawing/2014/main" id="{45F44543-467F-4475-B92C-3FEE0D1CCF6E}"/>
               </a:ext>
             </a:extLst>
           </p:cNvPr>
@@ -9130,7 +8826,7 @@
           <p:cNvPr id="9" name="">
             <a:extLst xmlns:a="http://schemas.openxmlformats.org/drawingml/2006/main">
               <a:ext uri="{FF2B5EF4-FFF2-40B4-BE49-F238E27FC236}">
-                <a16:creationId xmlns:a16="http://schemas.microsoft.com/office/drawing/2014/main" id="{4E629F2E-972B-4477-9DB0-254996FE9E2A}"/>
+                <a16:creationId xmlns:a16="http://schemas.microsoft.com/office/drawing/2014/main" id="{3E7FEAB5-0E05-4A4F-B612-4E9C4EA4F014}"/>
               </a:ext>
             </a:extLst>
           </p:cNvPr>
@@ -9186,7 +8882,7 @@
           <p:cNvPr id="10" name="">
             <a:extLst xmlns:a="http://schemas.openxmlformats.org/drawingml/2006/main">
               <a:ext uri="{FF2B5EF4-FFF2-40B4-BE49-F238E27FC236}">
-                <a16:creationId xmlns:a16="http://schemas.microsoft.com/office/drawing/2014/main" id="{4FDF17DE-6FDE-4765-B10F-7F8960F6152E}"/>
+                <a16:creationId xmlns:a16="http://schemas.microsoft.com/office/drawing/2014/main" id="{CD20E022-AE14-4525-95AB-C4E095121C2B}"/>
               </a:ext>
             </a:extLst>
           </p:cNvPr>
@@ -9242,7 +8938,7 @@
           <p:cNvPr id="11" name="">
             <a:extLst xmlns:a="http://schemas.openxmlformats.org/drawingml/2006/main">
               <a:ext uri="{FF2B5EF4-FFF2-40B4-BE49-F238E27FC236}">
-                <a16:creationId xmlns:a16="http://schemas.microsoft.com/office/drawing/2014/main" id="{7C1CF100-25F6-4DB8-9A04-B0CAA11CB37D}"/>
+                <a16:creationId xmlns:a16="http://schemas.microsoft.com/office/drawing/2014/main" id="{E50DD481-8B16-4454-B481-4E7E27E6FE23}"/>
               </a:ext>
             </a:extLst>
           </p:cNvPr>
@@ -9298,7 +8994,7 @@
           <p:cNvPr id="12" name="">
             <a:extLst xmlns:a="http://schemas.openxmlformats.org/drawingml/2006/main">
               <a:ext uri="{FF2B5EF4-FFF2-40B4-BE49-F238E27FC236}">
-                <a16:creationId xmlns:a16="http://schemas.microsoft.com/office/drawing/2014/main" id="{B688B708-CDCA-43EE-BFCD-A26517353BC8}"/>
+                <a16:creationId xmlns:a16="http://schemas.microsoft.com/office/drawing/2014/main" id="{2805B2A9-D0E0-4B2D-BACF-86552656E607}"/>
               </a:ext>
             </a:extLst>
           </p:cNvPr>
@@ -9332,7 +9028,7 @@
           <p:cNvPr id="13" name="">
             <a:extLst xmlns:a="http://schemas.openxmlformats.org/drawingml/2006/main">
               <a:ext uri="{FF2B5EF4-FFF2-40B4-BE49-F238E27FC236}">
-                <a16:creationId xmlns:a16="http://schemas.microsoft.com/office/drawing/2014/main" id="{EA418AF9-9A99-4A9A-BE15-9A291E449D25}"/>
+                <a16:creationId xmlns:a16="http://schemas.microsoft.com/office/drawing/2014/main" id="{93505452-61D0-448E-A043-DF599D29126C}"/>
               </a:ext>
             </a:extLst>
           </p:cNvPr>
@@ -9362,7 +9058,7 @@
           <p:cNvPr id="14" name="">
             <a:extLst xmlns:a="http://schemas.openxmlformats.org/drawingml/2006/main">
               <a:ext uri="{FF2B5EF4-FFF2-40B4-BE49-F238E27FC236}">
-                <a16:creationId xmlns:a16="http://schemas.microsoft.com/office/drawing/2014/main" id="{70791EDE-257D-4CA3-B8A3-B6EF562115F6}"/>
+                <a16:creationId xmlns:a16="http://schemas.microsoft.com/office/drawing/2014/main" id="{322A7706-C927-4107-9D90-C8972FAF7179}"/>
               </a:ext>
             </a:extLst>
           </p:cNvPr>
@@ -9418,7 +9114,7 @@
           <p:cNvPr id="15" name="">
             <a:extLst xmlns:a="http://schemas.openxmlformats.org/drawingml/2006/main">
               <a:ext uri="{FF2B5EF4-FFF2-40B4-BE49-F238E27FC236}">
-                <a16:creationId xmlns:a16="http://schemas.microsoft.com/office/drawing/2014/main" id="{0E2AF769-8CE7-4B89-A085-B7C8400A254E}"/>
+                <a16:creationId xmlns:a16="http://schemas.microsoft.com/office/drawing/2014/main" id="{F59C75B6-2B51-4FEE-B7DC-F0B5A529C073}"/>
               </a:ext>
             </a:extLst>
           </p:cNvPr>
@@ -9474,7 +9170,7 @@
           <p:cNvPr id="16" name="">
             <a:extLst xmlns:a="http://schemas.openxmlformats.org/drawingml/2006/main">
               <a:ext uri="{FF2B5EF4-FFF2-40B4-BE49-F238E27FC236}">
-                <a16:creationId xmlns:a16="http://schemas.microsoft.com/office/drawing/2014/main" id="{80DB5E28-9C65-453D-843D-69A316F7D23E}"/>
+                <a16:creationId xmlns:a16="http://schemas.microsoft.com/office/drawing/2014/main" id="{BF6DE52A-57EC-425B-ADFE-9FDFCB1E3E49}"/>
               </a:ext>
             </a:extLst>
           </p:cNvPr>
@@ -9530,7 +9226,7 @@
           <p:cNvPr id="17" name="">
             <a:extLst xmlns:a="http://schemas.openxmlformats.org/drawingml/2006/main">
               <a:ext uri="{FF2B5EF4-FFF2-40B4-BE49-F238E27FC236}">
-                <a16:creationId xmlns:a16="http://schemas.microsoft.com/office/drawing/2014/main" id="{AB8D188E-6E96-4D8B-ADFB-C0BD46DFC378}"/>
+                <a16:creationId xmlns:a16="http://schemas.microsoft.com/office/drawing/2014/main" id="{AAAC7E53-ABE4-4011-9F21-2D65BA4FBEA3}"/>
               </a:ext>
             </a:extLst>
           </p:cNvPr>
@@ -9564,7 +9260,7 @@
           <p:cNvPr id="18" name="">
             <a:extLst xmlns:a="http://schemas.openxmlformats.org/drawingml/2006/main">
               <a:ext uri="{FF2B5EF4-FFF2-40B4-BE49-F238E27FC236}">
-                <a16:creationId xmlns:a16="http://schemas.microsoft.com/office/drawing/2014/main" id="{D32610D7-A3C1-43CF-A1E5-0FC5DCA42FF3}"/>
+                <a16:creationId xmlns:a16="http://schemas.microsoft.com/office/drawing/2014/main" id="{FBB908CC-3739-48F3-BB9B-6FDAD3629F8D}"/>
               </a:ext>
             </a:extLst>
           </p:cNvPr>
@@ -9594,7 +9290,7 @@
           <p:cNvPr id="19" name="">
             <a:extLst xmlns:a="http://schemas.openxmlformats.org/drawingml/2006/main">
               <a:ext uri="{FF2B5EF4-FFF2-40B4-BE49-F238E27FC236}">
-                <a16:creationId xmlns:a16="http://schemas.microsoft.com/office/drawing/2014/main" id="{6C4EFE9E-DC94-409A-B99E-4561B20C9BD3}"/>
+                <a16:creationId xmlns:a16="http://schemas.microsoft.com/office/drawing/2014/main" id="{24C67066-3130-494F-827A-F42D0BEDF61A}"/>
               </a:ext>
             </a:extLst>
           </p:cNvPr>
@@ -9650,7 +9346,7 @@
           <p:cNvPr id="20" name="">
             <a:extLst xmlns:a="http://schemas.openxmlformats.org/drawingml/2006/main">
               <a:ext uri="{FF2B5EF4-FFF2-40B4-BE49-F238E27FC236}">
-                <a16:creationId xmlns:a16="http://schemas.microsoft.com/office/drawing/2014/main" id="{65C851FF-1175-457F-BC3F-A3461F3F6FC5}"/>
+                <a16:creationId xmlns:a16="http://schemas.microsoft.com/office/drawing/2014/main" id="{3B68DFFA-93B4-4ABA-9EDD-2BAC39A18595}"/>
               </a:ext>
             </a:extLst>
           </p:cNvPr>
@@ -9696,7 +9392,7 @@
                 <a:ea typeface="PingFang SC"/>
                 <a:cs typeface="PingFang SC"/>
               </a:rPr>
-              <a:t>质量过程可追踪</a:t>
+              <a:t>AI Review 能力建设</a:t>
             </a:r>
           </a:p>
         </p:txBody>
@@ -9706,7 +9402,7 @@
           <p:cNvPr id="21" name="">
             <a:extLst xmlns:a="http://schemas.openxmlformats.org/drawingml/2006/main">
               <a:ext uri="{FF2B5EF4-FFF2-40B4-BE49-F238E27FC236}">
-                <a16:creationId xmlns:a16="http://schemas.microsoft.com/office/drawing/2014/main" id="{00E284C9-3D69-4166-A7F5-E43114F51F33}"/>
+                <a16:creationId xmlns:a16="http://schemas.microsoft.com/office/drawing/2014/main" id="{2B54A63D-AF40-4678-9244-D59D807EE7BD}"/>
               </a:ext>
             </a:extLst>
           </p:cNvPr>
@@ -9752,7 +9448,7 @@
                 <a:ea typeface="PingFang SC"/>
                 <a:cs typeface="PingFang SC"/>
               </a:rPr>
-              <a:t>SMBIOS 自动验证和 AI Review 开始沉淀日志、报告和风险处置记录。</a:t>
+              <a:t>SMBIOS 自动验证和 AI Review 开始沉淀日志、报告、上下文材料和风险处置记录。</a:t>
             </a:r>
           </a:p>
         </p:txBody>
@@ -9762,7 +9458,7 @@
           <p:cNvPr id="22" name="">
             <a:extLst xmlns:a="http://schemas.openxmlformats.org/drawingml/2006/main">
               <a:ext uri="{FF2B5EF4-FFF2-40B4-BE49-F238E27FC236}">
-                <a16:creationId xmlns:a16="http://schemas.microsoft.com/office/drawing/2014/main" id="{A67FC8B9-B971-4373-9C48-9993BD44AC16}"/>
+                <a16:creationId xmlns:a16="http://schemas.microsoft.com/office/drawing/2014/main" id="{04D52B96-7D39-4D15-A22C-77E897FB8365}"/>
               </a:ext>
             </a:extLst>
           </p:cNvPr>
@@ -9792,7 +9488,7 @@
           <p:cNvPr id="23" name="">
             <a:extLst xmlns:a="http://schemas.openxmlformats.org/drawingml/2006/main">
               <a:ext uri="{FF2B5EF4-FFF2-40B4-BE49-F238E27FC236}">
-                <a16:creationId xmlns:a16="http://schemas.microsoft.com/office/drawing/2014/main" id="{2350DB37-EEC6-475B-B9CE-15657745B26F}"/>
+                <a16:creationId xmlns:a16="http://schemas.microsoft.com/office/drawing/2014/main" id="{AE8D5C9D-0032-4D87-A2E9-18FD52B5F0F0}"/>
               </a:ext>
             </a:extLst>
           </p:cNvPr>
@@ -9848,7 +9544,7 @@
           <p:cNvPr id="24" name="">
             <a:extLst xmlns:a="http://schemas.openxmlformats.org/drawingml/2006/main">
               <a:ext uri="{FF2B5EF4-FFF2-40B4-BE49-F238E27FC236}">
-                <a16:creationId xmlns:a16="http://schemas.microsoft.com/office/drawing/2014/main" id="{ABB5BF34-6837-407E-9EF1-93F91E5624F0}"/>
+                <a16:creationId xmlns:a16="http://schemas.microsoft.com/office/drawing/2014/main" id="{3A7D68EE-7275-412E-B005-D670B47D347C}"/>
               </a:ext>
             </a:extLst>
           </p:cNvPr>
@@ -9894,7 +9590,7 @@
                 <a:ea typeface="PingFang SC"/>
                 <a:cs typeface="PingFang SC"/>
               </a:rPr>
-              <a:t>当前 AI 提效聚焦 SMBIOS 规则清晰、结果可比对的场景，不扩展为所有 BIOS 问题自动修复。</a:t>
+              <a:t>当前 AI 提效聚焦 SMBIOS 场景，优先选择规则清晰、结果可比对、可复测的问题。</a:t>
             </a:r>
           </a:p>
         </p:txBody>
@@ -9902,7 +9598,7 @@
     </p:spTree>
     <p:extLst>
       <p:ext uri="{BB962C8B-B14F-4D97-AF65-F5344CB8AC3E}">
-        <p14:creationId xmlns:p14="http://schemas.microsoft.com/office/powerpoint/2010/main" val="1109093723"/>
+        <p14:creationId xmlns:p14="http://schemas.microsoft.com/office/powerpoint/2010/main" val="1907928427"/>
       </p:ext>
     </p:extLst>
   </p:cSld>
@@ -9933,7 +9629,7 @@
           <p:cNvPr id="1" name="">
             <a:extLst xmlns:a="http://schemas.openxmlformats.org/drawingml/2006/main">
               <a:ext uri="{FF2B5EF4-FFF2-40B4-BE49-F238E27FC236}">
-                <a16:creationId xmlns:a16="http://schemas.microsoft.com/office/drawing/2014/main" id="{B02977E5-C6D0-468E-AA91-7FF2EC48FB45}"/>
+                <a16:creationId xmlns:a16="http://schemas.microsoft.com/office/drawing/2014/main" id="{AE00BBEE-20E1-4919-992C-0B99B80B3508}"/>
               </a:ext>
             </a:extLst>
           </p:cNvPr>
@@ -9963,7 +9659,7 @@
           <p:cNvPr id="2" name="">
             <a:extLst xmlns:a="http://schemas.openxmlformats.org/drawingml/2006/main">
               <a:ext uri="{FF2B5EF4-FFF2-40B4-BE49-F238E27FC236}">
-                <a16:creationId xmlns:a16="http://schemas.microsoft.com/office/drawing/2014/main" id="{D9A63ABD-9865-4065-8D85-AB7FC15AD711}"/>
+                <a16:creationId xmlns:a16="http://schemas.microsoft.com/office/drawing/2014/main" id="{9E00E56E-7DC2-4136-8AF0-E1035CCD289F}"/>
               </a:ext>
             </a:extLst>
           </p:cNvPr>
@@ -9993,7 +9689,7 @@
           <p:cNvPr id="3" name="">
             <a:extLst xmlns:a="http://schemas.openxmlformats.org/drawingml/2006/main">
               <a:ext uri="{FF2B5EF4-FFF2-40B4-BE49-F238E27FC236}">
-                <a16:creationId xmlns:a16="http://schemas.microsoft.com/office/drawing/2014/main" id="{2262282C-5DD1-4BEE-91D0-F5A3E44F5367}"/>
+                <a16:creationId xmlns:a16="http://schemas.microsoft.com/office/drawing/2014/main" id="{83DE7711-2F44-4007-B60A-A4D50929CB11}"/>
               </a:ext>
             </a:extLst>
           </p:cNvPr>
@@ -10049,7 +9745,7 @@
           <p:cNvPr id="4" name="">
             <a:extLst xmlns:a="http://schemas.openxmlformats.org/drawingml/2006/main">
               <a:ext uri="{FF2B5EF4-FFF2-40B4-BE49-F238E27FC236}">
-                <a16:creationId xmlns:a16="http://schemas.microsoft.com/office/drawing/2014/main" id="{A46CC521-29C8-48EC-900D-8B8B320BDA92}"/>
+                <a16:creationId xmlns:a16="http://schemas.microsoft.com/office/drawing/2014/main" id="{9173D97B-FEA9-4DA2-B05E-0F5E551D3F5B}"/>
               </a:ext>
             </a:extLst>
           </p:cNvPr>
@@ -10105,7 +9801,7 @@
           <p:cNvPr id="5" name="">
             <a:extLst xmlns:a="http://schemas.openxmlformats.org/drawingml/2006/main">
               <a:ext uri="{FF2B5EF4-FFF2-40B4-BE49-F238E27FC236}">
-                <a16:creationId xmlns:a16="http://schemas.microsoft.com/office/drawing/2014/main" id="{2C3E7B4E-8BF7-4F08-A9B4-3249C7F09E4B}"/>
+                <a16:creationId xmlns:a16="http://schemas.microsoft.com/office/drawing/2014/main" id="{7C145FD4-8849-46DF-AED2-5849F64C9DAC}"/>
               </a:ext>
             </a:extLst>
           </p:cNvPr>
@@ -10135,7 +9831,7 @@
           <p:cNvPr id="6" name="">
             <a:extLst xmlns:a="http://schemas.openxmlformats.org/drawingml/2006/main">
               <a:ext uri="{FF2B5EF4-FFF2-40B4-BE49-F238E27FC236}">
-                <a16:creationId xmlns:a16="http://schemas.microsoft.com/office/drawing/2014/main" id="{AD13B421-FF77-4B38-A67A-390044C88716}"/>
+                <a16:creationId xmlns:a16="http://schemas.microsoft.com/office/drawing/2014/main" id="{4B2D4079-5B40-40E7-AA01-C61C79A99128}"/>
               </a:ext>
             </a:extLst>
           </p:cNvPr>
@@ -10191,7 +9887,7 @@
           <p:cNvPr id="7" name="">
             <a:extLst xmlns:a="http://schemas.openxmlformats.org/drawingml/2006/main">
               <a:ext uri="{FF2B5EF4-FFF2-40B4-BE49-F238E27FC236}">
-                <a16:creationId xmlns:a16="http://schemas.microsoft.com/office/drawing/2014/main" id="{BE85233C-98F9-4A05-B21E-988079F0DB53}"/>
+                <a16:creationId xmlns:a16="http://schemas.microsoft.com/office/drawing/2014/main" id="{D649E79D-E04B-4BDE-B1C3-5ADD3E800065}"/>
               </a:ext>
             </a:extLst>
           </p:cNvPr>
@@ -10221,7 +9917,7 @@
           <p:cNvPr id="8" name="">
             <a:extLst xmlns:a="http://schemas.openxmlformats.org/drawingml/2006/main">
               <a:ext uri="{FF2B5EF4-FFF2-40B4-BE49-F238E27FC236}">
-                <a16:creationId xmlns:a16="http://schemas.microsoft.com/office/drawing/2014/main" id="{B54CB9E5-E538-4E3E-B2FB-552D85C3C505}"/>
+                <a16:creationId xmlns:a16="http://schemas.microsoft.com/office/drawing/2014/main" id="{B52C9B4F-0D23-42B6-9099-30BDC24F6198}"/>
               </a:ext>
             </a:extLst>
           </p:cNvPr>
@@ -10277,7 +9973,7 @@
           <p:cNvPr id="9" name="">
             <a:extLst xmlns:a="http://schemas.openxmlformats.org/drawingml/2006/main">
               <a:ext uri="{FF2B5EF4-FFF2-40B4-BE49-F238E27FC236}">
-                <a16:creationId xmlns:a16="http://schemas.microsoft.com/office/drawing/2014/main" id="{1D312F97-E778-4006-B455-9030D918A76C}"/>
+                <a16:creationId xmlns:a16="http://schemas.microsoft.com/office/drawing/2014/main" id="{4671BC32-3716-425E-82C4-E8B220D52299}"/>
               </a:ext>
             </a:extLst>
           </p:cNvPr>
@@ -10333,7 +10029,7 @@
           <p:cNvPr id="10" name="">
             <a:extLst xmlns:a="http://schemas.openxmlformats.org/drawingml/2006/main">
               <a:ext uri="{FF2B5EF4-FFF2-40B4-BE49-F238E27FC236}">
-                <a16:creationId xmlns:a16="http://schemas.microsoft.com/office/drawing/2014/main" id="{FC8A7119-1D22-4478-B945-419D57EE526E}"/>
+                <a16:creationId xmlns:a16="http://schemas.microsoft.com/office/drawing/2014/main" id="{3D91EEAE-5F1E-4CCE-B0EA-17B353379DD9}"/>
               </a:ext>
             </a:extLst>
           </p:cNvPr>
@@ -10389,7 +10085,7 @@
           <p:cNvPr id="11" name="">
             <a:extLst xmlns:a="http://schemas.openxmlformats.org/drawingml/2006/main">
               <a:ext uri="{FF2B5EF4-FFF2-40B4-BE49-F238E27FC236}">
-                <a16:creationId xmlns:a16="http://schemas.microsoft.com/office/drawing/2014/main" id="{CFCA6704-619B-4FAF-B782-0FB9AFCBA354}"/>
+                <a16:creationId xmlns:a16="http://schemas.microsoft.com/office/drawing/2014/main" id="{5BDC1747-7038-4C5E-BBFE-A13A0C8342A4}"/>
               </a:ext>
             </a:extLst>
           </p:cNvPr>
@@ -10419,7 +10115,7 @@
           <p:cNvPr id="12" name="">
             <a:extLst xmlns:a="http://schemas.openxmlformats.org/drawingml/2006/main">
               <a:ext uri="{FF2B5EF4-FFF2-40B4-BE49-F238E27FC236}">
-                <a16:creationId xmlns:a16="http://schemas.microsoft.com/office/drawing/2014/main" id="{3F582207-D6B1-4BB2-A008-C0018FF47A94}"/>
+                <a16:creationId xmlns:a16="http://schemas.microsoft.com/office/drawing/2014/main" id="{C696D282-AB1A-4642-BD58-4DD8405F6EAF}"/>
               </a:ext>
             </a:extLst>
           </p:cNvPr>
@@ -10475,7 +10171,7 @@
           <p:cNvPr id="13" name="">
             <a:extLst xmlns:a="http://schemas.openxmlformats.org/drawingml/2006/main">
               <a:ext uri="{FF2B5EF4-FFF2-40B4-BE49-F238E27FC236}">
-                <a16:creationId xmlns:a16="http://schemas.microsoft.com/office/drawing/2014/main" id="{DD3CC685-2B8B-4335-A10C-25629A2D553C}"/>
+                <a16:creationId xmlns:a16="http://schemas.microsoft.com/office/drawing/2014/main" id="{9F1F8726-E732-4C7C-9357-BA25FEDB60D8}"/>
               </a:ext>
             </a:extLst>
           </p:cNvPr>
@@ -10531,7 +10227,7 @@
           <p:cNvPr id="14" name="">
             <a:extLst xmlns:a="http://schemas.openxmlformats.org/drawingml/2006/main">
               <a:ext uri="{FF2B5EF4-FFF2-40B4-BE49-F238E27FC236}">
-                <a16:creationId xmlns:a16="http://schemas.microsoft.com/office/drawing/2014/main" id="{1425BBF9-6B76-48EE-8C77-2B148D519B6C}"/>
+                <a16:creationId xmlns:a16="http://schemas.microsoft.com/office/drawing/2014/main" id="{85058CBC-0003-4143-9CC9-0989E2C78F0A}"/>
               </a:ext>
             </a:extLst>
           </p:cNvPr>
@@ -10587,7 +10283,7 @@
           <p:cNvPr id="15" name="">
             <a:extLst xmlns:a="http://schemas.openxmlformats.org/drawingml/2006/main">
               <a:ext uri="{FF2B5EF4-FFF2-40B4-BE49-F238E27FC236}">
-                <a16:creationId xmlns:a16="http://schemas.microsoft.com/office/drawing/2014/main" id="{9311B2CF-AFDE-4DE0-B1A8-989C3B3A7C4C}"/>
+                <a16:creationId xmlns:a16="http://schemas.microsoft.com/office/drawing/2014/main" id="{A121A4C1-5E4B-46BE-9CE5-460EE6635407}"/>
               </a:ext>
             </a:extLst>
           </p:cNvPr>
@@ -10617,7 +10313,7 @@
           <p:cNvPr id="16" name="">
             <a:extLst xmlns:a="http://schemas.openxmlformats.org/drawingml/2006/main">
               <a:ext uri="{FF2B5EF4-FFF2-40B4-BE49-F238E27FC236}">
-                <a16:creationId xmlns:a16="http://schemas.microsoft.com/office/drawing/2014/main" id="{8672752A-A12F-4D23-A87D-8764C22FEC60}"/>
+                <a16:creationId xmlns:a16="http://schemas.microsoft.com/office/drawing/2014/main" id="{BA605D80-79C4-44C7-9EAC-34959BFDD6E7}"/>
               </a:ext>
             </a:extLst>
           </p:cNvPr>
@@ -10673,7 +10369,7 @@
           <p:cNvPr id="17" name="">
             <a:extLst xmlns:a="http://schemas.openxmlformats.org/drawingml/2006/main">
               <a:ext uri="{FF2B5EF4-FFF2-40B4-BE49-F238E27FC236}">
-                <a16:creationId xmlns:a16="http://schemas.microsoft.com/office/drawing/2014/main" id="{D954D7FF-E94F-4116-9837-876A24D20087}"/>
+                <a16:creationId xmlns:a16="http://schemas.microsoft.com/office/drawing/2014/main" id="{BEADEAF3-4E84-4945-9388-B7C496548825}"/>
               </a:ext>
             </a:extLst>
           </p:cNvPr>
@@ -10729,7 +10425,7 @@
           <p:cNvPr id="18" name="">
             <a:extLst xmlns:a="http://schemas.openxmlformats.org/drawingml/2006/main">
               <a:ext uri="{FF2B5EF4-FFF2-40B4-BE49-F238E27FC236}">
-                <a16:creationId xmlns:a16="http://schemas.microsoft.com/office/drawing/2014/main" id="{390383A5-6424-487D-BB46-277B75840824}"/>
+                <a16:creationId xmlns:a16="http://schemas.microsoft.com/office/drawing/2014/main" id="{E26BA07C-8E09-4682-AD98-C14A053D7DB1}"/>
               </a:ext>
             </a:extLst>
           </p:cNvPr>
@@ -10785,7 +10481,7 @@
           <p:cNvPr id="19" name="">
             <a:extLst xmlns:a="http://schemas.openxmlformats.org/drawingml/2006/main">
               <a:ext uri="{FF2B5EF4-FFF2-40B4-BE49-F238E27FC236}">
-                <a16:creationId xmlns:a16="http://schemas.microsoft.com/office/drawing/2014/main" id="{1605CAFE-250A-45D1-9163-0087991C439E}"/>
+                <a16:creationId xmlns:a16="http://schemas.microsoft.com/office/drawing/2014/main" id="{7C710C65-657D-452C-962F-A96D6708C81D}"/>
               </a:ext>
             </a:extLst>
           </p:cNvPr>
@@ -10813,7 +10509,7 @@
     </p:spTree>
     <p:extLst>
       <p:ext uri="{BB962C8B-B14F-4D97-AF65-F5344CB8AC3E}">
-        <p14:creationId xmlns:p14="http://schemas.microsoft.com/office/powerpoint/2010/main" val="818854248"/>
+        <p14:creationId xmlns:p14="http://schemas.microsoft.com/office/powerpoint/2010/main" val="1751113825"/>
       </p:ext>
     </p:extLst>
   </p:cSld>
@@ -10844,7 +10540,7 @@
           <p:cNvPr id="1" name="">
             <a:extLst xmlns:a="http://schemas.openxmlformats.org/drawingml/2006/main">
               <a:ext uri="{FF2B5EF4-FFF2-40B4-BE49-F238E27FC236}">
-                <a16:creationId xmlns:a16="http://schemas.microsoft.com/office/drawing/2014/main" id="{57A7826F-BB80-4663-8B9A-750CA26D9693}"/>
+                <a16:creationId xmlns:a16="http://schemas.microsoft.com/office/drawing/2014/main" id="{AC7E7AB9-532D-4A9D-8A96-4B9445DCC107}"/>
               </a:ext>
             </a:extLst>
           </p:cNvPr>
@@ -10874,7 +10570,7 @@
           <p:cNvPr id="2" name="">
             <a:extLst xmlns:a="http://schemas.openxmlformats.org/drawingml/2006/main">
               <a:ext uri="{FF2B5EF4-FFF2-40B4-BE49-F238E27FC236}">
-                <a16:creationId xmlns:a16="http://schemas.microsoft.com/office/drawing/2014/main" id="{45A8B5E1-8264-42B7-9162-6B06C2E26618}"/>
+                <a16:creationId xmlns:a16="http://schemas.microsoft.com/office/drawing/2014/main" id="{47090190-7063-417D-B83D-329EC9922AE2}"/>
               </a:ext>
             </a:extLst>
           </p:cNvPr>
@@ -10904,7 +10600,7 @@
           <p:cNvPr id="3" name="">
             <a:extLst xmlns:a="http://schemas.openxmlformats.org/drawingml/2006/main">
               <a:ext uri="{FF2B5EF4-FFF2-40B4-BE49-F238E27FC236}">
-                <a16:creationId xmlns:a16="http://schemas.microsoft.com/office/drawing/2014/main" id="{97060D25-6EE4-480B-83F0-867625E07AF4}"/>
+                <a16:creationId xmlns:a16="http://schemas.microsoft.com/office/drawing/2014/main" id="{64FA6EA4-4D19-46AE-94BF-51AB7DB7F941}"/>
               </a:ext>
             </a:extLst>
           </p:cNvPr>
@@ -10960,7 +10656,7 @@
           <p:cNvPr id="4" name="">
             <a:extLst xmlns:a="http://schemas.openxmlformats.org/drawingml/2006/main">
               <a:ext uri="{FF2B5EF4-FFF2-40B4-BE49-F238E27FC236}">
-                <a16:creationId xmlns:a16="http://schemas.microsoft.com/office/drawing/2014/main" id="{948748F3-A7A5-417F-9047-17E8858CDF42}"/>
+                <a16:creationId xmlns:a16="http://schemas.microsoft.com/office/drawing/2014/main" id="{A82EACE2-2AA5-44EA-A333-0DB10623E2AD}"/>
               </a:ext>
             </a:extLst>
           </p:cNvPr>
@@ -10983,7 +10679,7 @@
         </p:spPr>
         <p:txBody>
           <a:bodyPr xmlns:a="http://schemas.openxmlformats.org/drawingml/2006/main" lIns="0" tIns="0" rIns="0" bIns="0" anchor="t">
-            <a:normAutofit fontScale="100000"/>
+            <a:normAutofit fontScale="96354"/>
           </a:bodyPr>
           <a:lstStyle xmlns:a="http://schemas.openxmlformats.org/drawingml/2006/main"/>
           <a:p xmlns:a="http://schemas.openxmlformats.org/drawingml/2006/main">
@@ -11006,7 +10702,7 @@
                 <a:ea typeface="PingFang SC"/>
                 <a:cs typeface="PingFang SC"/>
               </a:rPr>
-              <a:t>V5 SMBIOS 客户可见字段适配和新增问题单完成阶段处理</a:t>
+              <a:t>V5 SMBIOS 客户可见字段适配和新增问题单完成阶段交付与持续推进</a:t>
             </a:r>
           </a:p>
         </p:txBody>
@@ -11016,7 +10712,7 @@
           <p:cNvPr id="5" name="">
             <a:extLst xmlns:a="http://schemas.openxmlformats.org/drawingml/2006/main">
               <a:ext uri="{FF2B5EF4-FFF2-40B4-BE49-F238E27FC236}">
-                <a16:creationId xmlns:a16="http://schemas.microsoft.com/office/drawing/2014/main" id="{6B367B25-5A00-4AF1-8837-1F8CC3476B45}"/>
+                <a16:creationId xmlns:a16="http://schemas.microsoft.com/office/drawing/2014/main" id="{E84D757D-C10E-45C1-856C-66B21BEC951B}"/>
               </a:ext>
             </a:extLst>
           </p:cNvPr>
@@ -11046,7 +10742,7 @@
           <p:cNvPr id="6" name="">
             <a:extLst xmlns:a="http://schemas.openxmlformats.org/drawingml/2006/main">
               <a:ext uri="{FF2B5EF4-FFF2-40B4-BE49-F238E27FC236}">
-                <a16:creationId xmlns:a16="http://schemas.microsoft.com/office/drawing/2014/main" id="{2842ADD0-4B00-4D83-90F5-884743CD54AE}"/>
+                <a16:creationId xmlns:a16="http://schemas.microsoft.com/office/drawing/2014/main" id="{26EBCEDD-8562-4061-8490-C32CD1E5D8C4}"/>
               </a:ext>
             </a:extLst>
           </p:cNvPr>
@@ -11102,7 +10798,7 @@
           <p:cNvPr id="7" name="">
             <a:extLst xmlns:a="http://schemas.openxmlformats.org/drawingml/2006/main">
               <a:ext uri="{FF2B5EF4-FFF2-40B4-BE49-F238E27FC236}">
-                <a16:creationId xmlns:a16="http://schemas.microsoft.com/office/drawing/2014/main" id="{4B72A310-5A05-4C60-ABFE-FA37AD476460}"/>
+                <a16:creationId xmlns:a16="http://schemas.microsoft.com/office/drawing/2014/main" id="{4FF5A5D5-2AC9-4951-BE00-ECCE05573DD1}"/>
               </a:ext>
             </a:extLst>
           </p:cNvPr>
@@ -11132,7 +10828,7 @@
           <p:cNvPr id="8" name="">
             <a:extLst xmlns:a="http://schemas.openxmlformats.org/drawingml/2006/main">
               <a:ext uri="{FF2B5EF4-FFF2-40B4-BE49-F238E27FC236}">
-                <a16:creationId xmlns:a16="http://schemas.microsoft.com/office/drawing/2014/main" id="{7E15D756-2EC4-4EF9-8DD8-8CACF62AA946}"/>
+                <a16:creationId xmlns:a16="http://schemas.microsoft.com/office/drawing/2014/main" id="{43B00DC1-04F9-4473-B6C5-598504D4A569}"/>
               </a:ext>
             </a:extLst>
           </p:cNvPr>
@@ -11188,7 +10884,7 @@
           <p:cNvPr id="9" name="">
             <a:extLst xmlns:a="http://schemas.openxmlformats.org/drawingml/2006/main">
               <a:ext uri="{FF2B5EF4-FFF2-40B4-BE49-F238E27FC236}">
-                <a16:creationId xmlns:a16="http://schemas.microsoft.com/office/drawing/2014/main" id="{EDA056D4-1C99-4971-BB14-A4AEC0657708}"/>
+                <a16:creationId xmlns:a16="http://schemas.microsoft.com/office/drawing/2014/main" id="{92E88B8F-E0FE-42BF-8477-8A66E5D0C78B}"/>
               </a:ext>
             </a:extLst>
           </p:cNvPr>
@@ -11244,7 +10940,7 @@
           <p:cNvPr id="10" name="">
             <a:extLst xmlns:a="http://schemas.openxmlformats.org/drawingml/2006/main">
               <a:ext uri="{FF2B5EF4-FFF2-40B4-BE49-F238E27FC236}">
-                <a16:creationId xmlns:a16="http://schemas.microsoft.com/office/drawing/2014/main" id="{FD80DDB2-54AC-4AB9-9781-74908B6939FF}"/>
+                <a16:creationId xmlns:a16="http://schemas.microsoft.com/office/drawing/2014/main" id="{81886763-5420-4F1A-9815-B707E6E0BA4A}"/>
               </a:ext>
             </a:extLst>
           </p:cNvPr>
@@ -11300,7 +10996,7 @@
           <p:cNvPr id="11" name="">
             <a:extLst xmlns:a="http://schemas.openxmlformats.org/drawingml/2006/main">
               <a:ext uri="{FF2B5EF4-FFF2-40B4-BE49-F238E27FC236}">
-                <a16:creationId xmlns:a16="http://schemas.microsoft.com/office/drawing/2014/main" id="{F54154C2-EDC8-4325-A25C-E24AA05C08FE}"/>
+                <a16:creationId xmlns:a16="http://schemas.microsoft.com/office/drawing/2014/main" id="{13E69E50-BAEE-4A34-8018-C6584C651E26}"/>
               </a:ext>
             </a:extLst>
           </p:cNvPr>
@@ -11332,7 +11028,7 @@
           <p:cNvPr id="12" name="">
             <a:extLst xmlns:a="http://schemas.openxmlformats.org/drawingml/2006/main">
               <a:ext uri="{FF2B5EF4-FFF2-40B4-BE49-F238E27FC236}">
-                <a16:creationId xmlns:a16="http://schemas.microsoft.com/office/drawing/2014/main" id="{F461D491-A392-4337-B61F-27102D2DCE7E}"/>
+                <a16:creationId xmlns:a16="http://schemas.microsoft.com/office/drawing/2014/main" id="{D873A797-FF49-4E75-B9FC-72FB2B605CD4}"/>
               </a:ext>
             </a:extLst>
           </p:cNvPr>
@@ -11388,7 +11084,7 @@
           <p:cNvPr id="13" name="">
             <a:extLst xmlns:a="http://schemas.openxmlformats.org/drawingml/2006/main">
               <a:ext uri="{FF2B5EF4-FFF2-40B4-BE49-F238E27FC236}">
-                <a16:creationId xmlns:a16="http://schemas.microsoft.com/office/drawing/2014/main" id="{5B8554A5-61D0-4DAA-AF1D-1851CE8421E1}"/>
+                <a16:creationId xmlns:a16="http://schemas.microsoft.com/office/drawing/2014/main" id="{DC3AB77A-27CE-460B-9040-CD40EA16D1DE}"/>
               </a:ext>
             </a:extLst>
           </p:cNvPr>
@@ -11444,7 +11140,7 @@
           <p:cNvPr id="14" name="">
             <a:extLst xmlns:a="http://schemas.openxmlformats.org/drawingml/2006/main">
               <a:ext uri="{FF2B5EF4-FFF2-40B4-BE49-F238E27FC236}">
-                <a16:creationId xmlns:a16="http://schemas.microsoft.com/office/drawing/2014/main" id="{D5CE1C89-9E08-4C8F-B61E-A34518CB4004}"/>
+                <a16:creationId xmlns:a16="http://schemas.microsoft.com/office/drawing/2014/main" id="{219C6116-0288-4F52-8EA4-07920328E380}"/>
               </a:ext>
             </a:extLst>
           </p:cNvPr>
@@ -11476,7 +11172,7 @@
           <p:cNvPr id="15" name="">
             <a:extLst xmlns:a="http://schemas.openxmlformats.org/drawingml/2006/main">
               <a:ext uri="{FF2B5EF4-FFF2-40B4-BE49-F238E27FC236}">
-                <a16:creationId xmlns:a16="http://schemas.microsoft.com/office/drawing/2014/main" id="{EF507C49-514A-49CE-82F6-64DC917420CC}"/>
+                <a16:creationId xmlns:a16="http://schemas.microsoft.com/office/drawing/2014/main" id="{A8707ECD-E916-40D8-AEA8-85F96B172C7A}"/>
               </a:ext>
             </a:extLst>
           </p:cNvPr>
@@ -11532,7 +11228,7 @@
           <p:cNvPr id="16" name="">
             <a:extLst xmlns:a="http://schemas.openxmlformats.org/drawingml/2006/main">
               <a:ext uri="{FF2B5EF4-FFF2-40B4-BE49-F238E27FC236}">
-                <a16:creationId xmlns:a16="http://schemas.microsoft.com/office/drawing/2014/main" id="{5B9F0364-6E32-4075-A604-245CF243FF70}"/>
+                <a16:creationId xmlns:a16="http://schemas.microsoft.com/office/drawing/2014/main" id="{82FBF336-81D1-4AEE-B0BB-991BEE223B3B}"/>
               </a:ext>
             </a:extLst>
           </p:cNvPr>
@@ -11564,7 +11260,7 @@
           <p:cNvPr id="17" name="">
             <a:extLst xmlns:a="http://schemas.openxmlformats.org/drawingml/2006/main">
               <a:ext uri="{FF2B5EF4-FFF2-40B4-BE49-F238E27FC236}">
-                <a16:creationId xmlns:a16="http://schemas.microsoft.com/office/drawing/2014/main" id="{2776F34F-7BD7-4741-B89C-F808B7E580D7}"/>
+                <a16:creationId xmlns:a16="http://schemas.microsoft.com/office/drawing/2014/main" id="{8B6D2AEF-2521-41EF-8006-786B8875DEF9}"/>
               </a:ext>
             </a:extLst>
           </p:cNvPr>
@@ -11620,7 +11316,7 @@
           <p:cNvPr id="18" name="">
             <a:extLst xmlns:a="http://schemas.openxmlformats.org/drawingml/2006/main">
               <a:ext uri="{FF2B5EF4-FFF2-40B4-BE49-F238E27FC236}">
-                <a16:creationId xmlns:a16="http://schemas.microsoft.com/office/drawing/2014/main" id="{C19937C4-3213-4594-82C8-84B889E384C7}"/>
+                <a16:creationId xmlns:a16="http://schemas.microsoft.com/office/drawing/2014/main" id="{AE3EF50A-1A02-413F-84E9-012BA4914050}"/>
               </a:ext>
             </a:extLst>
           </p:cNvPr>
@@ -11666,7 +11362,7 @@
                 <a:ea typeface="PingFang SC"/>
                 <a:cs typeface="PingFang SC"/>
               </a:rPr>
-              <a:t>按客户新增需求完成代码调整和目标环境验证。</a:t>
+              <a:t>覆盖 Type41 显示缺失、不插设备 boot 启动黑屏等问题。</a:t>
             </a:r>
           </a:p>
         </p:txBody>
@@ -11676,7 +11372,7 @@
           <p:cNvPr id="19" name="">
             <a:extLst xmlns:a="http://schemas.openxmlformats.org/drawingml/2006/main">
               <a:ext uri="{FF2B5EF4-FFF2-40B4-BE49-F238E27FC236}">
-                <a16:creationId xmlns:a16="http://schemas.microsoft.com/office/drawing/2014/main" id="{F0D46B5F-8BFF-4037-9C73-53E3026EA3EA}"/>
+                <a16:creationId xmlns:a16="http://schemas.microsoft.com/office/drawing/2014/main" id="{638DE4AD-6741-4DC1-AA6B-2D8C4C05DDCE}"/>
               </a:ext>
             </a:extLst>
           </p:cNvPr>
@@ -11696,7 +11392,7 @@
             </a:avLst>
           </a:prstGeom>
           <a:solidFill xmlns:a="http://schemas.openxmlformats.org/drawingml/2006/main">
-            <a:srgbClr val="EAF8F2"/>
+            <a:srgbClr val="FFF6DE"/>
           </a:solidFill>
           <a:ln xmlns:a="http://schemas.openxmlformats.org/drawingml/2006/main">
             <a:noFill/>
@@ -11708,7 +11404,7 @@
           <p:cNvPr id="20" name="">
             <a:extLst xmlns:a="http://schemas.openxmlformats.org/drawingml/2006/main">
               <a:ext uri="{FF2B5EF4-FFF2-40B4-BE49-F238E27FC236}">
-                <a16:creationId xmlns:a16="http://schemas.microsoft.com/office/drawing/2014/main" id="{7CA80212-EBAF-4268-A9E2-D7411C5F520A}"/>
+                <a16:creationId xmlns:a16="http://schemas.microsoft.com/office/drawing/2014/main" id="{7C97BC13-5B7A-451F-94EA-B28F00359C65}"/>
               </a:ext>
             </a:extLst>
           </p:cNvPr>
@@ -11738,7 +11434,7 @@
             <a:pPr algn="ctr">
               <a:defRPr sz="900" b="1">
                 <a:solidFill>
-                  <a:srgbClr val="12B886"/>
+                  <a:srgbClr val="F59F00"/>
                 </a:solidFill>
                 <a:latin typeface="PingFang SC"/>
                 <a:ea typeface="PingFang SC"/>
@@ -11748,13 +11444,13 @@
             <a:r>
               <a:rPr sz="900" b="1">
                 <a:solidFill>
-                  <a:srgbClr val="12B886"/>
-                </a:solidFill>
-                <a:latin typeface="PingFang SC"/>
-                <a:ea typeface="PingFang SC"/>
-                <a:cs typeface="PingFang SC"/>
-              </a:rPr>
-              <a:t>问题单已关闭</a:t>
+                  <a:srgbClr val="F59F00"/>
+                </a:solidFill>
+                <a:latin typeface="PingFang SC"/>
+                <a:ea typeface="PingFang SC"/>
+                <a:cs typeface="PingFang SC"/>
+              </a:rPr>
+              <a:t>进行中</a:t>
             </a:r>
           </a:p>
         </p:txBody>
@@ -11764,7 +11460,7 @@
           <p:cNvPr id="21" name="">
             <a:extLst xmlns:a="http://schemas.openxmlformats.org/drawingml/2006/main">
               <a:ext uri="{FF2B5EF4-FFF2-40B4-BE49-F238E27FC236}">
-                <a16:creationId xmlns:a16="http://schemas.microsoft.com/office/drawing/2014/main" id="{694CB477-FB64-40C2-94DF-BA4C9E78EF44}"/>
+                <a16:creationId xmlns:a16="http://schemas.microsoft.com/office/drawing/2014/main" id="{8CBABD9D-5A8D-4F17-9AC7-5701F8AC7390}"/>
               </a:ext>
             </a:extLst>
           </p:cNvPr>
@@ -11796,7 +11492,7 @@
           <p:cNvPr id="22" name="">
             <a:extLst xmlns:a="http://schemas.openxmlformats.org/drawingml/2006/main">
               <a:ext uri="{FF2B5EF4-FFF2-40B4-BE49-F238E27FC236}">
-                <a16:creationId xmlns:a16="http://schemas.microsoft.com/office/drawing/2014/main" id="{316893B5-10BB-4A7A-B90B-B70CAE7149D7}"/>
+                <a16:creationId xmlns:a16="http://schemas.microsoft.com/office/drawing/2014/main" id="{85E0A642-0242-4E20-BB50-67568FE8700F}"/>
               </a:ext>
             </a:extLst>
           </p:cNvPr>
@@ -11852,7 +11548,7 @@
           <p:cNvPr id="23" name="">
             <a:extLst xmlns:a="http://schemas.openxmlformats.org/drawingml/2006/main">
               <a:ext uri="{FF2B5EF4-FFF2-40B4-BE49-F238E27FC236}">
-                <a16:creationId xmlns:a16="http://schemas.microsoft.com/office/drawing/2014/main" id="{893F8D07-8DF2-402C-B2E2-A78CBCB325F8}"/>
+                <a16:creationId xmlns:a16="http://schemas.microsoft.com/office/drawing/2014/main" id="{49EE0EC8-E2ED-412E-A121-6380E15601A2}"/>
               </a:ext>
             </a:extLst>
           </p:cNvPr>
@@ -11908,7 +11604,7 @@
           <p:cNvPr id="24" name="">
             <a:extLst xmlns:a="http://schemas.openxmlformats.org/drawingml/2006/main">
               <a:ext uri="{FF2B5EF4-FFF2-40B4-BE49-F238E27FC236}">
-                <a16:creationId xmlns:a16="http://schemas.microsoft.com/office/drawing/2014/main" id="{EB441894-5F26-49E8-9493-85803666DE63}"/>
+                <a16:creationId xmlns:a16="http://schemas.microsoft.com/office/drawing/2014/main" id="{05EB9F4B-41AC-4B92-ACB2-4E370D04DA7B}"/>
               </a:ext>
             </a:extLst>
           </p:cNvPr>
@@ -11940,7 +11636,7 @@
           <p:cNvPr id="25" name="">
             <a:extLst xmlns:a="http://schemas.openxmlformats.org/drawingml/2006/main">
               <a:ext uri="{FF2B5EF4-FFF2-40B4-BE49-F238E27FC236}">
-                <a16:creationId xmlns:a16="http://schemas.microsoft.com/office/drawing/2014/main" id="{99154057-C448-4BD6-89DF-44BE191DA178}"/>
+                <a16:creationId xmlns:a16="http://schemas.microsoft.com/office/drawing/2014/main" id="{1E0B2110-BE64-4F00-9D24-EB37D3B76AE3}"/>
               </a:ext>
             </a:extLst>
           </p:cNvPr>
@@ -11996,7 +11692,7 @@
           <p:cNvPr id="26" name="">
             <a:extLst xmlns:a="http://schemas.openxmlformats.org/drawingml/2006/main">
               <a:ext uri="{FF2B5EF4-FFF2-40B4-BE49-F238E27FC236}">
-                <a16:creationId xmlns:a16="http://schemas.microsoft.com/office/drawing/2014/main" id="{61E82979-CC2C-4930-8566-508E2FE949CE}"/>
+                <a16:creationId xmlns:a16="http://schemas.microsoft.com/office/drawing/2014/main" id="{DDF2912C-72A6-488E-AD4B-1AF00E06A6F6}"/>
               </a:ext>
             </a:extLst>
           </p:cNvPr>
@@ -12028,7 +11724,7 @@
           <p:cNvPr id="27" name="">
             <a:extLst xmlns:a="http://schemas.openxmlformats.org/drawingml/2006/main">
               <a:ext uri="{FF2B5EF4-FFF2-40B4-BE49-F238E27FC236}">
-                <a16:creationId xmlns:a16="http://schemas.microsoft.com/office/drawing/2014/main" id="{BEAB3CCB-4B24-4DC8-AB25-8F1BAC8EC316}"/>
+                <a16:creationId xmlns:a16="http://schemas.microsoft.com/office/drawing/2014/main" id="{301C8744-BA28-4803-9163-05E6A9A1E11F}"/>
               </a:ext>
             </a:extLst>
           </p:cNvPr>
@@ -12084,7 +11780,7 @@
           <p:cNvPr id="28" name="">
             <a:extLst xmlns:a="http://schemas.openxmlformats.org/drawingml/2006/main">
               <a:ext uri="{FF2B5EF4-FFF2-40B4-BE49-F238E27FC236}">
-                <a16:creationId xmlns:a16="http://schemas.microsoft.com/office/drawing/2014/main" id="{42BAC495-772D-4743-B382-B81E3E5D850F}"/>
+                <a16:creationId xmlns:a16="http://schemas.microsoft.com/office/drawing/2014/main" id="{FADC2D88-E6B1-40A9-A44E-296AB5CE2DF1}"/>
               </a:ext>
             </a:extLst>
           </p:cNvPr>
@@ -12140,7 +11836,7 @@
           <p:cNvPr id="29" name="">
             <a:extLst xmlns:a="http://schemas.openxmlformats.org/drawingml/2006/main">
               <a:ext uri="{FF2B5EF4-FFF2-40B4-BE49-F238E27FC236}">
-                <a16:creationId xmlns:a16="http://schemas.microsoft.com/office/drawing/2014/main" id="{486E281E-B2A3-449C-BF68-AF4D5680478A}"/>
+                <a16:creationId xmlns:a16="http://schemas.microsoft.com/office/drawing/2014/main" id="{A621520C-0311-4D5A-BD04-A83D84F78E4C}"/>
               </a:ext>
             </a:extLst>
           </p:cNvPr>
@@ -12172,7 +11868,7 @@
           <p:cNvPr id="30" name="">
             <a:extLst xmlns:a="http://schemas.openxmlformats.org/drawingml/2006/main">
               <a:ext uri="{FF2B5EF4-FFF2-40B4-BE49-F238E27FC236}">
-                <a16:creationId xmlns:a16="http://schemas.microsoft.com/office/drawing/2014/main" id="{D33B963D-E381-46D1-B799-3147A1BAB24E}"/>
+                <a16:creationId xmlns:a16="http://schemas.microsoft.com/office/drawing/2014/main" id="{CFAC9BD3-BF90-4CAC-9763-0408CE0AA3B8}"/>
               </a:ext>
             </a:extLst>
           </p:cNvPr>
@@ -12226,7 +11922,7 @@
     </p:spTree>
     <p:extLst>
       <p:ext uri="{BB962C8B-B14F-4D97-AF65-F5344CB8AC3E}">
-        <p14:creationId xmlns:p14="http://schemas.microsoft.com/office/powerpoint/2010/main" val="1700053294"/>
+        <p14:creationId xmlns:p14="http://schemas.microsoft.com/office/powerpoint/2010/main" val="2122134734"/>
       </p:ext>
     </p:extLst>
   </p:cSld>
@@ -12257,7 +11953,7 @@
           <p:cNvPr id="1" name="">
             <a:extLst xmlns:a="http://schemas.openxmlformats.org/drawingml/2006/main">
               <a:ext uri="{FF2B5EF4-FFF2-40B4-BE49-F238E27FC236}">
-                <a16:creationId xmlns:a16="http://schemas.microsoft.com/office/drawing/2014/main" id="{378BD00D-D6C1-4003-B094-C0948F93E6D4}"/>
+                <a16:creationId xmlns:a16="http://schemas.microsoft.com/office/drawing/2014/main" id="{91424CFF-2E95-41E0-BD3D-D118C549F9F8}"/>
               </a:ext>
             </a:extLst>
           </p:cNvPr>
@@ -12287,7 +11983,7 @@
           <p:cNvPr id="2" name="">
             <a:extLst xmlns:a="http://schemas.openxmlformats.org/drawingml/2006/main">
               <a:ext uri="{FF2B5EF4-FFF2-40B4-BE49-F238E27FC236}">
-                <a16:creationId xmlns:a16="http://schemas.microsoft.com/office/drawing/2014/main" id="{57E0DE7C-8596-4F30-9232-8E96F191A84C}"/>
+                <a16:creationId xmlns:a16="http://schemas.microsoft.com/office/drawing/2014/main" id="{5BE09369-5283-4222-AD97-E05960E46389}"/>
               </a:ext>
             </a:extLst>
           </p:cNvPr>
@@ -12317,7 +12013,7 @@
           <p:cNvPr id="3" name="">
             <a:extLst xmlns:a="http://schemas.openxmlformats.org/drawingml/2006/main">
               <a:ext uri="{FF2B5EF4-FFF2-40B4-BE49-F238E27FC236}">
-                <a16:creationId xmlns:a16="http://schemas.microsoft.com/office/drawing/2014/main" id="{900A3555-282C-49F3-BC8D-816BD588DFD6}"/>
+                <a16:creationId xmlns:a16="http://schemas.microsoft.com/office/drawing/2014/main" id="{4ABCA70E-7DF9-4026-9B60-55C696EDDD16}"/>
               </a:ext>
             </a:extLst>
           </p:cNvPr>
@@ -12373,7 +12069,7 @@
           <p:cNvPr id="4" name="">
             <a:extLst xmlns:a="http://schemas.openxmlformats.org/drawingml/2006/main">
               <a:ext uri="{FF2B5EF4-FFF2-40B4-BE49-F238E27FC236}">
-                <a16:creationId xmlns:a16="http://schemas.microsoft.com/office/drawing/2014/main" id="{E1B7C525-70F6-4A65-A2F6-77D99A7294C5}"/>
+                <a16:creationId xmlns:a16="http://schemas.microsoft.com/office/drawing/2014/main" id="{BC3BAFA9-5012-4E26-ABC5-B078CFB101BF}"/>
               </a:ext>
             </a:extLst>
           </p:cNvPr>
@@ -12429,7 +12125,7 @@
           <p:cNvPr id="5" name="">
             <a:extLst xmlns:a="http://schemas.openxmlformats.org/drawingml/2006/main">
               <a:ext uri="{FF2B5EF4-FFF2-40B4-BE49-F238E27FC236}">
-                <a16:creationId xmlns:a16="http://schemas.microsoft.com/office/drawing/2014/main" id="{83541BEB-C13A-45EC-9B79-F0BCC9DA8E5E}"/>
+                <a16:creationId xmlns:a16="http://schemas.microsoft.com/office/drawing/2014/main" id="{9A316100-14B5-48EB-9A75-E95D7FD0046B}"/>
               </a:ext>
             </a:extLst>
           </p:cNvPr>
@@ -12459,7 +12155,7 @@
           <p:cNvPr id="6" name="">
             <a:extLst xmlns:a="http://schemas.openxmlformats.org/drawingml/2006/main">
               <a:ext uri="{FF2B5EF4-FFF2-40B4-BE49-F238E27FC236}">
-                <a16:creationId xmlns:a16="http://schemas.microsoft.com/office/drawing/2014/main" id="{5FAB45B4-EFBC-4B42-8E95-33E869D92653}"/>
+                <a16:creationId xmlns:a16="http://schemas.microsoft.com/office/drawing/2014/main" id="{AE31BF68-4B50-4DB3-80BC-0D363DCE686B}"/>
               </a:ext>
             </a:extLst>
           </p:cNvPr>
@@ -12515,7 +12211,7 @@
           <p:cNvPr id="7" name="">
             <a:extLst xmlns:a="http://schemas.openxmlformats.org/drawingml/2006/main">
               <a:ext uri="{FF2B5EF4-FFF2-40B4-BE49-F238E27FC236}">
-                <a16:creationId xmlns:a16="http://schemas.microsoft.com/office/drawing/2014/main" id="{A66000B2-3E16-4F1D-8A43-66E40A4F9C56}"/>
+                <a16:creationId xmlns:a16="http://schemas.microsoft.com/office/drawing/2014/main" id="{5AB1C158-0A3E-4BA9-9824-3AFA6A0762E5}"/>
               </a:ext>
             </a:extLst>
           </p:cNvPr>
@@ -12549,7 +12245,7 @@
           <p:cNvPr id="8" name="">
             <a:extLst xmlns:a="http://schemas.openxmlformats.org/drawingml/2006/main">
               <a:ext uri="{FF2B5EF4-FFF2-40B4-BE49-F238E27FC236}">
-                <a16:creationId xmlns:a16="http://schemas.microsoft.com/office/drawing/2014/main" id="{EBBAD4E2-571B-48C7-8C60-057F016CB8EA}"/>
+                <a16:creationId xmlns:a16="http://schemas.microsoft.com/office/drawing/2014/main" id="{E5CC03CD-CEC3-4E1A-88E6-07EF8DA513EE}"/>
               </a:ext>
             </a:extLst>
           </p:cNvPr>
@@ -12628,7 +12324,7 @@
           <p:cNvPr id="9" name="">
             <a:extLst xmlns:a="http://schemas.openxmlformats.org/drawingml/2006/main">
               <a:ext uri="{FF2B5EF4-FFF2-40B4-BE49-F238E27FC236}">
-                <a16:creationId xmlns:a16="http://schemas.microsoft.com/office/drawing/2014/main" id="{A9B1B566-29FA-492B-BAB9-8B412AA65890}"/>
+                <a16:creationId xmlns:a16="http://schemas.microsoft.com/office/drawing/2014/main" id="{13970EE5-A4F6-4600-8322-ABA0FA08EB44}"/>
               </a:ext>
             </a:extLst>
           </p:cNvPr>
@@ -12684,7 +12380,7 @@
           <p:cNvPr id="10" name="">
             <a:extLst xmlns:a="http://schemas.openxmlformats.org/drawingml/2006/main">
               <a:ext uri="{FF2B5EF4-FFF2-40B4-BE49-F238E27FC236}">
-                <a16:creationId xmlns:a16="http://schemas.microsoft.com/office/drawing/2014/main" id="{FC9397B4-FDF0-4256-9F7B-FCA2B4DC566B}"/>
+                <a16:creationId xmlns:a16="http://schemas.microsoft.com/office/drawing/2014/main" id="{16D3E0B5-0ABE-482A-89FC-92328D938754}"/>
               </a:ext>
             </a:extLst>
           </p:cNvPr>
@@ -12718,7 +12414,7 @@
           <p:cNvPr id="11" name="">
             <a:extLst xmlns:a="http://schemas.openxmlformats.org/drawingml/2006/main">
               <a:ext uri="{FF2B5EF4-FFF2-40B4-BE49-F238E27FC236}">
-                <a16:creationId xmlns:a16="http://schemas.microsoft.com/office/drawing/2014/main" id="{AC374438-C86B-4EFC-BC48-43B76EA085A7}"/>
+                <a16:creationId xmlns:a16="http://schemas.microsoft.com/office/drawing/2014/main" id="{03BBB397-02BC-4561-AF04-4C0AEE6A371D}"/>
               </a:ext>
             </a:extLst>
           </p:cNvPr>
@@ -12797,7 +12493,7 @@
           <p:cNvPr id="12" name="">
             <a:extLst xmlns:a="http://schemas.openxmlformats.org/drawingml/2006/main">
               <a:ext uri="{FF2B5EF4-FFF2-40B4-BE49-F238E27FC236}">
-                <a16:creationId xmlns:a16="http://schemas.microsoft.com/office/drawing/2014/main" id="{6F612B25-8639-4F2F-BB40-47CD5D5BE04D}"/>
+                <a16:creationId xmlns:a16="http://schemas.microsoft.com/office/drawing/2014/main" id="{AFA1B09C-44F5-4963-B505-624C1B00E5D7}"/>
               </a:ext>
             </a:extLst>
           </p:cNvPr>
@@ -12853,7 +12549,7 @@
           <p:cNvPr id="13" name="">
             <a:extLst xmlns:a="http://schemas.openxmlformats.org/drawingml/2006/main">
               <a:ext uri="{FF2B5EF4-FFF2-40B4-BE49-F238E27FC236}">
-                <a16:creationId xmlns:a16="http://schemas.microsoft.com/office/drawing/2014/main" id="{7AF4D43E-C9DE-42C2-BDFB-799E0D821632}"/>
+                <a16:creationId xmlns:a16="http://schemas.microsoft.com/office/drawing/2014/main" id="{8E7AAE5C-C86D-409F-A11C-6BF5032B444F}"/>
               </a:ext>
             </a:extLst>
           </p:cNvPr>
@@ -12887,7 +12583,7 @@
           <p:cNvPr id="14" name="">
             <a:extLst xmlns:a="http://schemas.openxmlformats.org/drawingml/2006/main">
               <a:ext uri="{FF2B5EF4-FFF2-40B4-BE49-F238E27FC236}">
-                <a16:creationId xmlns:a16="http://schemas.microsoft.com/office/drawing/2014/main" id="{8527AD36-395F-41C8-B61B-C172739DA4EE}"/>
+                <a16:creationId xmlns:a16="http://schemas.microsoft.com/office/drawing/2014/main" id="{2C6C0D3E-13F7-4798-9740-923C2D3F5353}"/>
               </a:ext>
             </a:extLst>
           </p:cNvPr>
@@ -12966,7 +12662,7 @@
           <p:cNvPr id="15" name="">
             <a:extLst xmlns:a="http://schemas.openxmlformats.org/drawingml/2006/main">
               <a:ext uri="{FF2B5EF4-FFF2-40B4-BE49-F238E27FC236}">
-                <a16:creationId xmlns:a16="http://schemas.microsoft.com/office/drawing/2014/main" id="{76BF9F91-79BC-466C-BC1C-810463BBADA0}"/>
+                <a16:creationId xmlns:a16="http://schemas.microsoft.com/office/drawing/2014/main" id="{4DA70ABA-1C67-40A9-8987-D994AC2F2262}"/>
               </a:ext>
             </a:extLst>
           </p:cNvPr>
@@ -13022,7 +12718,7 @@
           <p:cNvPr id="16" name="">
             <a:extLst xmlns:a="http://schemas.openxmlformats.org/drawingml/2006/main">
               <a:ext uri="{FF2B5EF4-FFF2-40B4-BE49-F238E27FC236}">
-                <a16:creationId xmlns:a16="http://schemas.microsoft.com/office/drawing/2014/main" id="{5524837E-CC77-47D9-8038-461A0D8A96B5}"/>
+                <a16:creationId xmlns:a16="http://schemas.microsoft.com/office/drawing/2014/main" id="{FA8BBDBA-CF12-4534-B977-F6516CC7F591}"/>
               </a:ext>
             </a:extLst>
           </p:cNvPr>
@@ -13056,7 +12752,7 @@
           <p:cNvPr id="17" name="">
             <a:extLst xmlns:a="http://schemas.openxmlformats.org/drawingml/2006/main">
               <a:ext uri="{FF2B5EF4-FFF2-40B4-BE49-F238E27FC236}">
-                <a16:creationId xmlns:a16="http://schemas.microsoft.com/office/drawing/2014/main" id="{28F296C8-02F8-4FF7-BFCA-6B5FF0236C57}"/>
+                <a16:creationId xmlns:a16="http://schemas.microsoft.com/office/drawing/2014/main" id="{7C34503B-26EB-429A-8C57-F19E3CF3E4B3}"/>
               </a:ext>
             </a:extLst>
           </p:cNvPr>
@@ -13112,7 +12808,7 @@
           <p:cNvPr id="18" name="">
             <a:extLst xmlns:a="http://schemas.openxmlformats.org/drawingml/2006/main">
               <a:ext uri="{FF2B5EF4-FFF2-40B4-BE49-F238E27FC236}">
-                <a16:creationId xmlns:a16="http://schemas.microsoft.com/office/drawing/2014/main" id="{A3D3C6D8-72FC-4C8D-8E39-33E125AECFEF}"/>
+                <a16:creationId xmlns:a16="http://schemas.microsoft.com/office/drawing/2014/main" id="{0BFCC27D-E41E-43AC-B9ED-A083F81A5559}"/>
               </a:ext>
             </a:extLst>
           </p:cNvPr>
@@ -13168,7 +12864,7 @@
           <p:cNvPr id="19" name="">
             <a:extLst xmlns:a="http://schemas.openxmlformats.org/drawingml/2006/main">
               <a:ext uri="{FF2B5EF4-FFF2-40B4-BE49-F238E27FC236}">
-                <a16:creationId xmlns:a16="http://schemas.microsoft.com/office/drawing/2014/main" id="{ED724323-51C6-4DD3-ADB8-F89B2B6F01BC}"/>
+                <a16:creationId xmlns:a16="http://schemas.microsoft.com/office/drawing/2014/main" id="{A4598C6C-3594-47EC-9DC5-628D0AD8B2F6}"/>
               </a:ext>
             </a:extLst>
           </p:cNvPr>
@@ -13202,7 +12898,7 @@
           <p:cNvPr id="20" name="">
             <a:extLst xmlns:a="http://schemas.openxmlformats.org/drawingml/2006/main">
               <a:ext uri="{FF2B5EF4-FFF2-40B4-BE49-F238E27FC236}">
-                <a16:creationId xmlns:a16="http://schemas.microsoft.com/office/drawing/2014/main" id="{283234CA-8B5F-4BA5-B2A9-E0917E4D24E5}"/>
+                <a16:creationId xmlns:a16="http://schemas.microsoft.com/office/drawing/2014/main" id="{4C68823F-D87F-4D15-812D-915979C2D0E6}"/>
               </a:ext>
             </a:extLst>
           </p:cNvPr>
@@ -13281,7 +12977,7 @@
           <p:cNvPr id="21" name="">
             <a:extLst xmlns:a="http://schemas.openxmlformats.org/drawingml/2006/main">
               <a:ext uri="{FF2B5EF4-FFF2-40B4-BE49-F238E27FC236}">
-                <a16:creationId xmlns:a16="http://schemas.microsoft.com/office/drawing/2014/main" id="{DC69BE23-937D-426D-BE84-BB98D354E12D}"/>
+                <a16:creationId xmlns:a16="http://schemas.microsoft.com/office/drawing/2014/main" id="{74F4F492-B64B-488D-B9F1-56C04F0BA2C3}"/>
               </a:ext>
             </a:extLst>
           </p:cNvPr>
@@ -13315,7 +13011,7 @@
           <p:cNvPr id="22" name="">
             <a:extLst xmlns:a="http://schemas.openxmlformats.org/drawingml/2006/main">
               <a:ext uri="{FF2B5EF4-FFF2-40B4-BE49-F238E27FC236}">
-                <a16:creationId xmlns:a16="http://schemas.microsoft.com/office/drawing/2014/main" id="{09A3A27E-BD5A-4C37-BCCD-FA03B42E8BF3}"/>
+                <a16:creationId xmlns:a16="http://schemas.microsoft.com/office/drawing/2014/main" id="{D6C21DDE-F487-4F64-BF69-783EB362B792}"/>
               </a:ext>
             </a:extLst>
           </p:cNvPr>
@@ -13345,7 +13041,7 @@
           <p:cNvPr id="23" name="">
             <a:extLst xmlns:a="http://schemas.openxmlformats.org/drawingml/2006/main">
               <a:ext uri="{FF2B5EF4-FFF2-40B4-BE49-F238E27FC236}">
-                <a16:creationId xmlns:a16="http://schemas.microsoft.com/office/drawing/2014/main" id="{EAF6B490-3729-4A7C-84B2-5A1208A02345}"/>
+                <a16:creationId xmlns:a16="http://schemas.microsoft.com/office/drawing/2014/main" id="{6834F764-C498-4F06-B564-584FEF201EAF}"/>
               </a:ext>
             </a:extLst>
           </p:cNvPr>
@@ -13391,7 +13087,7 @@
                 <a:ea typeface="Menlo"/>
                 <a:cs typeface="Menlo"/>
               </a:rPr>
-              <a:t>1,504</a:t>
+              <a:t>2700+</a:t>
             </a:r>
           </a:p>
         </p:txBody>
@@ -13401,7 +13097,7 @@
           <p:cNvPr id="24" name="">
             <a:extLst xmlns:a="http://schemas.openxmlformats.org/drawingml/2006/main">
               <a:ext uri="{FF2B5EF4-FFF2-40B4-BE49-F238E27FC236}">
-                <a16:creationId xmlns:a16="http://schemas.microsoft.com/office/drawing/2014/main" id="{09EF20A3-6A1A-4A05-9575-A32850B3D1AB}"/>
+                <a16:creationId xmlns:a16="http://schemas.microsoft.com/office/drawing/2014/main" id="{078A1674-A9FB-4E92-B304-6B8814523CCA}"/>
               </a:ext>
             </a:extLst>
           </p:cNvPr>
@@ -13447,7 +13143,7 @@
                 <a:ea typeface="PingFang SC"/>
                 <a:cs typeface="PingFang SC"/>
               </a:rPr>
-              <a:t>行实现代码量</a:t>
+              <a:t>行实现 / 重构代码量</a:t>
             </a:r>
           </a:p>
         </p:txBody>
@@ -13457,7 +13153,7 @@
           <p:cNvPr id="25" name="">
             <a:extLst xmlns:a="http://schemas.openxmlformats.org/drawingml/2006/main">
               <a:ext uri="{FF2B5EF4-FFF2-40B4-BE49-F238E27FC236}">
-                <a16:creationId xmlns:a16="http://schemas.microsoft.com/office/drawing/2014/main" id="{90E34765-FFEF-4B10-8352-66F4D8A04100}"/>
+                <a16:creationId xmlns:a16="http://schemas.microsoft.com/office/drawing/2014/main" id="{1A68C20C-0CD4-474E-9C31-DAA78879AB29}"/>
               </a:ext>
             </a:extLst>
           </p:cNvPr>
@@ -13503,7 +13199,7 @@
                 <a:ea typeface="PingFang SC"/>
                 <a:cs typeface="PingFang SC"/>
               </a:rPr>
-              <a:t>Type9 相关规模参考</a:t>
+              <a:t>SMBIOS 相关规模参考</a:t>
             </a:r>
           </a:p>
         </p:txBody>
@@ -13513,7 +13209,7 @@
           <p:cNvPr id="26" name="">
             <a:extLst xmlns:a="http://schemas.openxmlformats.org/drawingml/2006/main">
               <a:ext uri="{FF2B5EF4-FFF2-40B4-BE49-F238E27FC236}">
-                <a16:creationId xmlns:a16="http://schemas.microsoft.com/office/drawing/2014/main" id="{D103202A-6247-4DA5-8868-B495A3EA7E3C}"/>
+                <a16:creationId xmlns:a16="http://schemas.microsoft.com/office/drawing/2014/main" id="{9243EE66-B972-46B0-8625-A5A7F0E615BE}"/>
               </a:ext>
             </a:extLst>
           </p:cNvPr>
@@ -13547,7 +13243,7 @@
           <p:cNvPr id="27" name="">
             <a:extLst xmlns:a="http://schemas.openxmlformats.org/drawingml/2006/main">
               <a:ext uri="{FF2B5EF4-FFF2-40B4-BE49-F238E27FC236}">
-                <a16:creationId xmlns:a16="http://schemas.microsoft.com/office/drawing/2014/main" id="{ABA7F6DD-21E1-41E5-A8C1-D5FDC9F0EA01}"/>
+                <a16:creationId xmlns:a16="http://schemas.microsoft.com/office/drawing/2014/main" id="{CD4FD711-1E39-490C-892A-EEDCCED763F1}"/>
               </a:ext>
             </a:extLst>
           </p:cNvPr>
@@ -13577,7 +13273,7 @@
           <p:cNvPr id="28" name="">
             <a:extLst xmlns:a="http://schemas.openxmlformats.org/drawingml/2006/main">
               <a:ext uri="{FF2B5EF4-FFF2-40B4-BE49-F238E27FC236}">
-                <a16:creationId xmlns:a16="http://schemas.microsoft.com/office/drawing/2014/main" id="{A20930BA-4508-452C-B43A-1DDB5F4E424D}"/>
+                <a16:creationId xmlns:a16="http://schemas.microsoft.com/office/drawing/2014/main" id="{94375030-750B-489A-B936-928933CD9A46}"/>
               </a:ext>
             </a:extLst>
           </p:cNvPr>
@@ -13633,7 +13329,7 @@
           <p:cNvPr id="29" name="">
             <a:extLst xmlns:a="http://schemas.openxmlformats.org/drawingml/2006/main">
               <a:ext uri="{FF2B5EF4-FFF2-40B4-BE49-F238E27FC236}">
-                <a16:creationId xmlns:a16="http://schemas.microsoft.com/office/drawing/2014/main" id="{8C2D032C-F98B-411F-9C58-1BBD71A45D27}"/>
+                <a16:creationId xmlns:a16="http://schemas.microsoft.com/office/drawing/2014/main" id="{E1099E4A-5B06-4A9A-BC49-BC42E5D368CE}"/>
               </a:ext>
             </a:extLst>
           </p:cNvPr>
@@ -13689,7 +13385,7 @@
           <p:cNvPr id="30" name="">
             <a:extLst xmlns:a="http://schemas.openxmlformats.org/drawingml/2006/main">
               <a:ext uri="{FF2B5EF4-FFF2-40B4-BE49-F238E27FC236}">
-                <a16:creationId xmlns:a16="http://schemas.microsoft.com/office/drawing/2014/main" id="{3CECFCED-6F43-424C-A742-5EFB99B2A7E8}"/>
+                <a16:creationId xmlns:a16="http://schemas.microsoft.com/office/drawing/2014/main" id="{6F798D99-A329-4D20-A39F-122B88029A4E}"/>
               </a:ext>
             </a:extLst>
           </p:cNvPr>
@@ -13745,7 +13441,7 @@
           <p:cNvPr id="31" name="">
             <a:extLst xmlns:a="http://schemas.openxmlformats.org/drawingml/2006/main">
               <a:ext uri="{FF2B5EF4-FFF2-40B4-BE49-F238E27FC236}">
-                <a16:creationId xmlns:a16="http://schemas.microsoft.com/office/drawing/2014/main" id="{3B73EA0C-4FDE-4B81-BFD8-D37C09709611}"/>
+                <a16:creationId xmlns:a16="http://schemas.microsoft.com/office/drawing/2014/main" id="{3BED8792-C869-41F5-9664-B332D5490ADA}"/>
               </a:ext>
             </a:extLst>
           </p:cNvPr>
@@ -13779,7 +13475,7 @@
           <p:cNvPr id="32" name="">
             <a:extLst xmlns:a="http://schemas.openxmlformats.org/drawingml/2006/main">
               <a:ext uri="{FF2B5EF4-FFF2-40B4-BE49-F238E27FC236}">
-                <a16:creationId xmlns:a16="http://schemas.microsoft.com/office/drawing/2014/main" id="{AA598353-30A5-4B4B-954C-5B648340E596}"/>
+                <a16:creationId xmlns:a16="http://schemas.microsoft.com/office/drawing/2014/main" id="{0A367AF8-BCBF-4273-A694-C148F653ACDD}"/>
               </a:ext>
             </a:extLst>
           </p:cNvPr>
@@ -13809,7 +13505,7 @@
           <p:cNvPr id="33" name="">
             <a:extLst xmlns:a="http://schemas.openxmlformats.org/drawingml/2006/main">
               <a:ext uri="{FF2B5EF4-FFF2-40B4-BE49-F238E27FC236}">
-                <a16:creationId xmlns:a16="http://schemas.microsoft.com/office/drawing/2014/main" id="{603A39F9-720C-468B-93AF-B748635E9F7F}"/>
+                <a16:creationId xmlns:a16="http://schemas.microsoft.com/office/drawing/2014/main" id="{96E61D70-152B-490C-93E2-C0BDC1317DA1}"/>
               </a:ext>
             </a:extLst>
           </p:cNvPr>
@@ -13855,7 +13551,7 @@
                 <a:ea typeface="Menlo"/>
                 <a:cs typeface="Menlo"/>
               </a:rPr>
-              <a:t>0</a:t>
+              <a:t>降低</a:t>
             </a:r>
           </a:p>
         </p:txBody>
@@ -13865,7 +13561,7 @@
           <p:cNvPr id="34" name="">
             <a:extLst xmlns:a="http://schemas.openxmlformats.org/drawingml/2006/main">
               <a:ext uri="{FF2B5EF4-FFF2-40B4-BE49-F238E27FC236}">
-                <a16:creationId xmlns:a16="http://schemas.microsoft.com/office/drawing/2014/main" id="{6F754995-112A-48FE-AB50-FD9A06032983}"/>
+                <a16:creationId xmlns:a16="http://schemas.microsoft.com/office/drawing/2014/main" id="{61A7EC3A-0EA4-4254-91C0-EA1A551B8DB7}"/>
               </a:ext>
             </a:extLst>
           </p:cNvPr>
@@ -13911,7 +13607,7 @@
                 <a:ea typeface="PingFang SC"/>
                 <a:cs typeface="PingFang SC"/>
               </a:rPr>
-              <a:t>正式误报</a:t>
+              <a:t>内存类问题风险</a:t>
             </a:r>
           </a:p>
         </p:txBody>
@@ -13921,7 +13617,7 @@
           <p:cNvPr id="35" name="">
             <a:extLst xmlns:a="http://schemas.openxmlformats.org/drawingml/2006/main">
               <a:ext uri="{FF2B5EF4-FFF2-40B4-BE49-F238E27FC236}">
-                <a16:creationId xmlns:a16="http://schemas.microsoft.com/office/drawing/2014/main" id="{E3846B1E-D2CA-436F-9E64-FBE1EA52C0B2}"/>
+                <a16:creationId xmlns:a16="http://schemas.microsoft.com/office/drawing/2014/main" id="{9FFF3CF9-895C-4A43-AEBF-8A2F348F250A}"/>
               </a:ext>
             </a:extLst>
           </p:cNvPr>
@@ -13967,7 +13663,7 @@
                 <a:ea typeface="PingFang SC"/>
                 <a:cs typeface="PingFang SC"/>
               </a:rPr>
-              <a:t>当前回归样本范围</a:t>
+              <a:t>越界 / 泄漏 / 空指针</a:t>
             </a:r>
           </a:p>
         </p:txBody>
@@ -13977,7 +13673,7 @@
           <p:cNvPr id="36" name="">
             <a:extLst xmlns:a="http://schemas.openxmlformats.org/drawingml/2006/main">
               <a:ext uri="{FF2B5EF4-FFF2-40B4-BE49-F238E27FC236}">
-                <a16:creationId xmlns:a16="http://schemas.microsoft.com/office/drawing/2014/main" id="{BE402306-DA46-4F09-BFEF-810E01B4DF9C}"/>
+                <a16:creationId xmlns:a16="http://schemas.microsoft.com/office/drawing/2014/main" id="{F8E3A5AD-A9B8-4A78-861C-C3E1787DB172}"/>
               </a:ext>
             </a:extLst>
           </p:cNvPr>
@@ -14031,7 +13727,7 @@
     </p:spTree>
     <p:extLst>
       <p:ext uri="{BB962C8B-B14F-4D97-AF65-F5344CB8AC3E}">
-        <p14:creationId xmlns:p14="http://schemas.microsoft.com/office/powerpoint/2010/main" val="332929932"/>
+        <p14:creationId xmlns:p14="http://schemas.microsoft.com/office/powerpoint/2010/main" val="303398152"/>
       </p:ext>
     </p:extLst>
   </p:cSld>
@@ -14062,7 +13758,7 @@
           <p:cNvPr id="1" name="">
             <a:extLst xmlns:a="http://schemas.openxmlformats.org/drawingml/2006/main">
               <a:ext uri="{FF2B5EF4-FFF2-40B4-BE49-F238E27FC236}">
-                <a16:creationId xmlns:a16="http://schemas.microsoft.com/office/drawing/2014/main" id="{1DFEF125-75E0-4597-B86E-F4E1E0FBB46B}"/>
+                <a16:creationId xmlns:a16="http://schemas.microsoft.com/office/drawing/2014/main" id="{EB9AD92C-CA85-4163-80FF-F272B88560F3}"/>
               </a:ext>
             </a:extLst>
           </p:cNvPr>
@@ -14092,7 +13788,7 @@
           <p:cNvPr id="2" name="">
             <a:extLst xmlns:a="http://schemas.openxmlformats.org/drawingml/2006/main">
               <a:ext uri="{FF2B5EF4-FFF2-40B4-BE49-F238E27FC236}">
-                <a16:creationId xmlns:a16="http://schemas.microsoft.com/office/drawing/2014/main" id="{3FB84625-E834-4EFF-B9DC-A485020AB2E2}"/>
+                <a16:creationId xmlns:a16="http://schemas.microsoft.com/office/drawing/2014/main" id="{4025E7C0-2510-4B48-941C-9F902A39934A}"/>
               </a:ext>
             </a:extLst>
           </p:cNvPr>
@@ -14122,7 +13818,7 @@
           <p:cNvPr id="3" name="">
             <a:extLst xmlns:a="http://schemas.openxmlformats.org/drawingml/2006/main">
               <a:ext uri="{FF2B5EF4-FFF2-40B4-BE49-F238E27FC236}">
-                <a16:creationId xmlns:a16="http://schemas.microsoft.com/office/drawing/2014/main" id="{31B2DC8E-E9F5-4725-BF12-6BAA3B69D4D6}"/>
+                <a16:creationId xmlns:a16="http://schemas.microsoft.com/office/drawing/2014/main" id="{80801F06-F7E9-4162-BA7D-0AB80DC549B5}"/>
               </a:ext>
             </a:extLst>
           </p:cNvPr>
@@ -14178,7 +13874,7 @@
           <p:cNvPr id="4" name="">
             <a:extLst xmlns:a="http://schemas.openxmlformats.org/drawingml/2006/main">
               <a:ext uri="{FF2B5EF4-FFF2-40B4-BE49-F238E27FC236}">
-                <a16:creationId xmlns:a16="http://schemas.microsoft.com/office/drawing/2014/main" id="{B5404823-EADA-4E7B-BF88-1326689FA65F}"/>
+                <a16:creationId xmlns:a16="http://schemas.microsoft.com/office/drawing/2014/main" id="{01AAE455-E598-435B-BCFC-D94259542CE5}"/>
               </a:ext>
             </a:extLst>
           </p:cNvPr>
@@ -14234,7 +13930,7 @@
           <p:cNvPr id="5" name="">
             <a:extLst xmlns:a="http://schemas.openxmlformats.org/drawingml/2006/main">
               <a:ext uri="{FF2B5EF4-FFF2-40B4-BE49-F238E27FC236}">
-                <a16:creationId xmlns:a16="http://schemas.microsoft.com/office/drawing/2014/main" id="{50CF491C-2E05-4008-9F15-0F5602FC3D0C}"/>
+                <a16:creationId xmlns:a16="http://schemas.microsoft.com/office/drawing/2014/main" id="{86CE90A0-5211-4276-8385-D170D638D5C1}"/>
               </a:ext>
             </a:extLst>
           </p:cNvPr>
@@ -14264,7 +13960,7 @@
           <p:cNvPr id="6" name="">
             <a:extLst xmlns:a="http://schemas.openxmlformats.org/drawingml/2006/main">
               <a:ext uri="{FF2B5EF4-FFF2-40B4-BE49-F238E27FC236}">
-                <a16:creationId xmlns:a16="http://schemas.microsoft.com/office/drawing/2014/main" id="{5FE4E0A7-EBB9-42CE-A8A8-B04FE42789A7}"/>
+                <a16:creationId xmlns:a16="http://schemas.microsoft.com/office/drawing/2014/main" id="{D925329A-67EB-4820-9137-1345367EE10D}"/>
               </a:ext>
             </a:extLst>
           </p:cNvPr>
@@ -14320,7 +14016,7 @@
           <p:cNvPr id="7" name="">
             <a:extLst xmlns:a="http://schemas.openxmlformats.org/drawingml/2006/main">
               <a:ext uri="{FF2B5EF4-FFF2-40B4-BE49-F238E27FC236}">
-                <a16:creationId xmlns:a16="http://schemas.microsoft.com/office/drawing/2014/main" id="{64E13FF7-8EC5-486B-8394-23DC6094ADEA}"/>
+                <a16:creationId xmlns:a16="http://schemas.microsoft.com/office/drawing/2014/main" id="{68EAE761-5CBA-4EFE-B1FE-E193A14989B3}"/>
               </a:ext>
             </a:extLst>
           </p:cNvPr>
@@ -14350,7 +14046,7 @@
           <p:cNvPr id="8" name="">
             <a:extLst xmlns:a="http://schemas.openxmlformats.org/drawingml/2006/main">
               <a:ext uri="{FF2B5EF4-FFF2-40B4-BE49-F238E27FC236}">
-                <a16:creationId xmlns:a16="http://schemas.microsoft.com/office/drawing/2014/main" id="{C9715C32-3C1B-4BF4-B2DD-DB9C4A9F5AEB}"/>
+                <a16:creationId xmlns:a16="http://schemas.microsoft.com/office/drawing/2014/main" id="{51CFD160-F6DA-42FE-B357-A4C888157FD2}"/>
               </a:ext>
             </a:extLst>
           </p:cNvPr>
@@ -14406,7 +14102,7 @@
           <p:cNvPr id="9" name="">
             <a:extLst xmlns:a="http://schemas.openxmlformats.org/drawingml/2006/main">
               <a:ext uri="{FF2B5EF4-FFF2-40B4-BE49-F238E27FC236}">
-                <a16:creationId xmlns:a16="http://schemas.microsoft.com/office/drawing/2014/main" id="{FEDE569C-30B8-4598-A5C6-108E5C4EE361}"/>
+                <a16:creationId xmlns:a16="http://schemas.microsoft.com/office/drawing/2014/main" id="{5A9B0868-803C-4AC4-9A35-531C42A80A16}"/>
               </a:ext>
             </a:extLst>
           </p:cNvPr>
@@ -14440,7 +14136,7 @@
           <p:cNvPr id="10" name="">
             <a:extLst xmlns:a="http://schemas.openxmlformats.org/drawingml/2006/main">
               <a:ext uri="{FF2B5EF4-FFF2-40B4-BE49-F238E27FC236}">
-                <a16:creationId xmlns:a16="http://schemas.microsoft.com/office/drawing/2014/main" id="{117432EA-6860-4DD5-82BF-72309782D45F}"/>
+                <a16:creationId xmlns:a16="http://schemas.microsoft.com/office/drawing/2014/main" id="{B1040A8D-136B-485C-8094-84514D975307}"/>
               </a:ext>
             </a:extLst>
           </p:cNvPr>
@@ -14470,7 +14166,7 @@
           <p:cNvPr id="11" name="">
             <a:extLst xmlns:a="http://schemas.openxmlformats.org/drawingml/2006/main">
               <a:ext uri="{FF2B5EF4-FFF2-40B4-BE49-F238E27FC236}">
-                <a16:creationId xmlns:a16="http://schemas.microsoft.com/office/drawing/2014/main" id="{B92934F1-97DD-4F00-B696-9EBE0C04B0A7}"/>
+                <a16:creationId xmlns:a16="http://schemas.microsoft.com/office/drawing/2014/main" id="{5F898D3B-09F5-4B03-BEBB-BD0E6BAB12AB}"/>
               </a:ext>
             </a:extLst>
           </p:cNvPr>
@@ -14526,7 +14222,7 @@
           <p:cNvPr id="12" name="">
             <a:extLst xmlns:a="http://schemas.openxmlformats.org/drawingml/2006/main">
               <a:ext uri="{FF2B5EF4-FFF2-40B4-BE49-F238E27FC236}">
-                <a16:creationId xmlns:a16="http://schemas.microsoft.com/office/drawing/2014/main" id="{F60E1ECA-EA56-4F42-BAD0-346C7461555A}"/>
+                <a16:creationId xmlns:a16="http://schemas.microsoft.com/office/drawing/2014/main" id="{9B13BB62-1350-401D-8A35-ECB48F987003}"/>
               </a:ext>
             </a:extLst>
           </p:cNvPr>
@@ -14556,7 +14252,7 @@
           <p:cNvPr id="13" name="">
             <a:extLst xmlns:a="http://schemas.openxmlformats.org/drawingml/2006/main">
               <a:ext uri="{FF2B5EF4-FFF2-40B4-BE49-F238E27FC236}">
-                <a16:creationId xmlns:a16="http://schemas.microsoft.com/office/drawing/2014/main" id="{F534D1DB-08D2-4E34-BA9D-F136D4D2BE15}"/>
+                <a16:creationId xmlns:a16="http://schemas.microsoft.com/office/drawing/2014/main" id="{72E2A708-19EE-4CFD-B5D1-05F054496A6B}"/>
               </a:ext>
             </a:extLst>
           </p:cNvPr>
@@ -14612,7 +14308,7 @@
           <p:cNvPr id="14" name="">
             <a:extLst xmlns:a="http://schemas.openxmlformats.org/drawingml/2006/main">
               <a:ext uri="{FF2B5EF4-FFF2-40B4-BE49-F238E27FC236}">
-                <a16:creationId xmlns:a16="http://schemas.microsoft.com/office/drawing/2014/main" id="{F83AEC8C-74BA-4C4B-A987-E6D7DEE8374B}"/>
+                <a16:creationId xmlns:a16="http://schemas.microsoft.com/office/drawing/2014/main" id="{08BA8A7C-8040-40D1-AD36-9C3334B924D1}"/>
               </a:ext>
             </a:extLst>
           </p:cNvPr>
@@ -14642,7 +14338,7 @@
           <p:cNvPr id="15" name="">
             <a:extLst xmlns:a="http://schemas.openxmlformats.org/drawingml/2006/main">
               <a:ext uri="{FF2B5EF4-FFF2-40B4-BE49-F238E27FC236}">
-                <a16:creationId xmlns:a16="http://schemas.microsoft.com/office/drawing/2014/main" id="{E93F2BC8-D980-46B9-8B04-84077A7911D6}"/>
+                <a16:creationId xmlns:a16="http://schemas.microsoft.com/office/drawing/2014/main" id="{75741E48-CE69-4D8A-8C0C-8F7F59262D9D}"/>
               </a:ext>
             </a:extLst>
           </p:cNvPr>
@@ -14698,7 +14394,7 @@
           <p:cNvPr id="16" name="">
             <a:extLst xmlns:a="http://schemas.openxmlformats.org/drawingml/2006/main">
               <a:ext uri="{FF2B5EF4-FFF2-40B4-BE49-F238E27FC236}">
-                <a16:creationId xmlns:a16="http://schemas.microsoft.com/office/drawing/2014/main" id="{46DD8C82-3D25-4CF0-8448-096425A311C1}"/>
+                <a16:creationId xmlns:a16="http://schemas.microsoft.com/office/drawing/2014/main" id="{826CD683-2AD0-4081-A11E-AD515C8F842E}"/>
               </a:ext>
             </a:extLst>
           </p:cNvPr>
@@ -14732,7 +14428,7 @@
           <p:cNvPr id="17" name="">
             <a:extLst xmlns:a="http://schemas.openxmlformats.org/drawingml/2006/main">
               <a:ext uri="{FF2B5EF4-FFF2-40B4-BE49-F238E27FC236}">
-                <a16:creationId xmlns:a16="http://schemas.microsoft.com/office/drawing/2014/main" id="{C4D13821-58E8-487F-93A8-C5DEF832FB52}"/>
+                <a16:creationId xmlns:a16="http://schemas.microsoft.com/office/drawing/2014/main" id="{0D39E2AD-F2AE-4AFB-BD76-359203C0C524}"/>
               </a:ext>
             </a:extLst>
           </p:cNvPr>
@@ -14762,7 +14458,7 @@
           <p:cNvPr id="18" name="">
             <a:extLst xmlns:a="http://schemas.openxmlformats.org/drawingml/2006/main">
               <a:ext uri="{FF2B5EF4-FFF2-40B4-BE49-F238E27FC236}">
-                <a16:creationId xmlns:a16="http://schemas.microsoft.com/office/drawing/2014/main" id="{D1CDE08B-98B2-424B-8848-E199FEDDECED}"/>
+                <a16:creationId xmlns:a16="http://schemas.microsoft.com/office/drawing/2014/main" id="{2D1972D1-94FE-4174-B0D8-0B7EEF711B70}"/>
               </a:ext>
             </a:extLst>
           </p:cNvPr>
@@ -14818,7 +14514,7 @@
           <p:cNvPr id="19" name="">
             <a:extLst xmlns:a="http://schemas.openxmlformats.org/drawingml/2006/main">
               <a:ext uri="{FF2B5EF4-FFF2-40B4-BE49-F238E27FC236}">
-                <a16:creationId xmlns:a16="http://schemas.microsoft.com/office/drawing/2014/main" id="{D5937454-D0C7-42B7-A12D-F4D2089BB631}"/>
+                <a16:creationId xmlns:a16="http://schemas.microsoft.com/office/drawing/2014/main" id="{571ABBB7-0C5E-4FCA-9EE2-906E9E187EC8}"/>
               </a:ext>
             </a:extLst>
           </p:cNvPr>
@@ -14848,7 +14544,7 @@
           <p:cNvPr id="20" name="">
             <a:extLst xmlns:a="http://schemas.openxmlformats.org/drawingml/2006/main">
               <a:ext uri="{FF2B5EF4-FFF2-40B4-BE49-F238E27FC236}">
-                <a16:creationId xmlns:a16="http://schemas.microsoft.com/office/drawing/2014/main" id="{2F46A0C7-C7E8-4411-9E2B-CC0E912CACDB}"/>
+                <a16:creationId xmlns:a16="http://schemas.microsoft.com/office/drawing/2014/main" id="{C999D8C1-73C7-46CF-A61B-6325BD0C1B4D}"/>
               </a:ext>
             </a:extLst>
           </p:cNvPr>
@@ -14904,7 +14600,7 @@
           <p:cNvPr id="21" name="">
             <a:extLst xmlns:a="http://schemas.openxmlformats.org/drawingml/2006/main">
               <a:ext uri="{FF2B5EF4-FFF2-40B4-BE49-F238E27FC236}">
-                <a16:creationId xmlns:a16="http://schemas.microsoft.com/office/drawing/2014/main" id="{96C48649-CB32-44D3-9C35-5804800AEEE7}"/>
+                <a16:creationId xmlns:a16="http://schemas.microsoft.com/office/drawing/2014/main" id="{5A5EFB36-048F-471F-B2F8-7C76B4D80A17}"/>
               </a:ext>
             </a:extLst>
           </p:cNvPr>
@@ -14963,7 +14659,7 @@
           <p:cNvPr id="22" name="">
             <a:extLst xmlns:a="http://schemas.openxmlformats.org/drawingml/2006/main">
               <a:ext uri="{FF2B5EF4-FFF2-40B4-BE49-F238E27FC236}">
-                <a16:creationId xmlns:a16="http://schemas.microsoft.com/office/drawing/2014/main" id="{19B91C1E-9970-466A-B89E-67F7EA89C6F4}"/>
+                <a16:creationId xmlns:a16="http://schemas.microsoft.com/office/drawing/2014/main" id="{3F1E6F1F-3497-4D78-8F18-78A9E463E753}"/>
               </a:ext>
             </a:extLst>
           </p:cNvPr>
@@ -15009,7 +14705,7 @@
                 <a:ea typeface="PingFang SC"/>
                 <a:cs typeface="PingFang SC"/>
               </a:rPr>
-              <a:t>新增版型优先补显示规则，不反复改核心流程；减少现场拼接显示名带来的误显示风险。</a:t>
+              <a:t>新增版型优先补显示规则，不反复改核心流程，提升复用性、减少维护时间；同时降低误显示风险。</a:t>
             </a:r>
           </a:p>
         </p:txBody>
@@ -15023,7 +14719,7 @@
           <p:nvPr/>
         </p:nvPicPr>
         <p:blipFill>
-          <a:blip xmlns:r="http://schemas.openxmlformats.org/officeDocument/2006/relationships" xmlns:a="http://schemas.openxmlformats.org/drawingml/2006/main" r:embed="Rc4bb7d03ffd74e38"/>
+          <a:blip xmlns:r="http://schemas.openxmlformats.org/officeDocument/2006/relationships" xmlns:a="http://schemas.openxmlformats.org/drawingml/2006/main" r:embed="Rdec13fc211294917"/>
           <a:stretch xmlns:a="http://schemas.openxmlformats.org/drawingml/2006/main"/>
         </p:blipFill>
         <p:spPr>
@@ -15041,7 +14737,7 @@
           <p:cNvPr id="24" name="">
             <a:extLst xmlns:a="http://schemas.openxmlformats.org/drawingml/2006/main">
               <a:ext uri="{FF2B5EF4-FFF2-40B4-BE49-F238E27FC236}">
-                <a16:creationId xmlns:a16="http://schemas.microsoft.com/office/drawing/2014/main" id="{EB729531-BF25-45E8-B74A-827251198AA9}"/>
+                <a16:creationId xmlns:a16="http://schemas.microsoft.com/office/drawing/2014/main" id="{BCE8C9F0-7A29-426C-B85B-F70DF83111E3}"/>
               </a:ext>
             </a:extLst>
           </p:cNvPr>
@@ -15095,7 +14791,7 @@
     </p:spTree>
     <p:extLst>
       <p:ext uri="{BB962C8B-B14F-4D97-AF65-F5344CB8AC3E}">
-        <p14:creationId xmlns:p14="http://schemas.microsoft.com/office/powerpoint/2010/main" val="803446706"/>
+        <p14:creationId xmlns:p14="http://schemas.microsoft.com/office/powerpoint/2010/main" val="2060220972"/>
       </p:ext>
     </p:extLst>
   </p:cSld>
@@ -15126,7 +14822,7 @@
           <p:cNvPr id="1" name="">
             <a:extLst xmlns:a="http://schemas.openxmlformats.org/drawingml/2006/main">
               <a:ext uri="{FF2B5EF4-FFF2-40B4-BE49-F238E27FC236}">
-                <a16:creationId xmlns:a16="http://schemas.microsoft.com/office/drawing/2014/main" id="{02DC2B00-013D-4AEA-AF1E-66CCDC17EEAC}"/>
+                <a16:creationId xmlns:a16="http://schemas.microsoft.com/office/drawing/2014/main" id="{28503239-B5EE-47D0-A1C5-35C0C9F00FED}"/>
               </a:ext>
             </a:extLst>
           </p:cNvPr>
@@ -15156,7 +14852,7 @@
           <p:cNvPr id="2" name="">
             <a:extLst xmlns:a="http://schemas.openxmlformats.org/drawingml/2006/main">
               <a:ext uri="{FF2B5EF4-FFF2-40B4-BE49-F238E27FC236}">
-                <a16:creationId xmlns:a16="http://schemas.microsoft.com/office/drawing/2014/main" id="{73501D9D-BC90-4CB6-ABDD-CE9838E4670C}"/>
+                <a16:creationId xmlns:a16="http://schemas.microsoft.com/office/drawing/2014/main" id="{C46BBD6D-5839-4A5F-95AF-CB6FECC01220}"/>
               </a:ext>
             </a:extLst>
           </p:cNvPr>
@@ -15186,7 +14882,7 @@
           <p:cNvPr id="3" name="">
             <a:extLst xmlns:a="http://schemas.openxmlformats.org/drawingml/2006/main">
               <a:ext uri="{FF2B5EF4-FFF2-40B4-BE49-F238E27FC236}">
-                <a16:creationId xmlns:a16="http://schemas.microsoft.com/office/drawing/2014/main" id="{CE48DF68-6179-43FB-B1FB-A3CF796A096C}"/>
+                <a16:creationId xmlns:a16="http://schemas.microsoft.com/office/drawing/2014/main" id="{43F6214D-34AE-4FBB-BA8C-56BE03695586}"/>
               </a:ext>
             </a:extLst>
           </p:cNvPr>
@@ -15242,7 +14938,7 @@
           <p:cNvPr id="4" name="">
             <a:extLst xmlns:a="http://schemas.openxmlformats.org/drawingml/2006/main">
               <a:ext uri="{FF2B5EF4-FFF2-40B4-BE49-F238E27FC236}">
-                <a16:creationId xmlns:a16="http://schemas.microsoft.com/office/drawing/2014/main" id="{36A17736-947D-4A2B-A03D-DB9B17F93048}"/>
+                <a16:creationId xmlns:a16="http://schemas.microsoft.com/office/drawing/2014/main" id="{67EFA608-2012-4A9C-9463-760D2167A121}"/>
               </a:ext>
             </a:extLst>
           </p:cNvPr>
@@ -15288,7 +14984,7 @@
                 <a:ea typeface="PingFang SC"/>
                 <a:cs typeface="PingFang SC"/>
               </a:rPr>
-              <a:t>Type9 重构通过“规格先行、AI 辅助生成、人工验收”完成落地</a:t>
+              <a:t>Type9 重构通过“规格先行、AI 生成代码、人工验收”完成落地</a:t>
             </a:r>
           </a:p>
         </p:txBody>
@@ -15298,7 +14994,7 @@
           <p:cNvPr id="5" name="">
             <a:extLst xmlns:a="http://schemas.openxmlformats.org/drawingml/2006/main">
               <a:ext uri="{FF2B5EF4-FFF2-40B4-BE49-F238E27FC236}">
-                <a16:creationId xmlns:a16="http://schemas.microsoft.com/office/drawing/2014/main" id="{6D866009-2C7D-4C1E-BCC6-DDCE2628F261}"/>
+                <a16:creationId xmlns:a16="http://schemas.microsoft.com/office/drawing/2014/main" id="{1ECD0AC2-9244-40DF-B4CE-A700D1B8DF8D}"/>
               </a:ext>
             </a:extLst>
           </p:cNvPr>
@@ -15328,7 +15024,7 @@
           <p:cNvPr id="6" name="">
             <a:extLst xmlns:a="http://schemas.openxmlformats.org/drawingml/2006/main">
               <a:ext uri="{FF2B5EF4-FFF2-40B4-BE49-F238E27FC236}">
-                <a16:creationId xmlns:a16="http://schemas.microsoft.com/office/drawing/2014/main" id="{17B34F7B-5E66-43D7-8560-85816B4C2504}"/>
+                <a16:creationId xmlns:a16="http://schemas.microsoft.com/office/drawing/2014/main" id="{53F810D3-A36D-4C39-AE3A-EE1AE6820A84}"/>
               </a:ext>
             </a:extLst>
           </p:cNvPr>
@@ -15384,7 +15080,7 @@
           <p:cNvPr id="7" name="">
             <a:extLst xmlns:a="http://schemas.openxmlformats.org/drawingml/2006/main">
               <a:ext uri="{FF2B5EF4-FFF2-40B4-BE49-F238E27FC236}">
-                <a16:creationId xmlns:a16="http://schemas.microsoft.com/office/drawing/2014/main" id="{1001F924-E445-44C1-9498-A074547E9A65}"/>
+                <a16:creationId xmlns:a16="http://schemas.microsoft.com/office/drawing/2014/main" id="{3E2E423B-28DE-41DF-ACF8-FBC5B24346D2}"/>
               </a:ext>
             </a:extLst>
           </p:cNvPr>
@@ -15418,7 +15114,7 @@
           <p:cNvPr id="8" name="">
             <a:extLst xmlns:a="http://schemas.openxmlformats.org/drawingml/2006/main">
               <a:ext uri="{FF2B5EF4-FFF2-40B4-BE49-F238E27FC236}">
-                <a16:creationId xmlns:a16="http://schemas.microsoft.com/office/drawing/2014/main" id="{07428317-53B8-4937-A191-3E963D3DDC5D}"/>
+                <a16:creationId xmlns:a16="http://schemas.microsoft.com/office/drawing/2014/main" id="{DC0924B6-C574-4E74-A448-4278F0B31E88}"/>
               </a:ext>
             </a:extLst>
           </p:cNvPr>
@@ -15464,7 +15160,30 @@
                 <a:ea typeface="PingFang SC"/>
                 <a:cs typeface="PingFang SC"/>
               </a:rPr>
-              <a:t>客户规则</a:t>
+              <a:t>客户需求</a:t>
+            </a:r>
+          </a:p>
+          <a:p xmlns:a="http://schemas.openxmlformats.org/drawingml/2006/main">
+            <a:pPr algn="ctr">
+              <a:defRPr sz="1200" b="1">
+                <a:solidFill>
+                  <a:srgbClr val="111827"/>
+                </a:solidFill>
+                <a:latin typeface="PingFang SC"/>
+                <a:ea typeface="PingFang SC"/>
+                <a:cs typeface="PingFang SC"/>
+              </a:defRPr>
+            </a:pPr>
+            <a:r>
+              <a:rPr sz="1200" b="1">
+                <a:solidFill>
+                  <a:srgbClr val="111827"/>
+                </a:solidFill>
+                <a:latin typeface="PingFang SC"/>
+                <a:ea typeface="PingFang SC"/>
+                <a:cs typeface="PingFang SC"/>
+              </a:rPr>
+              <a:t>架构边界</a:t>
             </a:r>
           </a:p>
         </p:txBody>
@@ -15474,7 +15193,7 @@
           <p:cNvPr id="9" name="">
             <a:extLst xmlns:a="http://schemas.openxmlformats.org/drawingml/2006/main">
               <a:ext uri="{FF2B5EF4-FFF2-40B4-BE49-F238E27FC236}">
-                <a16:creationId xmlns:a16="http://schemas.microsoft.com/office/drawing/2014/main" id="{3CEDF1EC-F2D0-4897-A86B-4749B3ADC78E}"/>
+                <a16:creationId xmlns:a16="http://schemas.microsoft.com/office/drawing/2014/main" id="{ADB857D8-2FB2-4A2C-BDF0-76A349E430D8}"/>
               </a:ext>
             </a:extLst>
           </p:cNvPr>
@@ -15530,7 +15249,7 @@
           <p:cNvPr id="10" name="">
             <a:extLst xmlns:a="http://schemas.openxmlformats.org/drawingml/2006/main">
               <a:ext uri="{FF2B5EF4-FFF2-40B4-BE49-F238E27FC236}">
-                <a16:creationId xmlns:a16="http://schemas.microsoft.com/office/drawing/2014/main" id="{2E3E6340-D067-40CE-92D2-69FFF90C7EE0}"/>
+                <a16:creationId xmlns:a16="http://schemas.microsoft.com/office/drawing/2014/main" id="{E904A186-D71F-4207-9606-A1B1FF7EE8A1}"/>
               </a:ext>
             </a:extLst>
           </p:cNvPr>
@@ -15564,7 +15283,7 @@
           <p:cNvPr id="11" name="">
             <a:extLst xmlns:a="http://schemas.openxmlformats.org/drawingml/2006/main">
               <a:ext uri="{FF2B5EF4-FFF2-40B4-BE49-F238E27FC236}">
-                <a16:creationId xmlns:a16="http://schemas.microsoft.com/office/drawing/2014/main" id="{BB35FE6F-70B8-454A-AD68-43D5A39B6BB2}"/>
+                <a16:creationId xmlns:a16="http://schemas.microsoft.com/office/drawing/2014/main" id="{F6EA252D-22D3-47E8-BF1B-87086344B598}"/>
               </a:ext>
             </a:extLst>
           </p:cNvPr>
@@ -15620,7 +15339,7 @@
           <p:cNvPr id="12" name="">
             <a:extLst xmlns:a="http://schemas.openxmlformats.org/drawingml/2006/main">
               <a:ext uri="{FF2B5EF4-FFF2-40B4-BE49-F238E27FC236}">
-                <a16:creationId xmlns:a16="http://schemas.microsoft.com/office/drawing/2014/main" id="{192FC56A-2F2A-4249-A3E3-19A83438C462}"/>
+                <a16:creationId xmlns:a16="http://schemas.microsoft.com/office/drawing/2014/main" id="{11FC71EC-A97C-42B0-8FCE-011DE82BC6F6}"/>
               </a:ext>
             </a:extLst>
           </p:cNvPr>
@@ -15676,7 +15395,7 @@
           <p:cNvPr id="13" name="">
             <a:extLst xmlns:a="http://schemas.openxmlformats.org/drawingml/2006/main">
               <a:ext uri="{FF2B5EF4-FFF2-40B4-BE49-F238E27FC236}">
-                <a16:creationId xmlns:a16="http://schemas.microsoft.com/office/drawing/2014/main" id="{72C2461A-DFBC-439A-9865-E90F36F7E171}"/>
+                <a16:creationId xmlns:a16="http://schemas.microsoft.com/office/drawing/2014/main" id="{ADD62068-A51A-4308-8345-FF32F8AB59A6}"/>
               </a:ext>
             </a:extLst>
           </p:cNvPr>
@@ -15710,7 +15429,7 @@
           <p:cNvPr id="14" name="">
             <a:extLst xmlns:a="http://schemas.openxmlformats.org/drawingml/2006/main">
               <a:ext uri="{FF2B5EF4-FFF2-40B4-BE49-F238E27FC236}">
-                <a16:creationId xmlns:a16="http://schemas.microsoft.com/office/drawing/2014/main" id="{37893B3C-FDFA-460B-BD78-F6B3785DCAB1}"/>
+                <a16:creationId xmlns:a16="http://schemas.microsoft.com/office/drawing/2014/main" id="{19DBC720-87CB-4BA1-8C6B-8D70CFD887DB}"/>
               </a:ext>
             </a:extLst>
           </p:cNvPr>
@@ -15766,7 +15485,7 @@
           <p:cNvPr id="15" name="">
             <a:extLst xmlns:a="http://schemas.openxmlformats.org/drawingml/2006/main">
               <a:ext uri="{FF2B5EF4-FFF2-40B4-BE49-F238E27FC236}">
-                <a16:creationId xmlns:a16="http://schemas.microsoft.com/office/drawing/2014/main" id="{1FECDC42-8C61-4373-9CB3-FAEC77EF29CF}"/>
+                <a16:creationId xmlns:a16="http://schemas.microsoft.com/office/drawing/2014/main" id="{8B77C9DF-9870-415F-B253-B8D6A548DD89}"/>
               </a:ext>
             </a:extLst>
           </p:cNvPr>
@@ -15800,7 +15519,7 @@
           <p:cNvPr id="16" name="">
             <a:extLst xmlns:a="http://schemas.openxmlformats.org/drawingml/2006/main">
               <a:ext uri="{FF2B5EF4-FFF2-40B4-BE49-F238E27FC236}">
-                <a16:creationId xmlns:a16="http://schemas.microsoft.com/office/drawing/2014/main" id="{7B8CC51C-39FD-4711-AED7-9DEEA341A38D}"/>
+                <a16:creationId xmlns:a16="http://schemas.microsoft.com/office/drawing/2014/main" id="{B88F112D-95B7-496C-AB53-A1080150CE55}"/>
               </a:ext>
             </a:extLst>
           </p:cNvPr>
@@ -15846,7 +15565,7 @@
                 <a:ea typeface="PingFang SC"/>
                 <a:cs typeface="PingFang SC"/>
               </a:rPr>
-              <a:t>AI 辅助实现</a:t>
+              <a:t>AI 生成代码</a:t>
             </a:r>
           </a:p>
         </p:txBody>
@@ -15856,7 +15575,7 @@
           <p:cNvPr id="17" name="">
             <a:extLst xmlns:a="http://schemas.openxmlformats.org/drawingml/2006/main">
               <a:ext uri="{FF2B5EF4-FFF2-40B4-BE49-F238E27FC236}">
-                <a16:creationId xmlns:a16="http://schemas.microsoft.com/office/drawing/2014/main" id="{4F0245E6-3667-4618-A794-BC76B6F93253}"/>
+                <a16:creationId xmlns:a16="http://schemas.microsoft.com/office/drawing/2014/main" id="{1F2BD7F4-8748-44FB-9E47-C1422A0CF0FE}"/>
               </a:ext>
             </a:extLst>
           </p:cNvPr>
@@ -15912,7 +15631,7 @@
           <p:cNvPr id="18" name="">
             <a:extLst xmlns:a="http://schemas.openxmlformats.org/drawingml/2006/main">
               <a:ext uri="{FF2B5EF4-FFF2-40B4-BE49-F238E27FC236}">
-                <a16:creationId xmlns:a16="http://schemas.microsoft.com/office/drawing/2014/main" id="{FD3B90DD-CDCE-4021-9968-6A3F1940EF0B}"/>
+                <a16:creationId xmlns:a16="http://schemas.microsoft.com/office/drawing/2014/main" id="{8D45E335-C32C-4FF2-9D3A-6D007C8594ED}"/>
               </a:ext>
             </a:extLst>
           </p:cNvPr>
@@ -15946,7 +15665,7 @@
           <p:cNvPr id="19" name="">
             <a:extLst xmlns:a="http://schemas.openxmlformats.org/drawingml/2006/main">
               <a:ext uri="{FF2B5EF4-FFF2-40B4-BE49-F238E27FC236}">
-                <a16:creationId xmlns:a16="http://schemas.microsoft.com/office/drawing/2014/main" id="{1BCA99C1-12B0-4195-9A5E-0A0BBBDDC18B}"/>
+                <a16:creationId xmlns:a16="http://schemas.microsoft.com/office/drawing/2014/main" id="{086C98EF-2335-4251-A3E3-53CFDDACA769}"/>
               </a:ext>
             </a:extLst>
           </p:cNvPr>
@@ -16002,7 +15721,7 @@
           <p:cNvPr id="20" name="">
             <a:extLst xmlns:a="http://schemas.openxmlformats.org/drawingml/2006/main">
               <a:ext uri="{FF2B5EF4-FFF2-40B4-BE49-F238E27FC236}">
-                <a16:creationId xmlns:a16="http://schemas.microsoft.com/office/drawing/2014/main" id="{67F2A80A-180D-4CDD-B33C-6DF4F2D93E18}"/>
+                <a16:creationId xmlns:a16="http://schemas.microsoft.com/office/drawing/2014/main" id="{9FA02F5D-B2F6-4ABE-AAD8-C9213688A5B0}"/>
               </a:ext>
             </a:extLst>
           </p:cNvPr>
@@ -16058,7 +15777,7 @@
           <p:cNvPr id="21" name="">
             <a:extLst xmlns:a="http://schemas.openxmlformats.org/drawingml/2006/main">
               <a:ext uri="{FF2B5EF4-FFF2-40B4-BE49-F238E27FC236}">
-                <a16:creationId xmlns:a16="http://schemas.microsoft.com/office/drawing/2014/main" id="{C6E087AA-BD86-4CCB-97B9-4F4EEFCCFEFE}"/>
+                <a16:creationId xmlns:a16="http://schemas.microsoft.com/office/drawing/2014/main" id="{8874DED4-0906-40FB-8D75-96DA296DDCEE}"/>
               </a:ext>
             </a:extLst>
           </p:cNvPr>
@@ -16092,7 +15811,7 @@
           <p:cNvPr id="22" name="">
             <a:extLst xmlns:a="http://schemas.openxmlformats.org/drawingml/2006/main">
               <a:ext uri="{FF2B5EF4-FFF2-40B4-BE49-F238E27FC236}">
-                <a16:creationId xmlns:a16="http://schemas.microsoft.com/office/drawing/2014/main" id="{D014DCAD-EB8F-4479-84BF-F6F325EF5222}"/>
+                <a16:creationId xmlns:a16="http://schemas.microsoft.com/office/drawing/2014/main" id="{E78D606F-010E-4E48-B67C-FD0D392FA789}"/>
               </a:ext>
             </a:extLst>
           </p:cNvPr>
@@ -16148,7 +15867,7 @@
           <p:cNvPr id="23" name="">
             <a:extLst xmlns:a="http://schemas.openxmlformats.org/drawingml/2006/main">
               <a:ext uri="{FF2B5EF4-FFF2-40B4-BE49-F238E27FC236}">
-                <a16:creationId xmlns:a16="http://schemas.microsoft.com/office/drawing/2014/main" id="{048F9138-4ECE-4EAD-9B8D-B6BA88E23445}"/>
+                <a16:creationId xmlns:a16="http://schemas.microsoft.com/office/drawing/2014/main" id="{FE12021B-B239-43E8-87FF-BBD4E5B99D81}"/>
               </a:ext>
             </a:extLst>
           </p:cNvPr>
@@ -16178,7 +15897,7 @@
           <p:cNvPr id="24" name="">
             <a:extLst xmlns:a="http://schemas.openxmlformats.org/drawingml/2006/main">
               <a:ext uri="{FF2B5EF4-FFF2-40B4-BE49-F238E27FC236}">
-                <a16:creationId xmlns:a16="http://schemas.microsoft.com/office/drawing/2014/main" id="{9E4F3D18-AE50-4AE4-83B2-418C96B6D1CF}"/>
+                <a16:creationId xmlns:a16="http://schemas.microsoft.com/office/drawing/2014/main" id="{6A1AF02B-B1D9-4649-8251-63B40C51ABC5}"/>
               </a:ext>
             </a:extLst>
           </p:cNvPr>
@@ -16234,7 +15953,7 @@
           <p:cNvPr id="25" name="">
             <a:extLst xmlns:a="http://schemas.openxmlformats.org/drawingml/2006/main">
               <a:ext uri="{FF2B5EF4-FFF2-40B4-BE49-F238E27FC236}">
-                <a16:creationId xmlns:a16="http://schemas.microsoft.com/office/drawing/2014/main" id="{A6066090-8342-4D04-9ED5-821ACF36E305}"/>
+                <a16:creationId xmlns:a16="http://schemas.microsoft.com/office/drawing/2014/main" id="{750576DB-6A6E-40E6-B759-1C8873154E3F}"/>
               </a:ext>
             </a:extLst>
           </p:cNvPr>
@@ -16264,7 +15983,7 @@
           <p:cNvPr id="26" name="">
             <a:extLst xmlns:a="http://schemas.openxmlformats.org/drawingml/2006/main">
               <a:ext uri="{FF2B5EF4-FFF2-40B4-BE49-F238E27FC236}">
-                <a16:creationId xmlns:a16="http://schemas.microsoft.com/office/drawing/2014/main" id="{686DC658-8117-4C9E-8222-886A853A9C2E}"/>
+                <a16:creationId xmlns:a16="http://schemas.microsoft.com/office/drawing/2014/main" id="{A6321864-44BD-4F56-84A5-EF73A1245105}"/>
               </a:ext>
             </a:extLst>
           </p:cNvPr>
@@ -16320,7 +16039,7 @@
           <p:cNvPr id="27" name="">
             <a:extLst xmlns:a="http://schemas.openxmlformats.org/drawingml/2006/main">
               <a:ext uri="{FF2B5EF4-FFF2-40B4-BE49-F238E27FC236}">
-                <a16:creationId xmlns:a16="http://schemas.microsoft.com/office/drawing/2014/main" id="{D207437A-A49B-4DA8-8135-98D611270AC5}"/>
+                <a16:creationId xmlns:a16="http://schemas.microsoft.com/office/drawing/2014/main" id="{D4672A0D-5365-4254-9C24-A3DF17F05781}"/>
               </a:ext>
             </a:extLst>
           </p:cNvPr>
@@ -16350,7 +16069,7 @@
           <p:cNvPr id="28" name="">
             <a:extLst xmlns:a="http://schemas.openxmlformats.org/drawingml/2006/main">
               <a:ext uri="{FF2B5EF4-FFF2-40B4-BE49-F238E27FC236}">
-                <a16:creationId xmlns:a16="http://schemas.microsoft.com/office/drawing/2014/main" id="{DFAD1A80-57C7-48A1-AA03-54379A165BDF}"/>
+                <a16:creationId xmlns:a16="http://schemas.microsoft.com/office/drawing/2014/main" id="{909348FD-1BB5-426F-9792-4641AA45BB24}"/>
               </a:ext>
             </a:extLst>
           </p:cNvPr>
@@ -16406,7 +16125,7 @@
           <p:cNvPr id="29" name="">
             <a:extLst xmlns:a="http://schemas.openxmlformats.org/drawingml/2006/main">
               <a:ext uri="{FF2B5EF4-FFF2-40B4-BE49-F238E27FC236}">
-                <a16:creationId xmlns:a16="http://schemas.microsoft.com/office/drawing/2014/main" id="{8A159DED-F0CC-4092-82C5-B823C4D75E74}"/>
+                <a16:creationId xmlns:a16="http://schemas.microsoft.com/office/drawing/2014/main" id="{65040701-BEC9-4F4E-8084-5E56452026A5}"/>
               </a:ext>
             </a:extLst>
           </p:cNvPr>
@@ -16436,7 +16155,7 @@
           <p:cNvPr id="30" name="">
             <a:extLst xmlns:a="http://schemas.openxmlformats.org/drawingml/2006/main">
               <a:ext uri="{FF2B5EF4-FFF2-40B4-BE49-F238E27FC236}">
-                <a16:creationId xmlns:a16="http://schemas.microsoft.com/office/drawing/2014/main" id="{93895C30-1715-406D-9CD6-474EB6148F2B}"/>
+                <a16:creationId xmlns:a16="http://schemas.microsoft.com/office/drawing/2014/main" id="{2E5628D7-2CC2-400C-9ABE-FDD84F511D82}"/>
               </a:ext>
             </a:extLst>
           </p:cNvPr>
@@ -16492,7 +16211,7 @@
           <p:cNvPr id="31" name="">
             <a:extLst xmlns:a="http://schemas.openxmlformats.org/drawingml/2006/main">
               <a:ext uri="{FF2B5EF4-FFF2-40B4-BE49-F238E27FC236}">
-                <a16:creationId xmlns:a16="http://schemas.microsoft.com/office/drawing/2014/main" id="{DB780851-FDA9-4F4A-9732-0FB056FFF85E}"/>
+                <a16:creationId xmlns:a16="http://schemas.microsoft.com/office/drawing/2014/main" id="{3941BCDD-46EA-4B55-8A34-D4061503F5E0}"/>
               </a:ext>
             </a:extLst>
           </p:cNvPr>
@@ -16522,7 +16241,7 @@
           <p:cNvPr id="32" name="">
             <a:extLst xmlns:a="http://schemas.openxmlformats.org/drawingml/2006/main">
               <a:ext uri="{FF2B5EF4-FFF2-40B4-BE49-F238E27FC236}">
-                <a16:creationId xmlns:a16="http://schemas.microsoft.com/office/drawing/2014/main" id="{68475BF4-513B-4EBC-9F66-71C3586281FE}"/>
+                <a16:creationId xmlns:a16="http://schemas.microsoft.com/office/drawing/2014/main" id="{B4DBBA28-918A-49AE-9A4E-8A5380F19195}"/>
               </a:ext>
             </a:extLst>
           </p:cNvPr>
@@ -16582,7 +16301,7 @@
           <p:nvPr/>
         </p:nvPicPr>
         <p:blipFill>
-          <a:blip xmlns:r="http://schemas.openxmlformats.org/officeDocument/2006/relationships" xmlns:a="http://schemas.openxmlformats.org/drawingml/2006/main" r:embed="R50990e645f7446f2"/>
+          <a:blip xmlns:r="http://schemas.openxmlformats.org/officeDocument/2006/relationships" xmlns:a="http://schemas.openxmlformats.org/drawingml/2006/main" r:embed="Ra42883fd11764322"/>
           <a:stretch xmlns:a="http://schemas.openxmlformats.org/drawingml/2006/main"/>
         </p:blipFill>
         <p:spPr>
@@ -16600,7 +16319,7 @@
           <p:cNvPr id="34" name="">
             <a:extLst xmlns:a="http://schemas.openxmlformats.org/drawingml/2006/main">
               <a:ext uri="{FF2B5EF4-FFF2-40B4-BE49-F238E27FC236}">
-                <a16:creationId xmlns:a16="http://schemas.microsoft.com/office/drawing/2014/main" id="{CBC6DF93-1A0F-4C63-AFF8-4FD83F53D289}"/>
+                <a16:creationId xmlns:a16="http://schemas.microsoft.com/office/drawing/2014/main" id="{7638D53F-469F-4F00-8088-B0387B14B1CE}"/>
               </a:ext>
             </a:extLst>
           </p:cNvPr>
@@ -16654,7 +16373,7 @@
     </p:spTree>
     <p:extLst>
       <p:ext uri="{BB962C8B-B14F-4D97-AF65-F5344CB8AC3E}">
-        <p14:creationId xmlns:p14="http://schemas.microsoft.com/office/powerpoint/2010/main" val="2023191688"/>
+        <p14:creationId xmlns:p14="http://schemas.microsoft.com/office/powerpoint/2010/main" val="950365856"/>
       </p:ext>
     </p:extLst>
   </p:cSld>
@@ -16685,7 +16404,7 @@
           <p:cNvPr id="1" name="">
             <a:extLst xmlns:a="http://schemas.openxmlformats.org/drawingml/2006/main">
               <a:ext uri="{FF2B5EF4-FFF2-40B4-BE49-F238E27FC236}">
-                <a16:creationId xmlns:a16="http://schemas.microsoft.com/office/drawing/2014/main" id="{F404D8B8-5084-46FA-82B6-5202F975D0D4}"/>
+                <a16:creationId xmlns:a16="http://schemas.microsoft.com/office/drawing/2014/main" id="{5E7D97E1-7534-416A-BD4F-C01467B2AD48}"/>
               </a:ext>
             </a:extLst>
           </p:cNvPr>
@@ -16715,7 +16434,7 @@
           <p:cNvPr id="2" name="">
             <a:extLst xmlns:a="http://schemas.openxmlformats.org/drawingml/2006/main">
               <a:ext uri="{FF2B5EF4-FFF2-40B4-BE49-F238E27FC236}">
-                <a16:creationId xmlns:a16="http://schemas.microsoft.com/office/drawing/2014/main" id="{99C26D3B-AB08-4F69-AAB8-954F80B1CD57}"/>
+                <a16:creationId xmlns:a16="http://schemas.microsoft.com/office/drawing/2014/main" id="{69567711-0874-4D75-A08B-A1BD9176D497}"/>
               </a:ext>
             </a:extLst>
           </p:cNvPr>
@@ -16745,7 +16464,7 @@
           <p:cNvPr id="3" name="">
             <a:extLst xmlns:a="http://schemas.openxmlformats.org/drawingml/2006/main">
               <a:ext uri="{FF2B5EF4-FFF2-40B4-BE49-F238E27FC236}">
-                <a16:creationId xmlns:a16="http://schemas.microsoft.com/office/drawing/2014/main" id="{484A7A09-DE7C-46B1-A8FF-22C33802F343}"/>
+                <a16:creationId xmlns:a16="http://schemas.microsoft.com/office/drawing/2014/main" id="{483F4839-B186-45E6-A6C7-32A8B7301863}"/>
               </a:ext>
             </a:extLst>
           </p:cNvPr>
@@ -16801,7 +16520,7 @@
           <p:cNvPr id="4" name="">
             <a:extLst xmlns:a="http://schemas.openxmlformats.org/drawingml/2006/main">
               <a:ext uri="{FF2B5EF4-FFF2-40B4-BE49-F238E27FC236}">
-                <a16:creationId xmlns:a16="http://schemas.microsoft.com/office/drawing/2014/main" id="{74D3DE2D-DC41-4A11-8264-63F220CAF280}"/>
+                <a16:creationId xmlns:a16="http://schemas.microsoft.com/office/drawing/2014/main" id="{6513E84C-2F42-4FA0-9010-6FF606272B68}"/>
               </a:ext>
             </a:extLst>
           </p:cNvPr>
@@ -16824,7 +16543,7 @@
         </p:spPr>
         <p:txBody>
           <a:bodyPr xmlns:a="http://schemas.openxmlformats.org/drawingml/2006/main" lIns="0" tIns="0" rIns="0" bIns="0" anchor="t">
-            <a:normAutofit fontScale="100000"/>
+            <a:normAutofit fontScale="96354"/>
           </a:bodyPr>
           <a:lstStyle xmlns:a="http://schemas.openxmlformats.org/drawingml/2006/main"/>
           <a:p xmlns:a="http://schemas.openxmlformats.org/drawingml/2006/main">
@@ -16847,7 +16566,7 @@
                 <a:ea typeface="PingFang SC"/>
                 <a:cs typeface="PingFang SC"/>
               </a:rPr>
-              <a:t>SMBIOS 验证从“人工多环境切换”沉淀为可追踪自动化流程</a:t>
+              <a:t>SMBIOS 验证从“人工多环境切换”沉淀为基于 opencode skills 的可追踪自动化流程</a:t>
             </a:r>
           </a:p>
         </p:txBody>
@@ -16857,7 +16576,7 @@
           <p:cNvPr id="5" name="">
             <a:extLst xmlns:a="http://schemas.openxmlformats.org/drawingml/2006/main">
               <a:ext uri="{FF2B5EF4-FFF2-40B4-BE49-F238E27FC236}">
-                <a16:creationId xmlns:a16="http://schemas.microsoft.com/office/drawing/2014/main" id="{1ADE990F-E7B0-46E5-8D41-837B400168F8}"/>
+                <a16:creationId xmlns:a16="http://schemas.microsoft.com/office/drawing/2014/main" id="{32C10AD6-0DFE-4E29-97BE-496B46AEE4E9}"/>
               </a:ext>
             </a:extLst>
           </p:cNvPr>
@@ -16887,7 +16606,7 @@
           <p:cNvPr id="6" name="">
             <a:extLst xmlns:a="http://schemas.openxmlformats.org/drawingml/2006/main">
               <a:ext uri="{FF2B5EF4-FFF2-40B4-BE49-F238E27FC236}">
-                <a16:creationId xmlns:a16="http://schemas.microsoft.com/office/drawing/2014/main" id="{555696CB-8C40-4DA3-852C-BE4D0D9C2EBB}"/>
+                <a16:creationId xmlns:a16="http://schemas.microsoft.com/office/drawing/2014/main" id="{D6EFBF0A-F708-46FF-BEA5-7E26493E92F0}"/>
               </a:ext>
             </a:extLst>
           </p:cNvPr>
@@ -16943,25 +16662,25 @@
           <p:cNvPr id="7" name="">
             <a:extLst xmlns:a="http://schemas.openxmlformats.org/drawingml/2006/main">
               <a:ext uri="{FF2B5EF4-FFF2-40B4-BE49-F238E27FC236}">
-                <a16:creationId xmlns:a16="http://schemas.microsoft.com/office/drawing/2014/main" id="{AEFF2E51-3C26-438A-AC82-642D59931539}"/>
-              </a:ext>
-            </a:extLst>
-          </p:cNvPr>
-          <p:cNvSpPr>
-            <a:spLocks xmlns:a="http://schemas.openxmlformats.org/drawingml/2006/main" noGrp="1"/>
-          </p:cNvSpPr>
-          <p:nvPr/>
-        </p:nvSpPr>
-        <p:spPr>
-          <a:xfrm xmlns:a="http://schemas.openxmlformats.org/drawingml/2006/main">
-            <a:off x="742950" y="2066925"/>
-            <a:ext cx="209550" cy="209550"/>
+                <a16:creationId xmlns:a16="http://schemas.microsoft.com/office/drawing/2014/main" id="{4C2DC00D-2978-481C-974B-AF3C0CCEA5BC}"/>
+              </a:ext>
+            </a:extLst>
+          </p:cNvPr>
+          <p:cNvSpPr>
+            <a:spLocks xmlns:a="http://schemas.openxmlformats.org/drawingml/2006/main" noGrp="1"/>
+          </p:cNvSpPr>
+          <p:nvPr/>
+        </p:nvSpPr>
+        <p:spPr>
+          <a:xfrm xmlns:a="http://schemas.openxmlformats.org/drawingml/2006/main">
+            <a:off x="685800" y="1943100"/>
+            <a:ext cx="66675" cy="228600"/>
           </a:xfrm>
           <a:prstGeom xmlns:a="http://schemas.openxmlformats.org/drawingml/2006/main" prst="rect">
             <a:avLst/>
           </a:prstGeom>
           <a:solidFill xmlns:a="http://schemas.openxmlformats.org/drawingml/2006/main">
-            <a:srgbClr val="145CFF"/>
+            <a:srgbClr val="5B6472"/>
           </a:solidFill>
           <a:ln xmlns:a="http://schemas.openxmlformats.org/drawingml/2006/main">
             <a:noFill/>
@@ -16973,19 +16692,19 @@
           <p:cNvPr id="8" name="">
             <a:extLst xmlns:a="http://schemas.openxmlformats.org/drawingml/2006/main">
               <a:ext uri="{FF2B5EF4-FFF2-40B4-BE49-F238E27FC236}">
-                <a16:creationId xmlns:a16="http://schemas.microsoft.com/office/drawing/2014/main" id="{26F7A66B-01CE-4FED-9028-218487E18128}"/>
-              </a:ext>
-            </a:extLst>
-          </p:cNvPr>
-          <p:cNvSpPr>
-            <a:spLocks xmlns:a="http://schemas.openxmlformats.org/drawingml/2006/main" noGrp="1"/>
-          </p:cNvSpPr>
-          <p:nvPr/>
-        </p:nvSpPr>
-        <p:spPr>
-          <a:xfrm xmlns:a="http://schemas.openxmlformats.org/drawingml/2006/main">
-            <a:off x="742950" y="2095500"/>
-            <a:ext cx="209550" cy="152400"/>
+                <a16:creationId xmlns:a16="http://schemas.microsoft.com/office/drawing/2014/main" id="{81A44F65-531A-4E68-AA0C-A01B726EA9EC}"/>
+              </a:ext>
+            </a:extLst>
+          </p:cNvPr>
+          <p:cNvSpPr>
+            <a:spLocks xmlns:a="http://schemas.openxmlformats.org/drawingml/2006/main" noGrp="1"/>
+          </p:cNvSpPr>
+          <p:nvPr/>
+        </p:nvSpPr>
+        <p:spPr>
+          <a:xfrm xmlns:a="http://schemas.openxmlformats.org/drawingml/2006/main">
+            <a:off x="819150" y="1952625"/>
+            <a:ext cx="2476500" cy="228600"/>
           </a:xfrm>
           <a:prstGeom xmlns:a="http://schemas.openxmlformats.org/drawingml/2006/main" prst="rect">
             <a:avLst/>
@@ -17000,26 +16719,26 @@
           </a:bodyPr>
           <a:lstStyle xmlns:a="http://schemas.openxmlformats.org/drawingml/2006/main"/>
           <a:p xmlns:a="http://schemas.openxmlformats.org/drawingml/2006/main">
-            <a:pPr algn="ctr">
-              <a:defRPr sz="900" b="1">
-                <a:solidFill>
-                  <a:srgbClr val="FFFFFF"/>
-                </a:solidFill>
-                <a:latin typeface="Menlo"/>
-                <a:ea typeface="Menlo"/>
-                <a:cs typeface="Menlo"/>
-              </a:defRPr>
-            </a:pPr>
-            <a:r>
-              <a:rPr sz="900" b="1">
-                <a:solidFill>
-                  <a:srgbClr val="FFFFFF"/>
-                </a:solidFill>
-                <a:latin typeface="Menlo"/>
-                <a:ea typeface="Menlo"/>
-                <a:cs typeface="Menlo"/>
-              </a:rPr>
-              <a:t>1</a:t>
+            <a:pPr algn="l">
+              <a:defRPr sz="1275" b="1">
+                <a:solidFill>
+                  <a:srgbClr val="111827"/>
+                </a:solidFill>
+                <a:latin typeface="PingFang SC"/>
+                <a:ea typeface="PingFang SC"/>
+                <a:cs typeface="PingFang SC"/>
+              </a:defRPr>
+            </a:pPr>
+            <a:r>
+              <a:rPr sz="1275" b="1">
+                <a:solidFill>
+                  <a:srgbClr val="111827"/>
+                </a:solidFill>
+                <a:latin typeface="PingFang SC"/>
+                <a:ea typeface="PingFang SC"/>
+                <a:cs typeface="PingFang SC"/>
+              </a:rPr>
+              <a:t>旧方式</a:t>
             </a:r>
           </a:p>
         </p:txBody>
@@ -17029,939 +16748,23 @@
           <p:cNvPr id="9" name="">
             <a:extLst xmlns:a="http://schemas.openxmlformats.org/drawingml/2006/main">
               <a:ext uri="{FF2B5EF4-FFF2-40B4-BE49-F238E27FC236}">
-                <a16:creationId xmlns:a16="http://schemas.microsoft.com/office/drawing/2014/main" id="{7D1AD913-E8A1-4BB6-B4A6-44F3904210C8}"/>
-              </a:ext>
-            </a:extLst>
-          </p:cNvPr>
-          <p:cNvSpPr>
-            <a:spLocks xmlns:a="http://schemas.openxmlformats.org/drawingml/2006/main" noGrp="1"/>
-          </p:cNvSpPr>
-          <p:nvPr/>
-        </p:nvSpPr>
-        <p:spPr>
-          <a:xfrm xmlns:a="http://schemas.openxmlformats.org/drawingml/2006/main">
-            <a:off x="1162050" y="2038350"/>
-            <a:ext cx="2286000" cy="266700"/>
-          </a:xfrm>
-          <a:prstGeom xmlns:a="http://schemas.openxmlformats.org/drawingml/2006/main" prst="rect">
-            <a:avLst/>
-          </a:prstGeom>
-          <a:ln xmlns:a="http://schemas.openxmlformats.org/drawingml/2006/main">
-            <a:noFill/>
-          </a:ln>
-        </p:spPr>
-        <p:txBody>
-          <a:bodyPr xmlns:a="http://schemas.openxmlformats.org/drawingml/2006/main" lIns="0" tIns="0" rIns="0" bIns="0" anchor="t">
-            <a:normAutofit fontScale="100000"/>
-          </a:bodyPr>
-          <a:lstStyle xmlns:a="http://schemas.openxmlformats.org/drawingml/2006/main"/>
-          <a:p xmlns:a="http://schemas.openxmlformats.org/drawingml/2006/main">
-            <a:pPr algn="l">
-              <a:defRPr sz="1500" b="1">
-                <a:solidFill>
-                  <a:srgbClr val="111827"/>
-                </a:solidFill>
-                <a:latin typeface="PingFang SC"/>
-                <a:ea typeface="PingFang SC"/>
-                <a:cs typeface="PingFang SC"/>
-              </a:defRPr>
-            </a:pPr>
-            <a:r>
-              <a:rPr sz="1500" b="1">
-                <a:solidFill>
-                  <a:srgbClr val="111827"/>
-                </a:solidFill>
-                <a:latin typeface="PingFang SC"/>
-                <a:ea typeface="PingFang SC"/>
-                <a:cs typeface="PingFang SC"/>
-              </a:rPr>
-              <a:t>BIOS 上传</a:t>
-            </a:r>
-          </a:p>
-        </p:txBody>
-      </p:sp>
-      <p:sp>
-        <p:nvSpPr>
-          <p:cNvPr id="10" name="">
-            <a:extLst xmlns:a="http://schemas.openxmlformats.org/drawingml/2006/main">
-              <a:ext uri="{FF2B5EF4-FFF2-40B4-BE49-F238E27FC236}">
-                <a16:creationId xmlns:a16="http://schemas.microsoft.com/office/drawing/2014/main" id="{D33DC514-F898-46D1-9A1C-865060758C84}"/>
-              </a:ext>
-            </a:extLst>
-          </p:cNvPr>
-          <p:cNvSpPr>
-            <a:spLocks xmlns:a="http://schemas.openxmlformats.org/drawingml/2006/main" noGrp="1"/>
-          </p:cNvSpPr>
-          <p:nvPr/>
-        </p:nvSpPr>
-        <p:spPr>
-          <a:xfrm xmlns:a="http://schemas.openxmlformats.org/drawingml/2006/main">
-            <a:off x="847725" y="2314575"/>
-            <a:ext cx="9525" cy="266700"/>
-          </a:xfrm>
-          <a:prstGeom xmlns:a="http://schemas.openxmlformats.org/drawingml/2006/main" prst="rect">
-            <a:avLst/>
-          </a:prstGeom>
-          <a:solidFill xmlns:a="http://schemas.openxmlformats.org/drawingml/2006/main">
-            <a:srgbClr val="E6EBF2"/>
-          </a:solidFill>
-          <a:ln xmlns:a="http://schemas.openxmlformats.org/drawingml/2006/main">
-            <a:noFill/>
-          </a:ln>
-        </p:spPr>
-      </p:sp>
-      <p:sp>
-        <p:nvSpPr>
-          <p:cNvPr id="11" name="">
-            <a:extLst xmlns:a="http://schemas.openxmlformats.org/drawingml/2006/main">
-              <a:ext uri="{FF2B5EF4-FFF2-40B4-BE49-F238E27FC236}">
-                <a16:creationId xmlns:a16="http://schemas.microsoft.com/office/drawing/2014/main" id="{3C0F49DD-54F5-4CCA-B9DD-DCFD854893C0}"/>
-              </a:ext>
-            </a:extLst>
-          </p:cNvPr>
-          <p:cNvSpPr>
-            <a:spLocks xmlns:a="http://schemas.openxmlformats.org/drawingml/2006/main" noGrp="1"/>
-          </p:cNvSpPr>
-          <p:nvPr/>
-        </p:nvSpPr>
-        <p:spPr>
-          <a:xfrm xmlns:a="http://schemas.openxmlformats.org/drawingml/2006/main">
-            <a:off x="742950" y="2657475"/>
-            <a:ext cx="209550" cy="209550"/>
-          </a:xfrm>
-          <a:prstGeom xmlns:a="http://schemas.openxmlformats.org/drawingml/2006/main" prst="rect">
-            <a:avLst/>
-          </a:prstGeom>
-          <a:solidFill xmlns:a="http://schemas.openxmlformats.org/drawingml/2006/main">
-            <a:srgbClr val="145CFF"/>
-          </a:solidFill>
-          <a:ln xmlns:a="http://schemas.openxmlformats.org/drawingml/2006/main">
-            <a:noFill/>
-          </a:ln>
-        </p:spPr>
-      </p:sp>
-      <p:sp>
-        <p:nvSpPr>
-          <p:cNvPr id="12" name="">
-            <a:extLst xmlns:a="http://schemas.openxmlformats.org/drawingml/2006/main">
-              <a:ext uri="{FF2B5EF4-FFF2-40B4-BE49-F238E27FC236}">
-                <a16:creationId xmlns:a16="http://schemas.microsoft.com/office/drawing/2014/main" id="{29889D17-8B41-4EAC-88E3-4C3A4B48D4B5}"/>
-              </a:ext>
-            </a:extLst>
-          </p:cNvPr>
-          <p:cNvSpPr>
-            <a:spLocks xmlns:a="http://schemas.openxmlformats.org/drawingml/2006/main" noGrp="1"/>
-          </p:cNvSpPr>
-          <p:nvPr/>
-        </p:nvSpPr>
-        <p:spPr>
-          <a:xfrm xmlns:a="http://schemas.openxmlformats.org/drawingml/2006/main">
-            <a:off x="742950" y="2686050"/>
-            <a:ext cx="209550" cy="152400"/>
-          </a:xfrm>
-          <a:prstGeom xmlns:a="http://schemas.openxmlformats.org/drawingml/2006/main" prst="rect">
-            <a:avLst/>
-          </a:prstGeom>
-          <a:ln xmlns:a="http://schemas.openxmlformats.org/drawingml/2006/main">
-            <a:noFill/>
-          </a:ln>
-        </p:spPr>
-        <p:txBody>
-          <a:bodyPr xmlns:a="http://schemas.openxmlformats.org/drawingml/2006/main" lIns="0" tIns="0" rIns="0" bIns="0" anchor="t">
-            <a:normAutofit fontScale="100000"/>
-          </a:bodyPr>
-          <a:lstStyle xmlns:a="http://schemas.openxmlformats.org/drawingml/2006/main"/>
-          <a:p xmlns:a="http://schemas.openxmlformats.org/drawingml/2006/main">
-            <a:pPr algn="ctr">
-              <a:defRPr sz="900" b="1">
-                <a:solidFill>
-                  <a:srgbClr val="FFFFFF"/>
-                </a:solidFill>
-                <a:latin typeface="Menlo"/>
-                <a:ea typeface="Menlo"/>
-                <a:cs typeface="Menlo"/>
-              </a:defRPr>
-            </a:pPr>
-            <a:r>
-              <a:rPr sz="900" b="1">
-                <a:solidFill>
-                  <a:srgbClr val="FFFFFF"/>
-                </a:solidFill>
-                <a:latin typeface="Menlo"/>
-                <a:ea typeface="Menlo"/>
-                <a:cs typeface="Menlo"/>
-              </a:rPr>
-              <a:t>2</a:t>
-            </a:r>
-          </a:p>
-        </p:txBody>
-      </p:sp>
-      <p:sp>
-        <p:nvSpPr>
-          <p:cNvPr id="13" name="">
-            <a:extLst xmlns:a="http://schemas.openxmlformats.org/drawingml/2006/main">
-              <a:ext uri="{FF2B5EF4-FFF2-40B4-BE49-F238E27FC236}">
-                <a16:creationId xmlns:a16="http://schemas.microsoft.com/office/drawing/2014/main" id="{73AE75E5-AD97-4908-98F2-C79BBD56A705}"/>
-              </a:ext>
-            </a:extLst>
-          </p:cNvPr>
-          <p:cNvSpPr>
-            <a:spLocks xmlns:a="http://schemas.openxmlformats.org/drawingml/2006/main" noGrp="1"/>
-          </p:cNvSpPr>
-          <p:nvPr/>
-        </p:nvSpPr>
-        <p:spPr>
-          <a:xfrm xmlns:a="http://schemas.openxmlformats.org/drawingml/2006/main">
-            <a:off x="1162050" y="2628900"/>
-            <a:ext cx="2286000" cy="266700"/>
-          </a:xfrm>
-          <a:prstGeom xmlns:a="http://schemas.openxmlformats.org/drawingml/2006/main" prst="rect">
-            <a:avLst/>
-          </a:prstGeom>
-          <a:ln xmlns:a="http://schemas.openxmlformats.org/drawingml/2006/main">
-            <a:noFill/>
-          </a:ln>
-        </p:spPr>
-        <p:txBody>
-          <a:bodyPr xmlns:a="http://schemas.openxmlformats.org/drawingml/2006/main" lIns="0" tIns="0" rIns="0" bIns="0" anchor="t">
-            <a:normAutofit fontScale="100000"/>
-          </a:bodyPr>
-          <a:lstStyle xmlns:a="http://schemas.openxmlformats.org/drawingml/2006/main"/>
-          <a:p xmlns:a="http://schemas.openxmlformats.org/drawingml/2006/main">
-            <a:pPr algn="l">
-              <a:defRPr sz="1500" b="1">
-                <a:solidFill>
-                  <a:srgbClr val="111827"/>
-                </a:solidFill>
-                <a:latin typeface="PingFang SC"/>
-                <a:ea typeface="PingFang SC"/>
-                <a:cs typeface="PingFang SC"/>
-              </a:defRPr>
-            </a:pPr>
-            <a:r>
-              <a:rPr sz="1500" b="1">
-                <a:solidFill>
-                  <a:srgbClr val="111827"/>
-                </a:solidFill>
-                <a:latin typeface="PingFang SC"/>
-                <a:ea typeface="PingFang SC"/>
-                <a:cs typeface="PingFang SC"/>
-              </a:rPr>
-              <a:t>SHA256 校验</a:t>
-            </a:r>
-          </a:p>
-        </p:txBody>
-      </p:sp>
-      <p:sp>
-        <p:nvSpPr>
-          <p:cNvPr id="14" name="">
-            <a:extLst xmlns:a="http://schemas.openxmlformats.org/drawingml/2006/main">
-              <a:ext uri="{FF2B5EF4-FFF2-40B4-BE49-F238E27FC236}">
-                <a16:creationId xmlns:a16="http://schemas.microsoft.com/office/drawing/2014/main" id="{AE57007D-4C46-4F2A-A94E-AF522D7C0E4F}"/>
-              </a:ext>
-            </a:extLst>
-          </p:cNvPr>
-          <p:cNvSpPr>
-            <a:spLocks xmlns:a="http://schemas.openxmlformats.org/drawingml/2006/main" noGrp="1"/>
-          </p:cNvSpPr>
-          <p:nvPr/>
-        </p:nvSpPr>
-        <p:spPr>
-          <a:xfrm xmlns:a="http://schemas.openxmlformats.org/drawingml/2006/main">
-            <a:off x="847725" y="2905125"/>
-            <a:ext cx="9525" cy="266700"/>
-          </a:xfrm>
-          <a:prstGeom xmlns:a="http://schemas.openxmlformats.org/drawingml/2006/main" prst="rect">
-            <a:avLst/>
-          </a:prstGeom>
-          <a:solidFill xmlns:a="http://schemas.openxmlformats.org/drawingml/2006/main">
-            <a:srgbClr val="E6EBF2"/>
-          </a:solidFill>
-          <a:ln xmlns:a="http://schemas.openxmlformats.org/drawingml/2006/main">
-            <a:noFill/>
-          </a:ln>
-        </p:spPr>
-      </p:sp>
-      <p:sp>
-        <p:nvSpPr>
-          <p:cNvPr id="15" name="">
-            <a:extLst xmlns:a="http://schemas.openxmlformats.org/drawingml/2006/main">
-              <a:ext uri="{FF2B5EF4-FFF2-40B4-BE49-F238E27FC236}">
-                <a16:creationId xmlns:a16="http://schemas.microsoft.com/office/drawing/2014/main" id="{C61FD799-7821-4EFC-AE44-E7DC4023A5D6}"/>
-              </a:ext>
-            </a:extLst>
-          </p:cNvPr>
-          <p:cNvSpPr>
-            <a:spLocks xmlns:a="http://schemas.openxmlformats.org/drawingml/2006/main" noGrp="1"/>
-          </p:cNvSpPr>
-          <p:nvPr/>
-        </p:nvSpPr>
-        <p:spPr>
-          <a:xfrm xmlns:a="http://schemas.openxmlformats.org/drawingml/2006/main">
-            <a:off x="742950" y="3248025"/>
-            <a:ext cx="209550" cy="209550"/>
-          </a:xfrm>
-          <a:prstGeom xmlns:a="http://schemas.openxmlformats.org/drawingml/2006/main" prst="rect">
-            <a:avLst/>
-          </a:prstGeom>
-          <a:solidFill xmlns:a="http://schemas.openxmlformats.org/drawingml/2006/main">
-            <a:srgbClr val="145CFF"/>
-          </a:solidFill>
-          <a:ln xmlns:a="http://schemas.openxmlformats.org/drawingml/2006/main">
-            <a:noFill/>
-          </a:ln>
-        </p:spPr>
-      </p:sp>
-      <p:sp>
-        <p:nvSpPr>
-          <p:cNvPr id="16" name="">
-            <a:extLst xmlns:a="http://schemas.openxmlformats.org/drawingml/2006/main">
-              <a:ext uri="{FF2B5EF4-FFF2-40B4-BE49-F238E27FC236}">
-                <a16:creationId xmlns:a16="http://schemas.microsoft.com/office/drawing/2014/main" id="{755B2DEF-F72B-4883-8DB1-7B0A7978E2C0}"/>
-              </a:ext>
-            </a:extLst>
-          </p:cNvPr>
-          <p:cNvSpPr>
-            <a:spLocks xmlns:a="http://schemas.openxmlformats.org/drawingml/2006/main" noGrp="1"/>
-          </p:cNvSpPr>
-          <p:nvPr/>
-        </p:nvSpPr>
-        <p:spPr>
-          <a:xfrm xmlns:a="http://schemas.openxmlformats.org/drawingml/2006/main">
-            <a:off x="742950" y="3276600"/>
-            <a:ext cx="209550" cy="152400"/>
-          </a:xfrm>
-          <a:prstGeom xmlns:a="http://schemas.openxmlformats.org/drawingml/2006/main" prst="rect">
-            <a:avLst/>
-          </a:prstGeom>
-          <a:ln xmlns:a="http://schemas.openxmlformats.org/drawingml/2006/main">
-            <a:noFill/>
-          </a:ln>
-        </p:spPr>
-        <p:txBody>
-          <a:bodyPr xmlns:a="http://schemas.openxmlformats.org/drawingml/2006/main" lIns="0" tIns="0" rIns="0" bIns="0" anchor="t">
-            <a:normAutofit fontScale="100000"/>
-          </a:bodyPr>
-          <a:lstStyle xmlns:a="http://schemas.openxmlformats.org/drawingml/2006/main"/>
-          <a:p xmlns:a="http://schemas.openxmlformats.org/drawingml/2006/main">
-            <a:pPr algn="ctr">
-              <a:defRPr sz="900" b="1">
-                <a:solidFill>
-                  <a:srgbClr val="FFFFFF"/>
-                </a:solidFill>
-                <a:latin typeface="Menlo"/>
-                <a:ea typeface="Menlo"/>
-                <a:cs typeface="Menlo"/>
-              </a:defRPr>
-            </a:pPr>
-            <a:r>
-              <a:rPr sz="900" b="1">
-                <a:solidFill>
-                  <a:srgbClr val="FFFFFF"/>
-                </a:solidFill>
-                <a:latin typeface="Menlo"/>
-                <a:ea typeface="Menlo"/>
-                <a:cs typeface="Menlo"/>
-              </a:rPr>
-              <a:t>3</a:t>
-            </a:r>
-          </a:p>
-        </p:txBody>
-      </p:sp>
-      <p:sp>
-        <p:nvSpPr>
-          <p:cNvPr id="17" name="">
-            <a:extLst xmlns:a="http://schemas.openxmlformats.org/drawingml/2006/main">
-              <a:ext uri="{FF2B5EF4-FFF2-40B4-BE49-F238E27FC236}">
-                <a16:creationId xmlns:a16="http://schemas.microsoft.com/office/drawing/2014/main" id="{9F09C0C5-6B08-46F8-A0D5-EF7D6C68015B}"/>
-              </a:ext>
-            </a:extLst>
-          </p:cNvPr>
-          <p:cNvSpPr>
-            <a:spLocks xmlns:a="http://schemas.openxmlformats.org/drawingml/2006/main" noGrp="1"/>
-          </p:cNvSpPr>
-          <p:nvPr/>
-        </p:nvSpPr>
-        <p:spPr>
-          <a:xfrm xmlns:a="http://schemas.openxmlformats.org/drawingml/2006/main">
-            <a:off x="1162050" y="3219450"/>
-            <a:ext cx="2286000" cy="266700"/>
-          </a:xfrm>
-          <a:prstGeom xmlns:a="http://schemas.openxmlformats.org/drawingml/2006/main" prst="rect">
-            <a:avLst/>
-          </a:prstGeom>
-          <a:ln xmlns:a="http://schemas.openxmlformats.org/drawingml/2006/main">
-            <a:noFill/>
-          </a:ln>
-        </p:spPr>
-        <p:txBody>
-          <a:bodyPr xmlns:a="http://schemas.openxmlformats.org/drawingml/2006/main" lIns="0" tIns="0" rIns="0" bIns="0" anchor="t">
-            <a:normAutofit fontScale="100000"/>
-          </a:bodyPr>
-          <a:lstStyle xmlns:a="http://schemas.openxmlformats.org/drawingml/2006/main"/>
-          <a:p xmlns:a="http://schemas.openxmlformats.org/drawingml/2006/main">
-            <a:pPr algn="l">
-              <a:defRPr sz="1500" b="1">
-                <a:solidFill>
-                  <a:srgbClr val="111827"/>
-                </a:solidFill>
-                <a:latin typeface="PingFang SC"/>
-                <a:ea typeface="PingFang SC"/>
-                <a:cs typeface="PingFang SC"/>
-              </a:defRPr>
-            </a:pPr>
-            <a:r>
-              <a:rPr sz="1500" b="1">
-                <a:solidFill>
-                  <a:srgbClr val="111827"/>
-                </a:solidFill>
-                <a:latin typeface="PingFang SC"/>
-                <a:ea typeface="PingFang SC"/>
-                <a:cs typeface="PingFang SC"/>
-              </a:rPr>
-              <a:t>远程刷写</a:t>
-            </a:r>
-          </a:p>
-        </p:txBody>
-      </p:sp>
-      <p:sp>
-        <p:nvSpPr>
-          <p:cNvPr id="18" name="">
-            <a:extLst xmlns:a="http://schemas.openxmlformats.org/drawingml/2006/main">
-              <a:ext uri="{FF2B5EF4-FFF2-40B4-BE49-F238E27FC236}">
-                <a16:creationId xmlns:a16="http://schemas.microsoft.com/office/drawing/2014/main" id="{E78671F1-6306-4462-B6DA-FE38260F9387}"/>
-              </a:ext>
-            </a:extLst>
-          </p:cNvPr>
-          <p:cNvSpPr>
-            <a:spLocks xmlns:a="http://schemas.openxmlformats.org/drawingml/2006/main" noGrp="1"/>
-          </p:cNvSpPr>
-          <p:nvPr/>
-        </p:nvSpPr>
-        <p:spPr>
-          <a:xfrm xmlns:a="http://schemas.openxmlformats.org/drawingml/2006/main">
-            <a:off x="847725" y="3495675"/>
-            <a:ext cx="9525" cy="266700"/>
-          </a:xfrm>
-          <a:prstGeom xmlns:a="http://schemas.openxmlformats.org/drawingml/2006/main" prst="rect">
-            <a:avLst/>
-          </a:prstGeom>
-          <a:solidFill xmlns:a="http://schemas.openxmlformats.org/drawingml/2006/main">
-            <a:srgbClr val="E6EBF2"/>
-          </a:solidFill>
-          <a:ln xmlns:a="http://schemas.openxmlformats.org/drawingml/2006/main">
-            <a:noFill/>
-          </a:ln>
-        </p:spPr>
-      </p:sp>
-      <p:sp>
-        <p:nvSpPr>
-          <p:cNvPr id="19" name="">
-            <a:extLst xmlns:a="http://schemas.openxmlformats.org/drawingml/2006/main">
-              <a:ext uri="{FF2B5EF4-FFF2-40B4-BE49-F238E27FC236}">
-                <a16:creationId xmlns:a16="http://schemas.microsoft.com/office/drawing/2014/main" id="{C8E7C577-DAB5-44D4-B835-9928F80108BE}"/>
-              </a:ext>
-            </a:extLst>
-          </p:cNvPr>
-          <p:cNvSpPr>
-            <a:spLocks xmlns:a="http://schemas.openxmlformats.org/drawingml/2006/main" noGrp="1"/>
-          </p:cNvSpPr>
-          <p:nvPr/>
-        </p:nvSpPr>
-        <p:spPr>
-          <a:xfrm xmlns:a="http://schemas.openxmlformats.org/drawingml/2006/main">
-            <a:off x="742950" y="3838575"/>
-            <a:ext cx="209550" cy="209550"/>
-          </a:xfrm>
-          <a:prstGeom xmlns:a="http://schemas.openxmlformats.org/drawingml/2006/main" prst="rect">
-            <a:avLst/>
-          </a:prstGeom>
-          <a:solidFill xmlns:a="http://schemas.openxmlformats.org/drawingml/2006/main">
-            <a:srgbClr val="F59F00"/>
-          </a:solidFill>
-          <a:ln xmlns:a="http://schemas.openxmlformats.org/drawingml/2006/main">
-            <a:noFill/>
-          </a:ln>
-        </p:spPr>
-      </p:sp>
-      <p:sp>
-        <p:nvSpPr>
-          <p:cNvPr id="20" name="">
-            <a:extLst xmlns:a="http://schemas.openxmlformats.org/drawingml/2006/main">
-              <a:ext uri="{FF2B5EF4-FFF2-40B4-BE49-F238E27FC236}">
-                <a16:creationId xmlns:a16="http://schemas.microsoft.com/office/drawing/2014/main" id="{F8CC7FA9-79A5-443A-B8E3-7D67B47FD4AD}"/>
-              </a:ext>
-            </a:extLst>
-          </p:cNvPr>
-          <p:cNvSpPr>
-            <a:spLocks xmlns:a="http://schemas.openxmlformats.org/drawingml/2006/main" noGrp="1"/>
-          </p:cNvSpPr>
-          <p:nvPr/>
-        </p:nvSpPr>
-        <p:spPr>
-          <a:xfrm xmlns:a="http://schemas.openxmlformats.org/drawingml/2006/main">
-            <a:off x="742950" y="3867150"/>
-            <a:ext cx="209550" cy="152400"/>
-          </a:xfrm>
-          <a:prstGeom xmlns:a="http://schemas.openxmlformats.org/drawingml/2006/main" prst="rect">
-            <a:avLst/>
-          </a:prstGeom>
-          <a:ln xmlns:a="http://schemas.openxmlformats.org/drawingml/2006/main">
-            <a:noFill/>
-          </a:ln>
-        </p:spPr>
-        <p:txBody>
-          <a:bodyPr xmlns:a="http://schemas.openxmlformats.org/drawingml/2006/main" lIns="0" tIns="0" rIns="0" bIns="0" anchor="t">
-            <a:normAutofit fontScale="100000"/>
-          </a:bodyPr>
-          <a:lstStyle xmlns:a="http://schemas.openxmlformats.org/drawingml/2006/main"/>
-          <a:p xmlns:a="http://schemas.openxmlformats.org/drawingml/2006/main">
-            <a:pPr algn="ctr">
-              <a:defRPr sz="900" b="1">
-                <a:solidFill>
-                  <a:srgbClr val="FFFFFF"/>
-                </a:solidFill>
-                <a:latin typeface="Menlo"/>
-                <a:ea typeface="Menlo"/>
-                <a:cs typeface="Menlo"/>
-              </a:defRPr>
-            </a:pPr>
-            <a:r>
-              <a:rPr sz="900" b="1">
-                <a:solidFill>
-                  <a:srgbClr val="FFFFFF"/>
-                </a:solidFill>
-                <a:latin typeface="Menlo"/>
-                <a:ea typeface="Menlo"/>
-                <a:cs typeface="Menlo"/>
-              </a:rPr>
-              <a:t>4</a:t>
-            </a:r>
-          </a:p>
-        </p:txBody>
-      </p:sp>
-      <p:sp>
-        <p:nvSpPr>
-          <p:cNvPr id="21" name="">
-            <a:extLst xmlns:a="http://schemas.openxmlformats.org/drawingml/2006/main">
-              <a:ext uri="{FF2B5EF4-FFF2-40B4-BE49-F238E27FC236}">
-                <a16:creationId xmlns:a16="http://schemas.microsoft.com/office/drawing/2014/main" id="{3B80494F-A28B-41BB-BE8A-DC640ABF3600}"/>
-              </a:ext>
-            </a:extLst>
-          </p:cNvPr>
-          <p:cNvSpPr>
-            <a:spLocks xmlns:a="http://schemas.openxmlformats.org/drawingml/2006/main" noGrp="1"/>
-          </p:cNvSpPr>
-          <p:nvPr/>
-        </p:nvSpPr>
-        <p:spPr>
-          <a:xfrm xmlns:a="http://schemas.openxmlformats.org/drawingml/2006/main">
-            <a:off x="1162050" y="3810000"/>
-            <a:ext cx="2286000" cy="266700"/>
-          </a:xfrm>
-          <a:prstGeom xmlns:a="http://schemas.openxmlformats.org/drawingml/2006/main" prst="rect">
-            <a:avLst/>
-          </a:prstGeom>
-          <a:ln xmlns:a="http://schemas.openxmlformats.org/drawingml/2006/main">
-            <a:noFill/>
-          </a:ln>
-        </p:spPr>
-        <p:txBody>
-          <a:bodyPr xmlns:a="http://schemas.openxmlformats.org/drawingml/2006/main" lIns="0" tIns="0" rIns="0" bIns="0" anchor="t">
-            <a:normAutofit fontScale="100000"/>
-          </a:bodyPr>
-          <a:lstStyle xmlns:a="http://schemas.openxmlformats.org/drawingml/2006/main"/>
-          <a:p xmlns:a="http://schemas.openxmlformats.org/drawingml/2006/main">
-            <a:pPr algn="l">
-              <a:defRPr sz="1500" b="1">
-                <a:solidFill>
-                  <a:srgbClr val="111827"/>
-                </a:solidFill>
-                <a:latin typeface="PingFang SC"/>
-                <a:ea typeface="PingFang SC"/>
-                <a:cs typeface="PingFang SC"/>
-              </a:defRPr>
-            </a:pPr>
-            <a:r>
-              <a:rPr sz="1500" b="1">
-                <a:solidFill>
-                  <a:srgbClr val="111827"/>
-                </a:solidFill>
-                <a:latin typeface="PingFang SC"/>
-                <a:ea typeface="PingFang SC"/>
-                <a:cs typeface="PingFang SC"/>
-              </a:rPr>
-              <a:t>人工确认</a:t>
-            </a:r>
-          </a:p>
-        </p:txBody>
-      </p:sp>
-      <p:sp>
-        <p:nvSpPr>
-          <p:cNvPr id="22" name="">
-            <a:extLst xmlns:a="http://schemas.openxmlformats.org/drawingml/2006/main">
-              <a:ext uri="{FF2B5EF4-FFF2-40B4-BE49-F238E27FC236}">
-                <a16:creationId xmlns:a16="http://schemas.microsoft.com/office/drawing/2014/main" id="{B751D2AA-E3B6-4FF3-AB78-EC7808F9634D}"/>
-              </a:ext>
-            </a:extLst>
-          </p:cNvPr>
-          <p:cNvSpPr>
-            <a:spLocks xmlns:a="http://schemas.openxmlformats.org/drawingml/2006/main" noGrp="1"/>
-          </p:cNvSpPr>
-          <p:nvPr/>
-        </p:nvSpPr>
-        <p:spPr>
-          <a:xfrm xmlns:a="http://schemas.openxmlformats.org/drawingml/2006/main">
-            <a:off x="847725" y="4086225"/>
-            <a:ext cx="9525" cy="266700"/>
-          </a:xfrm>
-          <a:prstGeom xmlns:a="http://schemas.openxmlformats.org/drawingml/2006/main" prst="rect">
-            <a:avLst/>
-          </a:prstGeom>
-          <a:solidFill xmlns:a="http://schemas.openxmlformats.org/drawingml/2006/main">
-            <a:srgbClr val="E6EBF2"/>
-          </a:solidFill>
-          <a:ln xmlns:a="http://schemas.openxmlformats.org/drawingml/2006/main">
-            <a:noFill/>
-          </a:ln>
-        </p:spPr>
-      </p:sp>
-      <p:sp>
-        <p:nvSpPr>
-          <p:cNvPr id="23" name="">
-            <a:extLst xmlns:a="http://schemas.openxmlformats.org/drawingml/2006/main">
-              <a:ext uri="{FF2B5EF4-FFF2-40B4-BE49-F238E27FC236}">
-                <a16:creationId xmlns:a16="http://schemas.microsoft.com/office/drawing/2014/main" id="{E7402FF2-51C8-4241-85FC-630F8B2ECB41}"/>
-              </a:ext>
-            </a:extLst>
-          </p:cNvPr>
-          <p:cNvSpPr>
-            <a:spLocks xmlns:a="http://schemas.openxmlformats.org/drawingml/2006/main" noGrp="1"/>
-          </p:cNvSpPr>
-          <p:nvPr/>
-        </p:nvSpPr>
-        <p:spPr>
-          <a:xfrm xmlns:a="http://schemas.openxmlformats.org/drawingml/2006/main">
-            <a:off x="742950" y="4429125"/>
-            <a:ext cx="209550" cy="209550"/>
-          </a:xfrm>
-          <a:prstGeom xmlns:a="http://schemas.openxmlformats.org/drawingml/2006/main" prst="rect">
-            <a:avLst/>
-          </a:prstGeom>
-          <a:solidFill xmlns:a="http://schemas.openxmlformats.org/drawingml/2006/main">
-            <a:srgbClr val="145CFF"/>
-          </a:solidFill>
-          <a:ln xmlns:a="http://schemas.openxmlformats.org/drawingml/2006/main">
-            <a:noFill/>
-          </a:ln>
-        </p:spPr>
-      </p:sp>
-      <p:sp>
-        <p:nvSpPr>
-          <p:cNvPr id="24" name="">
-            <a:extLst xmlns:a="http://schemas.openxmlformats.org/drawingml/2006/main">
-              <a:ext uri="{FF2B5EF4-FFF2-40B4-BE49-F238E27FC236}">
-                <a16:creationId xmlns:a16="http://schemas.microsoft.com/office/drawing/2014/main" id="{CF0017C5-8AD7-4D38-AF9B-C1CA468D95BD}"/>
-              </a:ext>
-            </a:extLst>
-          </p:cNvPr>
-          <p:cNvSpPr>
-            <a:spLocks xmlns:a="http://schemas.openxmlformats.org/drawingml/2006/main" noGrp="1"/>
-          </p:cNvSpPr>
-          <p:nvPr/>
-        </p:nvSpPr>
-        <p:spPr>
-          <a:xfrm xmlns:a="http://schemas.openxmlformats.org/drawingml/2006/main">
-            <a:off x="742950" y="4457700"/>
-            <a:ext cx="209550" cy="152400"/>
-          </a:xfrm>
-          <a:prstGeom xmlns:a="http://schemas.openxmlformats.org/drawingml/2006/main" prst="rect">
-            <a:avLst/>
-          </a:prstGeom>
-          <a:ln xmlns:a="http://schemas.openxmlformats.org/drawingml/2006/main">
-            <a:noFill/>
-          </a:ln>
-        </p:spPr>
-        <p:txBody>
-          <a:bodyPr xmlns:a="http://schemas.openxmlformats.org/drawingml/2006/main" lIns="0" tIns="0" rIns="0" bIns="0" anchor="t">
-            <a:normAutofit fontScale="100000"/>
-          </a:bodyPr>
-          <a:lstStyle xmlns:a="http://schemas.openxmlformats.org/drawingml/2006/main"/>
-          <a:p xmlns:a="http://schemas.openxmlformats.org/drawingml/2006/main">
-            <a:pPr algn="ctr">
-              <a:defRPr sz="900" b="1">
-                <a:solidFill>
-                  <a:srgbClr val="FFFFFF"/>
-                </a:solidFill>
-                <a:latin typeface="Menlo"/>
-                <a:ea typeface="Menlo"/>
-                <a:cs typeface="Menlo"/>
-              </a:defRPr>
-            </a:pPr>
-            <a:r>
-              <a:rPr sz="900" b="1">
-                <a:solidFill>
-                  <a:srgbClr val="FFFFFF"/>
-                </a:solidFill>
-                <a:latin typeface="Menlo"/>
-                <a:ea typeface="Menlo"/>
-                <a:cs typeface="Menlo"/>
-              </a:rPr>
-              <a:t>5</a:t>
-            </a:r>
-          </a:p>
-        </p:txBody>
-      </p:sp>
-      <p:sp>
-        <p:nvSpPr>
-          <p:cNvPr id="25" name="">
-            <a:extLst xmlns:a="http://schemas.openxmlformats.org/drawingml/2006/main">
-              <a:ext uri="{FF2B5EF4-FFF2-40B4-BE49-F238E27FC236}">
-                <a16:creationId xmlns:a16="http://schemas.microsoft.com/office/drawing/2014/main" id="{844A982C-C36E-41D9-B242-D8EA537BE343}"/>
-              </a:ext>
-            </a:extLst>
-          </p:cNvPr>
-          <p:cNvSpPr>
-            <a:spLocks xmlns:a="http://schemas.openxmlformats.org/drawingml/2006/main" noGrp="1"/>
-          </p:cNvSpPr>
-          <p:nvPr/>
-        </p:nvSpPr>
-        <p:spPr>
-          <a:xfrm xmlns:a="http://schemas.openxmlformats.org/drawingml/2006/main">
-            <a:off x="1162050" y="4400550"/>
-            <a:ext cx="2286000" cy="266700"/>
-          </a:xfrm>
-          <a:prstGeom xmlns:a="http://schemas.openxmlformats.org/drawingml/2006/main" prst="rect">
-            <a:avLst/>
-          </a:prstGeom>
-          <a:ln xmlns:a="http://schemas.openxmlformats.org/drawingml/2006/main">
-            <a:noFill/>
-          </a:ln>
-        </p:spPr>
-        <p:txBody>
-          <a:bodyPr xmlns:a="http://schemas.openxmlformats.org/drawingml/2006/main" lIns="0" tIns="0" rIns="0" bIns="0" anchor="t">
-            <a:normAutofit fontScale="100000"/>
-          </a:bodyPr>
-          <a:lstStyle xmlns:a="http://schemas.openxmlformats.org/drawingml/2006/main"/>
-          <a:p xmlns:a="http://schemas.openxmlformats.org/drawingml/2006/main">
-            <a:pPr algn="l">
-              <a:defRPr sz="1500" b="1">
-                <a:solidFill>
-                  <a:srgbClr val="111827"/>
-                </a:solidFill>
-                <a:latin typeface="PingFang SC"/>
-                <a:ea typeface="PingFang SC"/>
-                <a:cs typeface="PingFang SC"/>
-              </a:defRPr>
-            </a:pPr>
-            <a:r>
-              <a:rPr sz="1500" b="1">
-                <a:solidFill>
-                  <a:srgbClr val="111827"/>
-                </a:solidFill>
-                <a:latin typeface="PingFang SC"/>
-                <a:ea typeface="PingFang SC"/>
-                <a:cs typeface="PingFang SC"/>
-              </a:rPr>
-              <a:t>系统侧采集</a:t>
-            </a:r>
-          </a:p>
-        </p:txBody>
-      </p:sp>
-      <p:sp>
-        <p:nvSpPr>
-          <p:cNvPr id="26" name="">
-            <a:extLst xmlns:a="http://schemas.openxmlformats.org/drawingml/2006/main">
-              <a:ext uri="{FF2B5EF4-FFF2-40B4-BE49-F238E27FC236}">
-                <a16:creationId xmlns:a16="http://schemas.microsoft.com/office/drawing/2014/main" id="{ABA34EEE-845D-496D-A501-50F47B4D7A59}"/>
-              </a:ext>
-            </a:extLst>
-          </p:cNvPr>
-          <p:cNvSpPr>
-            <a:spLocks xmlns:a="http://schemas.openxmlformats.org/drawingml/2006/main" noGrp="1"/>
-          </p:cNvSpPr>
-          <p:nvPr/>
-        </p:nvSpPr>
-        <p:spPr>
-          <a:xfrm xmlns:a="http://schemas.openxmlformats.org/drawingml/2006/main">
-            <a:off x="847725" y="4676775"/>
-            <a:ext cx="9525" cy="266700"/>
-          </a:xfrm>
-          <a:prstGeom xmlns:a="http://schemas.openxmlformats.org/drawingml/2006/main" prst="rect">
-            <a:avLst/>
-          </a:prstGeom>
-          <a:solidFill xmlns:a="http://schemas.openxmlformats.org/drawingml/2006/main">
-            <a:srgbClr val="E6EBF2"/>
-          </a:solidFill>
-          <a:ln xmlns:a="http://schemas.openxmlformats.org/drawingml/2006/main">
-            <a:noFill/>
-          </a:ln>
-        </p:spPr>
-      </p:sp>
-      <p:sp>
-        <p:nvSpPr>
-          <p:cNvPr id="27" name="">
-            <a:extLst xmlns:a="http://schemas.openxmlformats.org/drawingml/2006/main">
-              <a:ext uri="{FF2B5EF4-FFF2-40B4-BE49-F238E27FC236}">
-                <a16:creationId xmlns:a16="http://schemas.microsoft.com/office/drawing/2014/main" id="{F56F4BDF-1E1C-4E34-91BF-C9DFDD87C2E7}"/>
-              </a:ext>
-            </a:extLst>
-          </p:cNvPr>
-          <p:cNvSpPr>
-            <a:spLocks xmlns:a="http://schemas.openxmlformats.org/drawingml/2006/main" noGrp="1"/>
-          </p:cNvSpPr>
-          <p:nvPr/>
-        </p:nvSpPr>
-        <p:spPr>
-          <a:xfrm xmlns:a="http://schemas.openxmlformats.org/drawingml/2006/main">
-            <a:off x="742950" y="5019675"/>
-            <a:ext cx="209550" cy="209550"/>
-          </a:xfrm>
-          <a:prstGeom xmlns:a="http://schemas.openxmlformats.org/drawingml/2006/main" prst="rect">
-            <a:avLst/>
-          </a:prstGeom>
-          <a:solidFill xmlns:a="http://schemas.openxmlformats.org/drawingml/2006/main">
-            <a:srgbClr val="145CFF"/>
-          </a:solidFill>
-          <a:ln xmlns:a="http://schemas.openxmlformats.org/drawingml/2006/main">
-            <a:noFill/>
-          </a:ln>
-        </p:spPr>
-      </p:sp>
-      <p:sp>
-        <p:nvSpPr>
-          <p:cNvPr id="28" name="">
-            <a:extLst xmlns:a="http://schemas.openxmlformats.org/drawingml/2006/main">
-              <a:ext uri="{FF2B5EF4-FFF2-40B4-BE49-F238E27FC236}">
-                <a16:creationId xmlns:a16="http://schemas.microsoft.com/office/drawing/2014/main" id="{4DFF6388-F979-41C9-9501-352FDF1D34D2}"/>
-              </a:ext>
-            </a:extLst>
-          </p:cNvPr>
-          <p:cNvSpPr>
-            <a:spLocks xmlns:a="http://schemas.openxmlformats.org/drawingml/2006/main" noGrp="1"/>
-          </p:cNvSpPr>
-          <p:nvPr/>
-        </p:nvSpPr>
-        <p:spPr>
-          <a:xfrm xmlns:a="http://schemas.openxmlformats.org/drawingml/2006/main">
-            <a:off x="742950" y="5048250"/>
-            <a:ext cx="209550" cy="152400"/>
-          </a:xfrm>
-          <a:prstGeom xmlns:a="http://schemas.openxmlformats.org/drawingml/2006/main" prst="rect">
-            <a:avLst/>
-          </a:prstGeom>
-          <a:ln xmlns:a="http://schemas.openxmlformats.org/drawingml/2006/main">
-            <a:noFill/>
-          </a:ln>
-        </p:spPr>
-        <p:txBody>
-          <a:bodyPr xmlns:a="http://schemas.openxmlformats.org/drawingml/2006/main" lIns="0" tIns="0" rIns="0" bIns="0" anchor="t">
-            <a:normAutofit fontScale="100000"/>
-          </a:bodyPr>
-          <a:lstStyle xmlns:a="http://schemas.openxmlformats.org/drawingml/2006/main"/>
-          <a:p xmlns:a="http://schemas.openxmlformats.org/drawingml/2006/main">
-            <a:pPr algn="ctr">
-              <a:defRPr sz="900" b="1">
-                <a:solidFill>
-                  <a:srgbClr val="FFFFFF"/>
-                </a:solidFill>
-                <a:latin typeface="Menlo"/>
-                <a:ea typeface="Menlo"/>
-                <a:cs typeface="Menlo"/>
-              </a:defRPr>
-            </a:pPr>
-            <a:r>
-              <a:rPr sz="900" b="1">
-                <a:solidFill>
-                  <a:srgbClr val="FFFFFF"/>
-                </a:solidFill>
-                <a:latin typeface="Menlo"/>
-                <a:ea typeface="Menlo"/>
-                <a:cs typeface="Menlo"/>
-              </a:rPr>
-              <a:t>6</a:t>
-            </a:r>
-          </a:p>
-        </p:txBody>
-      </p:sp>
-      <p:sp>
-        <p:nvSpPr>
-          <p:cNvPr id="29" name="">
-            <a:extLst xmlns:a="http://schemas.openxmlformats.org/drawingml/2006/main">
-              <a:ext uri="{FF2B5EF4-FFF2-40B4-BE49-F238E27FC236}">
-                <a16:creationId xmlns:a16="http://schemas.microsoft.com/office/drawing/2014/main" id="{D22B7A7A-E92D-400E-A7E1-FC60F36CA419}"/>
-              </a:ext>
-            </a:extLst>
-          </p:cNvPr>
-          <p:cNvSpPr>
-            <a:spLocks xmlns:a="http://schemas.openxmlformats.org/drawingml/2006/main" noGrp="1"/>
-          </p:cNvSpPr>
-          <p:nvPr/>
-        </p:nvSpPr>
-        <p:spPr>
-          <a:xfrm xmlns:a="http://schemas.openxmlformats.org/drawingml/2006/main">
-            <a:off x="1162050" y="4991100"/>
-            <a:ext cx="2286000" cy="266700"/>
-          </a:xfrm>
-          <a:prstGeom xmlns:a="http://schemas.openxmlformats.org/drawingml/2006/main" prst="rect">
-            <a:avLst/>
-          </a:prstGeom>
-          <a:ln xmlns:a="http://schemas.openxmlformats.org/drawingml/2006/main">
-            <a:noFill/>
-          </a:ln>
-        </p:spPr>
-        <p:txBody>
-          <a:bodyPr xmlns:a="http://schemas.openxmlformats.org/drawingml/2006/main" lIns="0" tIns="0" rIns="0" bIns="0" anchor="t">
-            <a:normAutofit fontScale="100000"/>
-          </a:bodyPr>
-          <a:lstStyle xmlns:a="http://schemas.openxmlformats.org/drawingml/2006/main"/>
-          <a:p xmlns:a="http://schemas.openxmlformats.org/drawingml/2006/main">
-            <a:pPr algn="l">
-              <a:defRPr sz="1500" b="1">
-                <a:solidFill>
-                  <a:srgbClr val="111827"/>
-                </a:solidFill>
-                <a:latin typeface="PingFang SC"/>
-                <a:ea typeface="PingFang SC"/>
-                <a:cs typeface="PingFang SC"/>
-              </a:defRPr>
-            </a:pPr>
-            <a:r>
-              <a:rPr sz="1500" b="1">
-                <a:solidFill>
-                  <a:srgbClr val="111827"/>
-                </a:solidFill>
-                <a:latin typeface="PingFang SC"/>
-                <a:ea typeface="PingFang SC"/>
-                <a:cs typeface="PingFang SC"/>
-              </a:rPr>
-              <a:t>报告生成</a:t>
-            </a:r>
-          </a:p>
-        </p:txBody>
-      </p:sp>
-      <p:sp>
-        <p:nvSpPr>
-          <p:cNvPr id="30" name="">
-            <a:extLst xmlns:a="http://schemas.openxmlformats.org/drawingml/2006/main">
-              <a:ext uri="{FF2B5EF4-FFF2-40B4-BE49-F238E27FC236}">
-                <a16:creationId xmlns:a16="http://schemas.microsoft.com/office/drawing/2014/main" id="{B9826E06-4D12-4AB6-A3AE-A336865450E2}"/>
-              </a:ext>
-            </a:extLst>
-          </p:cNvPr>
-          <p:cNvSpPr>
-            <a:spLocks xmlns:a="http://schemas.openxmlformats.org/drawingml/2006/main" noGrp="1"/>
-          </p:cNvSpPr>
-          <p:nvPr/>
-        </p:nvSpPr>
-        <p:spPr>
-          <a:xfrm xmlns:a="http://schemas.openxmlformats.org/drawingml/2006/main">
-            <a:off x="3695700" y="2038350"/>
-            <a:ext cx="2190750" cy="2381250"/>
+                <a16:creationId xmlns:a16="http://schemas.microsoft.com/office/drawing/2014/main" id="{A05A63E2-34F9-4376-8DA6-87EC822CD2BC}"/>
+              </a:ext>
+            </a:extLst>
+          </p:cNvPr>
+          <p:cNvSpPr>
+            <a:spLocks xmlns:a="http://schemas.openxmlformats.org/drawingml/2006/main" noGrp="1"/>
+          </p:cNvSpPr>
+          <p:nvPr/>
+        </p:nvSpPr>
+        <p:spPr>
+          <a:xfrm xmlns:a="http://schemas.openxmlformats.org/drawingml/2006/main">
+            <a:off x="685800" y="2324100"/>
+            <a:ext cx="2362200" cy="1295400"/>
           </a:xfrm>
           <a:prstGeom xmlns:a="http://schemas.openxmlformats.org/drawingml/2006/main" prst="roundRect">
             <a:avLst>
-              <a:gd name="adj" fmla="val 870"/>
+              <a:gd name="adj" fmla="val 1471"/>
             </a:avLst>
           </a:prstGeom>
           <a:solidFill xmlns:a="http://schemas.openxmlformats.org/drawingml/2006/main">
@@ -17976,22 +16779,22 @@
       </p:sp>
       <p:sp>
         <p:nvSpPr>
-          <p:cNvPr id="31" name="">
-            <a:extLst xmlns:a="http://schemas.openxmlformats.org/drawingml/2006/main">
-              <a:ext uri="{FF2B5EF4-FFF2-40B4-BE49-F238E27FC236}">
-                <a16:creationId xmlns:a16="http://schemas.microsoft.com/office/drawing/2014/main" id="{3F58AEA7-CFD0-4A53-BF6A-A7C6C15C3B1C}"/>
-              </a:ext>
-            </a:extLst>
-          </p:cNvPr>
-          <p:cNvSpPr>
-            <a:spLocks xmlns:a="http://schemas.openxmlformats.org/drawingml/2006/main" noGrp="1"/>
-          </p:cNvSpPr>
-          <p:nvPr/>
-        </p:nvSpPr>
-        <p:spPr>
-          <a:xfrm xmlns:a="http://schemas.openxmlformats.org/drawingml/2006/main">
-            <a:off x="3924300" y="2286000"/>
-            <a:ext cx="1524000" cy="266700"/>
+          <p:cNvPr id="10" name="">
+            <a:extLst xmlns:a="http://schemas.openxmlformats.org/drawingml/2006/main">
+              <a:ext uri="{FF2B5EF4-FFF2-40B4-BE49-F238E27FC236}">
+                <a16:creationId xmlns:a16="http://schemas.microsoft.com/office/drawing/2014/main" id="{AD24C03F-9DF5-433D-8A4C-7AD00318124D}"/>
+              </a:ext>
+            </a:extLst>
+          </p:cNvPr>
+          <p:cNvSpPr>
+            <a:spLocks xmlns:a="http://schemas.openxmlformats.org/drawingml/2006/main" noGrp="1"/>
+          </p:cNvSpPr>
+          <p:nvPr/>
+        </p:nvSpPr>
+        <p:spPr>
+          <a:xfrm xmlns:a="http://schemas.openxmlformats.org/drawingml/2006/main">
+            <a:off x="952500" y="2552700"/>
+            <a:ext cx="1714500" cy="228600"/>
           </a:xfrm>
           <a:prstGeom xmlns:a="http://schemas.openxmlformats.org/drawingml/2006/main" prst="rect">
             <a:avLst/>
@@ -18007,7 +16810,7 @@
           <a:lstStyle xmlns:a="http://schemas.openxmlformats.org/drawingml/2006/main"/>
           <a:p xmlns:a="http://schemas.openxmlformats.org/drawingml/2006/main">
             <a:pPr algn="l">
-              <a:defRPr sz="1650" b="1">
+              <a:defRPr sz="1425" b="1">
                 <a:solidFill>
                   <a:srgbClr val="111827"/>
                 </a:solidFill>
@@ -18017,7 +16820,7 @@
               </a:defRPr>
             </a:pPr>
             <a:r>
-              <a:rPr sz="1650" b="1">
+              <a:rPr sz="1425" b="1">
                 <a:solidFill>
                   <a:srgbClr val="111827"/>
                 </a:solidFill>
@@ -18025,29 +16828,85 @@
                 <a:ea typeface="PingFang SC"/>
                 <a:cs typeface="PingFang SC"/>
               </a:rPr>
-              <a:t>覆盖范围</a:t>
-            </a:r>
-          </a:p>
-        </p:txBody>
-      </p:sp>
-      <p:sp>
-        <p:nvSpPr>
-          <p:cNvPr id="32" name="">
-            <a:extLst xmlns:a="http://schemas.openxmlformats.org/drawingml/2006/main">
-              <a:ext uri="{FF2B5EF4-FFF2-40B4-BE49-F238E27FC236}">
-                <a16:creationId xmlns:a16="http://schemas.microsoft.com/office/drawing/2014/main" id="{F3FB887B-3727-4ED1-8B8E-FC60B6757998}"/>
-              </a:ext>
-            </a:extLst>
-          </p:cNvPr>
-          <p:cNvSpPr>
-            <a:spLocks xmlns:a="http://schemas.openxmlformats.org/drawingml/2006/main" noGrp="1"/>
-          </p:cNvSpPr>
-          <p:nvPr/>
-        </p:nvSpPr>
-        <p:spPr>
-          <a:xfrm xmlns:a="http://schemas.openxmlformats.org/drawingml/2006/main">
-            <a:off x="3962400" y="2876550"/>
-            <a:ext cx="57150" cy="57150"/>
+              <a:t>人工刷写 + 手动比对</a:t>
+            </a:r>
+          </a:p>
+        </p:txBody>
+      </p:sp>
+      <p:sp>
+        <p:nvSpPr>
+          <p:cNvPr id="11" name="">
+            <a:extLst xmlns:a="http://schemas.openxmlformats.org/drawingml/2006/main">
+              <a:ext uri="{FF2B5EF4-FFF2-40B4-BE49-F238E27FC236}">
+                <a16:creationId xmlns:a16="http://schemas.microsoft.com/office/drawing/2014/main" id="{309C3015-F39D-4E68-940A-9A0403885528}"/>
+              </a:ext>
+            </a:extLst>
+          </p:cNvPr>
+          <p:cNvSpPr>
+            <a:spLocks xmlns:a="http://schemas.openxmlformats.org/drawingml/2006/main" noGrp="1"/>
+          </p:cNvSpPr>
+          <p:nvPr/>
+        </p:nvSpPr>
+        <p:spPr>
+          <a:xfrm xmlns:a="http://schemas.openxmlformats.org/drawingml/2006/main">
+            <a:off x="952500" y="2914650"/>
+            <a:ext cx="1657350" cy="438150"/>
+          </a:xfrm>
+          <a:prstGeom xmlns:a="http://schemas.openxmlformats.org/drawingml/2006/main" prst="rect">
+            <a:avLst/>
+          </a:prstGeom>
+          <a:ln xmlns:a="http://schemas.openxmlformats.org/drawingml/2006/main">
+            <a:noFill/>
+          </a:ln>
+        </p:spPr>
+        <p:txBody>
+          <a:bodyPr xmlns:a="http://schemas.openxmlformats.org/drawingml/2006/main" lIns="0" tIns="0" rIns="0" bIns="0" anchor="t">
+            <a:normAutofit fontScale="91270"/>
+          </a:bodyPr>
+          <a:lstStyle xmlns:a="http://schemas.openxmlformats.org/drawingml/2006/main"/>
+          <a:p xmlns:a="http://schemas.openxmlformats.org/drawingml/2006/main">
+            <a:pPr algn="l">
+              <a:defRPr sz="1050" b="0">
+                <a:solidFill>
+                  <a:srgbClr val="273140"/>
+                </a:solidFill>
+                <a:latin typeface="PingFang SC"/>
+                <a:ea typeface="PingFang SC"/>
+                <a:cs typeface="PingFang SC"/>
+              </a:defRPr>
+            </a:pPr>
+            <a:r>
+              <a:rPr sz="1050" b="0">
+                <a:solidFill>
+                  <a:srgbClr val="273140"/>
+                </a:solidFill>
+                <a:latin typeface="PingFang SC"/>
+                <a:ea typeface="PingFang SC"/>
+                <a:cs typeface="PingFang SC"/>
+              </a:rPr>
+              <a:t>手动切换环境、执行 dmidecode、整理日志，每一步都需要人工确认。</a:t>
+            </a:r>
+          </a:p>
+        </p:txBody>
+      </p:sp>
+      <p:sp>
+        <p:nvSpPr>
+          <p:cNvPr id="12" name="">
+            <a:extLst xmlns:a="http://schemas.openxmlformats.org/drawingml/2006/main">
+              <a:ext uri="{FF2B5EF4-FFF2-40B4-BE49-F238E27FC236}">
+                <a16:creationId xmlns:a16="http://schemas.microsoft.com/office/drawing/2014/main" id="{90507336-CEE6-427C-B885-C22797AFB0DC}"/>
+              </a:ext>
+            </a:extLst>
+          </p:cNvPr>
+          <p:cNvSpPr>
+            <a:spLocks xmlns:a="http://schemas.openxmlformats.org/drawingml/2006/main" noGrp="1"/>
+          </p:cNvSpPr>
+          <p:nvPr/>
+        </p:nvSpPr>
+        <p:spPr>
+          <a:xfrm xmlns:a="http://schemas.openxmlformats.org/drawingml/2006/main">
+            <a:off x="685800" y="3943350"/>
+            <a:ext cx="66675" cy="228600"/>
           </a:xfrm>
           <a:prstGeom xmlns:a="http://schemas.openxmlformats.org/drawingml/2006/main" prst="rect">
             <a:avLst/>
@@ -18062,22 +16921,22 @@
       </p:sp>
       <p:sp>
         <p:nvSpPr>
-          <p:cNvPr id="33" name="">
-            <a:extLst xmlns:a="http://schemas.openxmlformats.org/drawingml/2006/main">
-              <a:ext uri="{FF2B5EF4-FFF2-40B4-BE49-F238E27FC236}">
-                <a16:creationId xmlns:a16="http://schemas.microsoft.com/office/drawing/2014/main" id="{5E13B056-E486-4F8A-AA01-7F3EB803FFF4}"/>
-              </a:ext>
-            </a:extLst>
-          </p:cNvPr>
-          <p:cNvSpPr>
-            <a:spLocks xmlns:a="http://schemas.openxmlformats.org/drawingml/2006/main" noGrp="1"/>
-          </p:cNvSpPr>
-          <p:nvPr/>
-        </p:nvSpPr>
-        <p:spPr>
-          <a:xfrm xmlns:a="http://schemas.openxmlformats.org/drawingml/2006/main">
-            <a:off x="4114800" y="2800350"/>
-            <a:ext cx="1466850" cy="304800"/>
+          <p:cNvPr id="13" name="">
+            <a:extLst xmlns:a="http://schemas.openxmlformats.org/drawingml/2006/main">
+              <a:ext uri="{FF2B5EF4-FFF2-40B4-BE49-F238E27FC236}">
+                <a16:creationId xmlns:a16="http://schemas.microsoft.com/office/drawing/2014/main" id="{D85C543F-3627-40C7-9E3A-FC4D2CD75663}"/>
+              </a:ext>
+            </a:extLst>
+          </p:cNvPr>
+          <p:cNvSpPr>
+            <a:spLocks xmlns:a="http://schemas.openxmlformats.org/drawingml/2006/main" noGrp="1"/>
+          </p:cNvSpPr>
+          <p:nvPr/>
+        </p:nvSpPr>
+        <p:spPr>
+          <a:xfrm xmlns:a="http://schemas.openxmlformats.org/drawingml/2006/main">
+            <a:off x="819150" y="3952875"/>
+            <a:ext cx="2476500" cy="228600"/>
           </a:xfrm>
           <a:prstGeom xmlns:a="http://schemas.openxmlformats.org/drawingml/2006/main" prst="rect">
             <a:avLst/>
@@ -18088,12 +16947,12 @@
         </p:spPr>
         <p:txBody>
           <a:bodyPr xmlns:a="http://schemas.openxmlformats.org/drawingml/2006/main" lIns="0" tIns="0" rIns="0" bIns="0" anchor="t">
-            <a:normAutofit fontScale="86885"/>
+            <a:normAutofit fontScale="100000"/>
           </a:bodyPr>
           <a:lstStyle xmlns:a="http://schemas.openxmlformats.org/drawingml/2006/main"/>
           <a:p xmlns:a="http://schemas.openxmlformats.org/drawingml/2006/main">
             <a:pPr algn="l">
-              <a:defRPr sz="1275" b="0">
+              <a:defRPr sz="1275" b="1">
                 <a:solidFill>
                   <a:srgbClr val="111827"/>
                 </a:solidFill>
@@ -18103,7 +16962,7 @@
               </a:defRPr>
             </a:pPr>
             <a:r>
-              <a:rPr sz="1275" b="0">
+              <a:rPr sz="1275" b="1">
                 <a:solidFill>
                   <a:srgbClr val="111827"/>
                 </a:solidFill>
@@ -18111,29 +16970,691 @@
                 <a:ea typeface="PingFang SC"/>
                 <a:cs typeface="PingFang SC"/>
               </a:rPr>
-              <a:t>9 类 SMBIOS 数据采集</a:t>
-            </a:r>
-          </a:p>
-        </p:txBody>
-      </p:sp>
-      <p:sp>
-        <p:nvSpPr>
-          <p:cNvPr id="34" name="">
-            <a:extLst xmlns:a="http://schemas.openxmlformats.org/drawingml/2006/main">
-              <a:ext uri="{FF2B5EF4-FFF2-40B4-BE49-F238E27FC236}">
-                <a16:creationId xmlns:a16="http://schemas.microsoft.com/office/drawing/2014/main" id="{B42B2623-7A71-4246-9318-19B3A00CC127}"/>
-              </a:ext>
-            </a:extLst>
-          </p:cNvPr>
-          <p:cNvSpPr>
-            <a:spLocks xmlns:a="http://schemas.openxmlformats.org/drawingml/2006/main" noGrp="1"/>
-          </p:cNvSpPr>
-          <p:nvPr/>
-        </p:nvSpPr>
-        <p:spPr>
-          <a:xfrm xmlns:a="http://schemas.openxmlformats.org/drawingml/2006/main">
-            <a:off x="3962400" y="3314700"/>
-            <a:ext cx="57150" cy="57150"/>
+              <a:t>新方式</a:t>
+            </a:r>
+          </a:p>
+        </p:txBody>
+      </p:sp>
+      <p:sp>
+        <p:nvSpPr>
+          <p:cNvPr id="14" name="">
+            <a:extLst xmlns:a="http://schemas.openxmlformats.org/drawingml/2006/main">
+              <a:ext uri="{FF2B5EF4-FFF2-40B4-BE49-F238E27FC236}">
+                <a16:creationId xmlns:a16="http://schemas.microsoft.com/office/drawing/2014/main" id="{4C18B991-C347-4907-9765-B5523C6AD3E2}"/>
+              </a:ext>
+            </a:extLst>
+          </p:cNvPr>
+          <p:cNvSpPr>
+            <a:spLocks xmlns:a="http://schemas.openxmlformats.org/drawingml/2006/main" noGrp="1"/>
+          </p:cNvSpPr>
+          <p:nvPr/>
+        </p:nvSpPr>
+        <p:spPr>
+          <a:xfrm xmlns:a="http://schemas.openxmlformats.org/drawingml/2006/main">
+            <a:off x="685800" y="4324350"/>
+            <a:ext cx="2362200" cy="1390650"/>
+          </a:xfrm>
+          <a:prstGeom xmlns:a="http://schemas.openxmlformats.org/drawingml/2006/main" prst="roundRect">
+            <a:avLst>
+              <a:gd name="adj" fmla="val 1370"/>
+            </a:avLst>
+          </a:prstGeom>
+          <a:solidFill xmlns:a="http://schemas.openxmlformats.org/drawingml/2006/main">
+            <a:srgbClr val="EAF1FF"/>
+          </a:solidFill>
+          <a:ln xmlns:a="http://schemas.openxmlformats.org/drawingml/2006/main" w="9525">
+            <a:solidFill>
+              <a:srgbClr val="E6EBF2"/>
+            </a:solidFill>
+          </a:ln>
+        </p:spPr>
+      </p:sp>
+      <p:sp>
+        <p:nvSpPr>
+          <p:cNvPr id="15" name="">
+            <a:extLst xmlns:a="http://schemas.openxmlformats.org/drawingml/2006/main">
+              <a:ext uri="{FF2B5EF4-FFF2-40B4-BE49-F238E27FC236}">
+                <a16:creationId xmlns:a16="http://schemas.microsoft.com/office/drawing/2014/main" id="{8B49799D-0FC8-4D97-8D1E-7318816A0D9D}"/>
+              </a:ext>
+            </a:extLst>
+          </p:cNvPr>
+          <p:cNvSpPr>
+            <a:spLocks xmlns:a="http://schemas.openxmlformats.org/drawingml/2006/main" noGrp="1"/>
+          </p:cNvSpPr>
+          <p:nvPr/>
+        </p:nvSpPr>
+        <p:spPr>
+          <a:xfrm xmlns:a="http://schemas.openxmlformats.org/drawingml/2006/main">
+            <a:off x="952500" y="4552950"/>
+            <a:ext cx="1714500" cy="228600"/>
+          </a:xfrm>
+          <a:prstGeom xmlns:a="http://schemas.openxmlformats.org/drawingml/2006/main" prst="rect">
+            <a:avLst/>
+          </a:prstGeom>
+          <a:ln xmlns:a="http://schemas.openxmlformats.org/drawingml/2006/main">
+            <a:noFill/>
+          </a:ln>
+        </p:spPr>
+        <p:txBody>
+          <a:bodyPr xmlns:a="http://schemas.openxmlformats.org/drawingml/2006/main" lIns="0" tIns="0" rIns="0" bIns="0" anchor="t">
+            <a:normAutofit fontScale="100000"/>
+          </a:bodyPr>
+          <a:lstStyle xmlns:a="http://schemas.openxmlformats.org/drawingml/2006/main"/>
+          <a:p xmlns:a="http://schemas.openxmlformats.org/drawingml/2006/main">
+            <a:pPr algn="l">
+              <a:defRPr sz="1425" b="1">
+                <a:solidFill>
+                  <a:srgbClr val="111827"/>
+                </a:solidFill>
+                <a:latin typeface="PingFang SC"/>
+                <a:ea typeface="PingFang SC"/>
+                <a:cs typeface="PingFang SC"/>
+              </a:defRPr>
+            </a:pPr>
+            <a:r>
+              <a:rPr sz="1425" b="1">
+                <a:solidFill>
+                  <a:srgbClr val="111827"/>
+                </a:solidFill>
+                <a:latin typeface="PingFang SC"/>
+                <a:ea typeface="PingFang SC"/>
+                <a:cs typeface="PingFang SC"/>
+              </a:rPr>
+              <a:t>opencode + skills</a:t>
+            </a:r>
+          </a:p>
+        </p:txBody>
+      </p:sp>
+      <p:sp>
+        <p:nvSpPr>
+          <p:cNvPr id="16" name="">
+            <a:extLst xmlns:a="http://schemas.openxmlformats.org/drawingml/2006/main">
+              <a:ext uri="{FF2B5EF4-FFF2-40B4-BE49-F238E27FC236}">
+                <a16:creationId xmlns:a16="http://schemas.microsoft.com/office/drawing/2014/main" id="{385D7649-5C49-42D6-A93E-015E40375A9F}"/>
+              </a:ext>
+            </a:extLst>
+          </p:cNvPr>
+          <p:cNvSpPr>
+            <a:spLocks xmlns:a="http://schemas.openxmlformats.org/drawingml/2006/main" noGrp="1"/>
+          </p:cNvSpPr>
+          <p:nvPr/>
+        </p:nvSpPr>
+        <p:spPr>
+          <a:xfrm xmlns:a="http://schemas.openxmlformats.org/drawingml/2006/main">
+            <a:off x="952500" y="4914900"/>
+            <a:ext cx="1657350" cy="514350"/>
+          </a:xfrm>
+          <a:prstGeom xmlns:a="http://schemas.openxmlformats.org/drawingml/2006/main" prst="rect">
+            <a:avLst/>
+          </a:prstGeom>
+          <a:ln xmlns:a="http://schemas.openxmlformats.org/drawingml/2006/main">
+            <a:noFill/>
+          </a:ln>
+        </p:spPr>
+        <p:txBody>
+          <a:bodyPr xmlns:a="http://schemas.openxmlformats.org/drawingml/2006/main" lIns="0" tIns="0" rIns="0" bIns="0" anchor="t">
+            <a:normAutofit fontScale="98982"/>
+          </a:bodyPr>
+          <a:lstStyle xmlns:a="http://schemas.openxmlformats.org/drawingml/2006/main"/>
+          <a:p xmlns:a="http://schemas.openxmlformats.org/drawingml/2006/main">
+            <a:pPr algn="l">
+              <a:defRPr sz="1050" b="0">
+                <a:solidFill>
+                  <a:srgbClr val="273140"/>
+                </a:solidFill>
+                <a:latin typeface="PingFang SC"/>
+                <a:ea typeface="PingFang SC"/>
+                <a:cs typeface="PingFang SC"/>
+              </a:defRPr>
+            </a:pPr>
+            <a:r>
+              <a:rPr sz="1050" b="0">
+                <a:solidFill>
+                  <a:srgbClr val="273140"/>
+                </a:solidFill>
+                <a:latin typeface="PingFang SC"/>
+                <a:ea typeface="PingFang SC"/>
+                <a:cs typeface="PingFang SC"/>
+              </a:rPr>
+              <a:t>将上传、校验、刷写、采集、报告生成串成可重复流程，并可与 AI 辅助开发联动。</a:t>
+            </a:r>
+          </a:p>
+        </p:txBody>
+      </p:sp>
+      <p:sp>
+        <p:nvSpPr>
+          <p:cNvPr id="17" name="">
+            <a:extLst xmlns:a="http://schemas.openxmlformats.org/drawingml/2006/main">
+              <a:ext uri="{FF2B5EF4-FFF2-40B4-BE49-F238E27FC236}">
+                <a16:creationId xmlns:a16="http://schemas.microsoft.com/office/drawing/2014/main" id="{4156745E-CD9F-43A0-9BFD-FC51ED6A9447}"/>
+              </a:ext>
+            </a:extLst>
+          </p:cNvPr>
+          <p:cNvSpPr>
+            <a:spLocks xmlns:a="http://schemas.openxmlformats.org/drawingml/2006/main" noGrp="1"/>
+          </p:cNvSpPr>
+          <p:nvPr/>
+        </p:nvSpPr>
+        <p:spPr>
+          <a:xfrm xmlns:a="http://schemas.openxmlformats.org/drawingml/2006/main">
+            <a:off x="3562350" y="2066925"/>
+            <a:ext cx="209550" cy="209550"/>
+          </a:xfrm>
+          <a:prstGeom xmlns:a="http://schemas.openxmlformats.org/drawingml/2006/main" prst="rect">
+            <a:avLst/>
+          </a:prstGeom>
+          <a:solidFill xmlns:a="http://schemas.openxmlformats.org/drawingml/2006/main">
+            <a:srgbClr val="145CFF"/>
+          </a:solidFill>
+          <a:ln xmlns:a="http://schemas.openxmlformats.org/drawingml/2006/main">
+            <a:noFill/>
+          </a:ln>
+        </p:spPr>
+      </p:sp>
+      <p:sp>
+        <p:nvSpPr>
+          <p:cNvPr id="18" name="">
+            <a:extLst xmlns:a="http://schemas.openxmlformats.org/drawingml/2006/main">
+              <a:ext uri="{FF2B5EF4-FFF2-40B4-BE49-F238E27FC236}">
+                <a16:creationId xmlns:a16="http://schemas.microsoft.com/office/drawing/2014/main" id="{CECC1EB4-D0BD-434F-9662-286B0192F1D8}"/>
+              </a:ext>
+            </a:extLst>
+          </p:cNvPr>
+          <p:cNvSpPr>
+            <a:spLocks xmlns:a="http://schemas.openxmlformats.org/drawingml/2006/main" noGrp="1"/>
+          </p:cNvSpPr>
+          <p:nvPr/>
+        </p:nvSpPr>
+        <p:spPr>
+          <a:xfrm xmlns:a="http://schemas.openxmlformats.org/drawingml/2006/main">
+            <a:off x="3562350" y="2095500"/>
+            <a:ext cx="209550" cy="152400"/>
+          </a:xfrm>
+          <a:prstGeom xmlns:a="http://schemas.openxmlformats.org/drawingml/2006/main" prst="rect">
+            <a:avLst/>
+          </a:prstGeom>
+          <a:ln xmlns:a="http://schemas.openxmlformats.org/drawingml/2006/main">
+            <a:noFill/>
+          </a:ln>
+        </p:spPr>
+        <p:txBody>
+          <a:bodyPr xmlns:a="http://schemas.openxmlformats.org/drawingml/2006/main" lIns="0" tIns="0" rIns="0" bIns="0" anchor="t">
+            <a:normAutofit fontScale="100000"/>
+          </a:bodyPr>
+          <a:lstStyle xmlns:a="http://schemas.openxmlformats.org/drawingml/2006/main"/>
+          <a:p xmlns:a="http://schemas.openxmlformats.org/drawingml/2006/main">
+            <a:pPr algn="ctr">
+              <a:defRPr sz="900" b="1">
+                <a:solidFill>
+                  <a:srgbClr val="FFFFFF"/>
+                </a:solidFill>
+                <a:latin typeface="Menlo"/>
+                <a:ea typeface="Menlo"/>
+                <a:cs typeface="Menlo"/>
+              </a:defRPr>
+            </a:pPr>
+            <a:r>
+              <a:rPr sz="900" b="1">
+                <a:solidFill>
+                  <a:srgbClr val="FFFFFF"/>
+                </a:solidFill>
+                <a:latin typeface="Menlo"/>
+                <a:ea typeface="Menlo"/>
+                <a:cs typeface="Menlo"/>
+              </a:rPr>
+              <a:t>1</a:t>
+            </a:r>
+          </a:p>
+        </p:txBody>
+      </p:sp>
+      <p:sp>
+        <p:nvSpPr>
+          <p:cNvPr id="19" name="">
+            <a:extLst xmlns:a="http://schemas.openxmlformats.org/drawingml/2006/main">
+              <a:ext uri="{FF2B5EF4-FFF2-40B4-BE49-F238E27FC236}">
+                <a16:creationId xmlns:a16="http://schemas.microsoft.com/office/drawing/2014/main" id="{1C117D19-230C-4D69-B3E5-05C183B7F425}"/>
+              </a:ext>
+            </a:extLst>
+          </p:cNvPr>
+          <p:cNvSpPr>
+            <a:spLocks xmlns:a="http://schemas.openxmlformats.org/drawingml/2006/main" noGrp="1"/>
+          </p:cNvSpPr>
+          <p:nvPr/>
+        </p:nvSpPr>
+        <p:spPr>
+          <a:xfrm xmlns:a="http://schemas.openxmlformats.org/drawingml/2006/main">
+            <a:off x="3962400" y="2038350"/>
+            <a:ext cx="2000250" cy="266700"/>
+          </a:xfrm>
+          <a:prstGeom xmlns:a="http://schemas.openxmlformats.org/drawingml/2006/main" prst="rect">
+            <a:avLst/>
+          </a:prstGeom>
+          <a:ln xmlns:a="http://schemas.openxmlformats.org/drawingml/2006/main">
+            <a:noFill/>
+          </a:ln>
+        </p:spPr>
+        <p:txBody>
+          <a:bodyPr xmlns:a="http://schemas.openxmlformats.org/drawingml/2006/main" lIns="0" tIns="0" rIns="0" bIns="0" anchor="t">
+            <a:normAutofit fontScale="100000"/>
+          </a:bodyPr>
+          <a:lstStyle xmlns:a="http://schemas.openxmlformats.org/drawingml/2006/main"/>
+          <a:p xmlns:a="http://schemas.openxmlformats.org/drawingml/2006/main">
+            <a:pPr algn="l">
+              <a:defRPr sz="1425" b="1">
+                <a:solidFill>
+                  <a:srgbClr val="111827"/>
+                </a:solidFill>
+                <a:latin typeface="PingFang SC"/>
+                <a:ea typeface="PingFang SC"/>
+                <a:cs typeface="PingFang SC"/>
+              </a:defRPr>
+            </a:pPr>
+            <a:r>
+              <a:rPr sz="1425" b="1">
+                <a:solidFill>
+                  <a:srgbClr val="111827"/>
+                </a:solidFill>
+                <a:latin typeface="PingFang SC"/>
+                <a:ea typeface="PingFang SC"/>
+                <a:cs typeface="PingFang SC"/>
+              </a:rPr>
+              <a:t>BIOS 上传</a:t>
+            </a:r>
+          </a:p>
+        </p:txBody>
+      </p:sp>
+      <p:sp>
+        <p:nvSpPr>
+          <p:cNvPr id="20" name="">
+            <a:extLst xmlns:a="http://schemas.openxmlformats.org/drawingml/2006/main">
+              <a:ext uri="{FF2B5EF4-FFF2-40B4-BE49-F238E27FC236}">
+                <a16:creationId xmlns:a16="http://schemas.microsoft.com/office/drawing/2014/main" id="{F8004CC4-1FA9-4811-8DF2-D67FBE6F4058}"/>
+              </a:ext>
+            </a:extLst>
+          </p:cNvPr>
+          <p:cNvSpPr>
+            <a:spLocks xmlns:a="http://schemas.openxmlformats.org/drawingml/2006/main" noGrp="1"/>
+          </p:cNvSpPr>
+          <p:nvPr/>
+        </p:nvSpPr>
+        <p:spPr>
+          <a:xfrm xmlns:a="http://schemas.openxmlformats.org/drawingml/2006/main">
+            <a:off x="3667125" y="2314575"/>
+            <a:ext cx="9525" cy="266700"/>
+          </a:xfrm>
+          <a:prstGeom xmlns:a="http://schemas.openxmlformats.org/drawingml/2006/main" prst="rect">
+            <a:avLst/>
+          </a:prstGeom>
+          <a:solidFill xmlns:a="http://schemas.openxmlformats.org/drawingml/2006/main">
+            <a:srgbClr val="E6EBF2"/>
+          </a:solidFill>
+          <a:ln xmlns:a="http://schemas.openxmlformats.org/drawingml/2006/main">
+            <a:noFill/>
+          </a:ln>
+        </p:spPr>
+      </p:sp>
+      <p:sp>
+        <p:nvSpPr>
+          <p:cNvPr id="21" name="">
+            <a:extLst xmlns:a="http://schemas.openxmlformats.org/drawingml/2006/main">
+              <a:ext uri="{FF2B5EF4-FFF2-40B4-BE49-F238E27FC236}">
+                <a16:creationId xmlns:a16="http://schemas.microsoft.com/office/drawing/2014/main" id="{D32E977B-9443-42F6-8298-24E2FDFF8569}"/>
+              </a:ext>
+            </a:extLst>
+          </p:cNvPr>
+          <p:cNvSpPr>
+            <a:spLocks xmlns:a="http://schemas.openxmlformats.org/drawingml/2006/main" noGrp="1"/>
+          </p:cNvSpPr>
+          <p:nvPr/>
+        </p:nvSpPr>
+        <p:spPr>
+          <a:xfrm xmlns:a="http://schemas.openxmlformats.org/drawingml/2006/main">
+            <a:off x="3562350" y="2657475"/>
+            <a:ext cx="209550" cy="209550"/>
+          </a:xfrm>
+          <a:prstGeom xmlns:a="http://schemas.openxmlformats.org/drawingml/2006/main" prst="rect">
+            <a:avLst/>
+          </a:prstGeom>
+          <a:solidFill xmlns:a="http://schemas.openxmlformats.org/drawingml/2006/main">
+            <a:srgbClr val="145CFF"/>
+          </a:solidFill>
+          <a:ln xmlns:a="http://schemas.openxmlformats.org/drawingml/2006/main">
+            <a:noFill/>
+          </a:ln>
+        </p:spPr>
+      </p:sp>
+      <p:sp>
+        <p:nvSpPr>
+          <p:cNvPr id="22" name="">
+            <a:extLst xmlns:a="http://schemas.openxmlformats.org/drawingml/2006/main">
+              <a:ext uri="{FF2B5EF4-FFF2-40B4-BE49-F238E27FC236}">
+                <a16:creationId xmlns:a16="http://schemas.microsoft.com/office/drawing/2014/main" id="{CDBE5CDC-6575-46D4-B5C3-51F3F19AE6E7}"/>
+              </a:ext>
+            </a:extLst>
+          </p:cNvPr>
+          <p:cNvSpPr>
+            <a:spLocks xmlns:a="http://schemas.openxmlformats.org/drawingml/2006/main" noGrp="1"/>
+          </p:cNvSpPr>
+          <p:nvPr/>
+        </p:nvSpPr>
+        <p:spPr>
+          <a:xfrm xmlns:a="http://schemas.openxmlformats.org/drawingml/2006/main">
+            <a:off x="3562350" y="2686050"/>
+            <a:ext cx="209550" cy="152400"/>
+          </a:xfrm>
+          <a:prstGeom xmlns:a="http://schemas.openxmlformats.org/drawingml/2006/main" prst="rect">
+            <a:avLst/>
+          </a:prstGeom>
+          <a:ln xmlns:a="http://schemas.openxmlformats.org/drawingml/2006/main">
+            <a:noFill/>
+          </a:ln>
+        </p:spPr>
+        <p:txBody>
+          <a:bodyPr xmlns:a="http://schemas.openxmlformats.org/drawingml/2006/main" lIns="0" tIns="0" rIns="0" bIns="0" anchor="t">
+            <a:normAutofit fontScale="100000"/>
+          </a:bodyPr>
+          <a:lstStyle xmlns:a="http://schemas.openxmlformats.org/drawingml/2006/main"/>
+          <a:p xmlns:a="http://schemas.openxmlformats.org/drawingml/2006/main">
+            <a:pPr algn="ctr">
+              <a:defRPr sz="900" b="1">
+                <a:solidFill>
+                  <a:srgbClr val="FFFFFF"/>
+                </a:solidFill>
+                <a:latin typeface="Menlo"/>
+                <a:ea typeface="Menlo"/>
+                <a:cs typeface="Menlo"/>
+              </a:defRPr>
+            </a:pPr>
+            <a:r>
+              <a:rPr sz="900" b="1">
+                <a:solidFill>
+                  <a:srgbClr val="FFFFFF"/>
+                </a:solidFill>
+                <a:latin typeface="Menlo"/>
+                <a:ea typeface="Menlo"/>
+                <a:cs typeface="Menlo"/>
+              </a:rPr>
+              <a:t>2</a:t>
+            </a:r>
+          </a:p>
+        </p:txBody>
+      </p:sp>
+      <p:sp>
+        <p:nvSpPr>
+          <p:cNvPr id="23" name="">
+            <a:extLst xmlns:a="http://schemas.openxmlformats.org/drawingml/2006/main">
+              <a:ext uri="{FF2B5EF4-FFF2-40B4-BE49-F238E27FC236}">
+                <a16:creationId xmlns:a16="http://schemas.microsoft.com/office/drawing/2014/main" id="{6A8E85F4-1512-4B9E-830A-D66A8B9A6A2F}"/>
+              </a:ext>
+            </a:extLst>
+          </p:cNvPr>
+          <p:cNvSpPr>
+            <a:spLocks xmlns:a="http://schemas.openxmlformats.org/drawingml/2006/main" noGrp="1"/>
+          </p:cNvSpPr>
+          <p:nvPr/>
+        </p:nvSpPr>
+        <p:spPr>
+          <a:xfrm xmlns:a="http://schemas.openxmlformats.org/drawingml/2006/main">
+            <a:off x="3962400" y="2628900"/>
+            <a:ext cx="2000250" cy="266700"/>
+          </a:xfrm>
+          <a:prstGeom xmlns:a="http://schemas.openxmlformats.org/drawingml/2006/main" prst="rect">
+            <a:avLst/>
+          </a:prstGeom>
+          <a:ln xmlns:a="http://schemas.openxmlformats.org/drawingml/2006/main">
+            <a:noFill/>
+          </a:ln>
+        </p:spPr>
+        <p:txBody>
+          <a:bodyPr xmlns:a="http://schemas.openxmlformats.org/drawingml/2006/main" lIns="0" tIns="0" rIns="0" bIns="0" anchor="t">
+            <a:normAutofit fontScale="100000"/>
+          </a:bodyPr>
+          <a:lstStyle xmlns:a="http://schemas.openxmlformats.org/drawingml/2006/main"/>
+          <a:p xmlns:a="http://schemas.openxmlformats.org/drawingml/2006/main">
+            <a:pPr algn="l">
+              <a:defRPr sz="1425" b="1">
+                <a:solidFill>
+                  <a:srgbClr val="111827"/>
+                </a:solidFill>
+                <a:latin typeface="PingFang SC"/>
+                <a:ea typeface="PingFang SC"/>
+                <a:cs typeface="PingFang SC"/>
+              </a:defRPr>
+            </a:pPr>
+            <a:r>
+              <a:rPr sz="1425" b="1">
+                <a:solidFill>
+                  <a:srgbClr val="111827"/>
+                </a:solidFill>
+                <a:latin typeface="PingFang SC"/>
+                <a:ea typeface="PingFang SC"/>
+                <a:cs typeface="PingFang SC"/>
+              </a:rPr>
+              <a:t>SHA256 校验</a:t>
+            </a:r>
+          </a:p>
+        </p:txBody>
+      </p:sp>
+      <p:sp>
+        <p:nvSpPr>
+          <p:cNvPr id="24" name="">
+            <a:extLst xmlns:a="http://schemas.openxmlformats.org/drawingml/2006/main">
+              <a:ext uri="{FF2B5EF4-FFF2-40B4-BE49-F238E27FC236}">
+                <a16:creationId xmlns:a16="http://schemas.microsoft.com/office/drawing/2014/main" id="{6D5EA37D-C2F3-4DF7-BB65-828D4C166596}"/>
+              </a:ext>
+            </a:extLst>
+          </p:cNvPr>
+          <p:cNvSpPr>
+            <a:spLocks xmlns:a="http://schemas.openxmlformats.org/drawingml/2006/main" noGrp="1"/>
+          </p:cNvSpPr>
+          <p:nvPr/>
+        </p:nvSpPr>
+        <p:spPr>
+          <a:xfrm xmlns:a="http://schemas.openxmlformats.org/drawingml/2006/main">
+            <a:off x="3667125" y="2905125"/>
+            <a:ext cx="9525" cy="266700"/>
+          </a:xfrm>
+          <a:prstGeom xmlns:a="http://schemas.openxmlformats.org/drawingml/2006/main" prst="rect">
+            <a:avLst/>
+          </a:prstGeom>
+          <a:solidFill xmlns:a="http://schemas.openxmlformats.org/drawingml/2006/main">
+            <a:srgbClr val="E6EBF2"/>
+          </a:solidFill>
+          <a:ln xmlns:a="http://schemas.openxmlformats.org/drawingml/2006/main">
+            <a:noFill/>
+          </a:ln>
+        </p:spPr>
+      </p:sp>
+      <p:sp>
+        <p:nvSpPr>
+          <p:cNvPr id="25" name="">
+            <a:extLst xmlns:a="http://schemas.openxmlformats.org/drawingml/2006/main">
+              <a:ext uri="{FF2B5EF4-FFF2-40B4-BE49-F238E27FC236}">
+                <a16:creationId xmlns:a16="http://schemas.microsoft.com/office/drawing/2014/main" id="{17854CA4-78F1-4E1B-A9E5-CA6A90393668}"/>
+              </a:ext>
+            </a:extLst>
+          </p:cNvPr>
+          <p:cNvSpPr>
+            <a:spLocks xmlns:a="http://schemas.openxmlformats.org/drawingml/2006/main" noGrp="1"/>
+          </p:cNvSpPr>
+          <p:nvPr/>
+        </p:nvSpPr>
+        <p:spPr>
+          <a:xfrm xmlns:a="http://schemas.openxmlformats.org/drawingml/2006/main">
+            <a:off x="3562350" y="3248025"/>
+            <a:ext cx="209550" cy="209550"/>
+          </a:xfrm>
+          <a:prstGeom xmlns:a="http://schemas.openxmlformats.org/drawingml/2006/main" prst="rect">
+            <a:avLst/>
+          </a:prstGeom>
+          <a:solidFill xmlns:a="http://schemas.openxmlformats.org/drawingml/2006/main">
+            <a:srgbClr val="145CFF"/>
+          </a:solidFill>
+          <a:ln xmlns:a="http://schemas.openxmlformats.org/drawingml/2006/main">
+            <a:noFill/>
+          </a:ln>
+        </p:spPr>
+      </p:sp>
+      <p:sp>
+        <p:nvSpPr>
+          <p:cNvPr id="26" name="">
+            <a:extLst xmlns:a="http://schemas.openxmlformats.org/drawingml/2006/main">
+              <a:ext uri="{FF2B5EF4-FFF2-40B4-BE49-F238E27FC236}">
+                <a16:creationId xmlns:a16="http://schemas.microsoft.com/office/drawing/2014/main" id="{E853F356-893D-42CD-9940-1E2E84052D90}"/>
+              </a:ext>
+            </a:extLst>
+          </p:cNvPr>
+          <p:cNvSpPr>
+            <a:spLocks xmlns:a="http://schemas.openxmlformats.org/drawingml/2006/main" noGrp="1"/>
+          </p:cNvSpPr>
+          <p:nvPr/>
+        </p:nvSpPr>
+        <p:spPr>
+          <a:xfrm xmlns:a="http://schemas.openxmlformats.org/drawingml/2006/main">
+            <a:off x="3562350" y="3276600"/>
+            <a:ext cx="209550" cy="152400"/>
+          </a:xfrm>
+          <a:prstGeom xmlns:a="http://schemas.openxmlformats.org/drawingml/2006/main" prst="rect">
+            <a:avLst/>
+          </a:prstGeom>
+          <a:ln xmlns:a="http://schemas.openxmlformats.org/drawingml/2006/main">
+            <a:noFill/>
+          </a:ln>
+        </p:spPr>
+        <p:txBody>
+          <a:bodyPr xmlns:a="http://schemas.openxmlformats.org/drawingml/2006/main" lIns="0" tIns="0" rIns="0" bIns="0" anchor="t">
+            <a:normAutofit fontScale="100000"/>
+          </a:bodyPr>
+          <a:lstStyle xmlns:a="http://schemas.openxmlformats.org/drawingml/2006/main"/>
+          <a:p xmlns:a="http://schemas.openxmlformats.org/drawingml/2006/main">
+            <a:pPr algn="ctr">
+              <a:defRPr sz="900" b="1">
+                <a:solidFill>
+                  <a:srgbClr val="FFFFFF"/>
+                </a:solidFill>
+                <a:latin typeface="Menlo"/>
+                <a:ea typeface="Menlo"/>
+                <a:cs typeface="Menlo"/>
+              </a:defRPr>
+            </a:pPr>
+            <a:r>
+              <a:rPr sz="900" b="1">
+                <a:solidFill>
+                  <a:srgbClr val="FFFFFF"/>
+                </a:solidFill>
+                <a:latin typeface="Menlo"/>
+                <a:ea typeface="Menlo"/>
+                <a:cs typeface="Menlo"/>
+              </a:rPr>
+              <a:t>3</a:t>
+            </a:r>
+          </a:p>
+        </p:txBody>
+      </p:sp>
+      <p:sp>
+        <p:nvSpPr>
+          <p:cNvPr id="27" name="">
+            <a:extLst xmlns:a="http://schemas.openxmlformats.org/drawingml/2006/main">
+              <a:ext uri="{FF2B5EF4-FFF2-40B4-BE49-F238E27FC236}">
+                <a16:creationId xmlns:a16="http://schemas.microsoft.com/office/drawing/2014/main" id="{61DB63AC-5C74-47B4-B26D-F8660FC399BD}"/>
+              </a:ext>
+            </a:extLst>
+          </p:cNvPr>
+          <p:cNvSpPr>
+            <a:spLocks xmlns:a="http://schemas.openxmlformats.org/drawingml/2006/main" noGrp="1"/>
+          </p:cNvSpPr>
+          <p:nvPr/>
+        </p:nvSpPr>
+        <p:spPr>
+          <a:xfrm xmlns:a="http://schemas.openxmlformats.org/drawingml/2006/main">
+            <a:off x="3962400" y="3219450"/>
+            <a:ext cx="2000250" cy="266700"/>
+          </a:xfrm>
+          <a:prstGeom xmlns:a="http://schemas.openxmlformats.org/drawingml/2006/main" prst="rect">
+            <a:avLst/>
+          </a:prstGeom>
+          <a:ln xmlns:a="http://schemas.openxmlformats.org/drawingml/2006/main">
+            <a:noFill/>
+          </a:ln>
+        </p:spPr>
+        <p:txBody>
+          <a:bodyPr xmlns:a="http://schemas.openxmlformats.org/drawingml/2006/main" lIns="0" tIns="0" rIns="0" bIns="0" anchor="t">
+            <a:normAutofit fontScale="100000"/>
+          </a:bodyPr>
+          <a:lstStyle xmlns:a="http://schemas.openxmlformats.org/drawingml/2006/main"/>
+          <a:p xmlns:a="http://schemas.openxmlformats.org/drawingml/2006/main">
+            <a:pPr algn="l">
+              <a:defRPr sz="1425" b="1">
+                <a:solidFill>
+                  <a:srgbClr val="111827"/>
+                </a:solidFill>
+                <a:latin typeface="PingFang SC"/>
+                <a:ea typeface="PingFang SC"/>
+                <a:cs typeface="PingFang SC"/>
+              </a:defRPr>
+            </a:pPr>
+            <a:r>
+              <a:rPr sz="1425" b="1">
+                <a:solidFill>
+                  <a:srgbClr val="111827"/>
+                </a:solidFill>
+                <a:latin typeface="PingFang SC"/>
+                <a:ea typeface="PingFang SC"/>
+                <a:cs typeface="PingFang SC"/>
+              </a:rPr>
+              <a:t>远程刷写</a:t>
+            </a:r>
+          </a:p>
+        </p:txBody>
+      </p:sp>
+      <p:sp>
+        <p:nvSpPr>
+          <p:cNvPr id="28" name="">
+            <a:extLst xmlns:a="http://schemas.openxmlformats.org/drawingml/2006/main">
+              <a:ext uri="{FF2B5EF4-FFF2-40B4-BE49-F238E27FC236}">
+                <a16:creationId xmlns:a16="http://schemas.microsoft.com/office/drawing/2014/main" id="{B345BEB9-6E7A-4666-9E56-39430A3F33CE}"/>
+              </a:ext>
+            </a:extLst>
+          </p:cNvPr>
+          <p:cNvSpPr>
+            <a:spLocks xmlns:a="http://schemas.openxmlformats.org/drawingml/2006/main" noGrp="1"/>
+          </p:cNvSpPr>
+          <p:nvPr/>
+        </p:nvSpPr>
+        <p:spPr>
+          <a:xfrm xmlns:a="http://schemas.openxmlformats.org/drawingml/2006/main">
+            <a:off x="3667125" y="3495675"/>
+            <a:ext cx="9525" cy="266700"/>
+          </a:xfrm>
+          <a:prstGeom xmlns:a="http://schemas.openxmlformats.org/drawingml/2006/main" prst="rect">
+            <a:avLst/>
+          </a:prstGeom>
+          <a:solidFill xmlns:a="http://schemas.openxmlformats.org/drawingml/2006/main">
+            <a:srgbClr val="E6EBF2"/>
+          </a:solidFill>
+          <a:ln xmlns:a="http://schemas.openxmlformats.org/drawingml/2006/main">
+            <a:noFill/>
+          </a:ln>
+        </p:spPr>
+      </p:sp>
+      <p:sp>
+        <p:nvSpPr>
+          <p:cNvPr id="29" name="">
+            <a:extLst xmlns:a="http://schemas.openxmlformats.org/drawingml/2006/main">
+              <a:ext uri="{FF2B5EF4-FFF2-40B4-BE49-F238E27FC236}">
+                <a16:creationId xmlns:a16="http://schemas.microsoft.com/office/drawing/2014/main" id="{68D66A03-DF1C-4AD7-88DC-7C533E846B0E}"/>
+              </a:ext>
+            </a:extLst>
+          </p:cNvPr>
+          <p:cNvSpPr>
+            <a:spLocks xmlns:a="http://schemas.openxmlformats.org/drawingml/2006/main" noGrp="1"/>
+          </p:cNvSpPr>
+          <p:nvPr/>
+        </p:nvSpPr>
+        <p:spPr>
+          <a:xfrm xmlns:a="http://schemas.openxmlformats.org/drawingml/2006/main">
+            <a:off x="3562350" y="3838575"/>
+            <a:ext cx="209550" cy="209550"/>
           </a:xfrm>
           <a:prstGeom xmlns:a="http://schemas.openxmlformats.org/drawingml/2006/main" prst="rect">
             <a:avLst/>
@@ -18148,22 +17669,22 @@
       </p:sp>
       <p:sp>
         <p:nvSpPr>
-          <p:cNvPr id="35" name="">
-            <a:extLst xmlns:a="http://schemas.openxmlformats.org/drawingml/2006/main">
-              <a:ext uri="{FF2B5EF4-FFF2-40B4-BE49-F238E27FC236}">
-                <a16:creationId xmlns:a16="http://schemas.microsoft.com/office/drawing/2014/main" id="{D9415C93-0749-4971-BBA5-62D6F39480E2}"/>
-              </a:ext>
-            </a:extLst>
-          </p:cNvPr>
-          <p:cNvSpPr>
-            <a:spLocks xmlns:a="http://schemas.openxmlformats.org/drawingml/2006/main" noGrp="1"/>
-          </p:cNvSpPr>
-          <p:nvPr/>
-        </p:nvSpPr>
-        <p:spPr>
-          <a:xfrm xmlns:a="http://schemas.openxmlformats.org/drawingml/2006/main">
-            <a:off x="4114800" y="3238500"/>
-            <a:ext cx="1466850" cy="381000"/>
+          <p:cNvPr id="30" name="">
+            <a:extLst xmlns:a="http://schemas.openxmlformats.org/drawingml/2006/main">
+              <a:ext uri="{FF2B5EF4-FFF2-40B4-BE49-F238E27FC236}">
+                <a16:creationId xmlns:a16="http://schemas.microsoft.com/office/drawing/2014/main" id="{D708DB06-E058-4FC6-B8D9-6789D6C5EA1D}"/>
+              </a:ext>
+            </a:extLst>
+          </p:cNvPr>
+          <p:cNvSpPr>
+            <a:spLocks xmlns:a="http://schemas.openxmlformats.org/drawingml/2006/main" noGrp="1"/>
+          </p:cNvSpPr>
+          <p:nvPr/>
+        </p:nvSpPr>
+        <p:spPr>
+          <a:xfrm xmlns:a="http://schemas.openxmlformats.org/drawingml/2006/main">
+            <a:off x="3562350" y="3867150"/>
+            <a:ext cx="209550" cy="152400"/>
           </a:xfrm>
           <a:prstGeom xmlns:a="http://schemas.openxmlformats.org/drawingml/2006/main" prst="rect">
             <a:avLst/>
@@ -18174,12 +17695,68 @@
         </p:spPr>
         <p:txBody>
           <a:bodyPr xmlns:a="http://schemas.openxmlformats.org/drawingml/2006/main" lIns="0" tIns="0" rIns="0" bIns="0" anchor="t">
-            <a:normAutofit fontScale="98039"/>
+            <a:normAutofit fontScale="100000"/>
+          </a:bodyPr>
+          <a:lstStyle xmlns:a="http://schemas.openxmlformats.org/drawingml/2006/main"/>
+          <a:p xmlns:a="http://schemas.openxmlformats.org/drawingml/2006/main">
+            <a:pPr algn="ctr">
+              <a:defRPr sz="900" b="1">
+                <a:solidFill>
+                  <a:srgbClr val="FFFFFF"/>
+                </a:solidFill>
+                <a:latin typeface="Menlo"/>
+                <a:ea typeface="Menlo"/>
+                <a:cs typeface="Menlo"/>
+              </a:defRPr>
+            </a:pPr>
+            <a:r>
+              <a:rPr sz="900" b="1">
+                <a:solidFill>
+                  <a:srgbClr val="FFFFFF"/>
+                </a:solidFill>
+                <a:latin typeface="Menlo"/>
+                <a:ea typeface="Menlo"/>
+                <a:cs typeface="Menlo"/>
+              </a:rPr>
+              <a:t>4</a:t>
+            </a:r>
+          </a:p>
+        </p:txBody>
+      </p:sp>
+      <p:sp>
+        <p:nvSpPr>
+          <p:cNvPr id="31" name="">
+            <a:extLst xmlns:a="http://schemas.openxmlformats.org/drawingml/2006/main">
+              <a:ext uri="{FF2B5EF4-FFF2-40B4-BE49-F238E27FC236}">
+                <a16:creationId xmlns:a16="http://schemas.microsoft.com/office/drawing/2014/main" id="{372BD654-01C6-482A-9045-8BC89EAD70E0}"/>
+              </a:ext>
+            </a:extLst>
+          </p:cNvPr>
+          <p:cNvSpPr>
+            <a:spLocks xmlns:a="http://schemas.openxmlformats.org/drawingml/2006/main" noGrp="1"/>
+          </p:cNvSpPr>
+          <p:nvPr/>
+        </p:nvSpPr>
+        <p:spPr>
+          <a:xfrm xmlns:a="http://schemas.openxmlformats.org/drawingml/2006/main">
+            <a:off x="3962400" y="3810000"/>
+            <a:ext cx="2000250" cy="266700"/>
+          </a:xfrm>
+          <a:prstGeom xmlns:a="http://schemas.openxmlformats.org/drawingml/2006/main" prst="rect">
+            <a:avLst/>
+          </a:prstGeom>
+          <a:ln xmlns:a="http://schemas.openxmlformats.org/drawingml/2006/main">
+            <a:noFill/>
+          </a:ln>
+        </p:spPr>
+        <p:txBody>
+          <a:bodyPr xmlns:a="http://schemas.openxmlformats.org/drawingml/2006/main" lIns="0" tIns="0" rIns="0" bIns="0" anchor="t">
+            <a:normAutofit fontScale="100000"/>
           </a:bodyPr>
           <a:lstStyle xmlns:a="http://schemas.openxmlformats.org/drawingml/2006/main"/>
           <a:p xmlns:a="http://schemas.openxmlformats.org/drawingml/2006/main">
             <a:pPr algn="l">
-              <a:defRPr sz="1275" b="0">
+              <a:defRPr sz="1425" b="1">
                 <a:solidFill>
                   <a:srgbClr val="111827"/>
                 </a:solidFill>
@@ -18189,7 +17766,7 @@
               </a:defRPr>
             </a:pPr>
             <a:r>
-              <a:rPr sz="1275" b="0">
+              <a:rPr sz="1425" b="1">
                 <a:solidFill>
                   <a:srgbClr val="111827"/>
                 </a:solidFill>
@@ -18197,29 +17774,59 @@
                 <a:ea typeface="PingFang SC"/>
                 <a:cs typeface="PingFang SC"/>
               </a:rPr>
-              <a:t>保留刷写前人工确认点</a:t>
-            </a:r>
-          </a:p>
-        </p:txBody>
-      </p:sp>
-      <p:sp>
-        <p:nvSpPr>
-          <p:cNvPr id="36" name="">
-            <a:extLst xmlns:a="http://schemas.openxmlformats.org/drawingml/2006/main">
-              <a:ext uri="{FF2B5EF4-FFF2-40B4-BE49-F238E27FC236}">
-                <a16:creationId xmlns:a16="http://schemas.microsoft.com/office/drawing/2014/main" id="{69DAEFDC-6C13-4CFC-9F6C-498BA91348AC}"/>
-              </a:ext>
-            </a:extLst>
-          </p:cNvPr>
-          <p:cNvSpPr>
-            <a:spLocks xmlns:a="http://schemas.openxmlformats.org/drawingml/2006/main" noGrp="1"/>
-          </p:cNvSpPr>
-          <p:nvPr/>
-        </p:nvSpPr>
-        <p:spPr>
-          <a:xfrm xmlns:a="http://schemas.openxmlformats.org/drawingml/2006/main">
-            <a:off x="3962400" y="3829050"/>
-            <a:ext cx="57150" cy="57150"/>
+              <a:t>人工确认</a:t>
+            </a:r>
+          </a:p>
+        </p:txBody>
+      </p:sp>
+      <p:sp>
+        <p:nvSpPr>
+          <p:cNvPr id="32" name="">
+            <a:extLst xmlns:a="http://schemas.openxmlformats.org/drawingml/2006/main">
+              <a:ext uri="{FF2B5EF4-FFF2-40B4-BE49-F238E27FC236}">
+                <a16:creationId xmlns:a16="http://schemas.microsoft.com/office/drawing/2014/main" id="{07822185-791B-4B61-9BFF-134287E01439}"/>
+              </a:ext>
+            </a:extLst>
+          </p:cNvPr>
+          <p:cNvSpPr>
+            <a:spLocks xmlns:a="http://schemas.openxmlformats.org/drawingml/2006/main" noGrp="1"/>
+          </p:cNvSpPr>
+          <p:nvPr/>
+        </p:nvSpPr>
+        <p:spPr>
+          <a:xfrm xmlns:a="http://schemas.openxmlformats.org/drawingml/2006/main">
+            <a:off x="3667125" y="4086225"/>
+            <a:ext cx="9525" cy="266700"/>
+          </a:xfrm>
+          <a:prstGeom xmlns:a="http://schemas.openxmlformats.org/drawingml/2006/main" prst="rect">
+            <a:avLst/>
+          </a:prstGeom>
+          <a:solidFill xmlns:a="http://schemas.openxmlformats.org/drawingml/2006/main">
+            <a:srgbClr val="E6EBF2"/>
+          </a:solidFill>
+          <a:ln xmlns:a="http://schemas.openxmlformats.org/drawingml/2006/main">
+            <a:noFill/>
+          </a:ln>
+        </p:spPr>
+      </p:sp>
+      <p:sp>
+        <p:nvSpPr>
+          <p:cNvPr id="33" name="">
+            <a:extLst xmlns:a="http://schemas.openxmlformats.org/drawingml/2006/main">
+              <a:ext uri="{FF2B5EF4-FFF2-40B4-BE49-F238E27FC236}">
+                <a16:creationId xmlns:a16="http://schemas.microsoft.com/office/drawing/2014/main" id="{ABB5F619-F3A6-4250-93B9-9E603D135468}"/>
+              </a:ext>
+            </a:extLst>
+          </p:cNvPr>
+          <p:cNvSpPr>
+            <a:spLocks xmlns:a="http://schemas.openxmlformats.org/drawingml/2006/main" noGrp="1"/>
+          </p:cNvSpPr>
+          <p:nvPr/>
+        </p:nvSpPr>
+        <p:spPr>
+          <a:xfrm xmlns:a="http://schemas.openxmlformats.org/drawingml/2006/main">
+            <a:off x="3562350" y="4429125"/>
+            <a:ext cx="209550" cy="209550"/>
           </a:xfrm>
           <a:prstGeom xmlns:a="http://schemas.openxmlformats.org/drawingml/2006/main" prst="rect">
             <a:avLst/>
@@ -18234,100 +17841,22 @@
       </p:sp>
       <p:sp>
         <p:nvSpPr>
-          <p:cNvPr id="37" name="">
-            <a:extLst xmlns:a="http://schemas.openxmlformats.org/drawingml/2006/main">
-              <a:ext uri="{FF2B5EF4-FFF2-40B4-BE49-F238E27FC236}">
-                <a16:creationId xmlns:a16="http://schemas.microsoft.com/office/drawing/2014/main" id="{3D99912A-EFE6-419F-BF14-9BEFBE464C60}"/>
-              </a:ext>
-            </a:extLst>
-          </p:cNvPr>
-          <p:cNvSpPr>
-            <a:spLocks xmlns:a="http://schemas.openxmlformats.org/drawingml/2006/main" noGrp="1"/>
-          </p:cNvSpPr>
-          <p:nvPr/>
-        </p:nvSpPr>
-        <p:spPr>
-          <a:xfrm xmlns:a="http://schemas.openxmlformats.org/drawingml/2006/main">
-            <a:off x="4114800" y="3752850"/>
-            <a:ext cx="1466850" cy="381000"/>
-          </a:xfrm>
-          <a:prstGeom xmlns:a="http://schemas.openxmlformats.org/drawingml/2006/main" prst="rect">
-            <a:avLst/>
-          </a:prstGeom>
-          <a:ln xmlns:a="http://schemas.openxmlformats.org/drawingml/2006/main">
-            <a:noFill/>
-          </a:ln>
-        </p:spPr>
-        <p:txBody>
-          <a:bodyPr xmlns:a="http://schemas.openxmlformats.org/drawingml/2006/main" lIns="0" tIns="0" rIns="0" bIns="0" anchor="t">
-            <a:normAutofit fontScale="98039"/>
-          </a:bodyPr>
-          <a:lstStyle xmlns:a="http://schemas.openxmlformats.org/drawingml/2006/main"/>
-          <a:p xmlns:a="http://schemas.openxmlformats.org/drawingml/2006/main">
-            <a:pPr algn="l">
-              <a:defRPr sz="1275" b="0">
-                <a:solidFill>
-                  <a:srgbClr val="111827"/>
-                </a:solidFill>
-                <a:latin typeface="PingFang SC"/>
-                <a:ea typeface="PingFang SC"/>
-                <a:cs typeface="PingFang SC"/>
-              </a:defRPr>
-            </a:pPr>
-            <a:r>
-              <a:rPr sz="1275" b="0">
-                <a:solidFill>
-                  <a:srgbClr val="111827"/>
-                </a:solidFill>
-                <a:latin typeface="PingFang SC"/>
-                <a:ea typeface="PingFang SC"/>
-                <a:cs typeface="PingFang SC"/>
-              </a:rPr>
-              <a:t>输出原始日志和结构化报告</a:t>
-            </a:r>
-          </a:p>
-        </p:txBody>
-      </p:sp>
-      <p:pic>
-        <p:nvPicPr>
-          <p:cNvPr id="38" name=""/>
-          <p:cNvPicPr>
-            <a:picLocks xmlns:a="http://schemas.openxmlformats.org/drawingml/2006/main" noChangeAspect="1"/>
-          </p:cNvPicPr>
-          <p:nvPr/>
-        </p:nvPicPr>
-        <p:blipFill>
-          <a:blip xmlns:r="http://schemas.openxmlformats.org/officeDocument/2006/relationships" xmlns:a="http://schemas.openxmlformats.org/drawingml/2006/main" r:embed="R3691ff396f6c4a4e"/>
-          <a:stretch xmlns:a="http://schemas.openxmlformats.org/drawingml/2006/main"/>
-        </p:blipFill>
-        <p:spPr>
-          <a:xfrm xmlns:a="http://schemas.openxmlformats.org/drawingml/2006/main">
-            <a:off x="6509939" y="1809750"/>
-            <a:ext cx="2601121" cy="3790950"/>
-          </a:xfrm>
-          <a:prstGeom xmlns:a="http://schemas.openxmlformats.org/drawingml/2006/main" prst="rect">
-            <a:avLst/>
-          </a:prstGeom>
-        </p:spPr>
-      </p:pic>
-      <p:sp>
-        <p:nvSpPr>
-          <p:cNvPr id="39" name="">
-            <a:extLst xmlns:a="http://schemas.openxmlformats.org/drawingml/2006/main">
-              <a:ext uri="{FF2B5EF4-FFF2-40B4-BE49-F238E27FC236}">
-                <a16:creationId xmlns:a16="http://schemas.microsoft.com/office/drawing/2014/main" id="{812514C5-19ED-458A-9C04-B20B41A41BC9}"/>
-              </a:ext>
-            </a:extLst>
-          </p:cNvPr>
-          <p:cNvSpPr>
-            <a:spLocks xmlns:a="http://schemas.openxmlformats.org/drawingml/2006/main" noGrp="1"/>
-          </p:cNvSpPr>
-          <p:nvPr/>
-        </p:nvSpPr>
-        <p:spPr>
-          <a:xfrm xmlns:a="http://schemas.openxmlformats.org/drawingml/2006/main">
-            <a:off x="6381750" y="5676900"/>
-            <a:ext cx="2857500" cy="190500"/>
+          <p:cNvPr id="34" name="">
+            <a:extLst xmlns:a="http://schemas.openxmlformats.org/drawingml/2006/main">
+              <a:ext uri="{FF2B5EF4-FFF2-40B4-BE49-F238E27FC236}">
+                <a16:creationId xmlns:a16="http://schemas.microsoft.com/office/drawing/2014/main" id="{4DA64AB4-AEE3-46EA-BF30-CBA72D6BFD8C}"/>
+              </a:ext>
+            </a:extLst>
+          </p:cNvPr>
+          <p:cNvSpPr>
+            <a:spLocks xmlns:a="http://schemas.openxmlformats.org/drawingml/2006/main" noGrp="1"/>
+          </p:cNvSpPr>
+          <p:nvPr/>
+        </p:nvSpPr>
+        <p:spPr>
+          <a:xfrm xmlns:a="http://schemas.openxmlformats.org/drawingml/2006/main">
+            <a:off x="3562350" y="4457700"/>
+            <a:ext cx="209550" cy="152400"/>
           </a:xfrm>
           <a:prstGeom xmlns:a="http://schemas.openxmlformats.org/drawingml/2006/main" prst="rect">
             <a:avLst/>
@@ -18345,23 +17874,251 @@
             <a:pPr algn="ctr">
               <a:defRPr sz="900" b="1">
                 <a:solidFill>
-                  <a:srgbClr val="5B6472"/>
-                </a:solidFill>
-                <a:latin typeface="PingFang SC"/>
-                <a:ea typeface="PingFang SC"/>
-                <a:cs typeface="PingFang SC"/>
+                  <a:srgbClr val="FFFFFF"/>
+                </a:solidFill>
+                <a:latin typeface="Menlo"/>
+                <a:ea typeface="Menlo"/>
+                <a:cs typeface="Menlo"/>
               </a:defRPr>
             </a:pPr>
             <a:r>
               <a:rPr sz="900" b="1">
                 <a:solidFill>
-                  <a:srgbClr val="5B6472"/>
-                </a:solidFill>
-                <a:latin typeface="PingFang SC"/>
-                <a:ea typeface="PingFang SC"/>
-                <a:cs typeface="PingFang SC"/>
-              </a:rPr>
-              <a:t>验证日志截图</a:t>
+                  <a:srgbClr val="FFFFFF"/>
+                </a:solidFill>
+                <a:latin typeface="Menlo"/>
+                <a:ea typeface="Menlo"/>
+                <a:cs typeface="Menlo"/>
+              </a:rPr>
+              <a:t>5</a:t>
+            </a:r>
+          </a:p>
+        </p:txBody>
+      </p:sp>
+      <p:sp>
+        <p:nvSpPr>
+          <p:cNvPr id="35" name="">
+            <a:extLst xmlns:a="http://schemas.openxmlformats.org/drawingml/2006/main">
+              <a:ext uri="{FF2B5EF4-FFF2-40B4-BE49-F238E27FC236}">
+                <a16:creationId xmlns:a16="http://schemas.microsoft.com/office/drawing/2014/main" id="{B4ED1B70-0A6A-4833-A807-3D3BC56EBDD9}"/>
+              </a:ext>
+            </a:extLst>
+          </p:cNvPr>
+          <p:cNvSpPr>
+            <a:spLocks xmlns:a="http://schemas.openxmlformats.org/drawingml/2006/main" noGrp="1"/>
+          </p:cNvSpPr>
+          <p:nvPr/>
+        </p:nvSpPr>
+        <p:spPr>
+          <a:xfrm xmlns:a="http://schemas.openxmlformats.org/drawingml/2006/main">
+            <a:off x="3962400" y="4400550"/>
+            <a:ext cx="2000250" cy="266700"/>
+          </a:xfrm>
+          <a:prstGeom xmlns:a="http://schemas.openxmlformats.org/drawingml/2006/main" prst="rect">
+            <a:avLst/>
+          </a:prstGeom>
+          <a:ln xmlns:a="http://schemas.openxmlformats.org/drawingml/2006/main">
+            <a:noFill/>
+          </a:ln>
+        </p:spPr>
+        <p:txBody>
+          <a:bodyPr xmlns:a="http://schemas.openxmlformats.org/drawingml/2006/main" lIns="0" tIns="0" rIns="0" bIns="0" anchor="t">
+            <a:normAutofit fontScale="100000"/>
+          </a:bodyPr>
+          <a:lstStyle xmlns:a="http://schemas.openxmlformats.org/drawingml/2006/main"/>
+          <a:p xmlns:a="http://schemas.openxmlformats.org/drawingml/2006/main">
+            <a:pPr algn="l">
+              <a:defRPr sz="1425" b="1">
+                <a:solidFill>
+                  <a:srgbClr val="111827"/>
+                </a:solidFill>
+                <a:latin typeface="PingFang SC"/>
+                <a:ea typeface="PingFang SC"/>
+                <a:cs typeface="PingFang SC"/>
+              </a:defRPr>
+            </a:pPr>
+            <a:r>
+              <a:rPr sz="1425" b="1">
+                <a:solidFill>
+                  <a:srgbClr val="111827"/>
+                </a:solidFill>
+                <a:latin typeface="PingFang SC"/>
+                <a:ea typeface="PingFang SC"/>
+                <a:cs typeface="PingFang SC"/>
+              </a:rPr>
+              <a:t>系统侧采集</a:t>
+            </a:r>
+          </a:p>
+        </p:txBody>
+      </p:sp>
+      <p:sp>
+        <p:nvSpPr>
+          <p:cNvPr id="36" name="">
+            <a:extLst xmlns:a="http://schemas.openxmlformats.org/drawingml/2006/main">
+              <a:ext uri="{FF2B5EF4-FFF2-40B4-BE49-F238E27FC236}">
+                <a16:creationId xmlns:a16="http://schemas.microsoft.com/office/drawing/2014/main" id="{5A052992-9A45-4658-9FA3-8D4DE7334791}"/>
+              </a:ext>
+            </a:extLst>
+          </p:cNvPr>
+          <p:cNvSpPr>
+            <a:spLocks xmlns:a="http://schemas.openxmlformats.org/drawingml/2006/main" noGrp="1"/>
+          </p:cNvSpPr>
+          <p:nvPr/>
+        </p:nvSpPr>
+        <p:spPr>
+          <a:xfrm xmlns:a="http://schemas.openxmlformats.org/drawingml/2006/main">
+            <a:off x="3667125" y="4676775"/>
+            <a:ext cx="9525" cy="266700"/>
+          </a:xfrm>
+          <a:prstGeom xmlns:a="http://schemas.openxmlformats.org/drawingml/2006/main" prst="rect">
+            <a:avLst/>
+          </a:prstGeom>
+          <a:solidFill xmlns:a="http://schemas.openxmlformats.org/drawingml/2006/main">
+            <a:srgbClr val="E6EBF2"/>
+          </a:solidFill>
+          <a:ln xmlns:a="http://schemas.openxmlformats.org/drawingml/2006/main">
+            <a:noFill/>
+          </a:ln>
+        </p:spPr>
+      </p:sp>
+      <p:sp>
+        <p:nvSpPr>
+          <p:cNvPr id="37" name="">
+            <a:extLst xmlns:a="http://schemas.openxmlformats.org/drawingml/2006/main">
+              <a:ext uri="{FF2B5EF4-FFF2-40B4-BE49-F238E27FC236}">
+                <a16:creationId xmlns:a16="http://schemas.microsoft.com/office/drawing/2014/main" id="{B4983313-3F8A-455C-B855-815AA4D9D071}"/>
+              </a:ext>
+            </a:extLst>
+          </p:cNvPr>
+          <p:cNvSpPr>
+            <a:spLocks xmlns:a="http://schemas.openxmlformats.org/drawingml/2006/main" noGrp="1"/>
+          </p:cNvSpPr>
+          <p:nvPr/>
+        </p:nvSpPr>
+        <p:spPr>
+          <a:xfrm xmlns:a="http://schemas.openxmlformats.org/drawingml/2006/main">
+            <a:off x="3562350" y="5019675"/>
+            <a:ext cx="209550" cy="209550"/>
+          </a:xfrm>
+          <a:prstGeom xmlns:a="http://schemas.openxmlformats.org/drawingml/2006/main" prst="rect">
+            <a:avLst/>
+          </a:prstGeom>
+          <a:solidFill xmlns:a="http://schemas.openxmlformats.org/drawingml/2006/main">
+            <a:srgbClr val="145CFF"/>
+          </a:solidFill>
+          <a:ln xmlns:a="http://schemas.openxmlformats.org/drawingml/2006/main">
+            <a:noFill/>
+          </a:ln>
+        </p:spPr>
+      </p:sp>
+      <p:sp>
+        <p:nvSpPr>
+          <p:cNvPr id="38" name="">
+            <a:extLst xmlns:a="http://schemas.openxmlformats.org/drawingml/2006/main">
+              <a:ext uri="{FF2B5EF4-FFF2-40B4-BE49-F238E27FC236}">
+                <a16:creationId xmlns:a16="http://schemas.microsoft.com/office/drawing/2014/main" id="{C88EADE8-5F9F-4278-916D-F2CCFEE61F05}"/>
+              </a:ext>
+            </a:extLst>
+          </p:cNvPr>
+          <p:cNvSpPr>
+            <a:spLocks xmlns:a="http://schemas.openxmlformats.org/drawingml/2006/main" noGrp="1"/>
+          </p:cNvSpPr>
+          <p:nvPr/>
+        </p:nvSpPr>
+        <p:spPr>
+          <a:xfrm xmlns:a="http://schemas.openxmlformats.org/drawingml/2006/main">
+            <a:off x="3562350" y="5048250"/>
+            <a:ext cx="209550" cy="152400"/>
+          </a:xfrm>
+          <a:prstGeom xmlns:a="http://schemas.openxmlformats.org/drawingml/2006/main" prst="rect">
+            <a:avLst/>
+          </a:prstGeom>
+          <a:ln xmlns:a="http://schemas.openxmlformats.org/drawingml/2006/main">
+            <a:noFill/>
+          </a:ln>
+        </p:spPr>
+        <p:txBody>
+          <a:bodyPr xmlns:a="http://schemas.openxmlformats.org/drawingml/2006/main" lIns="0" tIns="0" rIns="0" bIns="0" anchor="t">
+            <a:normAutofit fontScale="100000"/>
+          </a:bodyPr>
+          <a:lstStyle xmlns:a="http://schemas.openxmlformats.org/drawingml/2006/main"/>
+          <a:p xmlns:a="http://schemas.openxmlformats.org/drawingml/2006/main">
+            <a:pPr algn="ctr">
+              <a:defRPr sz="900" b="1">
+                <a:solidFill>
+                  <a:srgbClr val="FFFFFF"/>
+                </a:solidFill>
+                <a:latin typeface="Menlo"/>
+                <a:ea typeface="Menlo"/>
+                <a:cs typeface="Menlo"/>
+              </a:defRPr>
+            </a:pPr>
+            <a:r>
+              <a:rPr sz="900" b="1">
+                <a:solidFill>
+                  <a:srgbClr val="FFFFFF"/>
+                </a:solidFill>
+                <a:latin typeface="Menlo"/>
+                <a:ea typeface="Menlo"/>
+                <a:cs typeface="Menlo"/>
+              </a:rPr>
+              <a:t>6</a:t>
+            </a:r>
+          </a:p>
+        </p:txBody>
+      </p:sp>
+      <p:sp>
+        <p:nvSpPr>
+          <p:cNvPr id="39" name="">
+            <a:extLst xmlns:a="http://schemas.openxmlformats.org/drawingml/2006/main">
+              <a:ext uri="{FF2B5EF4-FFF2-40B4-BE49-F238E27FC236}">
+                <a16:creationId xmlns:a16="http://schemas.microsoft.com/office/drawing/2014/main" id="{FCF83D42-32EF-44D7-A92D-9400E525D9FA}"/>
+              </a:ext>
+            </a:extLst>
+          </p:cNvPr>
+          <p:cNvSpPr>
+            <a:spLocks xmlns:a="http://schemas.openxmlformats.org/drawingml/2006/main" noGrp="1"/>
+          </p:cNvSpPr>
+          <p:nvPr/>
+        </p:nvSpPr>
+        <p:spPr>
+          <a:xfrm xmlns:a="http://schemas.openxmlformats.org/drawingml/2006/main">
+            <a:off x="3962400" y="4991100"/>
+            <a:ext cx="2000250" cy="266700"/>
+          </a:xfrm>
+          <a:prstGeom xmlns:a="http://schemas.openxmlformats.org/drawingml/2006/main" prst="rect">
+            <a:avLst/>
+          </a:prstGeom>
+          <a:ln xmlns:a="http://schemas.openxmlformats.org/drawingml/2006/main">
+            <a:noFill/>
+          </a:ln>
+        </p:spPr>
+        <p:txBody>
+          <a:bodyPr xmlns:a="http://schemas.openxmlformats.org/drawingml/2006/main" lIns="0" tIns="0" rIns="0" bIns="0" anchor="t">
+            <a:normAutofit fontScale="100000"/>
+          </a:bodyPr>
+          <a:lstStyle xmlns:a="http://schemas.openxmlformats.org/drawingml/2006/main"/>
+          <a:p xmlns:a="http://schemas.openxmlformats.org/drawingml/2006/main">
+            <a:pPr algn="l">
+              <a:defRPr sz="1425" b="1">
+                <a:solidFill>
+                  <a:srgbClr val="111827"/>
+                </a:solidFill>
+                <a:latin typeface="PingFang SC"/>
+                <a:ea typeface="PingFang SC"/>
+                <a:cs typeface="PingFang SC"/>
+              </a:defRPr>
+            </a:pPr>
+            <a:r>
+              <a:rPr sz="1425" b="1">
+                <a:solidFill>
+                  <a:srgbClr val="111827"/>
+                </a:solidFill>
+                <a:latin typeface="PingFang SC"/>
+                <a:ea typeface="PingFang SC"/>
+                <a:cs typeface="PingFang SC"/>
+              </a:rPr>
+              <a:t>报告生成</a:t>
             </a:r>
           </a:p>
         </p:txBody>
@@ -18375,11 +18132,89 @@
           <p:nvPr/>
         </p:nvPicPr>
         <p:blipFill>
-          <a:blip xmlns:r="http://schemas.openxmlformats.org/officeDocument/2006/relationships" xmlns:a="http://schemas.openxmlformats.org/drawingml/2006/main" r:embed="R527a09cc4dae4a32"/>
+          <a:blip xmlns:r="http://schemas.openxmlformats.org/officeDocument/2006/relationships" xmlns:a="http://schemas.openxmlformats.org/drawingml/2006/main" r:embed="R16d33a5448754678"/>
           <a:stretch xmlns:a="http://schemas.openxmlformats.org/drawingml/2006/main"/>
         </p:blipFill>
         <p:spPr>
           <a:xfrm xmlns:a="http://schemas.openxmlformats.org/drawingml/2006/main">
+            <a:off x="6509939" y="1809750"/>
+            <a:ext cx="2601121" cy="3790950"/>
+          </a:xfrm>
+          <a:prstGeom xmlns:a="http://schemas.openxmlformats.org/drawingml/2006/main" prst="rect">
+            <a:avLst/>
+          </a:prstGeom>
+        </p:spPr>
+      </p:pic>
+      <p:sp>
+        <p:nvSpPr>
+          <p:cNvPr id="41" name="">
+            <a:extLst xmlns:a="http://schemas.openxmlformats.org/drawingml/2006/main">
+              <a:ext uri="{FF2B5EF4-FFF2-40B4-BE49-F238E27FC236}">
+                <a16:creationId xmlns:a16="http://schemas.microsoft.com/office/drawing/2014/main" id="{2E874144-20EC-42E7-BB1B-ABF49E01553E}"/>
+              </a:ext>
+            </a:extLst>
+          </p:cNvPr>
+          <p:cNvSpPr>
+            <a:spLocks xmlns:a="http://schemas.openxmlformats.org/drawingml/2006/main" noGrp="1"/>
+          </p:cNvSpPr>
+          <p:nvPr/>
+        </p:nvSpPr>
+        <p:spPr>
+          <a:xfrm xmlns:a="http://schemas.openxmlformats.org/drawingml/2006/main">
+            <a:off x="6381750" y="5676900"/>
+            <a:ext cx="2857500" cy="190500"/>
+          </a:xfrm>
+          <a:prstGeom xmlns:a="http://schemas.openxmlformats.org/drawingml/2006/main" prst="rect">
+            <a:avLst/>
+          </a:prstGeom>
+          <a:ln xmlns:a="http://schemas.openxmlformats.org/drawingml/2006/main">
+            <a:noFill/>
+          </a:ln>
+        </p:spPr>
+        <p:txBody>
+          <a:bodyPr xmlns:a="http://schemas.openxmlformats.org/drawingml/2006/main" lIns="0" tIns="0" rIns="0" bIns="0" anchor="t">
+            <a:normAutofit fontScale="100000"/>
+          </a:bodyPr>
+          <a:lstStyle xmlns:a="http://schemas.openxmlformats.org/drawingml/2006/main"/>
+          <a:p xmlns:a="http://schemas.openxmlformats.org/drawingml/2006/main">
+            <a:pPr algn="ctr">
+              <a:defRPr sz="900" b="1">
+                <a:solidFill>
+                  <a:srgbClr val="5B6472"/>
+                </a:solidFill>
+                <a:latin typeface="PingFang SC"/>
+                <a:ea typeface="PingFang SC"/>
+                <a:cs typeface="PingFang SC"/>
+              </a:defRPr>
+            </a:pPr>
+            <a:r>
+              <a:rPr sz="900" b="1">
+                <a:solidFill>
+                  <a:srgbClr val="5B6472"/>
+                </a:solidFill>
+                <a:latin typeface="PingFang SC"/>
+                <a:ea typeface="PingFang SC"/>
+                <a:cs typeface="PingFang SC"/>
+              </a:rPr>
+              <a:t>验证日志截图</a:t>
+            </a:r>
+          </a:p>
+        </p:txBody>
+      </p:sp>
+      <p:pic>
+        <p:nvPicPr>
+          <p:cNvPr id="42" name=""/>
+          <p:cNvPicPr>
+            <a:picLocks xmlns:a="http://schemas.openxmlformats.org/drawingml/2006/main" noChangeAspect="1"/>
+          </p:cNvPicPr>
+          <p:nvPr/>
+        </p:nvPicPr>
+        <p:blipFill>
+          <a:blip xmlns:r="http://schemas.openxmlformats.org/officeDocument/2006/relationships" xmlns:a="http://schemas.openxmlformats.org/drawingml/2006/main" r:embed="R33e762781b3941d4"/>
+          <a:stretch xmlns:a="http://schemas.openxmlformats.org/drawingml/2006/main"/>
+        </p:blipFill>
+        <p:spPr>
+          <a:xfrm xmlns:a="http://schemas.openxmlformats.org/drawingml/2006/main">
             <a:off x="9429750" y="2703869"/>
             <a:ext cx="1809750" cy="2002712"/>
           </a:xfrm>
@@ -18390,10 +18225,10 @@
       </p:pic>
       <p:sp>
         <p:nvSpPr>
-          <p:cNvPr id="41" name="">
-            <a:extLst xmlns:a="http://schemas.openxmlformats.org/drawingml/2006/main">
-              <a:ext uri="{FF2B5EF4-FFF2-40B4-BE49-F238E27FC236}">
-                <a16:creationId xmlns:a16="http://schemas.microsoft.com/office/drawing/2014/main" id="{F3851A02-7A8D-465D-A916-A7625026253D}"/>
+          <p:cNvPr id="43" name="">
+            <a:extLst xmlns:a="http://schemas.openxmlformats.org/drawingml/2006/main">
+              <a:ext uri="{FF2B5EF4-FFF2-40B4-BE49-F238E27FC236}">
+                <a16:creationId xmlns:a16="http://schemas.microsoft.com/office/drawing/2014/main" id="{E926D9DF-3A91-4584-84F1-EE123958ABD7}"/>
               </a:ext>
             </a:extLst>
           </p:cNvPr>
@@ -18447,7 +18282,7 @@
     </p:spTree>
     <p:extLst>
       <p:ext uri="{BB962C8B-B14F-4D97-AF65-F5344CB8AC3E}">
-        <p14:creationId xmlns:p14="http://schemas.microsoft.com/office/powerpoint/2010/main" val="1361197324"/>
+        <p14:creationId xmlns:p14="http://schemas.microsoft.com/office/powerpoint/2010/main" val="86969742"/>
       </p:ext>
     </p:extLst>
   </p:cSld>
@@ -18478,7 +18313,7 @@
           <p:cNvPr id="1" name="">
             <a:extLst xmlns:a="http://schemas.openxmlformats.org/drawingml/2006/main">
               <a:ext uri="{FF2B5EF4-FFF2-40B4-BE49-F238E27FC236}">
-                <a16:creationId xmlns:a16="http://schemas.microsoft.com/office/drawing/2014/main" id="{9B8416F0-4EC9-4A13-A20B-6B38579A590F}"/>
+                <a16:creationId xmlns:a16="http://schemas.microsoft.com/office/drawing/2014/main" id="{3ADDE071-397A-4E33-8AFE-BF00EF0FCBD7}"/>
               </a:ext>
             </a:extLst>
           </p:cNvPr>
@@ -18508,7 +18343,7 @@
           <p:cNvPr id="2" name="">
             <a:extLst xmlns:a="http://schemas.openxmlformats.org/drawingml/2006/main">
               <a:ext uri="{FF2B5EF4-FFF2-40B4-BE49-F238E27FC236}">
-                <a16:creationId xmlns:a16="http://schemas.microsoft.com/office/drawing/2014/main" id="{25484278-1CD5-4036-812F-3E1F5EC2ED69}"/>
+                <a16:creationId xmlns:a16="http://schemas.microsoft.com/office/drawing/2014/main" id="{497F3D6D-6059-463F-A1BE-9CC3A638C510}"/>
               </a:ext>
             </a:extLst>
           </p:cNvPr>
@@ -18538,7 +18373,7 @@
           <p:cNvPr id="3" name="">
             <a:extLst xmlns:a="http://schemas.openxmlformats.org/drawingml/2006/main">
               <a:ext uri="{FF2B5EF4-FFF2-40B4-BE49-F238E27FC236}">
-                <a16:creationId xmlns:a16="http://schemas.microsoft.com/office/drawing/2014/main" id="{0BECCC21-2DCD-4509-8688-A0A31889AC42}"/>
+                <a16:creationId xmlns:a16="http://schemas.microsoft.com/office/drawing/2014/main" id="{2D197FFF-5006-49BE-869B-734010AF0406}"/>
               </a:ext>
             </a:extLst>
           </p:cNvPr>
@@ -18594,7 +18429,7 @@
           <p:cNvPr id="4" name="">
             <a:extLst xmlns:a="http://schemas.openxmlformats.org/drawingml/2006/main">
               <a:ext uri="{FF2B5EF4-FFF2-40B4-BE49-F238E27FC236}">
-                <a16:creationId xmlns:a16="http://schemas.microsoft.com/office/drawing/2014/main" id="{840CED40-8777-4683-9360-DE2A161934B0}"/>
+                <a16:creationId xmlns:a16="http://schemas.microsoft.com/office/drawing/2014/main" id="{34D85028-FE88-49BB-B85A-9B8A53E46749}"/>
               </a:ext>
             </a:extLst>
           </p:cNvPr>
@@ -18650,7 +18485,7 @@
           <p:cNvPr id="5" name="">
             <a:extLst xmlns:a="http://schemas.openxmlformats.org/drawingml/2006/main">
               <a:ext uri="{FF2B5EF4-FFF2-40B4-BE49-F238E27FC236}">
-                <a16:creationId xmlns:a16="http://schemas.microsoft.com/office/drawing/2014/main" id="{16B1128A-8575-46EE-915E-03D0D09F3773}"/>
+                <a16:creationId xmlns:a16="http://schemas.microsoft.com/office/drawing/2014/main" id="{073375EB-13B8-4E72-B3B2-71F4B4F6601A}"/>
               </a:ext>
             </a:extLst>
           </p:cNvPr>
@@ -18680,7 +18515,7 @@
           <p:cNvPr id="6" name="">
             <a:extLst xmlns:a="http://schemas.openxmlformats.org/drawingml/2006/main">
               <a:ext uri="{FF2B5EF4-FFF2-40B4-BE49-F238E27FC236}">
-                <a16:creationId xmlns:a16="http://schemas.microsoft.com/office/drawing/2014/main" id="{3E8809E3-F8F6-4AEA-93BA-C7116EECDAA3}"/>
+                <a16:creationId xmlns:a16="http://schemas.microsoft.com/office/drawing/2014/main" id="{89428DD3-42FB-4860-B2E4-AA59083F5A51}"/>
               </a:ext>
             </a:extLst>
           </p:cNvPr>
@@ -18736,7 +18571,7 @@
           <p:cNvPr id="7" name="">
             <a:extLst xmlns:a="http://schemas.openxmlformats.org/drawingml/2006/main">
               <a:ext uri="{FF2B5EF4-FFF2-40B4-BE49-F238E27FC236}">
-                <a16:creationId xmlns:a16="http://schemas.microsoft.com/office/drawing/2014/main" id="{FC028D9F-B656-4988-AB45-C98DF4BEA0BA}"/>
+                <a16:creationId xmlns:a16="http://schemas.microsoft.com/office/drawing/2014/main" id="{6ABB217C-7ABB-45F6-938A-966360EC0196}"/>
               </a:ext>
             </a:extLst>
           </p:cNvPr>
@@ -18770,7 +18605,7 @@
           <p:cNvPr id="8" name="">
             <a:extLst xmlns:a="http://schemas.openxmlformats.org/drawingml/2006/main">
               <a:ext uri="{FF2B5EF4-FFF2-40B4-BE49-F238E27FC236}">
-                <a16:creationId xmlns:a16="http://schemas.microsoft.com/office/drawing/2014/main" id="{000D2F79-EEFF-438E-80D1-DA7DB43B3C91}"/>
+                <a16:creationId xmlns:a16="http://schemas.microsoft.com/office/drawing/2014/main" id="{A2D48668-226D-4112-885F-3DE9B789A028}"/>
               </a:ext>
             </a:extLst>
           </p:cNvPr>
@@ -18793,7 +18628,7 @@
         </p:spPr>
         <p:txBody>
           <a:bodyPr xmlns:a="http://schemas.openxmlformats.org/drawingml/2006/main" lIns="0" tIns="0" rIns="0" bIns="0" anchor="ctr">
-            <a:normAutofit fontScale="85034"/>
+            <a:normAutofit fontScale="100000"/>
           </a:bodyPr>
           <a:lstStyle xmlns:a="http://schemas.openxmlformats.org/drawingml/2006/main"/>
           <a:p xmlns:a="http://schemas.openxmlformats.org/drawingml/2006/main">
@@ -18839,7 +18674,7 @@
                 <a:ea typeface="PingFang SC"/>
                 <a:cs typeface="PingFang SC"/>
               </a:rPr>
-              <a:t>旧平台实现</a:t>
+              <a:t>脚本提取</a:t>
             </a:r>
           </a:p>
         </p:txBody>
@@ -18849,7 +18684,7 @@
           <p:cNvPr id="9" name="">
             <a:extLst xmlns:a="http://schemas.openxmlformats.org/drawingml/2006/main">
               <a:ext uri="{FF2B5EF4-FFF2-40B4-BE49-F238E27FC236}">
-                <a16:creationId xmlns:a16="http://schemas.microsoft.com/office/drawing/2014/main" id="{2FF3A63A-3256-4700-8A6C-8BCEE181CD5F}"/>
+                <a16:creationId xmlns:a16="http://schemas.microsoft.com/office/drawing/2014/main" id="{E33C1504-84FA-4998-A8BF-C7D5873776CE}"/>
               </a:ext>
             </a:extLst>
           </p:cNvPr>
@@ -18905,7 +18740,7 @@
           <p:cNvPr id="10" name="">
             <a:extLst xmlns:a="http://schemas.openxmlformats.org/drawingml/2006/main">
               <a:ext uri="{FF2B5EF4-FFF2-40B4-BE49-F238E27FC236}">
-                <a16:creationId xmlns:a16="http://schemas.microsoft.com/office/drawing/2014/main" id="{C7626C6D-0287-47CD-9A50-B97F2518DA01}"/>
+                <a16:creationId xmlns:a16="http://schemas.microsoft.com/office/drawing/2014/main" id="{B91A1E0C-D59A-49DF-A31A-5F0C5FB851DC}"/>
               </a:ext>
             </a:extLst>
           </p:cNvPr>
@@ -18939,7 +18774,7 @@
           <p:cNvPr id="11" name="">
             <a:extLst xmlns:a="http://schemas.openxmlformats.org/drawingml/2006/main">
               <a:ext uri="{FF2B5EF4-FFF2-40B4-BE49-F238E27FC236}">
-                <a16:creationId xmlns:a16="http://schemas.microsoft.com/office/drawing/2014/main" id="{464A339E-7B90-4B55-B2C4-343EEE0FA2F0}"/>
+                <a16:creationId xmlns:a16="http://schemas.microsoft.com/office/drawing/2014/main" id="{2F68627E-E4AE-4028-A2E0-65F0436DD7F5}"/>
               </a:ext>
             </a:extLst>
           </p:cNvPr>
@@ -18985,7 +18820,7 @@
                 <a:ea typeface="PingFang SC"/>
                 <a:cs typeface="PingFang SC"/>
               </a:rPr>
-              <a:t>规则整理</a:t>
+              <a:t>边界约束</a:t>
             </a:r>
           </a:p>
         </p:txBody>
@@ -18995,7 +18830,7 @@
           <p:cNvPr id="12" name="">
             <a:extLst xmlns:a="http://schemas.openxmlformats.org/drawingml/2006/main">
               <a:ext uri="{FF2B5EF4-FFF2-40B4-BE49-F238E27FC236}">
-                <a16:creationId xmlns:a16="http://schemas.microsoft.com/office/drawing/2014/main" id="{21F1081A-0B13-469A-8B7B-A5D67C1D54A6}"/>
+                <a16:creationId xmlns:a16="http://schemas.microsoft.com/office/drawing/2014/main" id="{9D775433-66AC-485B-9474-CD060335067F}"/>
               </a:ext>
             </a:extLst>
           </p:cNvPr>
@@ -19051,7 +18886,7 @@
           <p:cNvPr id="13" name="">
             <a:extLst xmlns:a="http://schemas.openxmlformats.org/drawingml/2006/main">
               <a:ext uri="{FF2B5EF4-FFF2-40B4-BE49-F238E27FC236}">
-                <a16:creationId xmlns:a16="http://schemas.microsoft.com/office/drawing/2014/main" id="{8294A043-615E-4B61-BCF9-5806AF4FAEBF}"/>
+                <a16:creationId xmlns:a16="http://schemas.microsoft.com/office/drawing/2014/main" id="{13B0EEE7-0440-4306-98C1-D9299C45196A}"/>
               </a:ext>
             </a:extLst>
           </p:cNvPr>
@@ -19085,7 +18920,7 @@
           <p:cNvPr id="14" name="">
             <a:extLst xmlns:a="http://schemas.openxmlformats.org/drawingml/2006/main">
               <a:ext uri="{FF2B5EF4-FFF2-40B4-BE49-F238E27FC236}">
-                <a16:creationId xmlns:a16="http://schemas.microsoft.com/office/drawing/2014/main" id="{B1820F07-2F3D-4094-BC33-3BB54496C023}"/>
+                <a16:creationId xmlns:a16="http://schemas.microsoft.com/office/drawing/2014/main" id="{A9BD9AAC-728C-486E-B40F-57EAE03228A8}"/>
               </a:ext>
             </a:extLst>
           </p:cNvPr>
@@ -19131,7 +18966,7 @@
                 <a:ea typeface="PingFang SC"/>
                 <a:cs typeface="PingFang SC"/>
               </a:rPr>
-              <a:t>AI 生成 V5 实现</a:t>
+              <a:t>AI 生成 V5 代码</a:t>
             </a:r>
           </a:p>
         </p:txBody>
@@ -19141,7 +18976,7 @@
           <p:cNvPr id="15" name="">
             <a:extLst xmlns:a="http://schemas.openxmlformats.org/drawingml/2006/main">
               <a:ext uri="{FF2B5EF4-FFF2-40B4-BE49-F238E27FC236}">
-                <a16:creationId xmlns:a16="http://schemas.microsoft.com/office/drawing/2014/main" id="{135B60BE-B84B-4670-8672-57B81206E13D}"/>
+                <a16:creationId xmlns:a16="http://schemas.microsoft.com/office/drawing/2014/main" id="{19ADACA8-E4F6-4C9F-BCC8-115C3A6AE25A}"/>
               </a:ext>
             </a:extLst>
           </p:cNvPr>
@@ -19197,7 +19032,7 @@
           <p:cNvPr id="16" name="">
             <a:extLst xmlns:a="http://schemas.openxmlformats.org/drawingml/2006/main">
               <a:ext uri="{FF2B5EF4-FFF2-40B4-BE49-F238E27FC236}">
-                <a16:creationId xmlns:a16="http://schemas.microsoft.com/office/drawing/2014/main" id="{68F717C1-317C-4C8A-9B5A-2ADDAB298F57}"/>
+                <a16:creationId xmlns:a16="http://schemas.microsoft.com/office/drawing/2014/main" id="{D36EE778-C992-4EEA-9714-06721A0A4278}"/>
               </a:ext>
             </a:extLst>
           </p:cNvPr>
@@ -19231,7 +19066,7 @@
           <p:cNvPr id="17" name="">
             <a:extLst xmlns:a="http://schemas.openxmlformats.org/drawingml/2006/main">
               <a:ext uri="{FF2B5EF4-FFF2-40B4-BE49-F238E27FC236}">
-                <a16:creationId xmlns:a16="http://schemas.microsoft.com/office/drawing/2014/main" id="{6D96C7B8-82E0-4DC2-A532-E8724B0EB94A}"/>
+                <a16:creationId xmlns:a16="http://schemas.microsoft.com/office/drawing/2014/main" id="{F48C388D-D562-414D-833B-60D595A1E44A}"/>
               </a:ext>
             </a:extLst>
           </p:cNvPr>
@@ -19287,7 +19122,7 @@
           <p:cNvPr id="18" name="">
             <a:extLst xmlns:a="http://schemas.openxmlformats.org/drawingml/2006/main">
               <a:ext uri="{FF2B5EF4-FFF2-40B4-BE49-F238E27FC236}">
-                <a16:creationId xmlns:a16="http://schemas.microsoft.com/office/drawing/2014/main" id="{D7B0D216-319F-4F73-AA12-5E7B1F15B59B}"/>
+                <a16:creationId xmlns:a16="http://schemas.microsoft.com/office/drawing/2014/main" id="{16BEC84C-9505-4B96-86CD-F668390A6A01}"/>
               </a:ext>
             </a:extLst>
           </p:cNvPr>
@@ -19343,7 +19178,7 @@
           <p:cNvPr id="19" name="">
             <a:extLst xmlns:a="http://schemas.openxmlformats.org/drawingml/2006/main">
               <a:ext uri="{FF2B5EF4-FFF2-40B4-BE49-F238E27FC236}">
-                <a16:creationId xmlns:a16="http://schemas.microsoft.com/office/drawing/2014/main" id="{7AAA76C7-CCD8-4278-8A44-FA5823E36D37}"/>
+                <a16:creationId xmlns:a16="http://schemas.microsoft.com/office/drawing/2014/main" id="{D0EEA940-C0C9-4E74-8C58-190CD498E9F0}"/>
               </a:ext>
             </a:extLst>
           </p:cNvPr>
@@ -19377,7 +19212,7 @@
           <p:cNvPr id="20" name="">
             <a:extLst xmlns:a="http://schemas.openxmlformats.org/drawingml/2006/main">
               <a:ext uri="{FF2B5EF4-FFF2-40B4-BE49-F238E27FC236}">
-                <a16:creationId xmlns:a16="http://schemas.microsoft.com/office/drawing/2014/main" id="{AFE2BD16-D1D3-4C7A-B6E5-950B3D5CF535}"/>
+                <a16:creationId xmlns:a16="http://schemas.microsoft.com/office/drawing/2014/main" id="{4C819045-11FC-4336-9F7B-49A2BF7568A2}"/>
               </a:ext>
             </a:extLst>
           </p:cNvPr>
@@ -19433,7 +19268,7 @@
           <p:cNvPr id="21" name="">
             <a:extLst xmlns:a="http://schemas.openxmlformats.org/drawingml/2006/main">
               <a:ext uri="{FF2B5EF4-FFF2-40B4-BE49-F238E27FC236}">
-                <a16:creationId xmlns:a16="http://schemas.microsoft.com/office/drawing/2014/main" id="{6C35FDAA-FCA6-458D-9ABD-6D63692295AB}"/>
+                <a16:creationId xmlns:a16="http://schemas.microsoft.com/office/drawing/2014/main" id="{838AE385-64B6-445A-B28B-66572C6839DC}"/>
               </a:ext>
             </a:extLst>
           </p:cNvPr>
@@ -19467,7 +19302,7 @@
           <p:cNvPr id="22" name="">
             <a:extLst xmlns:a="http://schemas.openxmlformats.org/drawingml/2006/main">
               <a:ext uri="{FF2B5EF4-FFF2-40B4-BE49-F238E27FC236}">
-                <a16:creationId xmlns:a16="http://schemas.microsoft.com/office/drawing/2014/main" id="{179CDBE2-6FAB-4249-BFEA-71F5EA88E109}"/>
+                <a16:creationId xmlns:a16="http://schemas.microsoft.com/office/drawing/2014/main" id="{4B7C53DC-EEDD-438F-A2DC-57A2AF3F7BE8}"/>
               </a:ext>
             </a:extLst>
           </p:cNvPr>
@@ -19513,7 +19348,7 @@
                 <a:ea typeface="Menlo"/>
                 <a:cs typeface="Menlo"/>
               </a:rPr>
-              <a:t>2.0 天</a:t>
+              <a:t>5.0 天</a:t>
             </a:r>
           </a:p>
         </p:txBody>
@@ -19523,7 +19358,7 @@
           <p:cNvPr id="23" name="">
             <a:extLst xmlns:a="http://schemas.openxmlformats.org/drawingml/2006/main">
               <a:ext uri="{FF2B5EF4-FFF2-40B4-BE49-F238E27FC236}">
-                <a16:creationId xmlns:a16="http://schemas.microsoft.com/office/drawing/2014/main" id="{B1529BD9-6294-4760-89A9-EF5D0A15F967}"/>
+                <a16:creationId xmlns:a16="http://schemas.microsoft.com/office/drawing/2014/main" id="{66A75911-3D05-4715-93CB-F531C2705B7F}"/>
               </a:ext>
             </a:extLst>
           </p:cNvPr>
@@ -19579,7 +19414,7 @@
           <p:cNvPr id="24" name="">
             <a:extLst xmlns:a="http://schemas.openxmlformats.org/drawingml/2006/main">
               <a:ext uri="{FF2B5EF4-FFF2-40B4-BE49-F238E27FC236}">
-                <a16:creationId xmlns:a16="http://schemas.microsoft.com/office/drawing/2014/main" id="{752DA1B3-3A48-4276-814F-6510054C9141}"/>
+                <a16:creationId xmlns:a16="http://schemas.microsoft.com/office/drawing/2014/main" id="{558C96A9-BF36-4BAC-8E60-1D564E9E51DA}"/>
               </a:ext>
             </a:extLst>
           </p:cNvPr>
@@ -19625,7 +19460,7 @@
                 <a:ea typeface="Menlo"/>
                 <a:cs typeface="Menlo"/>
               </a:rPr>
-              <a:t>0.5 天</a:t>
+              <a:t>2.0 天</a:t>
             </a:r>
           </a:p>
         </p:txBody>
@@ -19635,7 +19470,7 @@
           <p:cNvPr id="25" name="">
             <a:extLst xmlns:a="http://schemas.openxmlformats.org/drawingml/2006/main">
               <a:ext uri="{FF2B5EF4-FFF2-40B4-BE49-F238E27FC236}">
-                <a16:creationId xmlns:a16="http://schemas.microsoft.com/office/drawing/2014/main" id="{473228A3-782E-40CA-9D09-FBAB90B7B6D2}"/>
+                <a16:creationId xmlns:a16="http://schemas.microsoft.com/office/drawing/2014/main" id="{72795917-E6BA-4142-AA55-A8D80CBB1710}"/>
               </a:ext>
             </a:extLst>
           </p:cNvPr>
@@ -19658,7 +19493,7 @@
         </p:spPr>
         <p:txBody>
           <a:bodyPr xmlns:a="http://schemas.openxmlformats.org/drawingml/2006/main" lIns="0" tIns="0" rIns="0" bIns="0" anchor="t">
-            <a:normAutofit fontScale="89744"/>
+            <a:normAutofit fontScale="100000"/>
           </a:bodyPr>
           <a:lstStyle xmlns:a="http://schemas.openxmlformats.org/drawingml/2006/main"/>
           <a:p xmlns:a="http://schemas.openxmlformats.org/drawingml/2006/main">
@@ -19681,7 +19516,7 @@
                 <a:ea typeface="PingFang SC"/>
                 <a:cs typeface="PingFang SC"/>
               </a:rPr>
-              <a:t>以 Type8 / Type11 / Type12 移植试点为例，正式汇报需标注样本口径。</a:t>
+              <a:t>以 Type8 / Type11 / Type12 移植试点为例。</a:t>
             </a:r>
           </a:p>
         </p:txBody>
@@ -19691,7 +19526,7 @@
           <p:cNvPr id="26" name="">
             <a:extLst xmlns:a="http://schemas.openxmlformats.org/drawingml/2006/main">
               <a:ext uri="{FF2B5EF4-FFF2-40B4-BE49-F238E27FC236}">
-                <a16:creationId xmlns:a16="http://schemas.microsoft.com/office/drawing/2014/main" id="{C11A06D5-729C-47FD-90B3-03C56CC63173}"/>
+                <a16:creationId xmlns:a16="http://schemas.microsoft.com/office/drawing/2014/main" id="{FF6C8699-FBC7-457A-9ABF-BB4DA22D34D3}"/>
               </a:ext>
             </a:extLst>
           </p:cNvPr>
@@ -19723,7 +19558,7 @@
           <p:cNvPr id="27" name="">
             <a:extLst xmlns:a="http://schemas.openxmlformats.org/drawingml/2006/main">
               <a:ext uri="{FF2B5EF4-FFF2-40B4-BE49-F238E27FC236}">
-                <a16:creationId xmlns:a16="http://schemas.microsoft.com/office/drawing/2014/main" id="{DFCA74F0-5B64-462A-88BA-6795F201B426}"/>
+                <a16:creationId xmlns:a16="http://schemas.microsoft.com/office/drawing/2014/main" id="{E56368B0-BF3A-4AF0-ADD3-0B2528CD0CA5}"/>
               </a:ext>
             </a:extLst>
           </p:cNvPr>
@@ -19779,7 +19614,7 @@
           <p:cNvPr id="28" name="">
             <a:extLst xmlns:a="http://schemas.openxmlformats.org/drawingml/2006/main">
               <a:ext uri="{FF2B5EF4-FFF2-40B4-BE49-F238E27FC236}">
-                <a16:creationId xmlns:a16="http://schemas.microsoft.com/office/drawing/2014/main" id="{CCD3416F-5793-4E12-B3BC-F4804A2C68BC}"/>
+                <a16:creationId xmlns:a16="http://schemas.microsoft.com/office/drawing/2014/main" id="{C0728A0B-54D9-469E-8406-AC5AEEE4D07F}"/>
               </a:ext>
             </a:extLst>
           </p:cNvPr>
@@ -19811,7 +19646,7 @@
           <p:cNvPr id="29" name="">
             <a:extLst xmlns:a="http://schemas.openxmlformats.org/drawingml/2006/main">
               <a:ext uri="{FF2B5EF4-FFF2-40B4-BE49-F238E27FC236}">
-                <a16:creationId xmlns:a16="http://schemas.microsoft.com/office/drawing/2014/main" id="{5D3408DF-1245-4194-BD74-F7F75DF29C4C}"/>
+                <a16:creationId xmlns:a16="http://schemas.microsoft.com/office/drawing/2014/main" id="{87764DA6-CAF5-4388-B938-D66171E05755}"/>
               </a:ext>
             </a:extLst>
           </p:cNvPr>
@@ -19867,7 +19702,7 @@
           <p:cNvPr id="30" name="">
             <a:extLst xmlns:a="http://schemas.openxmlformats.org/drawingml/2006/main">
               <a:ext uri="{FF2B5EF4-FFF2-40B4-BE49-F238E27FC236}">
-                <a16:creationId xmlns:a16="http://schemas.microsoft.com/office/drawing/2014/main" id="{9FE55038-9DC8-4D75-98AA-5D17A5D9EF63}"/>
+                <a16:creationId xmlns:a16="http://schemas.microsoft.com/office/drawing/2014/main" id="{8F6EEDDA-A776-4ADF-93DD-2699CD67569D}"/>
               </a:ext>
             </a:extLst>
           </p:cNvPr>
@@ -19899,7 +19734,7 @@
           <p:cNvPr id="31" name="">
             <a:extLst xmlns:a="http://schemas.openxmlformats.org/drawingml/2006/main">
               <a:ext uri="{FF2B5EF4-FFF2-40B4-BE49-F238E27FC236}">
-                <a16:creationId xmlns:a16="http://schemas.microsoft.com/office/drawing/2014/main" id="{F12016B9-6063-432E-ADAF-A7AF9793DE56}"/>
+                <a16:creationId xmlns:a16="http://schemas.microsoft.com/office/drawing/2014/main" id="{C419AED0-9509-486E-90EF-B63CD5537788}"/>
               </a:ext>
             </a:extLst>
           </p:cNvPr>
@@ -19959,7 +19794,7 @@
           <p:nvPr/>
         </p:nvPicPr>
         <p:blipFill>
-          <a:blip xmlns:r="http://schemas.openxmlformats.org/officeDocument/2006/relationships" xmlns:a="http://schemas.openxmlformats.org/drawingml/2006/main" r:embed="R7e711d70fc7e41d0"/>
+          <a:blip xmlns:r="http://schemas.openxmlformats.org/officeDocument/2006/relationships" xmlns:a="http://schemas.openxmlformats.org/drawingml/2006/main" r:embed="Rffc76aa5679a4f4b"/>
           <a:stretch xmlns:a="http://schemas.openxmlformats.org/drawingml/2006/main"/>
         </p:blipFill>
         <p:spPr>
@@ -19977,7 +19812,7 @@
           <p:cNvPr id="33" name="">
             <a:extLst xmlns:a="http://schemas.openxmlformats.org/drawingml/2006/main">
               <a:ext uri="{FF2B5EF4-FFF2-40B4-BE49-F238E27FC236}">
-                <a16:creationId xmlns:a16="http://schemas.microsoft.com/office/drawing/2014/main" id="{FC0506BE-4F2B-4846-8C85-0BFB15BCC365}"/>
+                <a16:creationId xmlns:a16="http://schemas.microsoft.com/office/drawing/2014/main" id="{13D9F288-3161-4A33-A024-80994D136565}"/>
               </a:ext>
             </a:extLst>
           </p:cNvPr>
@@ -20037,7 +19872,7 @@
           <p:nvPr/>
         </p:nvPicPr>
         <p:blipFill>
-          <a:blip xmlns:r="http://schemas.openxmlformats.org/officeDocument/2006/relationships" xmlns:a="http://schemas.openxmlformats.org/drawingml/2006/main" r:embed="R4d5bcb2e714a4cd9"/>
+          <a:blip xmlns:r="http://schemas.openxmlformats.org/officeDocument/2006/relationships" xmlns:a="http://schemas.openxmlformats.org/drawingml/2006/main" r:embed="Ra6dfff85c5384365"/>
           <a:stretch xmlns:a="http://schemas.openxmlformats.org/drawingml/2006/main"/>
         </p:blipFill>
         <p:spPr>
@@ -20055,7 +19890,7 @@
           <p:cNvPr id="35" name="">
             <a:extLst xmlns:a="http://schemas.openxmlformats.org/drawingml/2006/main">
               <a:ext uri="{FF2B5EF4-FFF2-40B4-BE49-F238E27FC236}">
-                <a16:creationId xmlns:a16="http://schemas.microsoft.com/office/drawing/2014/main" id="{8A65CBFA-F1DF-45B9-A468-5AC75DB7D633}"/>
+                <a16:creationId xmlns:a16="http://schemas.microsoft.com/office/drawing/2014/main" id="{5AE63888-DEC3-42FD-87BD-DBB5FAF505A3}"/>
               </a:ext>
             </a:extLst>
           </p:cNvPr>
@@ -20109,7 +19944,7 @@
     </p:spTree>
     <p:extLst>
       <p:ext uri="{BB962C8B-B14F-4D97-AF65-F5344CB8AC3E}">
-        <p14:creationId xmlns:p14="http://schemas.microsoft.com/office/powerpoint/2010/main" val="1742453660"/>
+        <p14:creationId xmlns:p14="http://schemas.microsoft.com/office/powerpoint/2010/main" val="929096469"/>
       </p:ext>
     </p:extLst>
   </p:cSld>
